--- a/Arquitectura de Sistemas Computacionales/Clases/Clase 15 - Presentacion del proyecto y cierre/Presentacion.pptx
+++ b/Arquitectura de Sistemas Computacionales/Clases/Clase 15 - Presentacion del proyecto y cierre/Presentacion.pptx
@@ -18,6 +18,19 @@
     <p:sldId id="266" r:id="rId17"/>
     <p:sldId id="267" r:id="rId18"/>
     <p:sldId id="268" r:id="rId19"/>
+    <p:sldId id="269" r:id="rId20"/>
+    <p:sldId id="270" r:id="rId21"/>
+    <p:sldId id="271" r:id="rId22"/>
+    <p:sldId id="272" r:id="rId23"/>
+    <p:sldId id="273" r:id="rId24"/>
+    <p:sldId id="274" r:id="rId25"/>
+    <p:sldId id="275" r:id="rId26"/>
+    <p:sldId id="276" r:id="rId27"/>
+    <p:sldId id="277" r:id="rId28"/>
+    <p:sldId id="278" r:id="rId29"/>
+    <p:sldId id="279" r:id="rId30"/>
+    <p:sldId id="280" r:id="rId31"/>
+    <p:sldId id="281" r:id="rId32"/>
   </p:sldIdLst>
   <p:sldSz cx="12191695" cy="6858000" type="screen4x3"/>
   <p:notesSz cx="6858000" cy="9144000"/>
@@ -3630,7 +3643,7 @@
                 </a:solidFill>
                 <a:latin typeface="Calibri"/>
               </a:rPr>
-              <a:t>PI CloudLite — entregable de hoy</a:t>
+              <a:t>El ADR: el artefacto que sostiene la tercera capa (1/2)</a:t>
             </a:r>
           </a:p>
         </p:txBody>
@@ -3669,25 +3682,7 @@
                 </a:solidFill>
                 <a:latin typeface="Calibri"/>
               </a:rPr>
-              <a:t>–   </a:t>
-            </a:r>
-            <a:r>
-              <a:rPr sz="2000" b="1" i="0">
-                <a:solidFill>
-                  <a:srgbClr val="333333"/>
-                </a:solidFill>
-                <a:latin typeface="Calibri"/>
-              </a:rPr>
-              <a:t>Entregable:</a:t>
-            </a:r>
-            <a:r>
-              <a:rPr sz="2000" b="0" i="0">
-                <a:solidFill>
-                  <a:srgbClr val="333333"/>
-                </a:solidFill>
-                <a:latin typeface="Calibri"/>
-              </a:rPr>
-              <a:t> Paquete final en la plataforma del curso (módulo Proyectos) + pitch de 5–8 min sustentado hoy en clase + Q&amp;A</a:t>
+              <a:t>–   El artefacto que sostiene esa tercera capa es el ADR, o Architecture Decision Record: un documento corto, de una pagina como maximo</a:t>
             </a:r>
           </a:p>
           <a:p>
@@ -3703,16 +3698,7 @@
                 </a:solidFill>
                 <a:latin typeface="Calibri"/>
               </a:rPr>
-              <a:t>–   Herramienta: </a:t>
-            </a:r>
-            <a:r>
-              <a:rPr sz="2000" b="1" i="0">
-                <a:solidFill>
-                  <a:srgbClr val="333333"/>
-                </a:solidFill>
-                <a:latin typeface="Calibri"/>
-              </a:rPr>
-              <a:t>Google Docs/Slides · diagramas · capturas lab</a:t>
+              <a:t>–   Que registra UNA sola decision con las seis secciones rotuladas que el curso fijo en la Clase 2 y que no han cambiado desde entonces.</a:t>
             </a:r>
           </a:p>
           <a:p>
@@ -3728,25 +3714,7 @@
                 </a:solidFill>
                 <a:latin typeface="Calibri"/>
               </a:rPr>
-              <a:t>–   Hoy no se construye: se </a:t>
-            </a:r>
-            <a:r>
-              <a:rPr sz="2000" b="1" i="0">
-                <a:solidFill>
-                  <a:srgbClr val="333333"/>
-                </a:solidFill>
-                <a:latin typeface="Calibri"/>
-              </a:rPr>
-              <a:t>defiende</a:t>
-            </a:r>
-            <a:r>
-              <a:rPr sz="2000" b="0" i="0">
-                <a:solidFill>
-                  <a:srgbClr val="333333"/>
-                </a:solidFill>
-                <a:latin typeface="Calibri"/>
-              </a:rPr>
-              <a:t> lo que ya está en el paquete del PI.</a:t>
+              <a:t>–   Titulo, con el numero consecutivo, que es justamente por lo que se cita.</a:t>
             </a:r>
           </a:p>
           <a:p>
@@ -3762,7 +3730,71 @@
                 </a:solidFill>
                 <a:latin typeface="Calibri"/>
               </a:rPr>
-              <a:t>–   Individual por defecto · el docente puede autorizar equipos de 2–3; la entrega en la plataforma del curso siempre es individual.</a:t>
+              <a:t>–   Estado, «Aceptado» mas la fecha en que se decidio.</a:t>
+            </a:r>
+          </a:p>
+          <a:p>
+            <a:pPr>
+              <a:spcAft>
+                <a:spcPts val="800"/>
+              </a:spcAft>
+            </a:pPr>
+            <a:r>
+              <a:rPr sz="2000" b="0" i="0">
+                <a:solidFill>
+                  <a:srgbClr val="333333"/>
+                </a:solidFill>
+                <a:latin typeface="Calibri"/>
+              </a:rPr>
+              <a:t>–   Contexto, es decir que problema se estaba resolviendo y con que restricciones.</a:t>
+            </a:r>
+          </a:p>
+          <a:p>
+            <a:pPr>
+              <a:spcAft>
+                <a:spcPts val="800"/>
+              </a:spcAft>
+            </a:pPr>
+            <a:r>
+              <a:rPr sz="2000" b="0" i="0">
+                <a:solidFill>
+                  <a:srgbClr val="333333"/>
+                </a:solidFill>
+                <a:latin typeface="Calibri"/>
+              </a:rPr>
+              <a:t>–   Decision, en una frase afirmativa y en presente.</a:t>
+            </a:r>
+          </a:p>
+          <a:p>
+            <a:pPr>
+              <a:spcAft>
+                <a:spcPts val="800"/>
+              </a:spcAft>
+            </a:pPr>
+            <a:r>
+              <a:rPr sz="2000" b="0" i="0">
+                <a:solidFill>
+                  <a:srgbClr val="333333"/>
+                </a:solidFill>
+                <a:latin typeface="Calibri"/>
+              </a:rPr>
+              <a:t>–   Alternativas descartadas, exactamente dos, cada una con la razon concreta del descarte.</a:t>
+            </a:r>
+          </a:p>
+          <a:p>
+            <a:pPr>
+              <a:spcAft>
+                <a:spcPts val="800"/>
+              </a:spcAft>
+            </a:pPr>
+            <a:r>
+              <a:rPr sz="2000" b="0" i="0">
+                <a:solidFill>
+                  <a:srgbClr val="333333"/>
+                </a:solidFill>
+                <a:latin typeface="Calibri"/>
+              </a:rPr>
+              <a:t>–   Y consecuencias, donde se escribe lo bueno, lo malo y lo neutro que se acepta.</a:t>
             </a:r>
           </a:p>
         </p:txBody>
@@ -3943,7 +3975,7 @@
                 </a:solidFill>
                 <a:latin typeface="Calibri"/>
               </a:rPr>
-              <a:t>Sustentación (paso a paso)</a:t>
+              <a:t>El ADR: el artefacto que sostiene la tercera capa (2/2)</a:t>
             </a:r>
           </a:p>
         </p:txBody>
@@ -3976,22 +4008,13 @@
               </a:spcAft>
             </a:pPr>
             <a:r>
-              <a:rPr sz="1700" b="1" i="0">
-                <a:solidFill>
-                  <a:srgbClr val="333333"/>
-                </a:solidFill>
-                <a:latin typeface="Calibri"/>
-              </a:rPr>
-              <a:t>1.</a:t>
-            </a:r>
-            <a:r>
-              <a:rPr sz="1700" b="0" i="0">
-                <a:solidFill>
-                  <a:srgbClr val="333333"/>
-                </a:solidFill>
-                <a:latin typeface="Calibri"/>
-              </a:rPr>
-              <a:t> Paso 1: armen el paquete final y llenen el indice de 8 filas con entregable, nombre de archivo, ruta dentro del paquete y estado, verificando que los 8 archivos abran desde una maquina distinta a la del autor y que ningun nombre de archivo tenga espacios ni tildes que rompan la descarga.</a:t>
+              <a:rPr sz="2000" b="0" i="0">
+                <a:solidFill>
+                  <a:srgbClr val="333333"/>
+                </a:solidFill>
+                <a:latin typeface="Calibri"/>
+              </a:rPr>
+              <a:t>–   Los estudiantes ya produjeron el ADR-001 en la Clase 2, cuando decidieron el modelo de servicio dominante entre IaaS, PaaS y SaaS</a:t>
             </a:r>
           </a:p>
           <a:p>
@@ -4001,31 +4024,13 @@
               </a:spcAft>
             </a:pPr>
             <a:r>
-              <a:rPr sz="1700" b="0" i="0">
-                <a:solidFill>
-                  <a:srgbClr val="333333"/>
-                </a:solidFill>
-                <a:latin typeface="Calibri"/>
-              </a:rPr>
-              <a:t>–   </a:t>
-            </a:r>
-            <a:r>
-              <a:rPr sz="1700" b="1" i="0">
-                <a:solidFill>
-                  <a:srgbClr val="333333"/>
-                </a:solidFill>
-                <a:latin typeface="Calibri"/>
-              </a:rPr>
-              <a:t>2.</a:t>
-            </a:r>
-            <a:r>
-              <a:rPr sz="1700" b="0" i="0">
-                <a:solidFill>
-                  <a:srgbClr val="333333"/>
-                </a:solidFill>
-                <a:latin typeface="Calibri"/>
-              </a:rPr>
-              <a:t> Paso 2: escriban en la plataforma del curso la lamina unica de arquitectura en Mermaid con las 3 zonas, los 5 contenedores, el edge, la cadena de entrega y los sistemas externos, verificando al renderizar que sea legible en una sola pantalla sin desplazamiento y que use los mismos nombres canonicos del paquete, porque esta es la lamina que van a proyectar en la sustentacion.</a:t>
+              <a:rPr sz="2000" b="0" i="0">
+                <a:solidFill>
+                  <a:srgbClr val="333333"/>
+                </a:solidFill>
+                <a:latin typeface="Calibri"/>
+              </a:rPr>
+              <a:t>–   A lo largo del curso debieron acumular tres o cuatro mas: contenedores frente a maquinas virtuales (Clase 3), donde poner la frontera entre servicios (Clase 4), y que se escala y que no (Clase 13).</a:t>
             </a:r>
           </a:p>
           <a:p>
@@ -4035,31 +4040,13 @@
               </a:spcAft>
             </a:pPr>
             <a:r>
-              <a:rPr sz="1700" b="0" i="0">
-                <a:solidFill>
-                  <a:srgbClr val="333333"/>
-                </a:solidFill>
-                <a:latin typeface="Calibri"/>
-              </a:rPr>
-              <a:t>–   </a:t>
-            </a:r>
-            <a:r>
-              <a:rPr sz="1700" b="1" i="0">
-                <a:solidFill>
-                  <a:srgbClr val="333333"/>
-                </a:solidFill>
-                <a:latin typeface="Calibri"/>
-              </a:rPr>
-              <a:t>3.</a:t>
-            </a:r>
-            <a:r>
-              <a:rPr sz="1700" b="0" i="0">
-                <a:solidFill>
-                  <a:srgbClr val="333333"/>
-                </a:solidFill>
-                <a:latin typeface="Calibri"/>
-              </a:rPr>
-              <a:t> Paso 3: redacten el Q and A escrito con 3 preguntas duras que el jurado podria hacer, una de decision de arquitectura, una de seguridad y una de escala o rendimiento, cada una con respuesta de maximo 4 lineas que cite la evidencia del paquete, verificando que ninguna respuesta sea no lo alcanzamos a hacer sin nombrar la decision consciente que tomaron.</a:t>
+              <a:rPr sz="2000" b="0" i="0">
+                <a:solidFill>
+                  <a:srgbClr val="333333"/>
+                </a:solidFill>
+                <a:latin typeface="Calibri"/>
+              </a:rPr>
+              <a:t>–   En la sustentacion el ADR no se lee en voz alta: se cita.</a:t>
             </a:r>
           </a:p>
           <a:p>
@@ -4069,31 +4056,13 @@
               </a:spcAft>
             </a:pPr>
             <a:r>
-              <a:rPr sz="1700" b="0" i="0">
-                <a:solidFill>
-                  <a:srgbClr val="333333"/>
-                </a:solidFill>
-                <a:latin typeface="Calibri"/>
-              </a:rPr>
-              <a:t>–   </a:t>
-            </a:r>
-            <a:r>
-              <a:rPr sz="1700" b="1" i="0">
-                <a:solidFill>
-                  <a:srgbClr val="333333"/>
-                </a:solidFill>
-                <a:latin typeface="Calibri"/>
-              </a:rPr>
-              <a:t>4.</a:t>
-            </a:r>
-            <a:r>
-              <a:rPr sz="1700" b="0" i="0">
-                <a:solidFill>
-                  <a:srgbClr val="333333"/>
-                </a:solidFill>
-                <a:latin typeface="Calibri"/>
-              </a:rPr>
-              <a:t> Paso 4: ensayen el pitch con cronometro ANTES de la sesion y registren la tabla de tiempos reales por seccion con quien hablo en cada una, verificando que el tiempo total quede entre 5 y 8 minutos; la sustentacion se hace EN VIVO en la sesion de clase, con preguntas del docente al cierre, no con un video grabado.</a:t>
+              <a:rPr sz="2000" b="0" i="0">
+                <a:solidFill>
+                  <a:srgbClr val="333333"/>
+                </a:solidFill>
+                <a:latin typeface="Calibri"/>
+              </a:rPr>
+              <a:t>–   La forma profesional es «esta decision esta registrada en el ADR-002, y el trade-off que aceptamos fue perder portabilidad entre proveedores», con el numero del ADR visible en la diapositiva.</a:t>
             </a:r>
           </a:p>
           <a:p>
@@ -4103,31 +4072,13 @@
               </a:spcAft>
             </a:pPr>
             <a:r>
-              <a:rPr sz="1700" b="0" i="0">
-                <a:solidFill>
-                  <a:srgbClr val="333333"/>
-                </a:solidFill>
-                <a:latin typeface="Calibri"/>
-              </a:rPr>
-              <a:t>–   </a:t>
-            </a:r>
-            <a:r>
-              <a:rPr sz="1700" b="1" i="0">
-                <a:solidFill>
-                  <a:srgbClr val="333333"/>
-                </a:solidFill>
-                <a:latin typeface="Calibri"/>
-              </a:rPr>
-              <a:t>5.</a:t>
-            </a:r>
-            <a:r>
-              <a:rPr sz="1700" b="0" i="0">
-                <a:solidFill>
-                  <a:srgbClr val="333333"/>
-                </a:solidFill>
-                <a:latin typeface="Calibri"/>
-              </a:rPr>
-              <a:t> Paso 5: escriban la reflexion de media pagina sobre el trade-off mas difícil y suban el paquete final completo mas las 5 preguntas a la plataforma del curso (modulo Proyectos) ANTES de su turno de sustentacion, verificando que el informe, los diagramas, la evidencia del lab, el ci.yml y la presentacion esten los cinco dentro del mismo paquete.</a:t>
+              <a:rPr sz="2000" b="0" i="0">
+                <a:solidFill>
+                  <a:srgbClr val="333333"/>
+                </a:solidFill>
+                <a:latin typeface="Calibri"/>
+              </a:rPr>
+              <a:t>–   Citar un ADR por numero le dice al evaluador que existe una traza escrita y verificable, no una improvisacion del momento; es la diferencia entre quien decidio y quien recuerda.</a:t>
             </a:r>
           </a:p>
         </p:txBody>
@@ -4308,109 +4259,21 @@
                 </a:solidFill>
                 <a:latin typeface="Calibri"/>
               </a:rPr>
-              <a:t>Para continuar (PI)</a:t>
-            </a:r>
-          </a:p>
-        </p:txBody>
-      </p:sp>
-      <p:sp>
-        <p:nvSpPr>
-          <p:cNvPr id="5" name="Rounded Rectangle 4"/>
-          <p:cNvSpPr/>
-          <p:nvPr/>
-        </p:nvSpPr>
-        <p:spPr>
-          <a:xfrm>
-            <a:off x="457200" y="1261872"/>
-            <a:ext cx="11277295" cy="1051560"/>
-          </a:xfrm>
-          <a:prstGeom prst="roundRect">
-            <a:avLst>
-              <a:gd name="adj" fmla="val 12000"/>
-            </a:avLst>
-          </a:prstGeom>
-          <a:solidFill>
-            <a:srgbClr val="E8F4FA"/>
-          </a:solidFill>
-          <a:ln>
-            <a:noFill/>
-          </a:ln>
-        </p:spPr>
-        <p:style>
-          <a:lnRef idx="1">
-            <a:schemeClr val="accent1"/>
-          </a:lnRef>
-          <a:fillRef idx="3">
-            <a:schemeClr val="accent1"/>
-          </a:fillRef>
-          <a:effectRef idx="2">
-            <a:schemeClr val="accent1"/>
-          </a:effectRef>
-          <a:fontRef idx="minor">
-            <a:schemeClr val="lt1"/>
-          </a:fontRef>
-        </p:style>
-        <p:txBody>
-          <a:bodyPr rtlCol="0" anchor="ctr"/>
-          <a:lstStyle/>
-          <a:p>
-            <a:pPr algn="ctr"/>
-          </a:p>
-        </p:txBody>
-      </p:sp>
-      <p:sp>
-        <p:nvSpPr>
-          <p:cNvPr id="6" name="Rectangle 5"/>
-          <p:cNvSpPr/>
-          <p:nvPr/>
-        </p:nvSpPr>
-        <p:spPr>
-          <a:xfrm>
-            <a:off x="457200" y="1261872"/>
-            <a:ext cx="128016" cy="1051560"/>
-          </a:xfrm>
-          <a:prstGeom prst="rect">
-            <a:avLst/>
-          </a:prstGeom>
-          <a:solidFill>
-            <a:srgbClr val="269CCB"/>
-          </a:solidFill>
-          <a:ln>
-            <a:noFill/>
-          </a:ln>
-        </p:spPr>
-        <p:style>
-          <a:lnRef idx="1">
-            <a:schemeClr val="accent1"/>
-          </a:lnRef>
-          <a:fillRef idx="3">
-            <a:schemeClr val="accent1"/>
-          </a:fillRef>
-          <a:effectRef idx="2">
-            <a:schemeClr val="accent1"/>
-          </a:effectRef>
-          <a:fontRef idx="minor">
-            <a:schemeClr val="lt1"/>
-          </a:fontRef>
-        </p:style>
-        <p:txBody>
-          <a:bodyPr rtlCol="0" anchor="ctr"/>
-          <a:lstStyle/>
-          <a:p>
-            <a:pPr algn="ctr"/>
-          </a:p>
-        </p:txBody>
-      </p:sp>
-      <p:sp>
-        <p:nvSpPr>
-          <p:cNvPr id="7" name="TextBox 6"/>
+              <a:t>El pitch de 5 a 8 minutos: el reparto que funciona</a:t>
+            </a:r>
+          </a:p>
+        </p:txBody>
+      </p:sp>
+      <p:sp>
+        <p:nvSpPr>
+          <p:cNvPr id="5" name="TextBox 4"/>
           <p:cNvSpPr txBox="1"/>
           <p:nvPr/>
         </p:nvSpPr>
         <p:spPr>
           <a:xfrm>
-            <a:off x="777240" y="1399031"/>
-            <a:ext cx="10774375" cy="822959"/>
+            <a:off x="457200" y="1170432"/>
+            <a:ext cx="11277295" cy="5230368"/>
           </a:xfrm>
           <a:prstGeom prst="rect">
             <a:avLst/>
@@ -4423,349 +4286,122 @@
           </a:bodyPr>
           <a:lstStyle/>
           <a:p>
-            <a:r>
-              <a:rPr sz="1200" b="1" i="0">
-                <a:solidFill>
-                  <a:srgbClr val="269CCB"/>
-                </a:solidFill>
-                <a:latin typeface="Calibri"/>
-              </a:rPr>
-              <a:t>Info</a:t>
-            </a:r>
-          </a:p>
-          <a:p>
             <a:pPr>
-              <a:spcBef>
-                <a:spcPts val="400"/>
-              </a:spcBef>
+              <a:spcAft>
+                <a:spcPts val="800"/>
+              </a:spcAft>
             </a:pPr>
             <a:r>
-              <a:rPr sz="1400" b="0" i="0">
-                <a:solidFill>
-                  <a:srgbClr val="333333"/>
-                </a:solidFill>
-                <a:latin typeface="Calibri"/>
-              </a:rPr>
-              <a:t>Entregable: Paquete final en la plataforma del curso (módulo Proyectos) + pitch de 5–8 min sustentado hoy en clase + Q&amp;A</a:t>
-            </a:r>
-          </a:p>
-        </p:txBody>
-      </p:sp>
-      <p:sp>
-        <p:nvSpPr>
-          <p:cNvPr id="8" name="Rounded Rectangle 7"/>
-          <p:cNvSpPr/>
-          <p:nvPr/>
-        </p:nvSpPr>
-        <p:spPr>
-          <a:xfrm>
-            <a:off x="457200" y="2478024"/>
-            <a:ext cx="11277295" cy="1051560"/>
-          </a:xfrm>
-          <a:prstGeom prst="roundRect">
-            <a:avLst>
-              <a:gd name="adj" fmla="val 12000"/>
-            </a:avLst>
-          </a:prstGeom>
-          <a:solidFill>
-            <a:srgbClr val="FFF8E1"/>
-          </a:solidFill>
-          <a:ln>
-            <a:noFill/>
-          </a:ln>
-        </p:spPr>
-        <p:style>
-          <a:lnRef idx="1">
-            <a:schemeClr val="accent1"/>
-          </a:lnRef>
-          <a:fillRef idx="3">
-            <a:schemeClr val="accent1"/>
-          </a:fillRef>
-          <a:effectRef idx="2">
-            <a:schemeClr val="accent1"/>
-          </a:effectRef>
-          <a:fontRef idx="minor">
-            <a:schemeClr val="lt1"/>
-          </a:fontRef>
-        </p:style>
-        <p:txBody>
-          <a:bodyPr rtlCol="0" anchor="ctr"/>
-          <a:lstStyle/>
-          <a:p>
-            <a:pPr algn="ctr"/>
-          </a:p>
-        </p:txBody>
-      </p:sp>
-      <p:sp>
-        <p:nvSpPr>
-          <p:cNvPr id="9" name="Rectangle 8"/>
-          <p:cNvSpPr/>
-          <p:nvPr/>
-        </p:nvSpPr>
-        <p:spPr>
-          <a:xfrm>
-            <a:off x="457200" y="2478024"/>
-            <a:ext cx="128016" cy="1051560"/>
-          </a:xfrm>
-          <a:prstGeom prst="rect">
-            <a:avLst/>
-          </a:prstGeom>
-          <a:solidFill>
-            <a:srgbClr val="FFD000"/>
-          </a:solidFill>
-          <a:ln>
-            <a:noFill/>
-          </a:ln>
-        </p:spPr>
-        <p:style>
-          <a:lnRef idx="1">
-            <a:schemeClr val="accent1"/>
-          </a:lnRef>
-          <a:fillRef idx="3">
-            <a:schemeClr val="accent1"/>
-          </a:fillRef>
-          <a:effectRef idx="2">
-            <a:schemeClr val="accent1"/>
-          </a:effectRef>
-          <a:fontRef idx="minor">
-            <a:schemeClr val="lt1"/>
-          </a:fontRef>
-        </p:style>
-        <p:txBody>
-          <a:bodyPr rtlCol="0" anchor="ctr"/>
-          <a:lstStyle/>
-          <a:p>
-            <a:pPr algn="ctr"/>
-          </a:p>
-        </p:txBody>
-      </p:sp>
-      <p:sp>
-        <p:nvSpPr>
-          <p:cNvPr id="10" name="TextBox 9"/>
-          <p:cNvSpPr txBox="1"/>
-          <p:nvPr/>
-        </p:nvSpPr>
-        <p:spPr>
-          <a:xfrm>
-            <a:off x="777240" y="2615184"/>
-            <a:ext cx="10774375" cy="822959"/>
-          </a:xfrm>
-          <a:prstGeom prst="rect">
-            <a:avLst/>
-          </a:prstGeom>
-          <a:noFill/>
-        </p:spPr>
-        <p:txBody>
-          <a:bodyPr wrap="square">
-            <a:spAutoFit/>
-          </a:bodyPr>
-          <a:lstStyle/>
-          <a:p>
-            <a:r>
-              <a:rPr sz="1200" b="1" i="0">
-                <a:solidFill>
-                  <a:srgbClr val="FFD000"/>
-                </a:solidFill>
-                <a:latin typeface="Calibri"/>
-              </a:rPr>
-              <a:t>Aclaración</a:t>
+              <a:rPr sz="2000" b="0" i="0">
+                <a:solidFill>
+                  <a:srgbClr val="333333"/>
+                </a:solidFill>
+                <a:latin typeface="Calibri"/>
+              </a:rPr>
+              <a:t>–   Un pitch tecnico de 5 a 8 minutos no se improvisa ni se llena de diapositivas.</a:t>
             </a:r>
           </a:p>
           <a:p>
             <a:pPr>
-              <a:spcBef>
-                <a:spcPts val="400"/>
-              </a:spcBef>
+              <a:spcAft>
+                <a:spcPts val="800"/>
+              </a:spcAft>
             </a:pPr>
             <a:r>
-              <a:rPr sz="1400" b="0" i="0">
-                <a:solidFill>
-                  <a:srgbClr val="333333"/>
-                </a:solidFill>
-                <a:latin typeface="Calibri"/>
-              </a:rPr>
-              <a:t>El paquete se sube a la plataforma del curso </a:t>
-            </a:r>
-            <a:r>
-              <a:rPr sz="1400" b="1" i="0">
-                <a:solidFill>
-                  <a:srgbClr val="333333"/>
-                </a:solidFill>
-                <a:latin typeface="Calibri"/>
-              </a:rPr>
-              <a:t>antes</a:t>
-            </a:r>
-            <a:r>
-              <a:rPr sz="1400" b="0" i="0">
-                <a:solidFill>
-                  <a:srgbClr val="333333"/>
-                </a:solidFill>
-                <a:latin typeface="Calibri"/>
-              </a:rPr>
-              <a:t> del bloque de sustentaciones.</a:t>
-            </a:r>
-          </a:p>
-        </p:txBody>
-      </p:sp>
-      <p:sp>
-        <p:nvSpPr>
-          <p:cNvPr id="11" name="Rounded Rectangle 10"/>
-          <p:cNvSpPr/>
-          <p:nvPr/>
-        </p:nvSpPr>
-        <p:spPr>
-          <a:xfrm>
-            <a:off x="457200" y="3694176"/>
-            <a:ext cx="11277295" cy="1051560"/>
-          </a:xfrm>
-          <a:prstGeom prst="roundRect">
-            <a:avLst>
-              <a:gd name="adj" fmla="val 12000"/>
-            </a:avLst>
-          </a:prstGeom>
-          <a:solidFill>
-            <a:srgbClr val="FBE4E4"/>
-          </a:solidFill>
-          <a:ln>
-            <a:noFill/>
-          </a:ln>
-        </p:spPr>
-        <p:style>
-          <a:lnRef idx="1">
-            <a:schemeClr val="accent1"/>
-          </a:lnRef>
-          <a:fillRef idx="3">
-            <a:schemeClr val="accent1"/>
-          </a:fillRef>
-          <a:effectRef idx="2">
-            <a:schemeClr val="accent1"/>
-          </a:effectRef>
-          <a:fontRef idx="minor">
-            <a:schemeClr val="lt1"/>
-          </a:fontRef>
-        </p:style>
-        <p:txBody>
-          <a:bodyPr rtlCol="0" anchor="ctr"/>
-          <a:lstStyle/>
-          <a:p>
-            <a:pPr algn="ctr"/>
-          </a:p>
-        </p:txBody>
-      </p:sp>
-      <p:sp>
-        <p:nvSpPr>
-          <p:cNvPr id="12" name="Rectangle 11"/>
-          <p:cNvSpPr/>
-          <p:nvPr/>
-        </p:nvSpPr>
-        <p:spPr>
-          <a:xfrm>
-            <a:off x="457200" y="3694176"/>
-            <a:ext cx="128016" cy="1051560"/>
-          </a:xfrm>
-          <a:prstGeom prst="rect">
-            <a:avLst/>
-          </a:prstGeom>
-          <a:solidFill>
-            <a:srgbClr val="A02030"/>
-          </a:solidFill>
-          <a:ln>
-            <a:noFill/>
-          </a:ln>
-        </p:spPr>
-        <p:style>
-          <a:lnRef idx="1">
-            <a:schemeClr val="accent1"/>
-          </a:lnRef>
-          <a:fillRef idx="3">
-            <a:schemeClr val="accent1"/>
-          </a:fillRef>
-          <a:effectRef idx="2">
-            <a:schemeClr val="accent1"/>
-          </a:effectRef>
-          <a:fontRef idx="minor">
-            <a:schemeClr val="lt1"/>
-          </a:fontRef>
-        </p:style>
-        <p:txBody>
-          <a:bodyPr rtlCol="0" anchor="ctr"/>
-          <a:lstStyle/>
-          <a:p>
-            <a:pPr algn="ctr"/>
-          </a:p>
-        </p:txBody>
-      </p:sp>
-      <p:sp>
-        <p:nvSpPr>
-          <p:cNvPr id="13" name="TextBox 12"/>
-          <p:cNvSpPr txBox="1"/>
-          <p:nvPr/>
-        </p:nvSpPr>
-        <p:spPr>
-          <a:xfrm>
-            <a:off x="777240" y="3831336"/>
-            <a:ext cx="10774375" cy="822959"/>
-          </a:xfrm>
-          <a:prstGeom prst="rect">
-            <a:avLst/>
-          </a:prstGeom>
-          <a:noFill/>
-        </p:spPr>
-        <p:txBody>
-          <a:bodyPr wrap="square">
-            <a:spAutoFit/>
-          </a:bodyPr>
-          <a:lstStyle/>
-          <a:p>
-            <a:r>
-              <a:rPr sz="1200" b="1" i="0">
-                <a:solidFill>
-                  <a:srgbClr val="A02030"/>
-                </a:solidFill>
-                <a:latin typeface="Calibri"/>
-              </a:rPr>
-              <a:t>Atención</a:t>
+              <a:rPr sz="2000" b="0" i="0">
+                <a:solidFill>
+                  <a:srgbClr val="333333"/>
+                </a:solidFill>
+                <a:latin typeface="Calibri"/>
+              </a:rPr>
+              <a:t>–   El reparto que funciona, y que es convencion de industria y no regla dura, es el siguiente: 45 a 60 segundos para el problema y el dominio, es decir que hace CloudLite y para quien, sin nombrar una sola tecnologia todavia</a:t>
             </a:r>
           </a:p>
           <a:p>
             <a:pPr>
-              <a:spcBef>
-                <a:spcPts val="400"/>
-              </a:spcBef>
+              <a:spcAft>
+                <a:spcPts val="800"/>
+              </a:spcAft>
             </a:pPr>
             <a:r>
-              <a:rPr sz="1400" b="0" i="0">
-                <a:solidFill>
-                  <a:srgbClr val="333333"/>
-                </a:solidFill>
-                <a:latin typeface="Calibri"/>
-              </a:rPr>
-              <a:t>La sustentación es </a:t>
-            </a:r>
-            <a:r>
-              <a:rPr sz="1400" b="1" i="0">
-                <a:solidFill>
-                  <a:srgbClr val="333333"/>
-                </a:solidFill>
-                <a:latin typeface="Calibri"/>
-              </a:rPr>
-              <a:t>en vivo</a:t>
-            </a:r>
-            <a:r>
-              <a:rPr sz="1400" b="0" i="0">
-                <a:solidFill>
-                  <a:srgbClr val="333333"/>
-                </a:solidFill>
-                <a:latin typeface="Calibri"/>
-              </a:rPr>
-              <a:t> y con Q&amp;A: no se acepta video grabado en su lugar.</a:t>
-            </a:r>
-          </a:p>
-        </p:txBody>
-      </p:sp>
-      <p:sp>
-        <p:nvSpPr>
-          <p:cNvPr id="14" name="TextBox 13"/>
+              <a:rPr sz="2000" b="0" i="0">
+                <a:solidFill>
+                  <a:srgbClr val="333333"/>
+                </a:solidFill>
+                <a:latin typeface="Calibri"/>
+              </a:rPr>
+              <a:t>–   90 segundos para la arquitectura, apoyandose en el diagrama de contexto y el de contenedores</a:t>
+            </a:r>
+          </a:p>
+          <a:p>
+            <a:pPr>
+              <a:spcAft>
+                <a:spcPts val="800"/>
+              </a:spcAft>
+            </a:pPr>
+            <a:r>
+              <a:rPr sz="2000" b="0" i="0">
+                <a:solidFill>
+                  <a:srgbClr val="333333"/>
+                </a:solidFill>
+                <a:latin typeface="Calibri"/>
+              </a:rPr>
+              <a:t>–   90 segundos para la decision principal con su trade-off, citando el ADR; 60 a 90 segundos para la evidencia ejecutable, o sea la captura de la sesion del laboratorio con el contenedor corriendo y el workflow de GitHub Actions en verde</a:t>
+            </a:r>
+          </a:p>
+          <a:p>
+            <a:pPr>
+              <a:spcAft>
+                <a:spcPts val="800"/>
+              </a:spcAft>
+            </a:pPr>
+            <a:r>
+              <a:rPr sz="2000" b="0" i="0">
+                <a:solidFill>
+                  <a:srgbClr val="333333"/>
+                </a:solidFill>
+                <a:latin typeface="Calibri"/>
+              </a:rPr>
+              <a:t>–   45 segundos para el punto debil declarado, lo que no escala o lo que no se midio; y 30 segundos de cierre.</a:t>
+            </a:r>
+          </a:p>
+          <a:p>
+            <a:pPr>
+              <a:spcAft>
+                <a:spcPts val="800"/>
+              </a:spcAft>
+            </a:pPr>
+            <a:r>
+              <a:rPr sz="2000" b="0" i="0">
+                <a:solidFill>
+                  <a:srgbClr val="333333"/>
+                </a:solidFill>
+                <a:latin typeface="Calibri"/>
+              </a:rPr>
+              <a:t>–   La suma queda entre 6 y 7 minutos, con margen para tropiezos.</a:t>
+            </a:r>
+          </a:p>
+          <a:p>
+            <a:pPr>
+              <a:spcAft>
+                <a:spcPts val="800"/>
+              </a:spcAft>
+            </a:pPr>
+            <a:r>
+              <a:rPr sz="2000" b="0" i="0">
+                <a:solidFill>
+                  <a:srgbClr val="333333"/>
+                </a:solidFill>
+                <a:latin typeface="Calibri"/>
+              </a:rPr>
+              <a:t>–   La regla practica de diapositivas es una idea por diapositiva y un maximo de ocho diapositivas para ocho minutos.</a:t>
+            </a:r>
+          </a:p>
+        </p:txBody>
+      </p:sp>
+      <p:sp>
+        <p:nvSpPr>
+          <p:cNvPr id="6" name="TextBox 5"/>
           <p:cNvSpPr txBox="1"/>
           <p:nvPr/>
         </p:nvSpPr>
@@ -4833,13 +4469,13 @@
         <p:spPr>
           <a:xfrm>
             <a:off x="0" y="0"/>
-            <a:ext cx="12191695" cy="164592"/>
+            <a:ext cx="12191695" cy="960120"/>
           </a:xfrm>
           <a:prstGeom prst="rect">
             <a:avLst/>
           </a:prstGeom>
           <a:solidFill>
-            <a:srgbClr val="269CCB"/>
+            <a:srgbClr val="095292"/>
           </a:solidFill>
           <a:ln>
             <a:noFill/>
@@ -4867,30 +4503,49 @@
           </a:p>
         </p:txBody>
       </p:sp>
-      <p:pic>
-        <p:nvPicPr>
-          <p:cNvPr id="3" name="Picture 2" descr="logo_uniajc_color.png"/>
-          <p:cNvPicPr>
-            <a:picLocks noChangeAspect="1"/>
-          </p:cNvPicPr>
-          <p:nvPr/>
-        </p:nvPicPr>
-        <p:blipFill>
-          <a:blip r:embed="rId2"/>
-          <a:stretch>
-            <a:fillRect/>
-          </a:stretch>
-        </p:blipFill>
-        <p:spPr>
-          <a:xfrm>
-            <a:off x="10271455" y="5998464"/>
-            <a:ext cx="1463040" cy="643233"/>
-          </a:xfrm>
-          <a:prstGeom prst="rect">
-            <a:avLst/>
-          </a:prstGeom>
-        </p:spPr>
-      </p:pic>
+      <p:sp>
+        <p:nvSpPr>
+          <p:cNvPr id="3" name="Rectangle 2"/>
+          <p:cNvSpPr/>
+          <p:nvPr/>
+        </p:nvSpPr>
+        <p:spPr>
+          <a:xfrm>
+            <a:off x="0" y="960120"/>
+            <a:ext cx="12191695" cy="41148"/>
+          </a:xfrm>
+          <a:prstGeom prst="rect">
+            <a:avLst/>
+          </a:prstGeom>
+          <a:solidFill>
+            <a:srgbClr val="FFD000"/>
+          </a:solidFill>
+          <a:ln>
+            <a:noFill/>
+          </a:ln>
+        </p:spPr>
+        <p:style>
+          <a:lnRef idx="1">
+            <a:schemeClr val="accent1"/>
+          </a:lnRef>
+          <a:fillRef idx="3">
+            <a:schemeClr val="accent1"/>
+          </a:fillRef>
+          <a:effectRef idx="2">
+            <a:schemeClr val="accent1"/>
+          </a:effectRef>
+          <a:fontRef idx="minor">
+            <a:schemeClr val="lt1"/>
+          </a:fontRef>
+        </p:style>
+        <p:txBody>
+          <a:bodyPr rtlCol="0" anchor="ctr"/>
+          <a:lstStyle/>
+          <a:p>
+            <a:pPr algn="ctr"/>
+          </a:p>
+        </p:txBody>
+      </p:sp>
       <p:sp>
         <p:nvSpPr>
           <p:cNvPr id="4" name="TextBox 3"/>
@@ -4899,41 +4554,8 @@
         </p:nvSpPr>
         <p:spPr>
           <a:xfrm>
-            <a:off x="457200" y="1737360"/>
-            <a:ext cx="11277295" cy="1097280"/>
-          </a:xfrm>
-          <a:prstGeom prst="rect">
-            <a:avLst/>
-          </a:prstGeom>
-          <a:noFill/>
-        </p:spPr>
-        <p:txBody>
-          <a:bodyPr wrap="square" anchor="ctr"/>
-          <a:lstStyle/>
-          <a:p>
-            <a:pPr algn="ctr"/>
-            <a:r>
-              <a:rPr sz="3400" b="1" i="0">
-                <a:solidFill>
-                  <a:srgbClr val="095292"/>
-                </a:solidFill>
-                <a:latin typeface="Calibri"/>
-              </a:rPr>
-              <a:t>Clase 15 · cierre del PI CloudLite</a:t>
-            </a:r>
-          </a:p>
-        </p:txBody>
-      </p:sp>
-      <p:sp>
-        <p:nvSpPr>
-          <p:cNvPr id="5" name="TextBox 4"/>
-          <p:cNvSpPr txBox="1"/>
-          <p:nvPr/>
-        </p:nvSpPr>
-        <p:spPr>
-          <a:xfrm>
-            <a:off x="457200" y="3017520"/>
-            <a:ext cx="11277295" cy="1645920"/>
+            <a:off x="457200" y="164592"/>
+            <a:ext cx="11277295" cy="502920"/>
           </a:xfrm>
           <a:prstGeom prst="rect">
             <a:avLst/>
@@ -4946,65 +4568,28 @@
           </a:bodyPr>
           <a:lstStyle/>
           <a:p>
-            <a:pPr algn="ctr">
-              <a:spcAft>
-                <a:spcPts val="600"/>
-              </a:spcAft>
-            </a:pPr>
-            <a:r>
-              <a:rPr sz="1600" b="0" i="0">
-                <a:solidFill>
-                  <a:srgbClr val="333333"/>
-                </a:solidFill>
-                <a:latin typeface="Calibri"/>
-              </a:rPr>
-              <a:t>Sustentar en vivo el PI CloudLite App y entregar el paquete final</a:t>
-            </a:r>
-          </a:p>
-          <a:p>
-            <a:pPr algn="ctr">
-              <a:spcAft>
-                <a:spcPts val="600"/>
-              </a:spcAft>
-            </a:pPr>
-            <a:r>
-              <a:rPr sz="1600" b="0" i="0">
-                <a:solidFill>
-                  <a:srgbClr val="333333"/>
-                </a:solidFill>
-                <a:latin typeface="Calibri"/>
-              </a:rPr>
-              <a:t>Evidencia: Paquete final en la plataforma del curso (módulo Proyectos) + pitch de 5–8 min sustentado hoy en clase + Q&amp;A</a:t>
-            </a:r>
-          </a:p>
-          <a:p>
-            <a:pPr algn="ctr">
-              <a:spcAft>
-                <a:spcPts val="600"/>
-              </a:spcAft>
-            </a:pPr>
-            <a:r>
-              <a:rPr sz="1600" b="0" i="0">
-                <a:solidFill>
-                  <a:srgbClr val="333333"/>
-                </a:solidFill>
-                <a:latin typeface="Calibri"/>
-              </a:rPr>
-              <a:t>Conserva el repo (informe, diagramas, Dockerfile, ci.yml) como portafolio</a:t>
-            </a:r>
-          </a:p>
-        </p:txBody>
-      </p:sp>
-      <p:sp>
-        <p:nvSpPr>
-          <p:cNvPr id="6" name="TextBox 5"/>
+            <a:r>
+              <a:rPr sz="2600" b="1" i="0">
+                <a:solidFill>
+                  <a:srgbClr val="FFFFFF"/>
+                </a:solidFill>
+                <a:latin typeface="Calibri"/>
+              </a:rPr>
+              <a:t>La regla de los 60 segundos, anunciada desde la Clase 11 (1/2)</a:t>
+            </a:r>
+          </a:p>
+        </p:txBody>
+      </p:sp>
+      <p:sp>
+        <p:nvSpPr>
+          <p:cNvPr id="5" name="TextBox 4"/>
           <p:cNvSpPr txBox="1"/>
           <p:nvPr/>
         </p:nvSpPr>
         <p:spPr>
           <a:xfrm>
-            <a:off x="457200" y="4754880"/>
-            <a:ext cx="11277295" cy="640080"/>
+            <a:off x="457200" y="1170432"/>
+            <a:ext cx="11277295" cy="5230368"/>
           </a:xfrm>
           <a:prstGeom prst="rect">
             <a:avLst/>
@@ -5017,15 +4602,1838 @@
           </a:bodyPr>
           <a:lstStyle/>
           <a:p>
+            <a:pPr>
+              <a:spcAft>
+                <a:spcPts val="800"/>
+              </a:spcAft>
+            </a:pPr>
+            <a:r>
+              <a:rPr sz="2000" b="0" i="0">
+                <a:solidFill>
+                  <a:srgbClr val="333333"/>
+                </a:solidFill>
+                <a:latin typeface="Calibri"/>
+              </a:rPr>
+              <a:t>–   El criterio de calidad que se anuncio desde el checkpoint de la Clase 11 es la regla de los 60 segundos: quien sustenta debe poder explicar CUALQUIER parte del sistema en 60 segundos, sin buscar en el informe.</a:t>
+            </a:r>
+          </a:p>
+          <a:p>
+            <a:pPr>
+              <a:spcAft>
+                <a:spcPts val="800"/>
+              </a:spcAft>
+            </a:pPr>
+            <a:r>
+              <a:rPr sz="2000" b="0" i="0">
+                <a:solidFill>
+                  <a:srgbClr val="333333"/>
+                </a:solidFill>
+                <a:latin typeface="Calibri"/>
+              </a:rPr>
+              <a:t>–   El trabajo es individual por defecto, asi que en la mayoria de los casos ese "quien" es el propio autor y la regla se comprueba sola</a:t>
+            </a:r>
+          </a:p>
+          <a:p>
+            <a:pPr>
+              <a:spcAft>
+                <a:spcPts val="800"/>
+              </a:spcAft>
+            </a:pPr>
+            <a:r>
+              <a:rPr sz="2000" b="0" i="0">
+                <a:solidFill>
+                  <a:srgbClr val="333333"/>
+                </a:solidFill>
+                <a:latin typeface="Calibri"/>
+              </a:rPr>
+              <a:t>–   Cuando el docente autorizo un equipo de dos o tres, la regla se vuelve exigente y se lee asi: CUALQUIER integrante debe poder explicar CUALQUIER parte.</a:t>
+            </a:r>
+          </a:p>
+          <a:p>
+            <a:pPr>
+              <a:spcAft>
+                <a:spcPts val="800"/>
+              </a:spcAft>
+            </a:pPr>
+            <a:r>
+              <a:rPr sz="2000" b="0" i="0">
+                <a:solidFill>
+                  <a:srgbClr val="333333"/>
+                </a:solidFill>
+                <a:latin typeface="Calibri"/>
+              </a:rPr>
+              <a:t>–   Esto casi siempre genera la primera pregunta real del estudiante: «podemos repartirnos los temas y que cada uno prepare solo el suyo?».</a:t>
+            </a:r>
+          </a:p>
+          <a:p>
+            <a:pPr>
+              <a:spcAft>
+                <a:spcPts val="800"/>
+              </a:spcAft>
+            </a:pPr>
+            <a:r>
+              <a:rPr sz="2000" b="0" i="0">
+                <a:solidFill>
+                  <a:srgbClr val="333333"/>
+                </a:solidFill>
+                <a:latin typeface="Calibri"/>
+              </a:rPr>
+              <a:t>–   La razon no es castigar.</a:t>
+            </a:r>
+          </a:p>
+          <a:p>
+            <a:pPr>
+              <a:spcAft>
+                <a:spcPts val="800"/>
+              </a:spcAft>
+            </a:pPr>
+            <a:r>
+              <a:rPr sz="2000" b="0" i="0">
+                <a:solidFill>
+                  <a:srgbClr val="333333"/>
+                </a:solidFill>
+                <a:latin typeface="Calibri"/>
+              </a:rPr>
+              <a:t>–   En un equipo profesional, cuando el sistema falla a las once de la noche, contesta quien esta disponible, no el autor del diagrama; un sistema que solo una persona entiende es un riesgo operativo con nombre propio.</a:t>
+            </a:r>
+          </a:p>
+        </p:txBody>
+      </p:sp>
+      <p:sp>
+        <p:nvSpPr>
+          <p:cNvPr id="6" name="TextBox 5"/>
+          <p:cNvSpPr txBox="1"/>
+          <p:nvPr/>
+        </p:nvSpPr>
+        <p:spPr>
+          <a:xfrm>
+            <a:off x="11185855" y="6473952"/>
+            <a:ext cx="640080" cy="274320"/>
+          </a:xfrm>
+          <a:prstGeom prst="rect">
+            <a:avLst/>
+          </a:prstGeom>
+          <a:noFill/>
+        </p:spPr>
+        <p:txBody>
+          <a:bodyPr wrap="square">
+            <a:spAutoFit/>
+          </a:bodyPr>
+          <a:lstStyle/>
+          <a:p>
+            <a:pPr algn="r"/>
+            <a:r>
+              <a:rPr sz="1100" b="0" i="0">
+                <a:solidFill>
+                  <a:srgbClr val="666666"/>
+                </a:solidFill>
+                <a:latin typeface="Calibri"/>
+              </a:rPr>
+              <a:t>13</a:t>
+            </a:r>
+          </a:p>
+        </p:txBody>
+      </p:sp>
+    </p:spTree>
+  </p:cSld>
+  <p:clrMapOvr>
+    <a:masterClrMapping/>
+  </p:clrMapOvr>
+</p:sld>
+</file>
+
+<file path=ppt/slides/slide14.xml><?xml version="1.0" encoding="utf-8"?>
+<p:sld xmlns:a="http://schemas.openxmlformats.org/drawingml/2006/main" xmlns:p="http://schemas.openxmlformats.org/presentationml/2006/main" xmlns:r="http://schemas.openxmlformats.org/officeDocument/2006/relationships">
+  <p:cSld>
+    <p:bg>
+      <p:bgPr>
+        <a:solidFill>
+          <a:srgbClr val="FFFFFF"/>
+        </a:solidFill>
+        <a:effectLst/>
+      </p:bgPr>
+    </p:bg>
+    <p:spTree>
+      <p:nvGrpSpPr>
+        <p:cNvPr id="1" name=""/>
+        <p:cNvGrpSpPr/>
+        <p:nvPr/>
+      </p:nvGrpSpPr>
+      <p:grpSpPr/>
+      <p:sp>
+        <p:nvSpPr>
+          <p:cNvPr id="2" name="Rectangle 1"/>
+          <p:cNvSpPr/>
+          <p:nvPr/>
+        </p:nvSpPr>
+        <p:spPr>
+          <a:xfrm>
+            <a:off x="0" y="0"/>
+            <a:ext cx="12191695" cy="960120"/>
+          </a:xfrm>
+          <a:prstGeom prst="rect">
+            <a:avLst/>
+          </a:prstGeom>
+          <a:solidFill>
+            <a:srgbClr val="095292"/>
+          </a:solidFill>
+          <a:ln>
+            <a:noFill/>
+          </a:ln>
+        </p:spPr>
+        <p:style>
+          <a:lnRef idx="1">
+            <a:schemeClr val="accent1"/>
+          </a:lnRef>
+          <a:fillRef idx="3">
+            <a:schemeClr val="accent1"/>
+          </a:fillRef>
+          <a:effectRef idx="2">
+            <a:schemeClr val="accent1"/>
+          </a:effectRef>
+          <a:fontRef idx="minor">
+            <a:schemeClr val="lt1"/>
+          </a:fontRef>
+        </p:style>
+        <p:txBody>
+          <a:bodyPr rtlCol="0" anchor="ctr"/>
+          <a:lstStyle/>
+          <a:p>
             <a:pPr algn="ctr"/>
-            <a:r>
-              <a:rPr sz="2000" b="1" i="0">
-                <a:solidFill>
-                  <a:srgbClr val="269CCB"/>
-                </a:solidFill>
-                <a:latin typeface="Calibri"/>
-              </a:rPr>
-              <a:t>Arquitectura = decisiones documentadas con sus consecuencias</a:t>
+          </a:p>
+        </p:txBody>
+      </p:sp>
+      <p:sp>
+        <p:nvSpPr>
+          <p:cNvPr id="3" name="Rectangle 2"/>
+          <p:cNvSpPr/>
+          <p:nvPr/>
+        </p:nvSpPr>
+        <p:spPr>
+          <a:xfrm>
+            <a:off x="0" y="960120"/>
+            <a:ext cx="12191695" cy="41148"/>
+          </a:xfrm>
+          <a:prstGeom prst="rect">
+            <a:avLst/>
+          </a:prstGeom>
+          <a:solidFill>
+            <a:srgbClr val="FFD000"/>
+          </a:solidFill>
+          <a:ln>
+            <a:noFill/>
+          </a:ln>
+        </p:spPr>
+        <p:style>
+          <a:lnRef idx="1">
+            <a:schemeClr val="accent1"/>
+          </a:lnRef>
+          <a:fillRef idx="3">
+            <a:schemeClr val="accent1"/>
+          </a:fillRef>
+          <a:effectRef idx="2">
+            <a:schemeClr val="accent1"/>
+          </a:effectRef>
+          <a:fontRef idx="minor">
+            <a:schemeClr val="lt1"/>
+          </a:fontRef>
+        </p:style>
+        <p:txBody>
+          <a:bodyPr rtlCol="0" anchor="ctr"/>
+          <a:lstStyle/>
+          <a:p>
+            <a:pPr algn="ctr"/>
+          </a:p>
+        </p:txBody>
+      </p:sp>
+      <p:sp>
+        <p:nvSpPr>
+          <p:cNvPr id="4" name="TextBox 3"/>
+          <p:cNvSpPr txBox="1"/>
+          <p:nvPr/>
+        </p:nvSpPr>
+        <p:spPr>
+          <a:xfrm>
+            <a:off x="457200" y="164592"/>
+            <a:ext cx="11277295" cy="502920"/>
+          </a:xfrm>
+          <a:prstGeom prst="rect">
+            <a:avLst/>
+          </a:prstGeom>
+          <a:noFill/>
+        </p:spPr>
+        <p:txBody>
+          <a:bodyPr wrap="square">
+            <a:spAutoFit/>
+          </a:bodyPr>
+          <a:lstStyle/>
+          <a:p>
+            <a:r>
+              <a:rPr sz="2600" b="1" i="0">
+                <a:solidFill>
+                  <a:srgbClr val="FFFFFF"/>
+                </a:solidFill>
+                <a:latin typeface="Calibri"/>
+              </a:rPr>
+              <a:t>La regla de los 60 segundos, anunciada desde la Clase 11 (2/2)</a:t>
+            </a:r>
+          </a:p>
+        </p:txBody>
+      </p:sp>
+      <p:sp>
+        <p:nvSpPr>
+          <p:cNvPr id="5" name="TextBox 4"/>
+          <p:cNvSpPr txBox="1"/>
+          <p:nvPr/>
+        </p:nvSpPr>
+        <p:spPr>
+          <a:xfrm>
+            <a:off x="457200" y="1170432"/>
+            <a:ext cx="11277295" cy="5230368"/>
+          </a:xfrm>
+          <a:prstGeom prst="rect">
+            <a:avLst/>
+          </a:prstGeom>
+          <a:noFill/>
+        </p:spPr>
+        <p:txBody>
+          <a:bodyPr wrap="square">
+            <a:spAutoFit/>
+          </a:bodyPr>
+          <a:lstStyle/>
+          <a:p>
+            <a:pPr>
+              <a:spcAft>
+                <a:spcPts val="800"/>
+              </a:spcAft>
+            </a:pPr>
+            <a:r>
+              <a:rPr sz="2000" b="0" i="0">
+                <a:solidFill>
+                  <a:srgbClr val="333333"/>
+                </a:solidFill>
+                <a:latin typeface="Calibri"/>
+              </a:rPr>
+              <a:t>–   El segundo motivo es de evaluacion: si el estudiante no puede explicar su propio diagrama de despliegue, el evaluador no tiene forma de saber si el artefacto es suyo o copiado, y ese es exactamente el vacio que la sustentacion existe para cerrar.</a:t>
+            </a:r>
+          </a:p>
+          <a:p>
+            <a:pPr>
+              <a:spcAft>
+                <a:spcPts val="800"/>
+              </a:spcAft>
+            </a:pPr>
+            <a:r>
+              <a:rPr sz="2000" b="0" i="0">
+                <a:solidFill>
+                  <a:srgbClr val="333333"/>
+                </a:solidFill>
+                <a:latin typeface="Calibri"/>
+              </a:rPr>
+              <a:t>–   En los equipos autorizados el mismo riesgo se multiplica: si solo un integrante puede explicar el despliegue, no hay evidencia de que los demas participaran, y por eso la rubrica exige que todos hablen y descuenta cuando presenta uno solo.</a:t>
+            </a:r>
+          </a:p>
+          <a:p>
+            <a:pPr>
+              <a:spcAft>
+                <a:spcPts val="800"/>
+              </a:spcAft>
+            </a:pPr>
+            <a:r>
+              <a:rPr sz="2000" b="0" i="0">
+                <a:solidFill>
+                  <a:srgbClr val="333333"/>
+                </a:solidFill>
+                <a:latin typeface="Calibri"/>
+              </a:rPr>
+              <a:t>–   La practica concreta que se recomienda antes de presentar es un ensayo cruzado con otro estudiante: cada uno explica en 60 segundos una parte del sistema del otro y devuelve los huecos que encontro (en equipo, cada integrante explica una parte que NO le toco preparar).</a:t>
+            </a:r>
+          </a:p>
+          <a:p>
+            <a:pPr>
+              <a:spcAft>
+                <a:spcPts val="800"/>
+              </a:spcAft>
+            </a:pPr>
+            <a:r>
+              <a:rPr sz="2000" b="0" i="0">
+                <a:solidFill>
+                  <a:srgbClr val="333333"/>
+                </a:solidFill>
+                <a:latin typeface="Calibri"/>
+              </a:rPr>
+              <a:t>–   Ese ejercicio suele revelar en cinco minutos lo que la nota habria revelado demasiado tarde.</a:t>
+            </a:r>
+          </a:p>
+        </p:txBody>
+      </p:sp>
+      <p:sp>
+        <p:nvSpPr>
+          <p:cNvPr id="6" name="TextBox 5"/>
+          <p:cNvSpPr txBox="1"/>
+          <p:nvPr/>
+        </p:nvSpPr>
+        <p:spPr>
+          <a:xfrm>
+            <a:off x="11185855" y="6473952"/>
+            <a:ext cx="640080" cy="274320"/>
+          </a:xfrm>
+          <a:prstGeom prst="rect">
+            <a:avLst/>
+          </a:prstGeom>
+          <a:noFill/>
+        </p:spPr>
+        <p:txBody>
+          <a:bodyPr wrap="square">
+            <a:spAutoFit/>
+          </a:bodyPr>
+          <a:lstStyle/>
+          <a:p>
+            <a:pPr algn="r"/>
+            <a:r>
+              <a:rPr sz="1100" b="0" i="0">
+                <a:solidFill>
+                  <a:srgbClr val="666666"/>
+                </a:solidFill>
+                <a:latin typeface="Calibri"/>
+              </a:rPr>
+              <a:t>14</a:t>
+            </a:r>
+          </a:p>
+        </p:txBody>
+      </p:sp>
+    </p:spTree>
+  </p:cSld>
+  <p:clrMapOvr>
+    <a:masterClrMapping/>
+  </p:clrMapOvr>
+</p:sld>
+</file>
+
+<file path=ppt/slides/slide15.xml><?xml version="1.0" encoding="utf-8"?>
+<p:sld xmlns:a="http://schemas.openxmlformats.org/drawingml/2006/main" xmlns:p="http://schemas.openxmlformats.org/presentationml/2006/main" xmlns:r="http://schemas.openxmlformats.org/officeDocument/2006/relationships">
+  <p:cSld>
+    <p:bg>
+      <p:bgPr>
+        <a:solidFill>
+          <a:srgbClr val="FFFFFF"/>
+        </a:solidFill>
+        <a:effectLst/>
+      </p:bgPr>
+    </p:bg>
+    <p:spTree>
+      <p:nvGrpSpPr>
+        <p:cNvPr id="1" name=""/>
+        <p:cNvGrpSpPr/>
+        <p:nvPr/>
+      </p:nvGrpSpPr>
+      <p:grpSpPr/>
+      <p:sp>
+        <p:nvSpPr>
+          <p:cNvPr id="2" name="Rectangle 1"/>
+          <p:cNvSpPr/>
+          <p:nvPr/>
+        </p:nvSpPr>
+        <p:spPr>
+          <a:xfrm>
+            <a:off x="0" y="0"/>
+            <a:ext cx="12191695" cy="960120"/>
+          </a:xfrm>
+          <a:prstGeom prst="rect">
+            <a:avLst/>
+          </a:prstGeom>
+          <a:solidFill>
+            <a:srgbClr val="095292"/>
+          </a:solidFill>
+          <a:ln>
+            <a:noFill/>
+          </a:ln>
+        </p:spPr>
+        <p:style>
+          <a:lnRef idx="1">
+            <a:schemeClr val="accent1"/>
+          </a:lnRef>
+          <a:fillRef idx="3">
+            <a:schemeClr val="accent1"/>
+          </a:fillRef>
+          <a:effectRef idx="2">
+            <a:schemeClr val="accent1"/>
+          </a:effectRef>
+          <a:fontRef idx="minor">
+            <a:schemeClr val="lt1"/>
+          </a:fontRef>
+        </p:style>
+        <p:txBody>
+          <a:bodyPr rtlCol="0" anchor="ctr"/>
+          <a:lstStyle/>
+          <a:p>
+            <a:pPr algn="ctr"/>
+          </a:p>
+        </p:txBody>
+      </p:sp>
+      <p:sp>
+        <p:nvSpPr>
+          <p:cNvPr id="3" name="Rectangle 2"/>
+          <p:cNvSpPr/>
+          <p:nvPr/>
+        </p:nvSpPr>
+        <p:spPr>
+          <a:xfrm>
+            <a:off x="0" y="960120"/>
+            <a:ext cx="12191695" cy="41148"/>
+          </a:xfrm>
+          <a:prstGeom prst="rect">
+            <a:avLst/>
+          </a:prstGeom>
+          <a:solidFill>
+            <a:srgbClr val="FFD000"/>
+          </a:solidFill>
+          <a:ln>
+            <a:noFill/>
+          </a:ln>
+        </p:spPr>
+        <p:style>
+          <a:lnRef idx="1">
+            <a:schemeClr val="accent1"/>
+          </a:lnRef>
+          <a:fillRef idx="3">
+            <a:schemeClr val="accent1"/>
+          </a:fillRef>
+          <a:effectRef idx="2">
+            <a:schemeClr val="accent1"/>
+          </a:effectRef>
+          <a:fontRef idx="minor">
+            <a:schemeClr val="lt1"/>
+          </a:fontRef>
+        </p:style>
+        <p:txBody>
+          <a:bodyPr rtlCol="0" anchor="ctr"/>
+          <a:lstStyle/>
+          <a:p>
+            <a:pPr algn="ctr"/>
+          </a:p>
+        </p:txBody>
+      </p:sp>
+      <p:sp>
+        <p:nvSpPr>
+          <p:cNvPr id="4" name="TextBox 3"/>
+          <p:cNvSpPr txBox="1"/>
+          <p:nvPr/>
+        </p:nvSpPr>
+        <p:spPr>
+          <a:xfrm>
+            <a:off x="457200" y="164592"/>
+            <a:ext cx="11277295" cy="502920"/>
+          </a:xfrm>
+          <a:prstGeom prst="rect">
+            <a:avLst/>
+          </a:prstGeom>
+          <a:noFill/>
+        </p:spPr>
+        <p:txBody>
+          <a:bodyPr wrap="square">
+            <a:spAutoFit/>
+          </a:bodyPr>
+          <a:lstStyle/>
+          <a:p>
+            <a:r>
+              <a:rPr sz="2600" b="1" i="0">
+                <a:solidFill>
+                  <a:srgbClr val="FFFFFF"/>
+                </a:solidFill>
+                <a:latin typeface="Calibri"/>
+              </a:rPr>
+              <a:t>El Q&amp;A tecnico: tres tipos de pregunta (1/2)</a:t>
+            </a:r>
+          </a:p>
+        </p:txBody>
+      </p:sp>
+      <p:sp>
+        <p:nvSpPr>
+          <p:cNvPr id="5" name="TextBox 4"/>
+          <p:cNvSpPr txBox="1"/>
+          <p:nvPr/>
+        </p:nvSpPr>
+        <p:spPr>
+          <a:xfrm>
+            <a:off x="457200" y="1170432"/>
+            <a:ext cx="11277295" cy="5230368"/>
+          </a:xfrm>
+          <a:prstGeom prst="rect">
+            <a:avLst/>
+          </a:prstGeom>
+          <a:noFill/>
+        </p:spPr>
+        <p:txBody>
+          <a:bodyPr wrap="square">
+            <a:spAutoFit/>
+          </a:bodyPr>
+          <a:lstStyle/>
+          <a:p>
+            <a:pPr>
+              <a:spcAft>
+                <a:spcPts val="800"/>
+              </a:spcAft>
+            </a:pPr>
+            <a:r>
+              <a:rPr sz="2000" b="0" i="0">
+                <a:solidFill>
+                  <a:srgbClr val="333333"/>
+                </a:solidFill>
+                <a:latin typeface="Calibri"/>
+              </a:rPr>
+              <a:t>–   El Q&amp;A tecnico tiene tres tipos de pregunta y conviene que el docente los reconozca para dosificarlos.</a:t>
+            </a:r>
+          </a:p>
+          <a:p>
+            <a:pPr>
+              <a:spcAft>
+                <a:spcPts val="800"/>
+              </a:spcAft>
+            </a:pPr>
+            <a:r>
+              <a:rPr sz="2000" b="0" i="0">
+                <a:solidFill>
+                  <a:srgbClr val="333333"/>
+                </a:solidFill>
+                <a:latin typeface="Calibri"/>
+              </a:rPr>
+              <a:t>–   La pregunta de verificacion comprueba que el estudiante hizo lo que dice: «muestreme el archivo.yml del workflow» o «en que linea del Dockerfile esta la imagen base y por que eligieron una variante alpine».</a:t>
+            </a:r>
+          </a:p>
+          <a:p>
+            <a:pPr>
+              <a:spcAft>
+                <a:spcPts val="800"/>
+              </a:spcAft>
+            </a:pPr>
+            <a:r>
+              <a:rPr sz="2000" b="0" i="0">
+                <a:solidFill>
+                  <a:srgbClr val="333333"/>
+                </a:solidFill>
+                <a:latin typeface="Calibri"/>
+              </a:rPr>
+              <a:t>–   La pregunta de profundizacion empuja un nivel mas alla de lo presentado: «por que la base de datos no esta en el mismo contenedor que la API».</a:t>
+            </a:r>
+          </a:p>
+          <a:p>
+            <a:pPr>
+              <a:spcAft>
+                <a:spcPts val="800"/>
+              </a:spcAft>
+            </a:pPr>
+            <a:r>
+              <a:rPr sz="2000" b="0" i="0">
+                <a:solidFill>
+                  <a:srgbClr val="333333"/>
+                </a:solidFill>
+                <a:latin typeface="Calibri"/>
+              </a:rPr>
+              <a:t>–   La pregunta hipotetica, o what-if, evalua si el diseno se entiende como sistema y no como dibujo: «si el trafico se multiplica por diez el lunes, que pieza de CloudLite se rompe primero y como se darian cuenta».</a:t>
+            </a:r>
+          </a:p>
+          <a:p>
+            <a:pPr>
+              <a:spcAft>
+                <a:spcPts val="800"/>
+              </a:spcAft>
+            </a:pPr>
+            <a:r>
+              <a:rPr sz="2000" b="0" i="0">
+                <a:solidFill>
+                  <a:srgbClr val="333333"/>
+                </a:solidFill>
+                <a:latin typeface="Calibri"/>
+              </a:rPr>
+              <a:t>–   Aqui aparece la segunda pregunta previsible del estudiante: «y si no sabemos la respuesta?».</a:t>
+            </a:r>
+          </a:p>
+          <a:p>
+            <a:pPr>
+              <a:spcAft>
+                <a:spcPts val="800"/>
+              </a:spcAft>
+            </a:pPr>
+            <a:r>
+              <a:rPr sz="2000" b="0" i="0">
+                <a:solidFill>
+                  <a:srgbClr val="333333"/>
+                </a:solidFill>
+                <a:latin typeface="Calibri"/>
+              </a:rPr>
+              <a:t>–   La respuesta correcta es que decir «no lo medimos» no penaliza si va acompanado de como se mediria: «no medimos el p95 porque no hay trafico real</a:t>
+            </a:r>
+          </a:p>
+          <a:p>
+            <a:pPr>
+              <a:spcAft>
+                <a:spcPts val="800"/>
+              </a:spcAft>
+            </a:pPr>
+            <a:r>
+              <a:rPr sz="2000" b="0" i="0">
+                <a:solidFill>
+                  <a:srgbClr val="333333"/>
+                </a:solidFill>
+                <a:latin typeface="Calibri"/>
+              </a:rPr>
+              <a:t>–   Pero el plan es simular 50 peticiones por segundo y observar la latencia de la API, que es el cuello de botella que sospechamos por lo que vimos en la Clase 12».</a:t>
+            </a:r>
+          </a:p>
+        </p:txBody>
+      </p:sp>
+      <p:sp>
+        <p:nvSpPr>
+          <p:cNvPr id="6" name="TextBox 5"/>
+          <p:cNvSpPr txBox="1"/>
+          <p:nvPr/>
+        </p:nvSpPr>
+        <p:spPr>
+          <a:xfrm>
+            <a:off x="11185855" y="6473952"/>
+            <a:ext cx="640080" cy="274320"/>
+          </a:xfrm>
+          <a:prstGeom prst="rect">
+            <a:avLst/>
+          </a:prstGeom>
+          <a:noFill/>
+        </p:spPr>
+        <p:txBody>
+          <a:bodyPr wrap="square">
+            <a:spAutoFit/>
+          </a:bodyPr>
+          <a:lstStyle/>
+          <a:p>
+            <a:pPr algn="r"/>
+            <a:r>
+              <a:rPr sz="1100" b="0" i="0">
+                <a:solidFill>
+                  <a:srgbClr val="666666"/>
+                </a:solidFill>
+                <a:latin typeface="Calibri"/>
+              </a:rPr>
+              <a:t>15</a:t>
+            </a:r>
+          </a:p>
+        </p:txBody>
+      </p:sp>
+    </p:spTree>
+  </p:cSld>
+  <p:clrMapOvr>
+    <a:masterClrMapping/>
+  </p:clrMapOvr>
+</p:sld>
+</file>
+
+<file path=ppt/slides/slide16.xml><?xml version="1.0" encoding="utf-8"?>
+<p:sld xmlns:a="http://schemas.openxmlformats.org/drawingml/2006/main" xmlns:p="http://schemas.openxmlformats.org/presentationml/2006/main" xmlns:r="http://schemas.openxmlformats.org/officeDocument/2006/relationships">
+  <p:cSld>
+    <p:bg>
+      <p:bgPr>
+        <a:solidFill>
+          <a:srgbClr val="FFFFFF"/>
+        </a:solidFill>
+        <a:effectLst/>
+      </p:bgPr>
+    </p:bg>
+    <p:spTree>
+      <p:nvGrpSpPr>
+        <p:cNvPr id="1" name=""/>
+        <p:cNvGrpSpPr/>
+        <p:nvPr/>
+      </p:nvGrpSpPr>
+      <p:grpSpPr/>
+      <p:sp>
+        <p:nvSpPr>
+          <p:cNvPr id="2" name="Rectangle 1"/>
+          <p:cNvSpPr/>
+          <p:nvPr/>
+        </p:nvSpPr>
+        <p:spPr>
+          <a:xfrm>
+            <a:off x="0" y="0"/>
+            <a:ext cx="12191695" cy="960120"/>
+          </a:xfrm>
+          <a:prstGeom prst="rect">
+            <a:avLst/>
+          </a:prstGeom>
+          <a:solidFill>
+            <a:srgbClr val="095292"/>
+          </a:solidFill>
+          <a:ln>
+            <a:noFill/>
+          </a:ln>
+        </p:spPr>
+        <p:style>
+          <a:lnRef idx="1">
+            <a:schemeClr val="accent1"/>
+          </a:lnRef>
+          <a:fillRef idx="3">
+            <a:schemeClr val="accent1"/>
+          </a:fillRef>
+          <a:effectRef idx="2">
+            <a:schemeClr val="accent1"/>
+          </a:effectRef>
+          <a:fontRef idx="minor">
+            <a:schemeClr val="lt1"/>
+          </a:fontRef>
+        </p:style>
+        <p:txBody>
+          <a:bodyPr rtlCol="0" anchor="ctr"/>
+          <a:lstStyle/>
+          <a:p>
+            <a:pPr algn="ctr"/>
+          </a:p>
+        </p:txBody>
+      </p:sp>
+      <p:sp>
+        <p:nvSpPr>
+          <p:cNvPr id="3" name="Rectangle 2"/>
+          <p:cNvSpPr/>
+          <p:nvPr/>
+        </p:nvSpPr>
+        <p:spPr>
+          <a:xfrm>
+            <a:off x="0" y="960120"/>
+            <a:ext cx="12191695" cy="41148"/>
+          </a:xfrm>
+          <a:prstGeom prst="rect">
+            <a:avLst/>
+          </a:prstGeom>
+          <a:solidFill>
+            <a:srgbClr val="FFD000"/>
+          </a:solidFill>
+          <a:ln>
+            <a:noFill/>
+          </a:ln>
+        </p:spPr>
+        <p:style>
+          <a:lnRef idx="1">
+            <a:schemeClr val="accent1"/>
+          </a:lnRef>
+          <a:fillRef idx="3">
+            <a:schemeClr val="accent1"/>
+          </a:fillRef>
+          <a:effectRef idx="2">
+            <a:schemeClr val="accent1"/>
+          </a:effectRef>
+          <a:fontRef idx="minor">
+            <a:schemeClr val="lt1"/>
+          </a:fontRef>
+        </p:style>
+        <p:txBody>
+          <a:bodyPr rtlCol="0" anchor="ctr"/>
+          <a:lstStyle/>
+          <a:p>
+            <a:pPr algn="ctr"/>
+          </a:p>
+        </p:txBody>
+      </p:sp>
+      <p:sp>
+        <p:nvSpPr>
+          <p:cNvPr id="4" name="TextBox 3"/>
+          <p:cNvSpPr txBox="1"/>
+          <p:nvPr/>
+        </p:nvSpPr>
+        <p:spPr>
+          <a:xfrm>
+            <a:off x="457200" y="164592"/>
+            <a:ext cx="11277295" cy="502920"/>
+          </a:xfrm>
+          <a:prstGeom prst="rect">
+            <a:avLst/>
+          </a:prstGeom>
+          <a:noFill/>
+        </p:spPr>
+        <p:txBody>
+          <a:bodyPr wrap="square">
+            <a:spAutoFit/>
+          </a:bodyPr>
+          <a:lstStyle/>
+          <a:p>
+            <a:r>
+              <a:rPr sz="2600" b="1" i="0">
+                <a:solidFill>
+                  <a:srgbClr val="FFFFFF"/>
+                </a:solidFill>
+                <a:latin typeface="Calibri"/>
+              </a:rPr>
+              <a:t>El Q&amp;A tecnico: tres tipos de pregunta (2/2)</a:t>
+            </a:r>
+          </a:p>
+        </p:txBody>
+      </p:sp>
+      <p:sp>
+        <p:nvSpPr>
+          <p:cNvPr id="5" name="TextBox 4"/>
+          <p:cNvSpPr txBox="1"/>
+          <p:nvPr/>
+        </p:nvSpPr>
+        <p:spPr>
+          <a:xfrm>
+            <a:off x="457200" y="1170432"/>
+            <a:ext cx="11277295" cy="5230368"/>
+          </a:xfrm>
+          <a:prstGeom prst="rect">
+            <a:avLst/>
+          </a:prstGeom>
+          <a:noFill/>
+        </p:spPr>
+        <p:txBody>
+          <a:bodyPr wrap="square">
+            <a:spAutoFit/>
+          </a:bodyPr>
+          <a:lstStyle/>
+          <a:p>
+            <a:pPr>
+              <a:spcAft>
+                <a:spcPts val="800"/>
+              </a:spcAft>
+            </a:pPr>
+            <a:r>
+              <a:rPr sz="2000" b="0" i="0">
+                <a:solidFill>
+                  <a:srgbClr val="333333"/>
+                </a:solidFill>
+                <a:latin typeface="Calibri"/>
+              </a:rPr>
+              <a:t>–   Improvisar un dato falso, en cambio, se detecta con una sola pregunta de seguimiento y cuesta mucho mas que admitir el limite.</a:t>
+            </a:r>
+          </a:p>
+          <a:p>
+            <a:pPr>
+              <a:spcAft>
+                <a:spcPts val="800"/>
+              </a:spcAft>
+            </a:pPr>
+            <a:r>
+              <a:rPr sz="2000" b="0" i="0">
+                <a:solidFill>
+                  <a:srgbClr val="333333"/>
+                </a:solidFill>
+                <a:latin typeface="Calibri"/>
+              </a:rPr>
+              <a:t>–   Y conviene ser explicito sobre el formato de la sesion, porque es lo que decide como se prepara el estudiante: la Clase 15 se dicta en la ultima sesion del semestre (16 de noviembre) como sustentacion EN VIVO</a:t>
+            </a:r>
+          </a:p>
+          <a:p>
+            <a:pPr>
+              <a:spcAft>
+                <a:spcPts val="800"/>
+              </a:spcAft>
+            </a:pPr>
+            <a:r>
+              <a:rPr sz="2000" b="0" i="0">
+                <a:solidFill>
+                  <a:srgbClr val="333333"/>
+                </a:solidFill>
+                <a:latin typeface="Calibri"/>
+              </a:rPr>
+              <a:t>–   Sincrona, con turnos de unos 6 minutos de pitch y 2 a 4 de preguntas.</a:t>
+            </a:r>
+          </a:p>
+          <a:p>
+            <a:pPr>
+              <a:spcAft>
+                <a:spcPts val="800"/>
+              </a:spcAft>
+            </a:pPr>
+            <a:r>
+              <a:rPr sz="2000" b="0" i="0">
+                <a:solidFill>
+                  <a:srgbClr val="333333"/>
+                </a:solidFill>
+                <a:latin typeface="Calibri"/>
+              </a:rPr>
+              <a:t>–   No es clase autonoma y la defensa no se reemplaza por un video grabado, porque el Q&amp;A dirigido al azar es justamente el instrumento que verifica autoria y no tiene sustituto asincronico.</a:t>
+            </a:r>
+          </a:p>
+          <a:p>
+            <a:pPr>
+              <a:spcAft>
+                <a:spcPts val="800"/>
+              </a:spcAft>
+            </a:pPr>
+            <a:r>
+              <a:rPr sz="2000" b="0" i="0">
+                <a:solidFill>
+                  <a:srgbClr val="333333"/>
+                </a:solidFill>
+                <a:latin typeface="Calibri"/>
+              </a:rPr>
+              <a:t>–   El Q&amp;A escrito que pide el taller (tres preguntas duras que el propio estudiante se haria, con su respuesta) no reemplaza nada: es la preparacion del Q&amp;A en vivo</a:t>
+            </a:r>
+          </a:p>
+          <a:p>
+            <a:pPr>
+              <a:spcAft>
+                <a:spcPts val="800"/>
+              </a:spcAft>
+            </a:pPr>
+            <a:r>
+              <a:rPr sz="2000" b="0" i="0">
+                <a:solidFill>
+                  <a:srgbClr val="333333"/>
+                </a:solidFill>
+                <a:latin typeface="Calibri"/>
+              </a:rPr>
+              <a:t>–   Y en la practica el estudiante que lo escribio en serio responde mucho mejor cuando la pregunta llega de verdad.</a:t>
+            </a:r>
+          </a:p>
+        </p:txBody>
+      </p:sp>
+      <p:sp>
+        <p:nvSpPr>
+          <p:cNvPr id="6" name="TextBox 5"/>
+          <p:cNvSpPr txBox="1"/>
+          <p:nvPr/>
+        </p:nvSpPr>
+        <p:spPr>
+          <a:xfrm>
+            <a:off x="11185855" y="6473952"/>
+            <a:ext cx="640080" cy="274320"/>
+          </a:xfrm>
+          <a:prstGeom prst="rect">
+            <a:avLst/>
+          </a:prstGeom>
+          <a:noFill/>
+        </p:spPr>
+        <p:txBody>
+          <a:bodyPr wrap="square">
+            <a:spAutoFit/>
+          </a:bodyPr>
+          <a:lstStyle/>
+          <a:p>
+            <a:pPr algn="r"/>
+            <a:r>
+              <a:rPr sz="1100" b="0" i="0">
+                <a:solidFill>
+                  <a:srgbClr val="666666"/>
+                </a:solidFill>
+                <a:latin typeface="Calibri"/>
+              </a:rPr>
+              <a:t>16</a:t>
+            </a:r>
+          </a:p>
+        </p:txBody>
+      </p:sp>
+    </p:spTree>
+  </p:cSld>
+  <p:clrMapOvr>
+    <a:masterClrMapping/>
+  </p:clrMapOvr>
+</p:sld>
+</file>
+
+<file path=ppt/slides/slide17.xml><?xml version="1.0" encoding="utf-8"?>
+<p:sld xmlns:a="http://schemas.openxmlformats.org/drawingml/2006/main" xmlns:p="http://schemas.openxmlformats.org/presentationml/2006/main" xmlns:r="http://schemas.openxmlformats.org/officeDocument/2006/relationships">
+  <p:cSld>
+    <p:bg>
+      <p:bgPr>
+        <a:solidFill>
+          <a:srgbClr val="FFFFFF"/>
+        </a:solidFill>
+        <a:effectLst/>
+      </p:bgPr>
+    </p:bg>
+    <p:spTree>
+      <p:nvGrpSpPr>
+        <p:cNvPr id="1" name=""/>
+        <p:cNvGrpSpPr/>
+        <p:nvPr/>
+      </p:nvGrpSpPr>
+      <p:grpSpPr/>
+      <p:sp>
+        <p:nvSpPr>
+          <p:cNvPr id="2" name="Rectangle 1"/>
+          <p:cNvSpPr/>
+          <p:nvPr/>
+        </p:nvSpPr>
+        <p:spPr>
+          <a:xfrm>
+            <a:off x="0" y="0"/>
+            <a:ext cx="12191695" cy="960120"/>
+          </a:xfrm>
+          <a:prstGeom prst="rect">
+            <a:avLst/>
+          </a:prstGeom>
+          <a:solidFill>
+            <a:srgbClr val="095292"/>
+          </a:solidFill>
+          <a:ln>
+            <a:noFill/>
+          </a:ln>
+        </p:spPr>
+        <p:style>
+          <a:lnRef idx="1">
+            <a:schemeClr val="accent1"/>
+          </a:lnRef>
+          <a:fillRef idx="3">
+            <a:schemeClr val="accent1"/>
+          </a:fillRef>
+          <a:effectRef idx="2">
+            <a:schemeClr val="accent1"/>
+          </a:effectRef>
+          <a:fontRef idx="minor">
+            <a:schemeClr val="lt1"/>
+          </a:fontRef>
+        </p:style>
+        <p:txBody>
+          <a:bodyPr rtlCol="0" anchor="ctr"/>
+          <a:lstStyle/>
+          <a:p>
+            <a:pPr algn="ctr"/>
+          </a:p>
+        </p:txBody>
+      </p:sp>
+      <p:sp>
+        <p:nvSpPr>
+          <p:cNvPr id="3" name="Rectangle 2"/>
+          <p:cNvSpPr/>
+          <p:nvPr/>
+        </p:nvSpPr>
+        <p:spPr>
+          <a:xfrm>
+            <a:off x="0" y="960120"/>
+            <a:ext cx="12191695" cy="41148"/>
+          </a:xfrm>
+          <a:prstGeom prst="rect">
+            <a:avLst/>
+          </a:prstGeom>
+          <a:solidFill>
+            <a:srgbClr val="FFD000"/>
+          </a:solidFill>
+          <a:ln>
+            <a:noFill/>
+          </a:ln>
+        </p:spPr>
+        <p:style>
+          <a:lnRef idx="1">
+            <a:schemeClr val="accent1"/>
+          </a:lnRef>
+          <a:fillRef idx="3">
+            <a:schemeClr val="accent1"/>
+          </a:fillRef>
+          <a:effectRef idx="2">
+            <a:schemeClr val="accent1"/>
+          </a:effectRef>
+          <a:fontRef idx="minor">
+            <a:schemeClr val="lt1"/>
+          </a:fontRef>
+        </p:style>
+        <p:txBody>
+          <a:bodyPr rtlCol="0" anchor="ctr"/>
+          <a:lstStyle/>
+          <a:p>
+            <a:pPr algn="ctr"/>
+          </a:p>
+        </p:txBody>
+      </p:sp>
+      <p:sp>
+        <p:nvSpPr>
+          <p:cNvPr id="4" name="TextBox 3"/>
+          <p:cNvSpPr txBox="1"/>
+          <p:nvPr/>
+        </p:nvSpPr>
+        <p:spPr>
+          <a:xfrm>
+            <a:off x="457200" y="164592"/>
+            <a:ext cx="11277295" cy="502920"/>
+          </a:xfrm>
+          <a:prstGeom prst="rect">
+            <a:avLst/>
+          </a:prstGeom>
+          <a:noFill/>
+        </p:spPr>
+        <p:txBody>
+          <a:bodyPr wrap="square">
+            <a:spAutoFit/>
+          </a:bodyPr>
+          <a:lstStyle/>
+          <a:p>
+            <a:r>
+              <a:rPr sz="2600" b="1" i="0">
+                <a:solidFill>
+                  <a:srgbClr val="FFFFFF"/>
+                </a:solidFill>
+                <a:latin typeface="Calibri"/>
+              </a:rPr>
+              <a:t>Evaluar con rubrica: puntos a evidencia observable (1/2)</a:t>
+            </a:r>
+          </a:p>
+        </p:txBody>
+      </p:sp>
+      <p:sp>
+        <p:nvSpPr>
+          <p:cNvPr id="5" name="TextBox 4"/>
+          <p:cNvSpPr txBox="1"/>
+          <p:nvPr/>
+        </p:nvSpPr>
+        <p:spPr>
+          <a:xfrm>
+            <a:off x="457200" y="1170432"/>
+            <a:ext cx="11277295" cy="5230368"/>
+          </a:xfrm>
+          <a:prstGeom prst="rect">
+            <a:avLst/>
+          </a:prstGeom>
+          <a:noFill/>
+        </p:spPr>
+        <p:txBody>
+          <a:bodyPr wrap="square">
+            <a:spAutoFit/>
+          </a:bodyPr>
+          <a:lstStyle/>
+          <a:p>
+            <a:pPr>
+              <a:spcAft>
+                <a:spcPts val="800"/>
+              </a:spcAft>
+            </a:pPr>
+            <a:r>
+              <a:rPr sz="2000" b="0" i="0">
+                <a:solidFill>
+                  <a:srgbClr val="333333"/>
+                </a:solidFill>
+                <a:latin typeface="Calibri"/>
+              </a:rPr>
+              <a:t>–   Evaluar con rubrica significa asignar puntos a evidencia observable y no a impresion general, y por eso conviene leer el reparto en voz alta al abrir la clase.</a:t>
+            </a:r>
+          </a:p>
+          <a:p>
+            <a:pPr>
+              <a:spcAft>
+                <a:spcPts val="800"/>
+              </a:spcAft>
+            </a:pPr>
+            <a:r>
+              <a:rPr sz="2000" b="0" i="0">
+                <a:solidFill>
+                  <a:srgbClr val="333333"/>
+                </a:solidFill>
+                <a:latin typeface="Calibri"/>
+              </a:rPr>
+              <a:t>–   Los 100 puntos del PI CloudLite App se distribuyen asi: 15 puntos por dominio y decision IaaS/PaaS/SaaS justificada, 25 por los diagramas de arquitectura (componentes y despliegue)</a:t>
+            </a:r>
+          </a:p>
+          <a:p>
+            <a:pPr>
+              <a:spcAft>
+                <a:spcPts val="800"/>
+              </a:spcAft>
+            </a:pPr>
+            <a:r>
+              <a:rPr sz="2000" b="0" i="0">
+                <a:solidFill>
+                  <a:srgbClr val="333333"/>
+                </a:solidFill>
+                <a:latin typeface="Calibri"/>
+              </a:rPr>
+              <a:t>–   20 por el lab de contenedores con Dockerfile o compose mas la captura de la sesion, 15 por el CI/CD conceptual con el workflow.yml explicado, 10 por las secciones de seguridad, costos y escalabilidad del informe, y 15 por informe y sustentacion.</a:t>
+            </a:r>
+          </a:p>
+          <a:p>
+            <a:pPr>
+              <a:spcAft>
+                <a:spcPts val="800"/>
+              </a:spcAft>
+            </a:pPr>
+            <a:r>
+              <a:rPr sz="2000" b="0" i="0">
+                <a:solidFill>
+                  <a:srgbClr val="333333"/>
+                </a:solidFill>
+                <a:latin typeface="Calibri"/>
+              </a:rPr>
+              <a:t>–   Ese reparto responde la tercera pregunta previsible: «si el diagrama esta perfecto pero presentamos mal, cuanto pierdo?».</a:t>
+            </a:r>
+          </a:p>
+        </p:txBody>
+      </p:sp>
+      <p:sp>
+        <p:nvSpPr>
+          <p:cNvPr id="6" name="TextBox 5"/>
+          <p:cNvSpPr txBox="1"/>
+          <p:nvPr/>
+        </p:nvSpPr>
+        <p:spPr>
+          <a:xfrm>
+            <a:off x="11185855" y="6473952"/>
+            <a:ext cx="640080" cy="274320"/>
+          </a:xfrm>
+          <a:prstGeom prst="rect">
+            <a:avLst/>
+          </a:prstGeom>
+          <a:noFill/>
+        </p:spPr>
+        <p:txBody>
+          <a:bodyPr wrap="square">
+            <a:spAutoFit/>
+          </a:bodyPr>
+          <a:lstStyle/>
+          <a:p>
+            <a:pPr algn="r"/>
+            <a:r>
+              <a:rPr sz="1100" b="0" i="0">
+                <a:solidFill>
+                  <a:srgbClr val="666666"/>
+                </a:solidFill>
+                <a:latin typeface="Calibri"/>
+              </a:rPr>
+              <a:t>17</a:t>
+            </a:r>
+          </a:p>
+        </p:txBody>
+      </p:sp>
+    </p:spTree>
+  </p:cSld>
+  <p:clrMapOvr>
+    <a:masterClrMapping/>
+  </p:clrMapOvr>
+</p:sld>
+</file>
+
+<file path=ppt/slides/slide18.xml><?xml version="1.0" encoding="utf-8"?>
+<p:sld xmlns:a="http://schemas.openxmlformats.org/drawingml/2006/main" xmlns:p="http://schemas.openxmlformats.org/presentationml/2006/main" xmlns:r="http://schemas.openxmlformats.org/officeDocument/2006/relationships">
+  <p:cSld>
+    <p:bg>
+      <p:bgPr>
+        <a:solidFill>
+          <a:srgbClr val="FFFFFF"/>
+        </a:solidFill>
+        <a:effectLst/>
+      </p:bgPr>
+    </p:bg>
+    <p:spTree>
+      <p:nvGrpSpPr>
+        <p:cNvPr id="1" name=""/>
+        <p:cNvGrpSpPr/>
+        <p:nvPr/>
+      </p:nvGrpSpPr>
+      <p:grpSpPr/>
+      <p:sp>
+        <p:nvSpPr>
+          <p:cNvPr id="2" name="Rectangle 1"/>
+          <p:cNvSpPr/>
+          <p:nvPr/>
+        </p:nvSpPr>
+        <p:spPr>
+          <a:xfrm>
+            <a:off x="0" y="0"/>
+            <a:ext cx="12191695" cy="960120"/>
+          </a:xfrm>
+          <a:prstGeom prst="rect">
+            <a:avLst/>
+          </a:prstGeom>
+          <a:solidFill>
+            <a:srgbClr val="095292"/>
+          </a:solidFill>
+          <a:ln>
+            <a:noFill/>
+          </a:ln>
+        </p:spPr>
+        <p:style>
+          <a:lnRef idx="1">
+            <a:schemeClr val="accent1"/>
+          </a:lnRef>
+          <a:fillRef idx="3">
+            <a:schemeClr val="accent1"/>
+          </a:fillRef>
+          <a:effectRef idx="2">
+            <a:schemeClr val="accent1"/>
+          </a:effectRef>
+          <a:fontRef idx="minor">
+            <a:schemeClr val="lt1"/>
+          </a:fontRef>
+        </p:style>
+        <p:txBody>
+          <a:bodyPr rtlCol="0" anchor="ctr"/>
+          <a:lstStyle/>
+          <a:p>
+            <a:pPr algn="ctr"/>
+          </a:p>
+        </p:txBody>
+      </p:sp>
+      <p:sp>
+        <p:nvSpPr>
+          <p:cNvPr id="3" name="Rectangle 2"/>
+          <p:cNvSpPr/>
+          <p:nvPr/>
+        </p:nvSpPr>
+        <p:spPr>
+          <a:xfrm>
+            <a:off x="0" y="960120"/>
+            <a:ext cx="12191695" cy="41148"/>
+          </a:xfrm>
+          <a:prstGeom prst="rect">
+            <a:avLst/>
+          </a:prstGeom>
+          <a:solidFill>
+            <a:srgbClr val="FFD000"/>
+          </a:solidFill>
+          <a:ln>
+            <a:noFill/>
+          </a:ln>
+        </p:spPr>
+        <p:style>
+          <a:lnRef idx="1">
+            <a:schemeClr val="accent1"/>
+          </a:lnRef>
+          <a:fillRef idx="3">
+            <a:schemeClr val="accent1"/>
+          </a:fillRef>
+          <a:effectRef idx="2">
+            <a:schemeClr val="accent1"/>
+          </a:effectRef>
+          <a:fontRef idx="minor">
+            <a:schemeClr val="lt1"/>
+          </a:fontRef>
+        </p:style>
+        <p:txBody>
+          <a:bodyPr rtlCol="0" anchor="ctr"/>
+          <a:lstStyle/>
+          <a:p>
+            <a:pPr algn="ctr"/>
+          </a:p>
+        </p:txBody>
+      </p:sp>
+      <p:sp>
+        <p:nvSpPr>
+          <p:cNvPr id="4" name="TextBox 3"/>
+          <p:cNvSpPr txBox="1"/>
+          <p:nvPr/>
+        </p:nvSpPr>
+        <p:spPr>
+          <a:xfrm>
+            <a:off x="457200" y="164592"/>
+            <a:ext cx="11277295" cy="502920"/>
+          </a:xfrm>
+          <a:prstGeom prst="rect">
+            <a:avLst/>
+          </a:prstGeom>
+          <a:noFill/>
+        </p:spPr>
+        <p:txBody>
+          <a:bodyPr wrap="square">
+            <a:spAutoFit/>
+          </a:bodyPr>
+          <a:lstStyle/>
+          <a:p>
+            <a:r>
+              <a:rPr sz="2600" b="1" i="0">
+                <a:solidFill>
+                  <a:srgbClr val="FFFFFF"/>
+                </a:solidFill>
+                <a:latin typeface="Calibri"/>
+              </a:rPr>
+              <a:t>Evaluar con rubrica: puntos a evidencia observable (2/2)</a:t>
+            </a:r>
+          </a:p>
+        </p:txBody>
+      </p:sp>
+      <p:sp>
+        <p:nvSpPr>
+          <p:cNvPr id="5" name="TextBox 4"/>
+          <p:cNvSpPr txBox="1"/>
+          <p:nvPr/>
+        </p:nvSpPr>
+        <p:spPr>
+          <a:xfrm>
+            <a:off x="457200" y="1170432"/>
+            <a:ext cx="11277295" cy="5230368"/>
+          </a:xfrm>
+          <a:prstGeom prst="rect">
+            <a:avLst/>
+          </a:prstGeom>
+          <a:noFill/>
+        </p:spPr>
+        <p:txBody>
+          <a:bodyPr wrap="square">
+            <a:spAutoFit/>
+          </a:bodyPr>
+          <a:lstStyle/>
+          <a:p>
+            <a:pPr>
+              <a:spcAft>
+                <a:spcPts val="800"/>
+              </a:spcAft>
+            </a:pPr>
+            <a:r>
+              <a:rPr sz="2000" b="0" i="0">
+                <a:solidFill>
+                  <a:srgbClr val="333333"/>
+                </a:solidFill>
+                <a:latin typeface="Calibri"/>
+              </a:rPr>
+              <a:t>–   Directamente, hasta 15 puntos.</a:t>
+            </a:r>
+          </a:p>
+          <a:p>
+            <a:pPr>
+              <a:spcAft>
+                <a:spcPts val="800"/>
+              </a:spcAft>
+            </a:pPr>
+            <a:r>
+              <a:rPr sz="2000" b="0" i="0">
+                <a:solidFill>
+                  <a:srgbClr val="333333"/>
+                </a:solidFill>
+                <a:latin typeface="Calibri"/>
+              </a:rPr>
+              <a:t>–   Indirectamente mucho mas, porque la sustentacion es el mecanismo con el que el evaluador verifica que los otros 85 puntos son de quien sustenta: un diagrama excelente que nadie puede explicar levanta una duda de autoria que ninguna diapositiva resuelve.</a:t>
+            </a:r>
+          </a:p>
+          <a:p>
+            <a:pPr>
+              <a:spcAft>
+                <a:spcPts val="800"/>
+              </a:spcAft>
+            </a:pPr>
+            <a:r>
+              <a:rPr sz="2000" b="0" i="0">
+                <a:solidFill>
+                  <a:srgbClr val="333333"/>
+                </a:solidFill>
+                <a:latin typeface="Calibri"/>
+              </a:rPr>
+              <a:t>–   Y va el recordatorio de pesos que evita reclamos posteriores: estos 100 puntos valen 20% del Corte 3, el Parcial 3 de la Clase 14 (9 de noviembre, virtual sincrono por Meet y escrito) vale 15%, y la asistencia 5%.</a:t>
+            </a:r>
+          </a:p>
+          <a:p>
+            <a:pPr>
+              <a:spcAft>
+                <a:spcPts val="800"/>
+              </a:spcAft>
+            </a:pPr>
+            <a:r>
+              <a:rPr sz="2000" b="0" i="0">
+                <a:solidFill>
+                  <a:srgbClr val="333333"/>
+                </a:solidFill>
+                <a:latin typeface="Calibri"/>
+              </a:rPr>
+              <a:t>–   El proyecto no reemplaza ni compensa el parcial; son evaluaciones distintas del mismo corte, y decirlo una vez hoy ahorra tres correos la semana siguiente.</a:t>
+            </a:r>
+          </a:p>
+        </p:txBody>
+      </p:sp>
+      <p:sp>
+        <p:nvSpPr>
+          <p:cNvPr id="6" name="TextBox 5"/>
+          <p:cNvSpPr txBox="1"/>
+          <p:nvPr/>
+        </p:nvSpPr>
+        <p:spPr>
+          <a:xfrm>
+            <a:off x="11185855" y="6473952"/>
+            <a:ext cx="640080" cy="274320"/>
+          </a:xfrm>
+          <a:prstGeom prst="rect">
+            <a:avLst/>
+          </a:prstGeom>
+          <a:noFill/>
+        </p:spPr>
+        <p:txBody>
+          <a:bodyPr wrap="square">
+            <a:spAutoFit/>
+          </a:bodyPr>
+          <a:lstStyle/>
+          <a:p>
+            <a:pPr algn="r"/>
+            <a:r>
+              <a:rPr sz="1100" b="0" i="0">
+                <a:solidFill>
+                  <a:srgbClr val="666666"/>
+                </a:solidFill>
+                <a:latin typeface="Calibri"/>
+              </a:rPr>
+              <a:t>18</a:t>
+            </a:r>
+          </a:p>
+        </p:txBody>
+      </p:sp>
+    </p:spTree>
+  </p:cSld>
+  <p:clrMapOvr>
+    <a:masterClrMapping/>
+  </p:clrMapOvr>
+</p:sld>
+</file>
+
+<file path=ppt/slides/slide19.xml><?xml version="1.0" encoding="utf-8"?>
+<p:sld xmlns:a="http://schemas.openxmlformats.org/drawingml/2006/main" xmlns:p="http://schemas.openxmlformats.org/presentationml/2006/main" xmlns:r="http://schemas.openxmlformats.org/officeDocument/2006/relationships">
+  <p:cSld>
+    <p:bg>
+      <p:bgPr>
+        <a:solidFill>
+          <a:srgbClr val="FFFFFF"/>
+        </a:solidFill>
+        <a:effectLst/>
+      </p:bgPr>
+    </p:bg>
+    <p:spTree>
+      <p:nvGrpSpPr>
+        <p:cNvPr id="1" name=""/>
+        <p:cNvGrpSpPr/>
+        <p:nvPr/>
+      </p:nvGrpSpPr>
+      <p:grpSpPr/>
+      <p:sp>
+        <p:nvSpPr>
+          <p:cNvPr id="2" name="Rectangle 1"/>
+          <p:cNvSpPr/>
+          <p:nvPr/>
+        </p:nvSpPr>
+        <p:spPr>
+          <a:xfrm>
+            <a:off x="0" y="0"/>
+            <a:ext cx="12191695" cy="960120"/>
+          </a:xfrm>
+          <a:prstGeom prst="rect">
+            <a:avLst/>
+          </a:prstGeom>
+          <a:solidFill>
+            <a:srgbClr val="095292"/>
+          </a:solidFill>
+          <a:ln>
+            <a:noFill/>
+          </a:ln>
+        </p:spPr>
+        <p:style>
+          <a:lnRef idx="1">
+            <a:schemeClr val="accent1"/>
+          </a:lnRef>
+          <a:fillRef idx="3">
+            <a:schemeClr val="accent1"/>
+          </a:fillRef>
+          <a:effectRef idx="2">
+            <a:schemeClr val="accent1"/>
+          </a:effectRef>
+          <a:fontRef idx="minor">
+            <a:schemeClr val="lt1"/>
+          </a:fontRef>
+        </p:style>
+        <p:txBody>
+          <a:bodyPr rtlCol="0" anchor="ctr"/>
+          <a:lstStyle/>
+          <a:p>
+            <a:pPr algn="ctr"/>
+          </a:p>
+        </p:txBody>
+      </p:sp>
+      <p:sp>
+        <p:nvSpPr>
+          <p:cNvPr id="3" name="Rectangle 2"/>
+          <p:cNvSpPr/>
+          <p:nvPr/>
+        </p:nvSpPr>
+        <p:spPr>
+          <a:xfrm>
+            <a:off x="0" y="960120"/>
+            <a:ext cx="12191695" cy="41148"/>
+          </a:xfrm>
+          <a:prstGeom prst="rect">
+            <a:avLst/>
+          </a:prstGeom>
+          <a:solidFill>
+            <a:srgbClr val="FFD000"/>
+          </a:solidFill>
+          <a:ln>
+            <a:noFill/>
+          </a:ln>
+        </p:spPr>
+        <p:style>
+          <a:lnRef idx="1">
+            <a:schemeClr val="accent1"/>
+          </a:lnRef>
+          <a:fillRef idx="3">
+            <a:schemeClr val="accent1"/>
+          </a:fillRef>
+          <a:effectRef idx="2">
+            <a:schemeClr val="accent1"/>
+          </a:effectRef>
+          <a:fontRef idx="minor">
+            <a:schemeClr val="lt1"/>
+          </a:fontRef>
+        </p:style>
+        <p:txBody>
+          <a:bodyPr rtlCol="0" anchor="ctr"/>
+          <a:lstStyle/>
+          <a:p>
+            <a:pPr algn="ctr"/>
+          </a:p>
+        </p:txBody>
+      </p:sp>
+      <p:sp>
+        <p:nvSpPr>
+          <p:cNvPr id="4" name="TextBox 3"/>
+          <p:cNvSpPr txBox="1"/>
+          <p:nvPr/>
+        </p:nvSpPr>
+        <p:spPr>
+          <a:xfrm>
+            <a:off x="457200" y="164592"/>
+            <a:ext cx="11277295" cy="502920"/>
+          </a:xfrm>
+          <a:prstGeom prst="rect">
+            <a:avLst/>
+          </a:prstGeom>
+          <a:noFill/>
+        </p:spPr>
+        <p:txBody>
+          <a:bodyPr wrap="square">
+            <a:spAutoFit/>
+          </a:bodyPr>
+          <a:lstStyle/>
+          <a:p>
+            <a:r>
+              <a:rPr sz="2600" b="1" i="0">
+                <a:solidFill>
+                  <a:srgbClr val="FFFFFF"/>
+                </a:solidFill>
+                <a:latin typeface="Calibri"/>
+              </a:rPr>
+              <a:t>El cierre del curso: conectar lo hecho con la practica profesional (1/2)</a:t>
+            </a:r>
+          </a:p>
+        </p:txBody>
+      </p:sp>
+      <p:sp>
+        <p:nvSpPr>
+          <p:cNvPr id="5" name="TextBox 4"/>
+          <p:cNvSpPr txBox="1"/>
+          <p:nvPr/>
+        </p:nvSpPr>
+        <p:spPr>
+          <a:xfrm>
+            <a:off x="457200" y="1170432"/>
+            <a:ext cx="11277295" cy="5230368"/>
+          </a:xfrm>
+          <a:prstGeom prst="rect">
+            <a:avLst/>
+          </a:prstGeom>
+          <a:noFill/>
+        </p:spPr>
+        <p:txBody>
+          <a:bodyPr wrap="square">
+            <a:spAutoFit/>
+          </a:bodyPr>
+          <a:lstStyle/>
+          <a:p>
+            <a:pPr>
+              <a:spcAft>
+                <a:spcPts val="800"/>
+              </a:spcAft>
+            </a:pPr>
+            <a:r>
+              <a:rPr sz="2000" b="0" i="0">
+                <a:solidFill>
+                  <a:srgbClr val="333333"/>
+                </a:solidFill>
+                <a:latin typeface="Calibri"/>
+              </a:rPr>
+              <a:t>–   El cierre del curso debe conectar lo hecho con la practica profesional, porque de eso depende que el estudiante conserve el material en vez de borrarlo al terminar el semestre.</a:t>
+            </a:r>
+          </a:p>
+          <a:p>
+            <a:pPr>
+              <a:spcAft>
+                <a:spcPts val="800"/>
+              </a:spcAft>
+            </a:pPr>
+            <a:r>
+              <a:rPr sz="2000" b="0" i="0">
+                <a:solidFill>
+                  <a:srgbClr val="333333"/>
+                </a:solidFill>
+                <a:latin typeface="Calibri"/>
+              </a:rPr>
+              <a:t>–   En la industria, esta sustentacion tiene nombre propio: design review, o architecture review.</a:t>
+            </a:r>
+          </a:p>
+          <a:p>
+            <a:pPr>
+              <a:spcAft>
+                <a:spcPts val="800"/>
+              </a:spcAft>
+            </a:pPr>
+            <a:r>
+              <a:rPr sz="2000" b="0" i="0">
+                <a:solidFill>
+                  <a:srgbClr val="333333"/>
+                </a:solidFill>
+                <a:latin typeface="Calibri"/>
+              </a:rPr>
+              <a:t>–   Un equipo presenta una propuesta a pares y a arquitectos mas experimentados cuyo trabajo explicito es buscarle el punto debil antes de que ese punto debil cueste dinero</a:t>
+            </a:r>
+          </a:p>
+          <a:p>
+            <a:pPr>
+              <a:spcAft>
+                <a:spcPts val="800"/>
+              </a:spcAft>
+            </a:pPr>
+            <a:r>
+              <a:rPr sz="2000" b="0" i="0">
+                <a:solidFill>
+                  <a:srgbClr val="333333"/>
+                </a:solidFill>
+                <a:latin typeface="Calibri"/>
+              </a:rPr>
+              <a:t>–   Y lo que se pregunta ahi es exactamente lo mismo que hoy, es decir que decidieron, que descartaron, que aceptaron perder, y como sabran si se equivocaron.</a:t>
+            </a:r>
+          </a:p>
+          <a:p>
+            <a:pPr>
+              <a:spcAft>
+                <a:spcPts val="800"/>
+              </a:spcAft>
+            </a:pPr>
+            <a:r>
+              <a:rPr sz="2000" b="0" i="0">
+                <a:solidFill>
+                  <a:srgbClr val="333333"/>
+                </a:solidFill>
+                <a:latin typeface="Calibri"/>
+              </a:rPr>
+              <a:t>–   El ADR es un formato real, usado en equipos reales, no un invento academico del curso.</a:t>
+            </a:r>
+          </a:p>
+        </p:txBody>
+      </p:sp>
+      <p:sp>
+        <p:nvSpPr>
+          <p:cNvPr id="6" name="TextBox 5"/>
+          <p:cNvSpPr txBox="1"/>
+          <p:nvPr/>
+        </p:nvSpPr>
+        <p:spPr>
+          <a:xfrm>
+            <a:off x="11185855" y="6473952"/>
+            <a:ext cx="640080" cy="274320"/>
+          </a:xfrm>
+          <a:prstGeom prst="rect">
+            <a:avLst/>
+          </a:prstGeom>
+          <a:noFill/>
+        </p:spPr>
+        <p:txBody>
+          <a:bodyPr wrap="square">
+            <a:spAutoFit/>
+          </a:bodyPr>
+          <a:lstStyle/>
+          <a:p>
+            <a:pPr algn="r"/>
+            <a:r>
+              <a:rPr sz="1100" b="0" i="0">
+                <a:solidFill>
+                  <a:srgbClr val="666666"/>
+                </a:solidFill>
+                <a:latin typeface="Calibri"/>
+              </a:rPr>
+              <a:t>19</a:t>
             </a:r>
           </a:p>
         </p:txBody>
@@ -5412,6 +6820,3745 @@
 </p:sld>
 </file>
 
+<file path=ppt/slides/slide20.xml><?xml version="1.0" encoding="utf-8"?>
+<p:sld xmlns:a="http://schemas.openxmlformats.org/drawingml/2006/main" xmlns:p="http://schemas.openxmlformats.org/presentationml/2006/main" xmlns:r="http://schemas.openxmlformats.org/officeDocument/2006/relationships">
+  <p:cSld>
+    <p:bg>
+      <p:bgPr>
+        <a:solidFill>
+          <a:srgbClr val="FFFFFF"/>
+        </a:solidFill>
+        <a:effectLst/>
+      </p:bgPr>
+    </p:bg>
+    <p:spTree>
+      <p:nvGrpSpPr>
+        <p:cNvPr id="1" name=""/>
+        <p:cNvGrpSpPr/>
+        <p:nvPr/>
+      </p:nvGrpSpPr>
+      <p:grpSpPr/>
+      <p:sp>
+        <p:nvSpPr>
+          <p:cNvPr id="2" name="Rectangle 1"/>
+          <p:cNvSpPr/>
+          <p:nvPr/>
+        </p:nvSpPr>
+        <p:spPr>
+          <a:xfrm>
+            <a:off x="0" y="0"/>
+            <a:ext cx="12191695" cy="960120"/>
+          </a:xfrm>
+          <a:prstGeom prst="rect">
+            <a:avLst/>
+          </a:prstGeom>
+          <a:solidFill>
+            <a:srgbClr val="095292"/>
+          </a:solidFill>
+          <a:ln>
+            <a:noFill/>
+          </a:ln>
+        </p:spPr>
+        <p:style>
+          <a:lnRef idx="1">
+            <a:schemeClr val="accent1"/>
+          </a:lnRef>
+          <a:fillRef idx="3">
+            <a:schemeClr val="accent1"/>
+          </a:fillRef>
+          <a:effectRef idx="2">
+            <a:schemeClr val="accent1"/>
+          </a:effectRef>
+          <a:fontRef idx="minor">
+            <a:schemeClr val="lt1"/>
+          </a:fontRef>
+        </p:style>
+        <p:txBody>
+          <a:bodyPr rtlCol="0" anchor="ctr"/>
+          <a:lstStyle/>
+          <a:p>
+            <a:pPr algn="ctr"/>
+          </a:p>
+        </p:txBody>
+      </p:sp>
+      <p:sp>
+        <p:nvSpPr>
+          <p:cNvPr id="3" name="Rectangle 2"/>
+          <p:cNvSpPr/>
+          <p:nvPr/>
+        </p:nvSpPr>
+        <p:spPr>
+          <a:xfrm>
+            <a:off x="0" y="960120"/>
+            <a:ext cx="12191695" cy="41148"/>
+          </a:xfrm>
+          <a:prstGeom prst="rect">
+            <a:avLst/>
+          </a:prstGeom>
+          <a:solidFill>
+            <a:srgbClr val="FFD000"/>
+          </a:solidFill>
+          <a:ln>
+            <a:noFill/>
+          </a:ln>
+        </p:spPr>
+        <p:style>
+          <a:lnRef idx="1">
+            <a:schemeClr val="accent1"/>
+          </a:lnRef>
+          <a:fillRef idx="3">
+            <a:schemeClr val="accent1"/>
+          </a:fillRef>
+          <a:effectRef idx="2">
+            <a:schemeClr val="accent1"/>
+          </a:effectRef>
+          <a:fontRef idx="minor">
+            <a:schemeClr val="lt1"/>
+          </a:fontRef>
+        </p:style>
+        <p:txBody>
+          <a:bodyPr rtlCol="0" anchor="ctr"/>
+          <a:lstStyle/>
+          <a:p>
+            <a:pPr algn="ctr"/>
+          </a:p>
+        </p:txBody>
+      </p:sp>
+      <p:sp>
+        <p:nvSpPr>
+          <p:cNvPr id="4" name="TextBox 3"/>
+          <p:cNvSpPr txBox="1"/>
+          <p:nvPr/>
+        </p:nvSpPr>
+        <p:spPr>
+          <a:xfrm>
+            <a:off x="457200" y="164592"/>
+            <a:ext cx="11277295" cy="502920"/>
+          </a:xfrm>
+          <a:prstGeom prst="rect">
+            <a:avLst/>
+          </a:prstGeom>
+          <a:noFill/>
+        </p:spPr>
+        <p:txBody>
+          <a:bodyPr wrap="square">
+            <a:spAutoFit/>
+          </a:bodyPr>
+          <a:lstStyle/>
+          <a:p>
+            <a:r>
+              <a:rPr sz="2600" b="1" i="0">
+                <a:solidFill>
+                  <a:srgbClr val="FFFFFF"/>
+                </a:solidFill>
+                <a:latin typeface="Calibri"/>
+              </a:rPr>
+              <a:t>El cierre del curso: conectar lo hecho con la practica profesional (2/2)</a:t>
+            </a:r>
+          </a:p>
+        </p:txBody>
+      </p:sp>
+      <p:sp>
+        <p:nvSpPr>
+          <p:cNvPr id="5" name="TextBox 4"/>
+          <p:cNvSpPr txBox="1"/>
+          <p:nvPr/>
+        </p:nvSpPr>
+        <p:spPr>
+          <a:xfrm>
+            <a:off x="457200" y="1170432"/>
+            <a:ext cx="11277295" cy="5230368"/>
+          </a:xfrm>
+          <a:prstGeom prst="rect">
+            <a:avLst/>
+          </a:prstGeom>
+          <a:noFill/>
+        </p:spPr>
+        <p:txBody>
+          <a:bodyPr wrap="square">
+            <a:spAutoFit/>
+          </a:bodyPr>
+          <a:lstStyle/>
+          <a:p>
+            <a:pPr>
+              <a:spcAft>
+                <a:spcPts val="800"/>
+              </a:spcAft>
+            </a:pPr>
+            <a:r>
+              <a:rPr sz="2000" b="0" i="0">
+                <a:solidFill>
+                  <a:srgbClr val="333333"/>
+                </a:solidFill>
+                <a:latin typeface="Calibri"/>
+              </a:rPr>
+              <a:t>–   El diagrama de contenedores, el Dockerfile y el pipeline que el estudiante escribio son los mismos artefactos que se producen con una cuenta corporativa</a:t>
+            </a:r>
+          </a:p>
+          <a:p>
+            <a:pPr>
+              <a:spcAft>
+                <a:spcPts val="800"/>
+              </a:spcAft>
+            </a:pPr>
+            <a:r>
+              <a:rPr sz="2000" b="0" i="0">
+                <a:solidFill>
+                  <a:srgbClr val="333333"/>
+                </a:solidFill>
+                <a:latin typeface="Calibri"/>
+              </a:rPr>
+              <a:t>–   Lo que no se aprende en un free tier es justamente lo que si se aprendio aqui, que es razonar el trade-off.</a:t>
+            </a:r>
+          </a:p>
+          <a:p>
+            <a:pPr>
+              <a:spcAft>
+                <a:spcPts val="800"/>
+              </a:spcAft>
+            </a:pPr>
+            <a:r>
+              <a:rPr sz="2000" b="0" i="0">
+                <a:solidFill>
+                  <a:srgbClr val="333333"/>
+                </a:solidFill>
+                <a:latin typeface="Calibri"/>
+              </a:rPr>
+              <a:t>–   La frase de cierre util es que arquitectura no es una lista de logos de proveedores, sino un conjunto de decisiones documentadas con sus consecuencias.</a:t>
+            </a:r>
+          </a:p>
+          <a:p>
+            <a:pPr>
+              <a:spcAft>
+                <a:spcPts val="800"/>
+              </a:spcAft>
+            </a:pPr>
+            <a:r>
+              <a:rPr sz="2000" b="0" i="0">
+                <a:solidFill>
+                  <a:srgbClr val="333333"/>
+                </a:solidFill>
+                <a:latin typeface="Calibri"/>
+              </a:rPr>
+              <a:t>–   Y el pedido final debe ser concreto y verificable: conserven el repositorio con el informe, los diagramas y el workflow como portafolio, porque eso es lo que se muestra en una primera entrevista tecnica cuando piden un ejemplo de trabajo propio.</a:t>
+            </a:r>
+          </a:p>
+        </p:txBody>
+      </p:sp>
+      <p:sp>
+        <p:nvSpPr>
+          <p:cNvPr id="6" name="TextBox 5"/>
+          <p:cNvSpPr txBox="1"/>
+          <p:nvPr/>
+        </p:nvSpPr>
+        <p:spPr>
+          <a:xfrm>
+            <a:off x="11185855" y="6473952"/>
+            <a:ext cx="640080" cy="274320"/>
+          </a:xfrm>
+          <a:prstGeom prst="rect">
+            <a:avLst/>
+          </a:prstGeom>
+          <a:noFill/>
+        </p:spPr>
+        <p:txBody>
+          <a:bodyPr wrap="square">
+            <a:spAutoFit/>
+          </a:bodyPr>
+          <a:lstStyle/>
+          <a:p>
+            <a:pPr algn="r"/>
+            <a:r>
+              <a:rPr sz="1100" b="0" i="0">
+                <a:solidFill>
+                  <a:srgbClr val="666666"/>
+                </a:solidFill>
+                <a:latin typeface="Calibri"/>
+              </a:rPr>
+              <a:t>20</a:t>
+            </a:r>
+          </a:p>
+        </p:txBody>
+      </p:sp>
+    </p:spTree>
+  </p:cSld>
+  <p:clrMapOvr>
+    <a:masterClrMapping/>
+  </p:clrMapOvr>
+</p:sld>
+</file>
+
+<file path=ppt/slides/slide21.xml><?xml version="1.0" encoding="utf-8"?>
+<p:sld xmlns:a="http://schemas.openxmlformats.org/drawingml/2006/main" xmlns:p="http://schemas.openxmlformats.org/presentationml/2006/main" xmlns:r="http://schemas.openxmlformats.org/officeDocument/2006/relationships">
+  <p:cSld>
+    <p:bg>
+      <p:bgPr>
+        <a:solidFill>
+          <a:srgbClr val="FFFFFF"/>
+        </a:solidFill>
+        <a:effectLst/>
+      </p:bgPr>
+    </p:bg>
+    <p:spTree>
+      <p:nvGrpSpPr>
+        <p:cNvPr id="1" name=""/>
+        <p:cNvGrpSpPr/>
+        <p:nvPr/>
+      </p:nvGrpSpPr>
+      <p:grpSpPr/>
+      <p:sp>
+        <p:nvSpPr>
+          <p:cNvPr id="2" name="Rectangle 1"/>
+          <p:cNvSpPr/>
+          <p:nvPr/>
+        </p:nvSpPr>
+        <p:spPr>
+          <a:xfrm>
+            <a:off x="0" y="0"/>
+            <a:ext cx="12191695" cy="1170432"/>
+          </a:xfrm>
+          <a:prstGeom prst="rect">
+            <a:avLst/>
+          </a:prstGeom>
+          <a:solidFill>
+            <a:srgbClr val="095292"/>
+          </a:solidFill>
+          <a:ln>
+            <a:noFill/>
+          </a:ln>
+        </p:spPr>
+        <p:style>
+          <a:lnRef idx="1">
+            <a:schemeClr val="accent1"/>
+          </a:lnRef>
+          <a:fillRef idx="3">
+            <a:schemeClr val="accent1"/>
+          </a:fillRef>
+          <a:effectRef idx="2">
+            <a:schemeClr val="accent1"/>
+          </a:effectRef>
+          <a:fontRef idx="minor">
+            <a:schemeClr val="lt1"/>
+          </a:fontRef>
+        </p:style>
+        <p:txBody>
+          <a:bodyPr rtlCol="0" anchor="ctr"/>
+          <a:lstStyle/>
+          <a:p>
+            <a:pPr algn="ctr"/>
+          </a:p>
+        </p:txBody>
+      </p:sp>
+      <p:sp>
+        <p:nvSpPr>
+          <p:cNvPr id="3" name="Rectangle 2"/>
+          <p:cNvSpPr/>
+          <p:nvPr/>
+        </p:nvSpPr>
+        <p:spPr>
+          <a:xfrm>
+            <a:off x="0" y="1170432"/>
+            <a:ext cx="12191695" cy="41148"/>
+          </a:xfrm>
+          <a:prstGeom prst="rect">
+            <a:avLst/>
+          </a:prstGeom>
+          <a:solidFill>
+            <a:srgbClr val="FFD000"/>
+          </a:solidFill>
+          <a:ln>
+            <a:noFill/>
+          </a:ln>
+        </p:spPr>
+        <p:style>
+          <a:lnRef idx="1">
+            <a:schemeClr val="accent1"/>
+          </a:lnRef>
+          <a:fillRef idx="3">
+            <a:schemeClr val="accent1"/>
+          </a:fillRef>
+          <a:effectRef idx="2">
+            <a:schemeClr val="accent1"/>
+          </a:effectRef>
+          <a:fontRef idx="minor">
+            <a:schemeClr val="lt1"/>
+          </a:fontRef>
+        </p:style>
+        <p:txBody>
+          <a:bodyPr rtlCol="0" anchor="ctr"/>
+          <a:lstStyle/>
+          <a:p>
+            <a:pPr algn="ctr"/>
+          </a:p>
+        </p:txBody>
+      </p:sp>
+      <p:sp>
+        <p:nvSpPr>
+          <p:cNvPr id="4" name="TextBox 3"/>
+          <p:cNvSpPr txBox="1"/>
+          <p:nvPr/>
+        </p:nvSpPr>
+        <p:spPr>
+          <a:xfrm>
+            <a:off x="457200" y="164592"/>
+            <a:ext cx="11277295" cy="384048"/>
+          </a:xfrm>
+          <a:prstGeom prst="rect">
+            <a:avLst/>
+          </a:prstGeom>
+          <a:noFill/>
+        </p:spPr>
+        <p:txBody>
+          <a:bodyPr wrap="square">
+            <a:spAutoFit/>
+          </a:bodyPr>
+          <a:lstStyle/>
+          <a:p>
+            <a:r>
+              <a:rPr sz="2600" b="1" i="0">
+                <a:solidFill>
+                  <a:srgbClr val="FFFFFF"/>
+                </a:solidFill>
+                <a:latin typeface="Calibri"/>
+              </a:rPr>
+              <a:t>Herramientas de hoy</a:t>
+            </a:r>
+          </a:p>
+        </p:txBody>
+      </p:sp>
+      <p:sp>
+        <p:nvSpPr>
+          <p:cNvPr id="5" name="TextBox 4"/>
+          <p:cNvSpPr txBox="1"/>
+          <p:nvPr/>
+        </p:nvSpPr>
+        <p:spPr>
+          <a:xfrm>
+            <a:off x="457200" y="566928"/>
+            <a:ext cx="11277295" cy="411480"/>
+          </a:xfrm>
+          <a:prstGeom prst="rect">
+            <a:avLst/>
+          </a:prstGeom>
+          <a:noFill/>
+        </p:spPr>
+        <p:txBody>
+          <a:bodyPr wrap="square">
+            <a:spAutoFit/>
+          </a:bodyPr>
+          <a:lstStyle/>
+          <a:p>
+            <a:r>
+              <a:rPr sz="1400" b="0" i="0">
+                <a:solidFill>
+                  <a:srgbClr val="B8D8EE"/>
+                </a:solidFill>
+                <a:latin typeface="Calibri"/>
+              </a:rPr>
+              <a:t>Gratis · navegador o free tier · sin cuenta de pago</a:t>
+            </a:r>
+          </a:p>
+        </p:txBody>
+      </p:sp>
+      <p:sp>
+        <p:nvSpPr>
+          <p:cNvPr id="6" name="Rounded Rectangle 5"/>
+          <p:cNvSpPr/>
+          <p:nvPr/>
+        </p:nvSpPr>
+        <p:spPr>
+          <a:xfrm>
+            <a:off x="457200" y="1591056"/>
+            <a:ext cx="3624986" cy="2299716"/>
+          </a:xfrm>
+          <a:prstGeom prst="roundRect">
+            <a:avLst>
+              <a:gd name="adj" fmla="val 12000"/>
+            </a:avLst>
+          </a:prstGeom>
+          <a:solidFill>
+            <a:srgbClr val="F2F2F2"/>
+          </a:solidFill>
+          <a:ln>
+            <a:noFill/>
+          </a:ln>
+        </p:spPr>
+        <p:style>
+          <a:lnRef idx="1">
+            <a:schemeClr val="accent1"/>
+          </a:lnRef>
+          <a:fillRef idx="3">
+            <a:schemeClr val="accent1"/>
+          </a:fillRef>
+          <a:effectRef idx="2">
+            <a:schemeClr val="accent1"/>
+          </a:effectRef>
+          <a:fontRef idx="minor">
+            <a:schemeClr val="lt1"/>
+          </a:fontRef>
+        </p:style>
+        <p:txBody>
+          <a:bodyPr rtlCol="0" anchor="ctr"/>
+          <a:lstStyle/>
+          <a:p>
+            <a:pPr algn="ctr"/>
+          </a:p>
+        </p:txBody>
+      </p:sp>
+      <p:sp>
+        <p:nvSpPr>
+          <p:cNvPr id="7" name="Rectangle 6"/>
+          <p:cNvSpPr/>
+          <p:nvPr/>
+        </p:nvSpPr>
+        <p:spPr>
+          <a:xfrm>
+            <a:off x="457200" y="1591056"/>
+            <a:ext cx="3624986" cy="64008"/>
+          </a:xfrm>
+          <a:prstGeom prst="rect">
+            <a:avLst/>
+          </a:prstGeom>
+          <a:solidFill>
+            <a:srgbClr val="095292"/>
+          </a:solidFill>
+          <a:ln>
+            <a:noFill/>
+          </a:ln>
+        </p:spPr>
+        <p:style>
+          <a:lnRef idx="1">
+            <a:schemeClr val="accent1"/>
+          </a:lnRef>
+          <a:fillRef idx="3">
+            <a:schemeClr val="accent1"/>
+          </a:fillRef>
+          <a:effectRef idx="2">
+            <a:schemeClr val="accent1"/>
+          </a:effectRef>
+          <a:fontRef idx="minor">
+            <a:schemeClr val="lt1"/>
+          </a:fontRef>
+        </p:style>
+        <p:txBody>
+          <a:bodyPr rtlCol="0" anchor="ctr"/>
+          <a:lstStyle/>
+          <a:p>
+            <a:pPr algn="ctr"/>
+          </a:p>
+        </p:txBody>
+      </p:sp>
+      <p:sp>
+        <p:nvSpPr>
+          <p:cNvPr id="8" name="Rectangle 7"/>
+          <p:cNvSpPr/>
+          <p:nvPr/>
+        </p:nvSpPr>
+        <p:spPr>
+          <a:xfrm>
+            <a:off x="457200" y="1655064"/>
+            <a:ext cx="3624986" cy="27432"/>
+          </a:xfrm>
+          <a:prstGeom prst="rect">
+            <a:avLst/>
+          </a:prstGeom>
+          <a:solidFill>
+            <a:srgbClr val="FFD000"/>
+          </a:solidFill>
+          <a:ln>
+            <a:noFill/>
+          </a:ln>
+        </p:spPr>
+        <p:style>
+          <a:lnRef idx="1">
+            <a:schemeClr val="accent1"/>
+          </a:lnRef>
+          <a:fillRef idx="3">
+            <a:schemeClr val="accent1"/>
+          </a:fillRef>
+          <a:effectRef idx="2">
+            <a:schemeClr val="accent1"/>
+          </a:effectRef>
+          <a:fontRef idx="minor">
+            <a:schemeClr val="lt1"/>
+          </a:fontRef>
+        </p:style>
+        <p:txBody>
+          <a:bodyPr rtlCol="0" anchor="ctr"/>
+          <a:lstStyle/>
+          <a:p>
+            <a:pPr algn="ctr"/>
+          </a:p>
+        </p:txBody>
+      </p:sp>
+      <p:pic>
+        <p:nvPicPr>
+          <p:cNvPr id="9" name="Picture 8" descr="google_docs.png"/>
+          <p:cNvPicPr>
+            <a:picLocks noChangeAspect="1"/>
+          </p:cNvPicPr>
+          <p:nvPr/>
+        </p:nvPicPr>
+        <p:blipFill>
+          <a:blip r:embed="rId2"/>
+          <a:stretch>
+            <a:fillRect/>
+          </a:stretch>
+        </p:blipFill>
+        <p:spPr>
+          <a:xfrm>
+            <a:off x="1659331" y="1847087"/>
+            <a:ext cx="1220724" cy="1220724"/>
+          </a:xfrm>
+          <a:prstGeom prst="rect">
+            <a:avLst/>
+          </a:prstGeom>
+        </p:spPr>
+      </p:pic>
+      <p:sp>
+        <p:nvSpPr>
+          <p:cNvPr id="10" name="TextBox 9"/>
+          <p:cNvSpPr txBox="1"/>
+          <p:nvPr/>
+        </p:nvSpPr>
+        <p:spPr>
+          <a:xfrm>
+            <a:off x="530352" y="3159251"/>
+            <a:ext cx="3478682" cy="621792"/>
+          </a:xfrm>
+          <a:prstGeom prst="rect">
+            <a:avLst/>
+          </a:prstGeom>
+          <a:noFill/>
+        </p:spPr>
+        <p:txBody>
+          <a:bodyPr wrap="square" anchor="t"/>
+          <a:lstStyle/>
+          <a:p>
+            <a:pPr algn="ctr"/>
+            <a:r>
+              <a:rPr sz="1300" b="1" i="0">
+                <a:solidFill>
+                  <a:srgbClr val="095292"/>
+                </a:solidFill>
+                <a:latin typeface="Calibri"/>
+              </a:rPr>
+              <a:t>Google Docs</a:t>
+            </a:r>
+          </a:p>
+          <a:p>
+            <a:pPr algn="ctr">
+              <a:spcBef>
+                <a:spcPts val="200"/>
+              </a:spcBef>
+            </a:pPr>
+            <a:r>
+              <a:rPr sz="1000" b="0" i="0">
+                <a:solidFill>
+                  <a:srgbClr val="666666"/>
+                </a:solidFill>
+                <a:latin typeface="Calibri"/>
+              </a:rPr>
+              <a:t>Pitch y portafolio</a:t>
+            </a:r>
+          </a:p>
+        </p:txBody>
+      </p:sp>
+      <p:sp>
+        <p:nvSpPr>
+          <p:cNvPr id="11" name="Rounded Rectangle 10"/>
+          <p:cNvSpPr/>
+          <p:nvPr/>
+        </p:nvSpPr>
+        <p:spPr>
+          <a:xfrm>
+            <a:off x="4283354" y="1591056"/>
+            <a:ext cx="3624986" cy="2299716"/>
+          </a:xfrm>
+          <a:prstGeom prst="roundRect">
+            <a:avLst>
+              <a:gd name="adj" fmla="val 12000"/>
+            </a:avLst>
+          </a:prstGeom>
+          <a:solidFill>
+            <a:srgbClr val="F2F2F2"/>
+          </a:solidFill>
+          <a:ln>
+            <a:noFill/>
+          </a:ln>
+        </p:spPr>
+        <p:style>
+          <a:lnRef idx="1">
+            <a:schemeClr val="accent1"/>
+          </a:lnRef>
+          <a:fillRef idx="3">
+            <a:schemeClr val="accent1"/>
+          </a:fillRef>
+          <a:effectRef idx="2">
+            <a:schemeClr val="accent1"/>
+          </a:effectRef>
+          <a:fontRef idx="minor">
+            <a:schemeClr val="lt1"/>
+          </a:fontRef>
+        </p:style>
+        <p:txBody>
+          <a:bodyPr rtlCol="0" anchor="ctr"/>
+          <a:lstStyle/>
+          <a:p>
+            <a:pPr algn="ctr"/>
+          </a:p>
+        </p:txBody>
+      </p:sp>
+      <p:sp>
+        <p:nvSpPr>
+          <p:cNvPr id="12" name="Rectangle 11"/>
+          <p:cNvSpPr/>
+          <p:nvPr/>
+        </p:nvSpPr>
+        <p:spPr>
+          <a:xfrm>
+            <a:off x="4283354" y="1591056"/>
+            <a:ext cx="3624986" cy="64008"/>
+          </a:xfrm>
+          <a:prstGeom prst="rect">
+            <a:avLst/>
+          </a:prstGeom>
+          <a:solidFill>
+            <a:srgbClr val="095292"/>
+          </a:solidFill>
+          <a:ln>
+            <a:noFill/>
+          </a:ln>
+        </p:spPr>
+        <p:style>
+          <a:lnRef idx="1">
+            <a:schemeClr val="accent1"/>
+          </a:lnRef>
+          <a:fillRef idx="3">
+            <a:schemeClr val="accent1"/>
+          </a:fillRef>
+          <a:effectRef idx="2">
+            <a:schemeClr val="accent1"/>
+          </a:effectRef>
+          <a:fontRef idx="minor">
+            <a:schemeClr val="lt1"/>
+          </a:fontRef>
+        </p:style>
+        <p:txBody>
+          <a:bodyPr rtlCol="0" anchor="ctr"/>
+          <a:lstStyle/>
+          <a:p>
+            <a:pPr algn="ctr"/>
+          </a:p>
+        </p:txBody>
+      </p:sp>
+      <p:sp>
+        <p:nvSpPr>
+          <p:cNvPr id="13" name="Rectangle 12"/>
+          <p:cNvSpPr/>
+          <p:nvPr/>
+        </p:nvSpPr>
+        <p:spPr>
+          <a:xfrm>
+            <a:off x="4283354" y="1655064"/>
+            <a:ext cx="3624986" cy="27432"/>
+          </a:xfrm>
+          <a:prstGeom prst="rect">
+            <a:avLst/>
+          </a:prstGeom>
+          <a:solidFill>
+            <a:srgbClr val="FFD000"/>
+          </a:solidFill>
+          <a:ln>
+            <a:noFill/>
+          </a:ln>
+        </p:spPr>
+        <p:style>
+          <a:lnRef idx="1">
+            <a:schemeClr val="accent1"/>
+          </a:lnRef>
+          <a:fillRef idx="3">
+            <a:schemeClr val="accent1"/>
+          </a:fillRef>
+          <a:effectRef idx="2">
+            <a:schemeClr val="accent1"/>
+          </a:effectRef>
+          <a:fontRef idx="minor">
+            <a:schemeClr val="lt1"/>
+          </a:fontRef>
+        </p:style>
+        <p:txBody>
+          <a:bodyPr rtlCol="0" anchor="ctr"/>
+          <a:lstStyle/>
+          <a:p>
+            <a:pPr algn="ctr"/>
+          </a:p>
+        </p:txBody>
+      </p:sp>
+      <p:pic>
+        <p:nvPicPr>
+          <p:cNvPr id="14" name="Picture 13" descr="drawio.png"/>
+          <p:cNvPicPr>
+            <a:picLocks noChangeAspect="1"/>
+          </p:cNvPicPr>
+          <p:nvPr/>
+        </p:nvPicPr>
+        <p:blipFill>
+          <a:blip r:embed="rId3"/>
+          <a:stretch>
+            <a:fillRect/>
+          </a:stretch>
+        </p:blipFill>
+        <p:spPr>
+          <a:xfrm>
+            <a:off x="5485485" y="1847087"/>
+            <a:ext cx="1220724" cy="1220724"/>
+          </a:xfrm>
+          <a:prstGeom prst="rect">
+            <a:avLst/>
+          </a:prstGeom>
+        </p:spPr>
+      </p:pic>
+      <p:sp>
+        <p:nvSpPr>
+          <p:cNvPr id="15" name="TextBox 14"/>
+          <p:cNvSpPr txBox="1"/>
+          <p:nvPr/>
+        </p:nvSpPr>
+        <p:spPr>
+          <a:xfrm>
+            <a:off x="4356506" y="3159251"/>
+            <a:ext cx="3478682" cy="621792"/>
+          </a:xfrm>
+          <a:prstGeom prst="rect">
+            <a:avLst/>
+          </a:prstGeom>
+          <a:noFill/>
+        </p:spPr>
+        <p:txBody>
+          <a:bodyPr wrap="square" anchor="t"/>
+          <a:lstStyle/>
+          <a:p>
+            <a:pPr algn="ctr"/>
+            <a:r>
+              <a:rPr sz="1300" b="1" i="0">
+                <a:solidFill>
+                  <a:srgbClr val="095292"/>
+                </a:solidFill>
+                <a:latin typeface="Calibri"/>
+              </a:rPr>
+              <a:t>draw.io</a:t>
+            </a:r>
+          </a:p>
+          <a:p>
+            <a:pPr algn="ctr">
+              <a:spcBef>
+                <a:spcPts val="200"/>
+              </a:spcBef>
+            </a:pPr>
+            <a:r>
+              <a:rPr sz="1000" b="0" i="0">
+                <a:solidFill>
+                  <a:srgbClr val="666666"/>
+                </a:solidFill>
+                <a:latin typeface="Calibri"/>
+              </a:rPr>
+              <a:t>Diagramas del paquete</a:t>
+            </a:r>
+          </a:p>
+        </p:txBody>
+      </p:sp>
+      <p:sp>
+        <p:nvSpPr>
+          <p:cNvPr id="16" name="Rounded Rectangle 15"/>
+          <p:cNvSpPr/>
+          <p:nvPr/>
+        </p:nvSpPr>
+        <p:spPr>
+          <a:xfrm>
+            <a:off x="8109508" y="1591056"/>
+            <a:ext cx="3624986" cy="2299716"/>
+          </a:xfrm>
+          <a:prstGeom prst="roundRect">
+            <a:avLst>
+              <a:gd name="adj" fmla="val 12000"/>
+            </a:avLst>
+          </a:prstGeom>
+          <a:solidFill>
+            <a:srgbClr val="F2F2F2"/>
+          </a:solidFill>
+          <a:ln>
+            <a:noFill/>
+          </a:ln>
+        </p:spPr>
+        <p:style>
+          <a:lnRef idx="1">
+            <a:schemeClr val="accent1"/>
+          </a:lnRef>
+          <a:fillRef idx="3">
+            <a:schemeClr val="accent1"/>
+          </a:fillRef>
+          <a:effectRef idx="2">
+            <a:schemeClr val="accent1"/>
+          </a:effectRef>
+          <a:fontRef idx="minor">
+            <a:schemeClr val="lt1"/>
+          </a:fontRef>
+        </p:style>
+        <p:txBody>
+          <a:bodyPr rtlCol="0" anchor="ctr"/>
+          <a:lstStyle/>
+          <a:p>
+            <a:pPr algn="ctr"/>
+          </a:p>
+        </p:txBody>
+      </p:sp>
+      <p:sp>
+        <p:nvSpPr>
+          <p:cNvPr id="17" name="Rectangle 16"/>
+          <p:cNvSpPr/>
+          <p:nvPr/>
+        </p:nvSpPr>
+        <p:spPr>
+          <a:xfrm>
+            <a:off x="8109508" y="1591056"/>
+            <a:ext cx="3624986" cy="64008"/>
+          </a:xfrm>
+          <a:prstGeom prst="rect">
+            <a:avLst/>
+          </a:prstGeom>
+          <a:solidFill>
+            <a:srgbClr val="095292"/>
+          </a:solidFill>
+          <a:ln>
+            <a:noFill/>
+          </a:ln>
+        </p:spPr>
+        <p:style>
+          <a:lnRef idx="1">
+            <a:schemeClr val="accent1"/>
+          </a:lnRef>
+          <a:fillRef idx="3">
+            <a:schemeClr val="accent1"/>
+          </a:fillRef>
+          <a:effectRef idx="2">
+            <a:schemeClr val="accent1"/>
+          </a:effectRef>
+          <a:fontRef idx="minor">
+            <a:schemeClr val="lt1"/>
+          </a:fontRef>
+        </p:style>
+        <p:txBody>
+          <a:bodyPr rtlCol="0" anchor="ctr"/>
+          <a:lstStyle/>
+          <a:p>
+            <a:pPr algn="ctr"/>
+          </a:p>
+        </p:txBody>
+      </p:sp>
+      <p:sp>
+        <p:nvSpPr>
+          <p:cNvPr id="18" name="Rectangle 17"/>
+          <p:cNvSpPr/>
+          <p:nvPr/>
+        </p:nvSpPr>
+        <p:spPr>
+          <a:xfrm>
+            <a:off x="8109508" y="1655064"/>
+            <a:ext cx="3624986" cy="27432"/>
+          </a:xfrm>
+          <a:prstGeom prst="rect">
+            <a:avLst/>
+          </a:prstGeom>
+          <a:solidFill>
+            <a:srgbClr val="FFD000"/>
+          </a:solidFill>
+          <a:ln>
+            <a:noFill/>
+          </a:ln>
+        </p:spPr>
+        <p:style>
+          <a:lnRef idx="1">
+            <a:schemeClr val="accent1"/>
+          </a:lnRef>
+          <a:fillRef idx="3">
+            <a:schemeClr val="accent1"/>
+          </a:fillRef>
+          <a:effectRef idx="2">
+            <a:schemeClr val="accent1"/>
+          </a:effectRef>
+          <a:fontRef idx="minor">
+            <a:schemeClr val="lt1"/>
+          </a:fontRef>
+        </p:style>
+        <p:txBody>
+          <a:bodyPr rtlCol="0" anchor="ctr"/>
+          <a:lstStyle/>
+          <a:p>
+            <a:pPr algn="ctr"/>
+          </a:p>
+        </p:txBody>
+      </p:sp>
+      <p:pic>
+        <p:nvPicPr>
+          <p:cNvPr id="19" name="Picture 18" descr="mermaid.png"/>
+          <p:cNvPicPr>
+            <a:picLocks noChangeAspect="1"/>
+          </p:cNvPicPr>
+          <p:nvPr/>
+        </p:nvPicPr>
+        <p:blipFill>
+          <a:blip r:embed="rId4"/>
+          <a:stretch>
+            <a:fillRect/>
+          </a:stretch>
+        </p:blipFill>
+        <p:spPr>
+          <a:xfrm>
+            <a:off x="9311640" y="1847087"/>
+            <a:ext cx="1220724" cy="1220724"/>
+          </a:xfrm>
+          <a:prstGeom prst="rect">
+            <a:avLst/>
+          </a:prstGeom>
+        </p:spPr>
+      </p:pic>
+      <p:sp>
+        <p:nvSpPr>
+          <p:cNvPr id="20" name="TextBox 19"/>
+          <p:cNvSpPr txBox="1"/>
+          <p:nvPr/>
+        </p:nvSpPr>
+        <p:spPr>
+          <a:xfrm>
+            <a:off x="8182660" y="3159251"/>
+            <a:ext cx="3478682" cy="621792"/>
+          </a:xfrm>
+          <a:prstGeom prst="rect">
+            <a:avLst/>
+          </a:prstGeom>
+          <a:noFill/>
+        </p:spPr>
+        <p:txBody>
+          <a:bodyPr wrap="square" anchor="t"/>
+          <a:lstStyle/>
+          <a:p>
+            <a:pPr algn="ctr"/>
+            <a:r>
+              <a:rPr sz="1300" b="1" i="0">
+                <a:solidFill>
+                  <a:srgbClr val="095292"/>
+                </a:solidFill>
+                <a:latin typeface="Calibri"/>
+              </a:rPr>
+              <a:t>Mermaid</a:t>
+            </a:r>
+          </a:p>
+          <a:p>
+            <a:pPr algn="ctr">
+              <a:spcBef>
+                <a:spcPts val="200"/>
+              </a:spcBef>
+            </a:pPr>
+            <a:r>
+              <a:rPr sz="1000" b="0" i="0">
+                <a:solidFill>
+                  <a:srgbClr val="666666"/>
+                </a:solidFill>
+                <a:latin typeface="Calibri"/>
+              </a:rPr>
+              <a:t>Codigo del diagrama</a:t>
+            </a:r>
+          </a:p>
+        </p:txBody>
+      </p:sp>
+      <p:sp>
+        <p:nvSpPr>
+          <p:cNvPr id="21" name="Rounded Rectangle 20"/>
+          <p:cNvSpPr/>
+          <p:nvPr/>
+        </p:nvSpPr>
+        <p:spPr>
+          <a:xfrm>
+            <a:off x="4283354" y="4055364"/>
+            <a:ext cx="3624986" cy="2299716"/>
+          </a:xfrm>
+          <a:prstGeom prst="roundRect">
+            <a:avLst>
+              <a:gd name="adj" fmla="val 12000"/>
+            </a:avLst>
+          </a:prstGeom>
+          <a:solidFill>
+            <a:srgbClr val="F2F2F2"/>
+          </a:solidFill>
+          <a:ln>
+            <a:noFill/>
+          </a:ln>
+        </p:spPr>
+        <p:style>
+          <a:lnRef idx="1">
+            <a:schemeClr val="accent1"/>
+          </a:lnRef>
+          <a:fillRef idx="3">
+            <a:schemeClr val="accent1"/>
+          </a:fillRef>
+          <a:effectRef idx="2">
+            <a:schemeClr val="accent1"/>
+          </a:effectRef>
+          <a:fontRef idx="minor">
+            <a:schemeClr val="lt1"/>
+          </a:fontRef>
+        </p:style>
+        <p:txBody>
+          <a:bodyPr rtlCol="0" anchor="ctr"/>
+          <a:lstStyle/>
+          <a:p>
+            <a:pPr algn="ctr"/>
+          </a:p>
+        </p:txBody>
+      </p:sp>
+      <p:sp>
+        <p:nvSpPr>
+          <p:cNvPr id="22" name="Rectangle 21"/>
+          <p:cNvSpPr/>
+          <p:nvPr/>
+        </p:nvSpPr>
+        <p:spPr>
+          <a:xfrm>
+            <a:off x="4283354" y="4055364"/>
+            <a:ext cx="3624986" cy="64008"/>
+          </a:xfrm>
+          <a:prstGeom prst="rect">
+            <a:avLst/>
+          </a:prstGeom>
+          <a:solidFill>
+            <a:srgbClr val="095292"/>
+          </a:solidFill>
+          <a:ln>
+            <a:noFill/>
+          </a:ln>
+        </p:spPr>
+        <p:style>
+          <a:lnRef idx="1">
+            <a:schemeClr val="accent1"/>
+          </a:lnRef>
+          <a:fillRef idx="3">
+            <a:schemeClr val="accent1"/>
+          </a:fillRef>
+          <a:effectRef idx="2">
+            <a:schemeClr val="accent1"/>
+          </a:effectRef>
+          <a:fontRef idx="minor">
+            <a:schemeClr val="lt1"/>
+          </a:fontRef>
+        </p:style>
+        <p:txBody>
+          <a:bodyPr rtlCol="0" anchor="ctr"/>
+          <a:lstStyle/>
+          <a:p>
+            <a:pPr algn="ctr"/>
+          </a:p>
+        </p:txBody>
+      </p:sp>
+      <p:sp>
+        <p:nvSpPr>
+          <p:cNvPr id="23" name="Rectangle 22"/>
+          <p:cNvSpPr/>
+          <p:nvPr/>
+        </p:nvSpPr>
+        <p:spPr>
+          <a:xfrm>
+            <a:off x="4283354" y="4119372"/>
+            <a:ext cx="3624986" cy="27432"/>
+          </a:xfrm>
+          <a:prstGeom prst="rect">
+            <a:avLst/>
+          </a:prstGeom>
+          <a:solidFill>
+            <a:srgbClr val="FFD000"/>
+          </a:solidFill>
+          <a:ln>
+            <a:noFill/>
+          </a:ln>
+        </p:spPr>
+        <p:style>
+          <a:lnRef idx="1">
+            <a:schemeClr val="accent1"/>
+          </a:lnRef>
+          <a:fillRef idx="3">
+            <a:schemeClr val="accent1"/>
+          </a:fillRef>
+          <a:effectRef idx="2">
+            <a:schemeClr val="accent1"/>
+          </a:effectRef>
+          <a:fontRef idx="minor">
+            <a:schemeClr val="lt1"/>
+          </a:fontRef>
+        </p:style>
+        <p:txBody>
+          <a:bodyPr rtlCol="0" anchor="ctr"/>
+          <a:lstStyle/>
+          <a:p>
+            <a:pPr algn="ctr"/>
+          </a:p>
+        </p:txBody>
+      </p:sp>
+      <p:pic>
+        <p:nvPicPr>
+          <p:cNvPr id="24" name="Picture 23" descr="examlab.png"/>
+          <p:cNvPicPr>
+            <a:picLocks noChangeAspect="1"/>
+          </p:cNvPicPr>
+          <p:nvPr/>
+        </p:nvPicPr>
+        <p:blipFill>
+          <a:blip r:embed="rId5"/>
+          <a:stretch>
+            <a:fillRect/>
+          </a:stretch>
+        </p:blipFill>
+        <p:spPr>
+          <a:xfrm>
+            <a:off x="5485485" y="4311396"/>
+            <a:ext cx="1220724" cy="1220724"/>
+          </a:xfrm>
+          <a:prstGeom prst="rect">
+            <a:avLst/>
+          </a:prstGeom>
+        </p:spPr>
+      </p:pic>
+      <p:sp>
+        <p:nvSpPr>
+          <p:cNvPr id="25" name="TextBox 24"/>
+          <p:cNvSpPr txBox="1"/>
+          <p:nvPr/>
+        </p:nvSpPr>
+        <p:spPr>
+          <a:xfrm>
+            <a:off x="4356506" y="5623560"/>
+            <a:ext cx="3478682" cy="621792"/>
+          </a:xfrm>
+          <a:prstGeom prst="rect">
+            <a:avLst/>
+          </a:prstGeom>
+          <a:noFill/>
+        </p:spPr>
+        <p:txBody>
+          <a:bodyPr wrap="square" anchor="t"/>
+          <a:lstStyle/>
+          <a:p>
+            <a:pPr algn="ctr"/>
+            <a:r>
+              <a:rPr sz="1300" b="1" i="0">
+                <a:solidFill>
+                  <a:srgbClr val="095292"/>
+                </a:solidFill>
+                <a:latin typeface="Calibri"/>
+              </a:rPr>
+              <a:t>la plataforma del curso</a:t>
+            </a:r>
+          </a:p>
+          <a:p>
+            <a:pPr algn="ctr">
+              <a:spcBef>
+                <a:spcPts val="200"/>
+              </a:spcBef>
+            </a:pPr>
+            <a:r>
+              <a:rPr sz="1000" b="0" i="0">
+                <a:solidFill>
+                  <a:srgbClr val="666666"/>
+                </a:solidFill>
+                <a:latin typeface="Calibri"/>
+              </a:rPr>
+              <a:t>Donde se entrega</a:t>
+            </a:r>
+          </a:p>
+        </p:txBody>
+      </p:sp>
+      <p:sp>
+        <p:nvSpPr>
+          <p:cNvPr id="26" name="TextBox 25"/>
+          <p:cNvSpPr txBox="1"/>
+          <p:nvPr/>
+        </p:nvSpPr>
+        <p:spPr>
+          <a:xfrm>
+            <a:off x="11185855" y="6473952"/>
+            <a:ext cx="640080" cy="274320"/>
+          </a:xfrm>
+          <a:prstGeom prst="rect">
+            <a:avLst/>
+          </a:prstGeom>
+          <a:noFill/>
+        </p:spPr>
+        <p:txBody>
+          <a:bodyPr wrap="square">
+            <a:spAutoFit/>
+          </a:bodyPr>
+          <a:lstStyle/>
+          <a:p>
+            <a:pPr algn="r"/>
+            <a:r>
+              <a:rPr sz="1100" b="0" i="0">
+                <a:solidFill>
+                  <a:srgbClr val="666666"/>
+                </a:solidFill>
+                <a:latin typeface="Calibri"/>
+              </a:rPr>
+              <a:t>21</a:t>
+            </a:r>
+          </a:p>
+        </p:txBody>
+      </p:sp>
+    </p:spTree>
+  </p:cSld>
+  <p:clrMapOvr>
+    <a:masterClrMapping/>
+  </p:clrMapOvr>
+</p:sld>
+</file>
+
+<file path=ppt/slides/slide22.xml><?xml version="1.0" encoding="utf-8"?>
+<p:sld xmlns:a="http://schemas.openxmlformats.org/drawingml/2006/main" xmlns:p="http://schemas.openxmlformats.org/presentationml/2006/main" xmlns:r="http://schemas.openxmlformats.org/officeDocument/2006/relationships">
+  <p:cSld>
+    <p:bg>
+      <p:bgPr>
+        <a:solidFill>
+          <a:srgbClr val="FFFFFF"/>
+        </a:solidFill>
+        <a:effectLst/>
+      </p:bgPr>
+    </p:bg>
+    <p:spTree>
+      <p:nvGrpSpPr>
+        <p:cNvPr id="1" name=""/>
+        <p:cNvGrpSpPr/>
+        <p:nvPr/>
+      </p:nvGrpSpPr>
+      <p:grpSpPr/>
+      <p:sp>
+        <p:nvSpPr>
+          <p:cNvPr id="2" name="Rectangle 1"/>
+          <p:cNvSpPr/>
+          <p:nvPr/>
+        </p:nvSpPr>
+        <p:spPr>
+          <a:xfrm>
+            <a:off x="0" y="0"/>
+            <a:ext cx="12191695" cy="1170432"/>
+          </a:xfrm>
+          <a:prstGeom prst="rect">
+            <a:avLst/>
+          </a:prstGeom>
+          <a:solidFill>
+            <a:srgbClr val="095292"/>
+          </a:solidFill>
+          <a:ln>
+            <a:noFill/>
+          </a:ln>
+        </p:spPr>
+        <p:style>
+          <a:lnRef idx="1">
+            <a:schemeClr val="accent1"/>
+          </a:lnRef>
+          <a:fillRef idx="3">
+            <a:schemeClr val="accent1"/>
+          </a:fillRef>
+          <a:effectRef idx="2">
+            <a:schemeClr val="accent1"/>
+          </a:effectRef>
+          <a:fontRef idx="minor">
+            <a:schemeClr val="lt1"/>
+          </a:fontRef>
+        </p:style>
+        <p:txBody>
+          <a:bodyPr rtlCol="0" anchor="ctr"/>
+          <a:lstStyle/>
+          <a:p>
+            <a:pPr algn="ctr"/>
+          </a:p>
+        </p:txBody>
+      </p:sp>
+      <p:sp>
+        <p:nvSpPr>
+          <p:cNvPr id="3" name="Rectangle 2"/>
+          <p:cNvSpPr/>
+          <p:nvPr/>
+        </p:nvSpPr>
+        <p:spPr>
+          <a:xfrm>
+            <a:off x="0" y="1170432"/>
+            <a:ext cx="12191695" cy="41148"/>
+          </a:xfrm>
+          <a:prstGeom prst="rect">
+            <a:avLst/>
+          </a:prstGeom>
+          <a:solidFill>
+            <a:srgbClr val="FFD000"/>
+          </a:solidFill>
+          <a:ln>
+            <a:noFill/>
+          </a:ln>
+        </p:spPr>
+        <p:style>
+          <a:lnRef idx="1">
+            <a:schemeClr val="accent1"/>
+          </a:lnRef>
+          <a:fillRef idx="3">
+            <a:schemeClr val="accent1"/>
+          </a:fillRef>
+          <a:effectRef idx="2">
+            <a:schemeClr val="accent1"/>
+          </a:effectRef>
+          <a:fontRef idx="minor">
+            <a:schemeClr val="lt1"/>
+          </a:fontRef>
+        </p:style>
+        <p:txBody>
+          <a:bodyPr rtlCol="0" anchor="ctr"/>
+          <a:lstStyle/>
+          <a:p>
+            <a:pPr algn="ctr"/>
+          </a:p>
+        </p:txBody>
+      </p:sp>
+      <p:sp>
+        <p:nvSpPr>
+          <p:cNvPr id="4" name="TextBox 3"/>
+          <p:cNvSpPr txBox="1"/>
+          <p:nvPr/>
+        </p:nvSpPr>
+        <p:spPr>
+          <a:xfrm>
+            <a:off x="457200" y="164592"/>
+            <a:ext cx="11277295" cy="384048"/>
+          </a:xfrm>
+          <a:prstGeom prst="rect">
+            <a:avLst/>
+          </a:prstGeom>
+          <a:noFill/>
+        </p:spPr>
+        <p:txBody>
+          <a:bodyPr wrap="square">
+            <a:spAutoFit/>
+          </a:bodyPr>
+          <a:lstStyle/>
+          <a:p>
+            <a:r>
+              <a:rPr sz="2600" b="1" i="0">
+                <a:solidFill>
+                  <a:srgbClr val="FFFFFF"/>
+                </a:solidFill>
+                <a:latin typeface="Calibri"/>
+              </a:rPr>
+              <a:t>Del boceto a la plataforma del curso (diagrama)</a:t>
+            </a:r>
+          </a:p>
+        </p:txBody>
+      </p:sp>
+      <p:sp>
+        <p:nvSpPr>
+          <p:cNvPr id="5" name="TextBox 4"/>
+          <p:cNvSpPr txBox="1"/>
+          <p:nvPr/>
+        </p:nvSpPr>
+        <p:spPr>
+          <a:xfrm>
+            <a:off x="457200" y="566928"/>
+            <a:ext cx="11277295" cy="411480"/>
+          </a:xfrm>
+          <a:prstGeom prst="rect">
+            <a:avLst/>
+          </a:prstGeom>
+          <a:noFill/>
+        </p:spPr>
+        <p:txBody>
+          <a:bodyPr wrap="square">
+            <a:spAutoFit/>
+          </a:bodyPr>
+          <a:lstStyle/>
+          <a:p>
+            <a:r>
+              <a:rPr sz="1400" b="0" i="0">
+                <a:solidFill>
+                  <a:srgbClr val="B8D8EE"/>
+                </a:solidFill>
+                <a:latin typeface="Calibri"/>
+              </a:rPr>
+              <a:t>El diagrama se entrega como código Mermaid dentro de la plataforma del curso, no como imagen</a:t>
+            </a:r>
+          </a:p>
+        </p:txBody>
+      </p:sp>
+      <p:sp>
+        <p:nvSpPr>
+          <p:cNvPr id="6" name="Rounded Rectangle 5"/>
+          <p:cNvSpPr/>
+          <p:nvPr/>
+        </p:nvSpPr>
+        <p:spPr>
+          <a:xfrm>
+            <a:off x="457200" y="1659636"/>
+            <a:ext cx="11277295" cy="1051560"/>
+          </a:xfrm>
+          <a:prstGeom prst="roundRect">
+            <a:avLst>
+              <a:gd name="adj" fmla="val 12000"/>
+            </a:avLst>
+          </a:prstGeom>
+          <a:solidFill>
+            <a:srgbClr val="F2F2F2"/>
+          </a:solidFill>
+          <a:ln>
+            <a:noFill/>
+          </a:ln>
+        </p:spPr>
+        <p:style>
+          <a:lnRef idx="1">
+            <a:schemeClr val="accent1"/>
+          </a:lnRef>
+          <a:fillRef idx="3">
+            <a:schemeClr val="accent1"/>
+          </a:fillRef>
+          <a:effectRef idx="2">
+            <a:schemeClr val="accent1"/>
+          </a:effectRef>
+          <a:fontRef idx="minor">
+            <a:schemeClr val="lt1"/>
+          </a:fontRef>
+        </p:style>
+        <p:txBody>
+          <a:bodyPr rtlCol="0" anchor="ctr"/>
+          <a:lstStyle/>
+          <a:p>
+            <a:pPr algn="ctr"/>
+          </a:p>
+        </p:txBody>
+      </p:sp>
+      <p:sp>
+        <p:nvSpPr>
+          <p:cNvPr id="7" name="Rounded Rectangle 6"/>
+          <p:cNvSpPr/>
+          <p:nvPr/>
+        </p:nvSpPr>
+        <p:spPr>
+          <a:xfrm>
+            <a:off x="594360" y="1965960"/>
+            <a:ext cx="438912" cy="438912"/>
+          </a:xfrm>
+          <a:prstGeom prst="roundRect">
+            <a:avLst>
+              <a:gd name="adj" fmla="val 12000"/>
+            </a:avLst>
+          </a:prstGeom>
+          <a:solidFill>
+            <a:srgbClr val="095292"/>
+          </a:solidFill>
+          <a:ln>
+            <a:noFill/>
+          </a:ln>
+        </p:spPr>
+        <p:style>
+          <a:lnRef idx="1">
+            <a:schemeClr val="accent1"/>
+          </a:lnRef>
+          <a:fillRef idx="3">
+            <a:schemeClr val="accent1"/>
+          </a:fillRef>
+          <a:effectRef idx="2">
+            <a:schemeClr val="accent1"/>
+          </a:effectRef>
+          <a:fontRef idx="minor">
+            <a:schemeClr val="lt1"/>
+          </a:fontRef>
+        </p:style>
+        <p:txBody>
+          <a:bodyPr rtlCol="0" anchor="ctr"/>
+          <a:lstStyle/>
+          <a:p>
+            <a:pPr algn="ctr"/>
+          </a:p>
+        </p:txBody>
+      </p:sp>
+      <p:sp>
+        <p:nvSpPr>
+          <p:cNvPr id="8" name="TextBox 7"/>
+          <p:cNvSpPr txBox="1"/>
+          <p:nvPr/>
+        </p:nvSpPr>
+        <p:spPr>
+          <a:xfrm>
+            <a:off x="594360" y="1965960"/>
+            <a:ext cx="438912" cy="438912"/>
+          </a:xfrm>
+          <a:prstGeom prst="rect">
+            <a:avLst/>
+          </a:prstGeom>
+          <a:noFill/>
+        </p:spPr>
+        <p:txBody>
+          <a:bodyPr wrap="square" anchor="ctr"/>
+          <a:lstStyle/>
+          <a:p>
+            <a:pPr algn="ctr"/>
+            <a:r>
+              <a:rPr sz="1600" b="1" i="0">
+                <a:solidFill>
+                  <a:srgbClr val="FFFFFF"/>
+                </a:solidFill>
+                <a:latin typeface="Calibri"/>
+              </a:rPr>
+              <a:t>1</a:t>
+            </a:r>
+          </a:p>
+        </p:txBody>
+      </p:sp>
+      <p:sp>
+        <p:nvSpPr>
+          <p:cNvPr id="9" name="TextBox 8"/>
+          <p:cNvSpPr txBox="1"/>
+          <p:nvPr/>
+        </p:nvSpPr>
+        <p:spPr>
+          <a:xfrm>
+            <a:off x="1188720" y="1751076"/>
+            <a:ext cx="10271455" cy="886968"/>
+          </a:xfrm>
+          <a:prstGeom prst="rect">
+            <a:avLst/>
+          </a:prstGeom>
+          <a:noFill/>
+        </p:spPr>
+        <p:txBody>
+          <a:bodyPr wrap="square" anchor="ctr"/>
+          <a:lstStyle/>
+          <a:p>
+            <a:r>
+              <a:rPr sz="1500" b="1" i="0">
+                <a:solidFill>
+                  <a:srgbClr val="095292"/>
+                </a:solidFill>
+                <a:latin typeface="Calibri"/>
+              </a:rPr>
+              <a:t>Disena visual</a:t>
+            </a:r>
+          </a:p>
+          <a:p>
+            <a:pPr>
+              <a:spcBef>
+                <a:spcPts val="200"/>
+              </a:spcBef>
+            </a:pPr>
+            <a:r>
+              <a:rPr sz="1300" b="0" i="0">
+                <a:solidFill>
+                  <a:srgbClr val="333333"/>
+                </a:solidFill>
+                <a:latin typeface="Calibri"/>
+              </a:rPr>
+              <a:t>Dibuja el diagrama como quieras en Excalidraw o draw.io: es mas rapido arrastrar cajas que escribir codigo, y ahi es donde piensas el modelo.</a:t>
+            </a:r>
+          </a:p>
+        </p:txBody>
+      </p:sp>
+      <p:sp>
+        <p:nvSpPr>
+          <p:cNvPr id="10" name="Rounded Rectangle 9"/>
+          <p:cNvSpPr/>
+          <p:nvPr/>
+        </p:nvSpPr>
+        <p:spPr>
+          <a:xfrm>
+            <a:off x="457200" y="2802636"/>
+            <a:ext cx="11277295" cy="1051560"/>
+          </a:xfrm>
+          <a:prstGeom prst="roundRect">
+            <a:avLst>
+              <a:gd name="adj" fmla="val 12000"/>
+            </a:avLst>
+          </a:prstGeom>
+          <a:solidFill>
+            <a:srgbClr val="E8F4FA"/>
+          </a:solidFill>
+          <a:ln>
+            <a:noFill/>
+          </a:ln>
+        </p:spPr>
+        <p:style>
+          <a:lnRef idx="1">
+            <a:schemeClr val="accent1"/>
+          </a:lnRef>
+          <a:fillRef idx="3">
+            <a:schemeClr val="accent1"/>
+          </a:fillRef>
+          <a:effectRef idx="2">
+            <a:schemeClr val="accent1"/>
+          </a:effectRef>
+          <a:fontRef idx="minor">
+            <a:schemeClr val="lt1"/>
+          </a:fontRef>
+        </p:style>
+        <p:txBody>
+          <a:bodyPr rtlCol="0" anchor="ctr"/>
+          <a:lstStyle/>
+          <a:p>
+            <a:pPr algn="ctr"/>
+          </a:p>
+        </p:txBody>
+      </p:sp>
+      <p:sp>
+        <p:nvSpPr>
+          <p:cNvPr id="11" name="Rounded Rectangle 10"/>
+          <p:cNvSpPr/>
+          <p:nvPr/>
+        </p:nvSpPr>
+        <p:spPr>
+          <a:xfrm>
+            <a:off x="594360" y="3108960"/>
+            <a:ext cx="438912" cy="438912"/>
+          </a:xfrm>
+          <a:prstGeom prst="roundRect">
+            <a:avLst>
+              <a:gd name="adj" fmla="val 12000"/>
+            </a:avLst>
+          </a:prstGeom>
+          <a:solidFill>
+            <a:srgbClr val="095292"/>
+          </a:solidFill>
+          <a:ln>
+            <a:noFill/>
+          </a:ln>
+        </p:spPr>
+        <p:style>
+          <a:lnRef idx="1">
+            <a:schemeClr val="accent1"/>
+          </a:lnRef>
+          <a:fillRef idx="3">
+            <a:schemeClr val="accent1"/>
+          </a:fillRef>
+          <a:effectRef idx="2">
+            <a:schemeClr val="accent1"/>
+          </a:effectRef>
+          <a:fontRef idx="minor">
+            <a:schemeClr val="lt1"/>
+          </a:fontRef>
+        </p:style>
+        <p:txBody>
+          <a:bodyPr rtlCol="0" anchor="ctr"/>
+          <a:lstStyle/>
+          <a:p>
+            <a:pPr algn="ctr"/>
+          </a:p>
+        </p:txBody>
+      </p:sp>
+      <p:sp>
+        <p:nvSpPr>
+          <p:cNvPr id="12" name="TextBox 11"/>
+          <p:cNvSpPr txBox="1"/>
+          <p:nvPr/>
+        </p:nvSpPr>
+        <p:spPr>
+          <a:xfrm>
+            <a:off x="594360" y="3108960"/>
+            <a:ext cx="438912" cy="438912"/>
+          </a:xfrm>
+          <a:prstGeom prst="rect">
+            <a:avLst/>
+          </a:prstGeom>
+          <a:noFill/>
+        </p:spPr>
+        <p:txBody>
+          <a:bodyPr wrap="square" anchor="ctr"/>
+          <a:lstStyle/>
+          <a:p>
+            <a:pPr algn="ctr"/>
+            <a:r>
+              <a:rPr sz="1600" b="1" i="0">
+                <a:solidFill>
+                  <a:srgbClr val="FFFFFF"/>
+                </a:solidFill>
+                <a:latin typeface="Calibri"/>
+              </a:rPr>
+              <a:t>2</a:t>
+            </a:r>
+          </a:p>
+        </p:txBody>
+      </p:sp>
+      <p:sp>
+        <p:nvSpPr>
+          <p:cNvPr id="13" name="TextBox 12"/>
+          <p:cNvSpPr txBox="1"/>
+          <p:nvPr/>
+        </p:nvSpPr>
+        <p:spPr>
+          <a:xfrm>
+            <a:off x="1188720" y="2894076"/>
+            <a:ext cx="10271455" cy="886968"/>
+          </a:xfrm>
+          <a:prstGeom prst="rect">
+            <a:avLst/>
+          </a:prstGeom>
+          <a:noFill/>
+        </p:spPr>
+        <p:txBody>
+          <a:bodyPr wrap="square" anchor="ctr"/>
+          <a:lstStyle/>
+          <a:p>
+            <a:r>
+              <a:rPr sz="1500" b="1" i="0">
+                <a:solidFill>
+                  <a:srgbClr val="095292"/>
+                </a:solidFill>
+                <a:latin typeface="Calibri"/>
+              </a:rPr>
+              <a:t>Traduce con IA</a:t>
+            </a:r>
+          </a:p>
+          <a:p>
+            <a:pPr>
+              <a:spcBef>
+                <a:spcPts val="200"/>
+              </a:spcBef>
+            </a:pPr>
+            <a:r>
+              <a:rPr sz="1300" b="0" i="0">
+                <a:solidFill>
+                  <a:srgbClr val="333333"/>
+                </a:solidFill>
+                <a:latin typeface="Calibri"/>
+              </a:rPr>
+              <a:t>Copia o describe tu boceto a una IA y pidele el codigo Mermaid: «convierte este diagrama a Mermaid usando flowchart». Revisa el resultado: la IA acierta la sintaxis, no tu modelo.</a:t>
+            </a:r>
+          </a:p>
+        </p:txBody>
+      </p:sp>
+      <p:sp>
+        <p:nvSpPr>
+          <p:cNvPr id="14" name="Rounded Rectangle 13"/>
+          <p:cNvSpPr/>
+          <p:nvPr/>
+        </p:nvSpPr>
+        <p:spPr>
+          <a:xfrm>
+            <a:off x="457200" y="3945636"/>
+            <a:ext cx="11277295" cy="1051560"/>
+          </a:xfrm>
+          <a:prstGeom prst="roundRect">
+            <a:avLst>
+              <a:gd name="adj" fmla="val 12000"/>
+            </a:avLst>
+          </a:prstGeom>
+          <a:solidFill>
+            <a:srgbClr val="F2F2F2"/>
+          </a:solidFill>
+          <a:ln>
+            <a:noFill/>
+          </a:ln>
+        </p:spPr>
+        <p:style>
+          <a:lnRef idx="1">
+            <a:schemeClr val="accent1"/>
+          </a:lnRef>
+          <a:fillRef idx="3">
+            <a:schemeClr val="accent1"/>
+          </a:fillRef>
+          <a:effectRef idx="2">
+            <a:schemeClr val="accent1"/>
+          </a:effectRef>
+          <a:fontRef idx="minor">
+            <a:schemeClr val="lt1"/>
+          </a:fontRef>
+        </p:style>
+        <p:txBody>
+          <a:bodyPr rtlCol="0" anchor="ctr"/>
+          <a:lstStyle/>
+          <a:p>
+            <a:pPr algn="ctr"/>
+          </a:p>
+        </p:txBody>
+      </p:sp>
+      <p:sp>
+        <p:nvSpPr>
+          <p:cNvPr id="15" name="Rounded Rectangle 14"/>
+          <p:cNvSpPr/>
+          <p:nvPr/>
+        </p:nvSpPr>
+        <p:spPr>
+          <a:xfrm>
+            <a:off x="594360" y="4251960"/>
+            <a:ext cx="438912" cy="438912"/>
+          </a:xfrm>
+          <a:prstGeom prst="roundRect">
+            <a:avLst>
+              <a:gd name="adj" fmla="val 12000"/>
+            </a:avLst>
+          </a:prstGeom>
+          <a:solidFill>
+            <a:srgbClr val="095292"/>
+          </a:solidFill>
+          <a:ln>
+            <a:noFill/>
+          </a:ln>
+        </p:spPr>
+        <p:style>
+          <a:lnRef idx="1">
+            <a:schemeClr val="accent1"/>
+          </a:lnRef>
+          <a:fillRef idx="3">
+            <a:schemeClr val="accent1"/>
+          </a:fillRef>
+          <a:effectRef idx="2">
+            <a:schemeClr val="accent1"/>
+          </a:effectRef>
+          <a:fontRef idx="minor">
+            <a:schemeClr val="lt1"/>
+          </a:fontRef>
+        </p:style>
+        <p:txBody>
+          <a:bodyPr rtlCol="0" anchor="ctr"/>
+          <a:lstStyle/>
+          <a:p>
+            <a:pPr algn="ctr"/>
+          </a:p>
+        </p:txBody>
+      </p:sp>
+      <p:sp>
+        <p:nvSpPr>
+          <p:cNvPr id="16" name="TextBox 15"/>
+          <p:cNvSpPr txBox="1"/>
+          <p:nvPr/>
+        </p:nvSpPr>
+        <p:spPr>
+          <a:xfrm>
+            <a:off x="594360" y="4251960"/>
+            <a:ext cx="438912" cy="438912"/>
+          </a:xfrm>
+          <a:prstGeom prst="rect">
+            <a:avLst/>
+          </a:prstGeom>
+          <a:noFill/>
+        </p:spPr>
+        <p:txBody>
+          <a:bodyPr wrap="square" anchor="ctr"/>
+          <a:lstStyle/>
+          <a:p>
+            <a:pPr algn="ctr"/>
+            <a:r>
+              <a:rPr sz="1600" b="1" i="0">
+                <a:solidFill>
+                  <a:srgbClr val="FFFFFF"/>
+                </a:solidFill>
+                <a:latin typeface="Calibri"/>
+              </a:rPr>
+              <a:t>3</a:t>
+            </a:r>
+          </a:p>
+        </p:txBody>
+      </p:sp>
+      <p:sp>
+        <p:nvSpPr>
+          <p:cNvPr id="17" name="TextBox 16"/>
+          <p:cNvSpPr txBox="1"/>
+          <p:nvPr/>
+        </p:nvSpPr>
+        <p:spPr>
+          <a:xfrm>
+            <a:off x="1188720" y="4037076"/>
+            <a:ext cx="10271455" cy="886968"/>
+          </a:xfrm>
+          <a:prstGeom prst="rect">
+            <a:avLst/>
+          </a:prstGeom>
+          <a:noFill/>
+        </p:spPr>
+        <p:txBody>
+          <a:bodyPr wrap="square" anchor="ctr"/>
+          <a:lstStyle/>
+          <a:p>
+            <a:r>
+              <a:rPr sz="1500" b="1" i="0">
+                <a:solidFill>
+                  <a:srgbClr val="095292"/>
+                </a:solidFill>
+                <a:latin typeface="Calibri"/>
+              </a:rPr>
+              <a:t>Pega y renderiza en la plataforma del curso</a:t>
+            </a:r>
+          </a:p>
+          <a:p>
+            <a:pPr>
+              <a:spcBef>
+                <a:spcPts val="200"/>
+              </a:spcBef>
+            </a:pPr>
+            <a:r>
+              <a:rPr sz="1300" b="0" i="0">
+                <a:solidFill>
+                  <a:srgbClr val="333333"/>
+                </a:solidFill>
+                <a:latin typeface="Calibri"/>
+              </a:rPr>
+              <a:t>Pega ese codigo en la caja de texto de la pregunta y mira como lo dibuja la plataforma. Si no renderiza, corrige ahi mismo: lo que se califica es el diagrama renderizado dentro de la plataforma del curso.</a:t>
+            </a:r>
+          </a:p>
+        </p:txBody>
+      </p:sp>
+      <p:sp>
+        <p:nvSpPr>
+          <p:cNvPr id="18" name="Rounded Rectangle 17"/>
+          <p:cNvSpPr/>
+          <p:nvPr/>
+        </p:nvSpPr>
+        <p:spPr>
+          <a:xfrm>
+            <a:off x="457200" y="5088636"/>
+            <a:ext cx="11277295" cy="1051560"/>
+          </a:xfrm>
+          <a:prstGeom prst="roundRect">
+            <a:avLst>
+              <a:gd name="adj" fmla="val 12000"/>
+            </a:avLst>
+          </a:prstGeom>
+          <a:solidFill>
+            <a:srgbClr val="E8F4FA"/>
+          </a:solidFill>
+          <a:ln>
+            <a:noFill/>
+          </a:ln>
+        </p:spPr>
+        <p:style>
+          <a:lnRef idx="1">
+            <a:schemeClr val="accent1"/>
+          </a:lnRef>
+          <a:fillRef idx="3">
+            <a:schemeClr val="accent1"/>
+          </a:fillRef>
+          <a:effectRef idx="2">
+            <a:schemeClr val="accent1"/>
+          </a:effectRef>
+          <a:fontRef idx="minor">
+            <a:schemeClr val="lt1"/>
+          </a:fontRef>
+        </p:style>
+        <p:txBody>
+          <a:bodyPr rtlCol="0" anchor="ctr"/>
+          <a:lstStyle/>
+          <a:p>
+            <a:pPr algn="ctr"/>
+          </a:p>
+        </p:txBody>
+      </p:sp>
+      <p:sp>
+        <p:nvSpPr>
+          <p:cNvPr id="19" name="Rounded Rectangle 18"/>
+          <p:cNvSpPr/>
+          <p:nvPr/>
+        </p:nvSpPr>
+        <p:spPr>
+          <a:xfrm>
+            <a:off x="594360" y="5394960"/>
+            <a:ext cx="438912" cy="438912"/>
+          </a:xfrm>
+          <a:prstGeom prst="roundRect">
+            <a:avLst>
+              <a:gd name="adj" fmla="val 12000"/>
+            </a:avLst>
+          </a:prstGeom>
+          <a:solidFill>
+            <a:srgbClr val="095292"/>
+          </a:solidFill>
+          <a:ln>
+            <a:noFill/>
+          </a:ln>
+        </p:spPr>
+        <p:style>
+          <a:lnRef idx="1">
+            <a:schemeClr val="accent1"/>
+          </a:lnRef>
+          <a:fillRef idx="3">
+            <a:schemeClr val="accent1"/>
+          </a:fillRef>
+          <a:effectRef idx="2">
+            <a:schemeClr val="accent1"/>
+          </a:effectRef>
+          <a:fontRef idx="minor">
+            <a:schemeClr val="lt1"/>
+          </a:fontRef>
+        </p:style>
+        <p:txBody>
+          <a:bodyPr rtlCol="0" anchor="ctr"/>
+          <a:lstStyle/>
+          <a:p>
+            <a:pPr algn="ctr"/>
+          </a:p>
+        </p:txBody>
+      </p:sp>
+      <p:sp>
+        <p:nvSpPr>
+          <p:cNvPr id="20" name="TextBox 19"/>
+          <p:cNvSpPr txBox="1"/>
+          <p:nvPr/>
+        </p:nvSpPr>
+        <p:spPr>
+          <a:xfrm>
+            <a:off x="594360" y="5394960"/>
+            <a:ext cx="438912" cy="438912"/>
+          </a:xfrm>
+          <a:prstGeom prst="rect">
+            <a:avLst/>
+          </a:prstGeom>
+          <a:noFill/>
+        </p:spPr>
+        <p:txBody>
+          <a:bodyPr wrap="square" anchor="ctr"/>
+          <a:lstStyle/>
+          <a:p>
+            <a:pPr algn="ctr"/>
+            <a:r>
+              <a:rPr sz="1600" b="1" i="0">
+                <a:solidFill>
+                  <a:srgbClr val="FFFFFF"/>
+                </a:solidFill>
+                <a:latin typeface="Calibri"/>
+              </a:rPr>
+              <a:t>4</a:t>
+            </a:r>
+          </a:p>
+        </p:txBody>
+      </p:sp>
+      <p:sp>
+        <p:nvSpPr>
+          <p:cNvPr id="21" name="TextBox 20"/>
+          <p:cNvSpPr txBox="1"/>
+          <p:nvPr/>
+        </p:nvSpPr>
+        <p:spPr>
+          <a:xfrm>
+            <a:off x="1188720" y="5180076"/>
+            <a:ext cx="10271455" cy="886968"/>
+          </a:xfrm>
+          <a:prstGeom prst="rect">
+            <a:avLst/>
+          </a:prstGeom>
+          <a:noFill/>
+        </p:spPr>
+        <p:txBody>
+          <a:bodyPr wrap="square" anchor="ctr"/>
+          <a:lstStyle/>
+          <a:p>
+            <a:r>
+              <a:rPr sz="1500" b="1" i="0">
+                <a:solidFill>
+                  <a:srgbClr val="095292"/>
+                </a:solidFill>
+                <a:latin typeface="Calibri"/>
+              </a:rPr>
+              <a:t>Guarda el PNG para tu PI</a:t>
+            </a:r>
+          </a:p>
+          <a:p>
+            <a:pPr>
+              <a:spcBef>
+                <a:spcPts val="200"/>
+              </a:spcBef>
+            </a:pPr>
+            <a:r>
+              <a:rPr sz="1300" b="0" i="0">
+                <a:solidFill>
+                  <a:srgbClr val="333333"/>
+                </a:solidFill>
+                <a:latin typeface="Calibri"/>
+              </a:rPr>
+              <a:t>Exporta tambien la imagen a la carpeta de tu Proyecto Integrador. Esa copia es para tu informe; no reemplaza la respuesta en la plataforma.</a:t>
+            </a:r>
+          </a:p>
+        </p:txBody>
+      </p:sp>
+      <p:sp>
+        <p:nvSpPr>
+          <p:cNvPr id="22" name="TextBox 21"/>
+          <p:cNvSpPr txBox="1"/>
+          <p:nvPr/>
+        </p:nvSpPr>
+        <p:spPr>
+          <a:xfrm>
+            <a:off x="11185855" y="6473952"/>
+            <a:ext cx="640080" cy="274320"/>
+          </a:xfrm>
+          <a:prstGeom prst="rect">
+            <a:avLst/>
+          </a:prstGeom>
+          <a:noFill/>
+        </p:spPr>
+        <p:txBody>
+          <a:bodyPr wrap="square">
+            <a:spAutoFit/>
+          </a:bodyPr>
+          <a:lstStyle/>
+          <a:p>
+            <a:pPr algn="r"/>
+            <a:r>
+              <a:rPr sz="1100" b="0" i="0">
+                <a:solidFill>
+                  <a:srgbClr val="666666"/>
+                </a:solidFill>
+                <a:latin typeface="Calibri"/>
+              </a:rPr>
+              <a:t>22</a:t>
+            </a:r>
+          </a:p>
+        </p:txBody>
+      </p:sp>
+    </p:spTree>
+  </p:cSld>
+  <p:clrMapOvr>
+    <a:masterClrMapping/>
+  </p:clrMapOvr>
+</p:sld>
+</file>
+
+<file path=ppt/slides/slide23.xml><?xml version="1.0" encoding="utf-8"?>
+<p:sld xmlns:a="http://schemas.openxmlformats.org/drawingml/2006/main" xmlns:p="http://schemas.openxmlformats.org/presentationml/2006/main" xmlns:r="http://schemas.openxmlformats.org/officeDocument/2006/relationships">
+  <p:cSld>
+    <p:bg>
+      <p:bgPr>
+        <a:solidFill>
+          <a:srgbClr val="FFFFFF"/>
+        </a:solidFill>
+        <a:effectLst/>
+      </p:bgPr>
+    </p:bg>
+    <p:spTree>
+      <p:nvGrpSpPr>
+        <p:cNvPr id="1" name=""/>
+        <p:cNvGrpSpPr/>
+        <p:nvPr/>
+      </p:nvGrpSpPr>
+      <p:grpSpPr/>
+      <p:sp>
+        <p:nvSpPr>
+          <p:cNvPr id="2" name="Rectangle 1"/>
+          <p:cNvSpPr/>
+          <p:nvPr/>
+        </p:nvSpPr>
+        <p:spPr>
+          <a:xfrm>
+            <a:off x="0" y="0"/>
+            <a:ext cx="12191695" cy="960120"/>
+          </a:xfrm>
+          <a:prstGeom prst="rect">
+            <a:avLst/>
+          </a:prstGeom>
+          <a:solidFill>
+            <a:srgbClr val="095292"/>
+          </a:solidFill>
+          <a:ln>
+            <a:noFill/>
+          </a:ln>
+        </p:spPr>
+        <p:style>
+          <a:lnRef idx="1">
+            <a:schemeClr val="accent1"/>
+          </a:lnRef>
+          <a:fillRef idx="3">
+            <a:schemeClr val="accent1"/>
+          </a:fillRef>
+          <a:effectRef idx="2">
+            <a:schemeClr val="accent1"/>
+          </a:effectRef>
+          <a:fontRef idx="minor">
+            <a:schemeClr val="lt1"/>
+          </a:fontRef>
+        </p:style>
+        <p:txBody>
+          <a:bodyPr rtlCol="0" anchor="ctr"/>
+          <a:lstStyle/>
+          <a:p>
+            <a:pPr algn="ctr"/>
+          </a:p>
+        </p:txBody>
+      </p:sp>
+      <p:sp>
+        <p:nvSpPr>
+          <p:cNvPr id="3" name="Rectangle 2"/>
+          <p:cNvSpPr/>
+          <p:nvPr/>
+        </p:nvSpPr>
+        <p:spPr>
+          <a:xfrm>
+            <a:off x="0" y="960120"/>
+            <a:ext cx="12191695" cy="41148"/>
+          </a:xfrm>
+          <a:prstGeom prst="rect">
+            <a:avLst/>
+          </a:prstGeom>
+          <a:solidFill>
+            <a:srgbClr val="FFD000"/>
+          </a:solidFill>
+          <a:ln>
+            <a:noFill/>
+          </a:ln>
+        </p:spPr>
+        <p:style>
+          <a:lnRef idx="1">
+            <a:schemeClr val="accent1"/>
+          </a:lnRef>
+          <a:fillRef idx="3">
+            <a:schemeClr val="accent1"/>
+          </a:fillRef>
+          <a:effectRef idx="2">
+            <a:schemeClr val="accent1"/>
+          </a:effectRef>
+          <a:fontRef idx="minor">
+            <a:schemeClr val="lt1"/>
+          </a:fontRef>
+        </p:style>
+        <p:txBody>
+          <a:bodyPr rtlCol="0" anchor="ctr"/>
+          <a:lstStyle/>
+          <a:p>
+            <a:pPr algn="ctr"/>
+          </a:p>
+        </p:txBody>
+      </p:sp>
+      <p:sp>
+        <p:nvSpPr>
+          <p:cNvPr id="4" name="TextBox 3"/>
+          <p:cNvSpPr txBox="1"/>
+          <p:nvPr/>
+        </p:nvSpPr>
+        <p:spPr>
+          <a:xfrm>
+            <a:off x="457200" y="164592"/>
+            <a:ext cx="11277295" cy="502920"/>
+          </a:xfrm>
+          <a:prstGeom prst="rect">
+            <a:avLst/>
+          </a:prstGeom>
+          <a:noFill/>
+        </p:spPr>
+        <p:txBody>
+          <a:bodyPr wrap="square">
+            <a:spAutoFit/>
+          </a:bodyPr>
+          <a:lstStyle/>
+          <a:p>
+            <a:r>
+              <a:rPr sz="2600" b="1" i="0">
+                <a:solidFill>
+                  <a:srgbClr val="FFFFFF"/>
+                </a:solidFill>
+                <a:latin typeface="Calibri"/>
+              </a:rPr>
+              <a:t>PI CloudLite — entregable de hoy</a:t>
+            </a:r>
+          </a:p>
+        </p:txBody>
+      </p:sp>
+      <p:sp>
+        <p:nvSpPr>
+          <p:cNvPr id="5" name="TextBox 4"/>
+          <p:cNvSpPr txBox="1"/>
+          <p:nvPr/>
+        </p:nvSpPr>
+        <p:spPr>
+          <a:xfrm>
+            <a:off x="457200" y="1170432"/>
+            <a:ext cx="11277295" cy="5230368"/>
+          </a:xfrm>
+          <a:prstGeom prst="rect">
+            <a:avLst/>
+          </a:prstGeom>
+          <a:noFill/>
+        </p:spPr>
+        <p:txBody>
+          <a:bodyPr wrap="square">
+            <a:spAutoFit/>
+          </a:bodyPr>
+          <a:lstStyle/>
+          <a:p>
+            <a:pPr>
+              <a:spcAft>
+                <a:spcPts val="800"/>
+              </a:spcAft>
+            </a:pPr>
+            <a:r>
+              <a:rPr sz="2000" b="0" i="0">
+                <a:solidFill>
+                  <a:srgbClr val="333333"/>
+                </a:solidFill>
+                <a:latin typeface="Calibri"/>
+              </a:rPr>
+              <a:t>–   </a:t>
+            </a:r>
+            <a:r>
+              <a:rPr sz="2000" b="1" i="0">
+                <a:solidFill>
+                  <a:srgbClr val="333333"/>
+                </a:solidFill>
+                <a:latin typeface="Calibri"/>
+              </a:rPr>
+              <a:t>Entregable:</a:t>
+            </a:r>
+            <a:r>
+              <a:rPr sz="2000" b="0" i="0">
+                <a:solidFill>
+                  <a:srgbClr val="333333"/>
+                </a:solidFill>
+                <a:latin typeface="Calibri"/>
+              </a:rPr>
+              <a:t> Paquete final en la plataforma del curso (módulo Proyectos) + pitch de 5–8 min sustentado hoy en clase + Q&amp;A</a:t>
+            </a:r>
+          </a:p>
+          <a:p>
+            <a:pPr>
+              <a:spcAft>
+                <a:spcPts val="800"/>
+              </a:spcAft>
+            </a:pPr>
+            <a:r>
+              <a:rPr sz="2000" b="0" i="0">
+                <a:solidFill>
+                  <a:srgbClr val="333333"/>
+                </a:solidFill>
+                <a:latin typeface="Calibri"/>
+              </a:rPr>
+              <a:t>–   Herramienta: </a:t>
+            </a:r>
+            <a:r>
+              <a:rPr sz="2000" b="1" i="0">
+                <a:solidFill>
+                  <a:srgbClr val="333333"/>
+                </a:solidFill>
+                <a:latin typeface="Calibri"/>
+              </a:rPr>
+              <a:t>Google Docs/Slides · diagramas · capturas lab</a:t>
+            </a:r>
+          </a:p>
+          <a:p>
+            <a:pPr>
+              <a:spcAft>
+                <a:spcPts val="800"/>
+              </a:spcAft>
+            </a:pPr>
+            <a:r>
+              <a:rPr sz="2000" b="0" i="0">
+                <a:solidFill>
+                  <a:srgbClr val="333333"/>
+                </a:solidFill>
+                <a:latin typeface="Calibri"/>
+              </a:rPr>
+              <a:t>–   Hoy no se construye: se </a:t>
+            </a:r>
+            <a:r>
+              <a:rPr sz="2000" b="1" i="0">
+                <a:solidFill>
+                  <a:srgbClr val="333333"/>
+                </a:solidFill>
+                <a:latin typeface="Calibri"/>
+              </a:rPr>
+              <a:t>defiende</a:t>
+            </a:r>
+            <a:r>
+              <a:rPr sz="2000" b="0" i="0">
+                <a:solidFill>
+                  <a:srgbClr val="333333"/>
+                </a:solidFill>
+                <a:latin typeface="Calibri"/>
+              </a:rPr>
+              <a:t> lo que ya está en el paquete del PI.</a:t>
+            </a:r>
+          </a:p>
+          <a:p>
+            <a:pPr>
+              <a:spcAft>
+                <a:spcPts val="800"/>
+              </a:spcAft>
+            </a:pPr>
+            <a:r>
+              <a:rPr sz="2000" b="0" i="0">
+                <a:solidFill>
+                  <a:srgbClr val="333333"/>
+                </a:solidFill>
+                <a:latin typeface="Calibri"/>
+              </a:rPr>
+              <a:t>–   Individual por defecto · el docente puede autorizar equipos de 2–3; la entrega en la plataforma del curso siempre es individual.</a:t>
+            </a:r>
+          </a:p>
+        </p:txBody>
+      </p:sp>
+      <p:sp>
+        <p:nvSpPr>
+          <p:cNvPr id="6" name="TextBox 5"/>
+          <p:cNvSpPr txBox="1"/>
+          <p:nvPr/>
+        </p:nvSpPr>
+        <p:spPr>
+          <a:xfrm>
+            <a:off x="11185855" y="6473952"/>
+            <a:ext cx="640080" cy="274320"/>
+          </a:xfrm>
+          <a:prstGeom prst="rect">
+            <a:avLst/>
+          </a:prstGeom>
+          <a:noFill/>
+        </p:spPr>
+        <p:txBody>
+          <a:bodyPr wrap="square">
+            <a:spAutoFit/>
+          </a:bodyPr>
+          <a:lstStyle/>
+          <a:p>
+            <a:pPr algn="r"/>
+            <a:r>
+              <a:rPr sz="1100" b="0" i="0">
+                <a:solidFill>
+                  <a:srgbClr val="666666"/>
+                </a:solidFill>
+                <a:latin typeface="Calibri"/>
+              </a:rPr>
+              <a:t>23</a:t>
+            </a:r>
+          </a:p>
+        </p:txBody>
+      </p:sp>
+    </p:spTree>
+  </p:cSld>
+  <p:clrMapOvr>
+    <a:masterClrMapping/>
+  </p:clrMapOvr>
+</p:sld>
+</file>
+
+<file path=ppt/slides/slide24.xml><?xml version="1.0" encoding="utf-8"?>
+<p:sld xmlns:a="http://schemas.openxmlformats.org/drawingml/2006/main" xmlns:p="http://schemas.openxmlformats.org/presentationml/2006/main" xmlns:r="http://schemas.openxmlformats.org/officeDocument/2006/relationships">
+  <p:cSld>
+    <p:bg>
+      <p:bgPr>
+        <a:solidFill>
+          <a:srgbClr val="FFFFFF"/>
+        </a:solidFill>
+        <a:effectLst/>
+      </p:bgPr>
+    </p:bg>
+    <p:spTree>
+      <p:nvGrpSpPr>
+        <p:cNvPr id="1" name=""/>
+        <p:cNvGrpSpPr/>
+        <p:nvPr/>
+      </p:nvGrpSpPr>
+      <p:grpSpPr/>
+      <p:sp>
+        <p:nvSpPr>
+          <p:cNvPr id="2" name="Rectangle 1"/>
+          <p:cNvSpPr/>
+          <p:nvPr/>
+        </p:nvSpPr>
+        <p:spPr>
+          <a:xfrm>
+            <a:off x="0" y="0"/>
+            <a:ext cx="12191695" cy="960120"/>
+          </a:xfrm>
+          <a:prstGeom prst="rect">
+            <a:avLst/>
+          </a:prstGeom>
+          <a:solidFill>
+            <a:srgbClr val="095292"/>
+          </a:solidFill>
+          <a:ln>
+            <a:noFill/>
+          </a:ln>
+        </p:spPr>
+        <p:style>
+          <a:lnRef idx="1">
+            <a:schemeClr val="accent1"/>
+          </a:lnRef>
+          <a:fillRef idx="3">
+            <a:schemeClr val="accent1"/>
+          </a:fillRef>
+          <a:effectRef idx="2">
+            <a:schemeClr val="accent1"/>
+          </a:effectRef>
+          <a:fontRef idx="minor">
+            <a:schemeClr val="lt1"/>
+          </a:fontRef>
+        </p:style>
+        <p:txBody>
+          <a:bodyPr rtlCol="0" anchor="ctr"/>
+          <a:lstStyle/>
+          <a:p>
+            <a:pPr algn="ctr"/>
+          </a:p>
+        </p:txBody>
+      </p:sp>
+      <p:sp>
+        <p:nvSpPr>
+          <p:cNvPr id="3" name="Rectangle 2"/>
+          <p:cNvSpPr/>
+          <p:nvPr/>
+        </p:nvSpPr>
+        <p:spPr>
+          <a:xfrm>
+            <a:off x="0" y="960120"/>
+            <a:ext cx="12191695" cy="41148"/>
+          </a:xfrm>
+          <a:prstGeom prst="rect">
+            <a:avLst/>
+          </a:prstGeom>
+          <a:solidFill>
+            <a:srgbClr val="FFD000"/>
+          </a:solidFill>
+          <a:ln>
+            <a:noFill/>
+          </a:ln>
+        </p:spPr>
+        <p:style>
+          <a:lnRef idx="1">
+            <a:schemeClr val="accent1"/>
+          </a:lnRef>
+          <a:fillRef idx="3">
+            <a:schemeClr val="accent1"/>
+          </a:fillRef>
+          <a:effectRef idx="2">
+            <a:schemeClr val="accent1"/>
+          </a:effectRef>
+          <a:fontRef idx="minor">
+            <a:schemeClr val="lt1"/>
+          </a:fontRef>
+        </p:style>
+        <p:txBody>
+          <a:bodyPr rtlCol="0" anchor="ctr"/>
+          <a:lstStyle/>
+          <a:p>
+            <a:pPr algn="ctr"/>
+          </a:p>
+        </p:txBody>
+      </p:sp>
+      <p:sp>
+        <p:nvSpPr>
+          <p:cNvPr id="4" name="TextBox 3"/>
+          <p:cNvSpPr txBox="1"/>
+          <p:nvPr/>
+        </p:nvSpPr>
+        <p:spPr>
+          <a:xfrm>
+            <a:off x="457200" y="164592"/>
+            <a:ext cx="11277295" cy="502920"/>
+          </a:xfrm>
+          <a:prstGeom prst="rect">
+            <a:avLst/>
+          </a:prstGeom>
+          <a:noFill/>
+        </p:spPr>
+        <p:txBody>
+          <a:bodyPr wrap="square">
+            <a:spAutoFit/>
+          </a:bodyPr>
+          <a:lstStyle/>
+          <a:p>
+            <a:r>
+              <a:rPr sz="2600" b="1" i="0">
+                <a:solidFill>
+                  <a:srgbClr val="FFFFFF"/>
+                </a:solidFill>
+                <a:latin typeface="Calibri"/>
+              </a:rPr>
+              <a:t>Sustentación (paso a paso)</a:t>
+            </a:r>
+          </a:p>
+        </p:txBody>
+      </p:sp>
+      <p:sp>
+        <p:nvSpPr>
+          <p:cNvPr id="5" name="TextBox 4"/>
+          <p:cNvSpPr txBox="1"/>
+          <p:nvPr/>
+        </p:nvSpPr>
+        <p:spPr>
+          <a:xfrm>
+            <a:off x="457200" y="1170432"/>
+            <a:ext cx="11277295" cy="5230368"/>
+          </a:xfrm>
+          <a:prstGeom prst="rect">
+            <a:avLst/>
+          </a:prstGeom>
+          <a:noFill/>
+        </p:spPr>
+        <p:txBody>
+          <a:bodyPr wrap="square">
+            <a:spAutoFit/>
+          </a:bodyPr>
+          <a:lstStyle/>
+          <a:p>
+            <a:pPr>
+              <a:spcAft>
+                <a:spcPts val="800"/>
+              </a:spcAft>
+            </a:pPr>
+            <a:r>
+              <a:rPr sz="1700" b="1" i="0">
+                <a:solidFill>
+                  <a:srgbClr val="333333"/>
+                </a:solidFill>
+                <a:latin typeface="Calibri"/>
+              </a:rPr>
+              <a:t>1.</a:t>
+            </a:r>
+            <a:r>
+              <a:rPr sz="1700" b="0" i="0">
+                <a:solidFill>
+                  <a:srgbClr val="333333"/>
+                </a:solidFill>
+                <a:latin typeface="Calibri"/>
+              </a:rPr>
+              <a:t> Paso 1: armen el paquete final y llenen el indice de 8 filas con entregable, nombre de archivo, ruta dentro del paquete y estado, verificando que los 8 archivos abran desde una maquina distinta a la del autor y que ningun nombre de archivo tenga espacios ni tildes que rompan la descarga.</a:t>
+            </a:r>
+          </a:p>
+          <a:p>
+            <a:pPr>
+              <a:spcAft>
+                <a:spcPts val="800"/>
+              </a:spcAft>
+            </a:pPr>
+            <a:r>
+              <a:rPr sz="1700" b="0" i="0">
+                <a:solidFill>
+                  <a:srgbClr val="333333"/>
+                </a:solidFill>
+                <a:latin typeface="Calibri"/>
+              </a:rPr>
+              <a:t>–   </a:t>
+            </a:r>
+            <a:r>
+              <a:rPr sz="1700" b="1" i="0">
+                <a:solidFill>
+                  <a:srgbClr val="333333"/>
+                </a:solidFill>
+                <a:latin typeface="Calibri"/>
+              </a:rPr>
+              <a:t>2.</a:t>
+            </a:r>
+            <a:r>
+              <a:rPr sz="1700" b="0" i="0">
+                <a:solidFill>
+                  <a:srgbClr val="333333"/>
+                </a:solidFill>
+                <a:latin typeface="Calibri"/>
+              </a:rPr>
+              <a:t> Paso 2: escriban en la plataforma del curso la lamina unica de arquitectura en Mermaid con las 3 zonas, los 5 contenedores, el edge, la cadena de entrega y los sistemas externos, verificando al renderizar que sea legible en una sola pantalla sin desplazamiento y que use los mismos nombres canonicos del paquete, porque esta es la lamina que van a proyectar en la sustentacion.</a:t>
+            </a:r>
+          </a:p>
+          <a:p>
+            <a:pPr>
+              <a:spcAft>
+                <a:spcPts val="800"/>
+              </a:spcAft>
+            </a:pPr>
+            <a:r>
+              <a:rPr sz="1700" b="0" i="0">
+                <a:solidFill>
+                  <a:srgbClr val="333333"/>
+                </a:solidFill>
+                <a:latin typeface="Calibri"/>
+              </a:rPr>
+              <a:t>–   </a:t>
+            </a:r>
+            <a:r>
+              <a:rPr sz="1700" b="1" i="0">
+                <a:solidFill>
+                  <a:srgbClr val="333333"/>
+                </a:solidFill>
+                <a:latin typeface="Calibri"/>
+              </a:rPr>
+              <a:t>3.</a:t>
+            </a:r>
+            <a:r>
+              <a:rPr sz="1700" b="0" i="0">
+                <a:solidFill>
+                  <a:srgbClr val="333333"/>
+                </a:solidFill>
+                <a:latin typeface="Calibri"/>
+              </a:rPr>
+              <a:t> Paso 3: redacten el Q and A escrito con 3 preguntas duras que el jurado podria hacer, una de decision de arquitectura, una de seguridad y una de escala o rendimiento, cada una con respuesta de maximo 4 lineas que cite la evidencia del paquete, verificando que ninguna respuesta sea no lo alcanzamos a hacer sin nombrar la decision consciente que tomaron.</a:t>
+            </a:r>
+          </a:p>
+          <a:p>
+            <a:pPr>
+              <a:spcAft>
+                <a:spcPts val="800"/>
+              </a:spcAft>
+            </a:pPr>
+            <a:r>
+              <a:rPr sz="1700" b="0" i="0">
+                <a:solidFill>
+                  <a:srgbClr val="333333"/>
+                </a:solidFill>
+                <a:latin typeface="Calibri"/>
+              </a:rPr>
+              <a:t>–   </a:t>
+            </a:r>
+            <a:r>
+              <a:rPr sz="1700" b="1" i="0">
+                <a:solidFill>
+                  <a:srgbClr val="333333"/>
+                </a:solidFill>
+                <a:latin typeface="Calibri"/>
+              </a:rPr>
+              <a:t>4.</a:t>
+            </a:r>
+            <a:r>
+              <a:rPr sz="1700" b="0" i="0">
+                <a:solidFill>
+                  <a:srgbClr val="333333"/>
+                </a:solidFill>
+                <a:latin typeface="Calibri"/>
+              </a:rPr>
+              <a:t> Paso 4: ensayen el pitch con cronometro ANTES de la sesion y registren la tabla de tiempos reales por seccion con quien hablo en cada una, verificando que el tiempo total quede entre 5 y 8 minutos; la sustentacion se hace EN VIVO en la sesion de clase, con preguntas del docente al cierre, no con un video grabado.</a:t>
+            </a:r>
+          </a:p>
+          <a:p>
+            <a:pPr>
+              <a:spcAft>
+                <a:spcPts val="800"/>
+              </a:spcAft>
+            </a:pPr>
+            <a:r>
+              <a:rPr sz="1700" b="0" i="0">
+                <a:solidFill>
+                  <a:srgbClr val="333333"/>
+                </a:solidFill>
+                <a:latin typeface="Calibri"/>
+              </a:rPr>
+              <a:t>–   </a:t>
+            </a:r>
+            <a:r>
+              <a:rPr sz="1700" b="1" i="0">
+                <a:solidFill>
+                  <a:srgbClr val="333333"/>
+                </a:solidFill>
+                <a:latin typeface="Calibri"/>
+              </a:rPr>
+              <a:t>5.</a:t>
+            </a:r>
+            <a:r>
+              <a:rPr sz="1700" b="0" i="0">
+                <a:solidFill>
+                  <a:srgbClr val="333333"/>
+                </a:solidFill>
+                <a:latin typeface="Calibri"/>
+              </a:rPr>
+              <a:t> Paso 5: escriban la reflexion de media pagina sobre el trade-off mas difícil y suban el paquete final completo mas las 5 preguntas a la plataforma del curso (modulo Proyectos) ANTES de su turno de sustentacion, verificando que el informe, los diagramas, la evidencia del lab, el ci.yml y la presentacion esten los cinco dentro del mismo paquete.</a:t>
+            </a:r>
+          </a:p>
+        </p:txBody>
+      </p:sp>
+      <p:sp>
+        <p:nvSpPr>
+          <p:cNvPr id="6" name="TextBox 5"/>
+          <p:cNvSpPr txBox="1"/>
+          <p:nvPr/>
+        </p:nvSpPr>
+        <p:spPr>
+          <a:xfrm>
+            <a:off x="11185855" y="6473952"/>
+            <a:ext cx="640080" cy="274320"/>
+          </a:xfrm>
+          <a:prstGeom prst="rect">
+            <a:avLst/>
+          </a:prstGeom>
+          <a:noFill/>
+        </p:spPr>
+        <p:txBody>
+          <a:bodyPr wrap="square">
+            <a:spAutoFit/>
+          </a:bodyPr>
+          <a:lstStyle/>
+          <a:p>
+            <a:pPr algn="r"/>
+            <a:r>
+              <a:rPr sz="1100" b="0" i="0">
+                <a:solidFill>
+                  <a:srgbClr val="666666"/>
+                </a:solidFill>
+                <a:latin typeface="Calibri"/>
+              </a:rPr>
+              <a:t>24</a:t>
+            </a:r>
+          </a:p>
+        </p:txBody>
+      </p:sp>
+    </p:spTree>
+  </p:cSld>
+  <p:clrMapOvr>
+    <a:masterClrMapping/>
+  </p:clrMapOvr>
+</p:sld>
+</file>
+
+<file path=ppt/slides/slide25.xml><?xml version="1.0" encoding="utf-8"?>
+<p:sld xmlns:a="http://schemas.openxmlformats.org/drawingml/2006/main" xmlns:p="http://schemas.openxmlformats.org/presentationml/2006/main" xmlns:r="http://schemas.openxmlformats.org/officeDocument/2006/relationships">
+  <p:cSld>
+    <p:bg>
+      <p:bgPr>
+        <a:solidFill>
+          <a:srgbClr val="FFFFFF"/>
+        </a:solidFill>
+        <a:effectLst/>
+      </p:bgPr>
+    </p:bg>
+    <p:spTree>
+      <p:nvGrpSpPr>
+        <p:cNvPr id="1" name=""/>
+        <p:cNvGrpSpPr/>
+        <p:nvPr/>
+      </p:nvGrpSpPr>
+      <p:grpSpPr/>
+      <p:sp>
+        <p:nvSpPr>
+          <p:cNvPr id="2" name="Rectangle 1"/>
+          <p:cNvSpPr/>
+          <p:nvPr/>
+        </p:nvSpPr>
+        <p:spPr>
+          <a:xfrm>
+            <a:off x="0" y="0"/>
+            <a:ext cx="12191695" cy="960120"/>
+          </a:xfrm>
+          <a:prstGeom prst="rect">
+            <a:avLst/>
+          </a:prstGeom>
+          <a:solidFill>
+            <a:srgbClr val="095292"/>
+          </a:solidFill>
+          <a:ln>
+            <a:noFill/>
+          </a:ln>
+        </p:spPr>
+        <p:style>
+          <a:lnRef idx="1">
+            <a:schemeClr val="accent1"/>
+          </a:lnRef>
+          <a:fillRef idx="3">
+            <a:schemeClr val="accent1"/>
+          </a:fillRef>
+          <a:effectRef idx="2">
+            <a:schemeClr val="accent1"/>
+          </a:effectRef>
+          <a:fontRef idx="minor">
+            <a:schemeClr val="lt1"/>
+          </a:fontRef>
+        </p:style>
+        <p:txBody>
+          <a:bodyPr rtlCol="0" anchor="ctr"/>
+          <a:lstStyle/>
+          <a:p>
+            <a:pPr algn="ctr"/>
+          </a:p>
+        </p:txBody>
+      </p:sp>
+      <p:sp>
+        <p:nvSpPr>
+          <p:cNvPr id="3" name="Rectangle 2"/>
+          <p:cNvSpPr/>
+          <p:nvPr/>
+        </p:nvSpPr>
+        <p:spPr>
+          <a:xfrm>
+            <a:off x="0" y="960120"/>
+            <a:ext cx="12191695" cy="41148"/>
+          </a:xfrm>
+          <a:prstGeom prst="rect">
+            <a:avLst/>
+          </a:prstGeom>
+          <a:solidFill>
+            <a:srgbClr val="FFD000"/>
+          </a:solidFill>
+          <a:ln>
+            <a:noFill/>
+          </a:ln>
+        </p:spPr>
+        <p:style>
+          <a:lnRef idx="1">
+            <a:schemeClr val="accent1"/>
+          </a:lnRef>
+          <a:fillRef idx="3">
+            <a:schemeClr val="accent1"/>
+          </a:fillRef>
+          <a:effectRef idx="2">
+            <a:schemeClr val="accent1"/>
+          </a:effectRef>
+          <a:fontRef idx="minor">
+            <a:schemeClr val="lt1"/>
+          </a:fontRef>
+        </p:style>
+        <p:txBody>
+          <a:bodyPr rtlCol="0" anchor="ctr"/>
+          <a:lstStyle/>
+          <a:p>
+            <a:pPr algn="ctr"/>
+          </a:p>
+        </p:txBody>
+      </p:sp>
+      <p:sp>
+        <p:nvSpPr>
+          <p:cNvPr id="4" name="TextBox 3"/>
+          <p:cNvSpPr txBox="1"/>
+          <p:nvPr/>
+        </p:nvSpPr>
+        <p:spPr>
+          <a:xfrm>
+            <a:off x="457200" y="164592"/>
+            <a:ext cx="11277295" cy="502920"/>
+          </a:xfrm>
+          <a:prstGeom prst="rect">
+            <a:avLst/>
+          </a:prstGeom>
+          <a:noFill/>
+        </p:spPr>
+        <p:txBody>
+          <a:bodyPr wrap="square">
+            <a:spAutoFit/>
+          </a:bodyPr>
+          <a:lstStyle/>
+          <a:p>
+            <a:r>
+              <a:rPr sz="2600" b="1" i="0">
+                <a:solidFill>
+                  <a:srgbClr val="FFFFFF"/>
+                </a:solidFill>
+                <a:latin typeface="Calibri"/>
+              </a:rPr>
+              <a:t>Para continuar (PI)</a:t>
+            </a:r>
+          </a:p>
+        </p:txBody>
+      </p:sp>
+      <p:sp>
+        <p:nvSpPr>
+          <p:cNvPr id="5" name="Rounded Rectangle 4"/>
+          <p:cNvSpPr/>
+          <p:nvPr/>
+        </p:nvSpPr>
+        <p:spPr>
+          <a:xfrm>
+            <a:off x="457200" y="1261872"/>
+            <a:ext cx="11277295" cy="1051560"/>
+          </a:xfrm>
+          <a:prstGeom prst="roundRect">
+            <a:avLst>
+              <a:gd name="adj" fmla="val 12000"/>
+            </a:avLst>
+          </a:prstGeom>
+          <a:solidFill>
+            <a:srgbClr val="E8F4FA"/>
+          </a:solidFill>
+          <a:ln>
+            <a:noFill/>
+          </a:ln>
+        </p:spPr>
+        <p:style>
+          <a:lnRef idx="1">
+            <a:schemeClr val="accent1"/>
+          </a:lnRef>
+          <a:fillRef idx="3">
+            <a:schemeClr val="accent1"/>
+          </a:fillRef>
+          <a:effectRef idx="2">
+            <a:schemeClr val="accent1"/>
+          </a:effectRef>
+          <a:fontRef idx="minor">
+            <a:schemeClr val="lt1"/>
+          </a:fontRef>
+        </p:style>
+        <p:txBody>
+          <a:bodyPr rtlCol="0" anchor="ctr"/>
+          <a:lstStyle/>
+          <a:p>
+            <a:pPr algn="ctr"/>
+          </a:p>
+        </p:txBody>
+      </p:sp>
+      <p:sp>
+        <p:nvSpPr>
+          <p:cNvPr id="6" name="Rectangle 5"/>
+          <p:cNvSpPr/>
+          <p:nvPr/>
+        </p:nvSpPr>
+        <p:spPr>
+          <a:xfrm>
+            <a:off x="457200" y="1261872"/>
+            <a:ext cx="128016" cy="1051560"/>
+          </a:xfrm>
+          <a:prstGeom prst="rect">
+            <a:avLst/>
+          </a:prstGeom>
+          <a:solidFill>
+            <a:srgbClr val="269CCB"/>
+          </a:solidFill>
+          <a:ln>
+            <a:noFill/>
+          </a:ln>
+        </p:spPr>
+        <p:style>
+          <a:lnRef idx="1">
+            <a:schemeClr val="accent1"/>
+          </a:lnRef>
+          <a:fillRef idx="3">
+            <a:schemeClr val="accent1"/>
+          </a:fillRef>
+          <a:effectRef idx="2">
+            <a:schemeClr val="accent1"/>
+          </a:effectRef>
+          <a:fontRef idx="minor">
+            <a:schemeClr val="lt1"/>
+          </a:fontRef>
+        </p:style>
+        <p:txBody>
+          <a:bodyPr rtlCol="0" anchor="ctr"/>
+          <a:lstStyle/>
+          <a:p>
+            <a:pPr algn="ctr"/>
+          </a:p>
+        </p:txBody>
+      </p:sp>
+      <p:sp>
+        <p:nvSpPr>
+          <p:cNvPr id="7" name="TextBox 6"/>
+          <p:cNvSpPr txBox="1"/>
+          <p:nvPr/>
+        </p:nvSpPr>
+        <p:spPr>
+          <a:xfrm>
+            <a:off x="777240" y="1399031"/>
+            <a:ext cx="10774375" cy="822959"/>
+          </a:xfrm>
+          <a:prstGeom prst="rect">
+            <a:avLst/>
+          </a:prstGeom>
+          <a:noFill/>
+        </p:spPr>
+        <p:txBody>
+          <a:bodyPr wrap="square">
+            <a:spAutoFit/>
+          </a:bodyPr>
+          <a:lstStyle/>
+          <a:p>
+            <a:r>
+              <a:rPr sz="1200" b="1" i="0">
+                <a:solidFill>
+                  <a:srgbClr val="269CCB"/>
+                </a:solidFill>
+                <a:latin typeface="Calibri"/>
+              </a:rPr>
+              <a:t>Info</a:t>
+            </a:r>
+          </a:p>
+          <a:p>
+            <a:pPr>
+              <a:spcBef>
+                <a:spcPts val="400"/>
+              </a:spcBef>
+            </a:pPr>
+            <a:r>
+              <a:rPr sz="1400" b="0" i="0">
+                <a:solidFill>
+                  <a:srgbClr val="333333"/>
+                </a:solidFill>
+                <a:latin typeface="Calibri"/>
+              </a:rPr>
+              <a:t>Entregable: Paquete final en la plataforma del curso (módulo Proyectos) + pitch de 5–8 min sustentado hoy en clase + Q&amp;A</a:t>
+            </a:r>
+          </a:p>
+        </p:txBody>
+      </p:sp>
+      <p:sp>
+        <p:nvSpPr>
+          <p:cNvPr id="8" name="Rounded Rectangle 7"/>
+          <p:cNvSpPr/>
+          <p:nvPr/>
+        </p:nvSpPr>
+        <p:spPr>
+          <a:xfrm>
+            <a:off x="457200" y="2478024"/>
+            <a:ext cx="11277295" cy="1051560"/>
+          </a:xfrm>
+          <a:prstGeom prst="roundRect">
+            <a:avLst>
+              <a:gd name="adj" fmla="val 12000"/>
+            </a:avLst>
+          </a:prstGeom>
+          <a:solidFill>
+            <a:srgbClr val="FFF8E1"/>
+          </a:solidFill>
+          <a:ln>
+            <a:noFill/>
+          </a:ln>
+        </p:spPr>
+        <p:style>
+          <a:lnRef idx="1">
+            <a:schemeClr val="accent1"/>
+          </a:lnRef>
+          <a:fillRef idx="3">
+            <a:schemeClr val="accent1"/>
+          </a:fillRef>
+          <a:effectRef idx="2">
+            <a:schemeClr val="accent1"/>
+          </a:effectRef>
+          <a:fontRef idx="minor">
+            <a:schemeClr val="lt1"/>
+          </a:fontRef>
+        </p:style>
+        <p:txBody>
+          <a:bodyPr rtlCol="0" anchor="ctr"/>
+          <a:lstStyle/>
+          <a:p>
+            <a:pPr algn="ctr"/>
+          </a:p>
+        </p:txBody>
+      </p:sp>
+      <p:sp>
+        <p:nvSpPr>
+          <p:cNvPr id="9" name="Rectangle 8"/>
+          <p:cNvSpPr/>
+          <p:nvPr/>
+        </p:nvSpPr>
+        <p:spPr>
+          <a:xfrm>
+            <a:off x="457200" y="2478024"/>
+            <a:ext cx="128016" cy="1051560"/>
+          </a:xfrm>
+          <a:prstGeom prst="rect">
+            <a:avLst/>
+          </a:prstGeom>
+          <a:solidFill>
+            <a:srgbClr val="FFD000"/>
+          </a:solidFill>
+          <a:ln>
+            <a:noFill/>
+          </a:ln>
+        </p:spPr>
+        <p:style>
+          <a:lnRef idx="1">
+            <a:schemeClr val="accent1"/>
+          </a:lnRef>
+          <a:fillRef idx="3">
+            <a:schemeClr val="accent1"/>
+          </a:fillRef>
+          <a:effectRef idx="2">
+            <a:schemeClr val="accent1"/>
+          </a:effectRef>
+          <a:fontRef idx="minor">
+            <a:schemeClr val="lt1"/>
+          </a:fontRef>
+        </p:style>
+        <p:txBody>
+          <a:bodyPr rtlCol="0" anchor="ctr"/>
+          <a:lstStyle/>
+          <a:p>
+            <a:pPr algn="ctr"/>
+          </a:p>
+        </p:txBody>
+      </p:sp>
+      <p:sp>
+        <p:nvSpPr>
+          <p:cNvPr id="10" name="TextBox 9"/>
+          <p:cNvSpPr txBox="1"/>
+          <p:nvPr/>
+        </p:nvSpPr>
+        <p:spPr>
+          <a:xfrm>
+            <a:off x="777240" y="2615184"/>
+            <a:ext cx="10774375" cy="822959"/>
+          </a:xfrm>
+          <a:prstGeom prst="rect">
+            <a:avLst/>
+          </a:prstGeom>
+          <a:noFill/>
+        </p:spPr>
+        <p:txBody>
+          <a:bodyPr wrap="square">
+            <a:spAutoFit/>
+          </a:bodyPr>
+          <a:lstStyle/>
+          <a:p>
+            <a:r>
+              <a:rPr sz="1200" b="1" i="0">
+                <a:solidFill>
+                  <a:srgbClr val="FFD000"/>
+                </a:solidFill>
+                <a:latin typeface="Calibri"/>
+              </a:rPr>
+              <a:t>Aclaración</a:t>
+            </a:r>
+          </a:p>
+          <a:p>
+            <a:pPr>
+              <a:spcBef>
+                <a:spcPts val="400"/>
+              </a:spcBef>
+            </a:pPr>
+            <a:r>
+              <a:rPr sz="1400" b="0" i="0">
+                <a:solidFill>
+                  <a:srgbClr val="333333"/>
+                </a:solidFill>
+                <a:latin typeface="Calibri"/>
+              </a:rPr>
+              <a:t>El paquete se sube a la plataforma del curso </a:t>
+            </a:r>
+            <a:r>
+              <a:rPr sz="1400" b="1" i="0">
+                <a:solidFill>
+                  <a:srgbClr val="333333"/>
+                </a:solidFill>
+                <a:latin typeface="Calibri"/>
+              </a:rPr>
+              <a:t>antes</a:t>
+            </a:r>
+            <a:r>
+              <a:rPr sz="1400" b="0" i="0">
+                <a:solidFill>
+                  <a:srgbClr val="333333"/>
+                </a:solidFill>
+                <a:latin typeface="Calibri"/>
+              </a:rPr>
+              <a:t> del bloque de sustentaciones.</a:t>
+            </a:r>
+          </a:p>
+        </p:txBody>
+      </p:sp>
+      <p:sp>
+        <p:nvSpPr>
+          <p:cNvPr id="11" name="Rounded Rectangle 10"/>
+          <p:cNvSpPr/>
+          <p:nvPr/>
+        </p:nvSpPr>
+        <p:spPr>
+          <a:xfrm>
+            <a:off x="457200" y="3694176"/>
+            <a:ext cx="11277295" cy="1051560"/>
+          </a:xfrm>
+          <a:prstGeom prst="roundRect">
+            <a:avLst>
+              <a:gd name="adj" fmla="val 12000"/>
+            </a:avLst>
+          </a:prstGeom>
+          <a:solidFill>
+            <a:srgbClr val="FBE4E4"/>
+          </a:solidFill>
+          <a:ln>
+            <a:noFill/>
+          </a:ln>
+        </p:spPr>
+        <p:style>
+          <a:lnRef idx="1">
+            <a:schemeClr val="accent1"/>
+          </a:lnRef>
+          <a:fillRef idx="3">
+            <a:schemeClr val="accent1"/>
+          </a:fillRef>
+          <a:effectRef idx="2">
+            <a:schemeClr val="accent1"/>
+          </a:effectRef>
+          <a:fontRef idx="minor">
+            <a:schemeClr val="lt1"/>
+          </a:fontRef>
+        </p:style>
+        <p:txBody>
+          <a:bodyPr rtlCol="0" anchor="ctr"/>
+          <a:lstStyle/>
+          <a:p>
+            <a:pPr algn="ctr"/>
+          </a:p>
+        </p:txBody>
+      </p:sp>
+      <p:sp>
+        <p:nvSpPr>
+          <p:cNvPr id="12" name="Rectangle 11"/>
+          <p:cNvSpPr/>
+          <p:nvPr/>
+        </p:nvSpPr>
+        <p:spPr>
+          <a:xfrm>
+            <a:off x="457200" y="3694176"/>
+            <a:ext cx="128016" cy="1051560"/>
+          </a:xfrm>
+          <a:prstGeom prst="rect">
+            <a:avLst/>
+          </a:prstGeom>
+          <a:solidFill>
+            <a:srgbClr val="A02030"/>
+          </a:solidFill>
+          <a:ln>
+            <a:noFill/>
+          </a:ln>
+        </p:spPr>
+        <p:style>
+          <a:lnRef idx="1">
+            <a:schemeClr val="accent1"/>
+          </a:lnRef>
+          <a:fillRef idx="3">
+            <a:schemeClr val="accent1"/>
+          </a:fillRef>
+          <a:effectRef idx="2">
+            <a:schemeClr val="accent1"/>
+          </a:effectRef>
+          <a:fontRef idx="minor">
+            <a:schemeClr val="lt1"/>
+          </a:fontRef>
+        </p:style>
+        <p:txBody>
+          <a:bodyPr rtlCol="0" anchor="ctr"/>
+          <a:lstStyle/>
+          <a:p>
+            <a:pPr algn="ctr"/>
+          </a:p>
+        </p:txBody>
+      </p:sp>
+      <p:sp>
+        <p:nvSpPr>
+          <p:cNvPr id="13" name="TextBox 12"/>
+          <p:cNvSpPr txBox="1"/>
+          <p:nvPr/>
+        </p:nvSpPr>
+        <p:spPr>
+          <a:xfrm>
+            <a:off x="777240" y="3831336"/>
+            <a:ext cx="10774375" cy="822959"/>
+          </a:xfrm>
+          <a:prstGeom prst="rect">
+            <a:avLst/>
+          </a:prstGeom>
+          <a:noFill/>
+        </p:spPr>
+        <p:txBody>
+          <a:bodyPr wrap="square">
+            <a:spAutoFit/>
+          </a:bodyPr>
+          <a:lstStyle/>
+          <a:p>
+            <a:r>
+              <a:rPr sz="1200" b="1" i="0">
+                <a:solidFill>
+                  <a:srgbClr val="A02030"/>
+                </a:solidFill>
+                <a:latin typeface="Calibri"/>
+              </a:rPr>
+              <a:t>Atención</a:t>
+            </a:r>
+          </a:p>
+          <a:p>
+            <a:pPr>
+              <a:spcBef>
+                <a:spcPts val="400"/>
+              </a:spcBef>
+            </a:pPr>
+            <a:r>
+              <a:rPr sz="1400" b="0" i="0">
+                <a:solidFill>
+                  <a:srgbClr val="333333"/>
+                </a:solidFill>
+                <a:latin typeface="Calibri"/>
+              </a:rPr>
+              <a:t>La sustentación es </a:t>
+            </a:r>
+            <a:r>
+              <a:rPr sz="1400" b="1" i="0">
+                <a:solidFill>
+                  <a:srgbClr val="333333"/>
+                </a:solidFill>
+                <a:latin typeface="Calibri"/>
+              </a:rPr>
+              <a:t>en vivo</a:t>
+            </a:r>
+            <a:r>
+              <a:rPr sz="1400" b="0" i="0">
+                <a:solidFill>
+                  <a:srgbClr val="333333"/>
+                </a:solidFill>
+                <a:latin typeface="Calibri"/>
+              </a:rPr>
+              <a:t> y con Q&amp;A: no se acepta video grabado en su lugar.</a:t>
+            </a:r>
+          </a:p>
+        </p:txBody>
+      </p:sp>
+      <p:sp>
+        <p:nvSpPr>
+          <p:cNvPr id="14" name="TextBox 13"/>
+          <p:cNvSpPr txBox="1"/>
+          <p:nvPr/>
+        </p:nvSpPr>
+        <p:spPr>
+          <a:xfrm>
+            <a:off x="11185855" y="6473952"/>
+            <a:ext cx="640080" cy="274320"/>
+          </a:xfrm>
+          <a:prstGeom prst="rect">
+            <a:avLst/>
+          </a:prstGeom>
+          <a:noFill/>
+        </p:spPr>
+        <p:txBody>
+          <a:bodyPr wrap="square">
+            <a:spAutoFit/>
+          </a:bodyPr>
+          <a:lstStyle/>
+          <a:p>
+            <a:pPr algn="r"/>
+            <a:r>
+              <a:rPr sz="1100" b="0" i="0">
+                <a:solidFill>
+                  <a:srgbClr val="666666"/>
+                </a:solidFill>
+                <a:latin typeface="Calibri"/>
+              </a:rPr>
+              <a:t>25</a:t>
+            </a:r>
+          </a:p>
+        </p:txBody>
+      </p:sp>
+    </p:spTree>
+  </p:cSld>
+  <p:clrMapOvr>
+    <a:masterClrMapping/>
+  </p:clrMapOvr>
+</p:sld>
+</file>
+
+<file path=ppt/slides/slide26.xml><?xml version="1.0" encoding="utf-8"?>
+<p:sld xmlns:a="http://schemas.openxmlformats.org/drawingml/2006/main" xmlns:p="http://schemas.openxmlformats.org/presentationml/2006/main" xmlns:r="http://schemas.openxmlformats.org/officeDocument/2006/relationships">
+  <p:cSld>
+    <p:bg>
+      <p:bgPr>
+        <a:solidFill>
+          <a:srgbClr val="FFFFFF"/>
+        </a:solidFill>
+        <a:effectLst/>
+      </p:bgPr>
+    </p:bg>
+    <p:spTree>
+      <p:nvGrpSpPr>
+        <p:cNvPr id="1" name=""/>
+        <p:cNvGrpSpPr/>
+        <p:nvPr/>
+      </p:nvGrpSpPr>
+      <p:grpSpPr/>
+      <p:sp>
+        <p:nvSpPr>
+          <p:cNvPr id="2" name="Rectangle 1"/>
+          <p:cNvSpPr/>
+          <p:nvPr/>
+        </p:nvSpPr>
+        <p:spPr>
+          <a:xfrm>
+            <a:off x="0" y="0"/>
+            <a:ext cx="12191695" cy="164592"/>
+          </a:xfrm>
+          <a:prstGeom prst="rect">
+            <a:avLst/>
+          </a:prstGeom>
+          <a:solidFill>
+            <a:srgbClr val="269CCB"/>
+          </a:solidFill>
+          <a:ln>
+            <a:noFill/>
+          </a:ln>
+        </p:spPr>
+        <p:style>
+          <a:lnRef idx="1">
+            <a:schemeClr val="accent1"/>
+          </a:lnRef>
+          <a:fillRef idx="3">
+            <a:schemeClr val="accent1"/>
+          </a:fillRef>
+          <a:effectRef idx="2">
+            <a:schemeClr val="accent1"/>
+          </a:effectRef>
+          <a:fontRef idx="minor">
+            <a:schemeClr val="lt1"/>
+          </a:fontRef>
+        </p:style>
+        <p:txBody>
+          <a:bodyPr rtlCol="0" anchor="ctr"/>
+          <a:lstStyle/>
+          <a:p>
+            <a:pPr algn="ctr"/>
+          </a:p>
+        </p:txBody>
+      </p:sp>
+      <p:pic>
+        <p:nvPicPr>
+          <p:cNvPr id="3" name="Picture 2" descr="logo_uniajc_color.png"/>
+          <p:cNvPicPr>
+            <a:picLocks noChangeAspect="1"/>
+          </p:cNvPicPr>
+          <p:nvPr/>
+        </p:nvPicPr>
+        <p:blipFill>
+          <a:blip r:embed="rId2"/>
+          <a:stretch>
+            <a:fillRect/>
+          </a:stretch>
+        </p:blipFill>
+        <p:spPr>
+          <a:xfrm>
+            <a:off x="10271455" y="5998464"/>
+            <a:ext cx="1463040" cy="643233"/>
+          </a:xfrm>
+          <a:prstGeom prst="rect">
+            <a:avLst/>
+          </a:prstGeom>
+        </p:spPr>
+      </p:pic>
+      <p:sp>
+        <p:nvSpPr>
+          <p:cNvPr id="4" name="TextBox 3"/>
+          <p:cNvSpPr txBox="1"/>
+          <p:nvPr/>
+        </p:nvSpPr>
+        <p:spPr>
+          <a:xfrm>
+            <a:off x="457200" y="1737360"/>
+            <a:ext cx="11277295" cy="1097280"/>
+          </a:xfrm>
+          <a:prstGeom prst="rect">
+            <a:avLst/>
+          </a:prstGeom>
+          <a:noFill/>
+        </p:spPr>
+        <p:txBody>
+          <a:bodyPr wrap="square" anchor="ctr"/>
+          <a:lstStyle/>
+          <a:p>
+            <a:pPr algn="ctr"/>
+            <a:r>
+              <a:rPr sz="3400" b="1" i="0">
+                <a:solidFill>
+                  <a:srgbClr val="095292"/>
+                </a:solidFill>
+                <a:latin typeface="Calibri"/>
+              </a:rPr>
+              <a:t>Clase 15 · cierre del PI CloudLite</a:t>
+            </a:r>
+          </a:p>
+        </p:txBody>
+      </p:sp>
+      <p:sp>
+        <p:nvSpPr>
+          <p:cNvPr id="5" name="TextBox 4"/>
+          <p:cNvSpPr txBox="1"/>
+          <p:nvPr/>
+        </p:nvSpPr>
+        <p:spPr>
+          <a:xfrm>
+            <a:off x="457200" y="3017520"/>
+            <a:ext cx="11277295" cy="1645920"/>
+          </a:xfrm>
+          <a:prstGeom prst="rect">
+            <a:avLst/>
+          </a:prstGeom>
+          <a:noFill/>
+        </p:spPr>
+        <p:txBody>
+          <a:bodyPr wrap="square">
+            <a:spAutoFit/>
+          </a:bodyPr>
+          <a:lstStyle/>
+          <a:p>
+            <a:pPr algn="ctr">
+              <a:spcAft>
+                <a:spcPts val="600"/>
+              </a:spcAft>
+            </a:pPr>
+            <a:r>
+              <a:rPr sz="1600" b="0" i="0">
+                <a:solidFill>
+                  <a:srgbClr val="333333"/>
+                </a:solidFill>
+                <a:latin typeface="Calibri"/>
+              </a:rPr>
+              <a:t>Sustentar en vivo el PI CloudLite App y entregar el paquete final</a:t>
+            </a:r>
+          </a:p>
+          <a:p>
+            <a:pPr algn="ctr">
+              <a:spcAft>
+                <a:spcPts val="600"/>
+              </a:spcAft>
+            </a:pPr>
+            <a:r>
+              <a:rPr sz="1600" b="0" i="0">
+                <a:solidFill>
+                  <a:srgbClr val="333333"/>
+                </a:solidFill>
+                <a:latin typeface="Calibri"/>
+              </a:rPr>
+              <a:t>Evidencia: Paquete final en la plataforma del curso (módulo Proyectos) + pitch de 5–8 min sustentado hoy en clase + Q&amp;A</a:t>
+            </a:r>
+          </a:p>
+          <a:p>
+            <a:pPr algn="ctr">
+              <a:spcAft>
+                <a:spcPts val="600"/>
+              </a:spcAft>
+            </a:pPr>
+            <a:r>
+              <a:rPr sz="1600" b="0" i="0">
+                <a:solidFill>
+                  <a:srgbClr val="333333"/>
+                </a:solidFill>
+                <a:latin typeface="Calibri"/>
+              </a:rPr>
+              <a:t>Conserva el repo (informe, diagramas, Dockerfile, ci.yml) como portafolio</a:t>
+            </a:r>
+          </a:p>
+        </p:txBody>
+      </p:sp>
+      <p:sp>
+        <p:nvSpPr>
+          <p:cNvPr id="6" name="TextBox 5"/>
+          <p:cNvSpPr txBox="1"/>
+          <p:nvPr/>
+        </p:nvSpPr>
+        <p:spPr>
+          <a:xfrm>
+            <a:off x="457200" y="4754880"/>
+            <a:ext cx="11277295" cy="640080"/>
+          </a:xfrm>
+          <a:prstGeom prst="rect">
+            <a:avLst/>
+          </a:prstGeom>
+          <a:noFill/>
+        </p:spPr>
+        <p:txBody>
+          <a:bodyPr wrap="square">
+            <a:spAutoFit/>
+          </a:bodyPr>
+          <a:lstStyle/>
+          <a:p>
+            <a:pPr algn="ctr"/>
+            <a:r>
+              <a:rPr sz="2000" b="1" i="0">
+                <a:solidFill>
+                  <a:srgbClr val="269CCB"/>
+                </a:solidFill>
+                <a:latin typeface="Calibri"/>
+              </a:rPr>
+              <a:t>Arquitectura = decisiones documentadas con sus consecuencias</a:t>
+            </a:r>
+          </a:p>
+        </p:txBody>
+      </p:sp>
+    </p:spTree>
+  </p:cSld>
+  <p:clrMapOvr>
+    <a:masterClrMapping/>
+  </p:clrMapOvr>
+</p:sld>
+</file>
+
 <file path=ppt/slides/slide3.xml><?xml version="1.0" encoding="utf-8"?>
 <p:sld xmlns:a="http://schemas.openxmlformats.org/drawingml/2006/main" xmlns:p="http://schemas.openxmlformats.org/presentationml/2006/main" xmlns:r="http://schemas.openxmlformats.org/officeDocument/2006/relationships">
   <p:cSld>
@@ -6757,7 +11904,7 @@
         <p:spPr>
           <a:xfrm>
             <a:off x="0" y="0"/>
-            <a:ext cx="12191695" cy="1170432"/>
+            <a:ext cx="12191695" cy="960120"/>
           </a:xfrm>
           <a:prstGeom prst="rect">
             <a:avLst/>
@@ -6799,7 +11946,7 @@
         </p:nvSpPr>
         <p:spPr>
           <a:xfrm>
-            <a:off x="0" y="1170432"/>
+            <a:off x="0" y="960120"/>
             <a:ext cx="12191695" cy="41148"/>
           </a:xfrm>
           <a:prstGeom prst="rect">
@@ -6843,7 +11990,7 @@
         <p:spPr>
           <a:xfrm>
             <a:off x="457200" y="164592"/>
-            <a:ext cx="11277295" cy="384048"/>
+            <a:ext cx="11277295" cy="502920"/>
           </a:xfrm>
           <a:prstGeom prst="rect">
             <a:avLst/>
@@ -6863,7 +12010,7 @@
                 </a:solidFill>
                 <a:latin typeface="Calibri"/>
               </a:rPr>
-              <a:t>Herramientas de hoy</a:t>
+              <a:t>Sustentar no es describir: el eje de toda la clase</a:t>
             </a:r>
           </a:p>
         </p:txBody>
@@ -6876,8 +12023,8 @@
         </p:nvSpPr>
         <p:spPr>
           <a:xfrm>
-            <a:off x="457200" y="566928"/>
-            <a:ext cx="11277295" cy="411480"/>
+            <a:off x="457200" y="1170432"/>
+            <a:ext cx="11277295" cy="5230368"/>
           </a:xfrm>
           <a:prstGeom prst="rect">
             <a:avLst/>
@@ -6890,837 +12037,122 @@
           </a:bodyPr>
           <a:lstStyle/>
           <a:p>
-            <a:r>
-              <a:rPr sz="1400" b="0" i="0">
-                <a:solidFill>
-                  <a:srgbClr val="B8D8EE"/>
-                </a:solidFill>
-                <a:latin typeface="Calibri"/>
-              </a:rPr>
-              <a:t>Gratis · navegador o free tier · sin cuenta de pago</a:t>
-            </a:r>
-          </a:p>
-        </p:txBody>
-      </p:sp>
-      <p:sp>
-        <p:nvSpPr>
-          <p:cNvPr id="6" name="Rounded Rectangle 5"/>
-          <p:cNvSpPr/>
-          <p:nvPr/>
-        </p:nvSpPr>
-        <p:spPr>
-          <a:xfrm>
-            <a:off x="457200" y="1591056"/>
-            <a:ext cx="3624986" cy="2299716"/>
-          </a:xfrm>
-          <a:prstGeom prst="roundRect">
-            <a:avLst>
-              <a:gd name="adj" fmla="val 12000"/>
-            </a:avLst>
-          </a:prstGeom>
-          <a:solidFill>
-            <a:srgbClr val="F2F2F2"/>
-          </a:solidFill>
-          <a:ln>
-            <a:noFill/>
-          </a:ln>
-        </p:spPr>
-        <p:style>
-          <a:lnRef idx="1">
-            <a:schemeClr val="accent1"/>
-          </a:lnRef>
-          <a:fillRef idx="3">
-            <a:schemeClr val="accent1"/>
-          </a:fillRef>
-          <a:effectRef idx="2">
-            <a:schemeClr val="accent1"/>
-          </a:effectRef>
-          <a:fontRef idx="minor">
-            <a:schemeClr val="lt1"/>
-          </a:fontRef>
-        </p:style>
-        <p:txBody>
-          <a:bodyPr rtlCol="0" anchor="ctr"/>
-          <a:lstStyle/>
-          <a:p>
-            <a:pPr algn="ctr"/>
-          </a:p>
-        </p:txBody>
-      </p:sp>
-      <p:sp>
-        <p:nvSpPr>
-          <p:cNvPr id="7" name="Rectangle 6"/>
-          <p:cNvSpPr/>
-          <p:nvPr/>
-        </p:nvSpPr>
-        <p:spPr>
-          <a:xfrm>
-            <a:off x="457200" y="1591056"/>
-            <a:ext cx="3624986" cy="64008"/>
-          </a:xfrm>
-          <a:prstGeom prst="rect">
-            <a:avLst/>
-          </a:prstGeom>
-          <a:solidFill>
-            <a:srgbClr val="095292"/>
-          </a:solidFill>
-          <a:ln>
-            <a:noFill/>
-          </a:ln>
-        </p:spPr>
-        <p:style>
-          <a:lnRef idx="1">
-            <a:schemeClr val="accent1"/>
-          </a:lnRef>
-          <a:fillRef idx="3">
-            <a:schemeClr val="accent1"/>
-          </a:fillRef>
-          <a:effectRef idx="2">
-            <a:schemeClr val="accent1"/>
-          </a:effectRef>
-          <a:fontRef idx="minor">
-            <a:schemeClr val="lt1"/>
-          </a:fontRef>
-        </p:style>
-        <p:txBody>
-          <a:bodyPr rtlCol="0" anchor="ctr"/>
-          <a:lstStyle/>
-          <a:p>
-            <a:pPr algn="ctr"/>
-          </a:p>
-        </p:txBody>
-      </p:sp>
-      <p:sp>
-        <p:nvSpPr>
-          <p:cNvPr id="8" name="Rectangle 7"/>
-          <p:cNvSpPr/>
-          <p:nvPr/>
-        </p:nvSpPr>
-        <p:spPr>
-          <a:xfrm>
-            <a:off x="457200" y="1655064"/>
-            <a:ext cx="3624986" cy="27432"/>
-          </a:xfrm>
-          <a:prstGeom prst="rect">
-            <a:avLst/>
-          </a:prstGeom>
-          <a:solidFill>
-            <a:srgbClr val="FFD000"/>
-          </a:solidFill>
-          <a:ln>
-            <a:noFill/>
-          </a:ln>
-        </p:spPr>
-        <p:style>
-          <a:lnRef idx="1">
-            <a:schemeClr val="accent1"/>
-          </a:lnRef>
-          <a:fillRef idx="3">
-            <a:schemeClr val="accent1"/>
-          </a:fillRef>
-          <a:effectRef idx="2">
-            <a:schemeClr val="accent1"/>
-          </a:effectRef>
-          <a:fontRef idx="minor">
-            <a:schemeClr val="lt1"/>
-          </a:fontRef>
-        </p:style>
-        <p:txBody>
-          <a:bodyPr rtlCol="0" anchor="ctr"/>
-          <a:lstStyle/>
-          <a:p>
-            <a:pPr algn="ctr"/>
-          </a:p>
-        </p:txBody>
-      </p:sp>
-      <p:pic>
-        <p:nvPicPr>
-          <p:cNvPr id="9" name="Picture 8" descr="google_docs.png"/>
-          <p:cNvPicPr>
-            <a:picLocks noChangeAspect="1"/>
-          </p:cNvPicPr>
-          <p:nvPr/>
-        </p:nvPicPr>
-        <p:blipFill>
-          <a:blip r:embed="rId2"/>
-          <a:stretch>
-            <a:fillRect/>
-          </a:stretch>
-        </p:blipFill>
-        <p:spPr>
-          <a:xfrm>
-            <a:off x="1659331" y="1847087"/>
-            <a:ext cx="1220724" cy="1220724"/>
-          </a:xfrm>
-          <a:prstGeom prst="rect">
-            <a:avLst/>
-          </a:prstGeom>
-        </p:spPr>
-      </p:pic>
-      <p:sp>
-        <p:nvSpPr>
-          <p:cNvPr id="10" name="TextBox 9"/>
-          <p:cNvSpPr txBox="1"/>
-          <p:nvPr/>
-        </p:nvSpPr>
-        <p:spPr>
-          <a:xfrm>
-            <a:off x="530352" y="3159251"/>
-            <a:ext cx="3478682" cy="621792"/>
-          </a:xfrm>
-          <a:prstGeom prst="rect">
-            <a:avLst/>
-          </a:prstGeom>
-          <a:noFill/>
-        </p:spPr>
-        <p:txBody>
-          <a:bodyPr wrap="square" anchor="t"/>
-          <a:lstStyle/>
-          <a:p>
-            <a:pPr algn="ctr"/>
-            <a:r>
-              <a:rPr sz="1300" b="1" i="0">
-                <a:solidFill>
-                  <a:srgbClr val="095292"/>
-                </a:solidFill>
-                <a:latin typeface="Calibri"/>
-              </a:rPr>
-              <a:t>Google Docs</a:t>
-            </a:r>
-          </a:p>
-          <a:p>
-            <a:pPr algn="ctr">
-              <a:spcBef>
-                <a:spcPts val="200"/>
-              </a:spcBef>
+            <a:pPr>
+              <a:spcAft>
+                <a:spcPts val="800"/>
+              </a:spcAft>
             </a:pPr>
             <a:r>
-              <a:rPr sz="1000" b="0" i="0">
-                <a:solidFill>
-                  <a:srgbClr val="666666"/>
-                </a:solidFill>
-                <a:latin typeface="Calibri"/>
-              </a:rPr>
-              <a:t>Pitch y portafolio</a:t>
-            </a:r>
-          </a:p>
-        </p:txBody>
-      </p:sp>
-      <p:sp>
-        <p:nvSpPr>
-          <p:cNvPr id="11" name="Rounded Rectangle 10"/>
-          <p:cNvSpPr/>
-          <p:nvPr/>
-        </p:nvSpPr>
-        <p:spPr>
-          <a:xfrm>
-            <a:off x="4283354" y="1591056"/>
-            <a:ext cx="3624986" cy="2299716"/>
-          </a:xfrm>
-          <a:prstGeom prst="roundRect">
-            <a:avLst>
-              <a:gd name="adj" fmla="val 12000"/>
-            </a:avLst>
-          </a:prstGeom>
-          <a:solidFill>
-            <a:srgbClr val="F2F2F2"/>
-          </a:solidFill>
-          <a:ln>
-            <a:noFill/>
-          </a:ln>
-        </p:spPr>
-        <p:style>
-          <a:lnRef idx="1">
-            <a:schemeClr val="accent1"/>
-          </a:lnRef>
-          <a:fillRef idx="3">
-            <a:schemeClr val="accent1"/>
-          </a:fillRef>
-          <a:effectRef idx="2">
-            <a:schemeClr val="accent1"/>
-          </a:effectRef>
-          <a:fontRef idx="minor">
-            <a:schemeClr val="lt1"/>
-          </a:fontRef>
-        </p:style>
-        <p:txBody>
-          <a:bodyPr rtlCol="0" anchor="ctr"/>
-          <a:lstStyle/>
-          <a:p>
-            <a:pPr algn="ctr"/>
-          </a:p>
-        </p:txBody>
-      </p:sp>
-      <p:sp>
-        <p:nvSpPr>
-          <p:cNvPr id="12" name="Rectangle 11"/>
-          <p:cNvSpPr/>
-          <p:nvPr/>
-        </p:nvSpPr>
-        <p:spPr>
-          <a:xfrm>
-            <a:off x="4283354" y="1591056"/>
-            <a:ext cx="3624986" cy="64008"/>
-          </a:xfrm>
-          <a:prstGeom prst="rect">
-            <a:avLst/>
-          </a:prstGeom>
-          <a:solidFill>
-            <a:srgbClr val="095292"/>
-          </a:solidFill>
-          <a:ln>
-            <a:noFill/>
-          </a:ln>
-        </p:spPr>
-        <p:style>
-          <a:lnRef idx="1">
-            <a:schemeClr val="accent1"/>
-          </a:lnRef>
-          <a:fillRef idx="3">
-            <a:schemeClr val="accent1"/>
-          </a:fillRef>
-          <a:effectRef idx="2">
-            <a:schemeClr val="accent1"/>
-          </a:effectRef>
-          <a:fontRef idx="minor">
-            <a:schemeClr val="lt1"/>
-          </a:fontRef>
-        </p:style>
-        <p:txBody>
-          <a:bodyPr rtlCol="0" anchor="ctr"/>
-          <a:lstStyle/>
-          <a:p>
-            <a:pPr algn="ctr"/>
-          </a:p>
-        </p:txBody>
-      </p:sp>
-      <p:sp>
-        <p:nvSpPr>
-          <p:cNvPr id="13" name="Rectangle 12"/>
-          <p:cNvSpPr/>
-          <p:nvPr/>
-        </p:nvSpPr>
-        <p:spPr>
-          <a:xfrm>
-            <a:off x="4283354" y="1655064"/>
-            <a:ext cx="3624986" cy="27432"/>
-          </a:xfrm>
-          <a:prstGeom prst="rect">
-            <a:avLst/>
-          </a:prstGeom>
-          <a:solidFill>
-            <a:srgbClr val="FFD000"/>
-          </a:solidFill>
-          <a:ln>
-            <a:noFill/>
-          </a:ln>
-        </p:spPr>
-        <p:style>
-          <a:lnRef idx="1">
-            <a:schemeClr val="accent1"/>
-          </a:lnRef>
-          <a:fillRef idx="3">
-            <a:schemeClr val="accent1"/>
-          </a:fillRef>
-          <a:effectRef idx="2">
-            <a:schemeClr val="accent1"/>
-          </a:effectRef>
-          <a:fontRef idx="minor">
-            <a:schemeClr val="lt1"/>
-          </a:fontRef>
-        </p:style>
-        <p:txBody>
-          <a:bodyPr rtlCol="0" anchor="ctr"/>
-          <a:lstStyle/>
-          <a:p>
-            <a:pPr algn="ctr"/>
-          </a:p>
-        </p:txBody>
-      </p:sp>
-      <p:pic>
-        <p:nvPicPr>
-          <p:cNvPr id="14" name="Picture 13" descr="drawio.png"/>
-          <p:cNvPicPr>
-            <a:picLocks noChangeAspect="1"/>
-          </p:cNvPicPr>
-          <p:nvPr/>
-        </p:nvPicPr>
-        <p:blipFill>
-          <a:blip r:embed="rId3"/>
-          <a:stretch>
-            <a:fillRect/>
-          </a:stretch>
-        </p:blipFill>
-        <p:spPr>
-          <a:xfrm>
-            <a:off x="5485485" y="1847087"/>
-            <a:ext cx="1220724" cy="1220724"/>
-          </a:xfrm>
-          <a:prstGeom prst="rect">
-            <a:avLst/>
-          </a:prstGeom>
-        </p:spPr>
-      </p:pic>
-      <p:sp>
-        <p:nvSpPr>
-          <p:cNvPr id="15" name="TextBox 14"/>
-          <p:cNvSpPr txBox="1"/>
-          <p:nvPr/>
-        </p:nvSpPr>
-        <p:spPr>
-          <a:xfrm>
-            <a:off x="4356506" y="3159251"/>
-            <a:ext cx="3478682" cy="621792"/>
-          </a:xfrm>
-          <a:prstGeom prst="rect">
-            <a:avLst/>
-          </a:prstGeom>
-          <a:noFill/>
-        </p:spPr>
-        <p:txBody>
-          <a:bodyPr wrap="square" anchor="t"/>
-          <a:lstStyle/>
-          <a:p>
-            <a:pPr algn="ctr"/>
-            <a:r>
-              <a:rPr sz="1300" b="1" i="0">
-                <a:solidFill>
-                  <a:srgbClr val="095292"/>
-                </a:solidFill>
-                <a:latin typeface="Calibri"/>
-              </a:rPr>
-              <a:t>draw.io</a:t>
-            </a:r>
-          </a:p>
-          <a:p>
-            <a:pPr algn="ctr">
-              <a:spcBef>
-                <a:spcPts val="200"/>
-              </a:spcBef>
+              <a:rPr sz="2000" b="0" i="0">
+                <a:solidFill>
+                  <a:srgbClr val="333333"/>
+                </a:solidFill>
+                <a:latin typeface="Calibri"/>
+              </a:rPr>
+              <a:t>–   Sustentar no es describir, y esa distincion es el eje de toda la clase.</a:t>
+            </a:r>
+          </a:p>
+          <a:p>
+            <a:pPr>
+              <a:spcAft>
+                <a:spcPts val="800"/>
+              </a:spcAft>
             </a:pPr>
             <a:r>
-              <a:rPr sz="1000" b="0" i="0">
-                <a:solidFill>
-                  <a:srgbClr val="666666"/>
-                </a:solidFill>
-                <a:latin typeface="Calibri"/>
-              </a:rPr>
-              <a:t>Diagramas del paquete</a:t>
-            </a:r>
-          </a:p>
-        </p:txBody>
-      </p:sp>
-      <p:sp>
-        <p:nvSpPr>
-          <p:cNvPr id="16" name="Rounded Rectangle 15"/>
-          <p:cNvSpPr/>
-          <p:nvPr/>
-        </p:nvSpPr>
-        <p:spPr>
-          <a:xfrm>
-            <a:off x="8109508" y="1591056"/>
-            <a:ext cx="3624986" cy="2299716"/>
-          </a:xfrm>
-          <a:prstGeom prst="roundRect">
-            <a:avLst>
-              <a:gd name="adj" fmla="val 12000"/>
-            </a:avLst>
-          </a:prstGeom>
-          <a:solidFill>
-            <a:srgbClr val="F2F2F2"/>
-          </a:solidFill>
-          <a:ln>
-            <a:noFill/>
-          </a:ln>
-        </p:spPr>
-        <p:style>
-          <a:lnRef idx="1">
-            <a:schemeClr val="accent1"/>
-          </a:lnRef>
-          <a:fillRef idx="3">
-            <a:schemeClr val="accent1"/>
-          </a:fillRef>
-          <a:effectRef idx="2">
-            <a:schemeClr val="accent1"/>
-          </a:effectRef>
-          <a:fontRef idx="minor">
-            <a:schemeClr val="lt1"/>
-          </a:fontRef>
-        </p:style>
-        <p:txBody>
-          <a:bodyPr rtlCol="0" anchor="ctr"/>
-          <a:lstStyle/>
-          <a:p>
-            <a:pPr algn="ctr"/>
-          </a:p>
-        </p:txBody>
-      </p:sp>
-      <p:sp>
-        <p:nvSpPr>
-          <p:cNvPr id="17" name="Rectangle 16"/>
-          <p:cNvSpPr/>
-          <p:nvPr/>
-        </p:nvSpPr>
-        <p:spPr>
-          <a:xfrm>
-            <a:off x="8109508" y="1591056"/>
-            <a:ext cx="3624986" cy="64008"/>
-          </a:xfrm>
-          <a:prstGeom prst="rect">
-            <a:avLst/>
-          </a:prstGeom>
-          <a:solidFill>
-            <a:srgbClr val="095292"/>
-          </a:solidFill>
-          <a:ln>
-            <a:noFill/>
-          </a:ln>
-        </p:spPr>
-        <p:style>
-          <a:lnRef idx="1">
-            <a:schemeClr val="accent1"/>
-          </a:lnRef>
-          <a:fillRef idx="3">
-            <a:schemeClr val="accent1"/>
-          </a:fillRef>
-          <a:effectRef idx="2">
-            <a:schemeClr val="accent1"/>
-          </a:effectRef>
-          <a:fontRef idx="minor">
-            <a:schemeClr val="lt1"/>
-          </a:fontRef>
-        </p:style>
-        <p:txBody>
-          <a:bodyPr rtlCol="0" anchor="ctr"/>
-          <a:lstStyle/>
-          <a:p>
-            <a:pPr algn="ctr"/>
-          </a:p>
-        </p:txBody>
-      </p:sp>
-      <p:sp>
-        <p:nvSpPr>
-          <p:cNvPr id="18" name="Rectangle 17"/>
-          <p:cNvSpPr/>
-          <p:nvPr/>
-        </p:nvSpPr>
-        <p:spPr>
-          <a:xfrm>
-            <a:off x="8109508" y="1655064"/>
-            <a:ext cx="3624986" cy="27432"/>
-          </a:xfrm>
-          <a:prstGeom prst="rect">
-            <a:avLst/>
-          </a:prstGeom>
-          <a:solidFill>
-            <a:srgbClr val="FFD000"/>
-          </a:solidFill>
-          <a:ln>
-            <a:noFill/>
-          </a:ln>
-        </p:spPr>
-        <p:style>
-          <a:lnRef idx="1">
-            <a:schemeClr val="accent1"/>
-          </a:lnRef>
-          <a:fillRef idx="3">
-            <a:schemeClr val="accent1"/>
-          </a:fillRef>
-          <a:effectRef idx="2">
-            <a:schemeClr val="accent1"/>
-          </a:effectRef>
-          <a:fontRef idx="minor">
-            <a:schemeClr val="lt1"/>
-          </a:fontRef>
-        </p:style>
-        <p:txBody>
-          <a:bodyPr rtlCol="0" anchor="ctr"/>
-          <a:lstStyle/>
-          <a:p>
-            <a:pPr algn="ctr"/>
-          </a:p>
-        </p:txBody>
-      </p:sp>
-      <p:pic>
-        <p:nvPicPr>
-          <p:cNvPr id="19" name="Picture 18" descr="mermaid.png"/>
-          <p:cNvPicPr>
-            <a:picLocks noChangeAspect="1"/>
-          </p:cNvPicPr>
-          <p:nvPr/>
-        </p:nvPicPr>
-        <p:blipFill>
-          <a:blip r:embed="rId4"/>
-          <a:stretch>
-            <a:fillRect/>
-          </a:stretch>
-        </p:blipFill>
-        <p:spPr>
-          <a:xfrm>
-            <a:off x="9311640" y="1847087"/>
-            <a:ext cx="1220724" cy="1220724"/>
-          </a:xfrm>
-          <a:prstGeom prst="rect">
-            <a:avLst/>
-          </a:prstGeom>
-        </p:spPr>
-      </p:pic>
-      <p:sp>
-        <p:nvSpPr>
-          <p:cNvPr id="20" name="TextBox 19"/>
-          <p:cNvSpPr txBox="1"/>
-          <p:nvPr/>
-        </p:nvSpPr>
-        <p:spPr>
-          <a:xfrm>
-            <a:off x="8182660" y="3159251"/>
-            <a:ext cx="3478682" cy="621792"/>
-          </a:xfrm>
-          <a:prstGeom prst="rect">
-            <a:avLst/>
-          </a:prstGeom>
-          <a:noFill/>
-        </p:spPr>
-        <p:txBody>
-          <a:bodyPr wrap="square" anchor="t"/>
-          <a:lstStyle/>
-          <a:p>
-            <a:pPr algn="ctr"/>
-            <a:r>
-              <a:rPr sz="1300" b="1" i="0">
-                <a:solidFill>
-                  <a:srgbClr val="095292"/>
-                </a:solidFill>
-                <a:latin typeface="Calibri"/>
-              </a:rPr>
-              <a:t>Mermaid</a:t>
-            </a:r>
-          </a:p>
-          <a:p>
-            <a:pPr algn="ctr">
-              <a:spcBef>
-                <a:spcPts val="200"/>
-              </a:spcBef>
+              <a:rPr sz="2000" b="0" i="0">
+                <a:solidFill>
+                  <a:srgbClr val="333333"/>
+                </a:solidFill>
+                <a:latin typeface="Calibri"/>
+              </a:rPr>
+              <a:t>–   Describir un artefacto es decir que contiene: «este es el diagrama de despliegue de CloudLite App, aqui esta el contenedor de la API, aqui la base de datos».</a:t>
+            </a:r>
+          </a:p>
+          <a:p>
+            <a:pPr>
+              <a:spcAft>
+                <a:spcPts val="800"/>
+              </a:spcAft>
             </a:pPr>
             <a:r>
-              <a:rPr sz="1000" b="0" i="0">
-                <a:solidFill>
-                  <a:srgbClr val="666666"/>
-                </a:solidFill>
-                <a:latin typeface="Calibri"/>
-              </a:rPr>
-              <a:t>Codigo del diagrama</a:t>
-            </a:r>
-          </a:p>
-        </p:txBody>
-      </p:sp>
-      <p:sp>
-        <p:nvSpPr>
-          <p:cNvPr id="21" name="Rounded Rectangle 20"/>
-          <p:cNvSpPr/>
-          <p:nvPr/>
-        </p:nvSpPr>
-        <p:spPr>
-          <a:xfrm>
-            <a:off x="4283354" y="4055364"/>
-            <a:ext cx="3624986" cy="2299716"/>
-          </a:xfrm>
-          <a:prstGeom prst="roundRect">
-            <a:avLst>
-              <a:gd name="adj" fmla="val 12000"/>
-            </a:avLst>
-          </a:prstGeom>
-          <a:solidFill>
-            <a:srgbClr val="F2F2F2"/>
-          </a:solidFill>
-          <a:ln>
-            <a:noFill/>
-          </a:ln>
-        </p:spPr>
-        <p:style>
-          <a:lnRef idx="1">
-            <a:schemeClr val="accent1"/>
-          </a:lnRef>
-          <a:fillRef idx="3">
-            <a:schemeClr val="accent1"/>
-          </a:fillRef>
-          <a:effectRef idx="2">
-            <a:schemeClr val="accent1"/>
-          </a:effectRef>
-          <a:fontRef idx="minor">
-            <a:schemeClr val="lt1"/>
-          </a:fontRef>
-        </p:style>
-        <p:txBody>
-          <a:bodyPr rtlCol="0" anchor="ctr"/>
-          <a:lstStyle/>
-          <a:p>
-            <a:pPr algn="ctr"/>
-          </a:p>
-        </p:txBody>
-      </p:sp>
-      <p:sp>
-        <p:nvSpPr>
-          <p:cNvPr id="22" name="Rectangle 21"/>
-          <p:cNvSpPr/>
-          <p:nvPr/>
-        </p:nvSpPr>
-        <p:spPr>
-          <a:xfrm>
-            <a:off x="4283354" y="4055364"/>
-            <a:ext cx="3624986" cy="64008"/>
-          </a:xfrm>
-          <a:prstGeom prst="rect">
-            <a:avLst/>
-          </a:prstGeom>
-          <a:solidFill>
-            <a:srgbClr val="095292"/>
-          </a:solidFill>
-          <a:ln>
-            <a:noFill/>
-          </a:ln>
-        </p:spPr>
-        <p:style>
-          <a:lnRef idx="1">
-            <a:schemeClr val="accent1"/>
-          </a:lnRef>
-          <a:fillRef idx="3">
-            <a:schemeClr val="accent1"/>
-          </a:fillRef>
-          <a:effectRef idx="2">
-            <a:schemeClr val="accent1"/>
-          </a:effectRef>
-          <a:fontRef idx="minor">
-            <a:schemeClr val="lt1"/>
-          </a:fontRef>
-        </p:style>
-        <p:txBody>
-          <a:bodyPr rtlCol="0" anchor="ctr"/>
-          <a:lstStyle/>
-          <a:p>
-            <a:pPr algn="ctr"/>
-          </a:p>
-        </p:txBody>
-      </p:sp>
-      <p:sp>
-        <p:nvSpPr>
-          <p:cNvPr id="23" name="Rectangle 22"/>
-          <p:cNvSpPr/>
-          <p:nvPr/>
-        </p:nvSpPr>
-        <p:spPr>
-          <a:xfrm>
-            <a:off x="4283354" y="4119372"/>
-            <a:ext cx="3624986" cy="27432"/>
-          </a:xfrm>
-          <a:prstGeom prst="rect">
-            <a:avLst/>
-          </a:prstGeom>
-          <a:solidFill>
-            <a:srgbClr val="FFD000"/>
-          </a:solidFill>
-          <a:ln>
-            <a:noFill/>
-          </a:ln>
-        </p:spPr>
-        <p:style>
-          <a:lnRef idx="1">
-            <a:schemeClr val="accent1"/>
-          </a:lnRef>
-          <a:fillRef idx="3">
-            <a:schemeClr val="accent1"/>
-          </a:fillRef>
-          <a:effectRef idx="2">
-            <a:schemeClr val="accent1"/>
-          </a:effectRef>
-          <a:fontRef idx="minor">
-            <a:schemeClr val="lt1"/>
-          </a:fontRef>
-        </p:style>
-        <p:txBody>
-          <a:bodyPr rtlCol="0" anchor="ctr"/>
-          <a:lstStyle/>
-          <a:p>
-            <a:pPr algn="ctr"/>
-          </a:p>
-        </p:txBody>
-      </p:sp>
-      <p:pic>
-        <p:nvPicPr>
-          <p:cNvPr id="24" name="Picture 23" descr="examlab.png"/>
-          <p:cNvPicPr>
-            <a:picLocks noChangeAspect="1"/>
-          </p:cNvPicPr>
-          <p:nvPr/>
-        </p:nvPicPr>
-        <p:blipFill>
-          <a:blip r:embed="rId5"/>
-          <a:stretch>
-            <a:fillRect/>
-          </a:stretch>
-        </p:blipFill>
-        <p:spPr>
-          <a:xfrm>
-            <a:off x="5485485" y="4311396"/>
-            <a:ext cx="1220724" cy="1220724"/>
-          </a:xfrm>
-          <a:prstGeom prst="rect">
-            <a:avLst/>
-          </a:prstGeom>
-        </p:spPr>
-      </p:pic>
-      <p:sp>
-        <p:nvSpPr>
-          <p:cNvPr id="25" name="TextBox 24"/>
-          <p:cNvSpPr txBox="1"/>
-          <p:nvPr/>
-        </p:nvSpPr>
-        <p:spPr>
-          <a:xfrm>
-            <a:off x="4356506" y="5623560"/>
-            <a:ext cx="3478682" cy="621792"/>
-          </a:xfrm>
-          <a:prstGeom prst="rect">
-            <a:avLst/>
-          </a:prstGeom>
-          <a:noFill/>
-        </p:spPr>
-        <p:txBody>
-          <a:bodyPr wrap="square" anchor="t"/>
-          <a:lstStyle/>
-          <a:p>
-            <a:pPr algn="ctr"/>
-            <a:r>
-              <a:rPr sz="1300" b="1" i="0">
-                <a:solidFill>
-                  <a:srgbClr val="095292"/>
-                </a:solidFill>
-                <a:latin typeface="Calibri"/>
-              </a:rPr>
-              <a:t>la plataforma del curso</a:t>
-            </a:r>
-          </a:p>
-          <a:p>
-            <a:pPr algn="ctr">
-              <a:spcBef>
-                <a:spcPts val="200"/>
-              </a:spcBef>
+              <a:rPr sz="2000" b="0" i="0">
+                <a:solidFill>
+                  <a:srgbClr val="333333"/>
+                </a:solidFill>
+                <a:latin typeface="Calibri"/>
+              </a:rPr>
+              <a:t>–   Sustentar es responder por que quedo asi y no de otra forma, y que se acepto perder al elegirlo.</a:t>
+            </a:r>
+          </a:p>
+          <a:p>
+            <a:pPr>
+              <a:spcAft>
+                <a:spcPts val="800"/>
+              </a:spcAft>
             </a:pPr>
             <a:r>
-              <a:rPr sz="1000" b="0" i="0">
-                <a:solidFill>
-                  <a:srgbClr val="666666"/>
-                </a:solidFill>
-                <a:latin typeface="Calibri"/>
-              </a:rPr>
-              <a:t>Donde se entrega</a:t>
-            </a:r>
-          </a:p>
-        </p:txBody>
-      </p:sp>
-      <p:sp>
-        <p:nvSpPr>
-          <p:cNvPr id="26" name="TextBox 25"/>
+              <a:rPr sz="2000" b="0" i="0">
+                <a:solidFill>
+                  <a:srgbClr val="333333"/>
+                </a:solidFill>
+                <a:latin typeface="Calibri"/>
+              </a:rPr>
+              <a:t>–   Si una eleccion no cumple esas tres condiciones no es arquitectura sino detalle de implementacion: elegir el nombre de una variable no es arquitectura, elegir si el frontend y la API viven en el mismo contenedor si lo es.</a:t>
+            </a:r>
+          </a:p>
+          <a:p>
+            <a:pPr>
+              <a:spcAft>
+                <a:spcPts val="800"/>
+              </a:spcAft>
+            </a:pPr>
+            <a:r>
+              <a:rPr sz="2000" b="0" i="0">
+                <a:solidFill>
+                  <a:srgbClr val="333333"/>
+                </a:solidFill>
+                <a:latin typeface="Calibri"/>
+              </a:rPr>
+              <a:t>–   Un trade-off es lo que se sacrifica al tomar esa decision.</a:t>
+            </a:r>
+          </a:p>
+          <a:p>
+            <a:pPr>
+              <a:spcAft>
+                <a:spcPts val="800"/>
+              </a:spcAft>
+            </a:pPr>
+            <a:r>
+              <a:rPr sz="2000" b="0" i="0">
+                <a:solidFill>
+                  <a:srgbClr val="333333"/>
+                </a:solidFill>
+                <a:latin typeface="Calibri"/>
+              </a:rPr>
+              <a:t>–   No existe decision de arquitectura sin trade-off, y cuando un estudiante afirma que su opcion es mejor en todo, lo que ocurre en realidad es que todavia no encontro que perdio.</a:t>
+            </a:r>
+          </a:p>
+          <a:p>
+            <a:pPr>
+              <a:spcAft>
+                <a:spcPts val="800"/>
+              </a:spcAft>
+            </a:pPr>
+            <a:r>
+              <a:rPr sz="2000" b="0" i="0">
+                <a:solidFill>
+                  <a:srgbClr val="333333"/>
+                </a:solidFill>
+                <a:latin typeface="Calibri"/>
+              </a:rPr>
+              <a:t>–   Toda la sustentacion de hoy se apoya en esta distincion, porque la rubrica no premia describir bien: premia justificar bien.</a:t>
+            </a:r>
+          </a:p>
+        </p:txBody>
+      </p:sp>
+      <p:sp>
+        <p:nvSpPr>
+          <p:cNvPr id="6" name="TextBox 5"/>
           <p:cNvSpPr txBox="1"/>
           <p:nvPr/>
         </p:nvSpPr>
@@ -7788,7 +12220,7 @@
         <p:spPr>
           <a:xfrm>
             <a:off x="0" y="0"/>
-            <a:ext cx="12191695" cy="1170432"/>
+            <a:ext cx="12191695" cy="960120"/>
           </a:xfrm>
           <a:prstGeom prst="rect">
             <a:avLst/>
@@ -7830,7 +12262,7 @@
         </p:nvSpPr>
         <p:spPr>
           <a:xfrm>
-            <a:off x="0" y="1170432"/>
+            <a:off x="0" y="960120"/>
             <a:ext cx="12191695" cy="41148"/>
           </a:xfrm>
           <a:prstGeom prst="rect">
@@ -7874,7 +12306,7 @@
         <p:spPr>
           <a:xfrm>
             <a:off x="457200" y="164592"/>
-            <a:ext cx="11277295" cy="384048"/>
+            <a:ext cx="11277295" cy="502920"/>
           </a:xfrm>
           <a:prstGeom prst="rect">
             <a:avLst/>
@@ -7894,7 +12326,7 @@
                 </a:solidFill>
                 <a:latin typeface="Calibri"/>
               </a:rPr>
-              <a:t>Del boceto a la plataforma del curso (diagrama)</a:t>
+              <a:t>La prueba de tres capas que se aplica en voz alta</a:t>
             </a:r>
           </a:p>
         </p:txBody>
@@ -7907,8 +12339,8 @@
         </p:nvSpPr>
         <p:spPr>
           <a:xfrm>
-            <a:off x="457200" y="566928"/>
-            <a:ext cx="11277295" cy="411480"/>
+            <a:off x="457200" y="1170432"/>
+            <a:ext cx="11277295" cy="5230368"/>
           </a:xfrm>
           <a:prstGeom prst="rect">
             <a:avLst/>
@@ -7921,705 +12353,122 @@
           </a:bodyPr>
           <a:lstStyle/>
           <a:p>
-            <a:r>
-              <a:rPr sz="1400" b="0" i="0">
-                <a:solidFill>
-                  <a:srgbClr val="B8D8EE"/>
-                </a:solidFill>
-                <a:latin typeface="Calibri"/>
-              </a:rPr>
-              <a:t>El diagrama se entrega como código Mermaid dentro de la plataforma del curso, no como imagen</a:t>
-            </a:r>
-          </a:p>
-        </p:txBody>
-      </p:sp>
-      <p:sp>
-        <p:nvSpPr>
-          <p:cNvPr id="6" name="Rounded Rectangle 5"/>
-          <p:cNvSpPr/>
-          <p:nvPr/>
-        </p:nvSpPr>
-        <p:spPr>
-          <a:xfrm>
-            <a:off x="457200" y="1659636"/>
-            <a:ext cx="11277295" cy="1051560"/>
-          </a:xfrm>
-          <a:prstGeom prst="roundRect">
-            <a:avLst>
-              <a:gd name="adj" fmla="val 12000"/>
-            </a:avLst>
-          </a:prstGeom>
-          <a:solidFill>
-            <a:srgbClr val="F2F2F2"/>
-          </a:solidFill>
-          <a:ln>
-            <a:noFill/>
-          </a:ln>
-        </p:spPr>
-        <p:style>
-          <a:lnRef idx="1">
-            <a:schemeClr val="accent1"/>
-          </a:lnRef>
-          <a:fillRef idx="3">
-            <a:schemeClr val="accent1"/>
-          </a:fillRef>
-          <a:effectRef idx="2">
-            <a:schemeClr val="accent1"/>
-          </a:effectRef>
-          <a:fontRef idx="minor">
-            <a:schemeClr val="lt1"/>
-          </a:fontRef>
-        </p:style>
-        <p:txBody>
-          <a:bodyPr rtlCol="0" anchor="ctr"/>
-          <a:lstStyle/>
-          <a:p>
-            <a:pPr algn="ctr"/>
-          </a:p>
-        </p:txBody>
-      </p:sp>
-      <p:sp>
-        <p:nvSpPr>
-          <p:cNvPr id="7" name="Rounded Rectangle 6"/>
-          <p:cNvSpPr/>
-          <p:nvPr/>
-        </p:nvSpPr>
-        <p:spPr>
-          <a:xfrm>
-            <a:off x="594360" y="1965960"/>
-            <a:ext cx="438912" cy="438912"/>
-          </a:xfrm>
-          <a:prstGeom prst="roundRect">
-            <a:avLst>
-              <a:gd name="adj" fmla="val 12000"/>
-            </a:avLst>
-          </a:prstGeom>
-          <a:solidFill>
-            <a:srgbClr val="095292"/>
-          </a:solidFill>
-          <a:ln>
-            <a:noFill/>
-          </a:ln>
-        </p:spPr>
-        <p:style>
-          <a:lnRef idx="1">
-            <a:schemeClr val="accent1"/>
-          </a:lnRef>
-          <a:fillRef idx="3">
-            <a:schemeClr val="accent1"/>
-          </a:fillRef>
-          <a:effectRef idx="2">
-            <a:schemeClr val="accent1"/>
-          </a:effectRef>
-          <a:fontRef idx="minor">
-            <a:schemeClr val="lt1"/>
-          </a:fontRef>
-        </p:style>
-        <p:txBody>
-          <a:bodyPr rtlCol="0" anchor="ctr"/>
-          <a:lstStyle/>
-          <a:p>
-            <a:pPr algn="ctr"/>
-          </a:p>
-        </p:txBody>
-      </p:sp>
-      <p:sp>
-        <p:nvSpPr>
-          <p:cNvPr id="8" name="TextBox 7"/>
-          <p:cNvSpPr txBox="1"/>
-          <p:nvPr/>
-        </p:nvSpPr>
-        <p:spPr>
-          <a:xfrm>
-            <a:off x="594360" y="1965960"/>
-            <a:ext cx="438912" cy="438912"/>
-          </a:xfrm>
-          <a:prstGeom prst="rect">
-            <a:avLst/>
-          </a:prstGeom>
-          <a:noFill/>
-        </p:spPr>
-        <p:txBody>
-          <a:bodyPr wrap="square" anchor="ctr"/>
-          <a:lstStyle/>
-          <a:p>
-            <a:pPr algn="ctr"/>
-            <a:r>
-              <a:rPr sz="1600" b="1" i="0">
-                <a:solidFill>
-                  <a:srgbClr val="FFFFFF"/>
-                </a:solidFill>
-                <a:latin typeface="Calibri"/>
-              </a:rPr>
-              <a:t>1</a:t>
-            </a:r>
-          </a:p>
-        </p:txBody>
-      </p:sp>
-      <p:sp>
-        <p:nvSpPr>
-          <p:cNvPr id="9" name="TextBox 8"/>
-          <p:cNvSpPr txBox="1"/>
-          <p:nvPr/>
-        </p:nvSpPr>
-        <p:spPr>
-          <a:xfrm>
-            <a:off x="1188720" y="1751076"/>
-            <a:ext cx="10271455" cy="886968"/>
-          </a:xfrm>
-          <a:prstGeom prst="rect">
-            <a:avLst/>
-          </a:prstGeom>
-          <a:noFill/>
-        </p:spPr>
-        <p:txBody>
-          <a:bodyPr wrap="square" anchor="ctr"/>
-          <a:lstStyle/>
-          <a:p>
-            <a:r>
-              <a:rPr sz="1500" b="1" i="0">
-                <a:solidFill>
-                  <a:srgbClr val="095292"/>
-                </a:solidFill>
-                <a:latin typeface="Calibri"/>
-              </a:rPr>
-              <a:t>Disena visual</a:t>
-            </a:r>
-          </a:p>
-          <a:p>
             <a:pPr>
-              <a:spcBef>
-                <a:spcPts val="200"/>
-              </a:spcBef>
+              <a:spcAft>
+                <a:spcPts val="800"/>
+              </a:spcAft>
             </a:pPr>
             <a:r>
-              <a:rPr sz="1300" b="0" i="0">
-                <a:solidFill>
-                  <a:srgbClr val="333333"/>
-                </a:solidFill>
-                <a:latin typeface="Calibri"/>
-              </a:rPr>
-              <a:t>Dibuja el diagrama como quieras en Excalidraw o draw.io: es mas rapido arrastrar cajas que escribir codigo, y ahi es donde piensas el modelo.</a:t>
-            </a:r>
-          </a:p>
-        </p:txBody>
-      </p:sp>
-      <p:sp>
-        <p:nvSpPr>
-          <p:cNvPr id="10" name="Rounded Rectangle 9"/>
-          <p:cNvSpPr/>
-          <p:nvPr/>
-        </p:nvSpPr>
-        <p:spPr>
-          <a:xfrm>
-            <a:off x="457200" y="2802636"/>
-            <a:ext cx="11277295" cy="1051560"/>
-          </a:xfrm>
-          <a:prstGeom prst="roundRect">
-            <a:avLst>
-              <a:gd name="adj" fmla="val 12000"/>
-            </a:avLst>
-          </a:prstGeom>
-          <a:solidFill>
-            <a:srgbClr val="E8F4FA"/>
-          </a:solidFill>
-          <a:ln>
-            <a:noFill/>
-          </a:ln>
-        </p:spPr>
-        <p:style>
-          <a:lnRef idx="1">
-            <a:schemeClr val="accent1"/>
-          </a:lnRef>
-          <a:fillRef idx="3">
-            <a:schemeClr val="accent1"/>
-          </a:fillRef>
-          <a:effectRef idx="2">
-            <a:schemeClr val="accent1"/>
-          </a:effectRef>
-          <a:fontRef idx="minor">
-            <a:schemeClr val="lt1"/>
-          </a:fontRef>
-        </p:style>
-        <p:txBody>
-          <a:bodyPr rtlCol="0" anchor="ctr"/>
-          <a:lstStyle/>
-          <a:p>
-            <a:pPr algn="ctr"/>
-          </a:p>
-        </p:txBody>
-      </p:sp>
-      <p:sp>
-        <p:nvSpPr>
-          <p:cNvPr id="11" name="Rounded Rectangle 10"/>
-          <p:cNvSpPr/>
-          <p:nvPr/>
-        </p:nvSpPr>
-        <p:spPr>
-          <a:xfrm>
-            <a:off x="594360" y="3108960"/>
-            <a:ext cx="438912" cy="438912"/>
-          </a:xfrm>
-          <a:prstGeom prst="roundRect">
-            <a:avLst>
-              <a:gd name="adj" fmla="val 12000"/>
-            </a:avLst>
-          </a:prstGeom>
-          <a:solidFill>
-            <a:srgbClr val="095292"/>
-          </a:solidFill>
-          <a:ln>
-            <a:noFill/>
-          </a:ln>
-        </p:spPr>
-        <p:style>
-          <a:lnRef idx="1">
-            <a:schemeClr val="accent1"/>
-          </a:lnRef>
-          <a:fillRef idx="3">
-            <a:schemeClr val="accent1"/>
-          </a:fillRef>
-          <a:effectRef idx="2">
-            <a:schemeClr val="accent1"/>
-          </a:effectRef>
-          <a:fontRef idx="minor">
-            <a:schemeClr val="lt1"/>
-          </a:fontRef>
-        </p:style>
-        <p:txBody>
-          <a:bodyPr rtlCol="0" anchor="ctr"/>
-          <a:lstStyle/>
-          <a:p>
-            <a:pPr algn="ctr"/>
-          </a:p>
-        </p:txBody>
-      </p:sp>
-      <p:sp>
-        <p:nvSpPr>
-          <p:cNvPr id="12" name="TextBox 11"/>
-          <p:cNvSpPr txBox="1"/>
-          <p:nvPr/>
-        </p:nvSpPr>
-        <p:spPr>
-          <a:xfrm>
-            <a:off x="594360" y="3108960"/>
-            <a:ext cx="438912" cy="438912"/>
-          </a:xfrm>
-          <a:prstGeom prst="rect">
-            <a:avLst/>
-          </a:prstGeom>
-          <a:noFill/>
-        </p:spPr>
-        <p:txBody>
-          <a:bodyPr wrap="square" anchor="ctr"/>
-          <a:lstStyle/>
-          <a:p>
-            <a:pPr algn="ctr"/>
-            <a:r>
-              <a:rPr sz="1600" b="1" i="0">
-                <a:solidFill>
-                  <a:srgbClr val="FFFFFF"/>
-                </a:solidFill>
-                <a:latin typeface="Calibri"/>
-              </a:rPr>
-              <a:t>2</a:t>
-            </a:r>
-          </a:p>
-        </p:txBody>
-      </p:sp>
-      <p:sp>
-        <p:nvSpPr>
-          <p:cNvPr id="13" name="TextBox 12"/>
-          <p:cNvSpPr txBox="1"/>
-          <p:nvPr/>
-        </p:nvSpPr>
-        <p:spPr>
-          <a:xfrm>
-            <a:off x="1188720" y="2894076"/>
-            <a:ext cx="10271455" cy="886968"/>
-          </a:xfrm>
-          <a:prstGeom prst="rect">
-            <a:avLst/>
-          </a:prstGeom>
-          <a:noFill/>
-        </p:spPr>
-        <p:txBody>
-          <a:bodyPr wrap="square" anchor="ctr"/>
-          <a:lstStyle/>
-          <a:p>
-            <a:r>
-              <a:rPr sz="1500" b="1" i="0">
-                <a:solidFill>
-                  <a:srgbClr val="095292"/>
-                </a:solidFill>
-                <a:latin typeface="Calibri"/>
-              </a:rPr>
-              <a:t>Traduce con IA</a:t>
+              <a:rPr sz="2000" b="0" i="0">
+                <a:solidFill>
+                  <a:srgbClr val="333333"/>
+                </a:solidFill>
+                <a:latin typeface="Calibri"/>
+              </a:rPr>
+              <a:t>–   Primera capa, el QUE: «CloudLite corre con un contenedor por servicio».</a:t>
             </a:r>
           </a:p>
           <a:p>
             <a:pPr>
-              <a:spcBef>
-                <a:spcPts val="200"/>
-              </a:spcBef>
+              <a:spcAft>
+                <a:spcPts val="800"/>
+              </a:spcAft>
             </a:pPr>
             <a:r>
-              <a:rPr sz="1300" b="0" i="0">
-                <a:solidFill>
-                  <a:srgbClr val="333333"/>
-                </a:solidFill>
-                <a:latin typeface="Calibri"/>
-              </a:rPr>
-              <a:t>Copia o describe tu boceto a una IA y pidele el codigo Mermaid: «convierte este diagrama a Mermaid usando flowchart». Revisa el resultado: la IA acierta la sintaxis, no tu modelo.</a:t>
-            </a:r>
-          </a:p>
-        </p:txBody>
-      </p:sp>
-      <p:sp>
-        <p:nvSpPr>
-          <p:cNvPr id="14" name="Rounded Rectangle 13"/>
-          <p:cNvSpPr/>
-          <p:nvPr/>
-        </p:nvSpPr>
-        <p:spPr>
-          <a:xfrm>
-            <a:off x="457200" y="3945636"/>
-            <a:ext cx="11277295" cy="1051560"/>
-          </a:xfrm>
-          <a:prstGeom prst="roundRect">
-            <a:avLst>
-              <a:gd name="adj" fmla="val 12000"/>
-            </a:avLst>
-          </a:prstGeom>
-          <a:solidFill>
-            <a:srgbClr val="F2F2F2"/>
-          </a:solidFill>
-          <a:ln>
-            <a:noFill/>
-          </a:ln>
-        </p:spPr>
-        <p:style>
-          <a:lnRef idx="1">
-            <a:schemeClr val="accent1"/>
-          </a:lnRef>
-          <a:fillRef idx="3">
-            <a:schemeClr val="accent1"/>
-          </a:fillRef>
-          <a:effectRef idx="2">
-            <a:schemeClr val="accent1"/>
-          </a:effectRef>
-          <a:fontRef idx="minor">
-            <a:schemeClr val="lt1"/>
-          </a:fontRef>
-        </p:style>
-        <p:txBody>
-          <a:bodyPr rtlCol="0" anchor="ctr"/>
-          <a:lstStyle/>
-          <a:p>
-            <a:pPr algn="ctr"/>
-          </a:p>
-        </p:txBody>
-      </p:sp>
-      <p:sp>
-        <p:nvSpPr>
-          <p:cNvPr id="15" name="Rounded Rectangle 14"/>
-          <p:cNvSpPr/>
-          <p:nvPr/>
-        </p:nvSpPr>
-        <p:spPr>
-          <a:xfrm>
-            <a:off x="594360" y="4251960"/>
-            <a:ext cx="438912" cy="438912"/>
-          </a:xfrm>
-          <a:prstGeom prst="roundRect">
-            <a:avLst>
-              <a:gd name="adj" fmla="val 12000"/>
-            </a:avLst>
-          </a:prstGeom>
-          <a:solidFill>
-            <a:srgbClr val="095292"/>
-          </a:solidFill>
-          <a:ln>
-            <a:noFill/>
-          </a:ln>
-        </p:spPr>
-        <p:style>
-          <a:lnRef idx="1">
-            <a:schemeClr val="accent1"/>
-          </a:lnRef>
-          <a:fillRef idx="3">
-            <a:schemeClr val="accent1"/>
-          </a:fillRef>
-          <a:effectRef idx="2">
-            <a:schemeClr val="accent1"/>
-          </a:effectRef>
-          <a:fontRef idx="minor">
-            <a:schemeClr val="lt1"/>
-          </a:fontRef>
-        </p:style>
-        <p:txBody>
-          <a:bodyPr rtlCol="0" anchor="ctr"/>
-          <a:lstStyle/>
-          <a:p>
-            <a:pPr algn="ctr"/>
-          </a:p>
-        </p:txBody>
-      </p:sp>
-      <p:sp>
-        <p:nvSpPr>
-          <p:cNvPr id="16" name="TextBox 15"/>
-          <p:cNvSpPr txBox="1"/>
-          <p:nvPr/>
-        </p:nvSpPr>
-        <p:spPr>
-          <a:xfrm>
-            <a:off x="594360" y="4251960"/>
-            <a:ext cx="438912" cy="438912"/>
-          </a:xfrm>
-          <a:prstGeom prst="rect">
-            <a:avLst/>
-          </a:prstGeom>
-          <a:noFill/>
-        </p:spPr>
-        <p:txBody>
-          <a:bodyPr wrap="square" anchor="ctr"/>
-          <a:lstStyle/>
-          <a:p>
-            <a:pPr algn="ctr"/>
-            <a:r>
-              <a:rPr sz="1600" b="1" i="0">
-                <a:solidFill>
-                  <a:srgbClr val="FFFFFF"/>
-                </a:solidFill>
-                <a:latin typeface="Calibri"/>
-              </a:rPr>
-              <a:t>3</a:t>
-            </a:r>
-          </a:p>
-        </p:txBody>
-      </p:sp>
-      <p:sp>
-        <p:nvSpPr>
-          <p:cNvPr id="17" name="TextBox 16"/>
-          <p:cNvSpPr txBox="1"/>
-          <p:nvPr/>
-        </p:nvSpPr>
-        <p:spPr>
-          <a:xfrm>
-            <a:off x="1188720" y="4037076"/>
-            <a:ext cx="10271455" cy="886968"/>
-          </a:xfrm>
-          <a:prstGeom prst="rect">
-            <a:avLst/>
-          </a:prstGeom>
-          <a:noFill/>
-        </p:spPr>
-        <p:txBody>
-          <a:bodyPr wrap="square" anchor="ctr"/>
-          <a:lstStyle/>
-          <a:p>
-            <a:r>
-              <a:rPr sz="1500" b="1" i="0">
-                <a:solidFill>
-                  <a:srgbClr val="095292"/>
-                </a:solidFill>
-                <a:latin typeface="Calibri"/>
-              </a:rPr>
-              <a:t>Pega y renderiza en la plataforma del curso</a:t>
+              <a:rPr sz="2000" b="0" i="0">
+                <a:solidFill>
+                  <a:srgbClr val="333333"/>
+                </a:solidFill>
+                <a:latin typeface="Calibri"/>
+              </a:rPr>
+              <a:t>–   Segunda capa, el POR QUE: «porque el proyecto lo sostiene una sola persona sin presupuesto de nube, y un contenedor se levanta igual en el portatil de cualquiera y en Killercoda, sin instalar un hipervisor ni pedir tarjeta de credito».</a:t>
             </a:r>
           </a:p>
           <a:p>
             <a:pPr>
-              <a:spcBef>
-                <a:spcPts val="200"/>
-              </a:spcBef>
+              <a:spcAft>
+                <a:spcPts val="800"/>
+              </a:spcAft>
             </a:pPr>
             <a:r>
-              <a:rPr sz="1300" b="0" i="0">
-                <a:solidFill>
-                  <a:srgbClr val="333333"/>
-                </a:solidFill>
-                <a:latin typeface="Calibri"/>
-              </a:rPr>
-              <a:t>Pega ese codigo en la caja de texto de la pregunta y mira como lo dibuja la plataforma. Si no renderiza, corrige ahi mismo: lo que se califica es el diagrama renderizado dentro de la plataforma del curso.</a:t>
-            </a:r>
-          </a:p>
-        </p:txBody>
-      </p:sp>
-      <p:sp>
-        <p:nvSpPr>
-          <p:cNvPr id="18" name="Rounded Rectangle 17"/>
-          <p:cNvSpPr/>
-          <p:nvPr/>
-        </p:nvSpPr>
-        <p:spPr>
-          <a:xfrm>
-            <a:off x="457200" y="5088636"/>
-            <a:ext cx="11277295" cy="1051560"/>
-          </a:xfrm>
-          <a:prstGeom prst="roundRect">
-            <a:avLst>
-              <a:gd name="adj" fmla="val 12000"/>
-            </a:avLst>
-          </a:prstGeom>
-          <a:solidFill>
-            <a:srgbClr val="E8F4FA"/>
-          </a:solidFill>
-          <a:ln>
-            <a:noFill/>
-          </a:ln>
-        </p:spPr>
-        <p:style>
-          <a:lnRef idx="1">
-            <a:schemeClr val="accent1"/>
-          </a:lnRef>
-          <a:fillRef idx="3">
-            <a:schemeClr val="accent1"/>
-          </a:fillRef>
-          <a:effectRef idx="2">
-            <a:schemeClr val="accent1"/>
-          </a:effectRef>
-          <a:fontRef idx="minor">
-            <a:schemeClr val="lt1"/>
-          </a:fontRef>
-        </p:style>
-        <p:txBody>
-          <a:bodyPr rtlCol="0" anchor="ctr"/>
-          <a:lstStyle/>
-          <a:p>
-            <a:pPr algn="ctr"/>
-          </a:p>
-        </p:txBody>
-      </p:sp>
-      <p:sp>
-        <p:nvSpPr>
-          <p:cNvPr id="19" name="Rounded Rectangle 18"/>
-          <p:cNvSpPr/>
-          <p:nvPr/>
-        </p:nvSpPr>
-        <p:spPr>
-          <a:xfrm>
-            <a:off x="594360" y="5394960"/>
-            <a:ext cx="438912" cy="438912"/>
-          </a:xfrm>
-          <a:prstGeom prst="roundRect">
-            <a:avLst>
-              <a:gd name="adj" fmla="val 12000"/>
-            </a:avLst>
-          </a:prstGeom>
-          <a:solidFill>
-            <a:srgbClr val="095292"/>
-          </a:solidFill>
-          <a:ln>
-            <a:noFill/>
-          </a:ln>
-        </p:spPr>
-        <p:style>
-          <a:lnRef idx="1">
-            <a:schemeClr val="accent1"/>
-          </a:lnRef>
-          <a:fillRef idx="3">
-            <a:schemeClr val="accent1"/>
-          </a:fillRef>
-          <a:effectRef idx="2">
-            <a:schemeClr val="accent1"/>
-          </a:effectRef>
-          <a:fontRef idx="minor">
-            <a:schemeClr val="lt1"/>
-          </a:fontRef>
-        </p:style>
-        <p:txBody>
-          <a:bodyPr rtlCol="0" anchor="ctr"/>
-          <a:lstStyle/>
-          <a:p>
-            <a:pPr algn="ctr"/>
-          </a:p>
-        </p:txBody>
-      </p:sp>
-      <p:sp>
-        <p:nvSpPr>
-          <p:cNvPr id="20" name="TextBox 19"/>
-          <p:cNvSpPr txBox="1"/>
-          <p:nvPr/>
-        </p:nvSpPr>
-        <p:spPr>
-          <a:xfrm>
-            <a:off x="594360" y="5394960"/>
-            <a:ext cx="438912" cy="438912"/>
-          </a:xfrm>
-          <a:prstGeom prst="rect">
-            <a:avLst/>
-          </a:prstGeom>
-          <a:noFill/>
-        </p:spPr>
-        <p:txBody>
-          <a:bodyPr wrap="square" anchor="ctr"/>
-          <a:lstStyle/>
-          <a:p>
-            <a:pPr algn="ctr"/>
-            <a:r>
-              <a:rPr sz="1600" b="1" i="0">
-                <a:solidFill>
-                  <a:srgbClr val="FFFFFF"/>
-                </a:solidFill>
-                <a:latin typeface="Calibri"/>
-              </a:rPr>
-              <a:t>4</a:t>
-            </a:r>
-          </a:p>
-        </p:txBody>
-      </p:sp>
-      <p:sp>
-        <p:nvSpPr>
-          <p:cNvPr id="21" name="TextBox 20"/>
-          <p:cNvSpPr txBox="1"/>
-          <p:nvPr/>
-        </p:nvSpPr>
-        <p:spPr>
-          <a:xfrm>
-            <a:off x="1188720" y="5180076"/>
-            <a:ext cx="10271455" cy="886968"/>
-          </a:xfrm>
-          <a:prstGeom prst="rect">
-            <a:avLst/>
-          </a:prstGeom>
-          <a:noFill/>
-        </p:spPr>
-        <p:txBody>
-          <a:bodyPr wrap="square" anchor="ctr"/>
-          <a:lstStyle/>
-          <a:p>
-            <a:r>
-              <a:rPr sz="1500" b="1" i="0">
-                <a:solidFill>
-                  <a:srgbClr val="095292"/>
-                </a:solidFill>
-                <a:latin typeface="Calibri"/>
-              </a:rPr>
-              <a:t>Guarda el PNG para tu PI</a:t>
+              <a:rPr sz="2000" b="0" i="0">
+                <a:solidFill>
+                  <a:srgbClr val="333333"/>
+                </a:solidFill>
+                <a:latin typeface="Calibri"/>
+              </a:rPr>
+              <a:t>–   Tercera capa, A CAMBIO DE QUE: «a cambio de perder el aislamiento fuerte que da una maquina virtual completa, y de asumir que si el host cae, caen todos los servicios a la vez porque comparten el mismo kernel».</a:t>
             </a:r>
           </a:p>
           <a:p>
             <a:pPr>
-              <a:spcBef>
-                <a:spcPts val="200"/>
-              </a:spcBef>
+              <a:spcAft>
+                <a:spcPts val="800"/>
+              </a:spcAft>
             </a:pPr>
             <a:r>
-              <a:rPr sz="1300" b="0" i="0">
-                <a:solidFill>
-                  <a:srgbClr val="333333"/>
-                </a:solidFill>
-                <a:latin typeface="Calibri"/>
-              </a:rPr>
-              <a:t>Exporta tambien la imagen a la carpeta de tu Proyecto Integrador. Esa copia es para tu informe; no reemplaza la respuesta en la plataforma.</a:t>
-            </a:r>
-          </a:p>
-        </p:txBody>
-      </p:sp>
-      <p:sp>
-        <p:nvSpPr>
-          <p:cNvPr id="22" name="TextBox 21"/>
+              <a:rPr sz="2000" b="0" i="0">
+                <a:solidFill>
+                  <a:srgbClr val="333333"/>
+                </a:solidFill>
+                <a:latin typeface="Calibri"/>
+              </a:rPr>
+              <a:t>–   Quien solo llega a la primera capa esta leyendo el diagrama en voz alta y no deberia obtener los puntos de sustentacion.</a:t>
+            </a:r>
+          </a:p>
+          <a:p>
+            <a:pPr>
+              <a:spcAft>
+                <a:spcPts val="800"/>
+              </a:spcAft>
+            </a:pPr>
+            <a:r>
+              <a:rPr sz="2000" b="0" i="0">
+                <a:solidFill>
+                  <a:srgbClr val="333333"/>
+                </a:solidFill>
+                <a:latin typeface="Calibri"/>
+              </a:rPr>
+              <a:t>–   Quien llega a la segunda esta justificando.</a:t>
+            </a:r>
+          </a:p>
+          <a:p>
+            <a:pPr>
+              <a:spcAft>
+                <a:spcPts val="800"/>
+              </a:spcAft>
+            </a:pPr>
+            <a:r>
+              <a:rPr sz="2000" b="0" i="0">
+                <a:solidFill>
+                  <a:srgbClr val="333333"/>
+                </a:solidFill>
+                <a:latin typeface="Calibri"/>
+              </a:rPr>
+              <a:t>–   Quien llega a la tercera esta sustentando como un arquitecto, porque demuestra que conocia el costo de su decision antes de tomarla y aun asi la tomo.</a:t>
+            </a:r>
+          </a:p>
+          <a:p>
+            <a:pPr>
+              <a:spcAft>
+                <a:spcPts val="800"/>
+              </a:spcAft>
+            </a:pPr>
+            <a:r>
+              <a:rPr sz="2000" b="0" i="0">
+                <a:solidFill>
+                  <a:srgbClr val="333333"/>
+                </a:solidFill>
+                <a:latin typeface="Calibri"/>
+              </a:rPr>
+              <a:t>–   La instruccion operativa para el docente es simple: ante cada afirmacion, preguntar «a cambio de que», y no aceptar la respuesta «de nada».</a:t>
+            </a:r>
+          </a:p>
+        </p:txBody>
+      </p:sp>
+      <p:sp>
+        <p:nvSpPr>
+          <p:cNvPr id="6" name="TextBox 5"/>
           <p:cNvSpPr txBox="1"/>
           <p:nvPr/>
         </p:nvSpPr>

--- a/Arquitectura de Sistemas Computacionales/Clases/Clase 15 - Presentacion del proyecto y cierre/Presentacion.pptx
+++ b/Arquitectura de Sistemas Computacionales/Clases/Clase 15 - Presentacion del proyecto y cierre/Presentacion.pptx
@@ -31,6 +31,8 @@
     <p:sldId id="279" r:id="rId30"/>
     <p:sldId id="280" r:id="rId31"/>
     <p:sldId id="281" r:id="rId32"/>
+    <p:sldId id="282" r:id="rId33"/>
+    <p:sldId id="283" r:id="rId34"/>
   </p:sldIdLst>
   <p:sldSz cx="12191695" cy="6858000" type="screen4x3"/>
   <p:notesSz cx="6858000" cy="9144000"/>
@@ -3643,7 +3645,7 @@
                 </a:solidFill>
                 <a:latin typeface="Calibri"/>
               </a:rPr>
-              <a:t>El ADR: el artefacto que sostiene la tercera capa (1/2)</a:t>
+              <a:t>La prueba de tres capas que se aplica en voz alta</a:t>
             </a:r>
           </a:p>
         </p:txBody>
@@ -3682,7 +3684,7 @@
                 </a:solidFill>
                 <a:latin typeface="Calibri"/>
               </a:rPr>
-              <a:t>–   El artefacto que sostiene esa tercera capa es el ADR, o Architecture Decision Record: un documento corto, de una pagina como maximo</a:t>
+              <a:t>–   Primera capa, el QUE: «CloudLite corre con un contenedor por servicio».</a:t>
             </a:r>
           </a:p>
           <a:p>
@@ -3698,7 +3700,7 @@
                 </a:solidFill>
                 <a:latin typeface="Calibri"/>
               </a:rPr>
-              <a:t>–   Que registra UNA sola decision con las seis secciones rotuladas que el curso fijo en la Clase 2 y que no han cambiado desde entonces.</a:t>
+              <a:t>–   Segunda capa, el POR QUE: «porque el proyecto lo sostiene una sola persona sin presupuesto de nube, y un contenedor se levanta igual en el portatil de cualquiera y en Killercoda, sin instalar un hipervisor ni pedir tarjeta de credito».</a:t>
             </a:r>
           </a:p>
           <a:p>
@@ -3714,7 +3716,7 @@
                 </a:solidFill>
                 <a:latin typeface="Calibri"/>
               </a:rPr>
-              <a:t>–   Titulo, con el numero consecutivo, que es justamente por lo que se cita.</a:t>
+              <a:t>–   Tercera capa, A CAMBIO DE QUE: «a cambio de perder el aislamiento fuerte que da una maquina virtual completa, y de asumir que si el host cae, caen todos los servicios a la vez porque comparten el mismo kernel».</a:t>
             </a:r>
           </a:p>
           <a:p>
@@ -3730,71 +3732,7 @@
                 </a:solidFill>
                 <a:latin typeface="Calibri"/>
               </a:rPr>
-              <a:t>–   Estado, «Aceptado» mas la fecha en que se decidio.</a:t>
-            </a:r>
-          </a:p>
-          <a:p>
-            <a:pPr>
-              <a:spcAft>
-                <a:spcPts val="800"/>
-              </a:spcAft>
-            </a:pPr>
-            <a:r>
-              <a:rPr sz="2000" b="0" i="0">
-                <a:solidFill>
-                  <a:srgbClr val="333333"/>
-                </a:solidFill>
-                <a:latin typeface="Calibri"/>
-              </a:rPr>
-              <a:t>–   Contexto, es decir que problema se estaba resolviendo y con que restricciones.</a:t>
-            </a:r>
-          </a:p>
-          <a:p>
-            <a:pPr>
-              <a:spcAft>
-                <a:spcPts val="800"/>
-              </a:spcAft>
-            </a:pPr>
-            <a:r>
-              <a:rPr sz="2000" b="0" i="0">
-                <a:solidFill>
-                  <a:srgbClr val="333333"/>
-                </a:solidFill>
-                <a:latin typeface="Calibri"/>
-              </a:rPr>
-              <a:t>–   Decision, en una frase afirmativa y en presente.</a:t>
-            </a:r>
-          </a:p>
-          <a:p>
-            <a:pPr>
-              <a:spcAft>
-                <a:spcPts val="800"/>
-              </a:spcAft>
-            </a:pPr>
-            <a:r>
-              <a:rPr sz="2000" b="0" i="0">
-                <a:solidFill>
-                  <a:srgbClr val="333333"/>
-                </a:solidFill>
-                <a:latin typeface="Calibri"/>
-              </a:rPr>
-              <a:t>–   Alternativas descartadas, exactamente dos, cada una con la razon concreta del descarte.</a:t>
-            </a:r>
-          </a:p>
-          <a:p>
-            <a:pPr>
-              <a:spcAft>
-                <a:spcPts val="800"/>
-              </a:spcAft>
-            </a:pPr>
-            <a:r>
-              <a:rPr sz="2000" b="0" i="0">
-                <a:solidFill>
-                  <a:srgbClr val="333333"/>
-                </a:solidFill>
-                <a:latin typeface="Calibri"/>
-              </a:rPr>
-              <a:t>–   Y consecuencias, donde se escribe lo bueno, lo malo y lo neutro que se acepta.</a:t>
+              <a:t>–   La instruccion operativa para el docente es simple: ante cada afirmacion, preguntar «a cambio de que», y no aceptar la respuesta «de nada».</a:t>
             </a:r>
           </a:p>
         </p:txBody>
@@ -3975,7 +3913,7 @@
                 </a:solidFill>
                 <a:latin typeface="Calibri"/>
               </a:rPr>
-              <a:t>El ADR: el artefacto que sostiene la tercera capa (2/2)</a:t>
+              <a:t>El ADR: el artefacto que sostiene la tercera capa (1/2)</a:t>
             </a:r>
           </a:p>
         </p:txBody>
@@ -4014,7 +3952,7 @@
                 </a:solidFill>
                 <a:latin typeface="Calibri"/>
               </a:rPr>
-              <a:t>–   Los estudiantes ya produjeron el ADR-001 en la Clase 2, cuando decidieron el modelo de servicio dominante entre IaaS, PaaS y SaaS</a:t>
+              <a:t>–   El artefacto que sostiene esa tercera capa es el ADR, o Architecture Decision Record: un documento corto, de una pagina como maximo</a:t>
             </a:r>
           </a:p>
           <a:p>
@@ -4030,7 +3968,7 @@
                 </a:solidFill>
                 <a:latin typeface="Calibri"/>
               </a:rPr>
-              <a:t>–   A lo largo del curso debieron acumular tres o cuatro mas: contenedores frente a maquinas virtuales (Clase 3), donde poner la frontera entre servicios (Clase 4), y que se escala y que no (Clase 13).</a:t>
+              <a:t>–   Que registra UNA sola decision con las seis secciones rotuladas que el curso fijo en la Clase 2 y que no han cambiado desde entonces.</a:t>
             </a:r>
           </a:p>
           <a:p>
@@ -4046,7 +3984,7 @@
                 </a:solidFill>
                 <a:latin typeface="Calibri"/>
               </a:rPr>
-              <a:t>–   En la sustentacion el ADR no se lee en voz alta: se cita.</a:t>
+              <a:t>–   Titulo, con el numero consecutivo, que es justamente por lo que se cita.</a:t>
             </a:r>
           </a:p>
           <a:p>
@@ -4062,7 +4000,7 @@
                 </a:solidFill>
                 <a:latin typeface="Calibri"/>
               </a:rPr>
-              <a:t>–   La forma profesional es «esta decision esta registrada en el ADR-002, y el trade-off que aceptamos fue perder portabilidad entre proveedores», con el numero del ADR visible en la diapositiva.</a:t>
+              <a:t>–   Contexto, es decir que problema se estaba resolviendo y con que restricciones.</a:t>
             </a:r>
           </a:p>
           <a:p>
@@ -4078,7 +4016,23 @@
                 </a:solidFill>
                 <a:latin typeface="Calibri"/>
               </a:rPr>
-              <a:t>–   Citar un ADR por numero le dice al evaluador que existe una traza escrita y verificable, no una improvisacion del momento; es la diferencia entre quien decidio y quien recuerda.</a:t>
+              <a:t>–   Y consecuencias, donde se escribe lo bueno, lo malo y lo neutro que se acepta.</a:t>
+            </a:r>
+          </a:p>
+          <a:p>
+            <a:pPr>
+              <a:spcAft>
+                <a:spcPts val="800"/>
+              </a:spcAft>
+            </a:pPr>
+            <a:r>
+              <a:rPr sz="2000" b="0" i="0">
+                <a:solidFill>
+                  <a:srgbClr val="333333"/>
+                </a:solidFill>
+                <a:latin typeface="Calibri"/>
+              </a:rPr>
+              <a:t>–   Los estudiantes ya produjeron el ADR-001 en la Clase 2, cuando decidieron el modelo de servicio dominante entre IaaS, PaaS y SaaS</a:t>
             </a:r>
           </a:p>
         </p:txBody>
@@ -4259,7 +4213,7 @@
                 </a:solidFill>
                 <a:latin typeface="Calibri"/>
               </a:rPr>
-              <a:t>El pitch de 5 a 8 minutos: el reparto que funciona</a:t>
+              <a:t>El ADR: el artefacto que sostiene la tercera capa (2/2)</a:t>
             </a:r>
           </a:p>
         </p:txBody>
@@ -4298,7 +4252,7 @@
                 </a:solidFill>
                 <a:latin typeface="Calibri"/>
               </a:rPr>
-              <a:t>–   Un pitch tecnico de 5 a 8 minutos no se improvisa ni se llena de diapositivas.</a:t>
+              <a:t>–   A lo largo del curso debieron acumular tres o cuatro mas: contenedores frente a maquinas virtuales (Clase 3), donde poner la frontera entre servicios (Clase 4), y que se escala y que no (Clase 13).</a:t>
             </a:r>
           </a:p>
           <a:p>
@@ -4314,7 +4268,7 @@
                 </a:solidFill>
                 <a:latin typeface="Calibri"/>
               </a:rPr>
-              <a:t>–   El reparto que funciona, y que es convencion de industria y no regla dura, es el siguiente: 45 a 60 segundos para el problema y el dominio, es decir que hace CloudLite y para quien, sin nombrar una sola tecnologia todavia</a:t>
+              <a:t>–   En la sustentacion el ADR no se lee en voz alta: se cita.</a:t>
             </a:r>
           </a:p>
           <a:p>
@@ -4330,71 +4284,7 @@
                 </a:solidFill>
                 <a:latin typeface="Calibri"/>
               </a:rPr>
-              <a:t>–   90 segundos para la arquitectura, apoyandose en el diagrama de contexto y el de contenedores</a:t>
-            </a:r>
-          </a:p>
-          <a:p>
-            <a:pPr>
-              <a:spcAft>
-                <a:spcPts val="800"/>
-              </a:spcAft>
-            </a:pPr>
-            <a:r>
-              <a:rPr sz="2000" b="0" i="0">
-                <a:solidFill>
-                  <a:srgbClr val="333333"/>
-                </a:solidFill>
-                <a:latin typeface="Calibri"/>
-              </a:rPr>
-              <a:t>–   90 segundos para la decision principal con su trade-off, citando el ADR; 60 a 90 segundos para la evidencia ejecutable, o sea la captura de la sesion del laboratorio con el contenedor corriendo y el workflow de GitHub Actions en verde</a:t>
-            </a:r>
-          </a:p>
-          <a:p>
-            <a:pPr>
-              <a:spcAft>
-                <a:spcPts val="800"/>
-              </a:spcAft>
-            </a:pPr>
-            <a:r>
-              <a:rPr sz="2000" b="0" i="0">
-                <a:solidFill>
-                  <a:srgbClr val="333333"/>
-                </a:solidFill>
-                <a:latin typeface="Calibri"/>
-              </a:rPr>
-              <a:t>–   45 segundos para el punto debil declarado, lo que no escala o lo que no se midio; y 30 segundos de cierre.</a:t>
-            </a:r>
-          </a:p>
-          <a:p>
-            <a:pPr>
-              <a:spcAft>
-                <a:spcPts val="800"/>
-              </a:spcAft>
-            </a:pPr>
-            <a:r>
-              <a:rPr sz="2000" b="0" i="0">
-                <a:solidFill>
-                  <a:srgbClr val="333333"/>
-                </a:solidFill>
-                <a:latin typeface="Calibri"/>
-              </a:rPr>
-              <a:t>–   La suma queda entre 6 y 7 minutos, con margen para tropiezos.</a:t>
-            </a:r>
-          </a:p>
-          <a:p>
-            <a:pPr>
-              <a:spcAft>
-                <a:spcPts val="800"/>
-              </a:spcAft>
-            </a:pPr>
-            <a:r>
-              <a:rPr sz="2000" b="0" i="0">
-                <a:solidFill>
-                  <a:srgbClr val="333333"/>
-                </a:solidFill>
-                <a:latin typeface="Calibri"/>
-              </a:rPr>
-              <a:t>–   La regla practica de diapositivas es una idea por diapositiva y un maximo de ocho diapositivas para ocho minutos.</a:t>
+              <a:t>–   La forma profesional es «esta decision esta registrada en el ADR-002, y el trade-off que aceptamos fue perder portabilidad entre proveedores», con el numero del ADR visible en la diapositiva.</a:t>
             </a:r>
           </a:p>
         </p:txBody>
@@ -4575,7 +4465,7 @@
                 </a:solidFill>
                 <a:latin typeface="Calibri"/>
               </a:rPr>
-              <a:t>La regla de los 60 segundos, anunciada desde la Clase 11 (1/2)</a:t>
+              <a:t>El pitch de 5 a 8 minutos: el reparto que funciona (1/2)</a:t>
             </a:r>
           </a:p>
         </p:txBody>
@@ -4614,7 +4504,7 @@
                 </a:solidFill>
                 <a:latin typeface="Calibri"/>
               </a:rPr>
-              <a:t>–   El criterio de calidad que se anuncio desde el checkpoint de la Clase 11 es la regla de los 60 segundos: quien sustenta debe poder explicar CUALQUIER parte del sistema en 60 segundos, sin buscar en el informe.</a:t>
+              <a:t>–   Un pitch tecnico de 5 a 8 minutos no se improvisa ni se llena de diapositivas.</a:t>
             </a:r>
           </a:p>
           <a:p>
@@ -4630,7 +4520,7 @@
                 </a:solidFill>
                 <a:latin typeface="Calibri"/>
               </a:rPr>
-              <a:t>–   El trabajo es individual por defecto, asi que en la mayoria de los casos ese "quien" es el propio autor y la regla se comprueba sola</a:t>
+              <a:t>–   El reparto que funciona, y que es convencion de industria y no regla dura, es el siguiente: 45 a 60 segundos para el problema y el dominio, es decir que hace CloudLite y para quien, sin nombrar una sola tecnologia todavia</a:t>
             </a:r>
           </a:p>
           <a:p>
@@ -4646,7 +4536,7 @@
                 </a:solidFill>
                 <a:latin typeface="Calibri"/>
               </a:rPr>
-              <a:t>–   Cuando el docente autorizo un equipo de dos o tres, la regla se vuelve exigente y se lee asi: CUALQUIER integrante debe poder explicar CUALQUIER parte.</a:t>
+              <a:t>–   90 segundos para la arquitectura, apoyandose en el diagrama de contexto y el de contenedores</a:t>
             </a:r>
           </a:p>
           <a:p>
@@ -4662,39 +4552,7 @@
                 </a:solidFill>
                 <a:latin typeface="Calibri"/>
               </a:rPr>
-              <a:t>–   Esto casi siempre genera la primera pregunta real del estudiante: «podemos repartirnos los temas y que cada uno prepare solo el suyo?».</a:t>
-            </a:r>
-          </a:p>
-          <a:p>
-            <a:pPr>
-              <a:spcAft>
-                <a:spcPts val="800"/>
-              </a:spcAft>
-            </a:pPr>
-            <a:r>
-              <a:rPr sz="2000" b="0" i="0">
-                <a:solidFill>
-                  <a:srgbClr val="333333"/>
-                </a:solidFill>
-                <a:latin typeface="Calibri"/>
-              </a:rPr>
-              <a:t>–   La razon no es castigar.</a:t>
-            </a:r>
-          </a:p>
-          <a:p>
-            <a:pPr>
-              <a:spcAft>
-                <a:spcPts val="800"/>
-              </a:spcAft>
-            </a:pPr>
-            <a:r>
-              <a:rPr sz="2000" b="0" i="0">
-                <a:solidFill>
-                  <a:srgbClr val="333333"/>
-                </a:solidFill>
-                <a:latin typeface="Calibri"/>
-              </a:rPr>
-              <a:t>–   En un equipo profesional, cuando el sistema falla a las once de la noche, contesta quien esta disponible, no el autor del diagrama; un sistema que solo una persona entiende es un riesgo operativo con nombre propio.</a:t>
+              <a:t>–   90 segundos para la decision principal con su trade-off, citando el ADR; 60 a 90 segundos para la evidencia ejecutable, o sea la captura de la sesion del laboratorio con el contenedor corriendo y el workflow de GitHub Actions en verde</a:t>
             </a:r>
           </a:p>
         </p:txBody>
@@ -4875,7 +4733,7 @@
                 </a:solidFill>
                 <a:latin typeface="Calibri"/>
               </a:rPr>
-              <a:t>La regla de los 60 segundos, anunciada desde la Clase 11 (2/2)</a:t>
+              <a:t>El pitch de 5 a 8 minutos: el reparto que funciona (2/2)</a:t>
             </a:r>
           </a:p>
         </p:txBody>
@@ -4914,7 +4772,7 @@
                 </a:solidFill>
                 <a:latin typeface="Calibri"/>
               </a:rPr>
-              <a:t>–   El segundo motivo es de evaluacion: si el estudiante no puede explicar su propio diagrama de despliegue, el evaluador no tiene forma de saber si el artefacto es suyo o copiado, y ese es exactamente el vacio que la sustentacion existe para cerrar.</a:t>
+              <a:t>–   45 segundos para el punto debil declarado, lo que no escala o lo que no se midio; y 30 segundos de cierre.</a:t>
             </a:r>
           </a:p>
           <a:p>
@@ -4930,7 +4788,7 @@
                 </a:solidFill>
                 <a:latin typeface="Calibri"/>
               </a:rPr>
-              <a:t>–   En los equipos autorizados el mismo riesgo se multiplica: si solo un integrante puede explicar el despliegue, no hay evidencia de que los demas participaran, y por eso la rubrica exige que todos hablen y descuenta cuando presenta uno solo.</a:t>
+              <a:t>–   La suma queda entre 6 y 7 minutos, con margen para tropiezos.</a:t>
             </a:r>
           </a:p>
           <a:p>
@@ -4946,23 +4804,7 @@
                 </a:solidFill>
                 <a:latin typeface="Calibri"/>
               </a:rPr>
-              <a:t>–   La practica concreta que se recomienda antes de presentar es un ensayo cruzado con otro estudiante: cada uno explica en 60 segundos una parte del sistema del otro y devuelve los huecos que encontro (en equipo, cada integrante explica una parte que NO le toco preparar).</a:t>
-            </a:r>
-          </a:p>
-          <a:p>
-            <a:pPr>
-              <a:spcAft>
-                <a:spcPts val="800"/>
-              </a:spcAft>
-            </a:pPr>
-            <a:r>
-              <a:rPr sz="2000" b="0" i="0">
-                <a:solidFill>
-                  <a:srgbClr val="333333"/>
-                </a:solidFill>
-                <a:latin typeface="Calibri"/>
-              </a:rPr>
-              <a:t>–   Ese ejercicio suele revelar en cinco minutos lo que la nota habria revelado demasiado tarde.</a:t>
+              <a:t>–   La regla practica de diapositivas es una idea por diapositiva y un maximo de ocho diapositivas para ocho minutos.</a:t>
             </a:r>
           </a:p>
         </p:txBody>
@@ -5143,7 +4985,7 @@
                 </a:solidFill>
                 <a:latin typeface="Calibri"/>
               </a:rPr>
-              <a:t>El Q&amp;A tecnico: tres tipos de pregunta (1/2)</a:t>
+              <a:t>La regla de los 60 segundos, anunciada desde la Clase 11 (1/2)</a:t>
             </a:r>
           </a:p>
         </p:txBody>
@@ -5182,7 +5024,7 @@
                 </a:solidFill>
                 <a:latin typeface="Calibri"/>
               </a:rPr>
-              <a:t>–   El Q&amp;A tecnico tiene tres tipos de pregunta y conviene que el docente los reconozca para dosificarlos.</a:t>
+              <a:t>–   El criterio de calidad que se anuncio desde el checkpoint de la Clase 11 es la regla de los 60 segundos: quien sustenta debe poder explicar CUALQUIER parte del sistema en 60 segundos, sin buscar en el informe.</a:t>
             </a:r>
           </a:p>
           <a:p>
@@ -5198,7 +5040,7 @@
                 </a:solidFill>
                 <a:latin typeface="Calibri"/>
               </a:rPr>
-              <a:t>–   La pregunta de verificacion comprueba que el estudiante hizo lo que dice: «muestreme el archivo.yml del workflow» o «en que linea del Dockerfile esta la imagen base y por que eligieron una variante alpine».</a:t>
+              <a:t>–   El trabajo es individual por defecto, asi que en la mayoria de los casos ese "quien" es el propio autor y la regla se comprueba sola</a:t>
             </a:r>
           </a:p>
           <a:p>
@@ -5214,7 +5056,7 @@
                 </a:solidFill>
                 <a:latin typeface="Calibri"/>
               </a:rPr>
-              <a:t>–   La pregunta de profundizacion empuja un nivel mas alla de lo presentado: «por que la base de datos no esta en el mismo contenedor que la API».</a:t>
+              <a:t>–   Cuando el docente autorizo un equipo de dos o tres, la regla se vuelve exigente y se lee asi: CUALQUIER integrante debe poder explicar CUALQUIER parte.</a:t>
             </a:r>
           </a:p>
           <a:p>
@@ -5230,7 +5072,7 @@
                 </a:solidFill>
                 <a:latin typeface="Calibri"/>
               </a:rPr>
-              <a:t>–   La pregunta hipotetica, o what-if, evalua si el diseno se entiende como sistema y no como dibujo: «si el trafico se multiplica por diez el lunes, que pieza de CloudLite se rompe primero y como se darian cuenta».</a:t>
+              <a:t>–   Esto casi siempre genera la primera pregunta real del estudiante: «podemos repartirnos los temas y que cada uno prepare solo el suyo?».</a:t>
             </a:r>
           </a:p>
           <a:p>
@@ -5246,39 +5088,7 @@
                 </a:solidFill>
                 <a:latin typeface="Calibri"/>
               </a:rPr>
-              <a:t>–   Aqui aparece la segunda pregunta previsible del estudiante: «y si no sabemos la respuesta?».</a:t>
-            </a:r>
-          </a:p>
-          <a:p>
-            <a:pPr>
-              <a:spcAft>
-                <a:spcPts val="800"/>
-              </a:spcAft>
-            </a:pPr>
-            <a:r>
-              <a:rPr sz="2000" b="0" i="0">
-                <a:solidFill>
-                  <a:srgbClr val="333333"/>
-                </a:solidFill>
-                <a:latin typeface="Calibri"/>
-              </a:rPr>
-              <a:t>–   La respuesta correcta es que decir «no lo medimos» no penaliza si va acompanado de como se mediria: «no medimos el p95 porque no hay trafico real</a:t>
-            </a:r>
-          </a:p>
-          <a:p>
-            <a:pPr>
-              <a:spcAft>
-                <a:spcPts val="800"/>
-              </a:spcAft>
-            </a:pPr>
-            <a:r>
-              <a:rPr sz="2000" b="0" i="0">
-                <a:solidFill>
-                  <a:srgbClr val="333333"/>
-                </a:solidFill>
-                <a:latin typeface="Calibri"/>
-              </a:rPr>
-              <a:t>–   Pero el plan es simular 50 peticiones por segundo y observar la latencia de la API, que es el cuello de botella que sospechamos por lo que vimos en la Clase 12».</a:t>
+              <a:t>–   En un equipo profesional, cuando el sistema falla a las once de la noche, contesta quien esta disponible, no el autor del diagrama; un sistema que solo una persona entiende es un riesgo operativo con nombre propio.</a:t>
             </a:r>
           </a:p>
         </p:txBody>
@@ -5459,7 +5269,7 @@
                 </a:solidFill>
                 <a:latin typeface="Calibri"/>
               </a:rPr>
-              <a:t>El Q&amp;A tecnico: tres tipos de pregunta (2/2)</a:t>
+              <a:t>La regla de los 60 segundos, anunciada desde la Clase 11 (2/2)</a:t>
             </a:r>
           </a:p>
         </p:txBody>
@@ -5498,7 +5308,7 @@
                 </a:solidFill>
                 <a:latin typeface="Calibri"/>
               </a:rPr>
-              <a:t>–   Improvisar un dato falso, en cambio, se detecta con una sola pregunta de seguimiento y cuesta mucho mas que admitir el limite.</a:t>
+              <a:t>–   El segundo motivo es de evaluacion: si el estudiante no puede explicar su propio diagrama de despliegue, el evaluador no tiene forma de saber si el artefacto es suyo o copiado, y ese es exactamente el vacio que la sustentacion existe para cerrar.</a:t>
             </a:r>
           </a:p>
           <a:p>
@@ -5514,7 +5324,7 @@
                 </a:solidFill>
                 <a:latin typeface="Calibri"/>
               </a:rPr>
-              <a:t>–   Y conviene ser explicito sobre el formato de la sesion, porque es lo que decide como se prepara el estudiante: la Clase 15 se dicta en la ultima sesion del semestre (16 de noviembre) como sustentacion EN VIVO</a:t>
+              <a:t>–   En los equipos autorizados el mismo riesgo se multiplica: si solo un integrante puede explicar el despliegue, no hay evidencia de que los demas participaran, y por eso la rubrica exige que todos hablen y descuenta cuando presenta uno solo.</a:t>
             </a:r>
           </a:p>
           <a:p>
@@ -5530,55 +5340,7 @@
                 </a:solidFill>
                 <a:latin typeface="Calibri"/>
               </a:rPr>
-              <a:t>–   Sincrona, con turnos de unos 6 minutos de pitch y 2 a 4 de preguntas.</a:t>
-            </a:r>
-          </a:p>
-          <a:p>
-            <a:pPr>
-              <a:spcAft>
-                <a:spcPts val="800"/>
-              </a:spcAft>
-            </a:pPr>
-            <a:r>
-              <a:rPr sz="2000" b="0" i="0">
-                <a:solidFill>
-                  <a:srgbClr val="333333"/>
-                </a:solidFill>
-                <a:latin typeface="Calibri"/>
-              </a:rPr>
-              <a:t>–   No es clase autonoma y la defensa no se reemplaza por un video grabado, porque el Q&amp;A dirigido al azar es justamente el instrumento que verifica autoria y no tiene sustituto asincronico.</a:t>
-            </a:r>
-          </a:p>
-          <a:p>
-            <a:pPr>
-              <a:spcAft>
-                <a:spcPts val="800"/>
-              </a:spcAft>
-            </a:pPr>
-            <a:r>
-              <a:rPr sz="2000" b="0" i="0">
-                <a:solidFill>
-                  <a:srgbClr val="333333"/>
-                </a:solidFill>
-                <a:latin typeface="Calibri"/>
-              </a:rPr>
-              <a:t>–   El Q&amp;A escrito que pide el taller (tres preguntas duras que el propio estudiante se haria, con su respuesta) no reemplaza nada: es la preparacion del Q&amp;A en vivo</a:t>
-            </a:r>
-          </a:p>
-          <a:p>
-            <a:pPr>
-              <a:spcAft>
-                <a:spcPts val="800"/>
-              </a:spcAft>
-            </a:pPr>
-            <a:r>
-              <a:rPr sz="2000" b="0" i="0">
-                <a:solidFill>
-                  <a:srgbClr val="333333"/>
-                </a:solidFill>
-                <a:latin typeface="Calibri"/>
-              </a:rPr>
-              <a:t>–   Y en la practica el estudiante que lo escribio en serio responde mucho mejor cuando la pregunta llega de verdad.</a:t>
+              <a:t>–   La practica concreta que se recomienda antes de presentar es un ensayo cruzado con otro estudiante: cada uno explica en 60 segundos una parte del sistema del otro y devuelve los huecos que encontro (en equipo, cada integrante explica una parte que NO le toco preparar).</a:t>
             </a:r>
           </a:p>
         </p:txBody>
@@ -5759,7 +5521,7 @@
                 </a:solidFill>
                 <a:latin typeface="Calibri"/>
               </a:rPr>
-              <a:t>Evaluar con rubrica: puntos a evidencia observable (1/2)</a:t>
+              <a:t>El Q&amp;A tecnico: tres tipos de pregunta (1/2)</a:t>
             </a:r>
           </a:p>
         </p:txBody>
@@ -5798,7 +5560,7 @@
                 </a:solidFill>
                 <a:latin typeface="Calibri"/>
               </a:rPr>
-              <a:t>–   Evaluar con rubrica significa asignar puntos a evidencia observable y no a impresion general, y por eso conviene leer el reparto en voz alta al abrir la clase.</a:t>
+              <a:t>–   La pregunta de verificacion comprueba que el estudiante hizo lo que dice: «muestreme el archivo.yml del workflow» o «en que linea del Dockerfile esta la imagen base y por que eligieron una variante alpine».</a:t>
             </a:r>
           </a:p>
           <a:p>
@@ -5814,7 +5576,7 @@
                 </a:solidFill>
                 <a:latin typeface="Calibri"/>
               </a:rPr>
-              <a:t>–   Los 100 puntos del PI CloudLite App se distribuyen asi: 15 puntos por dominio y decision IaaS/PaaS/SaaS justificada, 25 por los diagramas de arquitectura (componentes y despliegue)</a:t>
+              <a:t>–   La pregunta de profundizacion empuja un nivel mas alla de lo presentado: «por que la base de datos no esta en el mismo contenedor que la API».</a:t>
             </a:r>
           </a:p>
           <a:p>
@@ -5830,7 +5592,7 @@
                 </a:solidFill>
                 <a:latin typeface="Calibri"/>
               </a:rPr>
-              <a:t>–   20 por el lab de contenedores con Dockerfile o compose mas la captura de la sesion, 15 por el CI/CD conceptual con el workflow.yml explicado, 10 por las secciones de seguridad, costos y escalabilidad del informe, y 15 por informe y sustentacion.</a:t>
+              <a:t>–   La pregunta hipotetica, o what-if, evalua si el diseno se entiende como sistema y no como dibujo: «si el trafico se multiplica por diez el lunes, que pieza de CloudLite se rompe primero y como se darian cuenta».</a:t>
             </a:r>
           </a:p>
           <a:p>
@@ -5846,7 +5608,23 @@
                 </a:solidFill>
                 <a:latin typeface="Calibri"/>
               </a:rPr>
-              <a:t>–   Ese reparto responde la tercera pregunta previsible: «si el diagrama esta perfecto pero presentamos mal, cuanto pierdo?».</a:t>
+              <a:t>–   Aqui aparece la segunda pregunta previsible del estudiante: «y si no sabemos la respuesta?».</a:t>
+            </a:r>
+          </a:p>
+          <a:p>
+            <a:pPr>
+              <a:spcAft>
+                <a:spcPts val="800"/>
+              </a:spcAft>
+            </a:pPr>
+            <a:r>
+              <a:rPr sz="2000" b="0" i="0">
+                <a:solidFill>
+                  <a:srgbClr val="333333"/>
+                </a:solidFill>
+                <a:latin typeface="Calibri"/>
+              </a:rPr>
+              <a:t>–   Y conviene ser explicito sobre el formato de la sesion, porque es lo que decide como se prepara el estudiante: la Clase 15 se dicta en la ultima sesion del semestre (16 de noviembre) como sustentacion EN VIVO</a:t>
             </a:r>
           </a:p>
         </p:txBody>
@@ -6027,7 +5805,7 @@
                 </a:solidFill>
                 <a:latin typeface="Calibri"/>
               </a:rPr>
-              <a:t>Evaluar con rubrica: puntos a evidencia observable (2/2)</a:t>
+              <a:t>El Q&amp;A tecnico: tres tipos de pregunta (2/2)</a:t>
             </a:r>
           </a:p>
         </p:txBody>
@@ -6066,7 +5844,7 @@
                 </a:solidFill>
                 <a:latin typeface="Calibri"/>
               </a:rPr>
-              <a:t>–   Directamente, hasta 15 puntos.</a:t>
+              <a:t>–   Sincrona, con turnos de unos 6 minutos de pitch y 2 a 4 de preguntas.</a:t>
             </a:r>
           </a:p>
           <a:p>
@@ -6082,7 +5860,7 @@
                 </a:solidFill>
                 <a:latin typeface="Calibri"/>
               </a:rPr>
-              <a:t>–   Indirectamente mucho mas, porque la sustentacion es el mecanismo con el que el evaluador verifica que los otros 85 puntos son de quien sustenta: un diagrama excelente que nadie puede explicar levanta una duda de autoria que ninguna diapositiva resuelve.</a:t>
+              <a:t>–   No es clase autonoma y la defensa no se reemplaza por un video grabado, porque el Q&amp;A dirigido al azar es justamente el instrumento que verifica autoria y no tiene sustituto asincronico.</a:t>
             </a:r>
           </a:p>
           <a:p>
@@ -6098,7 +5876,7 @@
                 </a:solidFill>
                 <a:latin typeface="Calibri"/>
               </a:rPr>
-              <a:t>–   Y va el recordatorio de pesos que evita reclamos posteriores: estos 100 puntos valen 20% del Corte 3, el Parcial 3 de la Clase 14 (9 de noviembre, virtual sincrono por Meet y escrito) vale 15%, y la asistencia 5%.</a:t>
+              <a:t>–   El Q&amp;A escrito que pide el taller (tres preguntas duras que el propio estudiante se haria, con su respuesta) no reemplaza nada: es la preparacion del Q&amp;A en vivo</a:t>
             </a:r>
           </a:p>
           <a:p>
@@ -6114,7 +5892,7 @@
                 </a:solidFill>
                 <a:latin typeface="Calibri"/>
               </a:rPr>
-              <a:t>–   El proyecto no reemplaza ni compensa el parcial; son evaluaciones distintas del mismo corte, y decirlo una vez hoy ahorra tres correos la semana siguiente.</a:t>
+              <a:t>–   Y en la practica el estudiante que lo escribio en serio responde mucho mejor cuando la pregunta llega de verdad.</a:t>
             </a:r>
           </a:p>
         </p:txBody>
@@ -6295,7 +6073,7 @@
                 </a:solidFill>
                 <a:latin typeface="Calibri"/>
               </a:rPr>
-              <a:t>El cierre del curso: conectar lo hecho con la practica profesional (1/2)</a:t>
+              <a:t>Evaluar con rubrica: puntos a evidencia observable (1/2)</a:t>
             </a:r>
           </a:p>
         </p:txBody>
@@ -6334,7 +6112,7 @@
                 </a:solidFill>
                 <a:latin typeface="Calibri"/>
               </a:rPr>
-              <a:t>–   El cierre del curso debe conectar lo hecho con la practica profesional, porque de eso depende que el estudiante conserve el material en vez de borrarlo al terminar el semestre.</a:t>
+              <a:t>–   Los 100 puntos del PI CloudLite App se distribuyen asi: 15 puntos por dominio y decision IaaS/PaaS/SaaS justificada, 25 por los diagramas de arquitectura (componentes y despliegue)</a:t>
             </a:r>
           </a:p>
           <a:p>
@@ -6350,7 +6128,7 @@
                 </a:solidFill>
                 <a:latin typeface="Calibri"/>
               </a:rPr>
-              <a:t>–   En la industria, esta sustentacion tiene nombre propio: design review, o architecture review.</a:t>
+              <a:t>–   20 por el lab de contenedores con Dockerfile o compose mas la captura de la sesion, 15 por el CI/CD conceptual con el workflow.yml explicado, 10 por las secciones de seguridad, costos y escalabilidad del informe, y 15 por informe y sustentacion.</a:t>
             </a:r>
           </a:p>
           <a:p>
@@ -6366,7 +6144,7 @@
                 </a:solidFill>
                 <a:latin typeface="Calibri"/>
               </a:rPr>
-              <a:t>–   Un equipo presenta una propuesta a pares y a arquitectos mas experimentados cuyo trabajo explicito es buscarle el punto debil antes de que ese punto debil cueste dinero</a:t>
+              <a:t>–   Ese reparto responde la tercera pregunta previsible: «si el diagrama esta perfecto pero presentamos mal, cuanto pierdo?».</a:t>
             </a:r>
           </a:p>
           <a:p>
@@ -6382,7 +6160,7 @@
                 </a:solidFill>
                 <a:latin typeface="Calibri"/>
               </a:rPr>
-              <a:t>–   Y lo que se pregunta ahi es exactamente lo mismo que hoy, es decir que decidieron, que descartaron, que aceptaron perder, y como sabran si se equivocaron.</a:t>
+              <a:t>–   Directamente, hasta 15 puntos.</a:t>
             </a:r>
           </a:p>
           <a:p>
@@ -6398,7 +6176,7 @@
                 </a:solidFill>
                 <a:latin typeface="Calibri"/>
               </a:rPr>
-              <a:t>–   El ADR es un formato real, usado en equipos reales, no un invento academico del curso.</a:t>
+              <a:t>–   Indirectamente mucho mas, porque la sustentacion es el mecanismo con el que el evaluador verifica que los otros 85 puntos son de quien sustenta: un diagrama excelente que nadie puede explicar levanta una duda de autoria que ninguna diapositiva resuelve.</a:t>
             </a:r>
           </a:p>
         </p:txBody>
@@ -6953,7 +6731,7 @@
                 </a:solidFill>
                 <a:latin typeface="Calibri"/>
               </a:rPr>
-              <a:t>El cierre del curso: conectar lo hecho con la practica profesional (2/2)</a:t>
+              <a:t>Evaluar con rubrica: puntos a evidencia observable (2/2)</a:t>
             </a:r>
           </a:p>
         </p:txBody>
@@ -6992,7 +6770,7 @@
                 </a:solidFill>
                 <a:latin typeface="Calibri"/>
               </a:rPr>
-              <a:t>–   El diagrama de contenedores, el Dockerfile y el pipeline que el estudiante escribio son los mismos artefactos que se producen con una cuenta corporativa</a:t>
+              <a:t>–   Y va el recordatorio de pesos que evita reclamos posteriores: estos 100 puntos valen 20% del Corte 3, el Parcial 3 de la Clase 14 (9 de noviembre, virtual sincrono por Meet y escrito) vale 15%, y la asistencia 5%.</a:t>
             </a:r>
           </a:p>
           <a:p>
@@ -7008,39 +6786,7 @@
                 </a:solidFill>
                 <a:latin typeface="Calibri"/>
               </a:rPr>
-              <a:t>–   Lo que no se aprende en un free tier es justamente lo que si se aprendio aqui, que es razonar el trade-off.</a:t>
-            </a:r>
-          </a:p>
-          <a:p>
-            <a:pPr>
-              <a:spcAft>
-                <a:spcPts val="800"/>
-              </a:spcAft>
-            </a:pPr>
-            <a:r>
-              <a:rPr sz="2000" b="0" i="0">
-                <a:solidFill>
-                  <a:srgbClr val="333333"/>
-                </a:solidFill>
-                <a:latin typeface="Calibri"/>
-              </a:rPr>
-              <a:t>–   La frase de cierre util es que arquitectura no es una lista de logos de proveedores, sino un conjunto de decisiones documentadas con sus consecuencias.</a:t>
-            </a:r>
-          </a:p>
-          <a:p>
-            <a:pPr>
-              <a:spcAft>
-                <a:spcPts val="800"/>
-              </a:spcAft>
-            </a:pPr>
-            <a:r>
-              <a:rPr sz="2000" b="0" i="0">
-                <a:solidFill>
-                  <a:srgbClr val="333333"/>
-                </a:solidFill>
-                <a:latin typeface="Calibri"/>
-              </a:rPr>
-              <a:t>–   Y el pedido final debe ser concreto y verificable: conserven el repositorio con el informe, los diagramas y el workflow como portafolio, porque eso es lo que se muestra en una primera entrevista tecnica cuando piden un ejemplo de trabajo propio.</a:t>
+              <a:t>–   El proyecto no reemplaza ni compensa el parcial; son evaluaciones distintas del mismo corte, y decirlo una vez hoy ahorra tres correos la semana siguiente.</a:t>
             </a:r>
           </a:p>
         </p:txBody>
@@ -7115,7 +6861,7 @@
         <p:spPr>
           <a:xfrm>
             <a:off x="0" y="0"/>
-            <a:ext cx="12191695" cy="1170432"/>
+            <a:ext cx="12191695" cy="960120"/>
           </a:xfrm>
           <a:prstGeom prst="rect">
             <a:avLst/>
@@ -7157,7 +6903,7 @@
         </p:nvSpPr>
         <p:spPr>
           <a:xfrm>
-            <a:off x="0" y="1170432"/>
+            <a:off x="0" y="960120"/>
             <a:ext cx="12191695" cy="41148"/>
           </a:xfrm>
           <a:prstGeom prst="rect">
@@ -7201,7 +6947,7 @@
         <p:spPr>
           <a:xfrm>
             <a:off x="457200" y="164592"/>
-            <a:ext cx="11277295" cy="384048"/>
+            <a:ext cx="11277295" cy="502920"/>
           </a:xfrm>
           <a:prstGeom prst="rect">
             <a:avLst/>
@@ -7221,7 +6967,7 @@
                 </a:solidFill>
                 <a:latin typeface="Calibri"/>
               </a:rPr>
-              <a:t>Herramientas de hoy</a:t>
+              <a:t>El cierre del curso: conectar lo hecho con la practica profesional (1/2)</a:t>
             </a:r>
           </a:p>
         </p:txBody>
@@ -7234,8 +6980,8 @@
         </p:nvSpPr>
         <p:spPr>
           <a:xfrm>
-            <a:off x="457200" y="566928"/>
-            <a:ext cx="11277295" cy="411480"/>
+            <a:off x="457200" y="1170432"/>
+            <a:ext cx="11277295" cy="5230368"/>
           </a:xfrm>
           <a:prstGeom prst="rect">
             <a:avLst/>
@@ -7248,837 +6994,90 @@
           </a:bodyPr>
           <a:lstStyle/>
           <a:p>
-            <a:r>
-              <a:rPr sz="1400" b="0" i="0">
-                <a:solidFill>
-                  <a:srgbClr val="B8D8EE"/>
-                </a:solidFill>
-                <a:latin typeface="Calibri"/>
-              </a:rPr>
-              <a:t>Gratis · navegador o free tier · sin cuenta de pago</a:t>
-            </a:r>
-          </a:p>
-        </p:txBody>
-      </p:sp>
-      <p:sp>
-        <p:nvSpPr>
-          <p:cNvPr id="6" name="Rounded Rectangle 5"/>
-          <p:cNvSpPr/>
-          <p:nvPr/>
-        </p:nvSpPr>
-        <p:spPr>
-          <a:xfrm>
-            <a:off x="457200" y="1591056"/>
-            <a:ext cx="3624986" cy="2299716"/>
-          </a:xfrm>
-          <a:prstGeom prst="roundRect">
-            <a:avLst>
-              <a:gd name="adj" fmla="val 12000"/>
-            </a:avLst>
-          </a:prstGeom>
-          <a:solidFill>
-            <a:srgbClr val="F2F2F2"/>
-          </a:solidFill>
-          <a:ln>
-            <a:noFill/>
-          </a:ln>
-        </p:spPr>
-        <p:style>
-          <a:lnRef idx="1">
-            <a:schemeClr val="accent1"/>
-          </a:lnRef>
-          <a:fillRef idx="3">
-            <a:schemeClr val="accent1"/>
-          </a:fillRef>
-          <a:effectRef idx="2">
-            <a:schemeClr val="accent1"/>
-          </a:effectRef>
-          <a:fontRef idx="minor">
-            <a:schemeClr val="lt1"/>
-          </a:fontRef>
-        </p:style>
-        <p:txBody>
-          <a:bodyPr rtlCol="0" anchor="ctr"/>
-          <a:lstStyle/>
-          <a:p>
-            <a:pPr algn="ctr"/>
-          </a:p>
-        </p:txBody>
-      </p:sp>
-      <p:sp>
-        <p:nvSpPr>
-          <p:cNvPr id="7" name="Rectangle 6"/>
-          <p:cNvSpPr/>
-          <p:nvPr/>
-        </p:nvSpPr>
-        <p:spPr>
-          <a:xfrm>
-            <a:off x="457200" y="1591056"/>
-            <a:ext cx="3624986" cy="64008"/>
-          </a:xfrm>
-          <a:prstGeom prst="rect">
-            <a:avLst/>
-          </a:prstGeom>
-          <a:solidFill>
-            <a:srgbClr val="095292"/>
-          </a:solidFill>
-          <a:ln>
-            <a:noFill/>
-          </a:ln>
-        </p:spPr>
-        <p:style>
-          <a:lnRef idx="1">
-            <a:schemeClr val="accent1"/>
-          </a:lnRef>
-          <a:fillRef idx="3">
-            <a:schemeClr val="accent1"/>
-          </a:fillRef>
-          <a:effectRef idx="2">
-            <a:schemeClr val="accent1"/>
-          </a:effectRef>
-          <a:fontRef idx="minor">
-            <a:schemeClr val="lt1"/>
-          </a:fontRef>
-        </p:style>
-        <p:txBody>
-          <a:bodyPr rtlCol="0" anchor="ctr"/>
-          <a:lstStyle/>
-          <a:p>
-            <a:pPr algn="ctr"/>
-          </a:p>
-        </p:txBody>
-      </p:sp>
-      <p:sp>
-        <p:nvSpPr>
-          <p:cNvPr id="8" name="Rectangle 7"/>
-          <p:cNvSpPr/>
-          <p:nvPr/>
-        </p:nvSpPr>
-        <p:spPr>
-          <a:xfrm>
-            <a:off x="457200" y="1655064"/>
-            <a:ext cx="3624986" cy="27432"/>
-          </a:xfrm>
-          <a:prstGeom prst="rect">
-            <a:avLst/>
-          </a:prstGeom>
-          <a:solidFill>
-            <a:srgbClr val="FFD000"/>
-          </a:solidFill>
-          <a:ln>
-            <a:noFill/>
-          </a:ln>
-        </p:spPr>
-        <p:style>
-          <a:lnRef idx="1">
-            <a:schemeClr val="accent1"/>
-          </a:lnRef>
-          <a:fillRef idx="3">
-            <a:schemeClr val="accent1"/>
-          </a:fillRef>
-          <a:effectRef idx="2">
-            <a:schemeClr val="accent1"/>
-          </a:effectRef>
-          <a:fontRef idx="minor">
-            <a:schemeClr val="lt1"/>
-          </a:fontRef>
-        </p:style>
-        <p:txBody>
-          <a:bodyPr rtlCol="0" anchor="ctr"/>
-          <a:lstStyle/>
-          <a:p>
-            <a:pPr algn="ctr"/>
-          </a:p>
-        </p:txBody>
-      </p:sp>
-      <p:pic>
-        <p:nvPicPr>
-          <p:cNvPr id="9" name="Picture 8" descr="google_docs.png"/>
-          <p:cNvPicPr>
-            <a:picLocks noChangeAspect="1"/>
-          </p:cNvPicPr>
-          <p:nvPr/>
-        </p:nvPicPr>
-        <p:blipFill>
-          <a:blip r:embed="rId2"/>
-          <a:stretch>
-            <a:fillRect/>
-          </a:stretch>
-        </p:blipFill>
-        <p:spPr>
-          <a:xfrm>
-            <a:off x="1659331" y="1847087"/>
-            <a:ext cx="1220724" cy="1220724"/>
-          </a:xfrm>
-          <a:prstGeom prst="rect">
-            <a:avLst/>
-          </a:prstGeom>
-        </p:spPr>
-      </p:pic>
-      <p:sp>
-        <p:nvSpPr>
-          <p:cNvPr id="10" name="TextBox 9"/>
-          <p:cNvSpPr txBox="1"/>
-          <p:nvPr/>
-        </p:nvSpPr>
-        <p:spPr>
-          <a:xfrm>
-            <a:off x="530352" y="3159251"/>
-            <a:ext cx="3478682" cy="621792"/>
-          </a:xfrm>
-          <a:prstGeom prst="rect">
-            <a:avLst/>
-          </a:prstGeom>
-          <a:noFill/>
-        </p:spPr>
-        <p:txBody>
-          <a:bodyPr wrap="square" anchor="t"/>
-          <a:lstStyle/>
-          <a:p>
-            <a:pPr algn="ctr"/>
-            <a:r>
-              <a:rPr sz="1300" b="1" i="0">
-                <a:solidFill>
-                  <a:srgbClr val="095292"/>
-                </a:solidFill>
-                <a:latin typeface="Calibri"/>
-              </a:rPr>
-              <a:t>Google Docs</a:t>
-            </a:r>
-          </a:p>
-          <a:p>
-            <a:pPr algn="ctr">
-              <a:spcBef>
-                <a:spcPts val="200"/>
-              </a:spcBef>
+            <a:pPr>
+              <a:spcAft>
+                <a:spcPts val="800"/>
+              </a:spcAft>
             </a:pPr>
             <a:r>
-              <a:rPr sz="1000" b="0" i="0">
-                <a:solidFill>
-                  <a:srgbClr val="666666"/>
-                </a:solidFill>
-                <a:latin typeface="Calibri"/>
-              </a:rPr>
-              <a:t>Pitch y portafolio</a:t>
-            </a:r>
-          </a:p>
-        </p:txBody>
-      </p:sp>
-      <p:sp>
-        <p:nvSpPr>
-          <p:cNvPr id="11" name="Rounded Rectangle 10"/>
-          <p:cNvSpPr/>
-          <p:nvPr/>
-        </p:nvSpPr>
-        <p:spPr>
-          <a:xfrm>
-            <a:off x="4283354" y="1591056"/>
-            <a:ext cx="3624986" cy="2299716"/>
-          </a:xfrm>
-          <a:prstGeom prst="roundRect">
-            <a:avLst>
-              <a:gd name="adj" fmla="val 12000"/>
-            </a:avLst>
-          </a:prstGeom>
-          <a:solidFill>
-            <a:srgbClr val="F2F2F2"/>
-          </a:solidFill>
-          <a:ln>
-            <a:noFill/>
-          </a:ln>
-        </p:spPr>
-        <p:style>
-          <a:lnRef idx="1">
-            <a:schemeClr val="accent1"/>
-          </a:lnRef>
-          <a:fillRef idx="3">
-            <a:schemeClr val="accent1"/>
-          </a:fillRef>
-          <a:effectRef idx="2">
-            <a:schemeClr val="accent1"/>
-          </a:effectRef>
-          <a:fontRef idx="minor">
-            <a:schemeClr val="lt1"/>
-          </a:fontRef>
-        </p:style>
-        <p:txBody>
-          <a:bodyPr rtlCol="0" anchor="ctr"/>
-          <a:lstStyle/>
-          <a:p>
-            <a:pPr algn="ctr"/>
-          </a:p>
-        </p:txBody>
-      </p:sp>
-      <p:sp>
-        <p:nvSpPr>
-          <p:cNvPr id="12" name="Rectangle 11"/>
-          <p:cNvSpPr/>
-          <p:nvPr/>
-        </p:nvSpPr>
-        <p:spPr>
-          <a:xfrm>
-            <a:off x="4283354" y="1591056"/>
-            <a:ext cx="3624986" cy="64008"/>
-          </a:xfrm>
-          <a:prstGeom prst="rect">
-            <a:avLst/>
-          </a:prstGeom>
-          <a:solidFill>
-            <a:srgbClr val="095292"/>
-          </a:solidFill>
-          <a:ln>
-            <a:noFill/>
-          </a:ln>
-        </p:spPr>
-        <p:style>
-          <a:lnRef idx="1">
-            <a:schemeClr val="accent1"/>
-          </a:lnRef>
-          <a:fillRef idx="3">
-            <a:schemeClr val="accent1"/>
-          </a:fillRef>
-          <a:effectRef idx="2">
-            <a:schemeClr val="accent1"/>
-          </a:effectRef>
-          <a:fontRef idx="minor">
-            <a:schemeClr val="lt1"/>
-          </a:fontRef>
-        </p:style>
-        <p:txBody>
-          <a:bodyPr rtlCol="0" anchor="ctr"/>
-          <a:lstStyle/>
-          <a:p>
-            <a:pPr algn="ctr"/>
-          </a:p>
-        </p:txBody>
-      </p:sp>
-      <p:sp>
-        <p:nvSpPr>
-          <p:cNvPr id="13" name="Rectangle 12"/>
-          <p:cNvSpPr/>
-          <p:nvPr/>
-        </p:nvSpPr>
-        <p:spPr>
-          <a:xfrm>
-            <a:off x="4283354" y="1655064"/>
-            <a:ext cx="3624986" cy="27432"/>
-          </a:xfrm>
-          <a:prstGeom prst="rect">
-            <a:avLst/>
-          </a:prstGeom>
-          <a:solidFill>
-            <a:srgbClr val="FFD000"/>
-          </a:solidFill>
-          <a:ln>
-            <a:noFill/>
-          </a:ln>
-        </p:spPr>
-        <p:style>
-          <a:lnRef idx="1">
-            <a:schemeClr val="accent1"/>
-          </a:lnRef>
-          <a:fillRef idx="3">
-            <a:schemeClr val="accent1"/>
-          </a:fillRef>
-          <a:effectRef idx="2">
-            <a:schemeClr val="accent1"/>
-          </a:effectRef>
-          <a:fontRef idx="minor">
-            <a:schemeClr val="lt1"/>
-          </a:fontRef>
-        </p:style>
-        <p:txBody>
-          <a:bodyPr rtlCol="0" anchor="ctr"/>
-          <a:lstStyle/>
-          <a:p>
-            <a:pPr algn="ctr"/>
-          </a:p>
-        </p:txBody>
-      </p:sp>
-      <p:pic>
-        <p:nvPicPr>
-          <p:cNvPr id="14" name="Picture 13" descr="drawio.png"/>
-          <p:cNvPicPr>
-            <a:picLocks noChangeAspect="1"/>
-          </p:cNvPicPr>
-          <p:nvPr/>
-        </p:nvPicPr>
-        <p:blipFill>
-          <a:blip r:embed="rId3"/>
-          <a:stretch>
-            <a:fillRect/>
-          </a:stretch>
-        </p:blipFill>
-        <p:spPr>
-          <a:xfrm>
-            <a:off x="5485485" y="1847087"/>
-            <a:ext cx="1220724" cy="1220724"/>
-          </a:xfrm>
-          <a:prstGeom prst="rect">
-            <a:avLst/>
-          </a:prstGeom>
-        </p:spPr>
-      </p:pic>
-      <p:sp>
-        <p:nvSpPr>
-          <p:cNvPr id="15" name="TextBox 14"/>
-          <p:cNvSpPr txBox="1"/>
-          <p:nvPr/>
-        </p:nvSpPr>
-        <p:spPr>
-          <a:xfrm>
-            <a:off x="4356506" y="3159251"/>
-            <a:ext cx="3478682" cy="621792"/>
-          </a:xfrm>
-          <a:prstGeom prst="rect">
-            <a:avLst/>
-          </a:prstGeom>
-          <a:noFill/>
-        </p:spPr>
-        <p:txBody>
-          <a:bodyPr wrap="square" anchor="t"/>
-          <a:lstStyle/>
-          <a:p>
-            <a:pPr algn="ctr"/>
-            <a:r>
-              <a:rPr sz="1300" b="1" i="0">
-                <a:solidFill>
-                  <a:srgbClr val="095292"/>
-                </a:solidFill>
-                <a:latin typeface="Calibri"/>
-              </a:rPr>
-              <a:t>draw.io</a:t>
-            </a:r>
-          </a:p>
-          <a:p>
-            <a:pPr algn="ctr">
-              <a:spcBef>
-                <a:spcPts val="200"/>
-              </a:spcBef>
+              <a:rPr sz="2000" b="0" i="0">
+                <a:solidFill>
+                  <a:srgbClr val="333333"/>
+                </a:solidFill>
+                <a:latin typeface="Calibri"/>
+              </a:rPr>
+              <a:t>–   El cierre del curso debe conectar lo hecho con la practica profesional, porque de eso depende que el estudiante conserve el material en vez de borrarlo al terminar el semestre.</a:t>
+            </a:r>
+          </a:p>
+          <a:p>
+            <a:pPr>
+              <a:spcAft>
+                <a:spcPts val="800"/>
+              </a:spcAft>
             </a:pPr>
             <a:r>
-              <a:rPr sz="1000" b="0" i="0">
-                <a:solidFill>
-                  <a:srgbClr val="666666"/>
-                </a:solidFill>
-                <a:latin typeface="Calibri"/>
-              </a:rPr>
-              <a:t>Diagramas del paquete</a:t>
-            </a:r>
-          </a:p>
-        </p:txBody>
-      </p:sp>
-      <p:sp>
-        <p:nvSpPr>
-          <p:cNvPr id="16" name="Rounded Rectangle 15"/>
-          <p:cNvSpPr/>
-          <p:nvPr/>
-        </p:nvSpPr>
-        <p:spPr>
-          <a:xfrm>
-            <a:off x="8109508" y="1591056"/>
-            <a:ext cx="3624986" cy="2299716"/>
-          </a:xfrm>
-          <a:prstGeom prst="roundRect">
-            <a:avLst>
-              <a:gd name="adj" fmla="val 12000"/>
-            </a:avLst>
-          </a:prstGeom>
-          <a:solidFill>
-            <a:srgbClr val="F2F2F2"/>
-          </a:solidFill>
-          <a:ln>
-            <a:noFill/>
-          </a:ln>
-        </p:spPr>
-        <p:style>
-          <a:lnRef idx="1">
-            <a:schemeClr val="accent1"/>
-          </a:lnRef>
-          <a:fillRef idx="3">
-            <a:schemeClr val="accent1"/>
-          </a:fillRef>
-          <a:effectRef idx="2">
-            <a:schemeClr val="accent1"/>
-          </a:effectRef>
-          <a:fontRef idx="minor">
-            <a:schemeClr val="lt1"/>
-          </a:fontRef>
-        </p:style>
-        <p:txBody>
-          <a:bodyPr rtlCol="0" anchor="ctr"/>
-          <a:lstStyle/>
-          <a:p>
-            <a:pPr algn="ctr"/>
-          </a:p>
-        </p:txBody>
-      </p:sp>
-      <p:sp>
-        <p:nvSpPr>
-          <p:cNvPr id="17" name="Rectangle 16"/>
-          <p:cNvSpPr/>
-          <p:nvPr/>
-        </p:nvSpPr>
-        <p:spPr>
-          <a:xfrm>
-            <a:off x="8109508" y="1591056"/>
-            <a:ext cx="3624986" cy="64008"/>
-          </a:xfrm>
-          <a:prstGeom prst="rect">
-            <a:avLst/>
-          </a:prstGeom>
-          <a:solidFill>
-            <a:srgbClr val="095292"/>
-          </a:solidFill>
-          <a:ln>
-            <a:noFill/>
-          </a:ln>
-        </p:spPr>
-        <p:style>
-          <a:lnRef idx="1">
-            <a:schemeClr val="accent1"/>
-          </a:lnRef>
-          <a:fillRef idx="3">
-            <a:schemeClr val="accent1"/>
-          </a:fillRef>
-          <a:effectRef idx="2">
-            <a:schemeClr val="accent1"/>
-          </a:effectRef>
-          <a:fontRef idx="minor">
-            <a:schemeClr val="lt1"/>
-          </a:fontRef>
-        </p:style>
-        <p:txBody>
-          <a:bodyPr rtlCol="0" anchor="ctr"/>
-          <a:lstStyle/>
-          <a:p>
-            <a:pPr algn="ctr"/>
-          </a:p>
-        </p:txBody>
-      </p:sp>
-      <p:sp>
-        <p:nvSpPr>
-          <p:cNvPr id="18" name="Rectangle 17"/>
-          <p:cNvSpPr/>
-          <p:nvPr/>
-        </p:nvSpPr>
-        <p:spPr>
-          <a:xfrm>
-            <a:off x="8109508" y="1655064"/>
-            <a:ext cx="3624986" cy="27432"/>
-          </a:xfrm>
-          <a:prstGeom prst="rect">
-            <a:avLst/>
-          </a:prstGeom>
-          <a:solidFill>
-            <a:srgbClr val="FFD000"/>
-          </a:solidFill>
-          <a:ln>
-            <a:noFill/>
-          </a:ln>
-        </p:spPr>
-        <p:style>
-          <a:lnRef idx="1">
-            <a:schemeClr val="accent1"/>
-          </a:lnRef>
-          <a:fillRef idx="3">
-            <a:schemeClr val="accent1"/>
-          </a:fillRef>
-          <a:effectRef idx="2">
-            <a:schemeClr val="accent1"/>
-          </a:effectRef>
-          <a:fontRef idx="minor">
-            <a:schemeClr val="lt1"/>
-          </a:fontRef>
-        </p:style>
-        <p:txBody>
-          <a:bodyPr rtlCol="0" anchor="ctr"/>
-          <a:lstStyle/>
-          <a:p>
-            <a:pPr algn="ctr"/>
-          </a:p>
-        </p:txBody>
-      </p:sp>
-      <p:pic>
-        <p:nvPicPr>
-          <p:cNvPr id="19" name="Picture 18" descr="mermaid.png"/>
-          <p:cNvPicPr>
-            <a:picLocks noChangeAspect="1"/>
-          </p:cNvPicPr>
-          <p:nvPr/>
-        </p:nvPicPr>
-        <p:blipFill>
-          <a:blip r:embed="rId4"/>
-          <a:stretch>
-            <a:fillRect/>
-          </a:stretch>
-        </p:blipFill>
-        <p:spPr>
-          <a:xfrm>
-            <a:off x="9311640" y="1847087"/>
-            <a:ext cx="1220724" cy="1220724"/>
-          </a:xfrm>
-          <a:prstGeom prst="rect">
-            <a:avLst/>
-          </a:prstGeom>
-        </p:spPr>
-      </p:pic>
-      <p:sp>
-        <p:nvSpPr>
-          <p:cNvPr id="20" name="TextBox 19"/>
-          <p:cNvSpPr txBox="1"/>
-          <p:nvPr/>
-        </p:nvSpPr>
-        <p:spPr>
-          <a:xfrm>
-            <a:off x="8182660" y="3159251"/>
-            <a:ext cx="3478682" cy="621792"/>
-          </a:xfrm>
-          <a:prstGeom prst="rect">
-            <a:avLst/>
-          </a:prstGeom>
-          <a:noFill/>
-        </p:spPr>
-        <p:txBody>
-          <a:bodyPr wrap="square" anchor="t"/>
-          <a:lstStyle/>
-          <a:p>
-            <a:pPr algn="ctr"/>
-            <a:r>
-              <a:rPr sz="1300" b="1" i="0">
-                <a:solidFill>
-                  <a:srgbClr val="095292"/>
-                </a:solidFill>
-                <a:latin typeface="Calibri"/>
-              </a:rPr>
-              <a:t>Mermaid</a:t>
-            </a:r>
-          </a:p>
-          <a:p>
-            <a:pPr algn="ctr">
-              <a:spcBef>
-                <a:spcPts val="200"/>
-              </a:spcBef>
+              <a:rPr sz="2000" b="0" i="0">
+                <a:solidFill>
+                  <a:srgbClr val="333333"/>
+                </a:solidFill>
+                <a:latin typeface="Calibri"/>
+              </a:rPr>
+              <a:t>–   En la industria, esta sustentacion tiene nombre propio: design review, o architecture review.</a:t>
+            </a:r>
+          </a:p>
+          <a:p>
+            <a:pPr>
+              <a:spcAft>
+                <a:spcPts val="800"/>
+              </a:spcAft>
             </a:pPr>
             <a:r>
-              <a:rPr sz="1000" b="0" i="0">
-                <a:solidFill>
-                  <a:srgbClr val="666666"/>
-                </a:solidFill>
-                <a:latin typeface="Calibri"/>
-              </a:rPr>
-              <a:t>Codigo del diagrama</a:t>
-            </a:r>
-          </a:p>
-        </p:txBody>
-      </p:sp>
-      <p:sp>
-        <p:nvSpPr>
-          <p:cNvPr id="21" name="Rounded Rectangle 20"/>
-          <p:cNvSpPr/>
-          <p:nvPr/>
-        </p:nvSpPr>
-        <p:spPr>
-          <a:xfrm>
-            <a:off x="4283354" y="4055364"/>
-            <a:ext cx="3624986" cy="2299716"/>
-          </a:xfrm>
-          <a:prstGeom prst="roundRect">
-            <a:avLst>
-              <a:gd name="adj" fmla="val 12000"/>
-            </a:avLst>
-          </a:prstGeom>
-          <a:solidFill>
-            <a:srgbClr val="F2F2F2"/>
-          </a:solidFill>
-          <a:ln>
-            <a:noFill/>
-          </a:ln>
-        </p:spPr>
-        <p:style>
-          <a:lnRef idx="1">
-            <a:schemeClr val="accent1"/>
-          </a:lnRef>
-          <a:fillRef idx="3">
-            <a:schemeClr val="accent1"/>
-          </a:fillRef>
-          <a:effectRef idx="2">
-            <a:schemeClr val="accent1"/>
-          </a:effectRef>
-          <a:fontRef idx="minor">
-            <a:schemeClr val="lt1"/>
-          </a:fontRef>
-        </p:style>
-        <p:txBody>
-          <a:bodyPr rtlCol="0" anchor="ctr"/>
-          <a:lstStyle/>
-          <a:p>
-            <a:pPr algn="ctr"/>
-          </a:p>
-        </p:txBody>
-      </p:sp>
-      <p:sp>
-        <p:nvSpPr>
-          <p:cNvPr id="22" name="Rectangle 21"/>
-          <p:cNvSpPr/>
-          <p:nvPr/>
-        </p:nvSpPr>
-        <p:spPr>
-          <a:xfrm>
-            <a:off x="4283354" y="4055364"/>
-            <a:ext cx="3624986" cy="64008"/>
-          </a:xfrm>
-          <a:prstGeom prst="rect">
-            <a:avLst/>
-          </a:prstGeom>
-          <a:solidFill>
-            <a:srgbClr val="095292"/>
-          </a:solidFill>
-          <a:ln>
-            <a:noFill/>
-          </a:ln>
-        </p:spPr>
-        <p:style>
-          <a:lnRef idx="1">
-            <a:schemeClr val="accent1"/>
-          </a:lnRef>
-          <a:fillRef idx="3">
-            <a:schemeClr val="accent1"/>
-          </a:fillRef>
-          <a:effectRef idx="2">
-            <a:schemeClr val="accent1"/>
-          </a:effectRef>
-          <a:fontRef idx="minor">
-            <a:schemeClr val="lt1"/>
-          </a:fontRef>
-        </p:style>
-        <p:txBody>
-          <a:bodyPr rtlCol="0" anchor="ctr"/>
-          <a:lstStyle/>
-          <a:p>
-            <a:pPr algn="ctr"/>
-          </a:p>
-        </p:txBody>
-      </p:sp>
-      <p:sp>
-        <p:nvSpPr>
-          <p:cNvPr id="23" name="Rectangle 22"/>
-          <p:cNvSpPr/>
-          <p:nvPr/>
-        </p:nvSpPr>
-        <p:spPr>
-          <a:xfrm>
-            <a:off x="4283354" y="4119372"/>
-            <a:ext cx="3624986" cy="27432"/>
-          </a:xfrm>
-          <a:prstGeom prst="rect">
-            <a:avLst/>
-          </a:prstGeom>
-          <a:solidFill>
-            <a:srgbClr val="FFD000"/>
-          </a:solidFill>
-          <a:ln>
-            <a:noFill/>
-          </a:ln>
-        </p:spPr>
-        <p:style>
-          <a:lnRef idx="1">
-            <a:schemeClr val="accent1"/>
-          </a:lnRef>
-          <a:fillRef idx="3">
-            <a:schemeClr val="accent1"/>
-          </a:fillRef>
-          <a:effectRef idx="2">
-            <a:schemeClr val="accent1"/>
-          </a:effectRef>
-          <a:fontRef idx="minor">
-            <a:schemeClr val="lt1"/>
-          </a:fontRef>
-        </p:style>
-        <p:txBody>
-          <a:bodyPr rtlCol="0" anchor="ctr"/>
-          <a:lstStyle/>
-          <a:p>
-            <a:pPr algn="ctr"/>
-          </a:p>
-        </p:txBody>
-      </p:sp>
-      <p:pic>
-        <p:nvPicPr>
-          <p:cNvPr id="24" name="Picture 23" descr="examlab.png"/>
-          <p:cNvPicPr>
-            <a:picLocks noChangeAspect="1"/>
-          </p:cNvPicPr>
-          <p:nvPr/>
-        </p:nvPicPr>
-        <p:blipFill>
-          <a:blip r:embed="rId5"/>
-          <a:stretch>
-            <a:fillRect/>
-          </a:stretch>
-        </p:blipFill>
-        <p:spPr>
-          <a:xfrm>
-            <a:off x="5485485" y="4311396"/>
-            <a:ext cx="1220724" cy="1220724"/>
-          </a:xfrm>
-          <a:prstGeom prst="rect">
-            <a:avLst/>
-          </a:prstGeom>
-        </p:spPr>
-      </p:pic>
-      <p:sp>
-        <p:nvSpPr>
-          <p:cNvPr id="25" name="TextBox 24"/>
-          <p:cNvSpPr txBox="1"/>
-          <p:nvPr/>
-        </p:nvSpPr>
-        <p:spPr>
-          <a:xfrm>
-            <a:off x="4356506" y="5623560"/>
-            <a:ext cx="3478682" cy="621792"/>
-          </a:xfrm>
-          <a:prstGeom prst="rect">
-            <a:avLst/>
-          </a:prstGeom>
-          <a:noFill/>
-        </p:spPr>
-        <p:txBody>
-          <a:bodyPr wrap="square" anchor="t"/>
-          <a:lstStyle/>
-          <a:p>
-            <a:pPr algn="ctr"/>
-            <a:r>
-              <a:rPr sz="1300" b="1" i="0">
-                <a:solidFill>
-                  <a:srgbClr val="095292"/>
-                </a:solidFill>
-                <a:latin typeface="Calibri"/>
-              </a:rPr>
-              <a:t>la plataforma del curso</a:t>
-            </a:r>
-          </a:p>
-          <a:p>
-            <a:pPr algn="ctr">
-              <a:spcBef>
-                <a:spcPts val="200"/>
-              </a:spcBef>
+              <a:rPr sz="2000" b="0" i="0">
+                <a:solidFill>
+                  <a:srgbClr val="333333"/>
+                </a:solidFill>
+                <a:latin typeface="Calibri"/>
+              </a:rPr>
+              <a:t>–   Un equipo presenta una propuesta a pares y a arquitectos mas experimentados cuyo trabajo explicito es buscarle el punto debil antes de que ese punto debil cueste dinero</a:t>
+            </a:r>
+          </a:p>
+          <a:p>
+            <a:pPr>
+              <a:spcAft>
+                <a:spcPts val="800"/>
+              </a:spcAft>
             </a:pPr>
             <a:r>
-              <a:rPr sz="1000" b="0" i="0">
-                <a:solidFill>
-                  <a:srgbClr val="666666"/>
-                </a:solidFill>
-                <a:latin typeface="Calibri"/>
-              </a:rPr>
-              <a:t>Donde se entrega</a:t>
-            </a:r>
-          </a:p>
-        </p:txBody>
-      </p:sp>
-      <p:sp>
-        <p:nvSpPr>
-          <p:cNvPr id="26" name="TextBox 25"/>
+              <a:rPr sz="2000" b="0" i="0">
+                <a:solidFill>
+                  <a:srgbClr val="333333"/>
+                </a:solidFill>
+                <a:latin typeface="Calibri"/>
+              </a:rPr>
+              <a:t>–   Y lo que se pregunta ahi es exactamente lo mismo que hoy, es decir que decidieron, que descartaron, que aceptaron perder, y como sabran si se equivocaron.</a:t>
+            </a:r>
+          </a:p>
+          <a:p>
+            <a:pPr>
+              <a:spcAft>
+                <a:spcPts val="800"/>
+              </a:spcAft>
+            </a:pPr>
+            <a:r>
+              <a:rPr sz="2000" b="0" i="0">
+                <a:solidFill>
+                  <a:srgbClr val="333333"/>
+                </a:solidFill>
+                <a:latin typeface="Calibri"/>
+              </a:rPr>
+              <a:t>–   El ADR es un formato real, usado en equipos reales, no un invento academico del curso.</a:t>
+            </a:r>
+          </a:p>
+        </p:txBody>
+      </p:sp>
+      <p:sp>
+        <p:nvSpPr>
+          <p:cNvPr id="6" name="TextBox 5"/>
           <p:cNvSpPr txBox="1"/>
           <p:nvPr/>
         </p:nvSpPr>
@@ -8146,7 +7145,7 @@
         <p:spPr>
           <a:xfrm>
             <a:off x="0" y="0"/>
-            <a:ext cx="12191695" cy="1170432"/>
+            <a:ext cx="12191695" cy="960120"/>
           </a:xfrm>
           <a:prstGeom prst="rect">
             <a:avLst/>
@@ -8188,7 +7187,7 @@
         </p:nvSpPr>
         <p:spPr>
           <a:xfrm>
-            <a:off x="0" y="1170432"/>
+            <a:off x="0" y="960120"/>
             <a:ext cx="12191695" cy="41148"/>
           </a:xfrm>
           <a:prstGeom prst="rect">
@@ -8232,7 +7231,7 @@
         <p:spPr>
           <a:xfrm>
             <a:off x="457200" y="164592"/>
-            <a:ext cx="11277295" cy="384048"/>
+            <a:ext cx="11277295" cy="502920"/>
           </a:xfrm>
           <a:prstGeom prst="rect">
             <a:avLst/>
@@ -8252,7 +7251,7 @@
                 </a:solidFill>
                 <a:latin typeface="Calibri"/>
               </a:rPr>
-              <a:t>Del boceto a la plataforma del curso (diagrama)</a:t>
+              <a:t>El cierre del curso: conectar lo hecho con la practica profesional (2/2)</a:t>
             </a:r>
           </a:p>
         </p:txBody>
@@ -8265,8 +7264,8 @@
         </p:nvSpPr>
         <p:spPr>
           <a:xfrm>
-            <a:off x="457200" y="566928"/>
-            <a:ext cx="11277295" cy="411480"/>
+            <a:off x="457200" y="1170432"/>
+            <a:ext cx="11277295" cy="5230368"/>
           </a:xfrm>
           <a:prstGeom prst="rect">
             <a:avLst/>
@@ -8279,705 +7278,74 @@
           </a:bodyPr>
           <a:lstStyle/>
           <a:p>
-            <a:r>
-              <a:rPr sz="1400" b="0" i="0">
-                <a:solidFill>
-                  <a:srgbClr val="B8D8EE"/>
-                </a:solidFill>
-                <a:latin typeface="Calibri"/>
-              </a:rPr>
-              <a:t>El diagrama se entrega como código Mermaid dentro de la plataforma del curso, no como imagen</a:t>
-            </a:r>
-          </a:p>
-        </p:txBody>
-      </p:sp>
-      <p:sp>
-        <p:nvSpPr>
-          <p:cNvPr id="6" name="Rounded Rectangle 5"/>
-          <p:cNvSpPr/>
-          <p:nvPr/>
-        </p:nvSpPr>
-        <p:spPr>
-          <a:xfrm>
-            <a:off x="457200" y="1659636"/>
-            <a:ext cx="11277295" cy="1051560"/>
-          </a:xfrm>
-          <a:prstGeom prst="roundRect">
-            <a:avLst>
-              <a:gd name="adj" fmla="val 12000"/>
-            </a:avLst>
-          </a:prstGeom>
-          <a:solidFill>
-            <a:srgbClr val="F2F2F2"/>
-          </a:solidFill>
-          <a:ln>
-            <a:noFill/>
-          </a:ln>
-        </p:spPr>
-        <p:style>
-          <a:lnRef idx="1">
-            <a:schemeClr val="accent1"/>
-          </a:lnRef>
-          <a:fillRef idx="3">
-            <a:schemeClr val="accent1"/>
-          </a:fillRef>
-          <a:effectRef idx="2">
-            <a:schemeClr val="accent1"/>
-          </a:effectRef>
-          <a:fontRef idx="minor">
-            <a:schemeClr val="lt1"/>
-          </a:fontRef>
-        </p:style>
-        <p:txBody>
-          <a:bodyPr rtlCol="0" anchor="ctr"/>
-          <a:lstStyle/>
-          <a:p>
-            <a:pPr algn="ctr"/>
-          </a:p>
-        </p:txBody>
-      </p:sp>
-      <p:sp>
-        <p:nvSpPr>
-          <p:cNvPr id="7" name="Rounded Rectangle 6"/>
-          <p:cNvSpPr/>
-          <p:nvPr/>
-        </p:nvSpPr>
-        <p:spPr>
-          <a:xfrm>
-            <a:off x="594360" y="1965960"/>
-            <a:ext cx="438912" cy="438912"/>
-          </a:xfrm>
-          <a:prstGeom prst="roundRect">
-            <a:avLst>
-              <a:gd name="adj" fmla="val 12000"/>
-            </a:avLst>
-          </a:prstGeom>
-          <a:solidFill>
-            <a:srgbClr val="095292"/>
-          </a:solidFill>
-          <a:ln>
-            <a:noFill/>
-          </a:ln>
-        </p:spPr>
-        <p:style>
-          <a:lnRef idx="1">
-            <a:schemeClr val="accent1"/>
-          </a:lnRef>
-          <a:fillRef idx="3">
-            <a:schemeClr val="accent1"/>
-          </a:fillRef>
-          <a:effectRef idx="2">
-            <a:schemeClr val="accent1"/>
-          </a:effectRef>
-          <a:fontRef idx="minor">
-            <a:schemeClr val="lt1"/>
-          </a:fontRef>
-        </p:style>
-        <p:txBody>
-          <a:bodyPr rtlCol="0" anchor="ctr"/>
-          <a:lstStyle/>
-          <a:p>
-            <a:pPr algn="ctr"/>
-          </a:p>
-        </p:txBody>
-      </p:sp>
-      <p:sp>
-        <p:nvSpPr>
-          <p:cNvPr id="8" name="TextBox 7"/>
-          <p:cNvSpPr txBox="1"/>
-          <p:nvPr/>
-        </p:nvSpPr>
-        <p:spPr>
-          <a:xfrm>
-            <a:off x="594360" y="1965960"/>
-            <a:ext cx="438912" cy="438912"/>
-          </a:xfrm>
-          <a:prstGeom prst="rect">
-            <a:avLst/>
-          </a:prstGeom>
-          <a:noFill/>
-        </p:spPr>
-        <p:txBody>
-          <a:bodyPr wrap="square" anchor="ctr"/>
-          <a:lstStyle/>
-          <a:p>
-            <a:pPr algn="ctr"/>
-            <a:r>
-              <a:rPr sz="1600" b="1" i="0">
-                <a:solidFill>
-                  <a:srgbClr val="FFFFFF"/>
-                </a:solidFill>
-                <a:latin typeface="Calibri"/>
-              </a:rPr>
-              <a:t>1</a:t>
-            </a:r>
-          </a:p>
-        </p:txBody>
-      </p:sp>
-      <p:sp>
-        <p:nvSpPr>
-          <p:cNvPr id="9" name="TextBox 8"/>
-          <p:cNvSpPr txBox="1"/>
-          <p:nvPr/>
-        </p:nvSpPr>
-        <p:spPr>
-          <a:xfrm>
-            <a:off x="1188720" y="1751076"/>
-            <a:ext cx="10271455" cy="886968"/>
-          </a:xfrm>
-          <a:prstGeom prst="rect">
-            <a:avLst/>
-          </a:prstGeom>
-          <a:noFill/>
-        </p:spPr>
-        <p:txBody>
-          <a:bodyPr wrap="square" anchor="ctr"/>
-          <a:lstStyle/>
-          <a:p>
-            <a:r>
-              <a:rPr sz="1500" b="1" i="0">
-                <a:solidFill>
-                  <a:srgbClr val="095292"/>
-                </a:solidFill>
-                <a:latin typeface="Calibri"/>
-              </a:rPr>
-              <a:t>Disena visual</a:t>
-            </a:r>
-          </a:p>
-          <a:p>
             <a:pPr>
-              <a:spcBef>
-                <a:spcPts val="200"/>
-              </a:spcBef>
+              <a:spcAft>
+                <a:spcPts val="800"/>
+              </a:spcAft>
             </a:pPr>
             <a:r>
-              <a:rPr sz="1300" b="0" i="0">
-                <a:solidFill>
-                  <a:srgbClr val="333333"/>
-                </a:solidFill>
-                <a:latin typeface="Calibri"/>
-              </a:rPr>
-              <a:t>Dibuja el diagrama como quieras en Excalidraw o draw.io: es mas rapido arrastrar cajas que escribir codigo, y ahi es donde piensas el modelo.</a:t>
-            </a:r>
-          </a:p>
-        </p:txBody>
-      </p:sp>
-      <p:sp>
-        <p:nvSpPr>
-          <p:cNvPr id="10" name="Rounded Rectangle 9"/>
-          <p:cNvSpPr/>
-          <p:nvPr/>
-        </p:nvSpPr>
-        <p:spPr>
-          <a:xfrm>
-            <a:off x="457200" y="2802636"/>
-            <a:ext cx="11277295" cy="1051560"/>
-          </a:xfrm>
-          <a:prstGeom prst="roundRect">
-            <a:avLst>
-              <a:gd name="adj" fmla="val 12000"/>
-            </a:avLst>
-          </a:prstGeom>
-          <a:solidFill>
-            <a:srgbClr val="E8F4FA"/>
-          </a:solidFill>
-          <a:ln>
-            <a:noFill/>
-          </a:ln>
-        </p:spPr>
-        <p:style>
-          <a:lnRef idx="1">
-            <a:schemeClr val="accent1"/>
-          </a:lnRef>
-          <a:fillRef idx="3">
-            <a:schemeClr val="accent1"/>
-          </a:fillRef>
-          <a:effectRef idx="2">
-            <a:schemeClr val="accent1"/>
-          </a:effectRef>
-          <a:fontRef idx="minor">
-            <a:schemeClr val="lt1"/>
-          </a:fontRef>
-        </p:style>
-        <p:txBody>
-          <a:bodyPr rtlCol="0" anchor="ctr"/>
-          <a:lstStyle/>
-          <a:p>
-            <a:pPr algn="ctr"/>
-          </a:p>
-        </p:txBody>
-      </p:sp>
-      <p:sp>
-        <p:nvSpPr>
-          <p:cNvPr id="11" name="Rounded Rectangle 10"/>
-          <p:cNvSpPr/>
-          <p:nvPr/>
-        </p:nvSpPr>
-        <p:spPr>
-          <a:xfrm>
-            <a:off x="594360" y="3108960"/>
-            <a:ext cx="438912" cy="438912"/>
-          </a:xfrm>
-          <a:prstGeom prst="roundRect">
-            <a:avLst>
-              <a:gd name="adj" fmla="val 12000"/>
-            </a:avLst>
-          </a:prstGeom>
-          <a:solidFill>
-            <a:srgbClr val="095292"/>
-          </a:solidFill>
-          <a:ln>
-            <a:noFill/>
-          </a:ln>
-        </p:spPr>
-        <p:style>
-          <a:lnRef idx="1">
-            <a:schemeClr val="accent1"/>
-          </a:lnRef>
-          <a:fillRef idx="3">
-            <a:schemeClr val="accent1"/>
-          </a:fillRef>
-          <a:effectRef idx="2">
-            <a:schemeClr val="accent1"/>
-          </a:effectRef>
-          <a:fontRef idx="minor">
-            <a:schemeClr val="lt1"/>
-          </a:fontRef>
-        </p:style>
-        <p:txBody>
-          <a:bodyPr rtlCol="0" anchor="ctr"/>
-          <a:lstStyle/>
-          <a:p>
-            <a:pPr algn="ctr"/>
-          </a:p>
-        </p:txBody>
-      </p:sp>
-      <p:sp>
-        <p:nvSpPr>
-          <p:cNvPr id="12" name="TextBox 11"/>
-          <p:cNvSpPr txBox="1"/>
-          <p:nvPr/>
-        </p:nvSpPr>
-        <p:spPr>
-          <a:xfrm>
-            <a:off x="594360" y="3108960"/>
-            <a:ext cx="438912" cy="438912"/>
-          </a:xfrm>
-          <a:prstGeom prst="rect">
-            <a:avLst/>
-          </a:prstGeom>
-          <a:noFill/>
-        </p:spPr>
-        <p:txBody>
-          <a:bodyPr wrap="square" anchor="ctr"/>
-          <a:lstStyle/>
-          <a:p>
-            <a:pPr algn="ctr"/>
-            <a:r>
-              <a:rPr sz="1600" b="1" i="0">
-                <a:solidFill>
-                  <a:srgbClr val="FFFFFF"/>
-                </a:solidFill>
-                <a:latin typeface="Calibri"/>
-              </a:rPr>
-              <a:t>2</a:t>
-            </a:r>
-          </a:p>
-        </p:txBody>
-      </p:sp>
-      <p:sp>
-        <p:nvSpPr>
-          <p:cNvPr id="13" name="TextBox 12"/>
-          <p:cNvSpPr txBox="1"/>
-          <p:nvPr/>
-        </p:nvSpPr>
-        <p:spPr>
-          <a:xfrm>
-            <a:off x="1188720" y="2894076"/>
-            <a:ext cx="10271455" cy="886968"/>
-          </a:xfrm>
-          <a:prstGeom prst="rect">
-            <a:avLst/>
-          </a:prstGeom>
-          <a:noFill/>
-        </p:spPr>
-        <p:txBody>
-          <a:bodyPr wrap="square" anchor="ctr"/>
-          <a:lstStyle/>
-          <a:p>
-            <a:r>
-              <a:rPr sz="1500" b="1" i="0">
-                <a:solidFill>
-                  <a:srgbClr val="095292"/>
-                </a:solidFill>
-                <a:latin typeface="Calibri"/>
-              </a:rPr>
-              <a:t>Traduce con IA</a:t>
+              <a:rPr sz="2000" b="0" i="0">
+                <a:solidFill>
+                  <a:srgbClr val="333333"/>
+                </a:solidFill>
+                <a:latin typeface="Calibri"/>
+              </a:rPr>
+              <a:t>–   El diagrama de contenedores, el Dockerfile y el pipeline que el estudiante escribio son los mismos artefactos que se producen con una cuenta corporativa</a:t>
             </a:r>
           </a:p>
           <a:p>
             <a:pPr>
-              <a:spcBef>
-                <a:spcPts val="200"/>
-              </a:spcBef>
+              <a:spcAft>
+                <a:spcPts val="800"/>
+              </a:spcAft>
             </a:pPr>
             <a:r>
-              <a:rPr sz="1300" b="0" i="0">
-                <a:solidFill>
-                  <a:srgbClr val="333333"/>
-                </a:solidFill>
-                <a:latin typeface="Calibri"/>
-              </a:rPr>
-              <a:t>Copia o describe tu boceto a una IA y pidele el codigo Mermaid: «convierte este diagrama a Mermaid usando flowchart». Revisa el resultado: la IA acierta la sintaxis, no tu modelo.</a:t>
-            </a:r>
-          </a:p>
-        </p:txBody>
-      </p:sp>
-      <p:sp>
-        <p:nvSpPr>
-          <p:cNvPr id="14" name="Rounded Rectangle 13"/>
-          <p:cNvSpPr/>
-          <p:nvPr/>
-        </p:nvSpPr>
-        <p:spPr>
-          <a:xfrm>
-            <a:off x="457200" y="3945636"/>
-            <a:ext cx="11277295" cy="1051560"/>
-          </a:xfrm>
-          <a:prstGeom prst="roundRect">
-            <a:avLst>
-              <a:gd name="adj" fmla="val 12000"/>
-            </a:avLst>
-          </a:prstGeom>
-          <a:solidFill>
-            <a:srgbClr val="F2F2F2"/>
-          </a:solidFill>
-          <a:ln>
-            <a:noFill/>
-          </a:ln>
-        </p:spPr>
-        <p:style>
-          <a:lnRef idx="1">
-            <a:schemeClr val="accent1"/>
-          </a:lnRef>
-          <a:fillRef idx="3">
-            <a:schemeClr val="accent1"/>
-          </a:fillRef>
-          <a:effectRef idx="2">
-            <a:schemeClr val="accent1"/>
-          </a:effectRef>
-          <a:fontRef idx="minor">
-            <a:schemeClr val="lt1"/>
-          </a:fontRef>
-        </p:style>
-        <p:txBody>
-          <a:bodyPr rtlCol="0" anchor="ctr"/>
-          <a:lstStyle/>
-          <a:p>
-            <a:pPr algn="ctr"/>
-          </a:p>
-        </p:txBody>
-      </p:sp>
-      <p:sp>
-        <p:nvSpPr>
-          <p:cNvPr id="15" name="Rounded Rectangle 14"/>
-          <p:cNvSpPr/>
-          <p:nvPr/>
-        </p:nvSpPr>
-        <p:spPr>
-          <a:xfrm>
-            <a:off x="594360" y="4251960"/>
-            <a:ext cx="438912" cy="438912"/>
-          </a:xfrm>
-          <a:prstGeom prst="roundRect">
-            <a:avLst>
-              <a:gd name="adj" fmla="val 12000"/>
-            </a:avLst>
-          </a:prstGeom>
-          <a:solidFill>
-            <a:srgbClr val="095292"/>
-          </a:solidFill>
-          <a:ln>
-            <a:noFill/>
-          </a:ln>
-        </p:spPr>
-        <p:style>
-          <a:lnRef idx="1">
-            <a:schemeClr val="accent1"/>
-          </a:lnRef>
-          <a:fillRef idx="3">
-            <a:schemeClr val="accent1"/>
-          </a:fillRef>
-          <a:effectRef idx="2">
-            <a:schemeClr val="accent1"/>
-          </a:effectRef>
-          <a:fontRef idx="minor">
-            <a:schemeClr val="lt1"/>
-          </a:fontRef>
-        </p:style>
-        <p:txBody>
-          <a:bodyPr rtlCol="0" anchor="ctr"/>
-          <a:lstStyle/>
-          <a:p>
-            <a:pPr algn="ctr"/>
-          </a:p>
-        </p:txBody>
-      </p:sp>
-      <p:sp>
-        <p:nvSpPr>
-          <p:cNvPr id="16" name="TextBox 15"/>
-          <p:cNvSpPr txBox="1"/>
-          <p:nvPr/>
-        </p:nvSpPr>
-        <p:spPr>
-          <a:xfrm>
-            <a:off x="594360" y="4251960"/>
-            <a:ext cx="438912" cy="438912"/>
-          </a:xfrm>
-          <a:prstGeom prst="rect">
-            <a:avLst/>
-          </a:prstGeom>
-          <a:noFill/>
-        </p:spPr>
-        <p:txBody>
-          <a:bodyPr wrap="square" anchor="ctr"/>
-          <a:lstStyle/>
-          <a:p>
-            <a:pPr algn="ctr"/>
-            <a:r>
-              <a:rPr sz="1600" b="1" i="0">
-                <a:solidFill>
-                  <a:srgbClr val="FFFFFF"/>
-                </a:solidFill>
-                <a:latin typeface="Calibri"/>
-              </a:rPr>
-              <a:t>3</a:t>
-            </a:r>
-          </a:p>
-        </p:txBody>
-      </p:sp>
-      <p:sp>
-        <p:nvSpPr>
-          <p:cNvPr id="17" name="TextBox 16"/>
-          <p:cNvSpPr txBox="1"/>
-          <p:nvPr/>
-        </p:nvSpPr>
-        <p:spPr>
-          <a:xfrm>
-            <a:off x="1188720" y="4037076"/>
-            <a:ext cx="10271455" cy="886968"/>
-          </a:xfrm>
-          <a:prstGeom prst="rect">
-            <a:avLst/>
-          </a:prstGeom>
-          <a:noFill/>
-        </p:spPr>
-        <p:txBody>
-          <a:bodyPr wrap="square" anchor="ctr"/>
-          <a:lstStyle/>
-          <a:p>
-            <a:r>
-              <a:rPr sz="1500" b="1" i="0">
-                <a:solidFill>
-                  <a:srgbClr val="095292"/>
-                </a:solidFill>
-                <a:latin typeface="Calibri"/>
-              </a:rPr>
-              <a:t>Pega y renderiza en la plataforma del curso</a:t>
+              <a:rPr sz="2000" b="0" i="0">
+                <a:solidFill>
+                  <a:srgbClr val="333333"/>
+                </a:solidFill>
+                <a:latin typeface="Calibri"/>
+              </a:rPr>
+              <a:t>–   Lo que no se aprende en un free tier es justamente lo que si se aprendio aqui, que es razonar el trade-off.</a:t>
             </a:r>
           </a:p>
           <a:p>
             <a:pPr>
-              <a:spcBef>
-                <a:spcPts val="200"/>
-              </a:spcBef>
+              <a:spcAft>
+                <a:spcPts val="800"/>
+              </a:spcAft>
             </a:pPr>
             <a:r>
-              <a:rPr sz="1300" b="0" i="0">
-                <a:solidFill>
-                  <a:srgbClr val="333333"/>
-                </a:solidFill>
-                <a:latin typeface="Calibri"/>
-              </a:rPr>
-              <a:t>Pega ese codigo en la caja de texto de la pregunta y mira como lo dibuja la plataforma. Si no renderiza, corrige ahi mismo: lo que se califica es el diagrama renderizado dentro de la plataforma del curso.</a:t>
-            </a:r>
-          </a:p>
-        </p:txBody>
-      </p:sp>
-      <p:sp>
-        <p:nvSpPr>
-          <p:cNvPr id="18" name="Rounded Rectangle 17"/>
-          <p:cNvSpPr/>
-          <p:nvPr/>
-        </p:nvSpPr>
-        <p:spPr>
-          <a:xfrm>
-            <a:off x="457200" y="5088636"/>
-            <a:ext cx="11277295" cy="1051560"/>
-          </a:xfrm>
-          <a:prstGeom prst="roundRect">
-            <a:avLst>
-              <a:gd name="adj" fmla="val 12000"/>
-            </a:avLst>
-          </a:prstGeom>
-          <a:solidFill>
-            <a:srgbClr val="E8F4FA"/>
-          </a:solidFill>
-          <a:ln>
-            <a:noFill/>
-          </a:ln>
-        </p:spPr>
-        <p:style>
-          <a:lnRef idx="1">
-            <a:schemeClr val="accent1"/>
-          </a:lnRef>
-          <a:fillRef idx="3">
-            <a:schemeClr val="accent1"/>
-          </a:fillRef>
-          <a:effectRef idx="2">
-            <a:schemeClr val="accent1"/>
-          </a:effectRef>
-          <a:fontRef idx="minor">
-            <a:schemeClr val="lt1"/>
-          </a:fontRef>
-        </p:style>
-        <p:txBody>
-          <a:bodyPr rtlCol="0" anchor="ctr"/>
-          <a:lstStyle/>
-          <a:p>
-            <a:pPr algn="ctr"/>
-          </a:p>
-        </p:txBody>
-      </p:sp>
-      <p:sp>
-        <p:nvSpPr>
-          <p:cNvPr id="19" name="Rounded Rectangle 18"/>
-          <p:cNvSpPr/>
-          <p:nvPr/>
-        </p:nvSpPr>
-        <p:spPr>
-          <a:xfrm>
-            <a:off x="594360" y="5394960"/>
-            <a:ext cx="438912" cy="438912"/>
-          </a:xfrm>
-          <a:prstGeom prst="roundRect">
-            <a:avLst>
-              <a:gd name="adj" fmla="val 12000"/>
-            </a:avLst>
-          </a:prstGeom>
-          <a:solidFill>
-            <a:srgbClr val="095292"/>
-          </a:solidFill>
-          <a:ln>
-            <a:noFill/>
-          </a:ln>
-        </p:spPr>
-        <p:style>
-          <a:lnRef idx="1">
-            <a:schemeClr val="accent1"/>
-          </a:lnRef>
-          <a:fillRef idx="3">
-            <a:schemeClr val="accent1"/>
-          </a:fillRef>
-          <a:effectRef idx="2">
-            <a:schemeClr val="accent1"/>
-          </a:effectRef>
-          <a:fontRef idx="minor">
-            <a:schemeClr val="lt1"/>
-          </a:fontRef>
-        </p:style>
-        <p:txBody>
-          <a:bodyPr rtlCol="0" anchor="ctr"/>
-          <a:lstStyle/>
-          <a:p>
-            <a:pPr algn="ctr"/>
-          </a:p>
-        </p:txBody>
-      </p:sp>
-      <p:sp>
-        <p:nvSpPr>
-          <p:cNvPr id="20" name="TextBox 19"/>
-          <p:cNvSpPr txBox="1"/>
-          <p:nvPr/>
-        </p:nvSpPr>
-        <p:spPr>
-          <a:xfrm>
-            <a:off x="594360" y="5394960"/>
-            <a:ext cx="438912" cy="438912"/>
-          </a:xfrm>
-          <a:prstGeom prst="rect">
-            <a:avLst/>
-          </a:prstGeom>
-          <a:noFill/>
-        </p:spPr>
-        <p:txBody>
-          <a:bodyPr wrap="square" anchor="ctr"/>
-          <a:lstStyle/>
-          <a:p>
-            <a:pPr algn="ctr"/>
-            <a:r>
-              <a:rPr sz="1600" b="1" i="0">
-                <a:solidFill>
-                  <a:srgbClr val="FFFFFF"/>
-                </a:solidFill>
-                <a:latin typeface="Calibri"/>
-              </a:rPr>
-              <a:t>4</a:t>
-            </a:r>
-          </a:p>
-        </p:txBody>
-      </p:sp>
-      <p:sp>
-        <p:nvSpPr>
-          <p:cNvPr id="21" name="TextBox 20"/>
-          <p:cNvSpPr txBox="1"/>
-          <p:nvPr/>
-        </p:nvSpPr>
-        <p:spPr>
-          <a:xfrm>
-            <a:off x="1188720" y="5180076"/>
-            <a:ext cx="10271455" cy="886968"/>
-          </a:xfrm>
-          <a:prstGeom prst="rect">
-            <a:avLst/>
-          </a:prstGeom>
-          <a:noFill/>
-        </p:spPr>
-        <p:txBody>
-          <a:bodyPr wrap="square" anchor="ctr"/>
-          <a:lstStyle/>
-          <a:p>
-            <a:r>
-              <a:rPr sz="1500" b="1" i="0">
-                <a:solidFill>
-                  <a:srgbClr val="095292"/>
-                </a:solidFill>
-                <a:latin typeface="Calibri"/>
-              </a:rPr>
-              <a:t>Guarda el PNG para tu PI</a:t>
+              <a:rPr sz="2000" b="0" i="0">
+                <a:solidFill>
+                  <a:srgbClr val="333333"/>
+                </a:solidFill>
+                <a:latin typeface="Calibri"/>
+              </a:rPr>
+              <a:t>–   La frase de cierre util es que arquitectura no es una lista de logos de proveedores, sino un conjunto de decisiones documentadas con sus consecuencias.</a:t>
             </a:r>
           </a:p>
           <a:p>
             <a:pPr>
-              <a:spcBef>
-                <a:spcPts val="200"/>
-              </a:spcBef>
+              <a:spcAft>
+                <a:spcPts val="800"/>
+              </a:spcAft>
             </a:pPr>
             <a:r>
-              <a:rPr sz="1300" b="0" i="0">
-                <a:solidFill>
-                  <a:srgbClr val="333333"/>
-                </a:solidFill>
-                <a:latin typeface="Calibri"/>
-              </a:rPr>
-              <a:t>Exporta tambien la imagen a la carpeta de tu Proyecto Integrador. Esa copia es para tu informe; no reemplaza la respuesta en la plataforma.</a:t>
-            </a:r>
-          </a:p>
-        </p:txBody>
-      </p:sp>
-      <p:sp>
-        <p:nvSpPr>
-          <p:cNvPr id="22" name="TextBox 21"/>
+              <a:rPr sz="2000" b="0" i="0">
+                <a:solidFill>
+                  <a:srgbClr val="333333"/>
+                </a:solidFill>
+                <a:latin typeface="Calibri"/>
+              </a:rPr>
+              <a:t>–   Y el pedido final debe ser concreto y verificable: conserven el repositorio con el informe, los diagramas y el workflow como portafolio, porque eso es lo que se muestra en una primera entrevista tecnica cuando piden un ejemplo de trabajo propio.</a:t>
+            </a:r>
+          </a:p>
+        </p:txBody>
+      </p:sp>
+      <p:sp>
+        <p:nvSpPr>
+          <p:cNvPr id="6" name="TextBox 5"/>
           <p:cNvSpPr txBox="1"/>
           <p:nvPr/>
         </p:nvSpPr>
@@ -9045,7 +7413,7 @@
         <p:spPr>
           <a:xfrm>
             <a:off x="0" y="0"/>
-            <a:ext cx="12191695" cy="960120"/>
+            <a:ext cx="12191695" cy="1170432"/>
           </a:xfrm>
           <a:prstGeom prst="rect">
             <a:avLst/>
@@ -9087,7 +7455,7 @@
         </p:nvSpPr>
         <p:spPr>
           <a:xfrm>
-            <a:off x="0" y="960120"/>
+            <a:off x="0" y="1170432"/>
             <a:ext cx="12191695" cy="41148"/>
           </a:xfrm>
           <a:prstGeom prst="rect">
@@ -9131,7 +7499,7 @@
         <p:spPr>
           <a:xfrm>
             <a:off x="457200" y="164592"/>
-            <a:ext cx="11277295" cy="502920"/>
+            <a:ext cx="11277295" cy="384048"/>
           </a:xfrm>
           <a:prstGeom prst="rect">
             <a:avLst/>
@@ -9151,7 +7519,7 @@
                 </a:solidFill>
                 <a:latin typeface="Calibri"/>
               </a:rPr>
-              <a:t>PI CloudLite — entregable de hoy</a:t>
+              <a:t>Herramientas de hoy</a:t>
             </a:r>
           </a:p>
         </p:txBody>
@@ -9164,8 +7532,8 @@
         </p:nvSpPr>
         <p:spPr>
           <a:xfrm>
-            <a:off x="457200" y="1170432"/>
-            <a:ext cx="11277295" cy="5230368"/>
+            <a:off x="457200" y="566928"/>
+            <a:ext cx="11277295" cy="411480"/>
           </a:xfrm>
           <a:prstGeom prst="rect">
             <a:avLst/>
@@ -9178,119 +7546,837 @@
           </a:bodyPr>
           <a:lstStyle/>
           <a:p>
-            <a:pPr>
-              <a:spcAft>
-                <a:spcPts val="800"/>
-              </a:spcAft>
+            <a:r>
+              <a:rPr sz="1400" b="0" i="0">
+                <a:solidFill>
+                  <a:srgbClr val="B8D8EE"/>
+                </a:solidFill>
+                <a:latin typeface="Calibri"/>
+              </a:rPr>
+              <a:t>Gratis · navegador o free tier · sin cuenta de pago</a:t>
+            </a:r>
+          </a:p>
+        </p:txBody>
+      </p:sp>
+      <p:sp>
+        <p:nvSpPr>
+          <p:cNvPr id="6" name="Rounded Rectangle 5"/>
+          <p:cNvSpPr/>
+          <p:nvPr/>
+        </p:nvSpPr>
+        <p:spPr>
+          <a:xfrm>
+            <a:off x="457200" y="1591056"/>
+            <a:ext cx="3624986" cy="2299716"/>
+          </a:xfrm>
+          <a:prstGeom prst="roundRect">
+            <a:avLst>
+              <a:gd name="adj" fmla="val 12000"/>
+            </a:avLst>
+          </a:prstGeom>
+          <a:solidFill>
+            <a:srgbClr val="F2F2F2"/>
+          </a:solidFill>
+          <a:ln>
+            <a:noFill/>
+          </a:ln>
+        </p:spPr>
+        <p:style>
+          <a:lnRef idx="1">
+            <a:schemeClr val="accent1"/>
+          </a:lnRef>
+          <a:fillRef idx="3">
+            <a:schemeClr val="accent1"/>
+          </a:fillRef>
+          <a:effectRef idx="2">
+            <a:schemeClr val="accent1"/>
+          </a:effectRef>
+          <a:fontRef idx="minor">
+            <a:schemeClr val="lt1"/>
+          </a:fontRef>
+        </p:style>
+        <p:txBody>
+          <a:bodyPr rtlCol="0" anchor="ctr"/>
+          <a:lstStyle/>
+          <a:p>
+            <a:pPr algn="ctr"/>
+          </a:p>
+        </p:txBody>
+      </p:sp>
+      <p:sp>
+        <p:nvSpPr>
+          <p:cNvPr id="7" name="Rectangle 6"/>
+          <p:cNvSpPr/>
+          <p:nvPr/>
+        </p:nvSpPr>
+        <p:spPr>
+          <a:xfrm>
+            <a:off x="457200" y="1591056"/>
+            <a:ext cx="3624986" cy="64008"/>
+          </a:xfrm>
+          <a:prstGeom prst="rect">
+            <a:avLst/>
+          </a:prstGeom>
+          <a:solidFill>
+            <a:srgbClr val="095292"/>
+          </a:solidFill>
+          <a:ln>
+            <a:noFill/>
+          </a:ln>
+        </p:spPr>
+        <p:style>
+          <a:lnRef idx="1">
+            <a:schemeClr val="accent1"/>
+          </a:lnRef>
+          <a:fillRef idx="3">
+            <a:schemeClr val="accent1"/>
+          </a:fillRef>
+          <a:effectRef idx="2">
+            <a:schemeClr val="accent1"/>
+          </a:effectRef>
+          <a:fontRef idx="minor">
+            <a:schemeClr val="lt1"/>
+          </a:fontRef>
+        </p:style>
+        <p:txBody>
+          <a:bodyPr rtlCol="0" anchor="ctr"/>
+          <a:lstStyle/>
+          <a:p>
+            <a:pPr algn="ctr"/>
+          </a:p>
+        </p:txBody>
+      </p:sp>
+      <p:sp>
+        <p:nvSpPr>
+          <p:cNvPr id="8" name="Rectangle 7"/>
+          <p:cNvSpPr/>
+          <p:nvPr/>
+        </p:nvSpPr>
+        <p:spPr>
+          <a:xfrm>
+            <a:off x="457200" y="1655064"/>
+            <a:ext cx="3624986" cy="27432"/>
+          </a:xfrm>
+          <a:prstGeom prst="rect">
+            <a:avLst/>
+          </a:prstGeom>
+          <a:solidFill>
+            <a:srgbClr val="FFD000"/>
+          </a:solidFill>
+          <a:ln>
+            <a:noFill/>
+          </a:ln>
+        </p:spPr>
+        <p:style>
+          <a:lnRef idx="1">
+            <a:schemeClr val="accent1"/>
+          </a:lnRef>
+          <a:fillRef idx="3">
+            <a:schemeClr val="accent1"/>
+          </a:fillRef>
+          <a:effectRef idx="2">
+            <a:schemeClr val="accent1"/>
+          </a:effectRef>
+          <a:fontRef idx="minor">
+            <a:schemeClr val="lt1"/>
+          </a:fontRef>
+        </p:style>
+        <p:txBody>
+          <a:bodyPr rtlCol="0" anchor="ctr"/>
+          <a:lstStyle/>
+          <a:p>
+            <a:pPr algn="ctr"/>
+          </a:p>
+        </p:txBody>
+      </p:sp>
+      <p:pic>
+        <p:nvPicPr>
+          <p:cNvPr id="9" name="Picture 8" descr="google_docs.png"/>
+          <p:cNvPicPr>
+            <a:picLocks noChangeAspect="1"/>
+          </p:cNvPicPr>
+          <p:nvPr/>
+        </p:nvPicPr>
+        <p:blipFill>
+          <a:blip r:embed="rId2"/>
+          <a:stretch>
+            <a:fillRect/>
+          </a:stretch>
+        </p:blipFill>
+        <p:spPr>
+          <a:xfrm>
+            <a:off x="1659331" y="1847087"/>
+            <a:ext cx="1220724" cy="1220724"/>
+          </a:xfrm>
+          <a:prstGeom prst="rect">
+            <a:avLst/>
+          </a:prstGeom>
+        </p:spPr>
+      </p:pic>
+      <p:sp>
+        <p:nvSpPr>
+          <p:cNvPr id="10" name="TextBox 9"/>
+          <p:cNvSpPr txBox="1"/>
+          <p:nvPr/>
+        </p:nvSpPr>
+        <p:spPr>
+          <a:xfrm>
+            <a:off x="530352" y="3159251"/>
+            <a:ext cx="3478682" cy="621792"/>
+          </a:xfrm>
+          <a:prstGeom prst="rect">
+            <a:avLst/>
+          </a:prstGeom>
+          <a:noFill/>
+        </p:spPr>
+        <p:txBody>
+          <a:bodyPr wrap="square" anchor="t"/>
+          <a:lstStyle/>
+          <a:p>
+            <a:pPr algn="ctr"/>
+            <a:r>
+              <a:rPr sz="1300" b="1" i="0">
+                <a:solidFill>
+                  <a:srgbClr val="095292"/>
+                </a:solidFill>
+                <a:latin typeface="Calibri"/>
+              </a:rPr>
+              <a:t>Google Docs</a:t>
+            </a:r>
+          </a:p>
+          <a:p>
+            <a:pPr algn="ctr">
+              <a:spcBef>
+                <a:spcPts val="200"/>
+              </a:spcBef>
             </a:pPr>
             <a:r>
-              <a:rPr sz="2000" b="0" i="0">
-                <a:solidFill>
-                  <a:srgbClr val="333333"/>
-                </a:solidFill>
-                <a:latin typeface="Calibri"/>
-              </a:rPr>
-              <a:t>–   </a:t>
-            </a:r>
-            <a:r>
-              <a:rPr sz="2000" b="1" i="0">
-                <a:solidFill>
-                  <a:srgbClr val="333333"/>
-                </a:solidFill>
-                <a:latin typeface="Calibri"/>
-              </a:rPr>
-              <a:t>Entregable:</a:t>
-            </a:r>
-            <a:r>
-              <a:rPr sz="2000" b="0" i="0">
-                <a:solidFill>
-                  <a:srgbClr val="333333"/>
-                </a:solidFill>
-                <a:latin typeface="Calibri"/>
-              </a:rPr>
-              <a:t> Paquete final en la plataforma del curso (módulo Proyectos) + pitch de 5–8 min sustentado hoy en clase + Q&amp;A</a:t>
-            </a:r>
-          </a:p>
-          <a:p>
-            <a:pPr>
-              <a:spcAft>
-                <a:spcPts val="800"/>
-              </a:spcAft>
+              <a:rPr sz="1000" b="0" i="0">
+                <a:solidFill>
+                  <a:srgbClr val="666666"/>
+                </a:solidFill>
+                <a:latin typeface="Calibri"/>
+              </a:rPr>
+              <a:t>Pitch y portafolio</a:t>
+            </a:r>
+          </a:p>
+        </p:txBody>
+      </p:sp>
+      <p:sp>
+        <p:nvSpPr>
+          <p:cNvPr id="11" name="Rounded Rectangle 10"/>
+          <p:cNvSpPr/>
+          <p:nvPr/>
+        </p:nvSpPr>
+        <p:spPr>
+          <a:xfrm>
+            <a:off x="4283354" y="1591056"/>
+            <a:ext cx="3624986" cy="2299716"/>
+          </a:xfrm>
+          <a:prstGeom prst="roundRect">
+            <a:avLst>
+              <a:gd name="adj" fmla="val 12000"/>
+            </a:avLst>
+          </a:prstGeom>
+          <a:solidFill>
+            <a:srgbClr val="F2F2F2"/>
+          </a:solidFill>
+          <a:ln>
+            <a:noFill/>
+          </a:ln>
+        </p:spPr>
+        <p:style>
+          <a:lnRef idx="1">
+            <a:schemeClr val="accent1"/>
+          </a:lnRef>
+          <a:fillRef idx="3">
+            <a:schemeClr val="accent1"/>
+          </a:fillRef>
+          <a:effectRef idx="2">
+            <a:schemeClr val="accent1"/>
+          </a:effectRef>
+          <a:fontRef idx="minor">
+            <a:schemeClr val="lt1"/>
+          </a:fontRef>
+        </p:style>
+        <p:txBody>
+          <a:bodyPr rtlCol="0" anchor="ctr"/>
+          <a:lstStyle/>
+          <a:p>
+            <a:pPr algn="ctr"/>
+          </a:p>
+        </p:txBody>
+      </p:sp>
+      <p:sp>
+        <p:nvSpPr>
+          <p:cNvPr id="12" name="Rectangle 11"/>
+          <p:cNvSpPr/>
+          <p:nvPr/>
+        </p:nvSpPr>
+        <p:spPr>
+          <a:xfrm>
+            <a:off x="4283354" y="1591056"/>
+            <a:ext cx="3624986" cy="64008"/>
+          </a:xfrm>
+          <a:prstGeom prst="rect">
+            <a:avLst/>
+          </a:prstGeom>
+          <a:solidFill>
+            <a:srgbClr val="095292"/>
+          </a:solidFill>
+          <a:ln>
+            <a:noFill/>
+          </a:ln>
+        </p:spPr>
+        <p:style>
+          <a:lnRef idx="1">
+            <a:schemeClr val="accent1"/>
+          </a:lnRef>
+          <a:fillRef idx="3">
+            <a:schemeClr val="accent1"/>
+          </a:fillRef>
+          <a:effectRef idx="2">
+            <a:schemeClr val="accent1"/>
+          </a:effectRef>
+          <a:fontRef idx="minor">
+            <a:schemeClr val="lt1"/>
+          </a:fontRef>
+        </p:style>
+        <p:txBody>
+          <a:bodyPr rtlCol="0" anchor="ctr"/>
+          <a:lstStyle/>
+          <a:p>
+            <a:pPr algn="ctr"/>
+          </a:p>
+        </p:txBody>
+      </p:sp>
+      <p:sp>
+        <p:nvSpPr>
+          <p:cNvPr id="13" name="Rectangle 12"/>
+          <p:cNvSpPr/>
+          <p:nvPr/>
+        </p:nvSpPr>
+        <p:spPr>
+          <a:xfrm>
+            <a:off x="4283354" y="1655064"/>
+            <a:ext cx="3624986" cy="27432"/>
+          </a:xfrm>
+          <a:prstGeom prst="rect">
+            <a:avLst/>
+          </a:prstGeom>
+          <a:solidFill>
+            <a:srgbClr val="FFD000"/>
+          </a:solidFill>
+          <a:ln>
+            <a:noFill/>
+          </a:ln>
+        </p:spPr>
+        <p:style>
+          <a:lnRef idx="1">
+            <a:schemeClr val="accent1"/>
+          </a:lnRef>
+          <a:fillRef idx="3">
+            <a:schemeClr val="accent1"/>
+          </a:fillRef>
+          <a:effectRef idx="2">
+            <a:schemeClr val="accent1"/>
+          </a:effectRef>
+          <a:fontRef idx="minor">
+            <a:schemeClr val="lt1"/>
+          </a:fontRef>
+        </p:style>
+        <p:txBody>
+          <a:bodyPr rtlCol="0" anchor="ctr"/>
+          <a:lstStyle/>
+          <a:p>
+            <a:pPr algn="ctr"/>
+          </a:p>
+        </p:txBody>
+      </p:sp>
+      <p:pic>
+        <p:nvPicPr>
+          <p:cNvPr id="14" name="Picture 13" descr="drawio.png"/>
+          <p:cNvPicPr>
+            <a:picLocks noChangeAspect="1"/>
+          </p:cNvPicPr>
+          <p:nvPr/>
+        </p:nvPicPr>
+        <p:blipFill>
+          <a:blip r:embed="rId3"/>
+          <a:stretch>
+            <a:fillRect/>
+          </a:stretch>
+        </p:blipFill>
+        <p:spPr>
+          <a:xfrm>
+            <a:off x="5485485" y="1847087"/>
+            <a:ext cx="1220724" cy="1220724"/>
+          </a:xfrm>
+          <a:prstGeom prst="rect">
+            <a:avLst/>
+          </a:prstGeom>
+        </p:spPr>
+      </p:pic>
+      <p:sp>
+        <p:nvSpPr>
+          <p:cNvPr id="15" name="TextBox 14"/>
+          <p:cNvSpPr txBox="1"/>
+          <p:nvPr/>
+        </p:nvSpPr>
+        <p:spPr>
+          <a:xfrm>
+            <a:off x="4356506" y="3159251"/>
+            <a:ext cx="3478682" cy="621792"/>
+          </a:xfrm>
+          <a:prstGeom prst="rect">
+            <a:avLst/>
+          </a:prstGeom>
+          <a:noFill/>
+        </p:spPr>
+        <p:txBody>
+          <a:bodyPr wrap="square" anchor="t"/>
+          <a:lstStyle/>
+          <a:p>
+            <a:pPr algn="ctr"/>
+            <a:r>
+              <a:rPr sz="1300" b="1" i="0">
+                <a:solidFill>
+                  <a:srgbClr val="095292"/>
+                </a:solidFill>
+                <a:latin typeface="Calibri"/>
+              </a:rPr>
+              <a:t>draw.io</a:t>
+            </a:r>
+          </a:p>
+          <a:p>
+            <a:pPr algn="ctr">
+              <a:spcBef>
+                <a:spcPts val="200"/>
+              </a:spcBef>
             </a:pPr>
             <a:r>
-              <a:rPr sz="2000" b="0" i="0">
-                <a:solidFill>
-                  <a:srgbClr val="333333"/>
-                </a:solidFill>
-                <a:latin typeface="Calibri"/>
-              </a:rPr>
-              <a:t>–   Herramienta: </a:t>
-            </a:r>
-            <a:r>
-              <a:rPr sz="2000" b="1" i="0">
-                <a:solidFill>
-                  <a:srgbClr val="333333"/>
-                </a:solidFill>
-                <a:latin typeface="Calibri"/>
-              </a:rPr>
-              <a:t>Google Docs/Slides · diagramas · capturas lab</a:t>
-            </a:r>
-          </a:p>
-          <a:p>
-            <a:pPr>
-              <a:spcAft>
-                <a:spcPts val="800"/>
-              </a:spcAft>
+              <a:rPr sz="1000" b="0" i="0">
+                <a:solidFill>
+                  <a:srgbClr val="666666"/>
+                </a:solidFill>
+                <a:latin typeface="Calibri"/>
+              </a:rPr>
+              <a:t>Diagramas del paquete</a:t>
+            </a:r>
+          </a:p>
+        </p:txBody>
+      </p:sp>
+      <p:sp>
+        <p:nvSpPr>
+          <p:cNvPr id="16" name="Rounded Rectangle 15"/>
+          <p:cNvSpPr/>
+          <p:nvPr/>
+        </p:nvSpPr>
+        <p:spPr>
+          <a:xfrm>
+            <a:off x="8109508" y="1591056"/>
+            <a:ext cx="3624986" cy="2299716"/>
+          </a:xfrm>
+          <a:prstGeom prst="roundRect">
+            <a:avLst>
+              <a:gd name="adj" fmla="val 12000"/>
+            </a:avLst>
+          </a:prstGeom>
+          <a:solidFill>
+            <a:srgbClr val="F2F2F2"/>
+          </a:solidFill>
+          <a:ln>
+            <a:noFill/>
+          </a:ln>
+        </p:spPr>
+        <p:style>
+          <a:lnRef idx="1">
+            <a:schemeClr val="accent1"/>
+          </a:lnRef>
+          <a:fillRef idx="3">
+            <a:schemeClr val="accent1"/>
+          </a:fillRef>
+          <a:effectRef idx="2">
+            <a:schemeClr val="accent1"/>
+          </a:effectRef>
+          <a:fontRef idx="minor">
+            <a:schemeClr val="lt1"/>
+          </a:fontRef>
+        </p:style>
+        <p:txBody>
+          <a:bodyPr rtlCol="0" anchor="ctr"/>
+          <a:lstStyle/>
+          <a:p>
+            <a:pPr algn="ctr"/>
+          </a:p>
+        </p:txBody>
+      </p:sp>
+      <p:sp>
+        <p:nvSpPr>
+          <p:cNvPr id="17" name="Rectangle 16"/>
+          <p:cNvSpPr/>
+          <p:nvPr/>
+        </p:nvSpPr>
+        <p:spPr>
+          <a:xfrm>
+            <a:off x="8109508" y="1591056"/>
+            <a:ext cx="3624986" cy="64008"/>
+          </a:xfrm>
+          <a:prstGeom prst="rect">
+            <a:avLst/>
+          </a:prstGeom>
+          <a:solidFill>
+            <a:srgbClr val="095292"/>
+          </a:solidFill>
+          <a:ln>
+            <a:noFill/>
+          </a:ln>
+        </p:spPr>
+        <p:style>
+          <a:lnRef idx="1">
+            <a:schemeClr val="accent1"/>
+          </a:lnRef>
+          <a:fillRef idx="3">
+            <a:schemeClr val="accent1"/>
+          </a:fillRef>
+          <a:effectRef idx="2">
+            <a:schemeClr val="accent1"/>
+          </a:effectRef>
+          <a:fontRef idx="minor">
+            <a:schemeClr val="lt1"/>
+          </a:fontRef>
+        </p:style>
+        <p:txBody>
+          <a:bodyPr rtlCol="0" anchor="ctr"/>
+          <a:lstStyle/>
+          <a:p>
+            <a:pPr algn="ctr"/>
+          </a:p>
+        </p:txBody>
+      </p:sp>
+      <p:sp>
+        <p:nvSpPr>
+          <p:cNvPr id="18" name="Rectangle 17"/>
+          <p:cNvSpPr/>
+          <p:nvPr/>
+        </p:nvSpPr>
+        <p:spPr>
+          <a:xfrm>
+            <a:off x="8109508" y="1655064"/>
+            <a:ext cx="3624986" cy="27432"/>
+          </a:xfrm>
+          <a:prstGeom prst="rect">
+            <a:avLst/>
+          </a:prstGeom>
+          <a:solidFill>
+            <a:srgbClr val="FFD000"/>
+          </a:solidFill>
+          <a:ln>
+            <a:noFill/>
+          </a:ln>
+        </p:spPr>
+        <p:style>
+          <a:lnRef idx="1">
+            <a:schemeClr val="accent1"/>
+          </a:lnRef>
+          <a:fillRef idx="3">
+            <a:schemeClr val="accent1"/>
+          </a:fillRef>
+          <a:effectRef idx="2">
+            <a:schemeClr val="accent1"/>
+          </a:effectRef>
+          <a:fontRef idx="minor">
+            <a:schemeClr val="lt1"/>
+          </a:fontRef>
+        </p:style>
+        <p:txBody>
+          <a:bodyPr rtlCol="0" anchor="ctr"/>
+          <a:lstStyle/>
+          <a:p>
+            <a:pPr algn="ctr"/>
+          </a:p>
+        </p:txBody>
+      </p:sp>
+      <p:pic>
+        <p:nvPicPr>
+          <p:cNvPr id="19" name="Picture 18" descr="mermaid.png"/>
+          <p:cNvPicPr>
+            <a:picLocks noChangeAspect="1"/>
+          </p:cNvPicPr>
+          <p:nvPr/>
+        </p:nvPicPr>
+        <p:blipFill>
+          <a:blip r:embed="rId4"/>
+          <a:stretch>
+            <a:fillRect/>
+          </a:stretch>
+        </p:blipFill>
+        <p:spPr>
+          <a:xfrm>
+            <a:off x="9311640" y="1847087"/>
+            <a:ext cx="1220724" cy="1220724"/>
+          </a:xfrm>
+          <a:prstGeom prst="rect">
+            <a:avLst/>
+          </a:prstGeom>
+        </p:spPr>
+      </p:pic>
+      <p:sp>
+        <p:nvSpPr>
+          <p:cNvPr id="20" name="TextBox 19"/>
+          <p:cNvSpPr txBox="1"/>
+          <p:nvPr/>
+        </p:nvSpPr>
+        <p:spPr>
+          <a:xfrm>
+            <a:off x="8182660" y="3159251"/>
+            <a:ext cx="3478682" cy="621792"/>
+          </a:xfrm>
+          <a:prstGeom prst="rect">
+            <a:avLst/>
+          </a:prstGeom>
+          <a:noFill/>
+        </p:spPr>
+        <p:txBody>
+          <a:bodyPr wrap="square" anchor="t"/>
+          <a:lstStyle/>
+          <a:p>
+            <a:pPr algn="ctr"/>
+            <a:r>
+              <a:rPr sz="1300" b="1" i="0">
+                <a:solidFill>
+                  <a:srgbClr val="095292"/>
+                </a:solidFill>
+                <a:latin typeface="Calibri"/>
+              </a:rPr>
+              <a:t>Mermaid</a:t>
+            </a:r>
+          </a:p>
+          <a:p>
+            <a:pPr algn="ctr">
+              <a:spcBef>
+                <a:spcPts val="200"/>
+              </a:spcBef>
             </a:pPr>
             <a:r>
-              <a:rPr sz="2000" b="0" i="0">
-                <a:solidFill>
-                  <a:srgbClr val="333333"/>
-                </a:solidFill>
-                <a:latin typeface="Calibri"/>
-              </a:rPr>
-              <a:t>–   Hoy no se construye: se </a:t>
-            </a:r>
-            <a:r>
-              <a:rPr sz="2000" b="1" i="0">
-                <a:solidFill>
-                  <a:srgbClr val="333333"/>
-                </a:solidFill>
-                <a:latin typeface="Calibri"/>
-              </a:rPr>
-              <a:t>defiende</a:t>
-            </a:r>
-            <a:r>
-              <a:rPr sz="2000" b="0" i="0">
-                <a:solidFill>
-                  <a:srgbClr val="333333"/>
-                </a:solidFill>
-                <a:latin typeface="Calibri"/>
-              </a:rPr>
-              <a:t> lo que ya está en el paquete del PI.</a:t>
-            </a:r>
-          </a:p>
-          <a:p>
-            <a:pPr>
-              <a:spcAft>
-                <a:spcPts val="800"/>
-              </a:spcAft>
+              <a:rPr sz="1000" b="0" i="0">
+                <a:solidFill>
+                  <a:srgbClr val="666666"/>
+                </a:solidFill>
+                <a:latin typeface="Calibri"/>
+              </a:rPr>
+              <a:t>Codigo del diagrama</a:t>
+            </a:r>
+          </a:p>
+        </p:txBody>
+      </p:sp>
+      <p:sp>
+        <p:nvSpPr>
+          <p:cNvPr id="21" name="Rounded Rectangle 20"/>
+          <p:cNvSpPr/>
+          <p:nvPr/>
+        </p:nvSpPr>
+        <p:spPr>
+          <a:xfrm>
+            <a:off x="4283354" y="4055364"/>
+            <a:ext cx="3624986" cy="2299716"/>
+          </a:xfrm>
+          <a:prstGeom prst="roundRect">
+            <a:avLst>
+              <a:gd name="adj" fmla="val 12000"/>
+            </a:avLst>
+          </a:prstGeom>
+          <a:solidFill>
+            <a:srgbClr val="F2F2F2"/>
+          </a:solidFill>
+          <a:ln>
+            <a:noFill/>
+          </a:ln>
+        </p:spPr>
+        <p:style>
+          <a:lnRef idx="1">
+            <a:schemeClr val="accent1"/>
+          </a:lnRef>
+          <a:fillRef idx="3">
+            <a:schemeClr val="accent1"/>
+          </a:fillRef>
+          <a:effectRef idx="2">
+            <a:schemeClr val="accent1"/>
+          </a:effectRef>
+          <a:fontRef idx="minor">
+            <a:schemeClr val="lt1"/>
+          </a:fontRef>
+        </p:style>
+        <p:txBody>
+          <a:bodyPr rtlCol="0" anchor="ctr"/>
+          <a:lstStyle/>
+          <a:p>
+            <a:pPr algn="ctr"/>
+          </a:p>
+        </p:txBody>
+      </p:sp>
+      <p:sp>
+        <p:nvSpPr>
+          <p:cNvPr id="22" name="Rectangle 21"/>
+          <p:cNvSpPr/>
+          <p:nvPr/>
+        </p:nvSpPr>
+        <p:spPr>
+          <a:xfrm>
+            <a:off x="4283354" y="4055364"/>
+            <a:ext cx="3624986" cy="64008"/>
+          </a:xfrm>
+          <a:prstGeom prst="rect">
+            <a:avLst/>
+          </a:prstGeom>
+          <a:solidFill>
+            <a:srgbClr val="095292"/>
+          </a:solidFill>
+          <a:ln>
+            <a:noFill/>
+          </a:ln>
+        </p:spPr>
+        <p:style>
+          <a:lnRef idx="1">
+            <a:schemeClr val="accent1"/>
+          </a:lnRef>
+          <a:fillRef idx="3">
+            <a:schemeClr val="accent1"/>
+          </a:fillRef>
+          <a:effectRef idx="2">
+            <a:schemeClr val="accent1"/>
+          </a:effectRef>
+          <a:fontRef idx="minor">
+            <a:schemeClr val="lt1"/>
+          </a:fontRef>
+        </p:style>
+        <p:txBody>
+          <a:bodyPr rtlCol="0" anchor="ctr"/>
+          <a:lstStyle/>
+          <a:p>
+            <a:pPr algn="ctr"/>
+          </a:p>
+        </p:txBody>
+      </p:sp>
+      <p:sp>
+        <p:nvSpPr>
+          <p:cNvPr id="23" name="Rectangle 22"/>
+          <p:cNvSpPr/>
+          <p:nvPr/>
+        </p:nvSpPr>
+        <p:spPr>
+          <a:xfrm>
+            <a:off x="4283354" y="4119372"/>
+            <a:ext cx="3624986" cy="27432"/>
+          </a:xfrm>
+          <a:prstGeom prst="rect">
+            <a:avLst/>
+          </a:prstGeom>
+          <a:solidFill>
+            <a:srgbClr val="FFD000"/>
+          </a:solidFill>
+          <a:ln>
+            <a:noFill/>
+          </a:ln>
+        </p:spPr>
+        <p:style>
+          <a:lnRef idx="1">
+            <a:schemeClr val="accent1"/>
+          </a:lnRef>
+          <a:fillRef idx="3">
+            <a:schemeClr val="accent1"/>
+          </a:fillRef>
+          <a:effectRef idx="2">
+            <a:schemeClr val="accent1"/>
+          </a:effectRef>
+          <a:fontRef idx="minor">
+            <a:schemeClr val="lt1"/>
+          </a:fontRef>
+        </p:style>
+        <p:txBody>
+          <a:bodyPr rtlCol="0" anchor="ctr"/>
+          <a:lstStyle/>
+          <a:p>
+            <a:pPr algn="ctr"/>
+          </a:p>
+        </p:txBody>
+      </p:sp>
+      <p:pic>
+        <p:nvPicPr>
+          <p:cNvPr id="24" name="Picture 23" descr="examlab.png"/>
+          <p:cNvPicPr>
+            <a:picLocks noChangeAspect="1"/>
+          </p:cNvPicPr>
+          <p:nvPr/>
+        </p:nvPicPr>
+        <p:blipFill>
+          <a:blip r:embed="rId5"/>
+          <a:stretch>
+            <a:fillRect/>
+          </a:stretch>
+        </p:blipFill>
+        <p:spPr>
+          <a:xfrm>
+            <a:off x="5485485" y="4311396"/>
+            <a:ext cx="1220724" cy="1220724"/>
+          </a:xfrm>
+          <a:prstGeom prst="rect">
+            <a:avLst/>
+          </a:prstGeom>
+        </p:spPr>
+      </p:pic>
+      <p:sp>
+        <p:nvSpPr>
+          <p:cNvPr id="25" name="TextBox 24"/>
+          <p:cNvSpPr txBox="1"/>
+          <p:nvPr/>
+        </p:nvSpPr>
+        <p:spPr>
+          <a:xfrm>
+            <a:off x="4356506" y="5623560"/>
+            <a:ext cx="3478682" cy="621792"/>
+          </a:xfrm>
+          <a:prstGeom prst="rect">
+            <a:avLst/>
+          </a:prstGeom>
+          <a:noFill/>
+        </p:spPr>
+        <p:txBody>
+          <a:bodyPr wrap="square" anchor="t"/>
+          <a:lstStyle/>
+          <a:p>
+            <a:pPr algn="ctr"/>
+            <a:r>
+              <a:rPr sz="1300" b="1" i="0">
+                <a:solidFill>
+                  <a:srgbClr val="095292"/>
+                </a:solidFill>
+                <a:latin typeface="Calibri"/>
+              </a:rPr>
+              <a:t>la plataforma del curso</a:t>
+            </a:r>
+          </a:p>
+          <a:p>
+            <a:pPr algn="ctr">
+              <a:spcBef>
+                <a:spcPts val="200"/>
+              </a:spcBef>
             </a:pPr>
             <a:r>
-              <a:rPr sz="2000" b="0" i="0">
-                <a:solidFill>
-                  <a:srgbClr val="333333"/>
-                </a:solidFill>
-                <a:latin typeface="Calibri"/>
-              </a:rPr>
-              <a:t>–   Individual por defecto · el docente puede autorizar equipos de 2–3; la entrega en la plataforma del curso siempre es individual.</a:t>
-            </a:r>
-          </a:p>
-        </p:txBody>
-      </p:sp>
-      <p:sp>
-        <p:nvSpPr>
-          <p:cNvPr id="6" name="TextBox 5"/>
+              <a:rPr sz="1000" b="0" i="0">
+                <a:solidFill>
+                  <a:srgbClr val="666666"/>
+                </a:solidFill>
+                <a:latin typeface="Calibri"/>
+              </a:rPr>
+              <a:t>Donde se entrega</a:t>
+            </a:r>
+          </a:p>
+        </p:txBody>
+      </p:sp>
+      <p:sp>
+        <p:nvSpPr>
+          <p:cNvPr id="26" name="TextBox 25"/>
           <p:cNvSpPr txBox="1"/>
           <p:nvPr/>
         </p:nvSpPr>
@@ -9358,7 +8444,7 @@
         <p:spPr>
           <a:xfrm>
             <a:off x="0" y="0"/>
-            <a:ext cx="12191695" cy="960120"/>
+            <a:ext cx="12191695" cy="1170432"/>
           </a:xfrm>
           <a:prstGeom prst="rect">
             <a:avLst/>
@@ -9400,7 +8486,7 @@
         </p:nvSpPr>
         <p:spPr>
           <a:xfrm>
-            <a:off x="0" y="960120"/>
+            <a:off x="0" y="1170432"/>
             <a:ext cx="12191695" cy="41148"/>
           </a:xfrm>
           <a:prstGeom prst="rect">
@@ -9444,7 +8530,7 @@
         <p:spPr>
           <a:xfrm>
             <a:off x="457200" y="164592"/>
-            <a:ext cx="11277295" cy="502920"/>
+            <a:ext cx="11277295" cy="384048"/>
           </a:xfrm>
           <a:prstGeom prst="rect">
             <a:avLst/>
@@ -9464,7 +8550,7 @@
                 </a:solidFill>
                 <a:latin typeface="Calibri"/>
               </a:rPr>
-              <a:t>Sustentación (paso a paso)</a:t>
+              <a:t>Del boceto a la plataforma del curso (diagrama)</a:t>
             </a:r>
           </a:p>
         </p:txBody>
@@ -9477,8 +8563,8 @@
         </p:nvSpPr>
         <p:spPr>
           <a:xfrm>
-            <a:off x="457200" y="1170432"/>
-            <a:ext cx="11277295" cy="5230368"/>
+            <a:off x="457200" y="566928"/>
+            <a:ext cx="11277295" cy="411480"/>
           </a:xfrm>
           <a:prstGeom prst="rect">
             <a:avLst/>
@@ -9491,171 +8577,705 @@
           </a:bodyPr>
           <a:lstStyle/>
           <a:p>
+            <a:r>
+              <a:rPr sz="1400" b="0" i="0">
+                <a:solidFill>
+                  <a:srgbClr val="B8D8EE"/>
+                </a:solidFill>
+                <a:latin typeface="Calibri"/>
+              </a:rPr>
+              <a:t>El diagrama se entrega como código Mermaid dentro de la plataforma del curso, no como imagen</a:t>
+            </a:r>
+          </a:p>
+        </p:txBody>
+      </p:sp>
+      <p:sp>
+        <p:nvSpPr>
+          <p:cNvPr id="6" name="Rounded Rectangle 5"/>
+          <p:cNvSpPr/>
+          <p:nvPr/>
+        </p:nvSpPr>
+        <p:spPr>
+          <a:xfrm>
+            <a:off x="457200" y="1659636"/>
+            <a:ext cx="11277295" cy="1051560"/>
+          </a:xfrm>
+          <a:prstGeom prst="roundRect">
+            <a:avLst>
+              <a:gd name="adj" fmla="val 12000"/>
+            </a:avLst>
+          </a:prstGeom>
+          <a:solidFill>
+            <a:srgbClr val="F2F2F2"/>
+          </a:solidFill>
+          <a:ln>
+            <a:noFill/>
+          </a:ln>
+        </p:spPr>
+        <p:style>
+          <a:lnRef idx="1">
+            <a:schemeClr val="accent1"/>
+          </a:lnRef>
+          <a:fillRef idx="3">
+            <a:schemeClr val="accent1"/>
+          </a:fillRef>
+          <a:effectRef idx="2">
+            <a:schemeClr val="accent1"/>
+          </a:effectRef>
+          <a:fontRef idx="minor">
+            <a:schemeClr val="lt1"/>
+          </a:fontRef>
+        </p:style>
+        <p:txBody>
+          <a:bodyPr rtlCol="0" anchor="ctr"/>
+          <a:lstStyle/>
+          <a:p>
+            <a:pPr algn="ctr"/>
+          </a:p>
+        </p:txBody>
+      </p:sp>
+      <p:sp>
+        <p:nvSpPr>
+          <p:cNvPr id="7" name="Rounded Rectangle 6"/>
+          <p:cNvSpPr/>
+          <p:nvPr/>
+        </p:nvSpPr>
+        <p:spPr>
+          <a:xfrm>
+            <a:off x="594360" y="1965960"/>
+            <a:ext cx="438912" cy="438912"/>
+          </a:xfrm>
+          <a:prstGeom prst="roundRect">
+            <a:avLst>
+              <a:gd name="adj" fmla="val 12000"/>
+            </a:avLst>
+          </a:prstGeom>
+          <a:solidFill>
+            <a:srgbClr val="095292"/>
+          </a:solidFill>
+          <a:ln>
+            <a:noFill/>
+          </a:ln>
+        </p:spPr>
+        <p:style>
+          <a:lnRef idx="1">
+            <a:schemeClr val="accent1"/>
+          </a:lnRef>
+          <a:fillRef idx="3">
+            <a:schemeClr val="accent1"/>
+          </a:fillRef>
+          <a:effectRef idx="2">
+            <a:schemeClr val="accent1"/>
+          </a:effectRef>
+          <a:fontRef idx="minor">
+            <a:schemeClr val="lt1"/>
+          </a:fontRef>
+        </p:style>
+        <p:txBody>
+          <a:bodyPr rtlCol="0" anchor="ctr"/>
+          <a:lstStyle/>
+          <a:p>
+            <a:pPr algn="ctr"/>
+          </a:p>
+        </p:txBody>
+      </p:sp>
+      <p:sp>
+        <p:nvSpPr>
+          <p:cNvPr id="8" name="TextBox 7"/>
+          <p:cNvSpPr txBox="1"/>
+          <p:nvPr/>
+        </p:nvSpPr>
+        <p:spPr>
+          <a:xfrm>
+            <a:off x="594360" y="1965960"/>
+            <a:ext cx="438912" cy="438912"/>
+          </a:xfrm>
+          <a:prstGeom prst="rect">
+            <a:avLst/>
+          </a:prstGeom>
+          <a:noFill/>
+        </p:spPr>
+        <p:txBody>
+          <a:bodyPr wrap="square" anchor="ctr"/>
+          <a:lstStyle/>
+          <a:p>
+            <a:pPr algn="ctr"/>
+            <a:r>
+              <a:rPr sz="1600" b="1" i="0">
+                <a:solidFill>
+                  <a:srgbClr val="FFFFFF"/>
+                </a:solidFill>
+                <a:latin typeface="Calibri"/>
+              </a:rPr>
+              <a:t>1</a:t>
+            </a:r>
+          </a:p>
+        </p:txBody>
+      </p:sp>
+      <p:sp>
+        <p:nvSpPr>
+          <p:cNvPr id="9" name="TextBox 8"/>
+          <p:cNvSpPr txBox="1"/>
+          <p:nvPr/>
+        </p:nvSpPr>
+        <p:spPr>
+          <a:xfrm>
+            <a:off x="1188720" y="1751076"/>
+            <a:ext cx="10271455" cy="886968"/>
+          </a:xfrm>
+          <a:prstGeom prst="rect">
+            <a:avLst/>
+          </a:prstGeom>
+          <a:noFill/>
+        </p:spPr>
+        <p:txBody>
+          <a:bodyPr wrap="square" anchor="ctr"/>
+          <a:lstStyle/>
+          <a:p>
+            <a:r>
+              <a:rPr sz="1500" b="1" i="0">
+                <a:solidFill>
+                  <a:srgbClr val="095292"/>
+                </a:solidFill>
+                <a:latin typeface="Calibri"/>
+              </a:rPr>
+              <a:t>Disena visual</a:t>
+            </a:r>
+          </a:p>
+          <a:p>
             <a:pPr>
-              <a:spcAft>
-                <a:spcPts val="800"/>
-              </a:spcAft>
+              <a:spcBef>
+                <a:spcPts val="200"/>
+              </a:spcBef>
             </a:pPr>
             <a:r>
-              <a:rPr sz="1700" b="1" i="0">
-                <a:solidFill>
-                  <a:srgbClr val="333333"/>
-                </a:solidFill>
-                <a:latin typeface="Calibri"/>
-              </a:rPr>
-              <a:t>1.</a:t>
-            </a:r>
-            <a:r>
-              <a:rPr sz="1700" b="0" i="0">
-                <a:solidFill>
-                  <a:srgbClr val="333333"/>
-                </a:solidFill>
-                <a:latin typeface="Calibri"/>
-              </a:rPr>
-              <a:t> Paso 1: armen el paquete final y llenen el indice de 8 filas con entregable, nombre de archivo, ruta dentro del paquete y estado, verificando que los 8 archivos abran desde una maquina distinta a la del autor y que ningun nombre de archivo tenga espacios ni tildes que rompan la descarga.</a:t>
+              <a:rPr sz="1300" b="0" i="0">
+                <a:solidFill>
+                  <a:srgbClr val="333333"/>
+                </a:solidFill>
+                <a:latin typeface="Calibri"/>
+              </a:rPr>
+              <a:t>Dibuja el diagrama como quieras en Excalidraw o draw.io: es mas rapido arrastrar cajas que escribir codigo, y ahi es donde piensas el modelo.</a:t>
+            </a:r>
+          </a:p>
+        </p:txBody>
+      </p:sp>
+      <p:sp>
+        <p:nvSpPr>
+          <p:cNvPr id="10" name="Rounded Rectangle 9"/>
+          <p:cNvSpPr/>
+          <p:nvPr/>
+        </p:nvSpPr>
+        <p:spPr>
+          <a:xfrm>
+            <a:off x="457200" y="2802636"/>
+            <a:ext cx="11277295" cy="1051560"/>
+          </a:xfrm>
+          <a:prstGeom prst="roundRect">
+            <a:avLst>
+              <a:gd name="adj" fmla="val 12000"/>
+            </a:avLst>
+          </a:prstGeom>
+          <a:solidFill>
+            <a:srgbClr val="E8F4FA"/>
+          </a:solidFill>
+          <a:ln>
+            <a:noFill/>
+          </a:ln>
+        </p:spPr>
+        <p:style>
+          <a:lnRef idx="1">
+            <a:schemeClr val="accent1"/>
+          </a:lnRef>
+          <a:fillRef idx="3">
+            <a:schemeClr val="accent1"/>
+          </a:fillRef>
+          <a:effectRef idx="2">
+            <a:schemeClr val="accent1"/>
+          </a:effectRef>
+          <a:fontRef idx="minor">
+            <a:schemeClr val="lt1"/>
+          </a:fontRef>
+        </p:style>
+        <p:txBody>
+          <a:bodyPr rtlCol="0" anchor="ctr"/>
+          <a:lstStyle/>
+          <a:p>
+            <a:pPr algn="ctr"/>
+          </a:p>
+        </p:txBody>
+      </p:sp>
+      <p:sp>
+        <p:nvSpPr>
+          <p:cNvPr id="11" name="Rounded Rectangle 10"/>
+          <p:cNvSpPr/>
+          <p:nvPr/>
+        </p:nvSpPr>
+        <p:spPr>
+          <a:xfrm>
+            <a:off x="594360" y="3108960"/>
+            <a:ext cx="438912" cy="438912"/>
+          </a:xfrm>
+          <a:prstGeom prst="roundRect">
+            <a:avLst>
+              <a:gd name="adj" fmla="val 12000"/>
+            </a:avLst>
+          </a:prstGeom>
+          <a:solidFill>
+            <a:srgbClr val="095292"/>
+          </a:solidFill>
+          <a:ln>
+            <a:noFill/>
+          </a:ln>
+        </p:spPr>
+        <p:style>
+          <a:lnRef idx="1">
+            <a:schemeClr val="accent1"/>
+          </a:lnRef>
+          <a:fillRef idx="3">
+            <a:schemeClr val="accent1"/>
+          </a:fillRef>
+          <a:effectRef idx="2">
+            <a:schemeClr val="accent1"/>
+          </a:effectRef>
+          <a:fontRef idx="minor">
+            <a:schemeClr val="lt1"/>
+          </a:fontRef>
+        </p:style>
+        <p:txBody>
+          <a:bodyPr rtlCol="0" anchor="ctr"/>
+          <a:lstStyle/>
+          <a:p>
+            <a:pPr algn="ctr"/>
+          </a:p>
+        </p:txBody>
+      </p:sp>
+      <p:sp>
+        <p:nvSpPr>
+          <p:cNvPr id="12" name="TextBox 11"/>
+          <p:cNvSpPr txBox="1"/>
+          <p:nvPr/>
+        </p:nvSpPr>
+        <p:spPr>
+          <a:xfrm>
+            <a:off x="594360" y="3108960"/>
+            <a:ext cx="438912" cy="438912"/>
+          </a:xfrm>
+          <a:prstGeom prst="rect">
+            <a:avLst/>
+          </a:prstGeom>
+          <a:noFill/>
+        </p:spPr>
+        <p:txBody>
+          <a:bodyPr wrap="square" anchor="ctr"/>
+          <a:lstStyle/>
+          <a:p>
+            <a:pPr algn="ctr"/>
+            <a:r>
+              <a:rPr sz="1600" b="1" i="0">
+                <a:solidFill>
+                  <a:srgbClr val="FFFFFF"/>
+                </a:solidFill>
+                <a:latin typeface="Calibri"/>
+              </a:rPr>
+              <a:t>2</a:t>
+            </a:r>
+          </a:p>
+        </p:txBody>
+      </p:sp>
+      <p:sp>
+        <p:nvSpPr>
+          <p:cNvPr id="13" name="TextBox 12"/>
+          <p:cNvSpPr txBox="1"/>
+          <p:nvPr/>
+        </p:nvSpPr>
+        <p:spPr>
+          <a:xfrm>
+            <a:off x="1188720" y="2894076"/>
+            <a:ext cx="10271455" cy="886968"/>
+          </a:xfrm>
+          <a:prstGeom prst="rect">
+            <a:avLst/>
+          </a:prstGeom>
+          <a:noFill/>
+        </p:spPr>
+        <p:txBody>
+          <a:bodyPr wrap="square" anchor="ctr"/>
+          <a:lstStyle/>
+          <a:p>
+            <a:r>
+              <a:rPr sz="1500" b="1" i="0">
+                <a:solidFill>
+                  <a:srgbClr val="095292"/>
+                </a:solidFill>
+                <a:latin typeface="Calibri"/>
+              </a:rPr>
+              <a:t>Traduce con IA</a:t>
             </a:r>
           </a:p>
           <a:p>
             <a:pPr>
-              <a:spcAft>
-                <a:spcPts val="800"/>
-              </a:spcAft>
+              <a:spcBef>
+                <a:spcPts val="200"/>
+              </a:spcBef>
             </a:pPr>
             <a:r>
-              <a:rPr sz="1700" b="0" i="0">
-                <a:solidFill>
-                  <a:srgbClr val="333333"/>
-                </a:solidFill>
-                <a:latin typeface="Calibri"/>
-              </a:rPr>
-              <a:t>–   </a:t>
-            </a:r>
-            <a:r>
-              <a:rPr sz="1700" b="1" i="0">
-                <a:solidFill>
-                  <a:srgbClr val="333333"/>
-                </a:solidFill>
-                <a:latin typeface="Calibri"/>
-              </a:rPr>
-              <a:t>2.</a:t>
-            </a:r>
-            <a:r>
-              <a:rPr sz="1700" b="0" i="0">
-                <a:solidFill>
-                  <a:srgbClr val="333333"/>
-                </a:solidFill>
-                <a:latin typeface="Calibri"/>
-              </a:rPr>
-              <a:t> Paso 2: escriban en la plataforma del curso la lamina unica de arquitectura en Mermaid con las 3 zonas, los 5 contenedores, el edge, la cadena de entrega y los sistemas externos, verificando al renderizar que sea legible en una sola pantalla sin desplazamiento y que use los mismos nombres canonicos del paquete, porque esta es la lamina que van a proyectar en la sustentacion.</a:t>
+              <a:rPr sz="1300" b="0" i="0">
+                <a:solidFill>
+                  <a:srgbClr val="333333"/>
+                </a:solidFill>
+                <a:latin typeface="Calibri"/>
+              </a:rPr>
+              <a:t>Copia o describe tu boceto a una IA y pidele el codigo Mermaid: «convierte este diagrama a Mermaid usando flowchart». Revisa el resultado: la IA acierta la sintaxis, no tu modelo.</a:t>
+            </a:r>
+          </a:p>
+        </p:txBody>
+      </p:sp>
+      <p:sp>
+        <p:nvSpPr>
+          <p:cNvPr id="14" name="Rounded Rectangle 13"/>
+          <p:cNvSpPr/>
+          <p:nvPr/>
+        </p:nvSpPr>
+        <p:spPr>
+          <a:xfrm>
+            <a:off x="457200" y="3945636"/>
+            <a:ext cx="11277295" cy="1051560"/>
+          </a:xfrm>
+          <a:prstGeom prst="roundRect">
+            <a:avLst>
+              <a:gd name="adj" fmla="val 12000"/>
+            </a:avLst>
+          </a:prstGeom>
+          <a:solidFill>
+            <a:srgbClr val="F2F2F2"/>
+          </a:solidFill>
+          <a:ln>
+            <a:noFill/>
+          </a:ln>
+        </p:spPr>
+        <p:style>
+          <a:lnRef idx="1">
+            <a:schemeClr val="accent1"/>
+          </a:lnRef>
+          <a:fillRef idx="3">
+            <a:schemeClr val="accent1"/>
+          </a:fillRef>
+          <a:effectRef idx="2">
+            <a:schemeClr val="accent1"/>
+          </a:effectRef>
+          <a:fontRef idx="minor">
+            <a:schemeClr val="lt1"/>
+          </a:fontRef>
+        </p:style>
+        <p:txBody>
+          <a:bodyPr rtlCol="0" anchor="ctr"/>
+          <a:lstStyle/>
+          <a:p>
+            <a:pPr algn="ctr"/>
+          </a:p>
+        </p:txBody>
+      </p:sp>
+      <p:sp>
+        <p:nvSpPr>
+          <p:cNvPr id="15" name="Rounded Rectangle 14"/>
+          <p:cNvSpPr/>
+          <p:nvPr/>
+        </p:nvSpPr>
+        <p:spPr>
+          <a:xfrm>
+            <a:off x="594360" y="4251960"/>
+            <a:ext cx="438912" cy="438912"/>
+          </a:xfrm>
+          <a:prstGeom prst="roundRect">
+            <a:avLst>
+              <a:gd name="adj" fmla="val 12000"/>
+            </a:avLst>
+          </a:prstGeom>
+          <a:solidFill>
+            <a:srgbClr val="095292"/>
+          </a:solidFill>
+          <a:ln>
+            <a:noFill/>
+          </a:ln>
+        </p:spPr>
+        <p:style>
+          <a:lnRef idx="1">
+            <a:schemeClr val="accent1"/>
+          </a:lnRef>
+          <a:fillRef idx="3">
+            <a:schemeClr val="accent1"/>
+          </a:fillRef>
+          <a:effectRef idx="2">
+            <a:schemeClr val="accent1"/>
+          </a:effectRef>
+          <a:fontRef idx="minor">
+            <a:schemeClr val="lt1"/>
+          </a:fontRef>
+        </p:style>
+        <p:txBody>
+          <a:bodyPr rtlCol="0" anchor="ctr"/>
+          <a:lstStyle/>
+          <a:p>
+            <a:pPr algn="ctr"/>
+          </a:p>
+        </p:txBody>
+      </p:sp>
+      <p:sp>
+        <p:nvSpPr>
+          <p:cNvPr id="16" name="TextBox 15"/>
+          <p:cNvSpPr txBox="1"/>
+          <p:nvPr/>
+        </p:nvSpPr>
+        <p:spPr>
+          <a:xfrm>
+            <a:off x="594360" y="4251960"/>
+            <a:ext cx="438912" cy="438912"/>
+          </a:xfrm>
+          <a:prstGeom prst="rect">
+            <a:avLst/>
+          </a:prstGeom>
+          <a:noFill/>
+        </p:spPr>
+        <p:txBody>
+          <a:bodyPr wrap="square" anchor="ctr"/>
+          <a:lstStyle/>
+          <a:p>
+            <a:pPr algn="ctr"/>
+            <a:r>
+              <a:rPr sz="1600" b="1" i="0">
+                <a:solidFill>
+                  <a:srgbClr val="FFFFFF"/>
+                </a:solidFill>
+                <a:latin typeface="Calibri"/>
+              </a:rPr>
+              <a:t>3</a:t>
+            </a:r>
+          </a:p>
+        </p:txBody>
+      </p:sp>
+      <p:sp>
+        <p:nvSpPr>
+          <p:cNvPr id="17" name="TextBox 16"/>
+          <p:cNvSpPr txBox="1"/>
+          <p:nvPr/>
+        </p:nvSpPr>
+        <p:spPr>
+          <a:xfrm>
+            <a:off x="1188720" y="4037076"/>
+            <a:ext cx="10271455" cy="886968"/>
+          </a:xfrm>
+          <a:prstGeom prst="rect">
+            <a:avLst/>
+          </a:prstGeom>
+          <a:noFill/>
+        </p:spPr>
+        <p:txBody>
+          <a:bodyPr wrap="square" anchor="ctr"/>
+          <a:lstStyle/>
+          <a:p>
+            <a:r>
+              <a:rPr sz="1500" b="1" i="0">
+                <a:solidFill>
+                  <a:srgbClr val="095292"/>
+                </a:solidFill>
+                <a:latin typeface="Calibri"/>
+              </a:rPr>
+              <a:t>Pega y renderiza en la plataforma del curso</a:t>
             </a:r>
           </a:p>
           <a:p>
             <a:pPr>
-              <a:spcAft>
-                <a:spcPts val="800"/>
-              </a:spcAft>
+              <a:spcBef>
+                <a:spcPts val="200"/>
+              </a:spcBef>
             </a:pPr>
             <a:r>
-              <a:rPr sz="1700" b="0" i="0">
-                <a:solidFill>
-                  <a:srgbClr val="333333"/>
-                </a:solidFill>
-                <a:latin typeface="Calibri"/>
-              </a:rPr>
-              <a:t>–   </a:t>
-            </a:r>
-            <a:r>
-              <a:rPr sz="1700" b="1" i="0">
-                <a:solidFill>
-                  <a:srgbClr val="333333"/>
-                </a:solidFill>
-                <a:latin typeface="Calibri"/>
-              </a:rPr>
-              <a:t>3.</a:t>
-            </a:r>
-            <a:r>
-              <a:rPr sz="1700" b="0" i="0">
-                <a:solidFill>
-                  <a:srgbClr val="333333"/>
-                </a:solidFill>
-                <a:latin typeface="Calibri"/>
-              </a:rPr>
-              <a:t> Paso 3: redacten el Q and A escrito con 3 preguntas duras que el jurado podria hacer, una de decision de arquitectura, una de seguridad y una de escala o rendimiento, cada una con respuesta de maximo 4 lineas que cite la evidencia del paquete, verificando que ninguna respuesta sea no lo alcanzamos a hacer sin nombrar la decision consciente que tomaron.</a:t>
+              <a:rPr sz="1300" b="0" i="0">
+                <a:solidFill>
+                  <a:srgbClr val="333333"/>
+                </a:solidFill>
+                <a:latin typeface="Calibri"/>
+              </a:rPr>
+              <a:t>Pega ese codigo en la caja de texto de la pregunta y mira como lo dibuja la plataforma. Si no renderiza, corrige ahi mismo: lo que se califica es el diagrama renderizado dentro de la plataforma del curso.</a:t>
+            </a:r>
+          </a:p>
+        </p:txBody>
+      </p:sp>
+      <p:sp>
+        <p:nvSpPr>
+          <p:cNvPr id="18" name="Rounded Rectangle 17"/>
+          <p:cNvSpPr/>
+          <p:nvPr/>
+        </p:nvSpPr>
+        <p:spPr>
+          <a:xfrm>
+            <a:off x="457200" y="5088636"/>
+            <a:ext cx="11277295" cy="1051560"/>
+          </a:xfrm>
+          <a:prstGeom prst="roundRect">
+            <a:avLst>
+              <a:gd name="adj" fmla="val 12000"/>
+            </a:avLst>
+          </a:prstGeom>
+          <a:solidFill>
+            <a:srgbClr val="E8F4FA"/>
+          </a:solidFill>
+          <a:ln>
+            <a:noFill/>
+          </a:ln>
+        </p:spPr>
+        <p:style>
+          <a:lnRef idx="1">
+            <a:schemeClr val="accent1"/>
+          </a:lnRef>
+          <a:fillRef idx="3">
+            <a:schemeClr val="accent1"/>
+          </a:fillRef>
+          <a:effectRef idx="2">
+            <a:schemeClr val="accent1"/>
+          </a:effectRef>
+          <a:fontRef idx="minor">
+            <a:schemeClr val="lt1"/>
+          </a:fontRef>
+        </p:style>
+        <p:txBody>
+          <a:bodyPr rtlCol="0" anchor="ctr"/>
+          <a:lstStyle/>
+          <a:p>
+            <a:pPr algn="ctr"/>
+          </a:p>
+        </p:txBody>
+      </p:sp>
+      <p:sp>
+        <p:nvSpPr>
+          <p:cNvPr id="19" name="Rounded Rectangle 18"/>
+          <p:cNvSpPr/>
+          <p:nvPr/>
+        </p:nvSpPr>
+        <p:spPr>
+          <a:xfrm>
+            <a:off x="594360" y="5394960"/>
+            <a:ext cx="438912" cy="438912"/>
+          </a:xfrm>
+          <a:prstGeom prst="roundRect">
+            <a:avLst>
+              <a:gd name="adj" fmla="val 12000"/>
+            </a:avLst>
+          </a:prstGeom>
+          <a:solidFill>
+            <a:srgbClr val="095292"/>
+          </a:solidFill>
+          <a:ln>
+            <a:noFill/>
+          </a:ln>
+        </p:spPr>
+        <p:style>
+          <a:lnRef idx="1">
+            <a:schemeClr val="accent1"/>
+          </a:lnRef>
+          <a:fillRef idx="3">
+            <a:schemeClr val="accent1"/>
+          </a:fillRef>
+          <a:effectRef idx="2">
+            <a:schemeClr val="accent1"/>
+          </a:effectRef>
+          <a:fontRef idx="minor">
+            <a:schemeClr val="lt1"/>
+          </a:fontRef>
+        </p:style>
+        <p:txBody>
+          <a:bodyPr rtlCol="0" anchor="ctr"/>
+          <a:lstStyle/>
+          <a:p>
+            <a:pPr algn="ctr"/>
+          </a:p>
+        </p:txBody>
+      </p:sp>
+      <p:sp>
+        <p:nvSpPr>
+          <p:cNvPr id="20" name="TextBox 19"/>
+          <p:cNvSpPr txBox="1"/>
+          <p:nvPr/>
+        </p:nvSpPr>
+        <p:spPr>
+          <a:xfrm>
+            <a:off x="594360" y="5394960"/>
+            <a:ext cx="438912" cy="438912"/>
+          </a:xfrm>
+          <a:prstGeom prst="rect">
+            <a:avLst/>
+          </a:prstGeom>
+          <a:noFill/>
+        </p:spPr>
+        <p:txBody>
+          <a:bodyPr wrap="square" anchor="ctr"/>
+          <a:lstStyle/>
+          <a:p>
+            <a:pPr algn="ctr"/>
+            <a:r>
+              <a:rPr sz="1600" b="1" i="0">
+                <a:solidFill>
+                  <a:srgbClr val="FFFFFF"/>
+                </a:solidFill>
+                <a:latin typeface="Calibri"/>
+              </a:rPr>
+              <a:t>4</a:t>
+            </a:r>
+          </a:p>
+        </p:txBody>
+      </p:sp>
+      <p:sp>
+        <p:nvSpPr>
+          <p:cNvPr id="21" name="TextBox 20"/>
+          <p:cNvSpPr txBox="1"/>
+          <p:nvPr/>
+        </p:nvSpPr>
+        <p:spPr>
+          <a:xfrm>
+            <a:off x="1188720" y="5180076"/>
+            <a:ext cx="10271455" cy="886968"/>
+          </a:xfrm>
+          <a:prstGeom prst="rect">
+            <a:avLst/>
+          </a:prstGeom>
+          <a:noFill/>
+        </p:spPr>
+        <p:txBody>
+          <a:bodyPr wrap="square" anchor="ctr"/>
+          <a:lstStyle/>
+          <a:p>
+            <a:r>
+              <a:rPr sz="1500" b="1" i="0">
+                <a:solidFill>
+                  <a:srgbClr val="095292"/>
+                </a:solidFill>
+                <a:latin typeface="Calibri"/>
+              </a:rPr>
+              <a:t>Guarda el PNG para tu PI</a:t>
             </a:r>
           </a:p>
           <a:p>
             <a:pPr>
-              <a:spcAft>
-                <a:spcPts val="800"/>
-              </a:spcAft>
+              <a:spcBef>
+                <a:spcPts val="200"/>
+              </a:spcBef>
             </a:pPr>
             <a:r>
-              <a:rPr sz="1700" b="0" i="0">
-                <a:solidFill>
-                  <a:srgbClr val="333333"/>
-                </a:solidFill>
-                <a:latin typeface="Calibri"/>
-              </a:rPr>
-              <a:t>–   </a:t>
-            </a:r>
-            <a:r>
-              <a:rPr sz="1700" b="1" i="0">
-                <a:solidFill>
-                  <a:srgbClr val="333333"/>
-                </a:solidFill>
-                <a:latin typeface="Calibri"/>
-              </a:rPr>
-              <a:t>4.</a:t>
-            </a:r>
-            <a:r>
-              <a:rPr sz="1700" b="0" i="0">
-                <a:solidFill>
-                  <a:srgbClr val="333333"/>
-                </a:solidFill>
-                <a:latin typeface="Calibri"/>
-              </a:rPr>
-              <a:t> Paso 4: ensayen el pitch con cronometro ANTES de la sesion y registren la tabla de tiempos reales por seccion con quien hablo en cada una, verificando que el tiempo total quede entre 5 y 8 minutos; la sustentacion se hace EN VIVO en la sesion de clase, con preguntas del docente al cierre, no con un video grabado.</a:t>
-            </a:r>
-          </a:p>
-          <a:p>
-            <a:pPr>
-              <a:spcAft>
-                <a:spcPts val="800"/>
-              </a:spcAft>
-            </a:pPr>
-            <a:r>
-              <a:rPr sz="1700" b="0" i="0">
-                <a:solidFill>
-                  <a:srgbClr val="333333"/>
-                </a:solidFill>
-                <a:latin typeface="Calibri"/>
-              </a:rPr>
-              <a:t>–   </a:t>
-            </a:r>
-            <a:r>
-              <a:rPr sz="1700" b="1" i="0">
-                <a:solidFill>
-                  <a:srgbClr val="333333"/>
-                </a:solidFill>
-                <a:latin typeface="Calibri"/>
-              </a:rPr>
-              <a:t>5.</a:t>
-            </a:r>
-            <a:r>
-              <a:rPr sz="1700" b="0" i="0">
-                <a:solidFill>
-                  <a:srgbClr val="333333"/>
-                </a:solidFill>
-                <a:latin typeface="Calibri"/>
-              </a:rPr>
-              <a:t> Paso 5: escriban la reflexion de media pagina sobre el trade-off mas difícil y suban el paquete final completo mas las 5 preguntas a la plataforma del curso (modulo Proyectos) ANTES de su turno de sustentacion, verificando que el informe, los diagramas, la evidencia del lab, el ci.yml y la presentacion esten los cinco dentro del mismo paquete.</a:t>
-            </a:r>
-          </a:p>
-        </p:txBody>
-      </p:sp>
-      <p:sp>
-        <p:nvSpPr>
-          <p:cNvPr id="6" name="TextBox 5"/>
+              <a:rPr sz="1300" b="0" i="0">
+                <a:solidFill>
+                  <a:srgbClr val="333333"/>
+                </a:solidFill>
+                <a:latin typeface="Calibri"/>
+              </a:rPr>
+              <a:t>Exporta tambien la imagen a la carpeta de tu Proyecto Integrador. Esa copia es para tu informe; no reemplaza la respuesta en la plataforma.</a:t>
+            </a:r>
+          </a:p>
+        </p:txBody>
+      </p:sp>
+      <p:sp>
+        <p:nvSpPr>
+          <p:cNvPr id="22" name="TextBox 21"/>
           <p:cNvSpPr txBox="1"/>
           <p:nvPr/>
         </p:nvSpPr>
@@ -9829,109 +9449,21 @@
                 </a:solidFill>
                 <a:latin typeface="Calibri"/>
               </a:rPr>
-              <a:t>Para continuar (PI)</a:t>
-            </a:r>
-          </a:p>
-        </p:txBody>
-      </p:sp>
-      <p:sp>
-        <p:nvSpPr>
-          <p:cNvPr id="5" name="Rounded Rectangle 4"/>
-          <p:cNvSpPr/>
-          <p:nvPr/>
-        </p:nvSpPr>
-        <p:spPr>
-          <a:xfrm>
-            <a:off x="457200" y="1261872"/>
-            <a:ext cx="11277295" cy="1051560"/>
-          </a:xfrm>
-          <a:prstGeom prst="roundRect">
-            <a:avLst>
-              <a:gd name="adj" fmla="val 12000"/>
-            </a:avLst>
-          </a:prstGeom>
-          <a:solidFill>
-            <a:srgbClr val="E8F4FA"/>
-          </a:solidFill>
-          <a:ln>
-            <a:noFill/>
-          </a:ln>
-        </p:spPr>
-        <p:style>
-          <a:lnRef idx="1">
-            <a:schemeClr val="accent1"/>
-          </a:lnRef>
-          <a:fillRef idx="3">
-            <a:schemeClr val="accent1"/>
-          </a:fillRef>
-          <a:effectRef idx="2">
-            <a:schemeClr val="accent1"/>
-          </a:effectRef>
-          <a:fontRef idx="minor">
-            <a:schemeClr val="lt1"/>
-          </a:fontRef>
-        </p:style>
-        <p:txBody>
-          <a:bodyPr rtlCol="0" anchor="ctr"/>
-          <a:lstStyle/>
-          <a:p>
-            <a:pPr algn="ctr"/>
-          </a:p>
-        </p:txBody>
-      </p:sp>
-      <p:sp>
-        <p:nvSpPr>
-          <p:cNvPr id="6" name="Rectangle 5"/>
-          <p:cNvSpPr/>
-          <p:nvPr/>
-        </p:nvSpPr>
-        <p:spPr>
-          <a:xfrm>
-            <a:off x="457200" y="1261872"/>
-            <a:ext cx="128016" cy="1051560"/>
-          </a:xfrm>
-          <a:prstGeom prst="rect">
-            <a:avLst/>
-          </a:prstGeom>
-          <a:solidFill>
-            <a:srgbClr val="269CCB"/>
-          </a:solidFill>
-          <a:ln>
-            <a:noFill/>
-          </a:ln>
-        </p:spPr>
-        <p:style>
-          <a:lnRef idx="1">
-            <a:schemeClr val="accent1"/>
-          </a:lnRef>
-          <a:fillRef idx="3">
-            <a:schemeClr val="accent1"/>
-          </a:fillRef>
-          <a:effectRef idx="2">
-            <a:schemeClr val="accent1"/>
-          </a:effectRef>
-          <a:fontRef idx="minor">
-            <a:schemeClr val="lt1"/>
-          </a:fontRef>
-        </p:style>
-        <p:txBody>
-          <a:bodyPr rtlCol="0" anchor="ctr"/>
-          <a:lstStyle/>
-          <a:p>
-            <a:pPr algn="ctr"/>
-          </a:p>
-        </p:txBody>
-      </p:sp>
-      <p:sp>
-        <p:nvSpPr>
-          <p:cNvPr id="7" name="TextBox 6"/>
+              <a:t>PI CloudLite — entregable de hoy</a:t>
+            </a:r>
+          </a:p>
+        </p:txBody>
+      </p:sp>
+      <p:sp>
+        <p:nvSpPr>
+          <p:cNvPr id="5" name="TextBox 4"/>
           <p:cNvSpPr txBox="1"/>
           <p:nvPr/>
         </p:nvSpPr>
         <p:spPr>
           <a:xfrm>
-            <a:off x="777240" y="1399031"/>
-            <a:ext cx="10774375" cy="822959"/>
+            <a:off x="457200" y="1170432"/>
+            <a:ext cx="11277295" cy="5230368"/>
           </a:xfrm>
           <a:prstGeom prst="rect">
             <a:avLst/>
@@ -9944,349 +9476,119 @@
           </a:bodyPr>
           <a:lstStyle/>
           <a:p>
-            <a:r>
-              <a:rPr sz="1200" b="1" i="0">
-                <a:solidFill>
-                  <a:srgbClr val="269CCB"/>
-                </a:solidFill>
-                <a:latin typeface="Calibri"/>
-              </a:rPr>
-              <a:t>Info</a:t>
-            </a:r>
-          </a:p>
-          <a:p>
             <a:pPr>
-              <a:spcBef>
-                <a:spcPts val="400"/>
-              </a:spcBef>
+              <a:spcAft>
+                <a:spcPts val="800"/>
+              </a:spcAft>
             </a:pPr>
             <a:r>
-              <a:rPr sz="1400" b="0" i="0">
-                <a:solidFill>
-                  <a:srgbClr val="333333"/>
-                </a:solidFill>
-                <a:latin typeface="Calibri"/>
-              </a:rPr>
-              <a:t>Entregable: Paquete final en la plataforma del curso (módulo Proyectos) + pitch de 5–8 min sustentado hoy en clase + Q&amp;A</a:t>
-            </a:r>
-          </a:p>
-        </p:txBody>
-      </p:sp>
-      <p:sp>
-        <p:nvSpPr>
-          <p:cNvPr id="8" name="Rounded Rectangle 7"/>
-          <p:cNvSpPr/>
-          <p:nvPr/>
-        </p:nvSpPr>
-        <p:spPr>
-          <a:xfrm>
-            <a:off x="457200" y="2478024"/>
-            <a:ext cx="11277295" cy="1051560"/>
-          </a:xfrm>
-          <a:prstGeom prst="roundRect">
-            <a:avLst>
-              <a:gd name="adj" fmla="val 12000"/>
-            </a:avLst>
-          </a:prstGeom>
-          <a:solidFill>
-            <a:srgbClr val="FFF8E1"/>
-          </a:solidFill>
-          <a:ln>
-            <a:noFill/>
-          </a:ln>
-        </p:spPr>
-        <p:style>
-          <a:lnRef idx="1">
-            <a:schemeClr val="accent1"/>
-          </a:lnRef>
-          <a:fillRef idx="3">
-            <a:schemeClr val="accent1"/>
-          </a:fillRef>
-          <a:effectRef idx="2">
-            <a:schemeClr val="accent1"/>
-          </a:effectRef>
-          <a:fontRef idx="minor">
-            <a:schemeClr val="lt1"/>
-          </a:fontRef>
-        </p:style>
-        <p:txBody>
-          <a:bodyPr rtlCol="0" anchor="ctr"/>
-          <a:lstStyle/>
-          <a:p>
-            <a:pPr algn="ctr"/>
-          </a:p>
-        </p:txBody>
-      </p:sp>
-      <p:sp>
-        <p:nvSpPr>
-          <p:cNvPr id="9" name="Rectangle 8"/>
-          <p:cNvSpPr/>
-          <p:nvPr/>
-        </p:nvSpPr>
-        <p:spPr>
-          <a:xfrm>
-            <a:off x="457200" y="2478024"/>
-            <a:ext cx="128016" cy="1051560"/>
-          </a:xfrm>
-          <a:prstGeom prst="rect">
-            <a:avLst/>
-          </a:prstGeom>
-          <a:solidFill>
-            <a:srgbClr val="FFD000"/>
-          </a:solidFill>
-          <a:ln>
-            <a:noFill/>
-          </a:ln>
-        </p:spPr>
-        <p:style>
-          <a:lnRef idx="1">
-            <a:schemeClr val="accent1"/>
-          </a:lnRef>
-          <a:fillRef idx="3">
-            <a:schemeClr val="accent1"/>
-          </a:fillRef>
-          <a:effectRef idx="2">
-            <a:schemeClr val="accent1"/>
-          </a:effectRef>
-          <a:fontRef idx="minor">
-            <a:schemeClr val="lt1"/>
-          </a:fontRef>
-        </p:style>
-        <p:txBody>
-          <a:bodyPr rtlCol="0" anchor="ctr"/>
-          <a:lstStyle/>
-          <a:p>
-            <a:pPr algn="ctr"/>
-          </a:p>
-        </p:txBody>
-      </p:sp>
-      <p:sp>
-        <p:nvSpPr>
-          <p:cNvPr id="10" name="TextBox 9"/>
-          <p:cNvSpPr txBox="1"/>
-          <p:nvPr/>
-        </p:nvSpPr>
-        <p:spPr>
-          <a:xfrm>
-            <a:off x="777240" y="2615184"/>
-            <a:ext cx="10774375" cy="822959"/>
-          </a:xfrm>
-          <a:prstGeom prst="rect">
-            <a:avLst/>
-          </a:prstGeom>
-          <a:noFill/>
-        </p:spPr>
-        <p:txBody>
-          <a:bodyPr wrap="square">
-            <a:spAutoFit/>
-          </a:bodyPr>
-          <a:lstStyle/>
-          <a:p>
-            <a:r>
-              <a:rPr sz="1200" b="1" i="0">
-                <a:solidFill>
-                  <a:srgbClr val="FFD000"/>
-                </a:solidFill>
-                <a:latin typeface="Calibri"/>
-              </a:rPr>
-              <a:t>Aclaración</a:t>
+              <a:rPr sz="2000" b="0" i="0">
+                <a:solidFill>
+                  <a:srgbClr val="333333"/>
+                </a:solidFill>
+                <a:latin typeface="Calibri"/>
+              </a:rPr>
+              <a:t>–   </a:t>
+            </a:r>
+            <a:r>
+              <a:rPr sz="2000" b="1" i="0">
+                <a:solidFill>
+                  <a:srgbClr val="333333"/>
+                </a:solidFill>
+                <a:latin typeface="Calibri"/>
+              </a:rPr>
+              <a:t>Entregable:</a:t>
+            </a:r>
+            <a:r>
+              <a:rPr sz="2000" b="0" i="0">
+                <a:solidFill>
+                  <a:srgbClr val="333333"/>
+                </a:solidFill>
+                <a:latin typeface="Calibri"/>
+              </a:rPr>
+              <a:t> Paquete final en la plataforma del curso (módulo Proyectos) + pitch de 5–8 min sustentado hoy en clase + Q&amp;A</a:t>
             </a:r>
           </a:p>
           <a:p>
             <a:pPr>
-              <a:spcBef>
-                <a:spcPts val="400"/>
-              </a:spcBef>
+              <a:spcAft>
+                <a:spcPts val="800"/>
+              </a:spcAft>
             </a:pPr>
             <a:r>
-              <a:rPr sz="1400" b="0" i="0">
-                <a:solidFill>
-                  <a:srgbClr val="333333"/>
-                </a:solidFill>
-                <a:latin typeface="Calibri"/>
-              </a:rPr>
-              <a:t>El paquete se sube a la plataforma del curso </a:t>
-            </a:r>
-            <a:r>
-              <a:rPr sz="1400" b="1" i="0">
-                <a:solidFill>
-                  <a:srgbClr val="333333"/>
-                </a:solidFill>
-                <a:latin typeface="Calibri"/>
-              </a:rPr>
-              <a:t>antes</a:t>
-            </a:r>
-            <a:r>
-              <a:rPr sz="1400" b="0" i="0">
-                <a:solidFill>
-                  <a:srgbClr val="333333"/>
-                </a:solidFill>
-                <a:latin typeface="Calibri"/>
-              </a:rPr>
-              <a:t> del bloque de sustentaciones.</a:t>
-            </a:r>
-          </a:p>
-        </p:txBody>
-      </p:sp>
-      <p:sp>
-        <p:nvSpPr>
-          <p:cNvPr id="11" name="Rounded Rectangle 10"/>
-          <p:cNvSpPr/>
-          <p:nvPr/>
-        </p:nvSpPr>
-        <p:spPr>
-          <a:xfrm>
-            <a:off x="457200" y="3694176"/>
-            <a:ext cx="11277295" cy="1051560"/>
-          </a:xfrm>
-          <a:prstGeom prst="roundRect">
-            <a:avLst>
-              <a:gd name="adj" fmla="val 12000"/>
-            </a:avLst>
-          </a:prstGeom>
-          <a:solidFill>
-            <a:srgbClr val="FBE4E4"/>
-          </a:solidFill>
-          <a:ln>
-            <a:noFill/>
-          </a:ln>
-        </p:spPr>
-        <p:style>
-          <a:lnRef idx="1">
-            <a:schemeClr val="accent1"/>
-          </a:lnRef>
-          <a:fillRef idx="3">
-            <a:schemeClr val="accent1"/>
-          </a:fillRef>
-          <a:effectRef idx="2">
-            <a:schemeClr val="accent1"/>
-          </a:effectRef>
-          <a:fontRef idx="minor">
-            <a:schemeClr val="lt1"/>
-          </a:fontRef>
-        </p:style>
-        <p:txBody>
-          <a:bodyPr rtlCol="0" anchor="ctr"/>
-          <a:lstStyle/>
-          <a:p>
-            <a:pPr algn="ctr"/>
-          </a:p>
-        </p:txBody>
-      </p:sp>
-      <p:sp>
-        <p:nvSpPr>
-          <p:cNvPr id="12" name="Rectangle 11"/>
-          <p:cNvSpPr/>
-          <p:nvPr/>
-        </p:nvSpPr>
-        <p:spPr>
-          <a:xfrm>
-            <a:off x="457200" y="3694176"/>
-            <a:ext cx="128016" cy="1051560"/>
-          </a:xfrm>
-          <a:prstGeom prst="rect">
-            <a:avLst/>
-          </a:prstGeom>
-          <a:solidFill>
-            <a:srgbClr val="A02030"/>
-          </a:solidFill>
-          <a:ln>
-            <a:noFill/>
-          </a:ln>
-        </p:spPr>
-        <p:style>
-          <a:lnRef idx="1">
-            <a:schemeClr val="accent1"/>
-          </a:lnRef>
-          <a:fillRef idx="3">
-            <a:schemeClr val="accent1"/>
-          </a:fillRef>
-          <a:effectRef idx="2">
-            <a:schemeClr val="accent1"/>
-          </a:effectRef>
-          <a:fontRef idx="minor">
-            <a:schemeClr val="lt1"/>
-          </a:fontRef>
-        </p:style>
-        <p:txBody>
-          <a:bodyPr rtlCol="0" anchor="ctr"/>
-          <a:lstStyle/>
-          <a:p>
-            <a:pPr algn="ctr"/>
-          </a:p>
-        </p:txBody>
-      </p:sp>
-      <p:sp>
-        <p:nvSpPr>
-          <p:cNvPr id="13" name="TextBox 12"/>
-          <p:cNvSpPr txBox="1"/>
-          <p:nvPr/>
-        </p:nvSpPr>
-        <p:spPr>
-          <a:xfrm>
-            <a:off x="777240" y="3831336"/>
-            <a:ext cx="10774375" cy="822959"/>
-          </a:xfrm>
-          <a:prstGeom prst="rect">
-            <a:avLst/>
-          </a:prstGeom>
-          <a:noFill/>
-        </p:spPr>
-        <p:txBody>
-          <a:bodyPr wrap="square">
-            <a:spAutoFit/>
-          </a:bodyPr>
-          <a:lstStyle/>
-          <a:p>
-            <a:r>
-              <a:rPr sz="1200" b="1" i="0">
-                <a:solidFill>
-                  <a:srgbClr val="A02030"/>
-                </a:solidFill>
-                <a:latin typeface="Calibri"/>
-              </a:rPr>
-              <a:t>Atención</a:t>
+              <a:rPr sz="2000" b="0" i="0">
+                <a:solidFill>
+                  <a:srgbClr val="333333"/>
+                </a:solidFill>
+                <a:latin typeface="Calibri"/>
+              </a:rPr>
+              <a:t>–   Herramienta: </a:t>
+            </a:r>
+            <a:r>
+              <a:rPr sz="2000" b="1" i="0">
+                <a:solidFill>
+                  <a:srgbClr val="333333"/>
+                </a:solidFill>
+                <a:latin typeface="Calibri"/>
+              </a:rPr>
+              <a:t>Google Docs/Slides · diagramas · capturas lab</a:t>
             </a:r>
           </a:p>
           <a:p>
             <a:pPr>
-              <a:spcBef>
-                <a:spcPts val="400"/>
-              </a:spcBef>
+              <a:spcAft>
+                <a:spcPts val="800"/>
+              </a:spcAft>
             </a:pPr>
             <a:r>
-              <a:rPr sz="1400" b="0" i="0">
-                <a:solidFill>
-                  <a:srgbClr val="333333"/>
-                </a:solidFill>
-                <a:latin typeface="Calibri"/>
-              </a:rPr>
-              <a:t>La sustentación es </a:t>
-            </a:r>
-            <a:r>
-              <a:rPr sz="1400" b="1" i="0">
-                <a:solidFill>
-                  <a:srgbClr val="333333"/>
-                </a:solidFill>
-                <a:latin typeface="Calibri"/>
-              </a:rPr>
-              <a:t>en vivo</a:t>
-            </a:r>
-            <a:r>
-              <a:rPr sz="1400" b="0" i="0">
-                <a:solidFill>
-                  <a:srgbClr val="333333"/>
-                </a:solidFill>
-                <a:latin typeface="Calibri"/>
-              </a:rPr>
-              <a:t> y con Q&amp;A: no se acepta video grabado en su lugar.</a:t>
-            </a:r>
-          </a:p>
-        </p:txBody>
-      </p:sp>
-      <p:sp>
-        <p:nvSpPr>
-          <p:cNvPr id="14" name="TextBox 13"/>
+              <a:rPr sz="2000" b="0" i="0">
+                <a:solidFill>
+                  <a:srgbClr val="333333"/>
+                </a:solidFill>
+                <a:latin typeface="Calibri"/>
+              </a:rPr>
+              <a:t>–   Hoy no se construye: se </a:t>
+            </a:r>
+            <a:r>
+              <a:rPr sz="2000" b="1" i="0">
+                <a:solidFill>
+                  <a:srgbClr val="333333"/>
+                </a:solidFill>
+                <a:latin typeface="Calibri"/>
+              </a:rPr>
+              <a:t>defiende</a:t>
+            </a:r>
+            <a:r>
+              <a:rPr sz="2000" b="0" i="0">
+                <a:solidFill>
+                  <a:srgbClr val="333333"/>
+                </a:solidFill>
+                <a:latin typeface="Calibri"/>
+              </a:rPr>
+              <a:t> lo que ya está en el paquete del PI.</a:t>
+            </a:r>
+          </a:p>
+          <a:p>
+            <a:pPr>
+              <a:spcAft>
+                <a:spcPts val="800"/>
+              </a:spcAft>
+            </a:pPr>
+            <a:r>
+              <a:rPr sz="2000" b="0" i="0">
+                <a:solidFill>
+                  <a:srgbClr val="333333"/>
+                </a:solidFill>
+                <a:latin typeface="Calibri"/>
+              </a:rPr>
+              <a:t>–   Individual por defecto · el docente puede autorizar equipos de 2–3; la entrega en la plataforma del curso siempre es individual.</a:t>
+            </a:r>
+          </a:p>
+        </p:txBody>
+      </p:sp>
+      <p:sp>
+        <p:nvSpPr>
+          <p:cNvPr id="6" name="TextBox 5"/>
           <p:cNvSpPr txBox="1"/>
           <p:nvPr/>
         </p:nvSpPr>
@@ -10354,6 +9656,1002 @@
         <p:spPr>
           <a:xfrm>
             <a:off x="0" y="0"/>
+            <a:ext cx="12191695" cy="960120"/>
+          </a:xfrm>
+          <a:prstGeom prst="rect">
+            <a:avLst/>
+          </a:prstGeom>
+          <a:solidFill>
+            <a:srgbClr val="095292"/>
+          </a:solidFill>
+          <a:ln>
+            <a:noFill/>
+          </a:ln>
+        </p:spPr>
+        <p:style>
+          <a:lnRef idx="1">
+            <a:schemeClr val="accent1"/>
+          </a:lnRef>
+          <a:fillRef idx="3">
+            <a:schemeClr val="accent1"/>
+          </a:fillRef>
+          <a:effectRef idx="2">
+            <a:schemeClr val="accent1"/>
+          </a:effectRef>
+          <a:fontRef idx="minor">
+            <a:schemeClr val="lt1"/>
+          </a:fontRef>
+        </p:style>
+        <p:txBody>
+          <a:bodyPr rtlCol="0" anchor="ctr"/>
+          <a:lstStyle/>
+          <a:p>
+            <a:pPr algn="ctr"/>
+          </a:p>
+        </p:txBody>
+      </p:sp>
+      <p:sp>
+        <p:nvSpPr>
+          <p:cNvPr id="3" name="Rectangle 2"/>
+          <p:cNvSpPr/>
+          <p:nvPr/>
+        </p:nvSpPr>
+        <p:spPr>
+          <a:xfrm>
+            <a:off x="0" y="960120"/>
+            <a:ext cx="12191695" cy="41148"/>
+          </a:xfrm>
+          <a:prstGeom prst="rect">
+            <a:avLst/>
+          </a:prstGeom>
+          <a:solidFill>
+            <a:srgbClr val="FFD000"/>
+          </a:solidFill>
+          <a:ln>
+            <a:noFill/>
+          </a:ln>
+        </p:spPr>
+        <p:style>
+          <a:lnRef idx="1">
+            <a:schemeClr val="accent1"/>
+          </a:lnRef>
+          <a:fillRef idx="3">
+            <a:schemeClr val="accent1"/>
+          </a:fillRef>
+          <a:effectRef idx="2">
+            <a:schemeClr val="accent1"/>
+          </a:effectRef>
+          <a:fontRef idx="minor">
+            <a:schemeClr val="lt1"/>
+          </a:fontRef>
+        </p:style>
+        <p:txBody>
+          <a:bodyPr rtlCol="0" anchor="ctr"/>
+          <a:lstStyle/>
+          <a:p>
+            <a:pPr algn="ctr"/>
+          </a:p>
+        </p:txBody>
+      </p:sp>
+      <p:sp>
+        <p:nvSpPr>
+          <p:cNvPr id="4" name="TextBox 3"/>
+          <p:cNvSpPr txBox="1"/>
+          <p:nvPr/>
+        </p:nvSpPr>
+        <p:spPr>
+          <a:xfrm>
+            <a:off x="457200" y="164592"/>
+            <a:ext cx="11277295" cy="502920"/>
+          </a:xfrm>
+          <a:prstGeom prst="rect">
+            <a:avLst/>
+          </a:prstGeom>
+          <a:noFill/>
+        </p:spPr>
+        <p:txBody>
+          <a:bodyPr wrap="square">
+            <a:spAutoFit/>
+          </a:bodyPr>
+          <a:lstStyle/>
+          <a:p>
+            <a:r>
+              <a:rPr sz="2600" b="1" i="0">
+                <a:solidFill>
+                  <a:srgbClr val="FFFFFF"/>
+                </a:solidFill>
+                <a:latin typeface="Calibri"/>
+              </a:rPr>
+              <a:t>Sustentación (paso a paso)</a:t>
+            </a:r>
+          </a:p>
+        </p:txBody>
+      </p:sp>
+      <p:sp>
+        <p:nvSpPr>
+          <p:cNvPr id="5" name="TextBox 4"/>
+          <p:cNvSpPr txBox="1"/>
+          <p:nvPr/>
+        </p:nvSpPr>
+        <p:spPr>
+          <a:xfrm>
+            <a:off x="457200" y="1170432"/>
+            <a:ext cx="11277295" cy="5230368"/>
+          </a:xfrm>
+          <a:prstGeom prst="rect">
+            <a:avLst/>
+          </a:prstGeom>
+          <a:noFill/>
+        </p:spPr>
+        <p:txBody>
+          <a:bodyPr wrap="square">
+            <a:spAutoFit/>
+          </a:bodyPr>
+          <a:lstStyle/>
+          <a:p>
+            <a:pPr>
+              <a:spcAft>
+                <a:spcPts val="800"/>
+              </a:spcAft>
+            </a:pPr>
+            <a:r>
+              <a:rPr sz="1700" b="1" i="0">
+                <a:solidFill>
+                  <a:srgbClr val="333333"/>
+                </a:solidFill>
+                <a:latin typeface="Calibri"/>
+              </a:rPr>
+              <a:t>1.</a:t>
+            </a:r>
+            <a:r>
+              <a:rPr sz="1700" b="0" i="0">
+                <a:solidFill>
+                  <a:srgbClr val="333333"/>
+                </a:solidFill>
+                <a:latin typeface="Calibri"/>
+              </a:rPr>
+              <a:t> Paso 1: armen el paquete final y llenen el indice de 8 filas con entregable, nombre de archivo, ruta dentro del paquete y estado, verificando que los 8 archivos abran desde una maquina distinta a la del autor y que ningun nombre de archivo tenga espacios ni tildes que rompan la descarga.</a:t>
+            </a:r>
+          </a:p>
+          <a:p>
+            <a:pPr>
+              <a:spcAft>
+                <a:spcPts val="800"/>
+              </a:spcAft>
+            </a:pPr>
+            <a:r>
+              <a:rPr sz="1700" b="0" i="0">
+                <a:solidFill>
+                  <a:srgbClr val="333333"/>
+                </a:solidFill>
+                <a:latin typeface="Calibri"/>
+              </a:rPr>
+              <a:t>–   </a:t>
+            </a:r>
+            <a:r>
+              <a:rPr sz="1700" b="1" i="0">
+                <a:solidFill>
+                  <a:srgbClr val="333333"/>
+                </a:solidFill>
+                <a:latin typeface="Calibri"/>
+              </a:rPr>
+              <a:t>2.</a:t>
+            </a:r>
+            <a:r>
+              <a:rPr sz="1700" b="0" i="0">
+                <a:solidFill>
+                  <a:srgbClr val="333333"/>
+                </a:solidFill>
+                <a:latin typeface="Calibri"/>
+              </a:rPr>
+              <a:t> Paso 2: escriban en la plataforma del curso la lamina unica de arquitectura en Mermaid con las 3 zonas, los 5 contenedores, el edge, la cadena de entrega y los sistemas externos, verificando al renderizar que sea legible en una sola pantalla sin desplazamiento y que use los mismos nombres canonicos del paquete, porque esta es la lamina que van a proyectar en la sustentacion.</a:t>
+            </a:r>
+          </a:p>
+          <a:p>
+            <a:pPr>
+              <a:spcAft>
+                <a:spcPts val="800"/>
+              </a:spcAft>
+            </a:pPr>
+            <a:r>
+              <a:rPr sz="1700" b="0" i="0">
+                <a:solidFill>
+                  <a:srgbClr val="333333"/>
+                </a:solidFill>
+                <a:latin typeface="Calibri"/>
+              </a:rPr>
+              <a:t>–   </a:t>
+            </a:r>
+            <a:r>
+              <a:rPr sz="1700" b="1" i="0">
+                <a:solidFill>
+                  <a:srgbClr val="333333"/>
+                </a:solidFill>
+                <a:latin typeface="Calibri"/>
+              </a:rPr>
+              <a:t>3.</a:t>
+            </a:r>
+            <a:r>
+              <a:rPr sz="1700" b="0" i="0">
+                <a:solidFill>
+                  <a:srgbClr val="333333"/>
+                </a:solidFill>
+                <a:latin typeface="Calibri"/>
+              </a:rPr>
+              <a:t> Paso 3: redacten el Q and A escrito con 3 preguntas duras que el jurado podria hacer, una de decision de arquitectura, una de seguridad y una de escala o rendimiento, cada una con respuesta de maximo 4 lineas que cite la evidencia del paquete, verificando que ninguna respuesta sea no lo alcanzamos a hacer sin nombrar la decision consciente que tomaron.</a:t>
+            </a:r>
+          </a:p>
+          <a:p>
+            <a:pPr>
+              <a:spcAft>
+                <a:spcPts val="800"/>
+              </a:spcAft>
+            </a:pPr>
+            <a:r>
+              <a:rPr sz="1700" b="0" i="0">
+                <a:solidFill>
+                  <a:srgbClr val="333333"/>
+                </a:solidFill>
+                <a:latin typeface="Calibri"/>
+              </a:rPr>
+              <a:t>–   </a:t>
+            </a:r>
+            <a:r>
+              <a:rPr sz="1700" b="1" i="0">
+                <a:solidFill>
+                  <a:srgbClr val="333333"/>
+                </a:solidFill>
+                <a:latin typeface="Calibri"/>
+              </a:rPr>
+              <a:t>4.</a:t>
+            </a:r>
+            <a:r>
+              <a:rPr sz="1700" b="0" i="0">
+                <a:solidFill>
+                  <a:srgbClr val="333333"/>
+                </a:solidFill>
+                <a:latin typeface="Calibri"/>
+              </a:rPr>
+              <a:t> Paso 4: ensayen el pitch con cronometro ANTES de la sesion y registren la tabla de tiempos reales por seccion con quien hablo en cada una, verificando que el tiempo total quede entre 5 y 8 minutos; la sustentacion se hace EN VIVO en la sesion de clase, con preguntas del docente al cierre, no con un video grabado.</a:t>
+            </a:r>
+          </a:p>
+          <a:p>
+            <a:pPr>
+              <a:spcAft>
+                <a:spcPts val="800"/>
+              </a:spcAft>
+            </a:pPr>
+            <a:r>
+              <a:rPr sz="1700" b="0" i="0">
+                <a:solidFill>
+                  <a:srgbClr val="333333"/>
+                </a:solidFill>
+                <a:latin typeface="Calibri"/>
+              </a:rPr>
+              <a:t>–   </a:t>
+            </a:r>
+            <a:r>
+              <a:rPr sz="1700" b="1" i="0">
+                <a:solidFill>
+                  <a:srgbClr val="333333"/>
+                </a:solidFill>
+                <a:latin typeface="Calibri"/>
+              </a:rPr>
+              <a:t>5.</a:t>
+            </a:r>
+            <a:r>
+              <a:rPr sz="1700" b="0" i="0">
+                <a:solidFill>
+                  <a:srgbClr val="333333"/>
+                </a:solidFill>
+                <a:latin typeface="Calibri"/>
+              </a:rPr>
+              <a:t> Paso 5: escriban la reflexion de media pagina sobre el trade-off mas difícil y suban el paquete final completo mas las 5 preguntas a la plataforma del curso (modulo Proyectos) ANTES de su turno de sustentacion, verificando que el informe, los diagramas, la evidencia del lab, el ci.yml y la presentacion esten los cinco dentro del mismo paquete.</a:t>
+            </a:r>
+          </a:p>
+        </p:txBody>
+      </p:sp>
+      <p:sp>
+        <p:nvSpPr>
+          <p:cNvPr id="6" name="TextBox 5"/>
+          <p:cNvSpPr txBox="1"/>
+          <p:nvPr/>
+        </p:nvSpPr>
+        <p:spPr>
+          <a:xfrm>
+            <a:off x="11185855" y="6473952"/>
+            <a:ext cx="640080" cy="274320"/>
+          </a:xfrm>
+          <a:prstGeom prst="rect">
+            <a:avLst/>
+          </a:prstGeom>
+          <a:noFill/>
+        </p:spPr>
+        <p:txBody>
+          <a:bodyPr wrap="square">
+            <a:spAutoFit/>
+          </a:bodyPr>
+          <a:lstStyle/>
+          <a:p>
+            <a:pPr algn="r"/>
+            <a:r>
+              <a:rPr sz="1100" b="0" i="0">
+                <a:solidFill>
+                  <a:srgbClr val="666666"/>
+                </a:solidFill>
+                <a:latin typeface="Calibri"/>
+              </a:rPr>
+              <a:t>26</a:t>
+            </a:r>
+          </a:p>
+        </p:txBody>
+      </p:sp>
+    </p:spTree>
+  </p:cSld>
+  <p:clrMapOvr>
+    <a:masterClrMapping/>
+  </p:clrMapOvr>
+</p:sld>
+</file>
+
+<file path=ppt/slides/slide27.xml><?xml version="1.0" encoding="utf-8"?>
+<p:sld xmlns:a="http://schemas.openxmlformats.org/drawingml/2006/main" xmlns:p="http://schemas.openxmlformats.org/presentationml/2006/main" xmlns:r="http://schemas.openxmlformats.org/officeDocument/2006/relationships">
+  <p:cSld>
+    <p:bg>
+      <p:bgPr>
+        <a:solidFill>
+          <a:srgbClr val="FFFFFF"/>
+        </a:solidFill>
+        <a:effectLst/>
+      </p:bgPr>
+    </p:bg>
+    <p:spTree>
+      <p:nvGrpSpPr>
+        <p:cNvPr id="1" name=""/>
+        <p:cNvGrpSpPr/>
+        <p:nvPr/>
+      </p:nvGrpSpPr>
+      <p:grpSpPr/>
+      <p:sp>
+        <p:nvSpPr>
+          <p:cNvPr id="2" name="Rectangle 1"/>
+          <p:cNvSpPr/>
+          <p:nvPr/>
+        </p:nvSpPr>
+        <p:spPr>
+          <a:xfrm>
+            <a:off x="0" y="0"/>
+            <a:ext cx="12191695" cy="960120"/>
+          </a:xfrm>
+          <a:prstGeom prst="rect">
+            <a:avLst/>
+          </a:prstGeom>
+          <a:solidFill>
+            <a:srgbClr val="095292"/>
+          </a:solidFill>
+          <a:ln>
+            <a:noFill/>
+          </a:ln>
+        </p:spPr>
+        <p:style>
+          <a:lnRef idx="1">
+            <a:schemeClr val="accent1"/>
+          </a:lnRef>
+          <a:fillRef idx="3">
+            <a:schemeClr val="accent1"/>
+          </a:fillRef>
+          <a:effectRef idx="2">
+            <a:schemeClr val="accent1"/>
+          </a:effectRef>
+          <a:fontRef idx="minor">
+            <a:schemeClr val="lt1"/>
+          </a:fontRef>
+        </p:style>
+        <p:txBody>
+          <a:bodyPr rtlCol="0" anchor="ctr"/>
+          <a:lstStyle/>
+          <a:p>
+            <a:pPr algn="ctr"/>
+          </a:p>
+        </p:txBody>
+      </p:sp>
+      <p:sp>
+        <p:nvSpPr>
+          <p:cNvPr id="3" name="Rectangle 2"/>
+          <p:cNvSpPr/>
+          <p:nvPr/>
+        </p:nvSpPr>
+        <p:spPr>
+          <a:xfrm>
+            <a:off x="0" y="960120"/>
+            <a:ext cx="12191695" cy="41148"/>
+          </a:xfrm>
+          <a:prstGeom prst="rect">
+            <a:avLst/>
+          </a:prstGeom>
+          <a:solidFill>
+            <a:srgbClr val="FFD000"/>
+          </a:solidFill>
+          <a:ln>
+            <a:noFill/>
+          </a:ln>
+        </p:spPr>
+        <p:style>
+          <a:lnRef idx="1">
+            <a:schemeClr val="accent1"/>
+          </a:lnRef>
+          <a:fillRef idx="3">
+            <a:schemeClr val="accent1"/>
+          </a:fillRef>
+          <a:effectRef idx="2">
+            <a:schemeClr val="accent1"/>
+          </a:effectRef>
+          <a:fontRef idx="minor">
+            <a:schemeClr val="lt1"/>
+          </a:fontRef>
+        </p:style>
+        <p:txBody>
+          <a:bodyPr rtlCol="0" anchor="ctr"/>
+          <a:lstStyle/>
+          <a:p>
+            <a:pPr algn="ctr"/>
+          </a:p>
+        </p:txBody>
+      </p:sp>
+      <p:sp>
+        <p:nvSpPr>
+          <p:cNvPr id="4" name="TextBox 3"/>
+          <p:cNvSpPr txBox="1"/>
+          <p:nvPr/>
+        </p:nvSpPr>
+        <p:spPr>
+          <a:xfrm>
+            <a:off x="457200" y="164592"/>
+            <a:ext cx="11277295" cy="502920"/>
+          </a:xfrm>
+          <a:prstGeom prst="rect">
+            <a:avLst/>
+          </a:prstGeom>
+          <a:noFill/>
+        </p:spPr>
+        <p:txBody>
+          <a:bodyPr wrap="square">
+            <a:spAutoFit/>
+          </a:bodyPr>
+          <a:lstStyle/>
+          <a:p>
+            <a:r>
+              <a:rPr sz="2600" b="1" i="0">
+                <a:solidFill>
+                  <a:srgbClr val="FFFFFF"/>
+                </a:solidFill>
+                <a:latin typeface="Calibri"/>
+              </a:rPr>
+              <a:t>Para continuar (PI)</a:t>
+            </a:r>
+          </a:p>
+        </p:txBody>
+      </p:sp>
+      <p:sp>
+        <p:nvSpPr>
+          <p:cNvPr id="5" name="Rounded Rectangle 4"/>
+          <p:cNvSpPr/>
+          <p:nvPr/>
+        </p:nvSpPr>
+        <p:spPr>
+          <a:xfrm>
+            <a:off x="457200" y="1261872"/>
+            <a:ext cx="11277295" cy="1051560"/>
+          </a:xfrm>
+          <a:prstGeom prst="roundRect">
+            <a:avLst>
+              <a:gd name="adj" fmla="val 12000"/>
+            </a:avLst>
+          </a:prstGeom>
+          <a:solidFill>
+            <a:srgbClr val="E8F4FA"/>
+          </a:solidFill>
+          <a:ln>
+            <a:noFill/>
+          </a:ln>
+        </p:spPr>
+        <p:style>
+          <a:lnRef idx="1">
+            <a:schemeClr val="accent1"/>
+          </a:lnRef>
+          <a:fillRef idx="3">
+            <a:schemeClr val="accent1"/>
+          </a:fillRef>
+          <a:effectRef idx="2">
+            <a:schemeClr val="accent1"/>
+          </a:effectRef>
+          <a:fontRef idx="minor">
+            <a:schemeClr val="lt1"/>
+          </a:fontRef>
+        </p:style>
+        <p:txBody>
+          <a:bodyPr rtlCol="0" anchor="ctr"/>
+          <a:lstStyle/>
+          <a:p>
+            <a:pPr algn="ctr"/>
+          </a:p>
+        </p:txBody>
+      </p:sp>
+      <p:sp>
+        <p:nvSpPr>
+          <p:cNvPr id="6" name="Rectangle 5"/>
+          <p:cNvSpPr/>
+          <p:nvPr/>
+        </p:nvSpPr>
+        <p:spPr>
+          <a:xfrm>
+            <a:off x="457200" y="1261872"/>
+            <a:ext cx="128016" cy="1051560"/>
+          </a:xfrm>
+          <a:prstGeom prst="rect">
+            <a:avLst/>
+          </a:prstGeom>
+          <a:solidFill>
+            <a:srgbClr val="269CCB"/>
+          </a:solidFill>
+          <a:ln>
+            <a:noFill/>
+          </a:ln>
+        </p:spPr>
+        <p:style>
+          <a:lnRef idx="1">
+            <a:schemeClr val="accent1"/>
+          </a:lnRef>
+          <a:fillRef idx="3">
+            <a:schemeClr val="accent1"/>
+          </a:fillRef>
+          <a:effectRef idx="2">
+            <a:schemeClr val="accent1"/>
+          </a:effectRef>
+          <a:fontRef idx="minor">
+            <a:schemeClr val="lt1"/>
+          </a:fontRef>
+        </p:style>
+        <p:txBody>
+          <a:bodyPr rtlCol="0" anchor="ctr"/>
+          <a:lstStyle/>
+          <a:p>
+            <a:pPr algn="ctr"/>
+          </a:p>
+        </p:txBody>
+      </p:sp>
+      <p:sp>
+        <p:nvSpPr>
+          <p:cNvPr id="7" name="TextBox 6"/>
+          <p:cNvSpPr txBox="1"/>
+          <p:nvPr/>
+        </p:nvSpPr>
+        <p:spPr>
+          <a:xfrm>
+            <a:off x="777240" y="1399031"/>
+            <a:ext cx="10774375" cy="822959"/>
+          </a:xfrm>
+          <a:prstGeom prst="rect">
+            <a:avLst/>
+          </a:prstGeom>
+          <a:noFill/>
+        </p:spPr>
+        <p:txBody>
+          <a:bodyPr wrap="square">
+            <a:spAutoFit/>
+          </a:bodyPr>
+          <a:lstStyle/>
+          <a:p>
+            <a:r>
+              <a:rPr sz="1200" b="1" i="0">
+                <a:solidFill>
+                  <a:srgbClr val="269CCB"/>
+                </a:solidFill>
+                <a:latin typeface="Calibri"/>
+              </a:rPr>
+              <a:t>Info</a:t>
+            </a:r>
+          </a:p>
+          <a:p>
+            <a:pPr>
+              <a:spcBef>
+                <a:spcPts val="400"/>
+              </a:spcBef>
+            </a:pPr>
+            <a:r>
+              <a:rPr sz="1400" b="0" i="0">
+                <a:solidFill>
+                  <a:srgbClr val="333333"/>
+                </a:solidFill>
+                <a:latin typeface="Calibri"/>
+              </a:rPr>
+              <a:t>Entregable: Paquete final en la plataforma del curso (módulo Proyectos) + pitch de 5–8 min sustentado hoy en clase + Q&amp;A</a:t>
+            </a:r>
+          </a:p>
+        </p:txBody>
+      </p:sp>
+      <p:sp>
+        <p:nvSpPr>
+          <p:cNvPr id="8" name="Rounded Rectangle 7"/>
+          <p:cNvSpPr/>
+          <p:nvPr/>
+        </p:nvSpPr>
+        <p:spPr>
+          <a:xfrm>
+            <a:off x="457200" y="2478024"/>
+            <a:ext cx="11277295" cy="1051560"/>
+          </a:xfrm>
+          <a:prstGeom prst="roundRect">
+            <a:avLst>
+              <a:gd name="adj" fmla="val 12000"/>
+            </a:avLst>
+          </a:prstGeom>
+          <a:solidFill>
+            <a:srgbClr val="FFF8E1"/>
+          </a:solidFill>
+          <a:ln>
+            <a:noFill/>
+          </a:ln>
+        </p:spPr>
+        <p:style>
+          <a:lnRef idx="1">
+            <a:schemeClr val="accent1"/>
+          </a:lnRef>
+          <a:fillRef idx="3">
+            <a:schemeClr val="accent1"/>
+          </a:fillRef>
+          <a:effectRef idx="2">
+            <a:schemeClr val="accent1"/>
+          </a:effectRef>
+          <a:fontRef idx="minor">
+            <a:schemeClr val="lt1"/>
+          </a:fontRef>
+        </p:style>
+        <p:txBody>
+          <a:bodyPr rtlCol="0" anchor="ctr"/>
+          <a:lstStyle/>
+          <a:p>
+            <a:pPr algn="ctr"/>
+          </a:p>
+        </p:txBody>
+      </p:sp>
+      <p:sp>
+        <p:nvSpPr>
+          <p:cNvPr id="9" name="Rectangle 8"/>
+          <p:cNvSpPr/>
+          <p:nvPr/>
+        </p:nvSpPr>
+        <p:spPr>
+          <a:xfrm>
+            <a:off x="457200" y="2478024"/>
+            <a:ext cx="128016" cy="1051560"/>
+          </a:xfrm>
+          <a:prstGeom prst="rect">
+            <a:avLst/>
+          </a:prstGeom>
+          <a:solidFill>
+            <a:srgbClr val="FFD000"/>
+          </a:solidFill>
+          <a:ln>
+            <a:noFill/>
+          </a:ln>
+        </p:spPr>
+        <p:style>
+          <a:lnRef idx="1">
+            <a:schemeClr val="accent1"/>
+          </a:lnRef>
+          <a:fillRef idx="3">
+            <a:schemeClr val="accent1"/>
+          </a:fillRef>
+          <a:effectRef idx="2">
+            <a:schemeClr val="accent1"/>
+          </a:effectRef>
+          <a:fontRef idx="minor">
+            <a:schemeClr val="lt1"/>
+          </a:fontRef>
+        </p:style>
+        <p:txBody>
+          <a:bodyPr rtlCol="0" anchor="ctr"/>
+          <a:lstStyle/>
+          <a:p>
+            <a:pPr algn="ctr"/>
+          </a:p>
+        </p:txBody>
+      </p:sp>
+      <p:sp>
+        <p:nvSpPr>
+          <p:cNvPr id="10" name="TextBox 9"/>
+          <p:cNvSpPr txBox="1"/>
+          <p:nvPr/>
+        </p:nvSpPr>
+        <p:spPr>
+          <a:xfrm>
+            <a:off x="777240" y="2615184"/>
+            <a:ext cx="10774375" cy="822959"/>
+          </a:xfrm>
+          <a:prstGeom prst="rect">
+            <a:avLst/>
+          </a:prstGeom>
+          <a:noFill/>
+        </p:spPr>
+        <p:txBody>
+          <a:bodyPr wrap="square">
+            <a:spAutoFit/>
+          </a:bodyPr>
+          <a:lstStyle/>
+          <a:p>
+            <a:r>
+              <a:rPr sz="1200" b="1" i="0">
+                <a:solidFill>
+                  <a:srgbClr val="FFD000"/>
+                </a:solidFill>
+                <a:latin typeface="Calibri"/>
+              </a:rPr>
+              <a:t>Aclaración</a:t>
+            </a:r>
+          </a:p>
+          <a:p>
+            <a:pPr>
+              <a:spcBef>
+                <a:spcPts val="400"/>
+              </a:spcBef>
+            </a:pPr>
+            <a:r>
+              <a:rPr sz="1400" b="0" i="0">
+                <a:solidFill>
+                  <a:srgbClr val="333333"/>
+                </a:solidFill>
+                <a:latin typeface="Calibri"/>
+              </a:rPr>
+              <a:t>El paquete se sube a la plataforma del curso </a:t>
+            </a:r>
+            <a:r>
+              <a:rPr sz="1400" b="1" i="0">
+                <a:solidFill>
+                  <a:srgbClr val="333333"/>
+                </a:solidFill>
+                <a:latin typeface="Calibri"/>
+              </a:rPr>
+              <a:t>antes</a:t>
+            </a:r>
+            <a:r>
+              <a:rPr sz="1400" b="0" i="0">
+                <a:solidFill>
+                  <a:srgbClr val="333333"/>
+                </a:solidFill>
+                <a:latin typeface="Calibri"/>
+              </a:rPr>
+              <a:t> del bloque de sustentaciones.</a:t>
+            </a:r>
+          </a:p>
+        </p:txBody>
+      </p:sp>
+      <p:sp>
+        <p:nvSpPr>
+          <p:cNvPr id="11" name="Rounded Rectangle 10"/>
+          <p:cNvSpPr/>
+          <p:nvPr/>
+        </p:nvSpPr>
+        <p:spPr>
+          <a:xfrm>
+            <a:off x="457200" y="3694176"/>
+            <a:ext cx="11277295" cy="1051560"/>
+          </a:xfrm>
+          <a:prstGeom prst="roundRect">
+            <a:avLst>
+              <a:gd name="adj" fmla="val 12000"/>
+            </a:avLst>
+          </a:prstGeom>
+          <a:solidFill>
+            <a:srgbClr val="FBE4E4"/>
+          </a:solidFill>
+          <a:ln>
+            <a:noFill/>
+          </a:ln>
+        </p:spPr>
+        <p:style>
+          <a:lnRef idx="1">
+            <a:schemeClr val="accent1"/>
+          </a:lnRef>
+          <a:fillRef idx="3">
+            <a:schemeClr val="accent1"/>
+          </a:fillRef>
+          <a:effectRef idx="2">
+            <a:schemeClr val="accent1"/>
+          </a:effectRef>
+          <a:fontRef idx="minor">
+            <a:schemeClr val="lt1"/>
+          </a:fontRef>
+        </p:style>
+        <p:txBody>
+          <a:bodyPr rtlCol="0" anchor="ctr"/>
+          <a:lstStyle/>
+          <a:p>
+            <a:pPr algn="ctr"/>
+          </a:p>
+        </p:txBody>
+      </p:sp>
+      <p:sp>
+        <p:nvSpPr>
+          <p:cNvPr id="12" name="Rectangle 11"/>
+          <p:cNvSpPr/>
+          <p:nvPr/>
+        </p:nvSpPr>
+        <p:spPr>
+          <a:xfrm>
+            <a:off x="457200" y="3694176"/>
+            <a:ext cx="128016" cy="1051560"/>
+          </a:xfrm>
+          <a:prstGeom prst="rect">
+            <a:avLst/>
+          </a:prstGeom>
+          <a:solidFill>
+            <a:srgbClr val="A02030"/>
+          </a:solidFill>
+          <a:ln>
+            <a:noFill/>
+          </a:ln>
+        </p:spPr>
+        <p:style>
+          <a:lnRef idx="1">
+            <a:schemeClr val="accent1"/>
+          </a:lnRef>
+          <a:fillRef idx="3">
+            <a:schemeClr val="accent1"/>
+          </a:fillRef>
+          <a:effectRef idx="2">
+            <a:schemeClr val="accent1"/>
+          </a:effectRef>
+          <a:fontRef idx="minor">
+            <a:schemeClr val="lt1"/>
+          </a:fontRef>
+        </p:style>
+        <p:txBody>
+          <a:bodyPr rtlCol="0" anchor="ctr"/>
+          <a:lstStyle/>
+          <a:p>
+            <a:pPr algn="ctr"/>
+          </a:p>
+        </p:txBody>
+      </p:sp>
+      <p:sp>
+        <p:nvSpPr>
+          <p:cNvPr id="13" name="TextBox 12"/>
+          <p:cNvSpPr txBox="1"/>
+          <p:nvPr/>
+        </p:nvSpPr>
+        <p:spPr>
+          <a:xfrm>
+            <a:off x="777240" y="3831336"/>
+            <a:ext cx="10774375" cy="822959"/>
+          </a:xfrm>
+          <a:prstGeom prst="rect">
+            <a:avLst/>
+          </a:prstGeom>
+          <a:noFill/>
+        </p:spPr>
+        <p:txBody>
+          <a:bodyPr wrap="square">
+            <a:spAutoFit/>
+          </a:bodyPr>
+          <a:lstStyle/>
+          <a:p>
+            <a:r>
+              <a:rPr sz="1200" b="1" i="0">
+                <a:solidFill>
+                  <a:srgbClr val="A02030"/>
+                </a:solidFill>
+                <a:latin typeface="Calibri"/>
+              </a:rPr>
+              <a:t>Atención</a:t>
+            </a:r>
+          </a:p>
+          <a:p>
+            <a:pPr>
+              <a:spcBef>
+                <a:spcPts val="400"/>
+              </a:spcBef>
+            </a:pPr>
+            <a:r>
+              <a:rPr sz="1400" b="0" i="0">
+                <a:solidFill>
+                  <a:srgbClr val="333333"/>
+                </a:solidFill>
+                <a:latin typeface="Calibri"/>
+              </a:rPr>
+              <a:t>La sustentación es </a:t>
+            </a:r>
+            <a:r>
+              <a:rPr sz="1400" b="1" i="0">
+                <a:solidFill>
+                  <a:srgbClr val="333333"/>
+                </a:solidFill>
+                <a:latin typeface="Calibri"/>
+              </a:rPr>
+              <a:t>en vivo</a:t>
+            </a:r>
+            <a:r>
+              <a:rPr sz="1400" b="0" i="0">
+                <a:solidFill>
+                  <a:srgbClr val="333333"/>
+                </a:solidFill>
+                <a:latin typeface="Calibri"/>
+              </a:rPr>
+              <a:t> y con Q&amp;A: no se acepta video grabado en su lugar.</a:t>
+            </a:r>
+          </a:p>
+        </p:txBody>
+      </p:sp>
+      <p:sp>
+        <p:nvSpPr>
+          <p:cNvPr id="14" name="TextBox 13"/>
+          <p:cNvSpPr txBox="1"/>
+          <p:nvPr/>
+        </p:nvSpPr>
+        <p:spPr>
+          <a:xfrm>
+            <a:off x="11185855" y="6473952"/>
+            <a:ext cx="640080" cy="274320"/>
+          </a:xfrm>
+          <a:prstGeom prst="rect">
+            <a:avLst/>
+          </a:prstGeom>
+          <a:noFill/>
+        </p:spPr>
+        <p:txBody>
+          <a:bodyPr wrap="square">
+            <a:spAutoFit/>
+          </a:bodyPr>
+          <a:lstStyle/>
+          <a:p>
+            <a:pPr algn="r"/>
+            <a:r>
+              <a:rPr sz="1100" b="0" i="0">
+                <a:solidFill>
+                  <a:srgbClr val="666666"/>
+                </a:solidFill>
+                <a:latin typeface="Calibri"/>
+              </a:rPr>
+              <a:t>27</a:t>
+            </a:r>
+          </a:p>
+        </p:txBody>
+      </p:sp>
+    </p:spTree>
+  </p:cSld>
+  <p:clrMapOvr>
+    <a:masterClrMapping/>
+  </p:clrMapOvr>
+</p:sld>
+</file>
+
+<file path=ppt/slides/slide28.xml><?xml version="1.0" encoding="utf-8"?>
+<p:sld xmlns:a="http://schemas.openxmlformats.org/drawingml/2006/main" xmlns:p="http://schemas.openxmlformats.org/presentationml/2006/main" xmlns:r="http://schemas.openxmlformats.org/officeDocument/2006/relationships">
+  <p:cSld>
+    <p:bg>
+      <p:bgPr>
+        <a:solidFill>
+          <a:srgbClr val="FFFFFF"/>
+        </a:solidFill>
+        <a:effectLst/>
+      </p:bgPr>
+    </p:bg>
+    <p:spTree>
+      <p:nvGrpSpPr>
+        <p:cNvPr id="1" name=""/>
+        <p:cNvGrpSpPr/>
+        <p:nvPr/>
+      </p:nvGrpSpPr>
+      <p:grpSpPr/>
+      <p:sp>
+        <p:nvSpPr>
+          <p:cNvPr id="2" name="Rectangle 1"/>
+          <p:cNvSpPr/>
+          <p:nvPr/>
+        </p:nvSpPr>
+        <p:spPr>
+          <a:xfrm>
+            <a:off x="0" y="0"/>
             <a:ext cx="12191695" cy="164592"/>
           </a:xfrm>
           <a:prstGeom prst="rect">
@@ -12010,7 +12308,7 @@
                 </a:solidFill>
                 <a:latin typeface="Calibri"/>
               </a:rPr>
-              <a:t>Sustentar no es describir: el eje de toda la clase</a:t>
+              <a:t>Sustentar no es describir: el eje de toda la clase (1/2)</a:t>
             </a:r>
           </a:p>
         </p:txBody>
@@ -12098,54 +12396,6 @@
                 <a:latin typeface="Calibri"/>
               </a:rPr>
               <a:t>–   Si una eleccion no cumple esas tres condiciones no es arquitectura sino detalle de implementacion: elegir el nombre de una variable no es arquitectura, elegir si el frontend y la API viven en el mismo contenedor si lo es.</a:t>
-            </a:r>
-          </a:p>
-          <a:p>
-            <a:pPr>
-              <a:spcAft>
-                <a:spcPts val="800"/>
-              </a:spcAft>
-            </a:pPr>
-            <a:r>
-              <a:rPr sz="2000" b="0" i="0">
-                <a:solidFill>
-                  <a:srgbClr val="333333"/>
-                </a:solidFill>
-                <a:latin typeface="Calibri"/>
-              </a:rPr>
-              <a:t>–   Un trade-off es lo que se sacrifica al tomar esa decision.</a:t>
-            </a:r>
-          </a:p>
-          <a:p>
-            <a:pPr>
-              <a:spcAft>
-                <a:spcPts val="800"/>
-              </a:spcAft>
-            </a:pPr>
-            <a:r>
-              <a:rPr sz="2000" b="0" i="0">
-                <a:solidFill>
-                  <a:srgbClr val="333333"/>
-                </a:solidFill>
-                <a:latin typeface="Calibri"/>
-              </a:rPr>
-              <a:t>–   No existe decision de arquitectura sin trade-off, y cuando un estudiante afirma que su opcion es mejor en todo, lo que ocurre en realidad es que todavia no encontro que perdio.</a:t>
-            </a:r>
-          </a:p>
-          <a:p>
-            <a:pPr>
-              <a:spcAft>
-                <a:spcPts val="800"/>
-              </a:spcAft>
-            </a:pPr>
-            <a:r>
-              <a:rPr sz="2000" b="0" i="0">
-                <a:solidFill>
-                  <a:srgbClr val="333333"/>
-                </a:solidFill>
-                <a:latin typeface="Calibri"/>
-              </a:rPr>
-              <a:t>–   Toda la sustentacion de hoy se apoya en esta distincion, porque la rubrica no premia describir bien: premia justificar bien.</a:t>
             </a:r>
           </a:p>
         </p:txBody>
@@ -12326,7 +12576,7 @@
                 </a:solidFill>
                 <a:latin typeface="Calibri"/>
               </a:rPr>
-              <a:t>La prueba de tres capas que se aplica en voz alta</a:t>
+              <a:t>Sustentar no es describir: el eje de toda la clase (2/2)</a:t>
             </a:r>
           </a:p>
         </p:txBody>
@@ -12365,7 +12615,7 @@
                 </a:solidFill>
                 <a:latin typeface="Calibri"/>
               </a:rPr>
-              <a:t>–   Primera capa, el QUE: «CloudLite corre con un contenedor por servicio».</a:t>
+              <a:t>–   Un trade-off es lo que se sacrifica al tomar esa decision.</a:t>
             </a:r>
           </a:p>
           <a:p>
@@ -12381,7 +12631,7 @@
                 </a:solidFill>
                 <a:latin typeface="Calibri"/>
               </a:rPr>
-              <a:t>–   Segunda capa, el POR QUE: «porque el proyecto lo sostiene una sola persona sin presupuesto de nube, y un contenedor se levanta igual en el portatil de cualquiera y en Killercoda, sin instalar un hipervisor ni pedir tarjeta de credito».</a:t>
+              <a:t>–   No existe decision de arquitectura sin trade-off, y cuando un estudiante afirma que su opcion es mejor en todo, lo que ocurre en realidad es que todavia no encontro que perdio.</a:t>
             </a:r>
           </a:p>
           <a:p>
@@ -12397,71 +12647,7 @@
                 </a:solidFill>
                 <a:latin typeface="Calibri"/>
               </a:rPr>
-              <a:t>–   Tercera capa, A CAMBIO DE QUE: «a cambio de perder el aislamiento fuerte que da una maquina virtual completa, y de asumir que si el host cae, caen todos los servicios a la vez porque comparten el mismo kernel».</a:t>
-            </a:r>
-          </a:p>
-          <a:p>
-            <a:pPr>
-              <a:spcAft>
-                <a:spcPts val="800"/>
-              </a:spcAft>
-            </a:pPr>
-            <a:r>
-              <a:rPr sz="2000" b="0" i="0">
-                <a:solidFill>
-                  <a:srgbClr val="333333"/>
-                </a:solidFill>
-                <a:latin typeface="Calibri"/>
-              </a:rPr>
-              <a:t>–   Quien solo llega a la primera capa esta leyendo el diagrama en voz alta y no deberia obtener los puntos de sustentacion.</a:t>
-            </a:r>
-          </a:p>
-          <a:p>
-            <a:pPr>
-              <a:spcAft>
-                <a:spcPts val="800"/>
-              </a:spcAft>
-            </a:pPr>
-            <a:r>
-              <a:rPr sz="2000" b="0" i="0">
-                <a:solidFill>
-                  <a:srgbClr val="333333"/>
-                </a:solidFill>
-                <a:latin typeface="Calibri"/>
-              </a:rPr>
-              <a:t>–   Quien llega a la segunda esta justificando.</a:t>
-            </a:r>
-          </a:p>
-          <a:p>
-            <a:pPr>
-              <a:spcAft>
-                <a:spcPts val="800"/>
-              </a:spcAft>
-            </a:pPr>
-            <a:r>
-              <a:rPr sz="2000" b="0" i="0">
-                <a:solidFill>
-                  <a:srgbClr val="333333"/>
-                </a:solidFill>
-                <a:latin typeface="Calibri"/>
-              </a:rPr>
-              <a:t>–   Quien llega a la tercera esta sustentando como un arquitecto, porque demuestra que conocia el costo de su decision antes de tomarla y aun asi la tomo.</a:t>
-            </a:r>
-          </a:p>
-          <a:p>
-            <a:pPr>
-              <a:spcAft>
-                <a:spcPts val="800"/>
-              </a:spcAft>
-            </a:pPr>
-            <a:r>
-              <a:rPr sz="2000" b="0" i="0">
-                <a:solidFill>
-                  <a:srgbClr val="333333"/>
-                </a:solidFill>
-                <a:latin typeface="Calibri"/>
-              </a:rPr>
-              <a:t>–   La instruccion operativa para el docente es simple: ante cada afirmacion, preguntar «a cambio de que», y no aceptar la respuesta «de nada».</a:t>
+              <a:t>–   Toda la sustentacion de hoy se apoya en esta distincion, porque la rubrica no premia describir bien: premia justificar bien.</a:t>
             </a:r>
           </a:p>
         </p:txBody>

--- a/Arquitectura de Sistemas Computacionales/Clases/Clase 15 - Presentacion del proyecto y cierre/Presentacion.pptx
+++ b/Arquitectura de Sistemas Computacionales/Clases/Clase 15 - Presentacion del proyecto y cierre/Presentacion.pptx
@@ -8584,7 +8584,7 @@
                 </a:solidFill>
                 <a:latin typeface="Calibri"/>
               </a:rPr>
-              <a:t>El diagrama se entrega como código Mermaid dentro de la plataforma del curso, no como imagen</a:t>
+              <a:t>El diagrama se entrega como código Mermaid en la plataforma del curso, no como imagen</a:t>
             </a:r>
           </a:p>
         </p:txBody>
@@ -9531,7 +9531,7 @@
                 </a:solidFill>
                 <a:latin typeface="Calibri"/>
               </a:rPr>
-              <a:t>Google Docs/Slides · diagramas · capturas lab</a:t>
+              <a:t>Navegador · editores de texto y de diagramas del curso</a:t>
             </a:r>
           </a:p>
           <a:p>
@@ -10403,7 +10403,7 @@
                 </a:solidFill>
                 <a:latin typeface="Calibri"/>
               </a:rPr>
-              <a:t>El paquete se sube a la plataforma del curso </a:t>
+              <a:t>El paquete se sube a la plataforma del curso (la plataforma del curso · módulo Proyectos) </a:t>
             </a:r>
             <a:r>
               <a:rPr sz="1400" b="1" i="0">

--- a/Arquitectura de Sistemas Computacionales/Clases/Clase 15 - Presentacion del proyecto y cierre/Presentacion.pptx
+++ b/Arquitectura de Sistemas Computacionales/Clases/Clase 15 - Presentacion del proyecto y cierre/Presentacion.pptx
@@ -10,29 +10,21 @@
     <p:sldId id="258" r:id="rId9"/>
     <p:sldId id="259" r:id="rId10"/>
     <p:sldId id="260" r:id="rId11"/>
-    <p:sldId id="261" r:id="rId12"/>
-    <p:sldId id="262" r:id="rId13"/>
-    <p:sldId id="263" r:id="rId14"/>
-    <p:sldId id="264" r:id="rId15"/>
-    <p:sldId id="265" r:id="rId16"/>
-    <p:sldId id="266" r:id="rId17"/>
-    <p:sldId id="267" r:id="rId18"/>
-    <p:sldId id="268" r:id="rId19"/>
-    <p:sldId id="269" r:id="rId20"/>
-    <p:sldId id="270" r:id="rId21"/>
-    <p:sldId id="271" r:id="rId22"/>
-    <p:sldId id="272" r:id="rId23"/>
-    <p:sldId id="273" r:id="rId24"/>
-    <p:sldId id="274" r:id="rId25"/>
-    <p:sldId id="275" r:id="rId26"/>
-    <p:sldId id="276" r:id="rId27"/>
-    <p:sldId id="277" r:id="rId28"/>
-    <p:sldId id="278" r:id="rId29"/>
-    <p:sldId id="279" r:id="rId30"/>
-    <p:sldId id="280" r:id="rId31"/>
-    <p:sldId id="281" r:id="rId32"/>
-    <p:sldId id="282" r:id="rId33"/>
-    <p:sldId id="283" r:id="rId34"/>
+    <p:sldId id="261" r:id="rId13"/>
+    <p:sldId id="262" r:id="rId14"/>
+    <p:sldId id="263" r:id="rId15"/>
+    <p:sldId id="264" r:id="rId16"/>
+    <p:sldId id="265" r:id="rId17"/>
+    <p:sldId id="266" r:id="rId18"/>
+    <p:sldId id="267" r:id="rId19"/>
+    <p:sldId id="268" r:id="rId20"/>
+    <p:sldId id="269" r:id="rId21"/>
+    <p:sldId id="270" r:id="rId22"/>
+    <p:sldId id="271" r:id="rId23"/>
+    <p:sldId id="272" r:id="rId24"/>
+    <p:sldId id="273" r:id="rId25"/>
+    <p:sldId id="274" r:id="rId26"/>
+    <p:sldId id="275" r:id="rId27"/>
   </p:sldIdLst>
   <p:sldSz cx="12191695" cy="6858000" type="screen4x3"/>
   <p:notesSz cx="6858000" cy="9144000"/>
@@ -132,6 +124,976 @@
     </a:lvl9pPr>
   </p:defaultTextStyle>
 </p:presentation>
+</file>
+
+<file path=ppt/notesMasters/notesMaster1.xml><?xml version="1.0" encoding="utf-8"?>
+<p:notesMaster xmlns:a="http://schemas.openxmlformats.org/drawingml/2006/main" xmlns:p="http://schemas.openxmlformats.org/presentationml/2006/main" xmlns:r="http://schemas.openxmlformats.org/officeDocument/2006/relationships">
+  <p:cSld>
+    <p:bg>
+      <p:bgRef idx="1001">
+        <a:schemeClr val="bg1"/>
+      </p:bgRef>
+    </p:bg>
+    <p:spTree>
+      <p:nvGrpSpPr>
+        <p:cNvPr id="1" name=""/>
+        <p:cNvGrpSpPr/>
+        <p:nvPr/>
+      </p:nvGrpSpPr>
+      <p:grpSpPr>
+        <a:xfrm>
+          <a:off x="0" y="0"/>
+          <a:ext cx="0" cy="0"/>
+          <a:chOff x="0" y="0"/>
+          <a:chExt cx="0" cy="0"/>
+        </a:xfrm>
+      </p:grpSpPr>
+      <p:sp>
+        <p:nvSpPr>
+          <p:cNvPr id="2" name="Header Placeholder 1"/>
+          <p:cNvSpPr>
+            <a:spLocks noGrp="1"/>
+          </p:cNvSpPr>
+          <p:nvPr>
+            <p:ph type="hdr" sz="quarter"/>
+          </p:nvPr>
+        </p:nvSpPr>
+        <p:spPr>
+          <a:xfrm>
+            <a:off x="0" y="0"/>
+            <a:ext cx="2971800" cy="457200"/>
+          </a:xfrm>
+          <a:prstGeom prst="rect">
+            <a:avLst/>
+          </a:prstGeom>
+        </p:spPr>
+        <p:txBody>
+          <a:bodyPr vert="horz" lIns="91440" tIns="45720" rIns="91440" bIns="45720" rtlCol="0"/>
+          <a:lstStyle>
+            <a:lvl1pPr algn="l">
+              <a:defRPr sz="1200"/>
+            </a:lvl1pPr>
+          </a:lstStyle>
+          <a:p>
+            <a:endParaRPr lang="en-US"/>
+          </a:p>
+        </p:txBody>
+      </p:sp>
+      <p:sp>
+        <p:nvSpPr>
+          <p:cNvPr id="3" name="Date Placeholder 2"/>
+          <p:cNvSpPr>
+            <a:spLocks noGrp="1"/>
+          </p:cNvSpPr>
+          <p:nvPr>
+            <p:ph type="dt" idx="1"/>
+          </p:nvPr>
+        </p:nvSpPr>
+        <p:spPr>
+          <a:xfrm>
+            <a:off x="3884613" y="0"/>
+            <a:ext cx="2971800" cy="457200"/>
+          </a:xfrm>
+          <a:prstGeom prst="rect">
+            <a:avLst/>
+          </a:prstGeom>
+        </p:spPr>
+        <p:txBody>
+          <a:bodyPr vert="horz" lIns="91440" tIns="45720" rIns="91440" bIns="45720" rtlCol="0"/>
+          <a:lstStyle>
+            <a:lvl1pPr algn="r">
+              <a:defRPr sz="1200"/>
+            </a:lvl1pPr>
+          </a:lstStyle>
+          <a:p>
+            <a:fld id="{0F89C1C7-3DCD-1040-A9CF-14679D8B5DDD}" type="datetimeFigureOut">
+              <a:rPr lang="en-US" smtClean="0"/>
+              <a:t>10/17/16</a:t>
+            </a:fld>
+            <a:endParaRPr lang="en-US"/>
+          </a:p>
+        </p:txBody>
+      </p:sp>
+      <p:sp>
+        <p:nvSpPr>
+          <p:cNvPr id="4" name="Slide Image Placeholder 3"/>
+          <p:cNvSpPr>
+            <a:spLocks noGrp="1" noRot="1" noChangeAspect="1"/>
+          </p:cNvSpPr>
+          <p:nvPr>
+            <p:ph type="sldImg" idx="2"/>
+          </p:nvPr>
+        </p:nvSpPr>
+        <p:spPr>
+          <a:xfrm>
+            <a:off x="1143000" y="685800"/>
+            <a:ext cx="4572000" cy="3429000"/>
+          </a:xfrm>
+          <a:prstGeom prst="rect">
+            <a:avLst/>
+          </a:prstGeom>
+          <a:noFill/>
+          <a:ln w="12700">
+            <a:solidFill>
+              <a:prstClr val="black"/>
+            </a:solidFill>
+          </a:ln>
+        </p:spPr>
+        <p:txBody>
+          <a:bodyPr vert="horz" lIns="91440" tIns="45720" rIns="91440" bIns="45720" rtlCol="0" anchor="ctr"/>
+          <a:lstStyle/>
+          <a:p>
+            <a:endParaRPr lang="en-US"/>
+          </a:p>
+        </p:txBody>
+      </p:sp>
+      <p:sp>
+        <p:nvSpPr>
+          <p:cNvPr id="5" name="Notes Placeholder 4"/>
+          <p:cNvSpPr>
+            <a:spLocks noGrp="1"/>
+          </p:cNvSpPr>
+          <p:nvPr>
+            <p:ph type="body" sz="quarter" idx="3"/>
+          </p:nvPr>
+        </p:nvSpPr>
+        <p:spPr>
+          <a:xfrm>
+            <a:off x="685800" y="4343400"/>
+            <a:ext cx="5486400" cy="4114800"/>
+          </a:xfrm>
+          <a:prstGeom prst="rect">
+            <a:avLst/>
+          </a:prstGeom>
+        </p:spPr>
+        <p:txBody>
+          <a:bodyPr vert="horz" lIns="91440" tIns="45720" rIns="91440" bIns="45720" rtlCol="0"/>
+          <a:lstStyle/>
+          <a:p>
+            <a:pPr lvl="0"/>
+            <a:r>
+              <a:rPr lang="en-US" smtClean="0"/>
+              <a:t>Click to edit Master text styles</a:t>
+            </a:r>
+          </a:p>
+          <a:p>
+            <a:pPr lvl="1"/>
+            <a:r>
+              <a:rPr lang="en-US" smtClean="0"/>
+              <a:t>Second level</a:t>
+            </a:r>
+          </a:p>
+          <a:p>
+            <a:pPr lvl="2"/>
+            <a:r>
+              <a:rPr lang="en-US" smtClean="0"/>
+              <a:t>Third level</a:t>
+            </a:r>
+          </a:p>
+          <a:p>
+            <a:pPr lvl="3"/>
+            <a:r>
+              <a:rPr lang="en-US" smtClean="0"/>
+              <a:t>Fourth level</a:t>
+            </a:r>
+          </a:p>
+          <a:p>
+            <a:pPr lvl="4"/>
+            <a:r>
+              <a:rPr lang="en-US" smtClean="0"/>
+              <a:t>Fifth level</a:t>
+            </a:r>
+            <a:endParaRPr lang="en-US"/>
+          </a:p>
+        </p:txBody>
+      </p:sp>
+      <p:sp>
+        <p:nvSpPr>
+          <p:cNvPr id="6" name="Footer Placeholder 5"/>
+          <p:cNvSpPr>
+            <a:spLocks noGrp="1"/>
+          </p:cNvSpPr>
+          <p:nvPr>
+            <p:ph type="ftr" sz="quarter" idx="4"/>
+          </p:nvPr>
+        </p:nvSpPr>
+        <p:spPr>
+          <a:xfrm>
+            <a:off x="0" y="8685213"/>
+            <a:ext cx="2971800" cy="457200"/>
+          </a:xfrm>
+          <a:prstGeom prst="rect">
+            <a:avLst/>
+          </a:prstGeom>
+        </p:spPr>
+        <p:txBody>
+          <a:bodyPr vert="horz" lIns="91440" tIns="45720" rIns="91440" bIns="45720" rtlCol="0" anchor="b"/>
+          <a:lstStyle>
+            <a:lvl1pPr algn="l">
+              <a:defRPr sz="1200"/>
+            </a:lvl1pPr>
+          </a:lstStyle>
+          <a:p>
+            <a:endParaRPr lang="en-US"/>
+          </a:p>
+        </p:txBody>
+      </p:sp>
+      <p:sp>
+        <p:nvSpPr>
+          <p:cNvPr id="7" name="Slide Number Placeholder 6"/>
+          <p:cNvSpPr>
+            <a:spLocks noGrp="1"/>
+          </p:cNvSpPr>
+          <p:nvPr>
+            <p:ph type="sldNum" sz="quarter" idx="5"/>
+          </p:nvPr>
+        </p:nvSpPr>
+        <p:spPr>
+          <a:xfrm>
+            <a:off x="3884613" y="8685213"/>
+            <a:ext cx="2971800" cy="457200"/>
+          </a:xfrm>
+          <a:prstGeom prst="rect">
+            <a:avLst/>
+          </a:prstGeom>
+        </p:spPr>
+        <p:txBody>
+          <a:bodyPr vert="horz" lIns="91440" tIns="45720" rIns="91440" bIns="45720" rtlCol="0" anchor="b"/>
+          <a:lstStyle>
+            <a:lvl1pPr algn="r">
+              <a:defRPr sz="1200"/>
+            </a:lvl1pPr>
+          </a:lstStyle>
+          <a:p>
+            <a:fld id="{BB5E49A5-4136-284D-997B-48E1D791AD67}" type="slidenum">
+              <a:rPr lang="en-US" smtClean="0"/>
+              <a:t>‹#›</a:t>
+            </a:fld>
+            <a:endParaRPr lang="en-US"/>
+          </a:p>
+        </p:txBody>
+      </p:sp>
+    </p:spTree>
+    <p:extLst>
+      <p:ext uri="{BB962C8B-B14F-4D97-AF65-F5344CB8AC3E}">
+        <p14:creationId xmlns:p14="http://schemas.microsoft.com/office/powerpoint/2010/main" val="2623252185"/>
+      </p:ext>
+    </p:extLst>
+  </p:cSld>
+  <p:clrMap bg1="lt1" tx1="dk1" bg2="lt2" tx2="dk2" accent1="accent1" accent2="accent2" accent3="accent3" accent4="accent4" accent5="accent5" accent6="accent6" hlink="hlink" folHlink="folHlink"/>
+  <p:notesStyle>
+    <a:lvl1pPr marL="0" algn="l" defTabSz="457200" rtl="0" eaLnBrk="1" latinLnBrk="0" hangingPunct="1">
+      <a:defRPr sz="1200" kern="1200">
+        <a:solidFill>
+          <a:schemeClr val="tx1"/>
+        </a:solidFill>
+        <a:latin typeface="+mn-lt"/>
+        <a:ea typeface="+mn-ea"/>
+        <a:cs typeface="+mn-cs"/>
+      </a:defRPr>
+    </a:lvl1pPr>
+    <a:lvl2pPr marL="457200" algn="l" defTabSz="457200" rtl="0" eaLnBrk="1" latinLnBrk="0" hangingPunct="1">
+      <a:defRPr sz="1200" kern="1200">
+        <a:solidFill>
+          <a:schemeClr val="tx1"/>
+        </a:solidFill>
+        <a:latin typeface="+mn-lt"/>
+        <a:ea typeface="+mn-ea"/>
+        <a:cs typeface="+mn-cs"/>
+      </a:defRPr>
+    </a:lvl2pPr>
+    <a:lvl3pPr marL="914400" algn="l" defTabSz="457200" rtl="0" eaLnBrk="1" latinLnBrk="0" hangingPunct="1">
+      <a:defRPr sz="1200" kern="1200">
+        <a:solidFill>
+          <a:schemeClr val="tx1"/>
+        </a:solidFill>
+        <a:latin typeface="+mn-lt"/>
+        <a:ea typeface="+mn-ea"/>
+        <a:cs typeface="+mn-cs"/>
+      </a:defRPr>
+    </a:lvl3pPr>
+    <a:lvl4pPr marL="1371600" algn="l" defTabSz="457200" rtl="0" eaLnBrk="1" latinLnBrk="0" hangingPunct="1">
+      <a:defRPr sz="1200" kern="1200">
+        <a:solidFill>
+          <a:schemeClr val="tx1"/>
+        </a:solidFill>
+        <a:latin typeface="+mn-lt"/>
+        <a:ea typeface="+mn-ea"/>
+        <a:cs typeface="+mn-cs"/>
+      </a:defRPr>
+    </a:lvl4pPr>
+    <a:lvl5pPr marL="1828800" algn="l" defTabSz="457200" rtl="0" eaLnBrk="1" latinLnBrk="0" hangingPunct="1">
+      <a:defRPr sz="1200" kern="1200">
+        <a:solidFill>
+          <a:schemeClr val="tx1"/>
+        </a:solidFill>
+        <a:latin typeface="+mn-lt"/>
+        <a:ea typeface="+mn-ea"/>
+        <a:cs typeface="+mn-cs"/>
+      </a:defRPr>
+    </a:lvl5pPr>
+    <a:lvl6pPr marL="2286000" algn="l" defTabSz="457200" rtl="0" eaLnBrk="1" latinLnBrk="0" hangingPunct="1">
+      <a:defRPr sz="1200" kern="1200">
+        <a:solidFill>
+          <a:schemeClr val="tx1"/>
+        </a:solidFill>
+        <a:latin typeface="+mn-lt"/>
+        <a:ea typeface="+mn-ea"/>
+        <a:cs typeface="+mn-cs"/>
+      </a:defRPr>
+    </a:lvl6pPr>
+    <a:lvl7pPr marL="2743200" algn="l" defTabSz="457200" rtl="0" eaLnBrk="1" latinLnBrk="0" hangingPunct="1">
+      <a:defRPr sz="1200" kern="1200">
+        <a:solidFill>
+          <a:schemeClr val="tx1"/>
+        </a:solidFill>
+        <a:latin typeface="+mn-lt"/>
+        <a:ea typeface="+mn-ea"/>
+        <a:cs typeface="+mn-cs"/>
+      </a:defRPr>
+    </a:lvl7pPr>
+    <a:lvl8pPr marL="3200400" algn="l" defTabSz="457200" rtl="0" eaLnBrk="1" latinLnBrk="0" hangingPunct="1">
+      <a:defRPr sz="1200" kern="1200">
+        <a:solidFill>
+          <a:schemeClr val="tx1"/>
+        </a:solidFill>
+        <a:latin typeface="+mn-lt"/>
+        <a:ea typeface="+mn-ea"/>
+        <a:cs typeface="+mn-cs"/>
+      </a:defRPr>
+    </a:lvl8pPr>
+    <a:lvl9pPr marL="3657600" algn="l" defTabSz="457200" rtl="0" eaLnBrk="1" latinLnBrk="0" hangingPunct="1">
+      <a:defRPr sz="1200" kern="1200">
+        <a:solidFill>
+          <a:schemeClr val="tx1"/>
+        </a:solidFill>
+        <a:latin typeface="+mn-lt"/>
+        <a:ea typeface="+mn-ea"/>
+        <a:cs typeface="+mn-cs"/>
+      </a:defRPr>
+    </a:lvl9pPr>
+  </p:notesStyle>
+</p:notesMaster>
+</file>
+
+<file path=ppt/notesSlides/notesSlide1.xml><?xml version="1.0" encoding="utf-8"?>
+<p:notes xmlns:a="http://schemas.openxmlformats.org/drawingml/2006/main" xmlns:p="http://schemas.openxmlformats.org/presentationml/2006/main" xmlns:r="http://schemas.openxmlformats.org/officeDocument/2006/relationships">
+  <p:cSld>
+    <p:spTree>
+      <p:nvGrpSpPr>
+        <p:cNvPr id="1" name=""/>
+        <p:cNvGrpSpPr/>
+        <p:nvPr/>
+      </p:nvGrpSpPr>
+      <p:grpSpPr>
+        <a:xfrm>
+          <a:off x="0" y="0"/>
+          <a:ext cx="0" cy="0"/>
+          <a:chOff x="0" y="0"/>
+          <a:chExt cx="0" cy="0"/>
+        </a:xfrm>
+      </p:grpSpPr>
+      <p:sp>
+        <p:nvSpPr>
+          <p:cNvPr id="2" name="Slide Image Placeholder 1"/>
+          <p:cNvSpPr>
+            <a:spLocks noGrp="1"/>
+          </p:cNvSpPr>
+          <p:nvPr>
+            <p:ph type="sldImg" idx="2"/>
+          </p:nvPr>
+        </p:nvSpPr>
+        <p:spPr/>
+      </p:sp>
+      <p:sp>
+        <p:nvSpPr>
+          <p:cNvPr id="3" name="Notes Placeholder 2"/>
+          <p:cNvSpPr>
+            <a:spLocks noGrp="1"/>
+          </p:cNvSpPr>
+          <p:nvPr>
+            <p:ph type="body" idx="3" sz="quarter"/>
+          </p:nvPr>
+        </p:nvSpPr>
+        <p:spPr/>
+        <p:txBody>
+          <a:bodyPr/>
+          <a:lstStyle/>
+          <a:p>
+            <a:r>
+              <a:t>Conviene fijar el termino con precision: una decision de arquitectura es una eleccion que afecta la estructura del sistema, es costosa de revertir una vez implementada, y tiene al menos una alternativa razonable que se descarto.</a:t>
+            </a:r>
+          </a:p>
+        </p:txBody>
+      </p:sp>
+      <p:sp>
+        <p:nvSpPr>
+          <p:cNvPr id="4" name="Slide Number Placeholder 3"/>
+          <p:cNvSpPr>
+            <a:spLocks noGrp="1"/>
+          </p:cNvSpPr>
+          <p:nvPr>
+            <p:ph type="sldNum" idx="5" sz="quarter"/>
+          </p:nvPr>
+        </p:nvSpPr>
+        <p:spPr/>
+      </p:sp>
+    </p:spTree>
+  </p:cSld>
+  <p:clrMapOvr>
+    <a:masterClrMapping/>
+  </p:clrMapOvr>
+</p:notes>
+</file>
+
+<file path=ppt/notesSlides/notesSlide2.xml><?xml version="1.0" encoding="utf-8"?>
+<p:notes xmlns:a="http://schemas.openxmlformats.org/drawingml/2006/main" xmlns:p="http://schemas.openxmlformats.org/presentationml/2006/main" xmlns:r="http://schemas.openxmlformats.org/officeDocument/2006/relationships">
+  <p:cSld>
+    <p:spTree>
+      <p:nvGrpSpPr>
+        <p:cNvPr id="1" name=""/>
+        <p:cNvGrpSpPr/>
+        <p:nvPr/>
+      </p:nvGrpSpPr>
+      <p:grpSpPr>
+        <a:xfrm>
+          <a:off x="0" y="0"/>
+          <a:ext cx="0" cy="0"/>
+          <a:chOff x="0" y="0"/>
+          <a:chExt cx="0" cy="0"/>
+        </a:xfrm>
+      </p:grpSpPr>
+      <p:sp>
+        <p:nvSpPr>
+          <p:cNvPr id="2" name="Slide Image Placeholder 1"/>
+          <p:cNvSpPr>
+            <a:spLocks noGrp="1"/>
+          </p:cNvSpPr>
+          <p:nvPr>
+            <p:ph type="sldImg" idx="2"/>
+          </p:nvPr>
+        </p:nvSpPr>
+        <p:spPr/>
+      </p:sp>
+      <p:sp>
+        <p:nvSpPr>
+          <p:cNvPr id="3" name="Notes Placeholder 2"/>
+          <p:cNvSpPr>
+            <a:spLocks noGrp="1"/>
+          </p:cNvSpPr>
+          <p:nvPr>
+            <p:ph type="body" idx="3" sz="quarter"/>
+          </p:nvPr>
+        </p:nvSpPr>
+        <p:spPr/>
+        <p:txBody>
+          <a:bodyPr/>
+          <a:lstStyle/>
+          <a:p>
+            <a:r>
+              <a:t>Existe una prueba practica de tres capas que el docente puede aplicar en voz alta a cualquier afirmacion del estudiante, y conviene ensenarla antes de que empiecen las presentaciones.</a:t>
+            </a:r>
+          </a:p>
+          <a:p/>
+          <a:p>
+            <a:r>
+              <a:t>Quien solo llega a la primera capa esta leyendo el diagrama en voz alta y no deberia obtener los puntos de sustentacion.</a:t>
+            </a:r>
+          </a:p>
+          <a:p/>
+          <a:p>
+            <a:r>
+              <a:t>Quien llega a la segunda esta justificando.</a:t>
+            </a:r>
+          </a:p>
+          <a:p/>
+          <a:p>
+            <a:r>
+              <a:t>Quien llega a la tercera esta sustentando como un arquitecto, porque demuestra que conocia el costo de su decision antes de tomarla y aun asi la tomo.</a:t>
+            </a:r>
+          </a:p>
+        </p:txBody>
+      </p:sp>
+      <p:sp>
+        <p:nvSpPr>
+          <p:cNvPr id="4" name="Slide Number Placeholder 3"/>
+          <p:cNvSpPr>
+            <a:spLocks noGrp="1"/>
+          </p:cNvSpPr>
+          <p:nvPr>
+            <p:ph type="sldNum" idx="5" sz="quarter"/>
+          </p:nvPr>
+        </p:nvSpPr>
+        <p:spPr/>
+      </p:sp>
+    </p:spTree>
+  </p:cSld>
+  <p:clrMapOvr>
+    <a:masterClrMapping/>
+  </p:clrMapOvr>
+</p:notes>
+</file>
+
+<file path=ppt/notesSlides/notesSlide3.xml><?xml version="1.0" encoding="utf-8"?>
+<p:notes xmlns:a="http://schemas.openxmlformats.org/drawingml/2006/main" xmlns:p="http://schemas.openxmlformats.org/presentationml/2006/main" xmlns:r="http://schemas.openxmlformats.org/officeDocument/2006/relationships">
+  <p:cSld>
+    <p:spTree>
+      <p:nvGrpSpPr>
+        <p:cNvPr id="1" name=""/>
+        <p:cNvGrpSpPr/>
+        <p:nvPr/>
+      </p:nvGrpSpPr>
+      <p:grpSpPr>
+        <a:xfrm>
+          <a:off x="0" y="0"/>
+          <a:ext cx="0" cy="0"/>
+          <a:chOff x="0" y="0"/>
+          <a:chExt cx="0" cy="0"/>
+        </a:xfrm>
+      </p:grpSpPr>
+      <p:sp>
+        <p:nvSpPr>
+          <p:cNvPr id="2" name="Slide Image Placeholder 1"/>
+          <p:cNvSpPr>
+            <a:spLocks noGrp="1"/>
+          </p:cNvSpPr>
+          <p:nvPr>
+            <p:ph type="sldImg" idx="2"/>
+          </p:nvPr>
+        </p:nvSpPr>
+        <p:spPr/>
+      </p:sp>
+      <p:sp>
+        <p:nvSpPr>
+          <p:cNvPr id="3" name="Notes Placeholder 2"/>
+          <p:cNvSpPr>
+            <a:spLocks noGrp="1"/>
+          </p:cNvSpPr>
+          <p:nvPr>
+            <p:ph type="body" idx="3" sz="quarter"/>
+          </p:nvPr>
+        </p:nvSpPr>
+        <p:spPr/>
+        <p:txBody>
+          <a:bodyPr/>
+          <a:lstStyle/>
+          <a:p>
+            <a:r>
+              <a:t>Estado, «Aceptado» mas la fecha en que se decidio.</a:t>
+            </a:r>
+          </a:p>
+          <a:p/>
+          <a:p>
+            <a:r>
+              <a:t>Decision, en una frase afirmativa y en presente.</a:t>
+            </a:r>
+          </a:p>
+          <a:p/>
+          <a:p>
+            <a:r>
+              <a:t>Alternativas descartadas, exactamente dos, cada una con la razon concreta del descarte.</a:t>
+            </a:r>
+          </a:p>
+          <a:p/>
+          <a:p>
+            <a:r>
+              <a:t>Citar un ADR por numero le dice al evaluador que existe una traza escrita y verificable, no una improvisacion del momento; es la diferencia entre quien decidio y quien recuerda.</a:t>
+            </a:r>
+          </a:p>
+        </p:txBody>
+      </p:sp>
+      <p:sp>
+        <p:nvSpPr>
+          <p:cNvPr id="4" name="Slide Number Placeholder 3"/>
+          <p:cNvSpPr>
+            <a:spLocks noGrp="1"/>
+          </p:cNvSpPr>
+          <p:nvPr>
+            <p:ph type="sldNum" idx="5" sz="quarter"/>
+          </p:nvPr>
+        </p:nvSpPr>
+        <p:spPr/>
+      </p:sp>
+    </p:spTree>
+  </p:cSld>
+  <p:clrMapOvr>
+    <a:masterClrMapping/>
+  </p:clrMapOvr>
+</p:notes>
+</file>
+
+<file path=ppt/notesSlides/notesSlide4.xml><?xml version="1.0" encoding="utf-8"?>
+<p:notes xmlns:a="http://schemas.openxmlformats.org/drawingml/2006/main" xmlns:p="http://schemas.openxmlformats.org/presentationml/2006/main" xmlns:r="http://schemas.openxmlformats.org/officeDocument/2006/relationships">
+  <p:cSld>
+    <p:spTree>
+      <p:nvGrpSpPr>
+        <p:cNvPr id="1" name=""/>
+        <p:cNvGrpSpPr/>
+        <p:nvPr/>
+      </p:nvGrpSpPr>
+      <p:grpSpPr>
+        <a:xfrm>
+          <a:off x="0" y="0"/>
+          <a:ext cx="0" cy="0"/>
+          <a:chOff x="0" y="0"/>
+          <a:chExt cx="0" cy="0"/>
+        </a:xfrm>
+      </p:grpSpPr>
+      <p:sp>
+        <p:nvSpPr>
+          <p:cNvPr id="2" name="Slide Image Placeholder 1"/>
+          <p:cNvSpPr>
+            <a:spLocks noGrp="1"/>
+          </p:cNvSpPr>
+          <p:nvPr>
+            <p:ph type="sldImg" idx="2"/>
+          </p:nvPr>
+        </p:nvSpPr>
+        <p:spPr/>
+      </p:sp>
+      <p:sp>
+        <p:nvSpPr>
+          <p:cNvPr id="3" name="Notes Placeholder 2"/>
+          <p:cNvSpPr>
+            <a:spLocks noGrp="1"/>
+          </p:cNvSpPr>
+          <p:nvPr>
+            <p:ph type="body" idx="3" sz="quarter"/>
+          </p:nvPr>
+        </p:nvSpPr>
+        <p:spPr/>
+        <p:txBody>
+          <a:bodyPr/>
+          <a:lstStyle/>
+          <a:p>
+            <a:r>
+              <a:t>La razon es concreta y el docente debe decirla: si el estudiante trae veinte diapositivas, no termina, corre las ultimas, y las ultimas suelen ser justamente las de seguridad, costos y escalabilidad, donde estan los puntos de la rubrica que menos se defienden solos.</a:t>
+            </a:r>
+          </a:p>
+        </p:txBody>
+      </p:sp>
+      <p:sp>
+        <p:nvSpPr>
+          <p:cNvPr id="4" name="Slide Number Placeholder 3"/>
+          <p:cNvSpPr>
+            <a:spLocks noGrp="1"/>
+          </p:cNvSpPr>
+          <p:nvPr>
+            <p:ph type="sldNum" idx="5" sz="quarter"/>
+          </p:nvPr>
+        </p:nvSpPr>
+        <p:spPr/>
+      </p:sp>
+    </p:spTree>
+  </p:cSld>
+  <p:clrMapOvr>
+    <a:masterClrMapping/>
+  </p:clrMapOvr>
+</p:notes>
+</file>
+
+<file path=ppt/notesSlides/notesSlide5.xml><?xml version="1.0" encoding="utf-8"?>
+<p:notes xmlns:a="http://schemas.openxmlformats.org/drawingml/2006/main" xmlns:p="http://schemas.openxmlformats.org/presentationml/2006/main" xmlns:r="http://schemas.openxmlformats.org/officeDocument/2006/relationships">
+  <p:cSld>
+    <p:spTree>
+      <p:nvGrpSpPr>
+        <p:cNvPr id="1" name=""/>
+        <p:cNvGrpSpPr/>
+        <p:nvPr/>
+      </p:nvGrpSpPr>
+      <p:grpSpPr>
+        <a:xfrm>
+          <a:off x="0" y="0"/>
+          <a:ext cx="0" cy="0"/>
+          <a:chOff x="0" y="0"/>
+          <a:chExt cx="0" cy="0"/>
+        </a:xfrm>
+      </p:grpSpPr>
+      <p:sp>
+        <p:nvSpPr>
+          <p:cNvPr id="2" name="Slide Image Placeholder 1"/>
+          <p:cNvSpPr>
+            <a:spLocks noGrp="1"/>
+          </p:cNvSpPr>
+          <p:nvPr>
+            <p:ph type="sldImg" idx="2"/>
+          </p:nvPr>
+        </p:nvSpPr>
+        <p:spPr/>
+      </p:sp>
+      <p:sp>
+        <p:nvSpPr>
+          <p:cNvPr id="3" name="Notes Placeholder 2"/>
+          <p:cNvSpPr>
+            <a:spLocks noGrp="1"/>
+          </p:cNvSpPr>
+          <p:nvPr>
+            <p:ph type="body" idx="3" sz="quarter"/>
+          </p:nvPr>
+        </p:nvSpPr>
+        <p:spPr/>
+        <p:txBody>
+          <a:bodyPr/>
+          <a:lstStyle/>
+          <a:p>
+            <a:r>
+              <a:t>La respuesta del docente debe ser: en equipo se puede repartir quien HABLA de cada tema, pero no quien ENTIENDE cada tema, porque el Q&amp;A se dirige al azar; y en modo individual no hay reparto posible, de modo que la pregunta pierde sentido y lo que queda es preparar el sistema completo.</a:t>
+            </a:r>
+          </a:p>
+          <a:p/>
+          <a:p>
+            <a:r>
+              <a:t>La razon no es castigar.</a:t>
+            </a:r>
+          </a:p>
+          <a:p/>
+          <a:p>
+            <a:r>
+              <a:t>Ese ejercicio suele revelar en cinco minutos lo que la nota habria revelado demasiado tarde.</a:t>
+            </a:r>
+          </a:p>
+        </p:txBody>
+      </p:sp>
+      <p:sp>
+        <p:nvSpPr>
+          <p:cNvPr id="4" name="Slide Number Placeholder 3"/>
+          <p:cNvSpPr>
+            <a:spLocks noGrp="1"/>
+          </p:cNvSpPr>
+          <p:nvPr>
+            <p:ph type="sldNum" idx="5" sz="quarter"/>
+          </p:nvPr>
+        </p:nvSpPr>
+        <p:spPr/>
+      </p:sp>
+    </p:spTree>
+  </p:cSld>
+  <p:clrMapOvr>
+    <a:masterClrMapping/>
+  </p:clrMapOvr>
+</p:notes>
+</file>
+
+<file path=ppt/notesSlides/notesSlide6.xml><?xml version="1.0" encoding="utf-8"?>
+<p:notes xmlns:a="http://schemas.openxmlformats.org/drawingml/2006/main" xmlns:p="http://schemas.openxmlformats.org/presentationml/2006/main" xmlns:r="http://schemas.openxmlformats.org/officeDocument/2006/relationships">
+  <p:cSld>
+    <p:spTree>
+      <p:nvGrpSpPr>
+        <p:cNvPr id="1" name=""/>
+        <p:cNvGrpSpPr/>
+        <p:nvPr/>
+      </p:nvGrpSpPr>
+      <p:grpSpPr>
+        <a:xfrm>
+          <a:off x="0" y="0"/>
+          <a:ext cx="0" cy="0"/>
+          <a:chOff x="0" y="0"/>
+          <a:chExt cx="0" cy="0"/>
+        </a:xfrm>
+      </p:grpSpPr>
+      <p:sp>
+        <p:nvSpPr>
+          <p:cNvPr id="2" name="Slide Image Placeholder 1"/>
+          <p:cNvSpPr>
+            <a:spLocks noGrp="1"/>
+          </p:cNvSpPr>
+          <p:nvPr>
+            <p:ph type="sldImg" idx="2"/>
+          </p:nvPr>
+        </p:nvSpPr>
+        <p:spPr/>
+      </p:sp>
+      <p:sp>
+        <p:nvSpPr>
+          <p:cNvPr id="3" name="Notes Placeholder 2"/>
+          <p:cNvSpPr>
+            <a:spLocks noGrp="1"/>
+          </p:cNvSpPr>
+          <p:nvPr>
+            <p:ph type="body" idx="3" sz="quarter"/>
+          </p:nvPr>
+        </p:nvSpPr>
+        <p:spPr/>
+        <p:txBody>
+          <a:bodyPr/>
+          <a:lstStyle/>
+          <a:p>
+            <a:r>
+              <a:t>El Q&amp;A tecnico tiene tres tipos de pregunta y conviene que el docente los reconozca para dosificarlos.</a:t>
+            </a:r>
+          </a:p>
+          <a:p/>
+          <a:p>
+            <a:r>
+              <a:t>La respuesta correcta es que decir «no lo medimos» no penaliza si va acompanado de como se mediria: «no medimos el p95 porque no hay trafico real, pero el plan es simular 50 peticiones por segundo y observar la latencia de la API, que es el cuello de botella que sospechamos por lo que vimos en la Clase 12».</a:t>
+            </a:r>
+          </a:p>
+          <a:p/>
+          <a:p>
+            <a:r>
+              <a:t>Improvisar un dato falso, en cambio, se detecta con una sola pregunta de seguimiento y cuesta mucho mas que admitir el limite.</a:t>
+            </a:r>
+          </a:p>
+        </p:txBody>
+      </p:sp>
+      <p:sp>
+        <p:nvSpPr>
+          <p:cNvPr id="4" name="Slide Number Placeholder 3"/>
+          <p:cNvSpPr>
+            <a:spLocks noGrp="1"/>
+          </p:cNvSpPr>
+          <p:nvPr>
+            <p:ph type="sldNum" idx="5" sz="quarter"/>
+          </p:nvPr>
+        </p:nvSpPr>
+        <p:spPr/>
+      </p:sp>
+    </p:spTree>
+  </p:cSld>
+  <p:clrMapOvr>
+    <a:masterClrMapping/>
+  </p:clrMapOvr>
+</p:notes>
+</file>
+
+<file path=ppt/notesSlides/notesSlide7.xml><?xml version="1.0" encoding="utf-8"?>
+<p:notes xmlns:a="http://schemas.openxmlformats.org/drawingml/2006/main" xmlns:p="http://schemas.openxmlformats.org/presentationml/2006/main" xmlns:r="http://schemas.openxmlformats.org/officeDocument/2006/relationships">
+  <p:cSld>
+    <p:spTree>
+      <p:nvGrpSpPr>
+        <p:cNvPr id="1" name=""/>
+        <p:cNvGrpSpPr/>
+        <p:nvPr/>
+      </p:nvGrpSpPr>
+      <p:grpSpPr>
+        <a:xfrm>
+          <a:off x="0" y="0"/>
+          <a:ext cx="0" cy="0"/>
+          <a:chOff x="0" y="0"/>
+          <a:chExt cx="0" cy="0"/>
+        </a:xfrm>
+      </p:grpSpPr>
+      <p:sp>
+        <p:nvSpPr>
+          <p:cNvPr id="2" name="Slide Image Placeholder 1"/>
+          <p:cNvSpPr>
+            <a:spLocks noGrp="1"/>
+          </p:cNvSpPr>
+          <p:nvPr>
+            <p:ph type="sldImg" idx="2"/>
+          </p:nvPr>
+        </p:nvSpPr>
+        <p:spPr/>
+      </p:sp>
+      <p:sp>
+        <p:nvSpPr>
+          <p:cNvPr id="3" name="Notes Placeholder 2"/>
+          <p:cNvSpPr>
+            <a:spLocks noGrp="1"/>
+          </p:cNvSpPr>
+          <p:nvPr>
+            <p:ph type="body" idx="3" sz="quarter"/>
+          </p:nvPr>
+        </p:nvSpPr>
+        <p:spPr/>
+        <p:txBody>
+          <a:bodyPr/>
+          <a:lstStyle/>
+          <a:p>
+            <a:r>
+              <a:t>Evaluar con rubrica significa asignar puntos a evidencia observable y no a impresion general, y por eso conviene leer el reparto en voz alta al abrir la clase.</a:t>
+            </a:r>
+          </a:p>
+        </p:txBody>
+      </p:sp>
+      <p:sp>
+        <p:nvSpPr>
+          <p:cNvPr id="4" name="Slide Number Placeholder 3"/>
+          <p:cNvSpPr>
+            <a:spLocks noGrp="1"/>
+          </p:cNvSpPr>
+          <p:nvPr>
+            <p:ph type="sldNum" idx="5" sz="quarter"/>
+          </p:nvPr>
+        </p:nvSpPr>
+        <p:spPr/>
+      </p:sp>
+    </p:spTree>
+  </p:cSld>
+  <p:clrMapOvr>
+    <a:masterClrMapping/>
+  </p:clrMapOvr>
+</p:notes>
+</file>
+
+<file path=ppt/notesSlides/notesSlide8.xml><?xml version="1.0" encoding="utf-8"?>
+<p:notes xmlns:a="http://schemas.openxmlformats.org/drawingml/2006/main" xmlns:p="http://schemas.openxmlformats.org/presentationml/2006/main" xmlns:r="http://schemas.openxmlformats.org/officeDocument/2006/relationships">
+  <p:cSld>
+    <p:spTree>
+      <p:nvGrpSpPr>
+        <p:cNvPr id="1" name=""/>
+        <p:cNvGrpSpPr/>
+        <p:nvPr/>
+      </p:nvGrpSpPr>
+      <p:grpSpPr>
+        <a:xfrm>
+          <a:off x="0" y="0"/>
+          <a:ext cx="0" cy="0"/>
+          <a:chOff x="0" y="0"/>
+          <a:chExt cx="0" cy="0"/>
+        </a:xfrm>
+      </p:grpSpPr>
+      <p:sp>
+        <p:nvSpPr>
+          <p:cNvPr id="2" name="Slide Image Placeholder 1"/>
+          <p:cNvSpPr>
+            <a:spLocks noGrp="1"/>
+          </p:cNvSpPr>
+          <p:nvPr>
+            <p:ph type="sldImg" idx="2"/>
+          </p:nvPr>
+        </p:nvSpPr>
+        <p:spPr/>
+      </p:sp>
+      <p:sp>
+        <p:nvSpPr>
+          <p:cNvPr id="3" name="Notes Placeholder 2"/>
+          <p:cNvSpPr>
+            <a:spLocks noGrp="1"/>
+          </p:cNvSpPr>
+          <p:nvPr>
+            <p:ph type="body" idx="3" sz="quarter"/>
+          </p:nvPr>
+        </p:nvSpPr>
+        <p:spPr/>
+        <p:txBody>
+          <a:bodyPr/>
+          <a:lstStyle/>
+          <a:p>
+            <a:r>
+              <a:t>Conviene tambien cerrar la duda sobre las herramientas, porque algun estudiante la trae: el curso prohibio la nube de pago por razones pedagogicas y de equidad, no porque draw.io, Killercoda y GitHub Actions sean juguetes.</a:t>
+            </a:r>
+          </a:p>
+        </p:txBody>
+      </p:sp>
+      <p:sp>
+        <p:nvSpPr>
+          <p:cNvPr id="4" name="Slide Number Placeholder 3"/>
+          <p:cNvSpPr>
+            <a:spLocks noGrp="1"/>
+          </p:cNvSpPr>
+          <p:nvPr>
+            <p:ph type="sldNum" idx="5" sz="quarter"/>
+          </p:nvPr>
+        </p:nvSpPr>
+        <p:spPr/>
+      </p:sp>
+    </p:spTree>
+  </p:cSld>
+  <p:clrMapOvr>
+    <a:masterClrMapping/>
+  </p:clrMapOvr>
+</p:notes>
 </file>
 
 <file path=ppt/slideLayouts/slideLayout1.xml><?xml version="1.0" encoding="utf-8"?>
@@ -3645,7 +4607,7 @@
                 </a:solidFill>
                 <a:latin typeface="Calibri"/>
               </a:rPr>
-              <a:t>La prueba de tres capas que se aplica en voz alta</a:t>
+              <a:t>El pitch de 5 a 8 minutos: el reparto que funciona (1/2)</a:t>
             </a:r>
           </a:p>
         </p:txBody>
@@ -3684,7 +4646,7 @@
                 </a:solidFill>
                 <a:latin typeface="Calibri"/>
               </a:rPr>
-              <a:t>–   Primera capa, el QUE: «CloudLite corre con un contenedor por servicio».</a:t>
+              <a:t>–   Un pitch tecnico de 5 a 8 minutos no se improvisa ni se llena de diapositivas.</a:t>
             </a:r>
           </a:p>
           <a:p>
@@ -3700,7 +4662,7 @@
                 </a:solidFill>
                 <a:latin typeface="Calibri"/>
               </a:rPr>
-              <a:t>–   Segunda capa, el POR QUE: «porque el proyecto lo sostiene una sola persona sin presupuesto de nube, y un contenedor se levanta igual en el portatil de cualquiera y en Killercoda, sin instalar un hipervisor ni pedir tarjeta de credito».</a:t>
+              <a:t>–   El reparto que funciona, y que es convencion de industria y no regla dura, es el siguiente: 45 a 60 segundos para el problema y el dominio, es decir que hace CloudLite y para quien, sin nombrar una sola tecnologia todavia</a:t>
             </a:r>
           </a:p>
           <a:p>
@@ -3716,7 +4678,7 @@
                 </a:solidFill>
                 <a:latin typeface="Calibri"/>
               </a:rPr>
-              <a:t>–   Tercera capa, A CAMBIO DE QUE: «a cambio de perder el aislamiento fuerte que da una maquina virtual completa, y de asumir que si el host cae, caen todos los servicios a la vez porque comparten el mismo kernel».</a:t>
+              <a:t>–   90 segundos para la arquitectura, apoyandose en el diagrama de contexto y el de contenedores</a:t>
             </a:r>
           </a:p>
           <a:p>
@@ -3732,7 +4694,7 @@
                 </a:solidFill>
                 <a:latin typeface="Calibri"/>
               </a:rPr>
-              <a:t>–   La instruccion operativa para el docente es simple: ante cada afirmacion, preguntar «a cambio de que», y no aceptar la respuesta «de nada».</a:t>
+              <a:t>–   90 segundos para la decision principal con su trade-off, citando el ADR; 60 a 90 segundos para la evidencia ejecutable, o sea la captura de la sesion del laboratorio con el contenedor corriendo y el workflow de GitHub Actions en verde</a:t>
             </a:r>
           </a:p>
         </p:txBody>
@@ -3913,7 +4875,7 @@
                 </a:solidFill>
                 <a:latin typeface="Calibri"/>
               </a:rPr>
-              <a:t>El ADR: el artefacto que sostiene la tercera capa (1/2)</a:t>
+              <a:t>El pitch de 5 a 8 minutos: el reparto que funciona (2/2)</a:t>
             </a:r>
           </a:p>
         </p:txBody>
@@ -3952,7 +4914,7 @@
                 </a:solidFill>
                 <a:latin typeface="Calibri"/>
               </a:rPr>
-              <a:t>–   El artefacto que sostiene esa tercera capa es el ADR, o Architecture Decision Record: un documento corto, de una pagina como maximo</a:t>
+              <a:t>–   45 segundos para el punto debil declarado, lo que no escala o lo que no se midio; y 30 segundos de cierre.</a:t>
             </a:r>
           </a:p>
           <a:p>
@@ -3968,7 +4930,7 @@
                 </a:solidFill>
                 <a:latin typeface="Calibri"/>
               </a:rPr>
-              <a:t>–   Que registra UNA sola decision con las seis secciones rotuladas que el curso fijo en la Clase 2 y que no han cambiado desde entonces.</a:t>
+              <a:t>–   La suma queda entre 6 y 7 minutos, con margen para tropiezos.</a:t>
             </a:r>
           </a:p>
           <a:p>
@@ -3984,55 +4946,7 @@
                 </a:solidFill>
                 <a:latin typeface="Calibri"/>
               </a:rPr>
-              <a:t>–   Titulo, con el numero consecutivo, que es justamente por lo que se cita.</a:t>
-            </a:r>
-          </a:p>
-          <a:p>
-            <a:pPr>
-              <a:spcAft>
-                <a:spcPts val="800"/>
-              </a:spcAft>
-            </a:pPr>
-            <a:r>
-              <a:rPr sz="2000" b="0" i="0">
-                <a:solidFill>
-                  <a:srgbClr val="333333"/>
-                </a:solidFill>
-                <a:latin typeface="Calibri"/>
-              </a:rPr>
-              <a:t>–   Contexto, es decir que problema se estaba resolviendo y con que restricciones.</a:t>
-            </a:r>
-          </a:p>
-          <a:p>
-            <a:pPr>
-              <a:spcAft>
-                <a:spcPts val="800"/>
-              </a:spcAft>
-            </a:pPr>
-            <a:r>
-              <a:rPr sz="2000" b="0" i="0">
-                <a:solidFill>
-                  <a:srgbClr val="333333"/>
-                </a:solidFill>
-                <a:latin typeface="Calibri"/>
-              </a:rPr>
-              <a:t>–   Y consecuencias, donde se escribe lo bueno, lo malo y lo neutro que se acepta.</a:t>
-            </a:r>
-          </a:p>
-          <a:p>
-            <a:pPr>
-              <a:spcAft>
-                <a:spcPts val="800"/>
-              </a:spcAft>
-            </a:pPr>
-            <a:r>
-              <a:rPr sz="2000" b="0" i="0">
-                <a:solidFill>
-                  <a:srgbClr val="333333"/>
-                </a:solidFill>
-                <a:latin typeface="Calibri"/>
-              </a:rPr>
-              <a:t>–   Los estudiantes ya produjeron el ADR-001 en la Clase 2, cuando decidieron el modelo de servicio dominante entre IaaS, PaaS y SaaS</a:t>
+              <a:t>–   La regla practica de diapositivas es una idea por diapositiva y un maximo de ocho diapositivas para ocho minutos.</a:t>
             </a:r>
           </a:p>
         </p:txBody>
@@ -4213,7 +5127,7 @@
                 </a:solidFill>
                 <a:latin typeface="Calibri"/>
               </a:rPr>
-              <a:t>El ADR: el artefacto que sostiene la tercera capa (2/2)</a:t>
+              <a:t>La regla de los 60 segundos, anunciada desde la Clase 11 (1/2)</a:t>
             </a:r>
           </a:p>
         </p:txBody>
@@ -4252,7 +5166,7 @@
                 </a:solidFill>
                 <a:latin typeface="Calibri"/>
               </a:rPr>
-              <a:t>–   A lo largo del curso debieron acumular tres o cuatro mas: contenedores frente a maquinas virtuales (Clase 3), donde poner la frontera entre servicios (Clase 4), y que se escala y que no (Clase 13).</a:t>
+              <a:t>–   El criterio de calidad que se anuncio desde el checkpoint de la Clase 11 es la regla de los 60 segundos: quien sustenta debe poder explicar CUALQUIER parte del sistema en 60 segundos, sin buscar en el informe.</a:t>
             </a:r>
           </a:p>
           <a:p>
@@ -4268,7 +5182,7 @@
                 </a:solidFill>
                 <a:latin typeface="Calibri"/>
               </a:rPr>
-              <a:t>–   En la sustentacion el ADR no se lee en voz alta: se cita.</a:t>
+              <a:t>–   El trabajo es individual por defecto, asi que en la mayoria de los casos ese "quien" es el propio autor y la regla se comprueba sola</a:t>
             </a:r>
           </a:p>
           <a:p>
@@ -4284,7 +5198,39 @@
                 </a:solidFill>
                 <a:latin typeface="Calibri"/>
               </a:rPr>
-              <a:t>–   La forma profesional es «esta decision esta registrada en el ADR-002, y el trade-off que aceptamos fue perder portabilidad entre proveedores», con el numero del ADR visible en la diapositiva.</a:t>
+              <a:t>–   Cuando el docente autorizo un equipo de dos o tres, la regla se vuelve exigente y se lee asi: CUALQUIER integrante debe poder explicar CUALQUIER parte.</a:t>
+            </a:r>
+          </a:p>
+          <a:p>
+            <a:pPr>
+              <a:spcAft>
+                <a:spcPts val="800"/>
+              </a:spcAft>
+            </a:pPr>
+            <a:r>
+              <a:rPr sz="2000" b="0" i="0">
+                <a:solidFill>
+                  <a:srgbClr val="333333"/>
+                </a:solidFill>
+                <a:latin typeface="Calibri"/>
+              </a:rPr>
+              <a:t>–   Esto casi siempre genera la primera pregunta real del estudiante: «podemos repartirnos los temas y que cada uno prepare solo el suyo?».</a:t>
+            </a:r>
+          </a:p>
+          <a:p>
+            <a:pPr>
+              <a:spcAft>
+                <a:spcPts val="800"/>
+              </a:spcAft>
+            </a:pPr>
+            <a:r>
+              <a:rPr sz="2000" b="0" i="0">
+                <a:solidFill>
+                  <a:srgbClr val="333333"/>
+                </a:solidFill>
+                <a:latin typeface="Calibri"/>
+              </a:rPr>
+              <a:t>–   En un equipo profesional, cuando el sistema falla a las once de la noche, contesta quien esta disponible, no el autor del diagrama; un sistema que solo una persona entiende es un riesgo operativo con nombre propio.</a:t>
             </a:r>
           </a:p>
         </p:txBody>
@@ -4465,7 +5411,7 @@
                 </a:solidFill>
                 <a:latin typeface="Calibri"/>
               </a:rPr>
-              <a:t>El pitch de 5 a 8 minutos: el reparto que funciona (1/2)</a:t>
+              <a:t>La regla de los 60 segundos, anunciada desde la Clase 11 (2/2)</a:t>
             </a:r>
           </a:p>
         </p:txBody>
@@ -4504,7 +5450,7 @@
                 </a:solidFill>
                 <a:latin typeface="Calibri"/>
               </a:rPr>
-              <a:t>–   Un pitch tecnico de 5 a 8 minutos no se improvisa ni se llena de diapositivas.</a:t>
+              <a:t>–   El segundo motivo es de evaluacion: si el estudiante no puede explicar su propio diagrama de despliegue, el evaluador no tiene forma de saber si el artefacto es suyo o copiado, y ese es exactamente el vacio que la sustentacion existe para cerrar.</a:t>
             </a:r>
           </a:p>
           <a:p>
@@ -4520,7 +5466,7 @@
                 </a:solidFill>
                 <a:latin typeface="Calibri"/>
               </a:rPr>
-              <a:t>–   El reparto que funciona, y que es convencion de industria y no regla dura, es el siguiente: 45 a 60 segundos para el problema y el dominio, es decir que hace CloudLite y para quien, sin nombrar una sola tecnologia todavia</a:t>
+              <a:t>–   En los equipos autorizados el mismo riesgo se multiplica: si solo un integrante puede explicar el despliegue, no hay evidencia de que los demas participaran, y por eso la rubrica exige que todos hablen y descuenta cuando presenta uno solo.</a:t>
             </a:r>
           </a:p>
           <a:p>
@@ -4536,23 +5482,7 @@
                 </a:solidFill>
                 <a:latin typeface="Calibri"/>
               </a:rPr>
-              <a:t>–   90 segundos para la arquitectura, apoyandose en el diagrama de contexto y el de contenedores</a:t>
-            </a:r>
-          </a:p>
-          <a:p>
-            <a:pPr>
-              <a:spcAft>
-                <a:spcPts val="800"/>
-              </a:spcAft>
-            </a:pPr>
-            <a:r>
-              <a:rPr sz="2000" b="0" i="0">
-                <a:solidFill>
-                  <a:srgbClr val="333333"/>
-                </a:solidFill>
-                <a:latin typeface="Calibri"/>
-              </a:rPr>
-              <a:t>–   90 segundos para la decision principal con su trade-off, citando el ADR; 60 a 90 segundos para la evidencia ejecutable, o sea la captura de la sesion del laboratorio con el contenedor corriendo y el workflow de GitHub Actions en verde</a:t>
+              <a:t>–   La practica concreta que se recomienda antes de presentar es un ensayo cruzado con otro estudiante: cada uno explica en 60 segundos una parte del sistema del otro y devuelve los huecos que encontro (en equipo, cada integrante explica una parte que NO le toco preparar).</a:t>
             </a:r>
           </a:p>
         </p:txBody>
@@ -4733,7 +5663,7 @@
                 </a:solidFill>
                 <a:latin typeface="Calibri"/>
               </a:rPr>
-              <a:t>El pitch de 5 a 8 minutos: el reparto que funciona (2/2)</a:t>
+              <a:t>El Q&amp;A tecnico: tres tipos de pregunta (1/2)</a:t>
             </a:r>
           </a:p>
         </p:txBody>
@@ -4772,7 +5702,7 @@
                 </a:solidFill>
                 <a:latin typeface="Calibri"/>
               </a:rPr>
-              <a:t>–   45 segundos para el punto debil declarado, lo que no escala o lo que no se midio; y 30 segundos de cierre.</a:t>
+              <a:t>–   La pregunta de verificacion comprueba que el estudiante hizo lo que dice: «muestreme el archivo.yml del workflow» o «en que linea del Dockerfile esta la imagen base y por que eligieron una variante alpine».</a:t>
             </a:r>
           </a:p>
           <a:p>
@@ -4788,7 +5718,7 @@
                 </a:solidFill>
                 <a:latin typeface="Calibri"/>
               </a:rPr>
-              <a:t>–   La suma queda entre 6 y 7 minutos, con margen para tropiezos.</a:t>
+              <a:t>–   La pregunta de profundizacion empuja un nivel mas alla de lo presentado: «por que la base de datos no esta en el mismo contenedor que la API».</a:t>
             </a:r>
           </a:p>
           <a:p>
@@ -4804,7 +5734,39 @@
                 </a:solidFill>
                 <a:latin typeface="Calibri"/>
               </a:rPr>
-              <a:t>–   La regla practica de diapositivas es una idea por diapositiva y un maximo de ocho diapositivas para ocho minutos.</a:t>
+              <a:t>–   La pregunta hipotetica, o what-if, evalua si el diseno se entiende como sistema y no como dibujo: «si el trafico se multiplica por diez el lunes, que pieza de CloudLite se rompe primero y como se darian cuenta».</a:t>
+            </a:r>
+          </a:p>
+          <a:p>
+            <a:pPr>
+              <a:spcAft>
+                <a:spcPts val="800"/>
+              </a:spcAft>
+            </a:pPr>
+            <a:r>
+              <a:rPr sz="2000" b="0" i="0">
+                <a:solidFill>
+                  <a:srgbClr val="333333"/>
+                </a:solidFill>
+                <a:latin typeface="Calibri"/>
+              </a:rPr>
+              <a:t>–   Aqui aparece la segunda pregunta previsible del estudiante: «y si no sabemos la respuesta?».</a:t>
+            </a:r>
+          </a:p>
+          <a:p>
+            <a:pPr>
+              <a:spcAft>
+                <a:spcPts val="800"/>
+              </a:spcAft>
+            </a:pPr>
+            <a:r>
+              <a:rPr sz="2000" b="0" i="0">
+                <a:solidFill>
+                  <a:srgbClr val="333333"/>
+                </a:solidFill>
+                <a:latin typeface="Calibri"/>
+              </a:rPr>
+              <a:t>–   Y conviene ser explicito sobre el formato de la sesion, porque es lo que decide como se prepara el estudiante: la Clase 15 se dicta en la ultima sesion del semestre (16 de noviembre) como sustentacion EN VIVO</a:t>
             </a:r>
           </a:p>
         </p:txBody>
@@ -4985,7 +5947,7 @@
                 </a:solidFill>
                 <a:latin typeface="Calibri"/>
               </a:rPr>
-              <a:t>La regla de los 60 segundos, anunciada desde la Clase 11 (1/2)</a:t>
+              <a:t>El Q&amp;A tecnico: tres tipos de pregunta (2/2)</a:t>
             </a:r>
           </a:p>
         </p:txBody>
@@ -5024,7 +5986,7 @@
                 </a:solidFill>
                 <a:latin typeface="Calibri"/>
               </a:rPr>
-              <a:t>–   El criterio de calidad que se anuncio desde el checkpoint de la Clase 11 es la regla de los 60 segundos: quien sustenta debe poder explicar CUALQUIER parte del sistema en 60 segundos, sin buscar en el informe.</a:t>
+              <a:t>–   Sincrona, con turnos de unos 6 minutos de pitch y 2 a 4 de preguntas.</a:t>
             </a:r>
           </a:p>
           <a:p>
@@ -5040,7 +6002,7 @@
                 </a:solidFill>
                 <a:latin typeface="Calibri"/>
               </a:rPr>
-              <a:t>–   El trabajo es individual por defecto, asi que en la mayoria de los casos ese "quien" es el propio autor y la regla se comprueba sola</a:t>
+              <a:t>–   No es clase autonoma y la defensa no se reemplaza por un video grabado, porque el Q&amp;A dirigido al azar es justamente el instrumento que verifica autoria y no tiene sustituto asincronico.</a:t>
             </a:r>
           </a:p>
           <a:p>
@@ -5056,7 +6018,7 @@
                 </a:solidFill>
                 <a:latin typeface="Calibri"/>
               </a:rPr>
-              <a:t>–   Cuando el docente autorizo un equipo de dos o tres, la regla se vuelve exigente y se lee asi: CUALQUIER integrante debe poder explicar CUALQUIER parte.</a:t>
+              <a:t>–   El Q&amp;A escrito que pide el taller (tres preguntas duras que el propio estudiante se haria, con su respuesta) no reemplaza nada: es la preparacion del Q&amp;A en vivo</a:t>
             </a:r>
           </a:p>
           <a:p>
@@ -5072,23 +6034,7 @@
                 </a:solidFill>
                 <a:latin typeface="Calibri"/>
               </a:rPr>
-              <a:t>–   Esto casi siempre genera la primera pregunta real del estudiante: «podemos repartirnos los temas y que cada uno prepare solo el suyo?».</a:t>
-            </a:r>
-          </a:p>
-          <a:p>
-            <a:pPr>
-              <a:spcAft>
-                <a:spcPts val="800"/>
-              </a:spcAft>
-            </a:pPr>
-            <a:r>
-              <a:rPr sz="2000" b="0" i="0">
-                <a:solidFill>
-                  <a:srgbClr val="333333"/>
-                </a:solidFill>
-                <a:latin typeface="Calibri"/>
-              </a:rPr>
-              <a:t>–   En un equipo profesional, cuando el sistema falla a las once de la noche, contesta quien esta disponible, no el autor del diagrama; un sistema que solo una persona entiende es un riesgo operativo con nombre propio.</a:t>
+              <a:t>–   Y en la practica el estudiante que lo escribio en serio responde mucho mejor cuando la pregunta llega de verdad.</a:t>
             </a:r>
           </a:p>
         </p:txBody>
@@ -5269,7 +6215,7 @@
                 </a:solidFill>
                 <a:latin typeface="Calibri"/>
               </a:rPr>
-              <a:t>La regla de los 60 segundos, anunciada desde la Clase 11 (2/2)</a:t>
+              <a:t>Evaluar con rubrica: puntos a evidencia observable (1/2)</a:t>
             </a:r>
           </a:p>
         </p:txBody>
@@ -5308,7 +6254,7 @@
                 </a:solidFill>
                 <a:latin typeface="Calibri"/>
               </a:rPr>
-              <a:t>–   El segundo motivo es de evaluacion: si el estudiante no puede explicar su propio diagrama de despliegue, el evaluador no tiene forma de saber si el artefacto es suyo o copiado, y ese es exactamente el vacio que la sustentacion existe para cerrar.</a:t>
+              <a:t>–   Los 100 puntos del PI CloudLite App se distribuyen asi: 15 puntos por dominio y decision IaaS/PaaS/SaaS justificada, 25 por los diagramas de arquitectura (componentes y despliegue)</a:t>
             </a:r>
           </a:p>
           <a:p>
@@ -5324,7 +6270,7 @@
                 </a:solidFill>
                 <a:latin typeface="Calibri"/>
               </a:rPr>
-              <a:t>–   En los equipos autorizados el mismo riesgo se multiplica: si solo un integrante puede explicar el despliegue, no hay evidencia de que los demas participaran, y por eso la rubrica exige que todos hablen y descuenta cuando presenta uno solo.</a:t>
+              <a:t>–   20 por el lab de contenedores con Dockerfile o compose mas la captura de la sesion, 15 por el CI/CD conceptual con el workflow.yml explicado, 10 por las secciones de seguridad, costos y escalabilidad del informe, y 15 por informe y sustentacion.</a:t>
             </a:r>
           </a:p>
           <a:p>
@@ -5340,7 +6286,39 @@
                 </a:solidFill>
                 <a:latin typeface="Calibri"/>
               </a:rPr>
-              <a:t>–   La practica concreta que se recomienda antes de presentar es un ensayo cruzado con otro estudiante: cada uno explica en 60 segundos una parte del sistema del otro y devuelve los huecos que encontro (en equipo, cada integrante explica una parte que NO le toco preparar).</a:t>
+              <a:t>–   Ese reparto responde la tercera pregunta previsible: «si el diagrama esta perfecto pero presentamos mal, cuanto pierdo?».</a:t>
+            </a:r>
+          </a:p>
+          <a:p>
+            <a:pPr>
+              <a:spcAft>
+                <a:spcPts val="800"/>
+              </a:spcAft>
+            </a:pPr>
+            <a:r>
+              <a:rPr sz="2000" b="0" i="0">
+                <a:solidFill>
+                  <a:srgbClr val="333333"/>
+                </a:solidFill>
+                <a:latin typeface="Calibri"/>
+              </a:rPr>
+              <a:t>–   Directamente, hasta 15 puntos.</a:t>
+            </a:r>
+          </a:p>
+          <a:p>
+            <a:pPr>
+              <a:spcAft>
+                <a:spcPts val="800"/>
+              </a:spcAft>
+            </a:pPr>
+            <a:r>
+              <a:rPr sz="2000" b="0" i="0">
+                <a:solidFill>
+                  <a:srgbClr val="333333"/>
+                </a:solidFill>
+                <a:latin typeface="Calibri"/>
+              </a:rPr>
+              <a:t>–   Indirectamente mucho mas, porque la sustentacion es el mecanismo con el que el evaluador verifica que los otros 85 puntos son de quien sustenta: un diagrama excelente que nadie puede explicar levanta una duda de autoria que ninguna diapositiva resuelve.</a:t>
             </a:r>
           </a:p>
         </p:txBody>
@@ -5521,7 +6499,7 @@
                 </a:solidFill>
                 <a:latin typeface="Calibri"/>
               </a:rPr>
-              <a:t>El Q&amp;A tecnico: tres tipos de pregunta (1/2)</a:t>
+              <a:t>Evaluar con rubrica: puntos a evidencia observable (2/2)</a:t>
             </a:r>
           </a:p>
         </p:txBody>
@@ -5560,7 +6538,7 @@
                 </a:solidFill>
                 <a:latin typeface="Calibri"/>
               </a:rPr>
-              <a:t>–   La pregunta de verificacion comprueba que el estudiante hizo lo que dice: «muestreme el archivo.yml del workflow» o «en que linea del Dockerfile esta la imagen base y por que eligieron una variante alpine».</a:t>
+              <a:t>–   Y va el recordatorio de pesos que evita reclamos posteriores: estos 100 puntos valen 20% del Corte 3, el Parcial 3 de la Clase 14 (9 de noviembre, virtual sincrono por Meet y escrito) vale 15%, y la asistencia 5%.</a:t>
             </a:r>
           </a:p>
           <a:p>
@@ -5576,55 +6554,7 @@
                 </a:solidFill>
                 <a:latin typeface="Calibri"/>
               </a:rPr>
-              <a:t>–   La pregunta de profundizacion empuja un nivel mas alla de lo presentado: «por que la base de datos no esta en el mismo contenedor que la API».</a:t>
-            </a:r>
-          </a:p>
-          <a:p>
-            <a:pPr>
-              <a:spcAft>
-                <a:spcPts val="800"/>
-              </a:spcAft>
-            </a:pPr>
-            <a:r>
-              <a:rPr sz="2000" b="0" i="0">
-                <a:solidFill>
-                  <a:srgbClr val="333333"/>
-                </a:solidFill>
-                <a:latin typeface="Calibri"/>
-              </a:rPr>
-              <a:t>–   La pregunta hipotetica, o what-if, evalua si el diseno se entiende como sistema y no como dibujo: «si el trafico se multiplica por diez el lunes, que pieza de CloudLite se rompe primero y como se darian cuenta».</a:t>
-            </a:r>
-          </a:p>
-          <a:p>
-            <a:pPr>
-              <a:spcAft>
-                <a:spcPts val="800"/>
-              </a:spcAft>
-            </a:pPr>
-            <a:r>
-              <a:rPr sz="2000" b="0" i="0">
-                <a:solidFill>
-                  <a:srgbClr val="333333"/>
-                </a:solidFill>
-                <a:latin typeface="Calibri"/>
-              </a:rPr>
-              <a:t>–   Aqui aparece la segunda pregunta previsible del estudiante: «y si no sabemos la respuesta?».</a:t>
-            </a:r>
-          </a:p>
-          <a:p>
-            <a:pPr>
-              <a:spcAft>
-                <a:spcPts val="800"/>
-              </a:spcAft>
-            </a:pPr>
-            <a:r>
-              <a:rPr sz="2000" b="0" i="0">
-                <a:solidFill>
-                  <a:srgbClr val="333333"/>
-                </a:solidFill>
-                <a:latin typeface="Calibri"/>
-              </a:rPr>
-              <a:t>–   Y conviene ser explicito sobre el formato de la sesion, porque es lo que decide como se prepara el estudiante: la Clase 15 se dicta en la ultima sesion del semestre (16 de noviembre) como sustentacion EN VIVO</a:t>
+              <a:t>–   El proyecto no reemplaza ni compensa el parcial; son evaluaciones distintas del mismo corte, y decirlo una vez hoy ahorra tres correos la semana siguiente.</a:t>
             </a:r>
           </a:p>
         </p:txBody>
@@ -5805,7 +6735,7 @@
                 </a:solidFill>
                 <a:latin typeface="Calibri"/>
               </a:rPr>
-              <a:t>El Q&amp;A tecnico: tres tipos de pregunta (2/2)</a:t>
+              <a:t>El cierre del curso: conectar lo hecho con la practica profesional (1/2)</a:t>
             </a:r>
           </a:p>
         </p:txBody>
@@ -5844,7 +6774,7 @@
                 </a:solidFill>
                 <a:latin typeface="Calibri"/>
               </a:rPr>
-              <a:t>–   Sincrona, con turnos de unos 6 minutos de pitch y 2 a 4 de preguntas.</a:t>
+              <a:t>–   El cierre del curso debe conectar lo hecho con la practica profesional, porque de eso depende que el estudiante conserve el material en vez de borrarlo al terminar el semestre.</a:t>
             </a:r>
           </a:p>
           <a:p>
@@ -5860,7 +6790,7 @@
                 </a:solidFill>
                 <a:latin typeface="Calibri"/>
               </a:rPr>
-              <a:t>–   No es clase autonoma y la defensa no se reemplaza por un video grabado, porque el Q&amp;A dirigido al azar es justamente el instrumento que verifica autoria y no tiene sustituto asincronico.</a:t>
+              <a:t>–   En la industria, esta sustentacion tiene nombre propio: design review, o architecture review.</a:t>
             </a:r>
           </a:p>
           <a:p>
@@ -5876,7 +6806,7 @@
                 </a:solidFill>
                 <a:latin typeface="Calibri"/>
               </a:rPr>
-              <a:t>–   El Q&amp;A escrito que pide el taller (tres preguntas duras que el propio estudiante se haria, con su respuesta) no reemplaza nada: es la preparacion del Q&amp;A en vivo</a:t>
+              <a:t>–   Un equipo presenta una propuesta a pares y a arquitectos mas experimentados cuyo trabajo explicito es buscarle el punto debil antes de que ese punto debil cueste dinero</a:t>
             </a:r>
           </a:p>
           <a:p>
@@ -5892,7 +6822,23 @@
                 </a:solidFill>
                 <a:latin typeface="Calibri"/>
               </a:rPr>
-              <a:t>–   Y en la practica el estudiante que lo escribio en serio responde mucho mejor cuando la pregunta llega de verdad.</a:t>
+              <a:t>–   Y lo que se pregunta ahi es exactamente lo mismo que hoy, es decir que decidieron, que descartaron, que aceptaron perder, y como sabran si se equivocaron.</a:t>
+            </a:r>
+          </a:p>
+          <a:p>
+            <a:pPr>
+              <a:spcAft>
+                <a:spcPts val="800"/>
+              </a:spcAft>
+            </a:pPr>
+            <a:r>
+              <a:rPr sz="2000" b="0" i="0">
+                <a:solidFill>
+                  <a:srgbClr val="333333"/>
+                </a:solidFill>
+                <a:latin typeface="Calibri"/>
+              </a:rPr>
+              <a:t>–   El ADR es un formato real, usado en equipos reales, no un invento academico del curso.</a:t>
             </a:r>
           </a:p>
         </p:txBody>
@@ -6073,7 +7019,7 @@
                 </a:solidFill>
                 <a:latin typeface="Calibri"/>
               </a:rPr>
-              <a:t>Evaluar con rubrica: puntos a evidencia observable (1/2)</a:t>
+              <a:t>El cierre del curso: conectar lo hecho con la practica profesional (2/2)</a:t>
             </a:r>
           </a:p>
         </p:txBody>
@@ -6112,7 +7058,7 @@
                 </a:solidFill>
                 <a:latin typeface="Calibri"/>
               </a:rPr>
-              <a:t>–   Los 100 puntos del PI CloudLite App se distribuyen asi: 15 puntos por dominio y decision IaaS/PaaS/SaaS justificada, 25 por los diagramas de arquitectura (componentes y despliegue)</a:t>
+              <a:t>–   El diagrama de contenedores, el Dockerfile y el pipeline que el estudiante escribio son los mismos artefactos que se producen con una cuenta corporativa</a:t>
             </a:r>
           </a:p>
           <a:p>
@@ -6128,7 +7074,7 @@
                 </a:solidFill>
                 <a:latin typeface="Calibri"/>
               </a:rPr>
-              <a:t>–   20 por el lab de contenedores con Dockerfile o compose mas la captura de la sesion, 15 por el CI/CD conceptual con el workflow.yml explicado, 10 por las secciones de seguridad, costos y escalabilidad del informe, y 15 por informe y sustentacion.</a:t>
+              <a:t>–   Lo que no se aprende en un free tier es justamente lo que si se aprendio aqui, que es razonar el trade-off.</a:t>
             </a:r>
           </a:p>
           <a:p>
@@ -6144,7 +7090,7 @@
                 </a:solidFill>
                 <a:latin typeface="Calibri"/>
               </a:rPr>
-              <a:t>–   Ese reparto responde la tercera pregunta previsible: «si el diagrama esta perfecto pero presentamos mal, cuanto pierdo?».</a:t>
+              <a:t>–   La frase de cierre util es que arquitectura no es una lista de logos de proveedores, sino un conjunto de decisiones documentadas con sus consecuencias.</a:t>
             </a:r>
           </a:p>
           <a:p>
@@ -6160,23 +7106,7 @@
                 </a:solidFill>
                 <a:latin typeface="Calibri"/>
               </a:rPr>
-              <a:t>–   Directamente, hasta 15 puntos.</a:t>
-            </a:r>
-          </a:p>
-          <a:p>
-            <a:pPr>
-              <a:spcAft>
-                <a:spcPts val="800"/>
-              </a:spcAft>
-            </a:pPr>
-            <a:r>
-              <a:rPr sz="2000" b="0" i="0">
-                <a:solidFill>
-                  <a:srgbClr val="333333"/>
-                </a:solidFill>
-                <a:latin typeface="Calibri"/>
-              </a:rPr>
-              <a:t>–   Indirectamente mucho mas, porque la sustentacion es el mecanismo con el que el evaluador verifica que los otros 85 puntos son de quien sustenta: un diagrama excelente que nadie puede explicar levanta una duda de autoria que ninguna diapositiva resuelve.</a:t>
+              <a:t>–   Y el pedido final debe ser concreto y verificable: conserven el repositorio con el informe, los diagramas y el workflow como portafolio, porque eso es lo que se muestra en una primera entrevista tecnica cuando piden un ejemplo de trabajo propio.</a:t>
             </a:r>
           </a:p>
         </p:txBody>
@@ -6625,4033 +7555,6 @@
         <p:spPr>
           <a:xfrm>
             <a:off x="0" y="0"/>
-            <a:ext cx="12191695" cy="960120"/>
-          </a:xfrm>
-          <a:prstGeom prst="rect">
-            <a:avLst/>
-          </a:prstGeom>
-          <a:solidFill>
-            <a:srgbClr val="095292"/>
-          </a:solidFill>
-          <a:ln>
-            <a:noFill/>
-          </a:ln>
-        </p:spPr>
-        <p:style>
-          <a:lnRef idx="1">
-            <a:schemeClr val="accent1"/>
-          </a:lnRef>
-          <a:fillRef idx="3">
-            <a:schemeClr val="accent1"/>
-          </a:fillRef>
-          <a:effectRef idx="2">
-            <a:schemeClr val="accent1"/>
-          </a:effectRef>
-          <a:fontRef idx="minor">
-            <a:schemeClr val="lt1"/>
-          </a:fontRef>
-        </p:style>
-        <p:txBody>
-          <a:bodyPr rtlCol="0" anchor="ctr"/>
-          <a:lstStyle/>
-          <a:p>
-            <a:pPr algn="ctr"/>
-          </a:p>
-        </p:txBody>
-      </p:sp>
-      <p:sp>
-        <p:nvSpPr>
-          <p:cNvPr id="3" name="Rectangle 2"/>
-          <p:cNvSpPr/>
-          <p:nvPr/>
-        </p:nvSpPr>
-        <p:spPr>
-          <a:xfrm>
-            <a:off x="0" y="960120"/>
-            <a:ext cx="12191695" cy="41148"/>
-          </a:xfrm>
-          <a:prstGeom prst="rect">
-            <a:avLst/>
-          </a:prstGeom>
-          <a:solidFill>
-            <a:srgbClr val="FFD000"/>
-          </a:solidFill>
-          <a:ln>
-            <a:noFill/>
-          </a:ln>
-        </p:spPr>
-        <p:style>
-          <a:lnRef idx="1">
-            <a:schemeClr val="accent1"/>
-          </a:lnRef>
-          <a:fillRef idx="3">
-            <a:schemeClr val="accent1"/>
-          </a:fillRef>
-          <a:effectRef idx="2">
-            <a:schemeClr val="accent1"/>
-          </a:effectRef>
-          <a:fontRef idx="minor">
-            <a:schemeClr val="lt1"/>
-          </a:fontRef>
-        </p:style>
-        <p:txBody>
-          <a:bodyPr rtlCol="0" anchor="ctr"/>
-          <a:lstStyle/>
-          <a:p>
-            <a:pPr algn="ctr"/>
-          </a:p>
-        </p:txBody>
-      </p:sp>
-      <p:sp>
-        <p:nvSpPr>
-          <p:cNvPr id="4" name="TextBox 3"/>
-          <p:cNvSpPr txBox="1"/>
-          <p:nvPr/>
-        </p:nvSpPr>
-        <p:spPr>
-          <a:xfrm>
-            <a:off x="457200" y="164592"/>
-            <a:ext cx="11277295" cy="502920"/>
-          </a:xfrm>
-          <a:prstGeom prst="rect">
-            <a:avLst/>
-          </a:prstGeom>
-          <a:noFill/>
-        </p:spPr>
-        <p:txBody>
-          <a:bodyPr wrap="square">
-            <a:spAutoFit/>
-          </a:bodyPr>
-          <a:lstStyle/>
-          <a:p>
-            <a:r>
-              <a:rPr sz="2600" b="1" i="0">
-                <a:solidFill>
-                  <a:srgbClr val="FFFFFF"/>
-                </a:solidFill>
-                <a:latin typeface="Calibri"/>
-              </a:rPr>
-              <a:t>Evaluar con rubrica: puntos a evidencia observable (2/2)</a:t>
-            </a:r>
-          </a:p>
-        </p:txBody>
-      </p:sp>
-      <p:sp>
-        <p:nvSpPr>
-          <p:cNvPr id="5" name="TextBox 4"/>
-          <p:cNvSpPr txBox="1"/>
-          <p:nvPr/>
-        </p:nvSpPr>
-        <p:spPr>
-          <a:xfrm>
-            <a:off x="457200" y="1170432"/>
-            <a:ext cx="11277295" cy="5230368"/>
-          </a:xfrm>
-          <a:prstGeom prst="rect">
-            <a:avLst/>
-          </a:prstGeom>
-          <a:noFill/>
-        </p:spPr>
-        <p:txBody>
-          <a:bodyPr wrap="square">
-            <a:spAutoFit/>
-          </a:bodyPr>
-          <a:lstStyle/>
-          <a:p>
-            <a:pPr>
-              <a:spcAft>
-                <a:spcPts val="800"/>
-              </a:spcAft>
-            </a:pPr>
-            <a:r>
-              <a:rPr sz="2000" b="0" i="0">
-                <a:solidFill>
-                  <a:srgbClr val="333333"/>
-                </a:solidFill>
-                <a:latin typeface="Calibri"/>
-              </a:rPr>
-              <a:t>–   Y va el recordatorio de pesos que evita reclamos posteriores: estos 100 puntos valen 20% del Corte 3, el Parcial 3 de la Clase 14 (9 de noviembre, virtual sincrono por Meet y escrito) vale 15%, y la asistencia 5%.</a:t>
-            </a:r>
-          </a:p>
-          <a:p>
-            <a:pPr>
-              <a:spcAft>
-                <a:spcPts val="800"/>
-              </a:spcAft>
-            </a:pPr>
-            <a:r>
-              <a:rPr sz="2000" b="0" i="0">
-                <a:solidFill>
-                  <a:srgbClr val="333333"/>
-                </a:solidFill>
-                <a:latin typeface="Calibri"/>
-              </a:rPr>
-              <a:t>–   El proyecto no reemplaza ni compensa el parcial; son evaluaciones distintas del mismo corte, y decirlo una vez hoy ahorra tres correos la semana siguiente.</a:t>
-            </a:r>
-          </a:p>
-        </p:txBody>
-      </p:sp>
-      <p:sp>
-        <p:nvSpPr>
-          <p:cNvPr id="6" name="TextBox 5"/>
-          <p:cNvSpPr txBox="1"/>
-          <p:nvPr/>
-        </p:nvSpPr>
-        <p:spPr>
-          <a:xfrm>
-            <a:off x="11185855" y="6473952"/>
-            <a:ext cx="640080" cy="274320"/>
-          </a:xfrm>
-          <a:prstGeom prst="rect">
-            <a:avLst/>
-          </a:prstGeom>
-          <a:noFill/>
-        </p:spPr>
-        <p:txBody>
-          <a:bodyPr wrap="square">
-            <a:spAutoFit/>
-          </a:bodyPr>
-          <a:lstStyle/>
-          <a:p>
-            <a:pPr algn="r"/>
-            <a:r>
-              <a:rPr sz="1100" b="0" i="0">
-                <a:solidFill>
-                  <a:srgbClr val="666666"/>
-                </a:solidFill>
-                <a:latin typeface="Calibri"/>
-              </a:rPr>
-              <a:t>20</a:t>
-            </a:r>
-          </a:p>
-        </p:txBody>
-      </p:sp>
-    </p:spTree>
-  </p:cSld>
-  <p:clrMapOvr>
-    <a:masterClrMapping/>
-  </p:clrMapOvr>
-</p:sld>
-</file>
-
-<file path=ppt/slides/slide21.xml><?xml version="1.0" encoding="utf-8"?>
-<p:sld xmlns:a="http://schemas.openxmlformats.org/drawingml/2006/main" xmlns:p="http://schemas.openxmlformats.org/presentationml/2006/main" xmlns:r="http://schemas.openxmlformats.org/officeDocument/2006/relationships">
-  <p:cSld>
-    <p:bg>
-      <p:bgPr>
-        <a:solidFill>
-          <a:srgbClr val="FFFFFF"/>
-        </a:solidFill>
-        <a:effectLst/>
-      </p:bgPr>
-    </p:bg>
-    <p:spTree>
-      <p:nvGrpSpPr>
-        <p:cNvPr id="1" name=""/>
-        <p:cNvGrpSpPr/>
-        <p:nvPr/>
-      </p:nvGrpSpPr>
-      <p:grpSpPr/>
-      <p:sp>
-        <p:nvSpPr>
-          <p:cNvPr id="2" name="Rectangle 1"/>
-          <p:cNvSpPr/>
-          <p:nvPr/>
-        </p:nvSpPr>
-        <p:spPr>
-          <a:xfrm>
-            <a:off x="0" y="0"/>
-            <a:ext cx="12191695" cy="960120"/>
-          </a:xfrm>
-          <a:prstGeom prst="rect">
-            <a:avLst/>
-          </a:prstGeom>
-          <a:solidFill>
-            <a:srgbClr val="095292"/>
-          </a:solidFill>
-          <a:ln>
-            <a:noFill/>
-          </a:ln>
-        </p:spPr>
-        <p:style>
-          <a:lnRef idx="1">
-            <a:schemeClr val="accent1"/>
-          </a:lnRef>
-          <a:fillRef idx="3">
-            <a:schemeClr val="accent1"/>
-          </a:fillRef>
-          <a:effectRef idx="2">
-            <a:schemeClr val="accent1"/>
-          </a:effectRef>
-          <a:fontRef idx="minor">
-            <a:schemeClr val="lt1"/>
-          </a:fontRef>
-        </p:style>
-        <p:txBody>
-          <a:bodyPr rtlCol="0" anchor="ctr"/>
-          <a:lstStyle/>
-          <a:p>
-            <a:pPr algn="ctr"/>
-          </a:p>
-        </p:txBody>
-      </p:sp>
-      <p:sp>
-        <p:nvSpPr>
-          <p:cNvPr id="3" name="Rectangle 2"/>
-          <p:cNvSpPr/>
-          <p:nvPr/>
-        </p:nvSpPr>
-        <p:spPr>
-          <a:xfrm>
-            <a:off x="0" y="960120"/>
-            <a:ext cx="12191695" cy="41148"/>
-          </a:xfrm>
-          <a:prstGeom prst="rect">
-            <a:avLst/>
-          </a:prstGeom>
-          <a:solidFill>
-            <a:srgbClr val="FFD000"/>
-          </a:solidFill>
-          <a:ln>
-            <a:noFill/>
-          </a:ln>
-        </p:spPr>
-        <p:style>
-          <a:lnRef idx="1">
-            <a:schemeClr val="accent1"/>
-          </a:lnRef>
-          <a:fillRef idx="3">
-            <a:schemeClr val="accent1"/>
-          </a:fillRef>
-          <a:effectRef idx="2">
-            <a:schemeClr val="accent1"/>
-          </a:effectRef>
-          <a:fontRef idx="minor">
-            <a:schemeClr val="lt1"/>
-          </a:fontRef>
-        </p:style>
-        <p:txBody>
-          <a:bodyPr rtlCol="0" anchor="ctr"/>
-          <a:lstStyle/>
-          <a:p>
-            <a:pPr algn="ctr"/>
-          </a:p>
-        </p:txBody>
-      </p:sp>
-      <p:sp>
-        <p:nvSpPr>
-          <p:cNvPr id="4" name="TextBox 3"/>
-          <p:cNvSpPr txBox="1"/>
-          <p:nvPr/>
-        </p:nvSpPr>
-        <p:spPr>
-          <a:xfrm>
-            <a:off x="457200" y="164592"/>
-            <a:ext cx="11277295" cy="502920"/>
-          </a:xfrm>
-          <a:prstGeom prst="rect">
-            <a:avLst/>
-          </a:prstGeom>
-          <a:noFill/>
-        </p:spPr>
-        <p:txBody>
-          <a:bodyPr wrap="square">
-            <a:spAutoFit/>
-          </a:bodyPr>
-          <a:lstStyle/>
-          <a:p>
-            <a:r>
-              <a:rPr sz="2600" b="1" i="0">
-                <a:solidFill>
-                  <a:srgbClr val="FFFFFF"/>
-                </a:solidFill>
-                <a:latin typeface="Calibri"/>
-              </a:rPr>
-              <a:t>El cierre del curso: conectar lo hecho con la practica profesional (1/2)</a:t>
-            </a:r>
-          </a:p>
-        </p:txBody>
-      </p:sp>
-      <p:sp>
-        <p:nvSpPr>
-          <p:cNvPr id="5" name="TextBox 4"/>
-          <p:cNvSpPr txBox="1"/>
-          <p:nvPr/>
-        </p:nvSpPr>
-        <p:spPr>
-          <a:xfrm>
-            <a:off x="457200" y="1170432"/>
-            <a:ext cx="11277295" cy="5230368"/>
-          </a:xfrm>
-          <a:prstGeom prst="rect">
-            <a:avLst/>
-          </a:prstGeom>
-          <a:noFill/>
-        </p:spPr>
-        <p:txBody>
-          <a:bodyPr wrap="square">
-            <a:spAutoFit/>
-          </a:bodyPr>
-          <a:lstStyle/>
-          <a:p>
-            <a:pPr>
-              <a:spcAft>
-                <a:spcPts val="800"/>
-              </a:spcAft>
-            </a:pPr>
-            <a:r>
-              <a:rPr sz="2000" b="0" i="0">
-                <a:solidFill>
-                  <a:srgbClr val="333333"/>
-                </a:solidFill>
-                <a:latin typeface="Calibri"/>
-              </a:rPr>
-              <a:t>–   El cierre del curso debe conectar lo hecho con la practica profesional, porque de eso depende que el estudiante conserve el material en vez de borrarlo al terminar el semestre.</a:t>
-            </a:r>
-          </a:p>
-          <a:p>
-            <a:pPr>
-              <a:spcAft>
-                <a:spcPts val="800"/>
-              </a:spcAft>
-            </a:pPr>
-            <a:r>
-              <a:rPr sz="2000" b="0" i="0">
-                <a:solidFill>
-                  <a:srgbClr val="333333"/>
-                </a:solidFill>
-                <a:latin typeface="Calibri"/>
-              </a:rPr>
-              <a:t>–   En la industria, esta sustentacion tiene nombre propio: design review, o architecture review.</a:t>
-            </a:r>
-          </a:p>
-          <a:p>
-            <a:pPr>
-              <a:spcAft>
-                <a:spcPts val="800"/>
-              </a:spcAft>
-            </a:pPr>
-            <a:r>
-              <a:rPr sz="2000" b="0" i="0">
-                <a:solidFill>
-                  <a:srgbClr val="333333"/>
-                </a:solidFill>
-                <a:latin typeface="Calibri"/>
-              </a:rPr>
-              <a:t>–   Un equipo presenta una propuesta a pares y a arquitectos mas experimentados cuyo trabajo explicito es buscarle el punto debil antes de que ese punto debil cueste dinero</a:t>
-            </a:r>
-          </a:p>
-          <a:p>
-            <a:pPr>
-              <a:spcAft>
-                <a:spcPts val="800"/>
-              </a:spcAft>
-            </a:pPr>
-            <a:r>
-              <a:rPr sz="2000" b="0" i="0">
-                <a:solidFill>
-                  <a:srgbClr val="333333"/>
-                </a:solidFill>
-                <a:latin typeface="Calibri"/>
-              </a:rPr>
-              <a:t>–   Y lo que se pregunta ahi es exactamente lo mismo que hoy, es decir que decidieron, que descartaron, que aceptaron perder, y como sabran si se equivocaron.</a:t>
-            </a:r>
-          </a:p>
-          <a:p>
-            <a:pPr>
-              <a:spcAft>
-                <a:spcPts val="800"/>
-              </a:spcAft>
-            </a:pPr>
-            <a:r>
-              <a:rPr sz="2000" b="0" i="0">
-                <a:solidFill>
-                  <a:srgbClr val="333333"/>
-                </a:solidFill>
-                <a:latin typeface="Calibri"/>
-              </a:rPr>
-              <a:t>–   El ADR es un formato real, usado en equipos reales, no un invento academico del curso.</a:t>
-            </a:r>
-          </a:p>
-        </p:txBody>
-      </p:sp>
-      <p:sp>
-        <p:nvSpPr>
-          <p:cNvPr id="6" name="TextBox 5"/>
-          <p:cNvSpPr txBox="1"/>
-          <p:nvPr/>
-        </p:nvSpPr>
-        <p:spPr>
-          <a:xfrm>
-            <a:off x="11185855" y="6473952"/>
-            <a:ext cx="640080" cy="274320"/>
-          </a:xfrm>
-          <a:prstGeom prst="rect">
-            <a:avLst/>
-          </a:prstGeom>
-          <a:noFill/>
-        </p:spPr>
-        <p:txBody>
-          <a:bodyPr wrap="square">
-            <a:spAutoFit/>
-          </a:bodyPr>
-          <a:lstStyle/>
-          <a:p>
-            <a:pPr algn="r"/>
-            <a:r>
-              <a:rPr sz="1100" b="0" i="0">
-                <a:solidFill>
-                  <a:srgbClr val="666666"/>
-                </a:solidFill>
-                <a:latin typeface="Calibri"/>
-              </a:rPr>
-              <a:t>21</a:t>
-            </a:r>
-          </a:p>
-        </p:txBody>
-      </p:sp>
-    </p:spTree>
-  </p:cSld>
-  <p:clrMapOvr>
-    <a:masterClrMapping/>
-  </p:clrMapOvr>
-</p:sld>
-</file>
-
-<file path=ppt/slides/slide22.xml><?xml version="1.0" encoding="utf-8"?>
-<p:sld xmlns:a="http://schemas.openxmlformats.org/drawingml/2006/main" xmlns:p="http://schemas.openxmlformats.org/presentationml/2006/main" xmlns:r="http://schemas.openxmlformats.org/officeDocument/2006/relationships">
-  <p:cSld>
-    <p:bg>
-      <p:bgPr>
-        <a:solidFill>
-          <a:srgbClr val="FFFFFF"/>
-        </a:solidFill>
-        <a:effectLst/>
-      </p:bgPr>
-    </p:bg>
-    <p:spTree>
-      <p:nvGrpSpPr>
-        <p:cNvPr id="1" name=""/>
-        <p:cNvGrpSpPr/>
-        <p:nvPr/>
-      </p:nvGrpSpPr>
-      <p:grpSpPr/>
-      <p:sp>
-        <p:nvSpPr>
-          <p:cNvPr id="2" name="Rectangle 1"/>
-          <p:cNvSpPr/>
-          <p:nvPr/>
-        </p:nvSpPr>
-        <p:spPr>
-          <a:xfrm>
-            <a:off x="0" y="0"/>
-            <a:ext cx="12191695" cy="960120"/>
-          </a:xfrm>
-          <a:prstGeom prst="rect">
-            <a:avLst/>
-          </a:prstGeom>
-          <a:solidFill>
-            <a:srgbClr val="095292"/>
-          </a:solidFill>
-          <a:ln>
-            <a:noFill/>
-          </a:ln>
-        </p:spPr>
-        <p:style>
-          <a:lnRef idx="1">
-            <a:schemeClr val="accent1"/>
-          </a:lnRef>
-          <a:fillRef idx="3">
-            <a:schemeClr val="accent1"/>
-          </a:fillRef>
-          <a:effectRef idx="2">
-            <a:schemeClr val="accent1"/>
-          </a:effectRef>
-          <a:fontRef idx="minor">
-            <a:schemeClr val="lt1"/>
-          </a:fontRef>
-        </p:style>
-        <p:txBody>
-          <a:bodyPr rtlCol="0" anchor="ctr"/>
-          <a:lstStyle/>
-          <a:p>
-            <a:pPr algn="ctr"/>
-          </a:p>
-        </p:txBody>
-      </p:sp>
-      <p:sp>
-        <p:nvSpPr>
-          <p:cNvPr id="3" name="Rectangle 2"/>
-          <p:cNvSpPr/>
-          <p:nvPr/>
-        </p:nvSpPr>
-        <p:spPr>
-          <a:xfrm>
-            <a:off x="0" y="960120"/>
-            <a:ext cx="12191695" cy="41148"/>
-          </a:xfrm>
-          <a:prstGeom prst="rect">
-            <a:avLst/>
-          </a:prstGeom>
-          <a:solidFill>
-            <a:srgbClr val="FFD000"/>
-          </a:solidFill>
-          <a:ln>
-            <a:noFill/>
-          </a:ln>
-        </p:spPr>
-        <p:style>
-          <a:lnRef idx="1">
-            <a:schemeClr val="accent1"/>
-          </a:lnRef>
-          <a:fillRef idx="3">
-            <a:schemeClr val="accent1"/>
-          </a:fillRef>
-          <a:effectRef idx="2">
-            <a:schemeClr val="accent1"/>
-          </a:effectRef>
-          <a:fontRef idx="minor">
-            <a:schemeClr val="lt1"/>
-          </a:fontRef>
-        </p:style>
-        <p:txBody>
-          <a:bodyPr rtlCol="0" anchor="ctr"/>
-          <a:lstStyle/>
-          <a:p>
-            <a:pPr algn="ctr"/>
-          </a:p>
-        </p:txBody>
-      </p:sp>
-      <p:sp>
-        <p:nvSpPr>
-          <p:cNvPr id="4" name="TextBox 3"/>
-          <p:cNvSpPr txBox="1"/>
-          <p:nvPr/>
-        </p:nvSpPr>
-        <p:spPr>
-          <a:xfrm>
-            <a:off x="457200" y="164592"/>
-            <a:ext cx="11277295" cy="502920"/>
-          </a:xfrm>
-          <a:prstGeom prst="rect">
-            <a:avLst/>
-          </a:prstGeom>
-          <a:noFill/>
-        </p:spPr>
-        <p:txBody>
-          <a:bodyPr wrap="square">
-            <a:spAutoFit/>
-          </a:bodyPr>
-          <a:lstStyle/>
-          <a:p>
-            <a:r>
-              <a:rPr sz="2600" b="1" i="0">
-                <a:solidFill>
-                  <a:srgbClr val="FFFFFF"/>
-                </a:solidFill>
-                <a:latin typeface="Calibri"/>
-              </a:rPr>
-              <a:t>El cierre del curso: conectar lo hecho con la practica profesional (2/2)</a:t>
-            </a:r>
-          </a:p>
-        </p:txBody>
-      </p:sp>
-      <p:sp>
-        <p:nvSpPr>
-          <p:cNvPr id="5" name="TextBox 4"/>
-          <p:cNvSpPr txBox="1"/>
-          <p:nvPr/>
-        </p:nvSpPr>
-        <p:spPr>
-          <a:xfrm>
-            <a:off x="457200" y="1170432"/>
-            <a:ext cx="11277295" cy="5230368"/>
-          </a:xfrm>
-          <a:prstGeom prst="rect">
-            <a:avLst/>
-          </a:prstGeom>
-          <a:noFill/>
-        </p:spPr>
-        <p:txBody>
-          <a:bodyPr wrap="square">
-            <a:spAutoFit/>
-          </a:bodyPr>
-          <a:lstStyle/>
-          <a:p>
-            <a:pPr>
-              <a:spcAft>
-                <a:spcPts val="800"/>
-              </a:spcAft>
-            </a:pPr>
-            <a:r>
-              <a:rPr sz="2000" b="0" i="0">
-                <a:solidFill>
-                  <a:srgbClr val="333333"/>
-                </a:solidFill>
-                <a:latin typeface="Calibri"/>
-              </a:rPr>
-              <a:t>–   El diagrama de contenedores, el Dockerfile y el pipeline que el estudiante escribio son los mismos artefactos que se producen con una cuenta corporativa</a:t>
-            </a:r>
-          </a:p>
-          <a:p>
-            <a:pPr>
-              <a:spcAft>
-                <a:spcPts val="800"/>
-              </a:spcAft>
-            </a:pPr>
-            <a:r>
-              <a:rPr sz="2000" b="0" i="0">
-                <a:solidFill>
-                  <a:srgbClr val="333333"/>
-                </a:solidFill>
-                <a:latin typeface="Calibri"/>
-              </a:rPr>
-              <a:t>–   Lo que no se aprende en un free tier es justamente lo que si se aprendio aqui, que es razonar el trade-off.</a:t>
-            </a:r>
-          </a:p>
-          <a:p>
-            <a:pPr>
-              <a:spcAft>
-                <a:spcPts val="800"/>
-              </a:spcAft>
-            </a:pPr>
-            <a:r>
-              <a:rPr sz="2000" b="0" i="0">
-                <a:solidFill>
-                  <a:srgbClr val="333333"/>
-                </a:solidFill>
-                <a:latin typeface="Calibri"/>
-              </a:rPr>
-              <a:t>–   La frase de cierre util es que arquitectura no es una lista de logos de proveedores, sino un conjunto de decisiones documentadas con sus consecuencias.</a:t>
-            </a:r>
-          </a:p>
-          <a:p>
-            <a:pPr>
-              <a:spcAft>
-                <a:spcPts val="800"/>
-              </a:spcAft>
-            </a:pPr>
-            <a:r>
-              <a:rPr sz="2000" b="0" i="0">
-                <a:solidFill>
-                  <a:srgbClr val="333333"/>
-                </a:solidFill>
-                <a:latin typeface="Calibri"/>
-              </a:rPr>
-              <a:t>–   Y el pedido final debe ser concreto y verificable: conserven el repositorio con el informe, los diagramas y el workflow como portafolio, porque eso es lo que se muestra en una primera entrevista tecnica cuando piden un ejemplo de trabajo propio.</a:t>
-            </a:r>
-          </a:p>
-        </p:txBody>
-      </p:sp>
-      <p:sp>
-        <p:nvSpPr>
-          <p:cNvPr id="6" name="TextBox 5"/>
-          <p:cNvSpPr txBox="1"/>
-          <p:nvPr/>
-        </p:nvSpPr>
-        <p:spPr>
-          <a:xfrm>
-            <a:off x="11185855" y="6473952"/>
-            <a:ext cx="640080" cy="274320"/>
-          </a:xfrm>
-          <a:prstGeom prst="rect">
-            <a:avLst/>
-          </a:prstGeom>
-          <a:noFill/>
-        </p:spPr>
-        <p:txBody>
-          <a:bodyPr wrap="square">
-            <a:spAutoFit/>
-          </a:bodyPr>
-          <a:lstStyle/>
-          <a:p>
-            <a:pPr algn="r"/>
-            <a:r>
-              <a:rPr sz="1100" b="0" i="0">
-                <a:solidFill>
-                  <a:srgbClr val="666666"/>
-                </a:solidFill>
-                <a:latin typeface="Calibri"/>
-              </a:rPr>
-              <a:t>22</a:t>
-            </a:r>
-          </a:p>
-        </p:txBody>
-      </p:sp>
-    </p:spTree>
-  </p:cSld>
-  <p:clrMapOvr>
-    <a:masterClrMapping/>
-  </p:clrMapOvr>
-</p:sld>
-</file>
-
-<file path=ppt/slides/slide23.xml><?xml version="1.0" encoding="utf-8"?>
-<p:sld xmlns:a="http://schemas.openxmlformats.org/drawingml/2006/main" xmlns:p="http://schemas.openxmlformats.org/presentationml/2006/main" xmlns:r="http://schemas.openxmlformats.org/officeDocument/2006/relationships">
-  <p:cSld>
-    <p:bg>
-      <p:bgPr>
-        <a:solidFill>
-          <a:srgbClr val="FFFFFF"/>
-        </a:solidFill>
-        <a:effectLst/>
-      </p:bgPr>
-    </p:bg>
-    <p:spTree>
-      <p:nvGrpSpPr>
-        <p:cNvPr id="1" name=""/>
-        <p:cNvGrpSpPr/>
-        <p:nvPr/>
-      </p:nvGrpSpPr>
-      <p:grpSpPr/>
-      <p:sp>
-        <p:nvSpPr>
-          <p:cNvPr id="2" name="Rectangle 1"/>
-          <p:cNvSpPr/>
-          <p:nvPr/>
-        </p:nvSpPr>
-        <p:spPr>
-          <a:xfrm>
-            <a:off x="0" y="0"/>
-            <a:ext cx="12191695" cy="1170432"/>
-          </a:xfrm>
-          <a:prstGeom prst="rect">
-            <a:avLst/>
-          </a:prstGeom>
-          <a:solidFill>
-            <a:srgbClr val="095292"/>
-          </a:solidFill>
-          <a:ln>
-            <a:noFill/>
-          </a:ln>
-        </p:spPr>
-        <p:style>
-          <a:lnRef idx="1">
-            <a:schemeClr val="accent1"/>
-          </a:lnRef>
-          <a:fillRef idx="3">
-            <a:schemeClr val="accent1"/>
-          </a:fillRef>
-          <a:effectRef idx="2">
-            <a:schemeClr val="accent1"/>
-          </a:effectRef>
-          <a:fontRef idx="minor">
-            <a:schemeClr val="lt1"/>
-          </a:fontRef>
-        </p:style>
-        <p:txBody>
-          <a:bodyPr rtlCol="0" anchor="ctr"/>
-          <a:lstStyle/>
-          <a:p>
-            <a:pPr algn="ctr"/>
-          </a:p>
-        </p:txBody>
-      </p:sp>
-      <p:sp>
-        <p:nvSpPr>
-          <p:cNvPr id="3" name="Rectangle 2"/>
-          <p:cNvSpPr/>
-          <p:nvPr/>
-        </p:nvSpPr>
-        <p:spPr>
-          <a:xfrm>
-            <a:off x="0" y="1170432"/>
-            <a:ext cx="12191695" cy="41148"/>
-          </a:xfrm>
-          <a:prstGeom prst="rect">
-            <a:avLst/>
-          </a:prstGeom>
-          <a:solidFill>
-            <a:srgbClr val="FFD000"/>
-          </a:solidFill>
-          <a:ln>
-            <a:noFill/>
-          </a:ln>
-        </p:spPr>
-        <p:style>
-          <a:lnRef idx="1">
-            <a:schemeClr val="accent1"/>
-          </a:lnRef>
-          <a:fillRef idx="3">
-            <a:schemeClr val="accent1"/>
-          </a:fillRef>
-          <a:effectRef idx="2">
-            <a:schemeClr val="accent1"/>
-          </a:effectRef>
-          <a:fontRef idx="minor">
-            <a:schemeClr val="lt1"/>
-          </a:fontRef>
-        </p:style>
-        <p:txBody>
-          <a:bodyPr rtlCol="0" anchor="ctr"/>
-          <a:lstStyle/>
-          <a:p>
-            <a:pPr algn="ctr"/>
-          </a:p>
-        </p:txBody>
-      </p:sp>
-      <p:sp>
-        <p:nvSpPr>
-          <p:cNvPr id="4" name="TextBox 3"/>
-          <p:cNvSpPr txBox="1"/>
-          <p:nvPr/>
-        </p:nvSpPr>
-        <p:spPr>
-          <a:xfrm>
-            <a:off x="457200" y="164592"/>
-            <a:ext cx="11277295" cy="384048"/>
-          </a:xfrm>
-          <a:prstGeom prst="rect">
-            <a:avLst/>
-          </a:prstGeom>
-          <a:noFill/>
-        </p:spPr>
-        <p:txBody>
-          <a:bodyPr wrap="square">
-            <a:spAutoFit/>
-          </a:bodyPr>
-          <a:lstStyle/>
-          <a:p>
-            <a:r>
-              <a:rPr sz="2600" b="1" i="0">
-                <a:solidFill>
-                  <a:srgbClr val="FFFFFF"/>
-                </a:solidFill>
-                <a:latin typeface="Calibri"/>
-              </a:rPr>
-              <a:t>Herramientas de hoy</a:t>
-            </a:r>
-          </a:p>
-        </p:txBody>
-      </p:sp>
-      <p:sp>
-        <p:nvSpPr>
-          <p:cNvPr id="5" name="TextBox 4"/>
-          <p:cNvSpPr txBox="1"/>
-          <p:nvPr/>
-        </p:nvSpPr>
-        <p:spPr>
-          <a:xfrm>
-            <a:off x="457200" y="566928"/>
-            <a:ext cx="11277295" cy="411480"/>
-          </a:xfrm>
-          <a:prstGeom prst="rect">
-            <a:avLst/>
-          </a:prstGeom>
-          <a:noFill/>
-        </p:spPr>
-        <p:txBody>
-          <a:bodyPr wrap="square">
-            <a:spAutoFit/>
-          </a:bodyPr>
-          <a:lstStyle/>
-          <a:p>
-            <a:r>
-              <a:rPr sz="1400" b="0" i="0">
-                <a:solidFill>
-                  <a:srgbClr val="B8D8EE"/>
-                </a:solidFill>
-                <a:latin typeface="Calibri"/>
-              </a:rPr>
-              <a:t>Gratis · navegador o free tier · sin cuenta de pago</a:t>
-            </a:r>
-          </a:p>
-        </p:txBody>
-      </p:sp>
-      <p:sp>
-        <p:nvSpPr>
-          <p:cNvPr id="6" name="Rounded Rectangle 5"/>
-          <p:cNvSpPr/>
-          <p:nvPr/>
-        </p:nvSpPr>
-        <p:spPr>
-          <a:xfrm>
-            <a:off x="457200" y="1591056"/>
-            <a:ext cx="3624986" cy="2299716"/>
-          </a:xfrm>
-          <a:prstGeom prst="roundRect">
-            <a:avLst>
-              <a:gd name="adj" fmla="val 12000"/>
-            </a:avLst>
-          </a:prstGeom>
-          <a:solidFill>
-            <a:srgbClr val="F2F2F2"/>
-          </a:solidFill>
-          <a:ln>
-            <a:noFill/>
-          </a:ln>
-        </p:spPr>
-        <p:style>
-          <a:lnRef idx="1">
-            <a:schemeClr val="accent1"/>
-          </a:lnRef>
-          <a:fillRef idx="3">
-            <a:schemeClr val="accent1"/>
-          </a:fillRef>
-          <a:effectRef idx="2">
-            <a:schemeClr val="accent1"/>
-          </a:effectRef>
-          <a:fontRef idx="minor">
-            <a:schemeClr val="lt1"/>
-          </a:fontRef>
-        </p:style>
-        <p:txBody>
-          <a:bodyPr rtlCol="0" anchor="ctr"/>
-          <a:lstStyle/>
-          <a:p>
-            <a:pPr algn="ctr"/>
-          </a:p>
-        </p:txBody>
-      </p:sp>
-      <p:sp>
-        <p:nvSpPr>
-          <p:cNvPr id="7" name="Rectangle 6"/>
-          <p:cNvSpPr/>
-          <p:nvPr/>
-        </p:nvSpPr>
-        <p:spPr>
-          <a:xfrm>
-            <a:off x="457200" y="1591056"/>
-            <a:ext cx="3624986" cy="64008"/>
-          </a:xfrm>
-          <a:prstGeom prst="rect">
-            <a:avLst/>
-          </a:prstGeom>
-          <a:solidFill>
-            <a:srgbClr val="095292"/>
-          </a:solidFill>
-          <a:ln>
-            <a:noFill/>
-          </a:ln>
-        </p:spPr>
-        <p:style>
-          <a:lnRef idx="1">
-            <a:schemeClr val="accent1"/>
-          </a:lnRef>
-          <a:fillRef idx="3">
-            <a:schemeClr val="accent1"/>
-          </a:fillRef>
-          <a:effectRef idx="2">
-            <a:schemeClr val="accent1"/>
-          </a:effectRef>
-          <a:fontRef idx="minor">
-            <a:schemeClr val="lt1"/>
-          </a:fontRef>
-        </p:style>
-        <p:txBody>
-          <a:bodyPr rtlCol="0" anchor="ctr"/>
-          <a:lstStyle/>
-          <a:p>
-            <a:pPr algn="ctr"/>
-          </a:p>
-        </p:txBody>
-      </p:sp>
-      <p:sp>
-        <p:nvSpPr>
-          <p:cNvPr id="8" name="Rectangle 7"/>
-          <p:cNvSpPr/>
-          <p:nvPr/>
-        </p:nvSpPr>
-        <p:spPr>
-          <a:xfrm>
-            <a:off x="457200" y="1655064"/>
-            <a:ext cx="3624986" cy="27432"/>
-          </a:xfrm>
-          <a:prstGeom prst="rect">
-            <a:avLst/>
-          </a:prstGeom>
-          <a:solidFill>
-            <a:srgbClr val="FFD000"/>
-          </a:solidFill>
-          <a:ln>
-            <a:noFill/>
-          </a:ln>
-        </p:spPr>
-        <p:style>
-          <a:lnRef idx="1">
-            <a:schemeClr val="accent1"/>
-          </a:lnRef>
-          <a:fillRef idx="3">
-            <a:schemeClr val="accent1"/>
-          </a:fillRef>
-          <a:effectRef idx="2">
-            <a:schemeClr val="accent1"/>
-          </a:effectRef>
-          <a:fontRef idx="minor">
-            <a:schemeClr val="lt1"/>
-          </a:fontRef>
-        </p:style>
-        <p:txBody>
-          <a:bodyPr rtlCol="0" anchor="ctr"/>
-          <a:lstStyle/>
-          <a:p>
-            <a:pPr algn="ctr"/>
-          </a:p>
-        </p:txBody>
-      </p:sp>
-      <p:pic>
-        <p:nvPicPr>
-          <p:cNvPr id="9" name="Picture 8" descr="google_docs.png"/>
-          <p:cNvPicPr>
-            <a:picLocks noChangeAspect="1"/>
-          </p:cNvPicPr>
-          <p:nvPr/>
-        </p:nvPicPr>
-        <p:blipFill>
-          <a:blip r:embed="rId2"/>
-          <a:stretch>
-            <a:fillRect/>
-          </a:stretch>
-        </p:blipFill>
-        <p:spPr>
-          <a:xfrm>
-            <a:off x="1659331" y="1847087"/>
-            <a:ext cx="1220724" cy="1220724"/>
-          </a:xfrm>
-          <a:prstGeom prst="rect">
-            <a:avLst/>
-          </a:prstGeom>
-        </p:spPr>
-      </p:pic>
-      <p:sp>
-        <p:nvSpPr>
-          <p:cNvPr id="10" name="TextBox 9"/>
-          <p:cNvSpPr txBox="1"/>
-          <p:nvPr/>
-        </p:nvSpPr>
-        <p:spPr>
-          <a:xfrm>
-            <a:off x="530352" y="3159251"/>
-            <a:ext cx="3478682" cy="621792"/>
-          </a:xfrm>
-          <a:prstGeom prst="rect">
-            <a:avLst/>
-          </a:prstGeom>
-          <a:noFill/>
-        </p:spPr>
-        <p:txBody>
-          <a:bodyPr wrap="square" anchor="t"/>
-          <a:lstStyle/>
-          <a:p>
-            <a:pPr algn="ctr"/>
-            <a:r>
-              <a:rPr sz="1300" b="1" i="0">
-                <a:solidFill>
-                  <a:srgbClr val="095292"/>
-                </a:solidFill>
-                <a:latin typeface="Calibri"/>
-              </a:rPr>
-              <a:t>Google Docs</a:t>
-            </a:r>
-          </a:p>
-          <a:p>
-            <a:pPr algn="ctr">
-              <a:spcBef>
-                <a:spcPts val="200"/>
-              </a:spcBef>
-            </a:pPr>
-            <a:r>
-              <a:rPr sz="1000" b="0" i="0">
-                <a:solidFill>
-                  <a:srgbClr val="666666"/>
-                </a:solidFill>
-                <a:latin typeface="Calibri"/>
-              </a:rPr>
-              <a:t>Pitch y portafolio</a:t>
-            </a:r>
-          </a:p>
-        </p:txBody>
-      </p:sp>
-      <p:sp>
-        <p:nvSpPr>
-          <p:cNvPr id="11" name="Rounded Rectangle 10"/>
-          <p:cNvSpPr/>
-          <p:nvPr/>
-        </p:nvSpPr>
-        <p:spPr>
-          <a:xfrm>
-            <a:off x="4283354" y="1591056"/>
-            <a:ext cx="3624986" cy="2299716"/>
-          </a:xfrm>
-          <a:prstGeom prst="roundRect">
-            <a:avLst>
-              <a:gd name="adj" fmla="val 12000"/>
-            </a:avLst>
-          </a:prstGeom>
-          <a:solidFill>
-            <a:srgbClr val="F2F2F2"/>
-          </a:solidFill>
-          <a:ln>
-            <a:noFill/>
-          </a:ln>
-        </p:spPr>
-        <p:style>
-          <a:lnRef idx="1">
-            <a:schemeClr val="accent1"/>
-          </a:lnRef>
-          <a:fillRef idx="3">
-            <a:schemeClr val="accent1"/>
-          </a:fillRef>
-          <a:effectRef idx="2">
-            <a:schemeClr val="accent1"/>
-          </a:effectRef>
-          <a:fontRef idx="minor">
-            <a:schemeClr val="lt1"/>
-          </a:fontRef>
-        </p:style>
-        <p:txBody>
-          <a:bodyPr rtlCol="0" anchor="ctr"/>
-          <a:lstStyle/>
-          <a:p>
-            <a:pPr algn="ctr"/>
-          </a:p>
-        </p:txBody>
-      </p:sp>
-      <p:sp>
-        <p:nvSpPr>
-          <p:cNvPr id="12" name="Rectangle 11"/>
-          <p:cNvSpPr/>
-          <p:nvPr/>
-        </p:nvSpPr>
-        <p:spPr>
-          <a:xfrm>
-            <a:off x="4283354" y="1591056"/>
-            <a:ext cx="3624986" cy="64008"/>
-          </a:xfrm>
-          <a:prstGeom prst="rect">
-            <a:avLst/>
-          </a:prstGeom>
-          <a:solidFill>
-            <a:srgbClr val="095292"/>
-          </a:solidFill>
-          <a:ln>
-            <a:noFill/>
-          </a:ln>
-        </p:spPr>
-        <p:style>
-          <a:lnRef idx="1">
-            <a:schemeClr val="accent1"/>
-          </a:lnRef>
-          <a:fillRef idx="3">
-            <a:schemeClr val="accent1"/>
-          </a:fillRef>
-          <a:effectRef idx="2">
-            <a:schemeClr val="accent1"/>
-          </a:effectRef>
-          <a:fontRef idx="minor">
-            <a:schemeClr val="lt1"/>
-          </a:fontRef>
-        </p:style>
-        <p:txBody>
-          <a:bodyPr rtlCol="0" anchor="ctr"/>
-          <a:lstStyle/>
-          <a:p>
-            <a:pPr algn="ctr"/>
-          </a:p>
-        </p:txBody>
-      </p:sp>
-      <p:sp>
-        <p:nvSpPr>
-          <p:cNvPr id="13" name="Rectangle 12"/>
-          <p:cNvSpPr/>
-          <p:nvPr/>
-        </p:nvSpPr>
-        <p:spPr>
-          <a:xfrm>
-            <a:off x="4283354" y="1655064"/>
-            <a:ext cx="3624986" cy="27432"/>
-          </a:xfrm>
-          <a:prstGeom prst="rect">
-            <a:avLst/>
-          </a:prstGeom>
-          <a:solidFill>
-            <a:srgbClr val="FFD000"/>
-          </a:solidFill>
-          <a:ln>
-            <a:noFill/>
-          </a:ln>
-        </p:spPr>
-        <p:style>
-          <a:lnRef idx="1">
-            <a:schemeClr val="accent1"/>
-          </a:lnRef>
-          <a:fillRef idx="3">
-            <a:schemeClr val="accent1"/>
-          </a:fillRef>
-          <a:effectRef idx="2">
-            <a:schemeClr val="accent1"/>
-          </a:effectRef>
-          <a:fontRef idx="minor">
-            <a:schemeClr val="lt1"/>
-          </a:fontRef>
-        </p:style>
-        <p:txBody>
-          <a:bodyPr rtlCol="0" anchor="ctr"/>
-          <a:lstStyle/>
-          <a:p>
-            <a:pPr algn="ctr"/>
-          </a:p>
-        </p:txBody>
-      </p:sp>
-      <p:pic>
-        <p:nvPicPr>
-          <p:cNvPr id="14" name="Picture 13" descr="drawio.png"/>
-          <p:cNvPicPr>
-            <a:picLocks noChangeAspect="1"/>
-          </p:cNvPicPr>
-          <p:nvPr/>
-        </p:nvPicPr>
-        <p:blipFill>
-          <a:blip r:embed="rId3"/>
-          <a:stretch>
-            <a:fillRect/>
-          </a:stretch>
-        </p:blipFill>
-        <p:spPr>
-          <a:xfrm>
-            <a:off x="5485485" y="1847087"/>
-            <a:ext cx="1220724" cy="1220724"/>
-          </a:xfrm>
-          <a:prstGeom prst="rect">
-            <a:avLst/>
-          </a:prstGeom>
-        </p:spPr>
-      </p:pic>
-      <p:sp>
-        <p:nvSpPr>
-          <p:cNvPr id="15" name="TextBox 14"/>
-          <p:cNvSpPr txBox="1"/>
-          <p:nvPr/>
-        </p:nvSpPr>
-        <p:spPr>
-          <a:xfrm>
-            <a:off x="4356506" y="3159251"/>
-            <a:ext cx="3478682" cy="621792"/>
-          </a:xfrm>
-          <a:prstGeom prst="rect">
-            <a:avLst/>
-          </a:prstGeom>
-          <a:noFill/>
-        </p:spPr>
-        <p:txBody>
-          <a:bodyPr wrap="square" anchor="t"/>
-          <a:lstStyle/>
-          <a:p>
-            <a:pPr algn="ctr"/>
-            <a:r>
-              <a:rPr sz="1300" b="1" i="0">
-                <a:solidFill>
-                  <a:srgbClr val="095292"/>
-                </a:solidFill>
-                <a:latin typeface="Calibri"/>
-              </a:rPr>
-              <a:t>draw.io</a:t>
-            </a:r>
-          </a:p>
-          <a:p>
-            <a:pPr algn="ctr">
-              <a:spcBef>
-                <a:spcPts val="200"/>
-              </a:spcBef>
-            </a:pPr>
-            <a:r>
-              <a:rPr sz="1000" b="0" i="0">
-                <a:solidFill>
-                  <a:srgbClr val="666666"/>
-                </a:solidFill>
-                <a:latin typeface="Calibri"/>
-              </a:rPr>
-              <a:t>Diagramas del paquete</a:t>
-            </a:r>
-          </a:p>
-        </p:txBody>
-      </p:sp>
-      <p:sp>
-        <p:nvSpPr>
-          <p:cNvPr id="16" name="Rounded Rectangle 15"/>
-          <p:cNvSpPr/>
-          <p:nvPr/>
-        </p:nvSpPr>
-        <p:spPr>
-          <a:xfrm>
-            <a:off x="8109508" y="1591056"/>
-            <a:ext cx="3624986" cy="2299716"/>
-          </a:xfrm>
-          <a:prstGeom prst="roundRect">
-            <a:avLst>
-              <a:gd name="adj" fmla="val 12000"/>
-            </a:avLst>
-          </a:prstGeom>
-          <a:solidFill>
-            <a:srgbClr val="F2F2F2"/>
-          </a:solidFill>
-          <a:ln>
-            <a:noFill/>
-          </a:ln>
-        </p:spPr>
-        <p:style>
-          <a:lnRef idx="1">
-            <a:schemeClr val="accent1"/>
-          </a:lnRef>
-          <a:fillRef idx="3">
-            <a:schemeClr val="accent1"/>
-          </a:fillRef>
-          <a:effectRef idx="2">
-            <a:schemeClr val="accent1"/>
-          </a:effectRef>
-          <a:fontRef idx="minor">
-            <a:schemeClr val="lt1"/>
-          </a:fontRef>
-        </p:style>
-        <p:txBody>
-          <a:bodyPr rtlCol="0" anchor="ctr"/>
-          <a:lstStyle/>
-          <a:p>
-            <a:pPr algn="ctr"/>
-          </a:p>
-        </p:txBody>
-      </p:sp>
-      <p:sp>
-        <p:nvSpPr>
-          <p:cNvPr id="17" name="Rectangle 16"/>
-          <p:cNvSpPr/>
-          <p:nvPr/>
-        </p:nvSpPr>
-        <p:spPr>
-          <a:xfrm>
-            <a:off x="8109508" y="1591056"/>
-            <a:ext cx="3624986" cy="64008"/>
-          </a:xfrm>
-          <a:prstGeom prst="rect">
-            <a:avLst/>
-          </a:prstGeom>
-          <a:solidFill>
-            <a:srgbClr val="095292"/>
-          </a:solidFill>
-          <a:ln>
-            <a:noFill/>
-          </a:ln>
-        </p:spPr>
-        <p:style>
-          <a:lnRef idx="1">
-            <a:schemeClr val="accent1"/>
-          </a:lnRef>
-          <a:fillRef idx="3">
-            <a:schemeClr val="accent1"/>
-          </a:fillRef>
-          <a:effectRef idx="2">
-            <a:schemeClr val="accent1"/>
-          </a:effectRef>
-          <a:fontRef idx="minor">
-            <a:schemeClr val="lt1"/>
-          </a:fontRef>
-        </p:style>
-        <p:txBody>
-          <a:bodyPr rtlCol="0" anchor="ctr"/>
-          <a:lstStyle/>
-          <a:p>
-            <a:pPr algn="ctr"/>
-          </a:p>
-        </p:txBody>
-      </p:sp>
-      <p:sp>
-        <p:nvSpPr>
-          <p:cNvPr id="18" name="Rectangle 17"/>
-          <p:cNvSpPr/>
-          <p:nvPr/>
-        </p:nvSpPr>
-        <p:spPr>
-          <a:xfrm>
-            <a:off x="8109508" y="1655064"/>
-            <a:ext cx="3624986" cy="27432"/>
-          </a:xfrm>
-          <a:prstGeom prst="rect">
-            <a:avLst/>
-          </a:prstGeom>
-          <a:solidFill>
-            <a:srgbClr val="FFD000"/>
-          </a:solidFill>
-          <a:ln>
-            <a:noFill/>
-          </a:ln>
-        </p:spPr>
-        <p:style>
-          <a:lnRef idx="1">
-            <a:schemeClr val="accent1"/>
-          </a:lnRef>
-          <a:fillRef idx="3">
-            <a:schemeClr val="accent1"/>
-          </a:fillRef>
-          <a:effectRef idx="2">
-            <a:schemeClr val="accent1"/>
-          </a:effectRef>
-          <a:fontRef idx="minor">
-            <a:schemeClr val="lt1"/>
-          </a:fontRef>
-        </p:style>
-        <p:txBody>
-          <a:bodyPr rtlCol="0" anchor="ctr"/>
-          <a:lstStyle/>
-          <a:p>
-            <a:pPr algn="ctr"/>
-          </a:p>
-        </p:txBody>
-      </p:sp>
-      <p:pic>
-        <p:nvPicPr>
-          <p:cNvPr id="19" name="Picture 18" descr="mermaid.png"/>
-          <p:cNvPicPr>
-            <a:picLocks noChangeAspect="1"/>
-          </p:cNvPicPr>
-          <p:nvPr/>
-        </p:nvPicPr>
-        <p:blipFill>
-          <a:blip r:embed="rId4"/>
-          <a:stretch>
-            <a:fillRect/>
-          </a:stretch>
-        </p:blipFill>
-        <p:spPr>
-          <a:xfrm>
-            <a:off x="9311640" y="1847087"/>
-            <a:ext cx="1220724" cy="1220724"/>
-          </a:xfrm>
-          <a:prstGeom prst="rect">
-            <a:avLst/>
-          </a:prstGeom>
-        </p:spPr>
-      </p:pic>
-      <p:sp>
-        <p:nvSpPr>
-          <p:cNvPr id="20" name="TextBox 19"/>
-          <p:cNvSpPr txBox="1"/>
-          <p:nvPr/>
-        </p:nvSpPr>
-        <p:spPr>
-          <a:xfrm>
-            <a:off x="8182660" y="3159251"/>
-            <a:ext cx="3478682" cy="621792"/>
-          </a:xfrm>
-          <a:prstGeom prst="rect">
-            <a:avLst/>
-          </a:prstGeom>
-          <a:noFill/>
-        </p:spPr>
-        <p:txBody>
-          <a:bodyPr wrap="square" anchor="t"/>
-          <a:lstStyle/>
-          <a:p>
-            <a:pPr algn="ctr"/>
-            <a:r>
-              <a:rPr sz="1300" b="1" i="0">
-                <a:solidFill>
-                  <a:srgbClr val="095292"/>
-                </a:solidFill>
-                <a:latin typeface="Calibri"/>
-              </a:rPr>
-              <a:t>Mermaid</a:t>
-            </a:r>
-          </a:p>
-          <a:p>
-            <a:pPr algn="ctr">
-              <a:spcBef>
-                <a:spcPts val="200"/>
-              </a:spcBef>
-            </a:pPr>
-            <a:r>
-              <a:rPr sz="1000" b="0" i="0">
-                <a:solidFill>
-                  <a:srgbClr val="666666"/>
-                </a:solidFill>
-                <a:latin typeface="Calibri"/>
-              </a:rPr>
-              <a:t>Codigo del diagrama</a:t>
-            </a:r>
-          </a:p>
-        </p:txBody>
-      </p:sp>
-      <p:sp>
-        <p:nvSpPr>
-          <p:cNvPr id="21" name="Rounded Rectangle 20"/>
-          <p:cNvSpPr/>
-          <p:nvPr/>
-        </p:nvSpPr>
-        <p:spPr>
-          <a:xfrm>
-            <a:off x="4283354" y="4055364"/>
-            <a:ext cx="3624986" cy="2299716"/>
-          </a:xfrm>
-          <a:prstGeom prst="roundRect">
-            <a:avLst>
-              <a:gd name="adj" fmla="val 12000"/>
-            </a:avLst>
-          </a:prstGeom>
-          <a:solidFill>
-            <a:srgbClr val="F2F2F2"/>
-          </a:solidFill>
-          <a:ln>
-            <a:noFill/>
-          </a:ln>
-        </p:spPr>
-        <p:style>
-          <a:lnRef idx="1">
-            <a:schemeClr val="accent1"/>
-          </a:lnRef>
-          <a:fillRef idx="3">
-            <a:schemeClr val="accent1"/>
-          </a:fillRef>
-          <a:effectRef idx="2">
-            <a:schemeClr val="accent1"/>
-          </a:effectRef>
-          <a:fontRef idx="minor">
-            <a:schemeClr val="lt1"/>
-          </a:fontRef>
-        </p:style>
-        <p:txBody>
-          <a:bodyPr rtlCol="0" anchor="ctr"/>
-          <a:lstStyle/>
-          <a:p>
-            <a:pPr algn="ctr"/>
-          </a:p>
-        </p:txBody>
-      </p:sp>
-      <p:sp>
-        <p:nvSpPr>
-          <p:cNvPr id="22" name="Rectangle 21"/>
-          <p:cNvSpPr/>
-          <p:nvPr/>
-        </p:nvSpPr>
-        <p:spPr>
-          <a:xfrm>
-            <a:off x="4283354" y="4055364"/>
-            <a:ext cx="3624986" cy="64008"/>
-          </a:xfrm>
-          <a:prstGeom prst="rect">
-            <a:avLst/>
-          </a:prstGeom>
-          <a:solidFill>
-            <a:srgbClr val="095292"/>
-          </a:solidFill>
-          <a:ln>
-            <a:noFill/>
-          </a:ln>
-        </p:spPr>
-        <p:style>
-          <a:lnRef idx="1">
-            <a:schemeClr val="accent1"/>
-          </a:lnRef>
-          <a:fillRef idx="3">
-            <a:schemeClr val="accent1"/>
-          </a:fillRef>
-          <a:effectRef idx="2">
-            <a:schemeClr val="accent1"/>
-          </a:effectRef>
-          <a:fontRef idx="minor">
-            <a:schemeClr val="lt1"/>
-          </a:fontRef>
-        </p:style>
-        <p:txBody>
-          <a:bodyPr rtlCol="0" anchor="ctr"/>
-          <a:lstStyle/>
-          <a:p>
-            <a:pPr algn="ctr"/>
-          </a:p>
-        </p:txBody>
-      </p:sp>
-      <p:sp>
-        <p:nvSpPr>
-          <p:cNvPr id="23" name="Rectangle 22"/>
-          <p:cNvSpPr/>
-          <p:nvPr/>
-        </p:nvSpPr>
-        <p:spPr>
-          <a:xfrm>
-            <a:off x="4283354" y="4119372"/>
-            <a:ext cx="3624986" cy="27432"/>
-          </a:xfrm>
-          <a:prstGeom prst="rect">
-            <a:avLst/>
-          </a:prstGeom>
-          <a:solidFill>
-            <a:srgbClr val="FFD000"/>
-          </a:solidFill>
-          <a:ln>
-            <a:noFill/>
-          </a:ln>
-        </p:spPr>
-        <p:style>
-          <a:lnRef idx="1">
-            <a:schemeClr val="accent1"/>
-          </a:lnRef>
-          <a:fillRef idx="3">
-            <a:schemeClr val="accent1"/>
-          </a:fillRef>
-          <a:effectRef idx="2">
-            <a:schemeClr val="accent1"/>
-          </a:effectRef>
-          <a:fontRef idx="minor">
-            <a:schemeClr val="lt1"/>
-          </a:fontRef>
-        </p:style>
-        <p:txBody>
-          <a:bodyPr rtlCol="0" anchor="ctr"/>
-          <a:lstStyle/>
-          <a:p>
-            <a:pPr algn="ctr"/>
-          </a:p>
-        </p:txBody>
-      </p:sp>
-      <p:pic>
-        <p:nvPicPr>
-          <p:cNvPr id="24" name="Picture 23" descr="examlab.png"/>
-          <p:cNvPicPr>
-            <a:picLocks noChangeAspect="1"/>
-          </p:cNvPicPr>
-          <p:nvPr/>
-        </p:nvPicPr>
-        <p:blipFill>
-          <a:blip r:embed="rId5"/>
-          <a:stretch>
-            <a:fillRect/>
-          </a:stretch>
-        </p:blipFill>
-        <p:spPr>
-          <a:xfrm>
-            <a:off x="5485485" y="4311396"/>
-            <a:ext cx="1220724" cy="1220724"/>
-          </a:xfrm>
-          <a:prstGeom prst="rect">
-            <a:avLst/>
-          </a:prstGeom>
-        </p:spPr>
-      </p:pic>
-      <p:sp>
-        <p:nvSpPr>
-          <p:cNvPr id="25" name="TextBox 24"/>
-          <p:cNvSpPr txBox="1"/>
-          <p:nvPr/>
-        </p:nvSpPr>
-        <p:spPr>
-          <a:xfrm>
-            <a:off x="4356506" y="5623560"/>
-            <a:ext cx="3478682" cy="621792"/>
-          </a:xfrm>
-          <a:prstGeom prst="rect">
-            <a:avLst/>
-          </a:prstGeom>
-          <a:noFill/>
-        </p:spPr>
-        <p:txBody>
-          <a:bodyPr wrap="square" anchor="t"/>
-          <a:lstStyle/>
-          <a:p>
-            <a:pPr algn="ctr"/>
-            <a:r>
-              <a:rPr sz="1300" b="1" i="0">
-                <a:solidFill>
-                  <a:srgbClr val="095292"/>
-                </a:solidFill>
-                <a:latin typeface="Calibri"/>
-              </a:rPr>
-              <a:t>la plataforma del curso</a:t>
-            </a:r>
-          </a:p>
-          <a:p>
-            <a:pPr algn="ctr">
-              <a:spcBef>
-                <a:spcPts val="200"/>
-              </a:spcBef>
-            </a:pPr>
-            <a:r>
-              <a:rPr sz="1000" b="0" i="0">
-                <a:solidFill>
-                  <a:srgbClr val="666666"/>
-                </a:solidFill>
-                <a:latin typeface="Calibri"/>
-              </a:rPr>
-              <a:t>Donde se entrega</a:t>
-            </a:r>
-          </a:p>
-        </p:txBody>
-      </p:sp>
-      <p:sp>
-        <p:nvSpPr>
-          <p:cNvPr id="26" name="TextBox 25"/>
-          <p:cNvSpPr txBox="1"/>
-          <p:nvPr/>
-        </p:nvSpPr>
-        <p:spPr>
-          <a:xfrm>
-            <a:off x="11185855" y="6473952"/>
-            <a:ext cx="640080" cy="274320"/>
-          </a:xfrm>
-          <a:prstGeom prst="rect">
-            <a:avLst/>
-          </a:prstGeom>
-          <a:noFill/>
-        </p:spPr>
-        <p:txBody>
-          <a:bodyPr wrap="square">
-            <a:spAutoFit/>
-          </a:bodyPr>
-          <a:lstStyle/>
-          <a:p>
-            <a:pPr algn="r"/>
-            <a:r>
-              <a:rPr sz="1100" b="0" i="0">
-                <a:solidFill>
-                  <a:srgbClr val="666666"/>
-                </a:solidFill>
-                <a:latin typeface="Calibri"/>
-              </a:rPr>
-              <a:t>23</a:t>
-            </a:r>
-          </a:p>
-        </p:txBody>
-      </p:sp>
-    </p:spTree>
-  </p:cSld>
-  <p:clrMapOvr>
-    <a:masterClrMapping/>
-  </p:clrMapOvr>
-</p:sld>
-</file>
-
-<file path=ppt/slides/slide24.xml><?xml version="1.0" encoding="utf-8"?>
-<p:sld xmlns:a="http://schemas.openxmlformats.org/drawingml/2006/main" xmlns:p="http://schemas.openxmlformats.org/presentationml/2006/main" xmlns:r="http://schemas.openxmlformats.org/officeDocument/2006/relationships">
-  <p:cSld>
-    <p:bg>
-      <p:bgPr>
-        <a:solidFill>
-          <a:srgbClr val="FFFFFF"/>
-        </a:solidFill>
-        <a:effectLst/>
-      </p:bgPr>
-    </p:bg>
-    <p:spTree>
-      <p:nvGrpSpPr>
-        <p:cNvPr id="1" name=""/>
-        <p:cNvGrpSpPr/>
-        <p:nvPr/>
-      </p:nvGrpSpPr>
-      <p:grpSpPr/>
-      <p:sp>
-        <p:nvSpPr>
-          <p:cNvPr id="2" name="Rectangle 1"/>
-          <p:cNvSpPr/>
-          <p:nvPr/>
-        </p:nvSpPr>
-        <p:spPr>
-          <a:xfrm>
-            <a:off x="0" y="0"/>
-            <a:ext cx="12191695" cy="1170432"/>
-          </a:xfrm>
-          <a:prstGeom prst="rect">
-            <a:avLst/>
-          </a:prstGeom>
-          <a:solidFill>
-            <a:srgbClr val="095292"/>
-          </a:solidFill>
-          <a:ln>
-            <a:noFill/>
-          </a:ln>
-        </p:spPr>
-        <p:style>
-          <a:lnRef idx="1">
-            <a:schemeClr val="accent1"/>
-          </a:lnRef>
-          <a:fillRef idx="3">
-            <a:schemeClr val="accent1"/>
-          </a:fillRef>
-          <a:effectRef idx="2">
-            <a:schemeClr val="accent1"/>
-          </a:effectRef>
-          <a:fontRef idx="minor">
-            <a:schemeClr val="lt1"/>
-          </a:fontRef>
-        </p:style>
-        <p:txBody>
-          <a:bodyPr rtlCol="0" anchor="ctr"/>
-          <a:lstStyle/>
-          <a:p>
-            <a:pPr algn="ctr"/>
-          </a:p>
-        </p:txBody>
-      </p:sp>
-      <p:sp>
-        <p:nvSpPr>
-          <p:cNvPr id="3" name="Rectangle 2"/>
-          <p:cNvSpPr/>
-          <p:nvPr/>
-        </p:nvSpPr>
-        <p:spPr>
-          <a:xfrm>
-            <a:off x="0" y="1170432"/>
-            <a:ext cx="12191695" cy="41148"/>
-          </a:xfrm>
-          <a:prstGeom prst="rect">
-            <a:avLst/>
-          </a:prstGeom>
-          <a:solidFill>
-            <a:srgbClr val="FFD000"/>
-          </a:solidFill>
-          <a:ln>
-            <a:noFill/>
-          </a:ln>
-        </p:spPr>
-        <p:style>
-          <a:lnRef idx="1">
-            <a:schemeClr val="accent1"/>
-          </a:lnRef>
-          <a:fillRef idx="3">
-            <a:schemeClr val="accent1"/>
-          </a:fillRef>
-          <a:effectRef idx="2">
-            <a:schemeClr val="accent1"/>
-          </a:effectRef>
-          <a:fontRef idx="minor">
-            <a:schemeClr val="lt1"/>
-          </a:fontRef>
-        </p:style>
-        <p:txBody>
-          <a:bodyPr rtlCol="0" anchor="ctr"/>
-          <a:lstStyle/>
-          <a:p>
-            <a:pPr algn="ctr"/>
-          </a:p>
-        </p:txBody>
-      </p:sp>
-      <p:sp>
-        <p:nvSpPr>
-          <p:cNvPr id="4" name="TextBox 3"/>
-          <p:cNvSpPr txBox="1"/>
-          <p:nvPr/>
-        </p:nvSpPr>
-        <p:spPr>
-          <a:xfrm>
-            <a:off x="457200" y="164592"/>
-            <a:ext cx="11277295" cy="384048"/>
-          </a:xfrm>
-          <a:prstGeom prst="rect">
-            <a:avLst/>
-          </a:prstGeom>
-          <a:noFill/>
-        </p:spPr>
-        <p:txBody>
-          <a:bodyPr wrap="square">
-            <a:spAutoFit/>
-          </a:bodyPr>
-          <a:lstStyle/>
-          <a:p>
-            <a:r>
-              <a:rPr sz="2600" b="1" i="0">
-                <a:solidFill>
-                  <a:srgbClr val="FFFFFF"/>
-                </a:solidFill>
-                <a:latin typeface="Calibri"/>
-              </a:rPr>
-              <a:t>Del boceto a la plataforma del curso (diagrama)</a:t>
-            </a:r>
-          </a:p>
-        </p:txBody>
-      </p:sp>
-      <p:sp>
-        <p:nvSpPr>
-          <p:cNvPr id="5" name="TextBox 4"/>
-          <p:cNvSpPr txBox="1"/>
-          <p:nvPr/>
-        </p:nvSpPr>
-        <p:spPr>
-          <a:xfrm>
-            <a:off x="457200" y="566928"/>
-            <a:ext cx="11277295" cy="411480"/>
-          </a:xfrm>
-          <a:prstGeom prst="rect">
-            <a:avLst/>
-          </a:prstGeom>
-          <a:noFill/>
-        </p:spPr>
-        <p:txBody>
-          <a:bodyPr wrap="square">
-            <a:spAutoFit/>
-          </a:bodyPr>
-          <a:lstStyle/>
-          <a:p>
-            <a:r>
-              <a:rPr sz="1400" b="0" i="0">
-                <a:solidFill>
-                  <a:srgbClr val="B8D8EE"/>
-                </a:solidFill>
-                <a:latin typeface="Calibri"/>
-              </a:rPr>
-              <a:t>El diagrama se entrega como código Mermaid en la plataforma del curso, no como imagen</a:t>
-            </a:r>
-          </a:p>
-        </p:txBody>
-      </p:sp>
-      <p:sp>
-        <p:nvSpPr>
-          <p:cNvPr id="6" name="Rounded Rectangle 5"/>
-          <p:cNvSpPr/>
-          <p:nvPr/>
-        </p:nvSpPr>
-        <p:spPr>
-          <a:xfrm>
-            <a:off x="457200" y="1659636"/>
-            <a:ext cx="11277295" cy="1051560"/>
-          </a:xfrm>
-          <a:prstGeom prst="roundRect">
-            <a:avLst>
-              <a:gd name="adj" fmla="val 12000"/>
-            </a:avLst>
-          </a:prstGeom>
-          <a:solidFill>
-            <a:srgbClr val="F2F2F2"/>
-          </a:solidFill>
-          <a:ln>
-            <a:noFill/>
-          </a:ln>
-        </p:spPr>
-        <p:style>
-          <a:lnRef idx="1">
-            <a:schemeClr val="accent1"/>
-          </a:lnRef>
-          <a:fillRef idx="3">
-            <a:schemeClr val="accent1"/>
-          </a:fillRef>
-          <a:effectRef idx="2">
-            <a:schemeClr val="accent1"/>
-          </a:effectRef>
-          <a:fontRef idx="minor">
-            <a:schemeClr val="lt1"/>
-          </a:fontRef>
-        </p:style>
-        <p:txBody>
-          <a:bodyPr rtlCol="0" anchor="ctr"/>
-          <a:lstStyle/>
-          <a:p>
-            <a:pPr algn="ctr"/>
-          </a:p>
-        </p:txBody>
-      </p:sp>
-      <p:sp>
-        <p:nvSpPr>
-          <p:cNvPr id="7" name="Rounded Rectangle 6"/>
-          <p:cNvSpPr/>
-          <p:nvPr/>
-        </p:nvSpPr>
-        <p:spPr>
-          <a:xfrm>
-            <a:off x="594360" y="1965960"/>
-            <a:ext cx="438912" cy="438912"/>
-          </a:xfrm>
-          <a:prstGeom prst="roundRect">
-            <a:avLst>
-              <a:gd name="adj" fmla="val 12000"/>
-            </a:avLst>
-          </a:prstGeom>
-          <a:solidFill>
-            <a:srgbClr val="095292"/>
-          </a:solidFill>
-          <a:ln>
-            <a:noFill/>
-          </a:ln>
-        </p:spPr>
-        <p:style>
-          <a:lnRef idx="1">
-            <a:schemeClr val="accent1"/>
-          </a:lnRef>
-          <a:fillRef idx="3">
-            <a:schemeClr val="accent1"/>
-          </a:fillRef>
-          <a:effectRef idx="2">
-            <a:schemeClr val="accent1"/>
-          </a:effectRef>
-          <a:fontRef idx="minor">
-            <a:schemeClr val="lt1"/>
-          </a:fontRef>
-        </p:style>
-        <p:txBody>
-          <a:bodyPr rtlCol="0" anchor="ctr"/>
-          <a:lstStyle/>
-          <a:p>
-            <a:pPr algn="ctr"/>
-          </a:p>
-        </p:txBody>
-      </p:sp>
-      <p:sp>
-        <p:nvSpPr>
-          <p:cNvPr id="8" name="TextBox 7"/>
-          <p:cNvSpPr txBox="1"/>
-          <p:nvPr/>
-        </p:nvSpPr>
-        <p:spPr>
-          <a:xfrm>
-            <a:off x="594360" y="1965960"/>
-            <a:ext cx="438912" cy="438912"/>
-          </a:xfrm>
-          <a:prstGeom prst="rect">
-            <a:avLst/>
-          </a:prstGeom>
-          <a:noFill/>
-        </p:spPr>
-        <p:txBody>
-          <a:bodyPr wrap="square" anchor="ctr"/>
-          <a:lstStyle/>
-          <a:p>
-            <a:pPr algn="ctr"/>
-            <a:r>
-              <a:rPr sz="1600" b="1" i="0">
-                <a:solidFill>
-                  <a:srgbClr val="FFFFFF"/>
-                </a:solidFill>
-                <a:latin typeface="Calibri"/>
-              </a:rPr>
-              <a:t>1</a:t>
-            </a:r>
-          </a:p>
-        </p:txBody>
-      </p:sp>
-      <p:sp>
-        <p:nvSpPr>
-          <p:cNvPr id="9" name="TextBox 8"/>
-          <p:cNvSpPr txBox="1"/>
-          <p:nvPr/>
-        </p:nvSpPr>
-        <p:spPr>
-          <a:xfrm>
-            <a:off x="1188720" y="1751076"/>
-            <a:ext cx="10271455" cy="886968"/>
-          </a:xfrm>
-          <a:prstGeom prst="rect">
-            <a:avLst/>
-          </a:prstGeom>
-          <a:noFill/>
-        </p:spPr>
-        <p:txBody>
-          <a:bodyPr wrap="square" anchor="ctr"/>
-          <a:lstStyle/>
-          <a:p>
-            <a:r>
-              <a:rPr sz="1500" b="1" i="0">
-                <a:solidFill>
-                  <a:srgbClr val="095292"/>
-                </a:solidFill>
-                <a:latin typeface="Calibri"/>
-              </a:rPr>
-              <a:t>Disena visual</a:t>
-            </a:r>
-          </a:p>
-          <a:p>
-            <a:pPr>
-              <a:spcBef>
-                <a:spcPts val="200"/>
-              </a:spcBef>
-            </a:pPr>
-            <a:r>
-              <a:rPr sz="1300" b="0" i="0">
-                <a:solidFill>
-                  <a:srgbClr val="333333"/>
-                </a:solidFill>
-                <a:latin typeface="Calibri"/>
-              </a:rPr>
-              <a:t>Dibuja el diagrama como quieras en Excalidraw o draw.io: es mas rapido arrastrar cajas que escribir codigo, y ahi es donde piensas el modelo.</a:t>
-            </a:r>
-          </a:p>
-        </p:txBody>
-      </p:sp>
-      <p:sp>
-        <p:nvSpPr>
-          <p:cNvPr id="10" name="Rounded Rectangle 9"/>
-          <p:cNvSpPr/>
-          <p:nvPr/>
-        </p:nvSpPr>
-        <p:spPr>
-          <a:xfrm>
-            <a:off x="457200" y="2802636"/>
-            <a:ext cx="11277295" cy="1051560"/>
-          </a:xfrm>
-          <a:prstGeom prst="roundRect">
-            <a:avLst>
-              <a:gd name="adj" fmla="val 12000"/>
-            </a:avLst>
-          </a:prstGeom>
-          <a:solidFill>
-            <a:srgbClr val="E8F4FA"/>
-          </a:solidFill>
-          <a:ln>
-            <a:noFill/>
-          </a:ln>
-        </p:spPr>
-        <p:style>
-          <a:lnRef idx="1">
-            <a:schemeClr val="accent1"/>
-          </a:lnRef>
-          <a:fillRef idx="3">
-            <a:schemeClr val="accent1"/>
-          </a:fillRef>
-          <a:effectRef idx="2">
-            <a:schemeClr val="accent1"/>
-          </a:effectRef>
-          <a:fontRef idx="minor">
-            <a:schemeClr val="lt1"/>
-          </a:fontRef>
-        </p:style>
-        <p:txBody>
-          <a:bodyPr rtlCol="0" anchor="ctr"/>
-          <a:lstStyle/>
-          <a:p>
-            <a:pPr algn="ctr"/>
-          </a:p>
-        </p:txBody>
-      </p:sp>
-      <p:sp>
-        <p:nvSpPr>
-          <p:cNvPr id="11" name="Rounded Rectangle 10"/>
-          <p:cNvSpPr/>
-          <p:nvPr/>
-        </p:nvSpPr>
-        <p:spPr>
-          <a:xfrm>
-            <a:off x="594360" y="3108960"/>
-            <a:ext cx="438912" cy="438912"/>
-          </a:xfrm>
-          <a:prstGeom prst="roundRect">
-            <a:avLst>
-              <a:gd name="adj" fmla="val 12000"/>
-            </a:avLst>
-          </a:prstGeom>
-          <a:solidFill>
-            <a:srgbClr val="095292"/>
-          </a:solidFill>
-          <a:ln>
-            <a:noFill/>
-          </a:ln>
-        </p:spPr>
-        <p:style>
-          <a:lnRef idx="1">
-            <a:schemeClr val="accent1"/>
-          </a:lnRef>
-          <a:fillRef idx="3">
-            <a:schemeClr val="accent1"/>
-          </a:fillRef>
-          <a:effectRef idx="2">
-            <a:schemeClr val="accent1"/>
-          </a:effectRef>
-          <a:fontRef idx="minor">
-            <a:schemeClr val="lt1"/>
-          </a:fontRef>
-        </p:style>
-        <p:txBody>
-          <a:bodyPr rtlCol="0" anchor="ctr"/>
-          <a:lstStyle/>
-          <a:p>
-            <a:pPr algn="ctr"/>
-          </a:p>
-        </p:txBody>
-      </p:sp>
-      <p:sp>
-        <p:nvSpPr>
-          <p:cNvPr id="12" name="TextBox 11"/>
-          <p:cNvSpPr txBox="1"/>
-          <p:nvPr/>
-        </p:nvSpPr>
-        <p:spPr>
-          <a:xfrm>
-            <a:off x="594360" y="3108960"/>
-            <a:ext cx="438912" cy="438912"/>
-          </a:xfrm>
-          <a:prstGeom prst="rect">
-            <a:avLst/>
-          </a:prstGeom>
-          <a:noFill/>
-        </p:spPr>
-        <p:txBody>
-          <a:bodyPr wrap="square" anchor="ctr"/>
-          <a:lstStyle/>
-          <a:p>
-            <a:pPr algn="ctr"/>
-            <a:r>
-              <a:rPr sz="1600" b="1" i="0">
-                <a:solidFill>
-                  <a:srgbClr val="FFFFFF"/>
-                </a:solidFill>
-                <a:latin typeface="Calibri"/>
-              </a:rPr>
-              <a:t>2</a:t>
-            </a:r>
-          </a:p>
-        </p:txBody>
-      </p:sp>
-      <p:sp>
-        <p:nvSpPr>
-          <p:cNvPr id="13" name="TextBox 12"/>
-          <p:cNvSpPr txBox="1"/>
-          <p:nvPr/>
-        </p:nvSpPr>
-        <p:spPr>
-          <a:xfrm>
-            <a:off x="1188720" y="2894076"/>
-            <a:ext cx="10271455" cy="886968"/>
-          </a:xfrm>
-          <a:prstGeom prst="rect">
-            <a:avLst/>
-          </a:prstGeom>
-          <a:noFill/>
-        </p:spPr>
-        <p:txBody>
-          <a:bodyPr wrap="square" anchor="ctr"/>
-          <a:lstStyle/>
-          <a:p>
-            <a:r>
-              <a:rPr sz="1500" b="1" i="0">
-                <a:solidFill>
-                  <a:srgbClr val="095292"/>
-                </a:solidFill>
-                <a:latin typeface="Calibri"/>
-              </a:rPr>
-              <a:t>Traduce con IA</a:t>
-            </a:r>
-          </a:p>
-          <a:p>
-            <a:pPr>
-              <a:spcBef>
-                <a:spcPts val="200"/>
-              </a:spcBef>
-            </a:pPr>
-            <a:r>
-              <a:rPr sz="1300" b="0" i="0">
-                <a:solidFill>
-                  <a:srgbClr val="333333"/>
-                </a:solidFill>
-                <a:latin typeface="Calibri"/>
-              </a:rPr>
-              <a:t>Copia o describe tu boceto a una IA y pidele el codigo Mermaid: «convierte este diagrama a Mermaid usando flowchart». Revisa el resultado: la IA acierta la sintaxis, no tu modelo.</a:t>
-            </a:r>
-          </a:p>
-        </p:txBody>
-      </p:sp>
-      <p:sp>
-        <p:nvSpPr>
-          <p:cNvPr id="14" name="Rounded Rectangle 13"/>
-          <p:cNvSpPr/>
-          <p:nvPr/>
-        </p:nvSpPr>
-        <p:spPr>
-          <a:xfrm>
-            <a:off x="457200" y="3945636"/>
-            <a:ext cx="11277295" cy="1051560"/>
-          </a:xfrm>
-          <a:prstGeom prst="roundRect">
-            <a:avLst>
-              <a:gd name="adj" fmla="val 12000"/>
-            </a:avLst>
-          </a:prstGeom>
-          <a:solidFill>
-            <a:srgbClr val="F2F2F2"/>
-          </a:solidFill>
-          <a:ln>
-            <a:noFill/>
-          </a:ln>
-        </p:spPr>
-        <p:style>
-          <a:lnRef idx="1">
-            <a:schemeClr val="accent1"/>
-          </a:lnRef>
-          <a:fillRef idx="3">
-            <a:schemeClr val="accent1"/>
-          </a:fillRef>
-          <a:effectRef idx="2">
-            <a:schemeClr val="accent1"/>
-          </a:effectRef>
-          <a:fontRef idx="minor">
-            <a:schemeClr val="lt1"/>
-          </a:fontRef>
-        </p:style>
-        <p:txBody>
-          <a:bodyPr rtlCol="0" anchor="ctr"/>
-          <a:lstStyle/>
-          <a:p>
-            <a:pPr algn="ctr"/>
-          </a:p>
-        </p:txBody>
-      </p:sp>
-      <p:sp>
-        <p:nvSpPr>
-          <p:cNvPr id="15" name="Rounded Rectangle 14"/>
-          <p:cNvSpPr/>
-          <p:nvPr/>
-        </p:nvSpPr>
-        <p:spPr>
-          <a:xfrm>
-            <a:off x="594360" y="4251960"/>
-            <a:ext cx="438912" cy="438912"/>
-          </a:xfrm>
-          <a:prstGeom prst="roundRect">
-            <a:avLst>
-              <a:gd name="adj" fmla="val 12000"/>
-            </a:avLst>
-          </a:prstGeom>
-          <a:solidFill>
-            <a:srgbClr val="095292"/>
-          </a:solidFill>
-          <a:ln>
-            <a:noFill/>
-          </a:ln>
-        </p:spPr>
-        <p:style>
-          <a:lnRef idx="1">
-            <a:schemeClr val="accent1"/>
-          </a:lnRef>
-          <a:fillRef idx="3">
-            <a:schemeClr val="accent1"/>
-          </a:fillRef>
-          <a:effectRef idx="2">
-            <a:schemeClr val="accent1"/>
-          </a:effectRef>
-          <a:fontRef idx="minor">
-            <a:schemeClr val="lt1"/>
-          </a:fontRef>
-        </p:style>
-        <p:txBody>
-          <a:bodyPr rtlCol="0" anchor="ctr"/>
-          <a:lstStyle/>
-          <a:p>
-            <a:pPr algn="ctr"/>
-          </a:p>
-        </p:txBody>
-      </p:sp>
-      <p:sp>
-        <p:nvSpPr>
-          <p:cNvPr id="16" name="TextBox 15"/>
-          <p:cNvSpPr txBox="1"/>
-          <p:nvPr/>
-        </p:nvSpPr>
-        <p:spPr>
-          <a:xfrm>
-            <a:off x="594360" y="4251960"/>
-            <a:ext cx="438912" cy="438912"/>
-          </a:xfrm>
-          <a:prstGeom prst="rect">
-            <a:avLst/>
-          </a:prstGeom>
-          <a:noFill/>
-        </p:spPr>
-        <p:txBody>
-          <a:bodyPr wrap="square" anchor="ctr"/>
-          <a:lstStyle/>
-          <a:p>
-            <a:pPr algn="ctr"/>
-            <a:r>
-              <a:rPr sz="1600" b="1" i="0">
-                <a:solidFill>
-                  <a:srgbClr val="FFFFFF"/>
-                </a:solidFill>
-                <a:latin typeface="Calibri"/>
-              </a:rPr>
-              <a:t>3</a:t>
-            </a:r>
-          </a:p>
-        </p:txBody>
-      </p:sp>
-      <p:sp>
-        <p:nvSpPr>
-          <p:cNvPr id="17" name="TextBox 16"/>
-          <p:cNvSpPr txBox="1"/>
-          <p:nvPr/>
-        </p:nvSpPr>
-        <p:spPr>
-          <a:xfrm>
-            <a:off x="1188720" y="4037076"/>
-            <a:ext cx="10271455" cy="886968"/>
-          </a:xfrm>
-          <a:prstGeom prst="rect">
-            <a:avLst/>
-          </a:prstGeom>
-          <a:noFill/>
-        </p:spPr>
-        <p:txBody>
-          <a:bodyPr wrap="square" anchor="ctr"/>
-          <a:lstStyle/>
-          <a:p>
-            <a:r>
-              <a:rPr sz="1500" b="1" i="0">
-                <a:solidFill>
-                  <a:srgbClr val="095292"/>
-                </a:solidFill>
-                <a:latin typeface="Calibri"/>
-              </a:rPr>
-              <a:t>Pega y renderiza en la plataforma del curso</a:t>
-            </a:r>
-          </a:p>
-          <a:p>
-            <a:pPr>
-              <a:spcBef>
-                <a:spcPts val="200"/>
-              </a:spcBef>
-            </a:pPr>
-            <a:r>
-              <a:rPr sz="1300" b="0" i="0">
-                <a:solidFill>
-                  <a:srgbClr val="333333"/>
-                </a:solidFill>
-                <a:latin typeface="Calibri"/>
-              </a:rPr>
-              <a:t>Pega ese codigo en la caja de texto de la pregunta y mira como lo dibuja la plataforma. Si no renderiza, corrige ahi mismo: lo que se califica es el diagrama renderizado dentro de la plataforma del curso.</a:t>
-            </a:r>
-          </a:p>
-        </p:txBody>
-      </p:sp>
-      <p:sp>
-        <p:nvSpPr>
-          <p:cNvPr id="18" name="Rounded Rectangle 17"/>
-          <p:cNvSpPr/>
-          <p:nvPr/>
-        </p:nvSpPr>
-        <p:spPr>
-          <a:xfrm>
-            <a:off x="457200" y="5088636"/>
-            <a:ext cx="11277295" cy="1051560"/>
-          </a:xfrm>
-          <a:prstGeom prst="roundRect">
-            <a:avLst>
-              <a:gd name="adj" fmla="val 12000"/>
-            </a:avLst>
-          </a:prstGeom>
-          <a:solidFill>
-            <a:srgbClr val="E8F4FA"/>
-          </a:solidFill>
-          <a:ln>
-            <a:noFill/>
-          </a:ln>
-        </p:spPr>
-        <p:style>
-          <a:lnRef idx="1">
-            <a:schemeClr val="accent1"/>
-          </a:lnRef>
-          <a:fillRef idx="3">
-            <a:schemeClr val="accent1"/>
-          </a:fillRef>
-          <a:effectRef idx="2">
-            <a:schemeClr val="accent1"/>
-          </a:effectRef>
-          <a:fontRef idx="minor">
-            <a:schemeClr val="lt1"/>
-          </a:fontRef>
-        </p:style>
-        <p:txBody>
-          <a:bodyPr rtlCol="0" anchor="ctr"/>
-          <a:lstStyle/>
-          <a:p>
-            <a:pPr algn="ctr"/>
-          </a:p>
-        </p:txBody>
-      </p:sp>
-      <p:sp>
-        <p:nvSpPr>
-          <p:cNvPr id="19" name="Rounded Rectangle 18"/>
-          <p:cNvSpPr/>
-          <p:nvPr/>
-        </p:nvSpPr>
-        <p:spPr>
-          <a:xfrm>
-            <a:off x="594360" y="5394960"/>
-            <a:ext cx="438912" cy="438912"/>
-          </a:xfrm>
-          <a:prstGeom prst="roundRect">
-            <a:avLst>
-              <a:gd name="adj" fmla="val 12000"/>
-            </a:avLst>
-          </a:prstGeom>
-          <a:solidFill>
-            <a:srgbClr val="095292"/>
-          </a:solidFill>
-          <a:ln>
-            <a:noFill/>
-          </a:ln>
-        </p:spPr>
-        <p:style>
-          <a:lnRef idx="1">
-            <a:schemeClr val="accent1"/>
-          </a:lnRef>
-          <a:fillRef idx="3">
-            <a:schemeClr val="accent1"/>
-          </a:fillRef>
-          <a:effectRef idx="2">
-            <a:schemeClr val="accent1"/>
-          </a:effectRef>
-          <a:fontRef idx="minor">
-            <a:schemeClr val="lt1"/>
-          </a:fontRef>
-        </p:style>
-        <p:txBody>
-          <a:bodyPr rtlCol="0" anchor="ctr"/>
-          <a:lstStyle/>
-          <a:p>
-            <a:pPr algn="ctr"/>
-          </a:p>
-        </p:txBody>
-      </p:sp>
-      <p:sp>
-        <p:nvSpPr>
-          <p:cNvPr id="20" name="TextBox 19"/>
-          <p:cNvSpPr txBox="1"/>
-          <p:nvPr/>
-        </p:nvSpPr>
-        <p:spPr>
-          <a:xfrm>
-            <a:off x="594360" y="5394960"/>
-            <a:ext cx="438912" cy="438912"/>
-          </a:xfrm>
-          <a:prstGeom prst="rect">
-            <a:avLst/>
-          </a:prstGeom>
-          <a:noFill/>
-        </p:spPr>
-        <p:txBody>
-          <a:bodyPr wrap="square" anchor="ctr"/>
-          <a:lstStyle/>
-          <a:p>
-            <a:pPr algn="ctr"/>
-            <a:r>
-              <a:rPr sz="1600" b="1" i="0">
-                <a:solidFill>
-                  <a:srgbClr val="FFFFFF"/>
-                </a:solidFill>
-                <a:latin typeface="Calibri"/>
-              </a:rPr>
-              <a:t>4</a:t>
-            </a:r>
-          </a:p>
-        </p:txBody>
-      </p:sp>
-      <p:sp>
-        <p:nvSpPr>
-          <p:cNvPr id="21" name="TextBox 20"/>
-          <p:cNvSpPr txBox="1"/>
-          <p:nvPr/>
-        </p:nvSpPr>
-        <p:spPr>
-          <a:xfrm>
-            <a:off x="1188720" y="5180076"/>
-            <a:ext cx="10271455" cy="886968"/>
-          </a:xfrm>
-          <a:prstGeom prst="rect">
-            <a:avLst/>
-          </a:prstGeom>
-          <a:noFill/>
-        </p:spPr>
-        <p:txBody>
-          <a:bodyPr wrap="square" anchor="ctr"/>
-          <a:lstStyle/>
-          <a:p>
-            <a:r>
-              <a:rPr sz="1500" b="1" i="0">
-                <a:solidFill>
-                  <a:srgbClr val="095292"/>
-                </a:solidFill>
-                <a:latin typeface="Calibri"/>
-              </a:rPr>
-              <a:t>Guarda el PNG para tu PI</a:t>
-            </a:r>
-          </a:p>
-          <a:p>
-            <a:pPr>
-              <a:spcBef>
-                <a:spcPts val="200"/>
-              </a:spcBef>
-            </a:pPr>
-            <a:r>
-              <a:rPr sz="1300" b="0" i="0">
-                <a:solidFill>
-                  <a:srgbClr val="333333"/>
-                </a:solidFill>
-                <a:latin typeface="Calibri"/>
-              </a:rPr>
-              <a:t>Exporta tambien la imagen a la carpeta de tu Proyecto Integrador. Esa copia es para tu informe; no reemplaza la respuesta en la plataforma.</a:t>
-            </a:r>
-          </a:p>
-        </p:txBody>
-      </p:sp>
-      <p:sp>
-        <p:nvSpPr>
-          <p:cNvPr id="22" name="TextBox 21"/>
-          <p:cNvSpPr txBox="1"/>
-          <p:nvPr/>
-        </p:nvSpPr>
-        <p:spPr>
-          <a:xfrm>
-            <a:off x="11185855" y="6473952"/>
-            <a:ext cx="640080" cy="274320"/>
-          </a:xfrm>
-          <a:prstGeom prst="rect">
-            <a:avLst/>
-          </a:prstGeom>
-          <a:noFill/>
-        </p:spPr>
-        <p:txBody>
-          <a:bodyPr wrap="square">
-            <a:spAutoFit/>
-          </a:bodyPr>
-          <a:lstStyle/>
-          <a:p>
-            <a:pPr algn="r"/>
-            <a:r>
-              <a:rPr sz="1100" b="0" i="0">
-                <a:solidFill>
-                  <a:srgbClr val="666666"/>
-                </a:solidFill>
-                <a:latin typeface="Calibri"/>
-              </a:rPr>
-              <a:t>24</a:t>
-            </a:r>
-          </a:p>
-        </p:txBody>
-      </p:sp>
-    </p:spTree>
-  </p:cSld>
-  <p:clrMapOvr>
-    <a:masterClrMapping/>
-  </p:clrMapOvr>
-</p:sld>
-</file>
-
-<file path=ppt/slides/slide25.xml><?xml version="1.0" encoding="utf-8"?>
-<p:sld xmlns:a="http://schemas.openxmlformats.org/drawingml/2006/main" xmlns:p="http://schemas.openxmlformats.org/presentationml/2006/main" xmlns:r="http://schemas.openxmlformats.org/officeDocument/2006/relationships">
-  <p:cSld>
-    <p:bg>
-      <p:bgPr>
-        <a:solidFill>
-          <a:srgbClr val="FFFFFF"/>
-        </a:solidFill>
-        <a:effectLst/>
-      </p:bgPr>
-    </p:bg>
-    <p:spTree>
-      <p:nvGrpSpPr>
-        <p:cNvPr id="1" name=""/>
-        <p:cNvGrpSpPr/>
-        <p:nvPr/>
-      </p:nvGrpSpPr>
-      <p:grpSpPr/>
-      <p:sp>
-        <p:nvSpPr>
-          <p:cNvPr id="2" name="Rectangle 1"/>
-          <p:cNvSpPr/>
-          <p:nvPr/>
-        </p:nvSpPr>
-        <p:spPr>
-          <a:xfrm>
-            <a:off x="0" y="0"/>
-            <a:ext cx="12191695" cy="960120"/>
-          </a:xfrm>
-          <a:prstGeom prst="rect">
-            <a:avLst/>
-          </a:prstGeom>
-          <a:solidFill>
-            <a:srgbClr val="095292"/>
-          </a:solidFill>
-          <a:ln>
-            <a:noFill/>
-          </a:ln>
-        </p:spPr>
-        <p:style>
-          <a:lnRef idx="1">
-            <a:schemeClr val="accent1"/>
-          </a:lnRef>
-          <a:fillRef idx="3">
-            <a:schemeClr val="accent1"/>
-          </a:fillRef>
-          <a:effectRef idx="2">
-            <a:schemeClr val="accent1"/>
-          </a:effectRef>
-          <a:fontRef idx="minor">
-            <a:schemeClr val="lt1"/>
-          </a:fontRef>
-        </p:style>
-        <p:txBody>
-          <a:bodyPr rtlCol="0" anchor="ctr"/>
-          <a:lstStyle/>
-          <a:p>
-            <a:pPr algn="ctr"/>
-          </a:p>
-        </p:txBody>
-      </p:sp>
-      <p:sp>
-        <p:nvSpPr>
-          <p:cNvPr id="3" name="Rectangle 2"/>
-          <p:cNvSpPr/>
-          <p:nvPr/>
-        </p:nvSpPr>
-        <p:spPr>
-          <a:xfrm>
-            <a:off x="0" y="960120"/>
-            <a:ext cx="12191695" cy="41148"/>
-          </a:xfrm>
-          <a:prstGeom prst="rect">
-            <a:avLst/>
-          </a:prstGeom>
-          <a:solidFill>
-            <a:srgbClr val="FFD000"/>
-          </a:solidFill>
-          <a:ln>
-            <a:noFill/>
-          </a:ln>
-        </p:spPr>
-        <p:style>
-          <a:lnRef idx="1">
-            <a:schemeClr val="accent1"/>
-          </a:lnRef>
-          <a:fillRef idx="3">
-            <a:schemeClr val="accent1"/>
-          </a:fillRef>
-          <a:effectRef idx="2">
-            <a:schemeClr val="accent1"/>
-          </a:effectRef>
-          <a:fontRef idx="minor">
-            <a:schemeClr val="lt1"/>
-          </a:fontRef>
-        </p:style>
-        <p:txBody>
-          <a:bodyPr rtlCol="0" anchor="ctr"/>
-          <a:lstStyle/>
-          <a:p>
-            <a:pPr algn="ctr"/>
-          </a:p>
-        </p:txBody>
-      </p:sp>
-      <p:sp>
-        <p:nvSpPr>
-          <p:cNvPr id="4" name="TextBox 3"/>
-          <p:cNvSpPr txBox="1"/>
-          <p:nvPr/>
-        </p:nvSpPr>
-        <p:spPr>
-          <a:xfrm>
-            <a:off x="457200" y="164592"/>
-            <a:ext cx="11277295" cy="502920"/>
-          </a:xfrm>
-          <a:prstGeom prst="rect">
-            <a:avLst/>
-          </a:prstGeom>
-          <a:noFill/>
-        </p:spPr>
-        <p:txBody>
-          <a:bodyPr wrap="square">
-            <a:spAutoFit/>
-          </a:bodyPr>
-          <a:lstStyle/>
-          <a:p>
-            <a:r>
-              <a:rPr sz="2600" b="1" i="0">
-                <a:solidFill>
-                  <a:srgbClr val="FFFFFF"/>
-                </a:solidFill>
-                <a:latin typeface="Calibri"/>
-              </a:rPr>
-              <a:t>PI CloudLite — entregable de hoy</a:t>
-            </a:r>
-          </a:p>
-        </p:txBody>
-      </p:sp>
-      <p:sp>
-        <p:nvSpPr>
-          <p:cNvPr id="5" name="TextBox 4"/>
-          <p:cNvSpPr txBox="1"/>
-          <p:nvPr/>
-        </p:nvSpPr>
-        <p:spPr>
-          <a:xfrm>
-            <a:off x="457200" y="1170432"/>
-            <a:ext cx="11277295" cy="5230368"/>
-          </a:xfrm>
-          <a:prstGeom prst="rect">
-            <a:avLst/>
-          </a:prstGeom>
-          <a:noFill/>
-        </p:spPr>
-        <p:txBody>
-          <a:bodyPr wrap="square">
-            <a:spAutoFit/>
-          </a:bodyPr>
-          <a:lstStyle/>
-          <a:p>
-            <a:pPr>
-              <a:spcAft>
-                <a:spcPts val="800"/>
-              </a:spcAft>
-            </a:pPr>
-            <a:r>
-              <a:rPr sz="2000" b="0" i="0">
-                <a:solidFill>
-                  <a:srgbClr val="333333"/>
-                </a:solidFill>
-                <a:latin typeface="Calibri"/>
-              </a:rPr>
-              <a:t>–   </a:t>
-            </a:r>
-            <a:r>
-              <a:rPr sz="2000" b="1" i="0">
-                <a:solidFill>
-                  <a:srgbClr val="333333"/>
-                </a:solidFill>
-                <a:latin typeface="Calibri"/>
-              </a:rPr>
-              <a:t>Entregable:</a:t>
-            </a:r>
-            <a:r>
-              <a:rPr sz="2000" b="0" i="0">
-                <a:solidFill>
-                  <a:srgbClr val="333333"/>
-                </a:solidFill>
-                <a:latin typeface="Calibri"/>
-              </a:rPr>
-              <a:t> Paquete final en la plataforma del curso (módulo Proyectos) + pitch de 5–8 min sustentado hoy en clase + Q&amp;A</a:t>
-            </a:r>
-          </a:p>
-          <a:p>
-            <a:pPr>
-              <a:spcAft>
-                <a:spcPts val="800"/>
-              </a:spcAft>
-            </a:pPr>
-            <a:r>
-              <a:rPr sz="2000" b="0" i="0">
-                <a:solidFill>
-                  <a:srgbClr val="333333"/>
-                </a:solidFill>
-                <a:latin typeface="Calibri"/>
-              </a:rPr>
-              <a:t>–   Herramienta: </a:t>
-            </a:r>
-            <a:r>
-              <a:rPr sz="2000" b="1" i="0">
-                <a:solidFill>
-                  <a:srgbClr val="333333"/>
-                </a:solidFill>
-                <a:latin typeface="Calibri"/>
-              </a:rPr>
-              <a:t>Navegador · editores de texto y de diagramas del curso</a:t>
-            </a:r>
-          </a:p>
-          <a:p>
-            <a:pPr>
-              <a:spcAft>
-                <a:spcPts val="800"/>
-              </a:spcAft>
-            </a:pPr>
-            <a:r>
-              <a:rPr sz="2000" b="0" i="0">
-                <a:solidFill>
-                  <a:srgbClr val="333333"/>
-                </a:solidFill>
-                <a:latin typeface="Calibri"/>
-              </a:rPr>
-              <a:t>–   Hoy no se construye: se </a:t>
-            </a:r>
-            <a:r>
-              <a:rPr sz="2000" b="1" i="0">
-                <a:solidFill>
-                  <a:srgbClr val="333333"/>
-                </a:solidFill>
-                <a:latin typeface="Calibri"/>
-              </a:rPr>
-              <a:t>defiende</a:t>
-            </a:r>
-            <a:r>
-              <a:rPr sz="2000" b="0" i="0">
-                <a:solidFill>
-                  <a:srgbClr val="333333"/>
-                </a:solidFill>
-                <a:latin typeface="Calibri"/>
-              </a:rPr>
-              <a:t> lo que ya está en el paquete del PI.</a:t>
-            </a:r>
-          </a:p>
-          <a:p>
-            <a:pPr>
-              <a:spcAft>
-                <a:spcPts val="800"/>
-              </a:spcAft>
-            </a:pPr>
-            <a:r>
-              <a:rPr sz="2000" b="0" i="0">
-                <a:solidFill>
-                  <a:srgbClr val="333333"/>
-                </a:solidFill>
-                <a:latin typeface="Calibri"/>
-              </a:rPr>
-              <a:t>–   Individual por defecto · el docente puede autorizar equipos de 2–3; la entrega en la plataforma del curso siempre es individual.</a:t>
-            </a:r>
-          </a:p>
-        </p:txBody>
-      </p:sp>
-      <p:sp>
-        <p:nvSpPr>
-          <p:cNvPr id="6" name="TextBox 5"/>
-          <p:cNvSpPr txBox="1"/>
-          <p:nvPr/>
-        </p:nvSpPr>
-        <p:spPr>
-          <a:xfrm>
-            <a:off x="11185855" y="6473952"/>
-            <a:ext cx="640080" cy="274320"/>
-          </a:xfrm>
-          <a:prstGeom prst="rect">
-            <a:avLst/>
-          </a:prstGeom>
-          <a:noFill/>
-        </p:spPr>
-        <p:txBody>
-          <a:bodyPr wrap="square">
-            <a:spAutoFit/>
-          </a:bodyPr>
-          <a:lstStyle/>
-          <a:p>
-            <a:pPr algn="r"/>
-            <a:r>
-              <a:rPr sz="1100" b="0" i="0">
-                <a:solidFill>
-                  <a:srgbClr val="666666"/>
-                </a:solidFill>
-                <a:latin typeface="Calibri"/>
-              </a:rPr>
-              <a:t>25</a:t>
-            </a:r>
-          </a:p>
-        </p:txBody>
-      </p:sp>
-    </p:spTree>
-  </p:cSld>
-  <p:clrMapOvr>
-    <a:masterClrMapping/>
-  </p:clrMapOvr>
-</p:sld>
-</file>
-
-<file path=ppt/slides/slide26.xml><?xml version="1.0" encoding="utf-8"?>
-<p:sld xmlns:a="http://schemas.openxmlformats.org/drawingml/2006/main" xmlns:p="http://schemas.openxmlformats.org/presentationml/2006/main" xmlns:r="http://schemas.openxmlformats.org/officeDocument/2006/relationships">
-  <p:cSld>
-    <p:bg>
-      <p:bgPr>
-        <a:solidFill>
-          <a:srgbClr val="FFFFFF"/>
-        </a:solidFill>
-        <a:effectLst/>
-      </p:bgPr>
-    </p:bg>
-    <p:spTree>
-      <p:nvGrpSpPr>
-        <p:cNvPr id="1" name=""/>
-        <p:cNvGrpSpPr/>
-        <p:nvPr/>
-      </p:nvGrpSpPr>
-      <p:grpSpPr/>
-      <p:sp>
-        <p:nvSpPr>
-          <p:cNvPr id="2" name="Rectangle 1"/>
-          <p:cNvSpPr/>
-          <p:nvPr/>
-        </p:nvSpPr>
-        <p:spPr>
-          <a:xfrm>
-            <a:off x="0" y="0"/>
-            <a:ext cx="12191695" cy="960120"/>
-          </a:xfrm>
-          <a:prstGeom prst="rect">
-            <a:avLst/>
-          </a:prstGeom>
-          <a:solidFill>
-            <a:srgbClr val="095292"/>
-          </a:solidFill>
-          <a:ln>
-            <a:noFill/>
-          </a:ln>
-        </p:spPr>
-        <p:style>
-          <a:lnRef idx="1">
-            <a:schemeClr val="accent1"/>
-          </a:lnRef>
-          <a:fillRef idx="3">
-            <a:schemeClr val="accent1"/>
-          </a:fillRef>
-          <a:effectRef idx="2">
-            <a:schemeClr val="accent1"/>
-          </a:effectRef>
-          <a:fontRef idx="minor">
-            <a:schemeClr val="lt1"/>
-          </a:fontRef>
-        </p:style>
-        <p:txBody>
-          <a:bodyPr rtlCol="0" anchor="ctr"/>
-          <a:lstStyle/>
-          <a:p>
-            <a:pPr algn="ctr"/>
-          </a:p>
-        </p:txBody>
-      </p:sp>
-      <p:sp>
-        <p:nvSpPr>
-          <p:cNvPr id="3" name="Rectangle 2"/>
-          <p:cNvSpPr/>
-          <p:nvPr/>
-        </p:nvSpPr>
-        <p:spPr>
-          <a:xfrm>
-            <a:off x="0" y="960120"/>
-            <a:ext cx="12191695" cy="41148"/>
-          </a:xfrm>
-          <a:prstGeom prst="rect">
-            <a:avLst/>
-          </a:prstGeom>
-          <a:solidFill>
-            <a:srgbClr val="FFD000"/>
-          </a:solidFill>
-          <a:ln>
-            <a:noFill/>
-          </a:ln>
-        </p:spPr>
-        <p:style>
-          <a:lnRef idx="1">
-            <a:schemeClr val="accent1"/>
-          </a:lnRef>
-          <a:fillRef idx="3">
-            <a:schemeClr val="accent1"/>
-          </a:fillRef>
-          <a:effectRef idx="2">
-            <a:schemeClr val="accent1"/>
-          </a:effectRef>
-          <a:fontRef idx="minor">
-            <a:schemeClr val="lt1"/>
-          </a:fontRef>
-        </p:style>
-        <p:txBody>
-          <a:bodyPr rtlCol="0" anchor="ctr"/>
-          <a:lstStyle/>
-          <a:p>
-            <a:pPr algn="ctr"/>
-          </a:p>
-        </p:txBody>
-      </p:sp>
-      <p:sp>
-        <p:nvSpPr>
-          <p:cNvPr id="4" name="TextBox 3"/>
-          <p:cNvSpPr txBox="1"/>
-          <p:nvPr/>
-        </p:nvSpPr>
-        <p:spPr>
-          <a:xfrm>
-            <a:off x="457200" y="164592"/>
-            <a:ext cx="11277295" cy="502920"/>
-          </a:xfrm>
-          <a:prstGeom prst="rect">
-            <a:avLst/>
-          </a:prstGeom>
-          <a:noFill/>
-        </p:spPr>
-        <p:txBody>
-          <a:bodyPr wrap="square">
-            <a:spAutoFit/>
-          </a:bodyPr>
-          <a:lstStyle/>
-          <a:p>
-            <a:r>
-              <a:rPr sz="2600" b="1" i="0">
-                <a:solidFill>
-                  <a:srgbClr val="FFFFFF"/>
-                </a:solidFill>
-                <a:latin typeface="Calibri"/>
-              </a:rPr>
-              <a:t>Sustentación (paso a paso)</a:t>
-            </a:r>
-          </a:p>
-        </p:txBody>
-      </p:sp>
-      <p:sp>
-        <p:nvSpPr>
-          <p:cNvPr id="5" name="TextBox 4"/>
-          <p:cNvSpPr txBox="1"/>
-          <p:nvPr/>
-        </p:nvSpPr>
-        <p:spPr>
-          <a:xfrm>
-            <a:off x="457200" y="1170432"/>
-            <a:ext cx="11277295" cy="5230368"/>
-          </a:xfrm>
-          <a:prstGeom prst="rect">
-            <a:avLst/>
-          </a:prstGeom>
-          <a:noFill/>
-        </p:spPr>
-        <p:txBody>
-          <a:bodyPr wrap="square">
-            <a:spAutoFit/>
-          </a:bodyPr>
-          <a:lstStyle/>
-          <a:p>
-            <a:pPr>
-              <a:spcAft>
-                <a:spcPts val="800"/>
-              </a:spcAft>
-            </a:pPr>
-            <a:r>
-              <a:rPr sz="1700" b="1" i="0">
-                <a:solidFill>
-                  <a:srgbClr val="333333"/>
-                </a:solidFill>
-                <a:latin typeface="Calibri"/>
-              </a:rPr>
-              <a:t>1.</a:t>
-            </a:r>
-            <a:r>
-              <a:rPr sz="1700" b="0" i="0">
-                <a:solidFill>
-                  <a:srgbClr val="333333"/>
-                </a:solidFill>
-                <a:latin typeface="Calibri"/>
-              </a:rPr>
-              <a:t> Paso 1: armen el paquete final y llenen el indice de 8 filas con entregable, nombre de archivo, ruta dentro del paquete y estado, verificando que los 8 archivos abran desde una maquina distinta a la del autor y que ningun nombre de archivo tenga espacios ni tildes que rompan la descarga.</a:t>
-            </a:r>
-          </a:p>
-          <a:p>
-            <a:pPr>
-              <a:spcAft>
-                <a:spcPts val="800"/>
-              </a:spcAft>
-            </a:pPr>
-            <a:r>
-              <a:rPr sz="1700" b="0" i="0">
-                <a:solidFill>
-                  <a:srgbClr val="333333"/>
-                </a:solidFill>
-                <a:latin typeface="Calibri"/>
-              </a:rPr>
-              <a:t>–   </a:t>
-            </a:r>
-            <a:r>
-              <a:rPr sz="1700" b="1" i="0">
-                <a:solidFill>
-                  <a:srgbClr val="333333"/>
-                </a:solidFill>
-                <a:latin typeface="Calibri"/>
-              </a:rPr>
-              <a:t>2.</a:t>
-            </a:r>
-            <a:r>
-              <a:rPr sz="1700" b="0" i="0">
-                <a:solidFill>
-                  <a:srgbClr val="333333"/>
-                </a:solidFill>
-                <a:latin typeface="Calibri"/>
-              </a:rPr>
-              <a:t> Paso 2: escriban en la plataforma del curso la lamina unica de arquitectura en Mermaid con las 3 zonas, los 5 contenedores, el edge, la cadena de entrega y los sistemas externos, verificando al renderizar que sea legible en una sola pantalla sin desplazamiento y que use los mismos nombres canonicos del paquete, porque esta es la lamina que van a proyectar en la sustentacion.</a:t>
-            </a:r>
-          </a:p>
-          <a:p>
-            <a:pPr>
-              <a:spcAft>
-                <a:spcPts val="800"/>
-              </a:spcAft>
-            </a:pPr>
-            <a:r>
-              <a:rPr sz="1700" b="0" i="0">
-                <a:solidFill>
-                  <a:srgbClr val="333333"/>
-                </a:solidFill>
-                <a:latin typeface="Calibri"/>
-              </a:rPr>
-              <a:t>–   </a:t>
-            </a:r>
-            <a:r>
-              <a:rPr sz="1700" b="1" i="0">
-                <a:solidFill>
-                  <a:srgbClr val="333333"/>
-                </a:solidFill>
-                <a:latin typeface="Calibri"/>
-              </a:rPr>
-              <a:t>3.</a:t>
-            </a:r>
-            <a:r>
-              <a:rPr sz="1700" b="0" i="0">
-                <a:solidFill>
-                  <a:srgbClr val="333333"/>
-                </a:solidFill>
-                <a:latin typeface="Calibri"/>
-              </a:rPr>
-              <a:t> Paso 3: redacten el Q and A escrito con 3 preguntas duras que el jurado podria hacer, una de decision de arquitectura, una de seguridad y una de escala o rendimiento, cada una con respuesta de maximo 4 lineas que cite la evidencia del paquete, verificando que ninguna respuesta sea no lo alcanzamos a hacer sin nombrar la decision consciente que tomaron.</a:t>
-            </a:r>
-          </a:p>
-          <a:p>
-            <a:pPr>
-              <a:spcAft>
-                <a:spcPts val="800"/>
-              </a:spcAft>
-            </a:pPr>
-            <a:r>
-              <a:rPr sz="1700" b="0" i="0">
-                <a:solidFill>
-                  <a:srgbClr val="333333"/>
-                </a:solidFill>
-                <a:latin typeface="Calibri"/>
-              </a:rPr>
-              <a:t>–   </a:t>
-            </a:r>
-            <a:r>
-              <a:rPr sz="1700" b="1" i="0">
-                <a:solidFill>
-                  <a:srgbClr val="333333"/>
-                </a:solidFill>
-                <a:latin typeface="Calibri"/>
-              </a:rPr>
-              <a:t>4.</a:t>
-            </a:r>
-            <a:r>
-              <a:rPr sz="1700" b="0" i="0">
-                <a:solidFill>
-                  <a:srgbClr val="333333"/>
-                </a:solidFill>
-                <a:latin typeface="Calibri"/>
-              </a:rPr>
-              <a:t> Paso 4: ensayen el pitch con cronometro ANTES de la sesion y registren la tabla de tiempos reales por seccion con quien hablo en cada una, verificando que el tiempo total quede entre 5 y 8 minutos; la sustentacion se hace EN VIVO en la sesion de clase, con preguntas del docente al cierre, no con un video grabado.</a:t>
-            </a:r>
-          </a:p>
-          <a:p>
-            <a:pPr>
-              <a:spcAft>
-                <a:spcPts val="800"/>
-              </a:spcAft>
-            </a:pPr>
-            <a:r>
-              <a:rPr sz="1700" b="0" i="0">
-                <a:solidFill>
-                  <a:srgbClr val="333333"/>
-                </a:solidFill>
-                <a:latin typeface="Calibri"/>
-              </a:rPr>
-              <a:t>–   </a:t>
-            </a:r>
-            <a:r>
-              <a:rPr sz="1700" b="1" i="0">
-                <a:solidFill>
-                  <a:srgbClr val="333333"/>
-                </a:solidFill>
-                <a:latin typeface="Calibri"/>
-              </a:rPr>
-              <a:t>5.</a:t>
-            </a:r>
-            <a:r>
-              <a:rPr sz="1700" b="0" i="0">
-                <a:solidFill>
-                  <a:srgbClr val="333333"/>
-                </a:solidFill>
-                <a:latin typeface="Calibri"/>
-              </a:rPr>
-              <a:t> Paso 5: escriban la reflexion de media pagina sobre el trade-off mas difícil y suban el paquete final completo mas las 5 preguntas a la plataforma del curso (modulo Proyectos) ANTES de su turno de sustentacion, verificando que el informe, los diagramas, la evidencia del lab, el ci.yml y la presentacion esten los cinco dentro del mismo paquete.</a:t>
-            </a:r>
-          </a:p>
-        </p:txBody>
-      </p:sp>
-      <p:sp>
-        <p:nvSpPr>
-          <p:cNvPr id="6" name="TextBox 5"/>
-          <p:cNvSpPr txBox="1"/>
-          <p:nvPr/>
-        </p:nvSpPr>
-        <p:spPr>
-          <a:xfrm>
-            <a:off x="11185855" y="6473952"/>
-            <a:ext cx="640080" cy="274320"/>
-          </a:xfrm>
-          <a:prstGeom prst="rect">
-            <a:avLst/>
-          </a:prstGeom>
-          <a:noFill/>
-        </p:spPr>
-        <p:txBody>
-          <a:bodyPr wrap="square">
-            <a:spAutoFit/>
-          </a:bodyPr>
-          <a:lstStyle/>
-          <a:p>
-            <a:pPr algn="r"/>
-            <a:r>
-              <a:rPr sz="1100" b="0" i="0">
-                <a:solidFill>
-                  <a:srgbClr val="666666"/>
-                </a:solidFill>
-                <a:latin typeface="Calibri"/>
-              </a:rPr>
-              <a:t>26</a:t>
-            </a:r>
-          </a:p>
-        </p:txBody>
-      </p:sp>
-    </p:spTree>
-  </p:cSld>
-  <p:clrMapOvr>
-    <a:masterClrMapping/>
-  </p:clrMapOvr>
-</p:sld>
-</file>
-
-<file path=ppt/slides/slide27.xml><?xml version="1.0" encoding="utf-8"?>
-<p:sld xmlns:a="http://schemas.openxmlformats.org/drawingml/2006/main" xmlns:p="http://schemas.openxmlformats.org/presentationml/2006/main" xmlns:r="http://schemas.openxmlformats.org/officeDocument/2006/relationships">
-  <p:cSld>
-    <p:bg>
-      <p:bgPr>
-        <a:solidFill>
-          <a:srgbClr val="FFFFFF"/>
-        </a:solidFill>
-        <a:effectLst/>
-      </p:bgPr>
-    </p:bg>
-    <p:spTree>
-      <p:nvGrpSpPr>
-        <p:cNvPr id="1" name=""/>
-        <p:cNvGrpSpPr/>
-        <p:nvPr/>
-      </p:nvGrpSpPr>
-      <p:grpSpPr/>
-      <p:sp>
-        <p:nvSpPr>
-          <p:cNvPr id="2" name="Rectangle 1"/>
-          <p:cNvSpPr/>
-          <p:nvPr/>
-        </p:nvSpPr>
-        <p:spPr>
-          <a:xfrm>
-            <a:off x="0" y="0"/>
-            <a:ext cx="12191695" cy="960120"/>
-          </a:xfrm>
-          <a:prstGeom prst="rect">
-            <a:avLst/>
-          </a:prstGeom>
-          <a:solidFill>
-            <a:srgbClr val="095292"/>
-          </a:solidFill>
-          <a:ln>
-            <a:noFill/>
-          </a:ln>
-        </p:spPr>
-        <p:style>
-          <a:lnRef idx="1">
-            <a:schemeClr val="accent1"/>
-          </a:lnRef>
-          <a:fillRef idx="3">
-            <a:schemeClr val="accent1"/>
-          </a:fillRef>
-          <a:effectRef idx="2">
-            <a:schemeClr val="accent1"/>
-          </a:effectRef>
-          <a:fontRef idx="minor">
-            <a:schemeClr val="lt1"/>
-          </a:fontRef>
-        </p:style>
-        <p:txBody>
-          <a:bodyPr rtlCol="0" anchor="ctr"/>
-          <a:lstStyle/>
-          <a:p>
-            <a:pPr algn="ctr"/>
-          </a:p>
-        </p:txBody>
-      </p:sp>
-      <p:sp>
-        <p:nvSpPr>
-          <p:cNvPr id="3" name="Rectangle 2"/>
-          <p:cNvSpPr/>
-          <p:nvPr/>
-        </p:nvSpPr>
-        <p:spPr>
-          <a:xfrm>
-            <a:off x="0" y="960120"/>
-            <a:ext cx="12191695" cy="41148"/>
-          </a:xfrm>
-          <a:prstGeom prst="rect">
-            <a:avLst/>
-          </a:prstGeom>
-          <a:solidFill>
-            <a:srgbClr val="FFD000"/>
-          </a:solidFill>
-          <a:ln>
-            <a:noFill/>
-          </a:ln>
-        </p:spPr>
-        <p:style>
-          <a:lnRef idx="1">
-            <a:schemeClr val="accent1"/>
-          </a:lnRef>
-          <a:fillRef idx="3">
-            <a:schemeClr val="accent1"/>
-          </a:fillRef>
-          <a:effectRef idx="2">
-            <a:schemeClr val="accent1"/>
-          </a:effectRef>
-          <a:fontRef idx="minor">
-            <a:schemeClr val="lt1"/>
-          </a:fontRef>
-        </p:style>
-        <p:txBody>
-          <a:bodyPr rtlCol="0" anchor="ctr"/>
-          <a:lstStyle/>
-          <a:p>
-            <a:pPr algn="ctr"/>
-          </a:p>
-        </p:txBody>
-      </p:sp>
-      <p:sp>
-        <p:nvSpPr>
-          <p:cNvPr id="4" name="TextBox 3"/>
-          <p:cNvSpPr txBox="1"/>
-          <p:nvPr/>
-        </p:nvSpPr>
-        <p:spPr>
-          <a:xfrm>
-            <a:off x="457200" y="164592"/>
-            <a:ext cx="11277295" cy="502920"/>
-          </a:xfrm>
-          <a:prstGeom prst="rect">
-            <a:avLst/>
-          </a:prstGeom>
-          <a:noFill/>
-        </p:spPr>
-        <p:txBody>
-          <a:bodyPr wrap="square">
-            <a:spAutoFit/>
-          </a:bodyPr>
-          <a:lstStyle/>
-          <a:p>
-            <a:r>
-              <a:rPr sz="2600" b="1" i="0">
-                <a:solidFill>
-                  <a:srgbClr val="FFFFFF"/>
-                </a:solidFill>
-                <a:latin typeface="Calibri"/>
-              </a:rPr>
-              <a:t>Para continuar (PI)</a:t>
-            </a:r>
-          </a:p>
-        </p:txBody>
-      </p:sp>
-      <p:sp>
-        <p:nvSpPr>
-          <p:cNvPr id="5" name="Rounded Rectangle 4"/>
-          <p:cNvSpPr/>
-          <p:nvPr/>
-        </p:nvSpPr>
-        <p:spPr>
-          <a:xfrm>
-            <a:off x="457200" y="1261872"/>
-            <a:ext cx="11277295" cy="1051560"/>
-          </a:xfrm>
-          <a:prstGeom prst="roundRect">
-            <a:avLst>
-              <a:gd name="adj" fmla="val 12000"/>
-            </a:avLst>
-          </a:prstGeom>
-          <a:solidFill>
-            <a:srgbClr val="E8F4FA"/>
-          </a:solidFill>
-          <a:ln>
-            <a:noFill/>
-          </a:ln>
-        </p:spPr>
-        <p:style>
-          <a:lnRef idx="1">
-            <a:schemeClr val="accent1"/>
-          </a:lnRef>
-          <a:fillRef idx="3">
-            <a:schemeClr val="accent1"/>
-          </a:fillRef>
-          <a:effectRef idx="2">
-            <a:schemeClr val="accent1"/>
-          </a:effectRef>
-          <a:fontRef idx="minor">
-            <a:schemeClr val="lt1"/>
-          </a:fontRef>
-        </p:style>
-        <p:txBody>
-          <a:bodyPr rtlCol="0" anchor="ctr"/>
-          <a:lstStyle/>
-          <a:p>
-            <a:pPr algn="ctr"/>
-          </a:p>
-        </p:txBody>
-      </p:sp>
-      <p:sp>
-        <p:nvSpPr>
-          <p:cNvPr id="6" name="Rectangle 5"/>
-          <p:cNvSpPr/>
-          <p:nvPr/>
-        </p:nvSpPr>
-        <p:spPr>
-          <a:xfrm>
-            <a:off x="457200" y="1261872"/>
-            <a:ext cx="128016" cy="1051560"/>
-          </a:xfrm>
-          <a:prstGeom prst="rect">
-            <a:avLst/>
-          </a:prstGeom>
-          <a:solidFill>
-            <a:srgbClr val="269CCB"/>
-          </a:solidFill>
-          <a:ln>
-            <a:noFill/>
-          </a:ln>
-        </p:spPr>
-        <p:style>
-          <a:lnRef idx="1">
-            <a:schemeClr val="accent1"/>
-          </a:lnRef>
-          <a:fillRef idx="3">
-            <a:schemeClr val="accent1"/>
-          </a:fillRef>
-          <a:effectRef idx="2">
-            <a:schemeClr val="accent1"/>
-          </a:effectRef>
-          <a:fontRef idx="minor">
-            <a:schemeClr val="lt1"/>
-          </a:fontRef>
-        </p:style>
-        <p:txBody>
-          <a:bodyPr rtlCol="0" anchor="ctr"/>
-          <a:lstStyle/>
-          <a:p>
-            <a:pPr algn="ctr"/>
-          </a:p>
-        </p:txBody>
-      </p:sp>
-      <p:sp>
-        <p:nvSpPr>
-          <p:cNvPr id="7" name="TextBox 6"/>
-          <p:cNvSpPr txBox="1"/>
-          <p:nvPr/>
-        </p:nvSpPr>
-        <p:spPr>
-          <a:xfrm>
-            <a:off x="777240" y="1399031"/>
-            <a:ext cx="10774375" cy="822959"/>
-          </a:xfrm>
-          <a:prstGeom prst="rect">
-            <a:avLst/>
-          </a:prstGeom>
-          <a:noFill/>
-        </p:spPr>
-        <p:txBody>
-          <a:bodyPr wrap="square">
-            <a:spAutoFit/>
-          </a:bodyPr>
-          <a:lstStyle/>
-          <a:p>
-            <a:r>
-              <a:rPr sz="1200" b="1" i="0">
-                <a:solidFill>
-                  <a:srgbClr val="269CCB"/>
-                </a:solidFill>
-                <a:latin typeface="Calibri"/>
-              </a:rPr>
-              <a:t>Info</a:t>
-            </a:r>
-          </a:p>
-          <a:p>
-            <a:pPr>
-              <a:spcBef>
-                <a:spcPts val="400"/>
-              </a:spcBef>
-            </a:pPr>
-            <a:r>
-              <a:rPr sz="1400" b="0" i="0">
-                <a:solidFill>
-                  <a:srgbClr val="333333"/>
-                </a:solidFill>
-                <a:latin typeface="Calibri"/>
-              </a:rPr>
-              <a:t>Entregable: Paquete final en la plataforma del curso (módulo Proyectos) + pitch de 5–8 min sustentado hoy en clase + Q&amp;A</a:t>
-            </a:r>
-          </a:p>
-        </p:txBody>
-      </p:sp>
-      <p:sp>
-        <p:nvSpPr>
-          <p:cNvPr id="8" name="Rounded Rectangle 7"/>
-          <p:cNvSpPr/>
-          <p:nvPr/>
-        </p:nvSpPr>
-        <p:spPr>
-          <a:xfrm>
-            <a:off x="457200" y="2478024"/>
-            <a:ext cx="11277295" cy="1051560"/>
-          </a:xfrm>
-          <a:prstGeom prst="roundRect">
-            <a:avLst>
-              <a:gd name="adj" fmla="val 12000"/>
-            </a:avLst>
-          </a:prstGeom>
-          <a:solidFill>
-            <a:srgbClr val="FFF8E1"/>
-          </a:solidFill>
-          <a:ln>
-            <a:noFill/>
-          </a:ln>
-        </p:spPr>
-        <p:style>
-          <a:lnRef idx="1">
-            <a:schemeClr val="accent1"/>
-          </a:lnRef>
-          <a:fillRef idx="3">
-            <a:schemeClr val="accent1"/>
-          </a:fillRef>
-          <a:effectRef idx="2">
-            <a:schemeClr val="accent1"/>
-          </a:effectRef>
-          <a:fontRef idx="minor">
-            <a:schemeClr val="lt1"/>
-          </a:fontRef>
-        </p:style>
-        <p:txBody>
-          <a:bodyPr rtlCol="0" anchor="ctr"/>
-          <a:lstStyle/>
-          <a:p>
-            <a:pPr algn="ctr"/>
-          </a:p>
-        </p:txBody>
-      </p:sp>
-      <p:sp>
-        <p:nvSpPr>
-          <p:cNvPr id="9" name="Rectangle 8"/>
-          <p:cNvSpPr/>
-          <p:nvPr/>
-        </p:nvSpPr>
-        <p:spPr>
-          <a:xfrm>
-            <a:off x="457200" y="2478024"/>
-            <a:ext cx="128016" cy="1051560"/>
-          </a:xfrm>
-          <a:prstGeom prst="rect">
-            <a:avLst/>
-          </a:prstGeom>
-          <a:solidFill>
-            <a:srgbClr val="FFD000"/>
-          </a:solidFill>
-          <a:ln>
-            <a:noFill/>
-          </a:ln>
-        </p:spPr>
-        <p:style>
-          <a:lnRef idx="1">
-            <a:schemeClr val="accent1"/>
-          </a:lnRef>
-          <a:fillRef idx="3">
-            <a:schemeClr val="accent1"/>
-          </a:fillRef>
-          <a:effectRef idx="2">
-            <a:schemeClr val="accent1"/>
-          </a:effectRef>
-          <a:fontRef idx="minor">
-            <a:schemeClr val="lt1"/>
-          </a:fontRef>
-        </p:style>
-        <p:txBody>
-          <a:bodyPr rtlCol="0" anchor="ctr"/>
-          <a:lstStyle/>
-          <a:p>
-            <a:pPr algn="ctr"/>
-          </a:p>
-        </p:txBody>
-      </p:sp>
-      <p:sp>
-        <p:nvSpPr>
-          <p:cNvPr id="10" name="TextBox 9"/>
-          <p:cNvSpPr txBox="1"/>
-          <p:nvPr/>
-        </p:nvSpPr>
-        <p:spPr>
-          <a:xfrm>
-            <a:off x="777240" y="2615184"/>
-            <a:ext cx="10774375" cy="822959"/>
-          </a:xfrm>
-          <a:prstGeom prst="rect">
-            <a:avLst/>
-          </a:prstGeom>
-          <a:noFill/>
-        </p:spPr>
-        <p:txBody>
-          <a:bodyPr wrap="square">
-            <a:spAutoFit/>
-          </a:bodyPr>
-          <a:lstStyle/>
-          <a:p>
-            <a:r>
-              <a:rPr sz="1200" b="1" i="0">
-                <a:solidFill>
-                  <a:srgbClr val="FFD000"/>
-                </a:solidFill>
-                <a:latin typeface="Calibri"/>
-              </a:rPr>
-              <a:t>Aclaración</a:t>
-            </a:r>
-          </a:p>
-          <a:p>
-            <a:pPr>
-              <a:spcBef>
-                <a:spcPts val="400"/>
-              </a:spcBef>
-            </a:pPr>
-            <a:r>
-              <a:rPr sz="1400" b="0" i="0">
-                <a:solidFill>
-                  <a:srgbClr val="333333"/>
-                </a:solidFill>
-                <a:latin typeface="Calibri"/>
-              </a:rPr>
-              <a:t>El paquete se sube a la plataforma del curso (la plataforma del curso · módulo Proyectos) </a:t>
-            </a:r>
-            <a:r>
-              <a:rPr sz="1400" b="1" i="0">
-                <a:solidFill>
-                  <a:srgbClr val="333333"/>
-                </a:solidFill>
-                <a:latin typeface="Calibri"/>
-              </a:rPr>
-              <a:t>antes</a:t>
-            </a:r>
-            <a:r>
-              <a:rPr sz="1400" b="0" i="0">
-                <a:solidFill>
-                  <a:srgbClr val="333333"/>
-                </a:solidFill>
-                <a:latin typeface="Calibri"/>
-              </a:rPr>
-              <a:t> del bloque de sustentaciones.</a:t>
-            </a:r>
-          </a:p>
-        </p:txBody>
-      </p:sp>
-      <p:sp>
-        <p:nvSpPr>
-          <p:cNvPr id="11" name="Rounded Rectangle 10"/>
-          <p:cNvSpPr/>
-          <p:nvPr/>
-        </p:nvSpPr>
-        <p:spPr>
-          <a:xfrm>
-            <a:off x="457200" y="3694176"/>
-            <a:ext cx="11277295" cy="1051560"/>
-          </a:xfrm>
-          <a:prstGeom prst="roundRect">
-            <a:avLst>
-              <a:gd name="adj" fmla="val 12000"/>
-            </a:avLst>
-          </a:prstGeom>
-          <a:solidFill>
-            <a:srgbClr val="FBE4E4"/>
-          </a:solidFill>
-          <a:ln>
-            <a:noFill/>
-          </a:ln>
-        </p:spPr>
-        <p:style>
-          <a:lnRef idx="1">
-            <a:schemeClr val="accent1"/>
-          </a:lnRef>
-          <a:fillRef idx="3">
-            <a:schemeClr val="accent1"/>
-          </a:fillRef>
-          <a:effectRef idx="2">
-            <a:schemeClr val="accent1"/>
-          </a:effectRef>
-          <a:fontRef idx="minor">
-            <a:schemeClr val="lt1"/>
-          </a:fontRef>
-        </p:style>
-        <p:txBody>
-          <a:bodyPr rtlCol="0" anchor="ctr"/>
-          <a:lstStyle/>
-          <a:p>
-            <a:pPr algn="ctr"/>
-          </a:p>
-        </p:txBody>
-      </p:sp>
-      <p:sp>
-        <p:nvSpPr>
-          <p:cNvPr id="12" name="Rectangle 11"/>
-          <p:cNvSpPr/>
-          <p:nvPr/>
-        </p:nvSpPr>
-        <p:spPr>
-          <a:xfrm>
-            <a:off x="457200" y="3694176"/>
-            <a:ext cx="128016" cy="1051560"/>
-          </a:xfrm>
-          <a:prstGeom prst="rect">
-            <a:avLst/>
-          </a:prstGeom>
-          <a:solidFill>
-            <a:srgbClr val="A02030"/>
-          </a:solidFill>
-          <a:ln>
-            <a:noFill/>
-          </a:ln>
-        </p:spPr>
-        <p:style>
-          <a:lnRef idx="1">
-            <a:schemeClr val="accent1"/>
-          </a:lnRef>
-          <a:fillRef idx="3">
-            <a:schemeClr val="accent1"/>
-          </a:fillRef>
-          <a:effectRef idx="2">
-            <a:schemeClr val="accent1"/>
-          </a:effectRef>
-          <a:fontRef idx="minor">
-            <a:schemeClr val="lt1"/>
-          </a:fontRef>
-        </p:style>
-        <p:txBody>
-          <a:bodyPr rtlCol="0" anchor="ctr"/>
-          <a:lstStyle/>
-          <a:p>
-            <a:pPr algn="ctr"/>
-          </a:p>
-        </p:txBody>
-      </p:sp>
-      <p:sp>
-        <p:nvSpPr>
-          <p:cNvPr id="13" name="TextBox 12"/>
-          <p:cNvSpPr txBox="1"/>
-          <p:nvPr/>
-        </p:nvSpPr>
-        <p:spPr>
-          <a:xfrm>
-            <a:off x="777240" y="3831336"/>
-            <a:ext cx="10774375" cy="822959"/>
-          </a:xfrm>
-          <a:prstGeom prst="rect">
-            <a:avLst/>
-          </a:prstGeom>
-          <a:noFill/>
-        </p:spPr>
-        <p:txBody>
-          <a:bodyPr wrap="square">
-            <a:spAutoFit/>
-          </a:bodyPr>
-          <a:lstStyle/>
-          <a:p>
-            <a:r>
-              <a:rPr sz="1200" b="1" i="0">
-                <a:solidFill>
-                  <a:srgbClr val="A02030"/>
-                </a:solidFill>
-                <a:latin typeface="Calibri"/>
-              </a:rPr>
-              <a:t>Atención</a:t>
-            </a:r>
-          </a:p>
-          <a:p>
-            <a:pPr>
-              <a:spcBef>
-                <a:spcPts val="400"/>
-              </a:spcBef>
-            </a:pPr>
-            <a:r>
-              <a:rPr sz="1400" b="0" i="0">
-                <a:solidFill>
-                  <a:srgbClr val="333333"/>
-                </a:solidFill>
-                <a:latin typeface="Calibri"/>
-              </a:rPr>
-              <a:t>La sustentación es </a:t>
-            </a:r>
-            <a:r>
-              <a:rPr sz="1400" b="1" i="0">
-                <a:solidFill>
-                  <a:srgbClr val="333333"/>
-                </a:solidFill>
-                <a:latin typeface="Calibri"/>
-              </a:rPr>
-              <a:t>en vivo</a:t>
-            </a:r>
-            <a:r>
-              <a:rPr sz="1400" b="0" i="0">
-                <a:solidFill>
-                  <a:srgbClr val="333333"/>
-                </a:solidFill>
-                <a:latin typeface="Calibri"/>
-              </a:rPr>
-              <a:t> y con Q&amp;A: no se acepta video grabado en su lugar.</a:t>
-            </a:r>
-          </a:p>
-        </p:txBody>
-      </p:sp>
-      <p:sp>
-        <p:nvSpPr>
-          <p:cNvPr id="14" name="TextBox 13"/>
-          <p:cNvSpPr txBox="1"/>
-          <p:nvPr/>
-        </p:nvSpPr>
-        <p:spPr>
-          <a:xfrm>
-            <a:off x="11185855" y="6473952"/>
-            <a:ext cx="640080" cy="274320"/>
-          </a:xfrm>
-          <a:prstGeom prst="rect">
-            <a:avLst/>
-          </a:prstGeom>
-          <a:noFill/>
-        </p:spPr>
-        <p:txBody>
-          <a:bodyPr wrap="square">
-            <a:spAutoFit/>
-          </a:bodyPr>
-          <a:lstStyle/>
-          <a:p>
-            <a:pPr algn="r"/>
-            <a:r>
-              <a:rPr sz="1100" b="0" i="0">
-                <a:solidFill>
-                  <a:srgbClr val="666666"/>
-                </a:solidFill>
-                <a:latin typeface="Calibri"/>
-              </a:rPr>
-              <a:t>27</a:t>
-            </a:r>
-          </a:p>
-        </p:txBody>
-      </p:sp>
-    </p:spTree>
-  </p:cSld>
-  <p:clrMapOvr>
-    <a:masterClrMapping/>
-  </p:clrMapOvr>
-</p:sld>
-</file>
-
-<file path=ppt/slides/slide28.xml><?xml version="1.0" encoding="utf-8"?>
-<p:sld xmlns:a="http://schemas.openxmlformats.org/drawingml/2006/main" xmlns:p="http://schemas.openxmlformats.org/presentationml/2006/main" xmlns:r="http://schemas.openxmlformats.org/officeDocument/2006/relationships">
-  <p:cSld>
-    <p:bg>
-      <p:bgPr>
-        <a:solidFill>
-          <a:srgbClr val="FFFFFF"/>
-        </a:solidFill>
-        <a:effectLst/>
-      </p:bgPr>
-    </p:bg>
-    <p:spTree>
-      <p:nvGrpSpPr>
-        <p:cNvPr id="1" name=""/>
-        <p:cNvGrpSpPr/>
-        <p:nvPr/>
-      </p:nvGrpSpPr>
-      <p:grpSpPr/>
-      <p:sp>
-        <p:nvSpPr>
-          <p:cNvPr id="2" name="Rectangle 1"/>
-          <p:cNvSpPr/>
-          <p:nvPr/>
-        </p:nvSpPr>
-        <p:spPr>
-          <a:xfrm>
-            <a:off x="0" y="0"/>
             <a:ext cx="12191695" cy="164592"/>
           </a:xfrm>
           <a:prstGeom prst="rect">
@@ -10738,7 +7641,7 @@
                 </a:solidFill>
                 <a:latin typeface="Calibri"/>
               </a:rPr>
-              <a:t>Clase 15 · cierre del PI CloudLite</a:t>
+              <a:t>Clase 15 · cierre del curso</a:t>
             </a:r>
           </a:p>
         </p:txBody>
@@ -10777,7 +7680,7 @@
                 </a:solidFill>
                 <a:latin typeface="Calibri"/>
               </a:rPr>
-              <a:t>Sustentar en vivo el PI CloudLite App y entregar el paquete final</a:t>
+              <a:t>Arquitectura = decisiones estructurales con sus razones y consecuencias</a:t>
             </a:r>
           </a:p>
           <a:p>
@@ -10793,7 +7696,7 @@
                 </a:solidFill>
                 <a:latin typeface="Calibri"/>
               </a:rPr>
-              <a:t>Evidencia: Paquete final en la plataforma del curso (módulo Proyectos) + pitch de 5–8 min sustentado hoy en clase + Q&amp;A</a:t>
+              <a:t>Context, Containers y Deployment cuentan el mismo sistema desde tres ángulos</a:t>
             </a:r>
           </a:p>
           <a:p>
@@ -11278,7 +8181,7 @@
                 </a:solidFill>
                 <a:latin typeface="Calibri"/>
               </a:rPr>
-              <a:t>Cómo se ordena la sesión de hoy</a:t>
+              <a:t>Cierre del curso</a:t>
             </a:r>
           </a:p>
         </p:txBody>
@@ -11317,25 +8220,7 @@
                 </a:solidFill>
                 <a:latin typeface="Calibri"/>
               </a:rPr>
-              <a:t>–   Sustentación </a:t>
-            </a:r>
-            <a:r>
-              <a:rPr sz="2000" b="1" i="0">
-                <a:solidFill>
-                  <a:srgbClr val="333333"/>
-                </a:solidFill>
-                <a:latin typeface="Calibri"/>
-              </a:rPr>
-              <a:t>en vivo</a:t>
-            </a:r>
-            <a:r>
-              <a:rPr sz="2000" b="0" i="0">
-                <a:solidFill>
-                  <a:srgbClr val="333333"/>
-                </a:solidFill>
-                <a:latin typeface="Calibri"/>
-              </a:rPr>
-              <a:t>, en este bloque: no se reemplaza por video grabado.</a:t>
+              <a:t>–   RAA1–3 aplicados al PI. Conserven el repo como portafolio.</a:t>
             </a:r>
           </a:p>
           <a:p>
@@ -11351,75 +8236,7 @@
                 </a:solidFill>
                 <a:latin typeface="Calibri"/>
               </a:rPr>
-              <a:t>–   Turnos de </a:t>
-            </a:r>
-            <a:r>
-              <a:rPr sz="2000" b="1" i="0">
-                <a:solidFill>
-                  <a:srgbClr val="333333"/>
-                </a:solidFill>
-                <a:latin typeface="Calibri"/>
-              </a:rPr>
-              <a:t>6 min de pitch + 2–4 min de Q&amp;A</a:t>
-            </a:r>
-            <a:r>
-              <a:rPr sz="2000" b="0" i="0">
-                <a:solidFill>
-                  <a:srgbClr val="333333"/>
-                </a:solidFill>
-                <a:latin typeface="Calibri"/>
-              </a:rPr>
-              <a:t>; el orden se sortea al empezar.</a:t>
-            </a:r>
-          </a:p>
-          <a:p>
-            <a:pPr>
-              <a:spcAft>
-                <a:spcPts val="800"/>
-              </a:spcAft>
-            </a:pPr>
-            <a:r>
-              <a:rPr sz="2000" b="0" i="0">
-                <a:solidFill>
-                  <a:srgbClr val="333333"/>
-                </a:solidFill>
-                <a:latin typeface="Calibri"/>
-              </a:rPr>
-              <a:t>–   Ten el paquete ya subido a la plataforma del curso </a:t>
-            </a:r>
-            <a:r>
-              <a:rPr sz="2000" b="1" i="0">
-                <a:solidFill>
-                  <a:srgbClr val="333333"/>
-                </a:solidFill>
-                <a:latin typeface="Calibri"/>
-              </a:rPr>
-              <a:t>antes</a:t>
-            </a:r>
-            <a:r>
-              <a:rPr sz="2000" b="0" i="0">
-                <a:solidFill>
-                  <a:srgbClr val="333333"/>
-                </a:solidFill>
-                <a:latin typeface="Calibri"/>
-              </a:rPr>
-              <a:t> de tu turno (no se sube presentando).</a:t>
-            </a:r>
-          </a:p>
-          <a:p>
-            <a:pPr>
-              <a:spcAft>
-                <a:spcPts val="800"/>
-              </a:spcAft>
-            </a:pPr>
-            <a:r>
-              <a:rPr sz="2000" b="0" i="0">
-                <a:solidFill>
-                  <a:srgbClr val="333333"/>
-                </a:solidFill>
-                <a:latin typeface="Calibri"/>
-              </a:rPr>
-              <a:t>–   Mientras otros presentan, escuchas: el cierre del curso se hace con todo el grupo.</a:t>
+              <a:t>–   Gracias — arquitectura es trade-offs documentados, no logos de proveedores.</a:t>
             </a:r>
           </a:p>
         </p:txBody>
@@ -11600,7 +8417,7 @@
                 </a:solidFill>
                 <a:latin typeface="Calibri"/>
               </a:rPr>
-              <a:t>Rúbrica de sustentación (recordatorio)</a:t>
+              <a:t>Sustentar no es describir: el eje de toda la clase (1/2)</a:t>
             </a:r>
           </a:p>
         </p:txBody>
@@ -11639,7 +8456,7 @@
                 </a:solidFill>
                 <a:latin typeface="Calibri"/>
               </a:rPr>
-              <a:t>–   Claridad del problema · calidad de diagramas · demo lab/CI · respuestas.</a:t>
+              <a:t>–   Sustentar no es describir, y esa distincion es el eje de toda la clase.</a:t>
             </a:r>
           </a:p>
           <a:p>
@@ -11655,7 +8472,39 @@
                 </a:solidFill>
                 <a:latin typeface="Calibri"/>
               </a:rPr>
-              <a:t>–   Cubres los 5 bloques del guion; en equipo autorizado hablan todos (penalización si solo uno presenta).</a:t>
+              <a:t>–   Describir un artefacto es decir que contiene: «este es el diagrama de despliegue de CloudLite App, aqui esta el contenedor de la API, aqui la base de datos».</a:t>
+            </a:r>
+          </a:p>
+          <a:p>
+            <a:pPr>
+              <a:spcAft>
+                <a:spcPts val="800"/>
+              </a:spcAft>
+            </a:pPr>
+            <a:r>
+              <a:rPr sz="2000" b="0" i="0">
+                <a:solidFill>
+                  <a:srgbClr val="333333"/>
+                </a:solidFill>
+                <a:latin typeface="Calibri"/>
+              </a:rPr>
+              <a:t>–   Sustentar es responder por que quedo asi y no de otra forma, y que se acepto perder al elegirlo.</a:t>
+            </a:r>
+          </a:p>
+          <a:p>
+            <a:pPr>
+              <a:spcAft>
+                <a:spcPts val="800"/>
+              </a:spcAft>
+            </a:pPr>
+            <a:r>
+              <a:rPr sz="2000" b="0" i="0">
+                <a:solidFill>
+                  <a:srgbClr val="333333"/>
+                </a:solidFill>
+                <a:latin typeface="Calibri"/>
+              </a:rPr>
+              <a:t>–   Si una eleccion no cumple esas tres condiciones no es arquitectura sino detalle de implementacion: elegir el nombre de una variable no es arquitectura, elegir si el frontend y la API viven en el mismo contenedor si lo es.</a:t>
             </a:r>
           </a:p>
         </p:txBody>
@@ -11836,7 +8685,7 @@
                 </a:solidFill>
                 <a:latin typeface="Calibri"/>
               </a:rPr>
-              <a:t>Checklist final</a:t>
+              <a:t>Sustentar no es describir: el eje de toda la clase (2/2)</a:t>
             </a:r>
           </a:p>
         </p:txBody>
@@ -11875,7 +8724,7 @@
                 </a:solidFill>
                 <a:latin typeface="Calibri"/>
               </a:rPr>
-              <a:t>–   Informe completo · 3 diagramas · Dockerfile+captura · Actions · pitch.</a:t>
+              <a:t>–   Un trade-off es lo que se sacrifica al tomar esa decision.</a:t>
             </a:r>
           </a:p>
           <a:p>
@@ -11891,7 +8740,23 @@
                 </a:solidFill>
                 <a:latin typeface="Calibri"/>
               </a:rPr>
-              <a:t>–   Sin cuentas cloud de pago · sin instalar hipervisores como requisito.</a:t>
+              <a:t>–   No existe decision de arquitectura sin trade-off, y cuando un estudiante afirma que su opcion es mejor en todo, lo que ocurre en realidad es que todavia no encontro que perdio.</a:t>
+            </a:r>
+          </a:p>
+          <a:p>
+            <a:pPr>
+              <a:spcAft>
+                <a:spcPts val="800"/>
+              </a:spcAft>
+            </a:pPr>
+            <a:r>
+              <a:rPr sz="2000" b="0" i="0">
+                <a:solidFill>
+                  <a:srgbClr val="333333"/>
+                </a:solidFill>
+                <a:latin typeface="Calibri"/>
+              </a:rPr>
+              <a:t>–   Toda la sustentacion de hoy se apoya en esta distincion, porque la rubrica no premia describir bien: premia justificar bien.</a:t>
             </a:r>
           </a:p>
         </p:txBody>
@@ -12072,7 +8937,7 @@
                 </a:solidFill>
                 <a:latin typeface="Calibri"/>
               </a:rPr>
-              <a:t>Cierre del curso</a:t>
+              <a:t>La prueba de tres capas que se aplica en voz alta</a:t>
             </a:r>
           </a:p>
         </p:txBody>
@@ -12111,7 +8976,7 @@
                 </a:solidFill>
                 <a:latin typeface="Calibri"/>
               </a:rPr>
-              <a:t>–   RAA1–3 aplicados al PI. Conserven el repo como portafolio.</a:t>
+              <a:t>–   Primera capa, el QUE: «CloudLite corre con un contenedor por servicio».</a:t>
             </a:r>
           </a:p>
           <a:p>
@@ -12127,7 +8992,39 @@
                 </a:solidFill>
                 <a:latin typeface="Calibri"/>
               </a:rPr>
-              <a:t>–   Gracias — arquitectura es trade-offs documentados, no logos de proveedores.</a:t>
+              <a:t>–   Segunda capa, el POR QUE: «porque el proyecto lo sostiene una sola persona sin presupuesto de nube, y un contenedor se levanta igual en el portatil de cualquiera y en Killercoda, sin instalar un hipervisor ni pedir tarjeta de credito».</a:t>
+            </a:r>
+          </a:p>
+          <a:p>
+            <a:pPr>
+              <a:spcAft>
+                <a:spcPts val="800"/>
+              </a:spcAft>
+            </a:pPr>
+            <a:r>
+              <a:rPr sz="2000" b="0" i="0">
+                <a:solidFill>
+                  <a:srgbClr val="333333"/>
+                </a:solidFill>
+                <a:latin typeface="Calibri"/>
+              </a:rPr>
+              <a:t>–   Tercera capa, A CAMBIO DE QUE: «a cambio de perder el aislamiento fuerte que da una maquina virtual completa, y de asumir que si el host cae, caen todos los servicios a la vez porque comparten el mismo kernel».</a:t>
+            </a:r>
+          </a:p>
+          <a:p>
+            <a:pPr>
+              <a:spcAft>
+                <a:spcPts val="800"/>
+              </a:spcAft>
+            </a:pPr>
+            <a:r>
+              <a:rPr sz="2000" b="0" i="0">
+                <a:solidFill>
+                  <a:srgbClr val="333333"/>
+                </a:solidFill>
+                <a:latin typeface="Calibri"/>
+              </a:rPr>
+              <a:t>–   La instruccion operativa para el docente es simple: ante cada afirmacion, preguntar «a cambio de que», y no aceptar la respuesta «de nada».</a:t>
             </a:r>
           </a:p>
         </p:txBody>
@@ -12308,7 +9205,7 @@
                 </a:solidFill>
                 <a:latin typeface="Calibri"/>
               </a:rPr>
-              <a:t>Sustentar no es describir: el eje de toda la clase (1/2)</a:t>
+              <a:t>El ADR: el artefacto que sostiene la tercera capa (1/2)</a:t>
             </a:r>
           </a:p>
         </p:txBody>
@@ -12347,7 +9244,7 @@
                 </a:solidFill>
                 <a:latin typeface="Calibri"/>
               </a:rPr>
-              <a:t>–   Sustentar no es describir, y esa distincion es el eje de toda la clase.</a:t>
+              <a:t>–   El artefacto que sostiene esa tercera capa es el ADR, o Architecture Decision Record: un documento corto, de una pagina como maximo</a:t>
             </a:r>
           </a:p>
           <a:p>
@@ -12363,7 +9260,7 @@
                 </a:solidFill>
                 <a:latin typeface="Calibri"/>
               </a:rPr>
-              <a:t>–   Describir un artefacto es decir que contiene: «este es el diagrama de despliegue de CloudLite App, aqui esta el contenedor de la API, aqui la base de datos».</a:t>
+              <a:t>–   Que registra UNA sola decision con las seis secciones rotuladas que el curso fijo en la Clase 2 y que no han cambiado desde entonces.</a:t>
             </a:r>
           </a:p>
           <a:p>
@@ -12379,7 +9276,7 @@
                 </a:solidFill>
                 <a:latin typeface="Calibri"/>
               </a:rPr>
-              <a:t>–   Sustentar es responder por que quedo asi y no de otra forma, y que se acepto perder al elegirlo.</a:t>
+              <a:t>–   Titulo, con el numero consecutivo, que es justamente por lo que se cita.</a:t>
             </a:r>
           </a:p>
           <a:p>
@@ -12395,7 +9292,39 @@
                 </a:solidFill>
                 <a:latin typeface="Calibri"/>
               </a:rPr>
-              <a:t>–   Si una eleccion no cumple esas tres condiciones no es arquitectura sino detalle de implementacion: elegir el nombre de una variable no es arquitectura, elegir si el frontend y la API viven en el mismo contenedor si lo es.</a:t>
+              <a:t>–   Contexto, es decir que problema se estaba resolviendo y con que restricciones.</a:t>
+            </a:r>
+          </a:p>
+          <a:p>
+            <a:pPr>
+              <a:spcAft>
+                <a:spcPts val="800"/>
+              </a:spcAft>
+            </a:pPr>
+            <a:r>
+              <a:rPr sz="2000" b="0" i="0">
+                <a:solidFill>
+                  <a:srgbClr val="333333"/>
+                </a:solidFill>
+                <a:latin typeface="Calibri"/>
+              </a:rPr>
+              <a:t>–   Y consecuencias, donde se escribe lo bueno, lo malo y lo neutro que se acepta.</a:t>
+            </a:r>
+          </a:p>
+          <a:p>
+            <a:pPr>
+              <a:spcAft>
+                <a:spcPts val="800"/>
+              </a:spcAft>
+            </a:pPr>
+            <a:r>
+              <a:rPr sz="2000" b="0" i="0">
+                <a:solidFill>
+                  <a:srgbClr val="333333"/>
+                </a:solidFill>
+                <a:latin typeface="Calibri"/>
+              </a:rPr>
+              <a:t>–   Los estudiantes ya produjeron el ADR-001 en la Clase 2, cuando decidieron el modelo de servicio dominante entre IaaS, PaaS y SaaS</a:t>
             </a:r>
           </a:p>
         </p:txBody>
@@ -12576,7 +9505,7 @@
                 </a:solidFill>
                 <a:latin typeface="Calibri"/>
               </a:rPr>
-              <a:t>Sustentar no es describir: el eje de toda la clase (2/2)</a:t>
+              <a:t>El ADR: el artefacto que sostiene la tercera capa (2/2)</a:t>
             </a:r>
           </a:p>
         </p:txBody>
@@ -12615,7 +9544,7 @@
                 </a:solidFill>
                 <a:latin typeface="Calibri"/>
               </a:rPr>
-              <a:t>–   Un trade-off es lo que se sacrifica al tomar esa decision.</a:t>
+              <a:t>–   A lo largo del curso debieron acumular tres o cuatro mas: contenedores frente a maquinas virtuales (Clase 3), donde poner la frontera entre servicios (Clase 4), y que se escala y que no (Clase 13).</a:t>
             </a:r>
           </a:p>
           <a:p>
@@ -12631,7 +9560,7 @@
                 </a:solidFill>
                 <a:latin typeface="Calibri"/>
               </a:rPr>
-              <a:t>–   No existe decision de arquitectura sin trade-off, y cuando un estudiante afirma que su opcion es mejor en todo, lo que ocurre en realidad es que todavia no encontro que perdio.</a:t>
+              <a:t>–   En la sustentacion el ADR no se lee en voz alta: se cita.</a:t>
             </a:r>
           </a:p>
           <a:p>
@@ -12647,7 +9576,7 @@
                 </a:solidFill>
                 <a:latin typeface="Calibri"/>
               </a:rPr>
-              <a:t>–   Toda la sustentacion de hoy se apoya en esta distincion, porque la rubrica no premia describir bien: premia justificar bien.</a:t>
+              <a:t>–   La forma profesional es «esta decision esta registrada en el ADR-002, y el trade-off que aceptamos fue perder portabilidad entre proveedores», con el numero del ADR visible en la diapositiva.</a:t>
             </a:r>
           </a:p>
         </p:txBody>
@@ -13013,4 +9942,324 @@
   </a:objectDefaults>
   <a:extraClrSchemeLst/>
 </a:theme>
+</file>
+
+<file path=ppt/theme/theme2.xml><?xml version="1.0" encoding="utf-8"?>
+<a:theme xmlns:a="http://schemas.openxmlformats.org/drawingml/2006/main" name="Office Theme">
+  <a:themeElements>
+    <a:clrScheme name="Office">
+      <a:dk1>
+        <a:sysClr val="windowText" lastClr="000000"/>
+      </a:dk1>
+      <a:lt1>
+        <a:sysClr val="window" lastClr="FFFFFF"/>
+      </a:lt1>
+      <a:dk2>
+        <a:srgbClr val="1F497D"/>
+      </a:dk2>
+      <a:lt2>
+        <a:srgbClr val="EEECE1"/>
+      </a:lt2>
+      <a:accent1>
+        <a:srgbClr val="4F81BD"/>
+      </a:accent1>
+      <a:accent2>
+        <a:srgbClr val="C0504D"/>
+      </a:accent2>
+      <a:accent3>
+        <a:srgbClr val="9BBB59"/>
+      </a:accent3>
+      <a:accent4>
+        <a:srgbClr val="8064A2"/>
+      </a:accent4>
+      <a:accent5>
+        <a:srgbClr val="4BACC6"/>
+      </a:accent5>
+      <a:accent6>
+        <a:srgbClr val="F79646"/>
+      </a:accent6>
+      <a:hlink>
+        <a:srgbClr val="0000FF"/>
+      </a:hlink>
+      <a:folHlink>
+        <a:srgbClr val="800080"/>
+      </a:folHlink>
+    </a:clrScheme>
+    <a:fontScheme name="Office">
+      <a:majorFont>
+        <a:latin typeface="Calibri"/>
+        <a:ea typeface=""/>
+        <a:cs typeface=""/>
+        <a:font script="Jpan" typeface="ＭＳ Ｐゴシック"/>
+        <a:font script="Hang" typeface="맑은 고딕"/>
+        <a:font script="Hans" typeface="宋体"/>
+        <a:font script="Hant" typeface="新細明體"/>
+        <a:font script="Arab" typeface="Times New Roman"/>
+        <a:font script="Hebr" typeface="Times New Roman"/>
+        <a:font script="Thai" typeface="Angsana New"/>
+        <a:font script="Ethi" typeface="Nyala"/>
+        <a:font script="Beng" typeface="Vrinda"/>
+        <a:font script="Gujr" typeface="Shruti"/>
+        <a:font script="Khmr" typeface="MoolBoran"/>
+        <a:font script="Knda" typeface="Tunga"/>
+        <a:font script="Guru" typeface="Raavi"/>
+        <a:font script="Cans" typeface="Euphemia"/>
+        <a:font script="Cher" typeface="Plantagenet Cherokee"/>
+        <a:font script="Yiii" typeface="Microsoft Yi Baiti"/>
+        <a:font script="Tibt" typeface="Microsoft Himalaya"/>
+        <a:font script="Thaa" typeface="MV Boli"/>
+        <a:font script="Deva" typeface="Mangal"/>
+        <a:font script="Telu" typeface="Gautami"/>
+        <a:font script="Taml" typeface="Latha"/>
+        <a:font script="Syrc" typeface="Estrangelo Edessa"/>
+        <a:font script="Orya" typeface="Kalinga"/>
+        <a:font script="Mlym" typeface="Kartika"/>
+        <a:font script="Laoo" typeface="DokChampa"/>
+        <a:font script="Sinh" typeface="Iskoola Pota"/>
+        <a:font script="Mong" typeface="Mongolian Baiti"/>
+        <a:font script="Viet" typeface="Times New Roman"/>
+        <a:font script="Uigh" typeface="Microsoft Uighur"/>
+        <a:font script="Geor" typeface="Sylfaen"/>
+      </a:majorFont>
+      <a:minorFont>
+        <a:latin typeface="Calibri"/>
+        <a:ea typeface=""/>
+        <a:cs typeface=""/>
+        <a:font script="Jpan" typeface="ＭＳ Ｐゴシック"/>
+        <a:font script="Hang" typeface="맑은 고딕"/>
+        <a:font script="Hans" typeface="宋体"/>
+        <a:font script="Hant" typeface="新細明體"/>
+        <a:font script="Arab" typeface="Arial"/>
+        <a:font script="Hebr" typeface="Arial"/>
+        <a:font script="Thai" typeface="Cordia New"/>
+        <a:font script="Ethi" typeface="Nyala"/>
+        <a:font script="Beng" typeface="Vrinda"/>
+        <a:font script="Gujr" typeface="Shruti"/>
+        <a:font script="Khmr" typeface="DaunPenh"/>
+        <a:font script="Knda" typeface="Tunga"/>
+        <a:font script="Guru" typeface="Raavi"/>
+        <a:font script="Cans" typeface="Euphemia"/>
+        <a:font script="Cher" typeface="Plantagenet Cherokee"/>
+        <a:font script="Yiii" typeface="Microsoft Yi Baiti"/>
+        <a:font script="Tibt" typeface="Microsoft Himalaya"/>
+        <a:font script="Thaa" typeface="MV Boli"/>
+        <a:font script="Deva" typeface="Mangal"/>
+        <a:font script="Telu" typeface="Gautami"/>
+        <a:font script="Taml" typeface="Latha"/>
+        <a:font script="Syrc" typeface="Estrangelo Edessa"/>
+        <a:font script="Orya" typeface="Kalinga"/>
+        <a:font script="Mlym" typeface="Kartika"/>
+        <a:font script="Laoo" typeface="DokChampa"/>
+        <a:font script="Sinh" typeface="Iskoola Pota"/>
+        <a:font script="Mong" typeface="Mongolian Baiti"/>
+        <a:font script="Viet" typeface="Arial"/>
+        <a:font script="Uigh" typeface="Microsoft Uighur"/>
+        <a:font script="Geor" typeface="Sylfaen"/>
+      </a:minorFont>
+    </a:fontScheme>
+    <a:fmtScheme name="Office">
+      <a:fillStyleLst>
+        <a:solidFill>
+          <a:schemeClr val="phClr"/>
+        </a:solidFill>
+        <a:gradFill rotWithShape="1">
+          <a:gsLst>
+            <a:gs pos="0">
+              <a:schemeClr val="phClr">
+                <a:tint val="50000"/>
+                <a:satMod val="300000"/>
+              </a:schemeClr>
+            </a:gs>
+            <a:gs pos="35000">
+              <a:schemeClr val="phClr">
+                <a:tint val="37000"/>
+                <a:satMod val="300000"/>
+              </a:schemeClr>
+            </a:gs>
+            <a:gs pos="100000">
+              <a:schemeClr val="phClr">
+                <a:tint val="15000"/>
+                <a:satMod val="350000"/>
+              </a:schemeClr>
+            </a:gs>
+          </a:gsLst>
+          <a:lin ang="16200000" scaled="1"/>
+        </a:gradFill>
+        <a:gradFill rotWithShape="1">
+          <a:gsLst>
+            <a:gs pos="0">
+              <a:schemeClr val="phClr">
+                <a:tint val="100000"/>
+                <a:shade val="100000"/>
+                <a:satMod val="130000"/>
+              </a:schemeClr>
+            </a:gs>
+            <a:gs pos="100000">
+              <a:schemeClr val="phClr">
+                <a:tint val="50000"/>
+                <a:shade val="100000"/>
+                <a:satMod val="350000"/>
+              </a:schemeClr>
+            </a:gs>
+          </a:gsLst>
+          <a:lin ang="16200000" scaled="0"/>
+        </a:gradFill>
+      </a:fillStyleLst>
+      <a:lnStyleLst>
+        <a:ln w="9525" cap="flat" cmpd="sng" algn="ctr">
+          <a:solidFill>
+            <a:schemeClr val="phClr">
+              <a:shade val="95000"/>
+              <a:satMod val="105000"/>
+            </a:schemeClr>
+          </a:solidFill>
+          <a:prstDash val="solid"/>
+        </a:ln>
+        <a:ln w="25400" cap="flat" cmpd="sng" algn="ctr">
+          <a:solidFill>
+            <a:schemeClr val="phClr"/>
+          </a:solidFill>
+          <a:prstDash val="solid"/>
+        </a:ln>
+        <a:ln w="38100" cap="flat" cmpd="sng" algn="ctr">
+          <a:solidFill>
+            <a:schemeClr val="phClr"/>
+          </a:solidFill>
+          <a:prstDash val="solid"/>
+        </a:ln>
+      </a:lnStyleLst>
+      <a:effectStyleLst>
+        <a:effectStyle>
+          <a:effectLst>
+            <a:outerShdw blurRad="40000" dist="20000" dir="5400000" rotWithShape="0">
+              <a:srgbClr val="000000">
+                <a:alpha val="38000"/>
+              </a:srgbClr>
+            </a:outerShdw>
+          </a:effectLst>
+        </a:effectStyle>
+        <a:effectStyle>
+          <a:effectLst>
+            <a:outerShdw blurRad="40000" dist="23000" dir="5400000" rotWithShape="0">
+              <a:srgbClr val="000000">
+                <a:alpha val="35000"/>
+              </a:srgbClr>
+            </a:outerShdw>
+          </a:effectLst>
+        </a:effectStyle>
+        <a:effectStyle>
+          <a:effectLst>
+            <a:outerShdw blurRad="40000" dist="23000" dir="5400000" rotWithShape="0">
+              <a:srgbClr val="000000">
+                <a:alpha val="35000"/>
+              </a:srgbClr>
+            </a:outerShdw>
+          </a:effectLst>
+          <a:scene3d>
+            <a:camera prst="orthographicFront">
+              <a:rot lat="0" lon="0" rev="0"/>
+            </a:camera>
+            <a:lightRig rig="threePt" dir="t">
+              <a:rot lat="0" lon="0" rev="1200000"/>
+            </a:lightRig>
+          </a:scene3d>
+          <a:sp3d>
+            <a:bevelT w="63500" h="25400"/>
+          </a:sp3d>
+        </a:effectStyle>
+      </a:effectStyleLst>
+      <a:bgFillStyleLst>
+        <a:solidFill>
+          <a:schemeClr val="phClr"/>
+        </a:solidFill>
+        <a:gradFill rotWithShape="1">
+          <a:gsLst>
+            <a:gs pos="0">
+              <a:schemeClr val="phClr">
+                <a:tint val="40000"/>
+                <a:satMod val="350000"/>
+              </a:schemeClr>
+            </a:gs>
+            <a:gs pos="40000">
+              <a:schemeClr val="phClr">
+                <a:tint val="45000"/>
+                <a:shade val="99000"/>
+                <a:satMod val="350000"/>
+              </a:schemeClr>
+            </a:gs>
+            <a:gs pos="100000">
+              <a:schemeClr val="phClr">
+                <a:shade val="20000"/>
+                <a:satMod val="255000"/>
+              </a:schemeClr>
+            </a:gs>
+          </a:gsLst>
+          <a:path path="circle">
+            <a:fillToRect l="50000" t="-80000" r="50000" b="180000"/>
+          </a:path>
+        </a:gradFill>
+        <a:gradFill rotWithShape="1">
+          <a:gsLst>
+            <a:gs pos="0">
+              <a:schemeClr val="phClr">
+                <a:tint val="80000"/>
+                <a:satMod val="300000"/>
+              </a:schemeClr>
+            </a:gs>
+            <a:gs pos="100000">
+              <a:schemeClr val="phClr">
+                <a:shade val="30000"/>
+                <a:satMod val="200000"/>
+              </a:schemeClr>
+            </a:gs>
+          </a:gsLst>
+          <a:path path="circle">
+            <a:fillToRect l="50000" t="50000" r="50000" b="50000"/>
+          </a:path>
+        </a:gradFill>
+      </a:bgFillStyleLst>
+    </a:fmtScheme>
+  </a:themeElements>
+  <a:objectDefaults>
+    <a:spDef>
+      <a:spPr/>
+      <a:bodyPr/>
+      <a:lstStyle/>
+      <a:style>
+        <a:lnRef idx="1">
+          <a:schemeClr val="accent1"/>
+        </a:lnRef>
+        <a:fillRef idx="3">
+          <a:schemeClr val="accent1"/>
+        </a:fillRef>
+        <a:effectRef idx="2">
+          <a:schemeClr val="accent1"/>
+        </a:effectRef>
+        <a:fontRef idx="minor">
+          <a:schemeClr val="lt1"/>
+        </a:fontRef>
+      </a:style>
+    </a:spDef>
+    <a:lnDef>
+      <a:spPr/>
+      <a:bodyPr/>
+      <a:lstStyle/>
+      <a:style>
+        <a:lnRef idx="2">
+          <a:schemeClr val="accent1"/>
+        </a:lnRef>
+        <a:fillRef idx="0">
+          <a:schemeClr val="accent1"/>
+        </a:fillRef>
+        <a:effectRef idx="1">
+          <a:schemeClr val="accent1"/>
+        </a:effectRef>
+        <a:fontRef idx="minor">
+          <a:schemeClr val="tx1"/>
+        </a:fontRef>
+      </a:style>
+    </a:lnDef>
+  </a:objectDefaults>
+  <a:extraClrSchemeLst/>
+</a:theme>
 </file>
--- a/Arquitectura de Sistemas Computacionales/Clases/Clase 15 - Presentacion del proyecto y cierre/Presentacion.pptx
+++ b/Arquitectura de Sistemas Computacionales/Clases/Clase 15 - Presentacion del proyecto y cierre/Presentacion.pptx
@@ -24,7 +24,6 @@
     <p:sldId id="272" r:id="rId24"/>
     <p:sldId id="273" r:id="rId25"/>
     <p:sldId id="274" r:id="rId26"/>
-    <p:sldId id="275" r:id="rId27"/>
   </p:sldIdLst>
   <p:sldSz cx="12191695" cy="6858000" type="screen4x3"/>
   <p:notesSz cx="6858000" cy="9144000"/>
@@ -597,19 +596,19 @@
           <a:p/>
           <a:p>
             <a:r>
-              <a:t>Quien solo llega a la primera capa esta leyendo el diagrama en voz alta y no deberia obtener los puntos de sustentacion.</a:t>
+              <a:t>Quien llega a la segunda esta justificando.</a:t>
             </a:r>
           </a:p>
           <a:p/>
           <a:p>
             <a:r>
-              <a:t>Quien llega a la segunda esta justificando.</a:t>
+              <a:t>Quien llega a la tercera esta sustentando como un arquitecto, porque demuestra que conocia el costo de su decision antes de tomarla y aun asi la tomo.</a:t>
             </a:r>
           </a:p>
           <a:p/>
           <a:p>
             <a:r>
-              <a:t>Quien llega a la tercera esta sustentando como un arquitecto, porque demuestra que conocia el costo de su decision antes de tomarla y aun asi la tomo.</a:t>
+              <a:t>(Sobre la actividad, no se proyecta) Quien solo llega a la primera capa esta leyendo el diagrama en voz alta y no deberia obtener los puntos de sustentacion.</a:t>
             </a:r>
           </a:p>
         </p:txBody>
@@ -767,7 +766,7 @@
           <a:lstStyle/>
           <a:p>
             <a:r>
-              <a:t>La razon es concreta y el docente debe decirla: si el estudiante trae veinte diapositivas, no termina, corre las ultimas, y las ultimas suelen ser justamente las de seguridad, costos y escalabilidad, donde estan los puntos de la rubrica que menos se defienden solos.</a:t>
+              <a:t>(Sobre la actividad, no se proyecta) La razon es concreta y el docente debe decirla: si el estudiante trae veinte diapositivas, no termina, corre las ultimas, y las ultimas suelen ser justamente las de seguridad, costos y escalabilidad, donde estan los puntos de la rubrica que menos se defienden solos.</a:t>
             </a:r>
           </a:p>
         </p:txBody>
@@ -852,6 +851,12 @@
               <a:t>Ese ejercicio suele revelar en cinco minutos lo que la nota habria revelado demasiado tarde.</a:t>
             </a:r>
           </a:p>
+          <a:p/>
+          <a:p>
+            <a:r>
+              <a:t>(Sobre la actividad, no se proyecta) En los equipos autorizados el mismo riesgo se multiplica: si solo un integrante puede explicar el despliegue, no hay evidencia de que los demas participaran, y por eso la rubrica exige que todos hablen y descuenta cuando presenta uno solo.</a:t>
+            </a:r>
+          </a:p>
         </p:txBody>
       </p:sp>
       <p:sp>
@@ -934,6 +939,12 @@
               <a:t>Improvisar un dato falso, en cambio, se detecta con una sola pregunta de seguimiento y cuesta mucho mas que admitir el limite.</a:t>
             </a:r>
           </a:p>
+          <a:p/>
+          <a:p>
+            <a:r>
+              <a:t>(Sobre la actividad, no se proyecta) El Q&amp;A escrito que pide el taller (tres preguntas duras que el propio estudiante se haria, con su respuesta) no reemplaza nada: es la preparacion del Q&amp;A en vivo, y en la practica el estudiante que lo escribio en serio responde mucho mejor cuando la pregunta llega de verdad.</a:t>
+            </a:r>
+          </a:p>
         </p:txBody>
       </p:sp>
       <p:sp>
@@ -957,76 +968,6 @@
 </file>
 
 <file path=ppt/notesSlides/notesSlide7.xml><?xml version="1.0" encoding="utf-8"?>
-<p:notes xmlns:a="http://schemas.openxmlformats.org/drawingml/2006/main" xmlns:p="http://schemas.openxmlformats.org/presentationml/2006/main" xmlns:r="http://schemas.openxmlformats.org/officeDocument/2006/relationships">
-  <p:cSld>
-    <p:spTree>
-      <p:nvGrpSpPr>
-        <p:cNvPr id="1" name=""/>
-        <p:cNvGrpSpPr/>
-        <p:nvPr/>
-      </p:nvGrpSpPr>
-      <p:grpSpPr>
-        <a:xfrm>
-          <a:off x="0" y="0"/>
-          <a:ext cx="0" cy="0"/>
-          <a:chOff x="0" y="0"/>
-          <a:chExt cx="0" cy="0"/>
-        </a:xfrm>
-      </p:grpSpPr>
-      <p:sp>
-        <p:nvSpPr>
-          <p:cNvPr id="2" name="Slide Image Placeholder 1"/>
-          <p:cNvSpPr>
-            <a:spLocks noGrp="1"/>
-          </p:cNvSpPr>
-          <p:nvPr>
-            <p:ph type="sldImg" idx="2"/>
-          </p:nvPr>
-        </p:nvSpPr>
-        <p:spPr/>
-      </p:sp>
-      <p:sp>
-        <p:nvSpPr>
-          <p:cNvPr id="3" name="Notes Placeholder 2"/>
-          <p:cNvSpPr>
-            <a:spLocks noGrp="1"/>
-          </p:cNvSpPr>
-          <p:nvPr>
-            <p:ph type="body" idx="3" sz="quarter"/>
-          </p:nvPr>
-        </p:nvSpPr>
-        <p:spPr/>
-        <p:txBody>
-          <a:bodyPr/>
-          <a:lstStyle/>
-          <a:p>
-            <a:r>
-              <a:t>Evaluar con rubrica significa asignar puntos a evidencia observable y no a impresion general, y por eso conviene leer el reparto en voz alta al abrir la clase.</a:t>
-            </a:r>
-          </a:p>
-        </p:txBody>
-      </p:sp>
-      <p:sp>
-        <p:nvSpPr>
-          <p:cNvPr id="4" name="Slide Number Placeholder 3"/>
-          <p:cNvSpPr>
-            <a:spLocks noGrp="1"/>
-          </p:cNvSpPr>
-          <p:nvPr>
-            <p:ph type="sldNum" idx="5" sz="quarter"/>
-          </p:nvPr>
-        </p:nvSpPr>
-        <p:spPr/>
-      </p:sp>
-    </p:spTree>
-  </p:cSld>
-  <p:clrMapOvr>
-    <a:masterClrMapping/>
-  </p:clrMapOvr>
-</p:notes>
-</file>
-
-<file path=ppt/notesSlides/notesSlide8.xml><?xml version="1.0" encoding="utf-8"?>
 <p:notes xmlns:a="http://schemas.openxmlformats.org/drawingml/2006/main" xmlns:p="http://schemas.openxmlformats.org/presentationml/2006/main" xmlns:r="http://schemas.openxmlformats.org/officeDocument/2006/relationships">
   <p:cSld>
     <p:spTree>
@@ -4274,7 +4215,7 @@
                 </a:solidFill>
                 <a:latin typeface="Calibri"/>
               </a:rPr>
-              <a:t>Sustentación en vivo del PI CloudLite · cierre del curso</a:t>
+              <a:t>Sustentar una arquitectura · cierre del curso</a:t>
             </a:r>
           </a:p>
         </p:txBody>
@@ -4307,13 +4248,22 @@
               </a:spcAft>
             </a:pPr>
             <a:r>
+              <a:rPr sz="1500" b="0" i="0">
+                <a:solidFill>
+                  <a:srgbClr val="333333"/>
+                </a:solidFill>
+                <a:latin typeface="Calibri"/>
+              </a:rPr>
+              <a:t>Bloque </a:t>
+            </a:r>
+            <a:r>
               <a:rPr sz="1500" b="1" i="0">
                 <a:solidFill>
                   <a:srgbClr val="333333"/>
                 </a:solidFill>
                 <a:latin typeface="Calibri"/>
               </a:rPr>
-              <a:t>Hoy cerramos el PI:</a:t>
+              <a:t>120 min</a:t>
             </a:r>
             <a:r>
               <a:rPr sz="1500" b="0" i="0">
@@ -4322,7 +4272,25 @@
                 </a:solidFill>
                 <a:latin typeface="Calibri"/>
               </a:rPr>
-              <a:t> Sustentar en vivo el PI CloudLite App y entregar el paquete final</a:t>
+              <a:t> · sesión </a:t>
+            </a:r>
+            <a:r>
+              <a:rPr sz="1500" b="1" i="0">
+                <a:solidFill>
+                  <a:srgbClr val="333333"/>
+                </a:solidFill>
+                <a:latin typeface="Calibri"/>
+              </a:rPr>
+              <a:t>virtual síncrona</a:t>
+            </a:r>
+            <a:r>
+              <a:rPr sz="1500" b="0" i="0">
+                <a:solidFill>
+                  <a:srgbClr val="333333"/>
+                </a:solidFill>
+                <a:latin typeface="Calibri"/>
+              </a:rPr>
+              <a:t> por Google Meet.</a:t>
             </a:r>
           </a:p>
           <a:p>
@@ -4338,7 +4306,7 @@
                 </a:solidFill>
                 <a:latin typeface="Calibri"/>
               </a:rPr>
-              <a:t>Bloque </a:t>
+              <a:t>Tema: sustentar una arquitectura es </a:t>
             </a:r>
             <a:r>
               <a:rPr sz="1500" b="1" i="0">
@@ -4347,7 +4315,7 @@
                 </a:solidFill>
                 <a:latin typeface="Calibri"/>
               </a:rPr>
-              <a:t>120 min</a:t>
+              <a:t>justificar</a:t>
             </a:r>
             <a:r>
               <a:rPr sz="1500" b="0" i="0">
@@ -4356,77 +4324,7 @@
                 </a:solidFill>
                 <a:latin typeface="Calibri"/>
               </a:rPr>
-              <a:t> · sesión </a:t>
-            </a:r>
-            <a:r>
-              <a:rPr sz="1500" b="1" i="0">
-                <a:solidFill>
-                  <a:srgbClr val="333333"/>
-                </a:solidFill>
-                <a:latin typeface="Calibri"/>
-              </a:rPr>
-              <a:t>síncrona</a:t>
-            </a:r>
-            <a:r>
-              <a:rPr sz="1500" b="0" i="0">
-                <a:solidFill>
-                  <a:srgbClr val="333333"/>
-                </a:solidFill>
-                <a:latin typeface="Calibri"/>
-              </a:rPr>
-              <a:t> de sustentaciones · turnos consecutivos.</a:t>
-            </a:r>
-          </a:p>
-          <a:p>
-            <a:pPr>
-              <a:spcAft>
-                <a:spcPts val="800"/>
-              </a:spcAft>
-            </a:pPr>
-            <a:r>
-              <a:rPr sz="1500" b="0" i="0">
-                <a:solidFill>
-                  <a:srgbClr val="333333"/>
-                </a:solidFill>
-                <a:latin typeface="Calibri"/>
-              </a:rPr>
-              <a:t>Paquete subido a la plataforma del curso </a:t>
-            </a:r>
-            <a:r>
-              <a:rPr sz="1500" b="1" i="0">
-                <a:solidFill>
-                  <a:srgbClr val="333333"/>
-                </a:solidFill>
-                <a:latin typeface="Calibri"/>
-              </a:rPr>
-              <a:t>antes</a:t>
-            </a:r>
-            <a:r>
-              <a:rPr sz="1500" b="0" i="0">
-                <a:solidFill>
-                  <a:srgbClr val="333333"/>
-                </a:solidFill>
-                <a:latin typeface="Calibri"/>
-              </a:rPr>
-              <a:t> de tu turno · defensa </a:t>
-            </a:r>
-            <a:r>
-              <a:rPr sz="1500" b="1" i="0">
-                <a:solidFill>
-                  <a:srgbClr val="333333"/>
-                </a:solidFill>
-                <a:latin typeface="Calibri"/>
-              </a:rPr>
-              <a:t>en vivo</a:t>
-            </a:r>
-            <a:r>
-              <a:rPr sz="1500" b="0" i="0">
-                <a:solidFill>
-                  <a:srgbClr val="333333"/>
-                </a:solidFill>
-                <a:latin typeface="Calibri"/>
-              </a:rPr>
-              <a:t>, no video grabado.</a:t>
+              <a:t>, no describir · cierre del curso.</a:t>
             </a:r>
           </a:p>
         </p:txBody>
@@ -5466,22 +5364,6 @@
                 </a:solidFill>
                 <a:latin typeface="Calibri"/>
               </a:rPr>
-              <a:t>–   En los equipos autorizados el mismo riesgo se multiplica: si solo un integrante puede explicar el despliegue, no hay evidencia de que los demas participaran, y por eso la rubrica exige que todos hablen y descuenta cuando presenta uno solo.</a:t>
-            </a:r>
-          </a:p>
-          <a:p>
-            <a:pPr>
-              <a:spcAft>
-                <a:spcPts val="800"/>
-              </a:spcAft>
-            </a:pPr>
-            <a:r>
-              <a:rPr sz="2000" b="0" i="0">
-                <a:solidFill>
-                  <a:srgbClr val="333333"/>
-                </a:solidFill>
-                <a:latin typeface="Calibri"/>
-              </a:rPr>
               <a:t>–   La practica concreta que se recomienda antes de presentar es un ensayo cruzado con otro estudiante: cada uno explica en 60 segundos una parte del sistema del otro y devuelve los huecos que encontro (en equipo, cada integrante explica una parte que NO le toco preparar).</a:t>
             </a:r>
           </a:p>
@@ -5737,38 +5619,6 @@
               <a:t>–   La pregunta hipotetica, o what-if, evalua si el diseno se entiende como sistema y no como dibujo: «si el trafico se multiplica por diez el lunes, que pieza de CloudLite se rompe primero y como se darian cuenta».</a:t>
             </a:r>
           </a:p>
-          <a:p>
-            <a:pPr>
-              <a:spcAft>
-                <a:spcPts val="800"/>
-              </a:spcAft>
-            </a:pPr>
-            <a:r>
-              <a:rPr sz="2000" b="0" i="0">
-                <a:solidFill>
-                  <a:srgbClr val="333333"/>
-                </a:solidFill>
-                <a:latin typeface="Calibri"/>
-              </a:rPr>
-              <a:t>–   Aqui aparece la segunda pregunta previsible del estudiante: «y si no sabemos la respuesta?».</a:t>
-            </a:r>
-          </a:p>
-          <a:p>
-            <a:pPr>
-              <a:spcAft>
-                <a:spcPts val="800"/>
-              </a:spcAft>
-            </a:pPr>
-            <a:r>
-              <a:rPr sz="2000" b="0" i="0">
-                <a:solidFill>
-                  <a:srgbClr val="333333"/>
-                </a:solidFill>
-                <a:latin typeface="Calibri"/>
-              </a:rPr>
-              <a:t>–   Y conviene ser explicito sobre el formato de la sesion, porque es lo que decide como se prepara el estudiante: la Clase 15 se dicta en la ultima sesion del semestre (16 de noviembre) como sustentacion EN VIVO</a:t>
-            </a:r>
-          </a:p>
         </p:txBody>
       </p:sp>
       <p:sp>
@@ -5986,7 +5836,7 @@
                 </a:solidFill>
                 <a:latin typeface="Calibri"/>
               </a:rPr>
-              <a:t>–   Sincrona, con turnos de unos 6 minutos de pitch y 2 a 4 de preguntas.</a:t>
+              <a:t>–   Aqui aparece la segunda pregunta previsible del estudiante: «y si no sabemos la respuesta?».</a:t>
             </a:r>
           </a:p>
           <a:p>
@@ -6002,7 +5852,7 @@
                 </a:solidFill>
                 <a:latin typeface="Calibri"/>
               </a:rPr>
-              <a:t>–   No es clase autonoma y la defensa no se reemplaza por un video grabado, porque el Q&amp;A dirigido al azar es justamente el instrumento que verifica autoria y no tiene sustituto asincronico.</a:t>
+              <a:t>–   Y conviene ser explicito sobre el formato de la sesion, porque es lo que decide como se prepara el estudiante: la Clase 15 se dicta en la ultima sesion del semestre (16 de noviembre) como sustentacion EN VIVO</a:t>
             </a:r>
           </a:p>
           <a:p>
@@ -6018,7 +5868,7 @@
                 </a:solidFill>
                 <a:latin typeface="Calibri"/>
               </a:rPr>
-              <a:t>–   El Q&amp;A escrito que pide el taller (tres preguntas duras que el propio estudiante se haria, con su respuesta) no reemplaza nada: es la preparacion del Q&amp;A en vivo</a:t>
+              <a:t>–   Sincrona, con turnos de unos 6 minutos de pitch y 2 a 4 de preguntas.</a:t>
             </a:r>
           </a:p>
           <a:p>
@@ -6034,7 +5884,7 @@
                 </a:solidFill>
                 <a:latin typeface="Calibri"/>
               </a:rPr>
-              <a:t>–   Y en la practica el estudiante que lo escribio en serio responde mucho mejor cuando la pregunta llega de verdad.</a:t>
+              <a:t>–   No es clase autonoma y la defensa no se reemplaza por un video grabado, porque el Q&amp;A dirigido al azar es justamente el instrumento que verifica autoria y no tiene sustituto asincronico.</a:t>
             </a:r>
           </a:p>
         </p:txBody>
@@ -6215,7 +6065,7 @@
                 </a:solidFill>
                 <a:latin typeface="Calibri"/>
               </a:rPr>
-              <a:t>Evaluar con rubrica: puntos a evidencia observable (1/2)</a:t>
+              <a:t>El cierre del curso: conectar lo hecho con la practica profesional (1/2)</a:t>
             </a:r>
           </a:p>
         </p:txBody>
@@ -6254,7 +6104,7 @@
                 </a:solidFill>
                 <a:latin typeface="Calibri"/>
               </a:rPr>
-              <a:t>–   Los 100 puntos del PI CloudLite App se distribuyen asi: 15 puntos por dominio y decision IaaS/PaaS/SaaS justificada, 25 por los diagramas de arquitectura (componentes y despliegue)</a:t>
+              <a:t>–   El cierre del curso debe conectar lo hecho con la practica profesional, porque de eso depende que el estudiante conserve el material en vez de borrarlo al terminar el semestre.</a:t>
             </a:r>
           </a:p>
           <a:p>
@@ -6270,7 +6120,7 @@
                 </a:solidFill>
                 <a:latin typeface="Calibri"/>
               </a:rPr>
-              <a:t>–   20 por el lab de contenedores con Dockerfile o compose mas la captura de la sesion, 15 por el CI/CD conceptual con el workflow.yml explicado, 10 por las secciones de seguridad, costos y escalabilidad del informe, y 15 por informe y sustentacion.</a:t>
+              <a:t>–   En la industria, esta sustentacion tiene nombre propio: design review, o architecture review.</a:t>
             </a:r>
           </a:p>
           <a:p>
@@ -6286,7 +6136,7 @@
                 </a:solidFill>
                 <a:latin typeface="Calibri"/>
               </a:rPr>
-              <a:t>–   Ese reparto responde la tercera pregunta previsible: «si el diagrama esta perfecto pero presentamos mal, cuanto pierdo?».</a:t>
+              <a:t>–   Un equipo presenta una propuesta a pares y a arquitectos mas experimentados cuyo trabajo explicito es buscarle el punto debil antes de que ese punto debil cueste dinero</a:t>
             </a:r>
           </a:p>
           <a:p>
@@ -6302,7 +6152,7 @@
                 </a:solidFill>
                 <a:latin typeface="Calibri"/>
               </a:rPr>
-              <a:t>–   Directamente, hasta 15 puntos.</a:t>
+              <a:t>–   Y lo que se pregunta ahi es exactamente lo mismo que hoy, es decir que decidieron, que descartaron, que aceptaron perder, y como sabran si se equivocaron.</a:t>
             </a:r>
           </a:p>
           <a:p>
@@ -6318,7 +6168,7 @@
                 </a:solidFill>
                 <a:latin typeface="Calibri"/>
               </a:rPr>
-              <a:t>–   Indirectamente mucho mas, porque la sustentacion es el mecanismo con el que el evaluador verifica que los otros 85 puntos son de quien sustenta: un diagrama excelente que nadie puede explicar levanta una duda de autoria que ninguna diapositiva resuelve.</a:t>
+              <a:t>–   El ADR es un formato real, usado en equipos reales, no un invento academico del curso.</a:t>
             </a:r>
           </a:p>
         </p:txBody>
@@ -6499,7 +6349,7 @@
                 </a:solidFill>
                 <a:latin typeface="Calibri"/>
               </a:rPr>
-              <a:t>Evaluar con rubrica: puntos a evidencia observable (2/2)</a:t>
+              <a:t>El cierre del curso: conectar lo hecho con la practica profesional (2/2)</a:t>
             </a:r>
           </a:p>
         </p:txBody>
@@ -6538,7 +6388,7 @@
                 </a:solidFill>
                 <a:latin typeface="Calibri"/>
               </a:rPr>
-              <a:t>–   Y va el recordatorio de pesos que evita reclamos posteriores: estos 100 puntos valen 20% del Corte 3, el Parcial 3 de la Clase 14 (9 de noviembre, virtual sincrono por Meet y escrito) vale 15%, y la asistencia 5%.</a:t>
+              <a:t>–   El diagrama de contenedores, el Dockerfile y el pipeline que el estudiante escribio son los mismos artefactos que se producen con una cuenta corporativa</a:t>
             </a:r>
           </a:p>
           <a:p>
@@ -6554,7 +6404,39 @@
                 </a:solidFill>
                 <a:latin typeface="Calibri"/>
               </a:rPr>
-              <a:t>–   El proyecto no reemplaza ni compensa el parcial; son evaluaciones distintas del mismo corte, y decirlo una vez hoy ahorra tres correos la semana siguiente.</a:t>
+              <a:t>–   Lo que no se aprende en un free tier es justamente lo que si se aprendio aqui, que es razonar el trade-off.</a:t>
+            </a:r>
+          </a:p>
+          <a:p>
+            <a:pPr>
+              <a:spcAft>
+                <a:spcPts val="800"/>
+              </a:spcAft>
+            </a:pPr>
+            <a:r>
+              <a:rPr sz="2000" b="0" i="0">
+                <a:solidFill>
+                  <a:srgbClr val="333333"/>
+                </a:solidFill>
+                <a:latin typeface="Calibri"/>
+              </a:rPr>
+              <a:t>–   La frase de cierre util es que arquitectura no es una lista de logos de proveedores, sino un conjunto de decisiones documentadas con sus consecuencias.</a:t>
+            </a:r>
+          </a:p>
+          <a:p>
+            <a:pPr>
+              <a:spcAft>
+                <a:spcPts val="800"/>
+              </a:spcAft>
+            </a:pPr>
+            <a:r>
+              <a:rPr sz="2000" b="0" i="0">
+                <a:solidFill>
+                  <a:srgbClr val="333333"/>
+                </a:solidFill>
+                <a:latin typeface="Calibri"/>
+              </a:rPr>
+              <a:t>–   Y el pedido final debe ser concreto y verificable: conserven el repositorio con el informe, los diagramas y el workflow como portafolio, porque eso es lo que se muestra en una primera entrevista tecnica cuando piden un ejemplo de trabajo propio.</a:t>
             </a:r>
           </a:p>
         </p:txBody>
@@ -6629,7 +6511,7 @@
         <p:spPr>
           <a:xfrm>
             <a:off x="0" y="0"/>
-            <a:ext cx="12191695" cy="960120"/>
+            <a:ext cx="12191695" cy="1170432"/>
           </a:xfrm>
           <a:prstGeom prst="rect">
             <a:avLst/>
@@ -6671,7 +6553,7 @@
         </p:nvSpPr>
         <p:spPr>
           <a:xfrm>
-            <a:off x="0" y="960120"/>
+            <a:off x="0" y="1170432"/>
             <a:ext cx="12191695" cy="41148"/>
           </a:xfrm>
           <a:prstGeom prst="rect">
@@ -6715,7 +6597,7 @@
         <p:spPr>
           <a:xfrm>
             <a:off x="457200" y="164592"/>
-            <a:ext cx="11277295" cy="502920"/>
+            <a:ext cx="11277295" cy="384048"/>
           </a:xfrm>
           <a:prstGeom prst="rect">
             <a:avLst/>
@@ -6735,7 +6617,7 @@
                 </a:solidFill>
                 <a:latin typeface="Calibri"/>
               </a:rPr>
-              <a:t>El cierre del curso: conectar lo hecho con la practica profesional (1/2)</a:t>
+              <a:t>Del boceto al código Mermaid</a:t>
             </a:r>
           </a:p>
         </p:txBody>
@@ -6748,8 +6630,8 @@
         </p:nvSpPr>
         <p:spPr>
           <a:xfrm>
-            <a:off x="457200" y="1170432"/>
-            <a:ext cx="11277295" cy="5230368"/>
+            <a:off x="457200" y="566928"/>
+            <a:ext cx="11277295" cy="411480"/>
           </a:xfrm>
           <a:prstGeom prst="rect">
             <a:avLst/>
@@ -6762,90 +6644,705 @@
           </a:bodyPr>
           <a:lstStyle/>
           <a:p>
+            <a:r>
+              <a:rPr sz="1400" b="0" i="0">
+                <a:solidFill>
+                  <a:srgbClr val="B8D8EE"/>
+                </a:solidFill>
+                <a:latin typeface="Calibri"/>
+              </a:rPr>
+              <a:t>El diagrama se escribe como código: se versiona, se compara y se corrige</a:t>
+            </a:r>
+          </a:p>
+        </p:txBody>
+      </p:sp>
+      <p:sp>
+        <p:nvSpPr>
+          <p:cNvPr id="6" name="Rounded Rectangle 5"/>
+          <p:cNvSpPr/>
+          <p:nvPr/>
+        </p:nvSpPr>
+        <p:spPr>
+          <a:xfrm>
+            <a:off x="457200" y="1659636"/>
+            <a:ext cx="11277295" cy="1051560"/>
+          </a:xfrm>
+          <a:prstGeom prst="roundRect">
+            <a:avLst>
+              <a:gd name="adj" fmla="val 12000"/>
+            </a:avLst>
+          </a:prstGeom>
+          <a:solidFill>
+            <a:srgbClr val="F2F2F2"/>
+          </a:solidFill>
+          <a:ln>
+            <a:noFill/>
+          </a:ln>
+        </p:spPr>
+        <p:style>
+          <a:lnRef idx="1">
+            <a:schemeClr val="accent1"/>
+          </a:lnRef>
+          <a:fillRef idx="3">
+            <a:schemeClr val="accent1"/>
+          </a:fillRef>
+          <a:effectRef idx="2">
+            <a:schemeClr val="accent1"/>
+          </a:effectRef>
+          <a:fontRef idx="minor">
+            <a:schemeClr val="lt1"/>
+          </a:fontRef>
+        </p:style>
+        <p:txBody>
+          <a:bodyPr rtlCol="0" anchor="ctr"/>
+          <a:lstStyle/>
+          <a:p>
+            <a:pPr algn="ctr"/>
+          </a:p>
+        </p:txBody>
+      </p:sp>
+      <p:sp>
+        <p:nvSpPr>
+          <p:cNvPr id="7" name="Rounded Rectangle 6"/>
+          <p:cNvSpPr/>
+          <p:nvPr/>
+        </p:nvSpPr>
+        <p:spPr>
+          <a:xfrm>
+            <a:off x="594360" y="1965960"/>
+            <a:ext cx="438912" cy="438912"/>
+          </a:xfrm>
+          <a:prstGeom prst="roundRect">
+            <a:avLst>
+              <a:gd name="adj" fmla="val 12000"/>
+            </a:avLst>
+          </a:prstGeom>
+          <a:solidFill>
+            <a:srgbClr val="095292"/>
+          </a:solidFill>
+          <a:ln>
+            <a:noFill/>
+          </a:ln>
+        </p:spPr>
+        <p:style>
+          <a:lnRef idx="1">
+            <a:schemeClr val="accent1"/>
+          </a:lnRef>
+          <a:fillRef idx="3">
+            <a:schemeClr val="accent1"/>
+          </a:fillRef>
+          <a:effectRef idx="2">
+            <a:schemeClr val="accent1"/>
+          </a:effectRef>
+          <a:fontRef idx="minor">
+            <a:schemeClr val="lt1"/>
+          </a:fontRef>
+        </p:style>
+        <p:txBody>
+          <a:bodyPr rtlCol="0" anchor="ctr"/>
+          <a:lstStyle/>
+          <a:p>
+            <a:pPr algn="ctr"/>
+          </a:p>
+        </p:txBody>
+      </p:sp>
+      <p:sp>
+        <p:nvSpPr>
+          <p:cNvPr id="8" name="TextBox 7"/>
+          <p:cNvSpPr txBox="1"/>
+          <p:nvPr/>
+        </p:nvSpPr>
+        <p:spPr>
+          <a:xfrm>
+            <a:off x="594360" y="1965960"/>
+            <a:ext cx="438912" cy="438912"/>
+          </a:xfrm>
+          <a:prstGeom prst="rect">
+            <a:avLst/>
+          </a:prstGeom>
+          <a:noFill/>
+        </p:spPr>
+        <p:txBody>
+          <a:bodyPr wrap="square" anchor="ctr"/>
+          <a:lstStyle/>
+          <a:p>
+            <a:pPr algn="ctr"/>
+            <a:r>
+              <a:rPr sz="1600" b="1" i="0">
+                <a:solidFill>
+                  <a:srgbClr val="FFFFFF"/>
+                </a:solidFill>
+                <a:latin typeface="Calibri"/>
+              </a:rPr>
+              <a:t>1</a:t>
+            </a:r>
+          </a:p>
+        </p:txBody>
+      </p:sp>
+      <p:sp>
+        <p:nvSpPr>
+          <p:cNvPr id="9" name="TextBox 8"/>
+          <p:cNvSpPr txBox="1"/>
+          <p:nvPr/>
+        </p:nvSpPr>
+        <p:spPr>
+          <a:xfrm>
+            <a:off x="1188720" y="1751076"/>
+            <a:ext cx="10271455" cy="886968"/>
+          </a:xfrm>
+          <a:prstGeom prst="rect">
+            <a:avLst/>
+          </a:prstGeom>
+          <a:noFill/>
+        </p:spPr>
+        <p:txBody>
+          <a:bodyPr wrap="square" anchor="ctr"/>
+          <a:lstStyle/>
+          <a:p>
+            <a:r>
+              <a:rPr sz="1500" b="1" i="0">
+                <a:solidFill>
+                  <a:srgbClr val="095292"/>
+                </a:solidFill>
+                <a:latin typeface="Calibri"/>
+              </a:rPr>
+              <a:t>Diseña visual</a:t>
+            </a:r>
+          </a:p>
+          <a:p>
             <a:pPr>
-              <a:spcAft>
-                <a:spcPts val="800"/>
-              </a:spcAft>
+              <a:spcBef>
+                <a:spcPts val="200"/>
+              </a:spcBef>
             </a:pPr>
             <a:r>
-              <a:rPr sz="2000" b="0" i="0">
+              <a:rPr sz="1300" b="0" i="0">
                 <a:solidFill>
                   <a:srgbClr val="333333"/>
                 </a:solidFill>
                 <a:latin typeface="Calibri"/>
               </a:rPr>
-              <a:t>–   El cierre del curso debe conectar lo hecho con la practica profesional, porque de eso depende que el estudiante conserve el material en vez de borrarlo al terminar el semestre.</a:t>
+              <a:t>Dibuja el diagrama como quieras en Excalidraw o draw.io: es más rápido arrastrar cajas que escribir código, y ahí es donde se piensa el modelo.</a:t>
+            </a:r>
+          </a:p>
+        </p:txBody>
+      </p:sp>
+      <p:sp>
+        <p:nvSpPr>
+          <p:cNvPr id="10" name="Rounded Rectangle 9"/>
+          <p:cNvSpPr/>
+          <p:nvPr/>
+        </p:nvSpPr>
+        <p:spPr>
+          <a:xfrm>
+            <a:off x="457200" y="2802636"/>
+            <a:ext cx="11277295" cy="1051560"/>
+          </a:xfrm>
+          <a:prstGeom prst="roundRect">
+            <a:avLst>
+              <a:gd name="adj" fmla="val 12000"/>
+            </a:avLst>
+          </a:prstGeom>
+          <a:solidFill>
+            <a:srgbClr val="E8F4FA"/>
+          </a:solidFill>
+          <a:ln>
+            <a:noFill/>
+          </a:ln>
+        </p:spPr>
+        <p:style>
+          <a:lnRef idx="1">
+            <a:schemeClr val="accent1"/>
+          </a:lnRef>
+          <a:fillRef idx="3">
+            <a:schemeClr val="accent1"/>
+          </a:fillRef>
+          <a:effectRef idx="2">
+            <a:schemeClr val="accent1"/>
+          </a:effectRef>
+          <a:fontRef idx="minor">
+            <a:schemeClr val="lt1"/>
+          </a:fontRef>
+        </p:style>
+        <p:txBody>
+          <a:bodyPr rtlCol="0" anchor="ctr"/>
+          <a:lstStyle/>
+          <a:p>
+            <a:pPr algn="ctr"/>
+          </a:p>
+        </p:txBody>
+      </p:sp>
+      <p:sp>
+        <p:nvSpPr>
+          <p:cNvPr id="11" name="Rounded Rectangle 10"/>
+          <p:cNvSpPr/>
+          <p:nvPr/>
+        </p:nvSpPr>
+        <p:spPr>
+          <a:xfrm>
+            <a:off x="594360" y="3108960"/>
+            <a:ext cx="438912" cy="438912"/>
+          </a:xfrm>
+          <a:prstGeom prst="roundRect">
+            <a:avLst>
+              <a:gd name="adj" fmla="val 12000"/>
+            </a:avLst>
+          </a:prstGeom>
+          <a:solidFill>
+            <a:srgbClr val="095292"/>
+          </a:solidFill>
+          <a:ln>
+            <a:noFill/>
+          </a:ln>
+        </p:spPr>
+        <p:style>
+          <a:lnRef idx="1">
+            <a:schemeClr val="accent1"/>
+          </a:lnRef>
+          <a:fillRef idx="3">
+            <a:schemeClr val="accent1"/>
+          </a:fillRef>
+          <a:effectRef idx="2">
+            <a:schemeClr val="accent1"/>
+          </a:effectRef>
+          <a:fontRef idx="minor">
+            <a:schemeClr val="lt1"/>
+          </a:fontRef>
+        </p:style>
+        <p:txBody>
+          <a:bodyPr rtlCol="0" anchor="ctr"/>
+          <a:lstStyle/>
+          <a:p>
+            <a:pPr algn="ctr"/>
+          </a:p>
+        </p:txBody>
+      </p:sp>
+      <p:sp>
+        <p:nvSpPr>
+          <p:cNvPr id="12" name="TextBox 11"/>
+          <p:cNvSpPr txBox="1"/>
+          <p:nvPr/>
+        </p:nvSpPr>
+        <p:spPr>
+          <a:xfrm>
+            <a:off x="594360" y="3108960"/>
+            <a:ext cx="438912" cy="438912"/>
+          </a:xfrm>
+          <a:prstGeom prst="rect">
+            <a:avLst/>
+          </a:prstGeom>
+          <a:noFill/>
+        </p:spPr>
+        <p:txBody>
+          <a:bodyPr wrap="square" anchor="ctr"/>
+          <a:lstStyle/>
+          <a:p>
+            <a:pPr algn="ctr"/>
+            <a:r>
+              <a:rPr sz="1600" b="1" i="0">
+                <a:solidFill>
+                  <a:srgbClr val="FFFFFF"/>
+                </a:solidFill>
+                <a:latin typeface="Calibri"/>
+              </a:rPr>
+              <a:t>2</a:t>
+            </a:r>
+          </a:p>
+        </p:txBody>
+      </p:sp>
+      <p:sp>
+        <p:nvSpPr>
+          <p:cNvPr id="13" name="TextBox 12"/>
+          <p:cNvSpPr txBox="1"/>
+          <p:nvPr/>
+        </p:nvSpPr>
+        <p:spPr>
+          <a:xfrm>
+            <a:off x="1188720" y="2894076"/>
+            <a:ext cx="10271455" cy="886968"/>
+          </a:xfrm>
+          <a:prstGeom prst="rect">
+            <a:avLst/>
+          </a:prstGeom>
+          <a:noFill/>
+        </p:spPr>
+        <p:txBody>
+          <a:bodyPr wrap="square" anchor="ctr"/>
+          <a:lstStyle/>
+          <a:p>
+            <a:r>
+              <a:rPr sz="1500" b="1" i="0">
+                <a:solidFill>
+                  <a:srgbClr val="095292"/>
+                </a:solidFill>
+                <a:latin typeface="Calibri"/>
+              </a:rPr>
+              <a:t>Traduce con IA</a:t>
             </a:r>
           </a:p>
           <a:p>
             <a:pPr>
-              <a:spcAft>
-                <a:spcPts val="800"/>
-              </a:spcAft>
+              <a:spcBef>
+                <a:spcPts val="200"/>
+              </a:spcBef>
             </a:pPr>
             <a:r>
-              <a:rPr sz="2000" b="0" i="0">
+              <a:rPr sz="1300" b="0" i="0">
                 <a:solidFill>
                   <a:srgbClr val="333333"/>
                 </a:solidFill>
                 <a:latin typeface="Calibri"/>
               </a:rPr>
-              <a:t>–   En la industria, esta sustentacion tiene nombre propio: design review, o architecture review.</a:t>
+              <a:t>Describe tu boceto a una IA y pídele el código Mermaid usando flowchart. Revisa el resultado: la IA acierta la sintaxis, no tu modelo.</a:t>
+            </a:r>
+          </a:p>
+        </p:txBody>
+      </p:sp>
+      <p:sp>
+        <p:nvSpPr>
+          <p:cNvPr id="14" name="Rounded Rectangle 13"/>
+          <p:cNvSpPr/>
+          <p:nvPr/>
+        </p:nvSpPr>
+        <p:spPr>
+          <a:xfrm>
+            <a:off x="457200" y="3945636"/>
+            <a:ext cx="11277295" cy="1051560"/>
+          </a:xfrm>
+          <a:prstGeom prst="roundRect">
+            <a:avLst>
+              <a:gd name="adj" fmla="val 12000"/>
+            </a:avLst>
+          </a:prstGeom>
+          <a:solidFill>
+            <a:srgbClr val="F2F2F2"/>
+          </a:solidFill>
+          <a:ln>
+            <a:noFill/>
+          </a:ln>
+        </p:spPr>
+        <p:style>
+          <a:lnRef idx="1">
+            <a:schemeClr val="accent1"/>
+          </a:lnRef>
+          <a:fillRef idx="3">
+            <a:schemeClr val="accent1"/>
+          </a:fillRef>
+          <a:effectRef idx="2">
+            <a:schemeClr val="accent1"/>
+          </a:effectRef>
+          <a:fontRef idx="minor">
+            <a:schemeClr val="lt1"/>
+          </a:fontRef>
+        </p:style>
+        <p:txBody>
+          <a:bodyPr rtlCol="0" anchor="ctr"/>
+          <a:lstStyle/>
+          <a:p>
+            <a:pPr algn="ctr"/>
+          </a:p>
+        </p:txBody>
+      </p:sp>
+      <p:sp>
+        <p:nvSpPr>
+          <p:cNvPr id="15" name="Rounded Rectangle 14"/>
+          <p:cNvSpPr/>
+          <p:nvPr/>
+        </p:nvSpPr>
+        <p:spPr>
+          <a:xfrm>
+            <a:off x="594360" y="4251960"/>
+            <a:ext cx="438912" cy="438912"/>
+          </a:xfrm>
+          <a:prstGeom prst="roundRect">
+            <a:avLst>
+              <a:gd name="adj" fmla="val 12000"/>
+            </a:avLst>
+          </a:prstGeom>
+          <a:solidFill>
+            <a:srgbClr val="095292"/>
+          </a:solidFill>
+          <a:ln>
+            <a:noFill/>
+          </a:ln>
+        </p:spPr>
+        <p:style>
+          <a:lnRef idx="1">
+            <a:schemeClr val="accent1"/>
+          </a:lnRef>
+          <a:fillRef idx="3">
+            <a:schemeClr val="accent1"/>
+          </a:fillRef>
+          <a:effectRef idx="2">
+            <a:schemeClr val="accent1"/>
+          </a:effectRef>
+          <a:fontRef idx="minor">
+            <a:schemeClr val="lt1"/>
+          </a:fontRef>
+        </p:style>
+        <p:txBody>
+          <a:bodyPr rtlCol="0" anchor="ctr"/>
+          <a:lstStyle/>
+          <a:p>
+            <a:pPr algn="ctr"/>
+          </a:p>
+        </p:txBody>
+      </p:sp>
+      <p:sp>
+        <p:nvSpPr>
+          <p:cNvPr id="16" name="TextBox 15"/>
+          <p:cNvSpPr txBox="1"/>
+          <p:nvPr/>
+        </p:nvSpPr>
+        <p:spPr>
+          <a:xfrm>
+            <a:off x="594360" y="4251960"/>
+            <a:ext cx="438912" cy="438912"/>
+          </a:xfrm>
+          <a:prstGeom prst="rect">
+            <a:avLst/>
+          </a:prstGeom>
+          <a:noFill/>
+        </p:spPr>
+        <p:txBody>
+          <a:bodyPr wrap="square" anchor="ctr"/>
+          <a:lstStyle/>
+          <a:p>
+            <a:pPr algn="ctr"/>
+            <a:r>
+              <a:rPr sz="1600" b="1" i="0">
+                <a:solidFill>
+                  <a:srgbClr val="FFFFFF"/>
+                </a:solidFill>
+                <a:latin typeface="Calibri"/>
+              </a:rPr>
+              <a:t>3</a:t>
+            </a:r>
+          </a:p>
+        </p:txBody>
+      </p:sp>
+      <p:sp>
+        <p:nvSpPr>
+          <p:cNvPr id="17" name="TextBox 16"/>
+          <p:cNvSpPr txBox="1"/>
+          <p:nvPr/>
+        </p:nvSpPr>
+        <p:spPr>
+          <a:xfrm>
+            <a:off x="1188720" y="4037076"/>
+            <a:ext cx="10271455" cy="886968"/>
+          </a:xfrm>
+          <a:prstGeom prst="rect">
+            <a:avLst/>
+          </a:prstGeom>
+          <a:noFill/>
+        </p:spPr>
+        <p:txBody>
+          <a:bodyPr wrap="square" anchor="ctr"/>
+          <a:lstStyle/>
+          <a:p>
+            <a:r>
+              <a:rPr sz="1500" b="1" i="0">
+                <a:solidFill>
+                  <a:srgbClr val="095292"/>
+                </a:solidFill>
+                <a:latin typeface="Calibri"/>
+              </a:rPr>
+              <a:t>Renderiza en un visor</a:t>
             </a:r>
           </a:p>
           <a:p>
             <a:pPr>
-              <a:spcAft>
-                <a:spcPts val="800"/>
-              </a:spcAft>
+              <a:spcBef>
+                <a:spcPts val="200"/>
+              </a:spcBef>
             </a:pPr>
             <a:r>
-              <a:rPr sz="2000" b="0" i="0">
+              <a:rPr sz="1300" b="0" i="0">
                 <a:solidFill>
                   <a:srgbClr val="333333"/>
                 </a:solidFill>
                 <a:latin typeface="Calibri"/>
               </a:rPr>
-              <a:t>–   Un equipo presenta una propuesta a pares y a arquitectos mas experimentados cuyo trabajo explicito es buscarle el punto debil antes de que ese punto debil cueste dinero</a:t>
+              <a:t>Pega el código en un visor Mermaid (mermaid.live o la vista previa de tu editor) y míralo dibujado. Si no renderiza, corrige ahí: un end faltante o un rótulo sin comillas.</a:t>
+            </a:r>
+          </a:p>
+        </p:txBody>
+      </p:sp>
+      <p:sp>
+        <p:nvSpPr>
+          <p:cNvPr id="18" name="Rounded Rectangle 17"/>
+          <p:cNvSpPr/>
+          <p:nvPr/>
+        </p:nvSpPr>
+        <p:spPr>
+          <a:xfrm>
+            <a:off x="457200" y="5088636"/>
+            <a:ext cx="11277295" cy="1051560"/>
+          </a:xfrm>
+          <a:prstGeom prst="roundRect">
+            <a:avLst>
+              <a:gd name="adj" fmla="val 12000"/>
+            </a:avLst>
+          </a:prstGeom>
+          <a:solidFill>
+            <a:srgbClr val="E8F4FA"/>
+          </a:solidFill>
+          <a:ln>
+            <a:noFill/>
+          </a:ln>
+        </p:spPr>
+        <p:style>
+          <a:lnRef idx="1">
+            <a:schemeClr val="accent1"/>
+          </a:lnRef>
+          <a:fillRef idx="3">
+            <a:schemeClr val="accent1"/>
+          </a:fillRef>
+          <a:effectRef idx="2">
+            <a:schemeClr val="accent1"/>
+          </a:effectRef>
+          <a:fontRef idx="minor">
+            <a:schemeClr val="lt1"/>
+          </a:fontRef>
+        </p:style>
+        <p:txBody>
+          <a:bodyPr rtlCol="0" anchor="ctr"/>
+          <a:lstStyle/>
+          <a:p>
+            <a:pPr algn="ctr"/>
+          </a:p>
+        </p:txBody>
+      </p:sp>
+      <p:sp>
+        <p:nvSpPr>
+          <p:cNvPr id="19" name="Rounded Rectangle 18"/>
+          <p:cNvSpPr/>
+          <p:nvPr/>
+        </p:nvSpPr>
+        <p:spPr>
+          <a:xfrm>
+            <a:off x="594360" y="5394960"/>
+            <a:ext cx="438912" cy="438912"/>
+          </a:xfrm>
+          <a:prstGeom prst="roundRect">
+            <a:avLst>
+              <a:gd name="adj" fmla="val 12000"/>
+            </a:avLst>
+          </a:prstGeom>
+          <a:solidFill>
+            <a:srgbClr val="095292"/>
+          </a:solidFill>
+          <a:ln>
+            <a:noFill/>
+          </a:ln>
+        </p:spPr>
+        <p:style>
+          <a:lnRef idx="1">
+            <a:schemeClr val="accent1"/>
+          </a:lnRef>
+          <a:fillRef idx="3">
+            <a:schemeClr val="accent1"/>
+          </a:fillRef>
+          <a:effectRef idx="2">
+            <a:schemeClr val="accent1"/>
+          </a:effectRef>
+          <a:fontRef idx="minor">
+            <a:schemeClr val="lt1"/>
+          </a:fontRef>
+        </p:style>
+        <p:txBody>
+          <a:bodyPr rtlCol="0" anchor="ctr"/>
+          <a:lstStyle/>
+          <a:p>
+            <a:pPr algn="ctr"/>
+          </a:p>
+        </p:txBody>
+      </p:sp>
+      <p:sp>
+        <p:nvSpPr>
+          <p:cNvPr id="20" name="TextBox 19"/>
+          <p:cNvSpPr txBox="1"/>
+          <p:nvPr/>
+        </p:nvSpPr>
+        <p:spPr>
+          <a:xfrm>
+            <a:off x="594360" y="5394960"/>
+            <a:ext cx="438912" cy="438912"/>
+          </a:xfrm>
+          <a:prstGeom prst="rect">
+            <a:avLst/>
+          </a:prstGeom>
+          <a:noFill/>
+        </p:spPr>
+        <p:txBody>
+          <a:bodyPr wrap="square" anchor="ctr"/>
+          <a:lstStyle/>
+          <a:p>
+            <a:pPr algn="ctr"/>
+            <a:r>
+              <a:rPr sz="1600" b="1" i="0">
+                <a:solidFill>
+                  <a:srgbClr val="FFFFFF"/>
+                </a:solidFill>
+                <a:latin typeface="Calibri"/>
+              </a:rPr>
+              <a:t>4</a:t>
+            </a:r>
+          </a:p>
+        </p:txBody>
+      </p:sp>
+      <p:sp>
+        <p:nvSpPr>
+          <p:cNvPr id="21" name="TextBox 20"/>
+          <p:cNvSpPr txBox="1"/>
+          <p:nvPr/>
+        </p:nvSpPr>
+        <p:spPr>
+          <a:xfrm>
+            <a:off x="1188720" y="5180076"/>
+            <a:ext cx="10271455" cy="886968"/>
+          </a:xfrm>
+          <a:prstGeom prst="rect">
+            <a:avLst/>
+          </a:prstGeom>
+          <a:noFill/>
+        </p:spPr>
+        <p:txBody>
+          <a:bodyPr wrap="square" anchor="ctr"/>
+          <a:lstStyle/>
+          <a:p>
+            <a:r>
+              <a:rPr sz="1500" b="1" i="0">
+                <a:solidFill>
+                  <a:srgbClr val="095292"/>
+                </a:solidFill>
+                <a:latin typeface="Calibri"/>
+              </a:rPr>
+              <a:t>Guarda código e imagen</a:t>
             </a:r>
           </a:p>
           <a:p>
             <a:pPr>
-              <a:spcAft>
-                <a:spcPts val="800"/>
-              </a:spcAft>
+              <a:spcBef>
+                <a:spcPts val="200"/>
+              </a:spcBef>
             </a:pPr>
             <a:r>
-              <a:rPr sz="2000" b="0" i="0">
+              <a:rPr sz="1300" b="0" i="0">
                 <a:solidFill>
                   <a:srgbClr val="333333"/>
                 </a:solidFill>
                 <a:latin typeface="Calibri"/>
               </a:rPr>
-              <a:t>–   Y lo que se pregunta ahi es exactamente lo mismo que hoy, es decir que decidieron, que descartaron, que aceptaron perder, y como sabran si se equivocaron.</a:t>
-            </a:r>
-          </a:p>
-          <a:p>
-            <a:pPr>
-              <a:spcAft>
-                <a:spcPts val="800"/>
-              </a:spcAft>
-            </a:pPr>
-            <a:r>
-              <a:rPr sz="2000" b="0" i="0">
-                <a:solidFill>
-                  <a:srgbClr val="333333"/>
-                </a:solidFill>
-                <a:latin typeface="Calibri"/>
-              </a:rPr>
-              <a:t>–   El ADR es un formato real, usado en equipos reales, no un invento academico del curso.</a:t>
-            </a:r>
-          </a:p>
-        </p:txBody>
-      </p:sp>
-      <p:sp>
-        <p:nvSpPr>
-          <p:cNvPr id="6" name="TextBox 5"/>
+              <a:t>El código es la fuente del diagrama: guárdalo con tu proyecto junto con el PNG exportado.</a:t>
+            </a:r>
+          </a:p>
+        </p:txBody>
+      </p:sp>
+      <p:sp>
+        <p:nvSpPr>
+          <p:cNvPr id="22" name="TextBox 21"/>
           <p:cNvSpPr txBox="1"/>
           <p:nvPr/>
         </p:nvSpPr>
@@ -6913,13 +7410,13 @@
         <p:spPr>
           <a:xfrm>
             <a:off x="0" y="0"/>
-            <a:ext cx="12191695" cy="960120"/>
+            <a:ext cx="12191695" cy="164592"/>
           </a:xfrm>
           <a:prstGeom prst="rect">
             <a:avLst/>
           </a:prstGeom>
           <a:solidFill>
-            <a:srgbClr val="095292"/>
+            <a:srgbClr val="269CCB"/>
           </a:solidFill>
           <a:ln>
             <a:noFill/>
@@ -6947,49 +7444,30 @@
           </a:p>
         </p:txBody>
       </p:sp>
-      <p:sp>
-        <p:nvSpPr>
-          <p:cNvPr id="3" name="Rectangle 2"/>
-          <p:cNvSpPr/>
-          <p:nvPr/>
-        </p:nvSpPr>
-        <p:spPr>
-          <a:xfrm>
-            <a:off x="0" y="960120"/>
-            <a:ext cx="12191695" cy="41148"/>
-          </a:xfrm>
-          <a:prstGeom prst="rect">
-            <a:avLst/>
-          </a:prstGeom>
-          <a:solidFill>
-            <a:srgbClr val="FFD000"/>
-          </a:solidFill>
-          <a:ln>
-            <a:noFill/>
-          </a:ln>
-        </p:spPr>
-        <p:style>
-          <a:lnRef idx="1">
-            <a:schemeClr val="accent1"/>
-          </a:lnRef>
-          <a:fillRef idx="3">
-            <a:schemeClr val="accent1"/>
-          </a:fillRef>
-          <a:effectRef idx="2">
-            <a:schemeClr val="accent1"/>
-          </a:effectRef>
-          <a:fontRef idx="minor">
-            <a:schemeClr val="lt1"/>
-          </a:fontRef>
-        </p:style>
-        <p:txBody>
-          <a:bodyPr rtlCol="0" anchor="ctr"/>
-          <a:lstStyle/>
-          <a:p>
-            <a:pPr algn="ctr"/>
-          </a:p>
-        </p:txBody>
-      </p:sp>
+      <p:pic>
+        <p:nvPicPr>
+          <p:cNvPr id="3" name="Picture 2" descr="logo_uniajc_color.png"/>
+          <p:cNvPicPr>
+            <a:picLocks noChangeAspect="1"/>
+          </p:cNvPicPr>
+          <p:nvPr/>
+        </p:nvPicPr>
+        <p:blipFill>
+          <a:blip r:embed="rId2"/>
+          <a:stretch>
+            <a:fillRect/>
+          </a:stretch>
+        </p:blipFill>
+        <p:spPr>
+          <a:xfrm>
+            <a:off x="10271455" y="5998464"/>
+            <a:ext cx="1463040" cy="643233"/>
+          </a:xfrm>
+          <a:prstGeom prst="rect">
+            <a:avLst/>
+          </a:prstGeom>
+        </p:spPr>
+      </p:pic>
       <p:sp>
         <p:nvSpPr>
           <p:cNvPr id="4" name="TextBox 3"/>
@@ -6998,8 +7476,41 @@
         </p:nvSpPr>
         <p:spPr>
           <a:xfrm>
-            <a:off x="457200" y="164592"/>
-            <a:ext cx="11277295" cy="502920"/>
+            <a:off x="457200" y="1737360"/>
+            <a:ext cx="11277295" cy="1097280"/>
+          </a:xfrm>
+          <a:prstGeom prst="rect">
+            <a:avLst/>
+          </a:prstGeom>
+          <a:noFill/>
+        </p:spPr>
+        <p:txBody>
+          <a:bodyPr wrap="square" anchor="ctr"/>
+          <a:lstStyle/>
+          <a:p>
+            <a:pPr algn="ctr"/>
+            <a:r>
+              <a:rPr sz="3400" b="1" i="0">
+                <a:solidFill>
+                  <a:srgbClr val="095292"/>
+                </a:solidFill>
+                <a:latin typeface="Calibri"/>
+              </a:rPr>
+              <a:t>Clase 15 · cierre del curso</a:t>
+            </a:r>
+          </a:p>
+        </p:txBody>
+      </p:sp>
+      <p:sp>
+        <p:nvSpPr>
+          <p:cNvPr id="5" name="TextBox 4"/>
+          <p:cNvSpPr txBox="1"/>
+          <p:nvPr/>
+        </p:nvSpPr>
+        <p:spPr>
+          <a:xfrm>
+            <a:off x="457200" y="3017520"/>
+            <a:ext cx="11277295" cy="1645920"/>
           </a:xfrm>
           <a:prstGeom prst="rect">
             <a:avLst/>
@@ -7012,28 +7523,65 @@
           </a:bodyPr>
           <a:lstStyle/>
           <a:p>
-            <a:r>
-              <a:rPr sz="2600" b="1" i="0">
-                <a:solidFill>
-                  <a:srgbClr val="FFFFFF"/>
-                </a:solidFill>
-                <a:latin typeface="Calibri"/>
-              </a:rPr>
-              <a:t>El cierre del curso: conectar lo hecho con la practica profesional (2/2)</a:t>
-            </a:r>
-          </a:p>
-        </p:txBody>
-      </p:sp>
-      <p:sp>
-        <p:nvSpPr>
-          <p:cNvPr id="5" name="TextBox 4"/>
+            <a:pPr algn="ctr">
+              <a:spcAft>
+                <a:spcPts val="600"/>
+              </a:spcAft>
+            </a:pPr>
+            <a:r>
+              <a:rPr sz="1600" b="0" i="0">
+                <a:solidFill>
+                  <a:srgbClr val="333333"/>
+                </a:solidFill>
+                <a:latin typeface="Calibri"/>
+              </a:rPr>
+              <a:t>Arquitectura = decisiones estructurales con sus razones y consecuencias</a:t>
+            </a:r>
+          </a:p>
+          <a:p>
+            <a:pPr algn="ctr">
+              <a:spcAft>
+                <a:spcPts val="600"/>
+              </a:spcAft>
+            </a:pPr>
+            <a:r>
+              <a:rPr sz="1600" b="0" i="0">
+                <a:solidFill>
+                  <a:srgbClr val="333333"/>
+                </a:solidFill>
+                <a:latin typeface="Calibri"/>
+              </a:rPr>
+              <a:t>Context, Containers y Deployment cuentan el mismo sistema desde tres ángulos</a:t>
+            </a:r>
+          </a:p>
+          <a:p>
+            <a:pPr algn="ctr">
+              <a:spcAft>
+                <a:spcPts val="600"/>
+              </a:spcAft>
+            </a:pPr>
+            <a:r>
+              <a:rPr sz="1600" b="0" i="0">
+                <a:solidFill>
+                  <a:srgbClr val="333333"/>
+                </a:solidFill>
+                <a:latin typeface="Calibri"/>
+              </a:rPr>
+              <a:t>Conserva el repo (informe, diagramas, Dockerfile, ci.yml) como portafolio</a:t>
+            </a:r>
+          </a:p>
+        </p:txBody>
+      </p:sp>
+      <p:sp>
+        <p:nvSpPr>
+          <p:cNvPr id="6" name="TextBox 5"/>
           <p:cNvSpPr txBox="1"/>
           <p:nvPr/>
         </p:nvSpPr>
         <p:spPr>
           <a:xfrm>
-            <a:off x="457200" y="1170432"/>
-            <a:ext cx="11277295" cy="5230368"/>
+            <a:off x="457200" y="4754880"/>
+            <a:ext cx="11277295" cy="640080"/>
           </a:xfrm>
           <a:prstGeom prst="rect">
             <a:avLst/>
@@ -7046,102 +7594,15 @@
           </a:bodyPr>
           <a:lstStyle/>
           <a:p>
-            <a:pPr>
-              <a:spcAft>
-                <a:spcPts val="800"/>
-              </a:spcAft>
-            </a:pPr>
-            <a:r>
-              <a:rPr sz="2000" b="0" i="0">
-                <a:solidFill>
-                  <a:srgbClr val="333333"/>
-                </a:solidFill>
-                <a:latin typeface="Calibri"/>
-              </a:rPr>
-              <a:t>–   El diagrama de contenedores, el Dockerfile y el pipeline que el estudiante escribio son los mismos artefactos que se producen con una cuenta corporativa</a:t>
-            </a:r>
-          </a:p>
-          <a:p>
-            <a:pPr>
-              <a:spcAft>
-                <a:spcPts val="800"/>
-              </a:spcAft>
-            </a:pPr>
-            <a:r>
-              <a:rPr sz="2000" b="0" i="0">
-                <a:solidFill>
-                  <a:srgbClr val="333333"/>
-                </a:solidFill>
-                <a:latin typeface="Calibri"/>
-              </a:rPr>
-              <a:t>–   Lo que no se aprende en un free tier es justamente lo que si se aprendio aqui, que es razonar el trade-off.</a:t>
-            </a:r>
-          </a:p>
-          <a:p>
-            <a:pPr>
-              <a:spcAft>
-                <a:spcPts val="800"/>
-              </a:spcAft>
-            </a:pPr>
-            <a:r>
-              <a:rPr sz="2000" b="0" i="0">
-                <a:solidFill>
-                  <a:srgbClr val="333333"/>
-                </a:solidFill>
-                <a:latin typeface="Calibri"/>
-              </a:rPr>
-              <a:t>–   La frase de cierre util es que arquitectura no es una lista de logos de proveedores, sino un conjunto de decisiones documentadas con sus consecuencias.</a:t>
-            </a:r>
-          </a:p>
-          <a:p>
-            <a:pPr>
-              <a:spcAft>
-                <a:spcPts val="800"/>
-              </a:spcAft>
-            </a:pPr>
-            <a:r>
-              <a:rPr sz="2000" b="0" i="0">
-                <a:solidFill>
-                  <a:srgbClr val="333333"/>
-                </a:solidFill>
-                <a:latin typeface="Calibri"/>
-              </a:rPr>
-              <a:t>–   Y el pedido final debe ser concreto y verificable: conserven el repositorio con el informe, los diagramas y el workflow como portafolio, porque eso es lo que se muestra en una primera entrevista tecnica cuando piden un ejemplo de trabajo propio.</a:t>
-            </a:r>
-          </a:p>
-        </p:txBody>
-      </p:sp>
-      <p:sp>
-        <p:nvSpPr>
-          <p:cNvPr id="6" name="TextBox 5"/>
-          <p:cNvSpPr txBox="1"/>
-          <p:nvPr/>
-        </p:nvSpPr>
-        <p:spPr>
-          <a:xfrm>
-            <a:off x="11185855" y="6473952"/>
-            <a:ext cx="640080" cy="274320"/>
-          </a:xfrm>
-          <a:prstGeom prst="rect">
-            <a:avLst/>
-          </a:prstGeom>
-          <a:noFill/>
-        </p:spPr>
-        <p:txBody>
-          <a:bodyPr wrap="square">
-            <a:spAutoFit/>
-          </a:bodyPr>
-          <a:lstStyle/>
-          <a:p>
-            <a:pPr algn="r"/>
-            <a:r>
-              <a:rPr sz="1100" b="0" i="0">
-                <a:solidFill>
-                  <a:srgbClr val="666666"/>
-                </a:solidFill>
-                <a:latin typeface="Calibri"/>
-              </a:rPr>
-              <a:t>19</a:t>
+            <a:pPr algn="ctr"/>
+            <a:r>
+              <a:rPr sz="2000" b="1" i="0">
+                <a:solidFill>
+                  <a:srgbClr val="269CCB"/>
+                </a:solidFill>
+                <a:latin typeface="Calibri"/>
+              </a:rPr>
+              <a:t>Arquitectura = decisiones documentadas con sus consecuencias</a:t>
             </a:r>
           </a:p>
         </p:txBody>
@@ -7344,7 +7805,7 @@
                 </a:solidFill>
                 <a:latin typeface="Calibri"/>
               </a:rPr>
-              <a:t> Encuadre + sorteo del orden de turnos.</a:t>
+              <a:t> Encuadre: sustentar no es describir.</a:t>
             </a:r>
           </a:p>
           <a:p>
@@ -7369,25 +7830,7 @@
                 </a:solidFill>
                 <a:latin typeface="Calibri"/>
               </a:rPr>
-              <a:t> Sustentaciones: </a:t>
-            </a:r>
-            <a:r>
-              <a:rPr sz="2000" b="1" i="0">
-                <a:solidFill>
-                  <a:srgbClr val="333333"/>
-                </a:solidFill>
-                <a:latin typeface="Calibri"/>
-              </a:rPr>
-              <a:t>6 min de pitch + 2–4 min de Q&amp;A</a:t>
-            </a:r>
-            <a:r>
-              <a:rPr sz="2000" b="0" i="0">
-                <a:solidFill>
-                  <a:srgbClr val="333333"/>
-                </a:solidFill>
-                <a:latin typeface="Calibri"/>
-              </a:rPr>
-              <a:t> por turno.</a:t>
+              <a:t> Presentaciones en vivo: pitch corto y preguntas técnicas.</a:t>
             </a:r>
           </a:p>
           <a:p>
@@ -7412,75 +7855,7 @@
                 </a:solidFill>
                 <a:latin typeface="Calibri"/>
               </a:rPr>
-              <a:t> Cierre del curso.</a:t>
-            </a:r>
-          </a:p>
-          <a:p>
-            <a:pPr>
-              <a:spcAft>
-                <a:spcPts val="800"/>
-              </a:spcAft>
-            </a:pPr>
-            <a:r>
-              <a:rPr sz="2000" b="0" i="0">
-                <a:solidFill>
-                  <a:srgbClr val="333333"/>
-                </a:solidFill>
-                <a:latin typeface="Calibri"/>
-              </a:rPr>
-              <a:t>–   El paquete debe estar </a:t>
-            </a:r>
-            <a:r>
-              <a:rPr sz="2000" b="1" i="0">
-                <a:solidFill>
-                  <a:srgbClr val="333333"/>
-                </a:solidFill>
-                <a:latin typeface="Calibri"/>
-              </a:rPr>
-              <a:t>subido a la plataforma del curso antes</a:t>
-            </a:r>
-            <a:r>
-              <a:rPr sz="2000" b="0" i="0">
-                <a:solidFill>
-                  <a:srgbClr val="333333"/>
-                </a:solidFill>
-                <a:latin typeface="Calibri"/>
-              </a:rPr>
-              <a:t> de tu turno.</a:t>
-            </a:r>
-          </a:p>
-          <a:p>
-            <a:pPr>
-              <a:spcAft>
-                <a:spcPts val="800"/>
-              </a:spcAft>
-            </a:pPr>
-            <a:r>
-              <a:rPr sz="2000" b="0" i="0">
-                <a:solidFill>
-                  <a:srgbClr val="333333"/>
-                </a:solidFill>
-                <a:latin typeface="Calibri"/>
-              </a:rPr>
-              <a:t>–   Sesión </a:t>
-            </a:r>
-            <a:r>
-              <a:rPr sz="2000" b="1" i="0">
-                <a:solidFill>
-                  <a:srgbClr val="333333"/>
-                </a:solidFill>
-                <a:latin typeface="Calibri"/>
-              </a:rPr>
-              <a:t>síncrona</a:t>
-            </a:r>
-            <a:r>
-              <a:rPr sz="2000" b="0" i="0">
-                <a:solidFill>
-                  <a:srgbClr val="333333"/>
-                </a:solidFill>
-                <a:latin typeface="Calibri"/>
-              </a:rPr>
-              <a:t>: la defensa no se reemplaza por video grabado.</a:t>
+              <a:t> Cierre del curso: lo aprendido y la práctica profesional.</a:t>
             </a:r>
           </a:p>
         </p:txBody>
@@ -7516,238 +7891,6 @@
                 <a:latin typeface="Calibri"/>
               </a:rPr>
               <a:t>2</a:t>
-            </a:r>
-          </a:p>
-        </p:txBody>
-      </p:sp>
-    </p:spTree>
-  </p:cSld>
-  <p:clrMapOvr>
-    <a:masterClrMapping/>
-  </p:clrMapOvr>
-</p:sld>
-</file>
-
-<file path=ppt/slides/slide20.xml><?xml version="1.0" encoding="utf-8"?>
-<p:sld xmlns:a="http://schemas.openxmlformats.org/drawingml/2006/main" xmlns:p="http://schemas.openxmlformats.org/presentationml/2006/main" xmlns:r="http://schemas.openxmlformats.org/officeDocument/2006/relationships">
-  <p:cSld>
-    <p:bg>
-      <p:bgPr>
-        <a:solidFill>
-          <a:srgbClr val="FFFFFF"/>
-        </a:solidFill>
-        <a:effectLst/>
-      </p:bgPr>
-    </p:bg>
-    <p:spTree>
-      <p:nvGrpSpPr>
-        <p:cNvPr id="1" name=""/>
-        <p:cNvGrpSpPr/>
-        <p:nvPr/>
-      </p:nvGrpSpPr>
-      <p:grpSpPr/>
-      <p:sp>
-        <p:nvSpPr>
-          <p:cNvPr id="2" name="Rectangle 1"/>
-          <p:cNvSpPr/>
-          <p:nvPr/>
-        </p:nvSpPr>
-        <p:spPr>
-          <a:xfrm>
-            <a:off x="0" y="0"/>
-            <a:ext cx="12191695" cy="164592"/>
-          </a:xfrm>
-          <a:prstGeom prst="rect">
-            <a:avLst/>
-          </a:prstGeom>
-          <a:solidFill>
-            <a:srgbClr val="269CCB"/>
-          </a:solidFill>
-          <a:ln>
-            <a:noFill/>
-          </a:ln>
-        </p:spPr>
-        <p:style>
-          <a:lnRef idx="1">
-            <a:schemeClr val="accent1"/>
-          </a:lnRef>
-          <a:fillRef idx="3">
-            <a:schemeClr val="accent1"/>
-          </a:fillRef>
-          <a:effectRef idx="2">
-            <a:schemeClr val="accent1"/>
-          </a:effectRef>
-          <a:fontRef idx="minor">
-            <a:schemeClr val="lt1"/>
-          </a:fontRef>
-        </p:style>
-        <p:txBody>
-          <a:bodyPr rtlCol="0" anchor="ctr"/>
-          <a:lstStyle/>
-          <a:p>
-            <a:pPr algn="ctr"/>
-          </a:p>
-        </p:txBody>
-      </p:sp>
-      <p:pic>
-        <p:nvPicPr>
-          <p:cNvPr id="3" name="Picture 2" descr="logo_uniajc_color.png"/>
-          <p:cNvPicPr>
-            <a:picLocks noChangeAspect="1"/>
-          </p:cNvPicPr>
-          <p:nvPr/>
-        </p:nvPicPr>
-        <p:blipFill>
-          <a:blip r:embed="rId2"/>
-          <a:stretch>
-            <a:fillRect/>
-          </a:stretch>
-        </p:blipFill>
-        <p:spPr>
-          <a:xfrm>
-            <a:off x="10271455" y="5998464"/>
-            <a:ext cx="1463040" cy="643233"/>
-          </a:xfrm>
-          <a:prstGeom prst="rect">
-            <a:avLst/>
-          </a:prstGeom>
-        </p:spPr>
-      </p:pic>
-      <p:sp>
-        <p:nvSpPr>
-          <p:cNvPr id="4" name="TextBox 3"/>
-          <p:cNvSpPr txBox="1"/>
-          <p:nvPr/>
-        </p:nvSpPr>
-        <p:spPr>
-          <a:xfrm>
-            <a:off x="457200" y="1737360"/>
-            <a:ext cx="11277295" cy="1097280"/>
-          </a:xfrm>
-          <a:prstGeom prst="rect">
-            <a:avLst/>
-          </a:prstGeom>
-          <a:noFill/>
-        </p:spPr>
-        <p:txBody>
-          <a:bodyPr wrap="square" anchor="ctr"/>
-          <a:lstStyle/>
-          <a:p>
-            <a:pPr algn="ctr"/>
-            <a:r>
-              <a:rPr sz="3400" b="1" i="0">
-                <a:solidFill>
-                  <a:srgbClr val="095292"/>
-                </a:solidFill>
-                <a:latin typeface="Calibri"/>
-              </a:rPr>
-              <a:t>Clase 15 · cierre del curso</a:t>
-            </a:r>
-          </a:p>
-        </p:txBody>
-      </p:sp>
-      <p:sp>
-        <p:nvSpPr>
-          <p:cNvPr id="5" name="TextBox 4"/>
-          <p:cNvSpPr txBox="1"/>
-          <p:nvPr/>
-        </p:nvSpPr>
-        <p:spPr>
-          <a:xfrm>
-            <a:off x="457200" y="3017520"/>
-            <a:ext cx="11277295" cy="1645920"/>
-          </a:xfrm>
-          <a:prstGeom prst="rect">
-            <a:avLst/>
-          </a:prstGeom>
-          <a:noFill/>
-        </p:spPr>
-        <p:txBody>
-          <a:bodyPr wrap="square">
-            <a:spAutoFit/>
-          </a:bodyPr>
-          <a:lstStyle/>
-          <a:p>
-            <a:pPr algn="ctr">
-              <a:spcAft>
-                <a:spcPts val="600"/>
-              </a:spcAft>
-            </a:pPr>
-            <a:r>
-              <a:rPr sz="1600" b="0" i="0">
-                <a:solidFill>
-                  <a:srgbClr val="333333"/>
-                </a:solidFill>
-                <a:latin typeface="Calibri"/>
-              </a:rPr>
-              <a:t>Arquitectura = decisiones estructurales con sus razones y consecuencias</a:t>
-            </a:r>
-          </a:p>
-          <a:p>
-            <a:pPr algn="ctr">
-              <a:spcAft>
-                <a:spcPts val="600"/>
-              </a:spcAft>
-            </a:pPr>
-            <a:r>
-              <a:rPr sz="1600" b="0" i="0">
-                <a:solidFill>
-                  <a:srgbClr val="333333"/>
-                </a:solidFill>
-                <a:latin typeface="Calibri"/>
-              </a:rPr>
-              <a:t>Context, Containers y Deployment cuentan el mismo sistema desde tres ángulos</a:t>
-            </a:r>
-          </a:p>
-          <a:p>
-            <a:pPr algn="ctr">
-              <a:spcAft>
-                <a:spcPts val="600"/>
-              </a:spcAft>
-            </a:pPr>
-            <a:r>
-              <a:rPr sz="1600" b="0" i="0">
-                <a:solidFill>
-                  <a:srgbClr val="333333"/>
-                </a:solidFill>
-                <a:latin typeface="Calibri"/>
-              </a:rPr>
-              <a:t>Conserva el repo (informe, diagramas, Dockerfile, ci.yml) como portafolio</a:t>
-            </a:r>
-          </a:p>
-        </p:txBody>
-      </p:sp>
-      <p:sp>
-        <p:nvSpPr>
-          <p:cNvPr id="6" name="TextBox 5"/>
-          <p:cNvSpPr txBox="1"/>
-          <p:nvPr/>
-        </p:nvSpPr>
-        <p:spPr>
-          <a:xfrm>
-            <a:off x="457200" y="4754880"/>
-            <a:ext cx="11277295" cy="640080"/>
-          </a:xfrm>
-          <a:prstGeom prst="rect">
-            <a:avLst/>
-          </a:prstGeom>
-          <a:noFill/>
-        </p:spPr>
-        <p:txBody>
-          <a:bodyPr wrap="square">
-            <a:spAutoFit/>
-          </a:bodyPr>
-          <a:lstStyle/>
-          <a:p>
-            <a:pPr algn="ctr"/>
-            <a:r>
-              <a:rPr sz="2000" b="1" i="0">
-                <a:solidFill>
-                  <a:srgbClr val="269CCB"/>
-                </a:solidFill>
-                <a:latin typeface="Calibri"/>
-              </a:rPr>
-              <a:t>Arquitectura = decisiones documentadas con sus consecuencias</a:t>
             </a:r>
           </a:p>
         </p:txBody>
@@ -8756,7 +8899,7 @@
                 </a:solidFill>
                 <a:latin typeface="Calibri"/>
               </a:rPr>
-              <a:t>–   Toda la sustentacion de hoy se apoya en esta distincion, porque la rubrica no premia describir bien: premia justificar bien.</a:t>
+              <a:t>–   Toda la sustentacion de hoy se apoya en esta distincion, porque lo que vale no es describir bien sino justificar bien.</a:t>
             </a:r>
           </a:p>
         </p:txBody>

--- a/Arquitectura de Sistemas Computacionales/Clases/Clase 15 - Presentacion del proyecto y cierre/Presentacion.pptx
+++ b/Arquitectura de Sistemas Computacionales/Clases/Clase 15 - Presentacion del proyecto y cierre/Presentacion.pptx
@@ -4847,6 +4847,38 @@
               <a:t>–   La regla practica de diapositivas es una idea por diapositiva y un maximo de ocho diapositivas para ocho minutos.</a:t>
             </a:r>
           </a:p>
+          <a:p>
+            <a:pPr>
+              <a:spcAft>
+                <a:spcPts val="800"/>
+              </a:spcAft>
+            </a:pPr>
+            <a:r>
+              <a:rPr sz="2000" b="0" i="0">
+                <a:solidFill>
+                  <a:srgbClr val="333333"/>
+                </a:solidFill>
+                <a:latin typeface="Calibri"/>
+              </a:rPr>
+              <a:t>–   Un error comun es gastar la mitad del tiempo en el dominio: el problema se cuenta en 1 minuto, y el resto es arquitectura y decisiones.</a:t>
+            </a:r>
+          </a:p>
+          <a:p>
+            <a:pPr>
+              <a:spcAft>
+                <a:spcPts val="800"/>
+              </a:spcAft>
+            </a:pPr>
+            <a:r>
+              <a:rPr sz="2000" b="0" i="0">
+                <a:solidFill>
+                  <a:srgbClr val="333333"/>
+                </a:solidFill>
+                <a:latin typeface="Calibri"/>
+              </a:rPr>
+              <a:t>–   Otro es leer las diapositivas: la diapositiva muestra el diagrama y la persona explica la decision; si el texto proyectado y lo dicho son iguales, sobra uno de los dos.</a:t>
+            </a:r>
+          </a:p>
         </p:txBody>
       </p:sp>
       <p:sp>
@@ -8382,6 +8414,54 @@
               <a:t>–   Gracias — arquitectura es trade-offs documentados, no logos de proveedores.</a:t>
             </a:r>
           </a:p>
+          <a:p>
+            <a:pPr>
+              <a:spcAft>
+                <a:spcPts val="800"/>
+              </a:spcAft>
+            </a:pPr>
+            <a:r>
+              <a:rPr sz="2000" b="0" i="0">
+                <a:solidFill>
+                  <a:srgbClr val="333333"/>
+                </a:solidFill>
+                <a:latin typeface="Calibri"/>
+              </a:rPr>
+              <a:t>–   Recorrido: dominio → modelo de servicio → contenedor → Containers → seguridad → despliegue → CI y monitoreo → costos → rendimiento → escala.</a:t>
+            </a:r>
+          </a:p>
+          <a:p>
+            <a:pPr>
+              <a:spcAft>
+                <a:spcPts val="800"/>
+              </a:spcAft>
+            </a:pPr>
+            <a:r>
+              <a:rPr sz="2000" b="0" i="0">
+                <a:solidFill>
+                  <a:srgbClr val="333333"/>
+                </a:solidFill>
+                <a:latin typeface="Calibri"/>
+              </a:rPr>
+              <a:t>–   Cada paso fue una decisión con su trade-off escrito: eso es lo que se lleva a la práctica profesional.</a:t>
+            </a:r>
+          </a:p>
+          <a:p>
+            <a:pPr>
+              <a:spcAft>
+                <a:spcPts val="800"/>
+              </a:spcAft>
+            </a:pPr>
+            <a:r>
+              <a:rPr sz="2000" b="0" i="0">
+                <a:solidFill>
+                  <a:srgbClr val="333333"/>
+                </a:solidFill>
+                <a:latin typeface="Calibri"/>
+              </a:rPr>
+              <a:t>–   Un ADR por decisión importante permite, años después, saber por qué el sistema es como es.</a:t>
+            </a:r>
+          </a:p>
         </p:txBody>
       </p:sp>
       <p:sp>
@@ -8650,6 +8730,22 @@
               <a:t>–   Si una eleccion no cumple esas tres condiciones no es arquitectura sino detalle de implementacion: elegir el nombre de una variable no es arquitectura, elegir si el frontend y la API viven en el mismo contenedor si lo es.</a:t>
             </a:r>
           </a:p>
+          <a:p>
+            <a:pPr>
+              <a:spcAft>
+                <a:spcPts val="800"/>
+              </a:spcAft>
+            </a:pPr>
+            <a:r>
+              <a:rPr sz="2000" b="0" i="0">
+                <a:solidFill>
+                  <a:srgbClr val="333333"/>
+                </a:solidFill>
+                <a:latin typeface="Calibri"/>
+              </a:rPr>
+              <a:t>–   Un trade-off es lo que se sacrifica al tomar esa decision.</a:t>
+            </a:r>
+          </a:p>
         </p:txBody>
       </p:sp>
       <p:sp>
@@ -8867,7 +8963,7 @@
                 </a:solidFill>
                 <a:latin typeface="Calibri"/>
               </a:rPr>
-              <a:t>–   Un trade-off es lo que se sacrifica al tomar esa decision.</a:t>
+              <a:t>–   No existe decision de arquitectura sin trade-off, y cuando un estudiante afirma que su opcion es mejor en todo, lo que ocurre en realidad es que todavia no encontro que perdio.</a:t>
             </a:r>
           </a:p>
           <a:p>
@@ -8883,7 +8979,7 @@
                 </a:solidFill>
                 <a:latin typeface="Calibri"/>
               </a:rPr>
-              <a:t>–   No existe decision de arquitectura sin trade-off, y cuando un estudiante afirma que su opcion es mejor en todo, lo que ocurre en realidad es que todavia no encontro que perdio.</a:t>
+              <a:t>–   Toda la sustentacion de hoy se apoya en esta distincion, porque lo que vale no es describir bien sino justificar bien.</a:t>
             </a:r>
           </a:p>
           <a:p>
@@ -8899,7 +8995,23 @@
                 </a:solidFill>
                 <a:latin typeface="Calibri"/>
               </a:rPr>
-              <a:t>–   Toda la sustentacion de hoy se apoya en esta distincion, porque lo que vale no es describir bien sino justificar bien.</a:t>
+              <a:t>–   Un ejemplo de las dos formas en CloudLite: describir es «la API corre en un contenedor sobre PaaS»</a:t>
+            </a:r>
+          </a:p>
+          <a:p>
+            <a:pPr>
+              <a:spcAft>
+                <a:spcPts val="800"/>
+              </a:spcAft>
+            </a:pPr>
+            <a:r>
+              <a:rPr sz="2000" b="0" i="0">
+                <a:solidFill>
+                  <a:srgbClr val="333333"/>
+                </a:solidFill>
+                <a:latin typeface="Calibri"/>
+              </a:rPr>
+              <a:t>–   Justificar es «la API corre sobre PaaS porque el equipo es de 1 persona y no puede operar parches del sistema operativo; a cambio aceptamos menos control sobre la red».</a:t>
             </a:r>
           </a:p>
         </p:txBody>

--- a/Arquitectura de Sistemas Computacionales/Clases/Clase 15 - Presentacion del proyecto y cierre/Presentacion.pptx
+++ b/Arquitectura de Sistemas Computacionales/Clases/Clase 15 - Presentacion del proyecto y cierre/Presentacion.pptx
@@ -4560,7 +4560,7 @@
                 </a:solidFill>
                 <a:latin typeface="Calibri"/>
               </a:rPr>
-              <a:t>–   El reparto que funciona, y que es convencion de industria y no regla dura, es el siguiente: 45 a 60 segundos para el problema y el dominio, es decir que hace CloudLite y para quien, sin nombrar una sola tecnologia todavia</a:t>
+              <a:t>–   El reparto que funciona, y que es convencion de industria y no regla dura, es el siguiente: 45 a 60 segundos para el problema y el dominio, es decir que hace la app y para quien, sin nombrar una sola tecnologia todavia</a:t>
             </a:r>
           </a:p>
           <a:p>
@@ -5648,7 +5648,7 @@
                 </a:solidFill>
                 <a:latin typeface="Calibri"/>
               </a:rPr>
-              <a:t>–   La pregunta hipotetica, o what-if, evalua si el diseno se entiende como sistema y no como dibujo: «si el trafico se multiplica por diez el lunes, que pieza de CloudLite se rompe primero y como se darian cuenta».</a:t>
+              <a:t>–   La pregunta hipotetica, o what-if, evalua si el diseno se entiende como sistema y no como dibujo: «si el trafico se multiplica por diez el lunes, que pieza de la app se rompe primero y como se darian cuenta».</a:t>
             </a:r>
           </a:p>
         </p:txBody>
@@ -8125,7 +8125,7 @@
                 </a:solidFill>
                 <a:latin typeface="Calibri"/>
               </a:rPr>
-              <a:t> CloudLite App con evidencias completas.</a:t>
+              <a:t> la app con evidencias completas.</a:t>
             </a:r>
           </a:p>
           <a:p>
@@ -8395,7 +8395,7 @@
                 </a:solidFill>
                 <a:latin typeface="Calibri"/>
               </a:rPr>
-              <a:t>–   RAA1–3 aplicados al PI. Conserven el repo como portafolio.</a:t>
+              <a:t>–   RAA1–3 aplicados. Conserven el repo como portafolio.</a:t>
             </a:r>
           </a:p>
           <a:p>
@@ -8695,7 +8695,7 @@
                 </a:solidFill>
                 <a:latin typeface="Calibri"/>
               </a:rPr>
-              <a:t>–   Describir un artefacto es decir que contiene: «este es el diagrama de despliegue de CloudLite App, aqui esta el contenedor de la API, aqui la base de datos».</a:t>
+              <a:t>–   Describir un artefacto es decir que contiene: «este es el diagrama de despliegue de la app, aqui esta el contenedor de la API, aqui la base de datos».</a:t>
             </a:r>
           </a:p>
           <a:p>
@@ -8995,7 +8995,7 @@
                 </a:solidFill>
                 <a:latin typeface="Calibri"/>
               </a:rPr>
-              <a:t>–   Un ejemplo de las dos formas en CloudLite: describir es «la API corre en un contenedor sobre PaaS»</a:t>
+              <a:t>–   Un ejemplo de las dos formas en la app: describir es «la API corre en un contenedor sobre PaaS»</a:t>
             </a:r>
           </a:p>
           <a:p>
@@ -9231,7 +9231,7 @@
                 </a:solidFill>
                 <a:latin typeface="Calibri"/>
               </a:rPr>
-              <a:t>–   Primera capa, el QUE: «CloudLite corre con un contenedor por servicio».</a:t>
+              <a:t>–   Primera capa, el QUE: «la app corre con un contenedor por servicio».</a:t>
             </a:r>
           </a:p>
           <a:p>

--- a/Arquitectura de Sistemas Computacionales/Clases/Clase 15 - Presentacion del proyecto y cierre/Presentacion.pptx
+++ b/Arquitectura de Sistemas Computacionales/Clases/Clase 15 - Presentacion del proyecto y cierre/Presentacion.pptx
@@ -21,9 +21,6 @@
     <p:sldId id="269" r:id="rId21"/>
     <p:sldId id="270" r:id="rId22"/>
     <p:sldId id="271" r:id="rId23"/>
-    <p:sldId id="272" r:id="rId24"/>
-    <p:sldId id="273" r:id="rId25"/>
-    <p:sldId id="274" r:id="rId26"/>
   </p:sldIdLst>
   <p:sldSz cx="12191695" cy="6858000" type="screen4x3"/>
   <p:notesSz cx="6858000" cy="9144000"/>
@@ -520,7 +517,19 @@
           <a:lstStyle/>
           <a:p>
             <a:r>
-              <a:t>Conviene fijar el termino con precision: una decision de arquitectura es una eleccion que afecta la estructura del sistema, es costosa de revertir una vez implementada, y tiene al menos una alternativa razonable que se descarto.</a:t>
+              <a:t>«usamos Docker porque el mismo artefacto corre igual en el laboratorio y en produccion» si justifica.</a:t>
+            </a:r>
+          </a:p>
+          <a:p/>
+          <a:p>
+            <a:r>
+              <a:t>(No se proyecta) Sustentar no es describir, y esa distincion es el eje de toda la clase.</a:t>
+            </a:r>
+          </a:p>
+          <a:p/>
+          <a:p>
+            <a:r>
+              <a:t>(No se proyecta) Conviene fijar el termino con precision: una decision de arquitectura es una eleccion que afecta la estructura del sistema, es costosa de revertir una vez implementada, y tiene al menos una alternativa razonable que se descarto.</a:t>
             </a:r>
           </a:p>
         </p:txBody>
@@ -590,25 +599,31 @@
           <a:lstStyle/>
           <a:p>
             <a:r>
-              <a:t>Existe una prueba practica de tres capas que el docente puede aplicar en voz alta a cualquier afirmacion del estudiante, y conviene ensenarla antes de que empiecen las presentaciones.</a:t>
+              <a:t>Quien llega a la segunda esta justificando.</a:t>
             </a:r>
           </a:p>
           <a:p/>
           <a:p>
             <a:r>
-              <a:t>Quien llega a la segunda esta justificando.</a:t>
+              <a:t>Quien llega a la tercera esta sustentando como un arquitecto, porque demuestra que conocia el costo de su decision antes de tomarla y aun asi la tomo.</a:t>
             </a:r>
           </a:p>
           <a:p/>
           <a:p>
             <a:r>
-              <a:t>Quien llega a la tercera esta sustentando como un arquitecto, porque demuestra que conocia el costo de su decision antes de tomarla y aun asi la tomo.</a:t>
+              <a:t>(No se proyecta) Existe una prueba practica de tres capas que el docente puede aplicar en voz alta a cualquier afirmacion del estudiante, y conviene ensenarla antes de que empiecen las presentaciones.</a:t>
             </a:r>
           </a:p>
           <a:p/>
           <a:p>
             <a:r>
-              <a:t>(Sobre la actividad, no se proyecta) Quien solo llega a la primera capa esta leyendo el diagrama en voz alta y no deberia obtener los puntos de sustentacion.</a:t>
+              <a:t>(No se proyecta) Quien solo llega a la primera capa esta leyendo el diagrama en voz alta y no deberia obtener los puntos de sustentacion.</a:t>
+            </a:r>
+          </a:p>
+          <a:p/>
+          <a:p>
+            <a:r>
+              <a:t>(No se proyecta) La instruccion operativa para el docente es simple: ante cada afirmacion, preguntar «a cambio de que», y no aceptar la respuesta «de nada».</a:t>
             </a:r>
           </a:p>
         </p:txBody>
@@ -699,6 +714,24 @@
               <a:t>Citar un ADR por numero le dice al evaluador que existe una traza escrita y verificable, no una improvisacion del momento; es la diferencia entre quien decidio y quien recuerda.</a:t>
             </a:r>
           </a:p>
+          <a:p/>
+          <a:p>
+            <a:r>
+              <a:t>(No se proyecta) El artefacto que sostiene esa tercera capa es el ADR, o Architecture Decision Record: un documento corto, de una pagina como maximo, que registra UNA sola decision con las seis secciones rotuladas que el curso fijo en la Clase 2 y que no han cambiado desde entonces.</a:t>
+            </a:r>
+          </a:p>
+          <a:p/>
+          <a:p>
+            <a:r>
+              <a:t>(No se proyecta) Los estudiantes ya produjeron el ADR-001 en la Clase 2, cuando decidieron el modelo de servicio dominante entre IaaS, PaaS y SaaS; a lo largo del curso debieron acumular tres o cuatro mas: contenedores frente a maquinas virtuales (Clase 3), donde poner la frontera entre servicios (Clase 4), y que se escala y que no (Clase 13).</a:t>
+            </a:r>
+          </a:p>
+          <a:p/>
+          <a:p>
+            <a:r>
+              <a:t>(No se proyecta) En la sustentacion el ADR no se lee en voz alta: se cita.</a:t>
+            </a:r>
+          </a:p>
         </p:txBody>
       </p:sp>
       <p:sp>
@@ -766,7 +799,7 @@
           <a:lstStyle/>
           <a:p>
             <a:r>
-              <a:t>(Sobre la actividad, no se proyecta) La razon es concreta y el docente debe decirla: si el estudiante trae veinte diapositivas, no termina, corre las ultimas, y las ultimas suelen ser justamente las de seguridad, costos y escalabilidad, donde estan los puntos de la rubrica que menos se defienden solos.</a:t>
+              <a:t>(No se proyecta) La razon es concreta y el docente debe decirla: si el estudiante trae veinte diapositivas, no termina, corre las ultimas, y las ultimas suelen ser justamente las de seguridad, costos y escalabilidad, donde estan los puntos de la rubrica que menos se defienden solos.</a:t>
             </a:r>
           </a:p>
         </p:txBody>
@@ -836,25 +869,49 @@
           <a:lstStyle/>
           <a:p>
             <a:r>
-              <a:t>La respuesta del docente debe ser: en equipo se puede repartir quien HABLA de cada tema, pero no quien ENTIENDE cada tema, porque el Q&amp;A se dirige al azar; y en modo individual no hay reparto posible, de modo que la pregunta pierde sentido y lo que queda es preparar el sistema completo.</a:t>
+              <a:t>La razon no es castigar.</a:t>
             </a:r>
           </a:p>
           <a:p/>
           <a:p>
             <a:r>
-              <a:t>La razon no es castigar.</a:t>
+              <a:t>Ese ejercicio suele revelar en cinco minutos lo que la nota habria revelado demasiado tarde.</a:t>
             </a:r>
           </a:p>
           <a:p/>
           <a:p>
             <a:r>
-              <a:t>Ese ejercicio suele revelar en cinco minutos lo que la nota habria revelado demasiado tarde.</a:t>
+              <a:t>(No se proyecta) El criterio de calidad que se anuncio desde el checkpoint de la Clase 11 es la regla de los 60 segundos: quien sustenta debe poder explicar CUALQUIER parte del sistema en 60 segundos, sin buscar en el informe.</a:t>
             </a:r>
           </a:p>
           <a:p/>
           <a:p>
             <a:r>
-              <a:t>(Sobre la actividad, no se proyecta) En los equipos autorizados el mismo riesgo se multiplica: si solo un integrante puede explicar el despliegue, no hay evidencia de que los demas participaran, y por eso la rubrica exige que todos hablen y descuenta cuando presenta uno solo.</a:t>
+              <a:t>(No se proyecta) El trabajo es individual por defecto, asi que en la mayoria de los casos ese "quien" es el propio autor y la regla se comprueba sola; cuando el docente autorizo un equipo de dos o tres, la regla se vuelve exigente y se lee asi: CUALQUIER integrante debe poder explicar CUALQUIER parte.</a:t>
+            </a:r>
+          </a:p>
+          <a:p/>
+          <a:p>
+            <a:r>
+              <a:t>(No se proyecta) Esto casi siempre genera la primera pregunta real del estudiante: «podemos repartirnos los temas y que cada uno prepare solo el suyo?».</a:t>
+            </a:r>
+          </a:p>
+          <a:p/>
+          <a:p>
+            <a:r>
+              <a:t>(No se proyecta) La respuesta del docente debe ser: en equipo se puede repartir quien HABLA de cada tema, pero no quien ENTIENDE cada tema, porque el Q&amp;A se dirige al azar; y en modo individual no hay reparto posible, de modo que la pregunta pierde sentido y lo que queda es preparar el sistema completo.</a:t>
+            </a:r>
+          </a:p>
+          <a:p/>
+          <a:p>
+            <a:r>
+              <a:t>(No se proyecta) El segundo motivo es de evaluacion: si el estudiante no puede explicar su propio diagrama de despliegue, el evaluador no tiene forma de saber si el artefacto es suyo o copiado, y ese es exactamente el vacio que la sustentacion existe para cerrar.</a:t>
+            </a:r>
+          </a:p>
+          <a:p/>
+          <a:p>
+            <a:r>
+              <a:t>(No se proyecta) En los equipos autorizados el mismo riesgo se multiplica: si solo un integrante puede explicar el despliegue, no hay evidencia de que los demas participaran, y por eso la rubrica exige que todos hablen y descuenta cuando presenta uno solo.</a:t>
             </a:r>
           </a:p>
         </p:txBody>
@@ -924,25 +981,43 @@
           <a:lstStyle/>
           <a:p>
             <a:r>
-              <a:t>El Q&amp;A tecnico tiene tres tipos de pregunta y conviene que el docente los reconozca para dosificarlos.</a:t>
+              <a:t>Improvisar un dato falso, en cambio, se detecta con una sola pregunta de seguimiento y cuesta mucho mas que admitir el limite.</a:t>
             </a:r>
           </a:p>
           <a:p/>
           <a:p>
             <a:r>
-              <a:t>La respuesta correcta es que decir «no lo medimos» no penaliza si va acompanado de como se mediria: «no medimos el p95 porque no hay trafico real, pero el plan es simular 50 peticiones por segundo y observar la latencia de la API, que es el cuello de botella que sospechamos por lo que vimos en la Clase 12».</a:t>
+              <a:t>(No se proyecta) El Q&amp;A tecnico tiene tres tipos de pregunta y conviene que el docente los reconozca para dosificarlos.</a:t>
             </a:r>
           </a:p>
           <a:p/>
           <a:p>
             <a:r>
-              <a:t>Improvisar un dato falso, en cambio, se detecta con una sola pregunta de seguimiento y cuesta mucho mas que admitir el limite.</a:t>
+              <a:t>(No se proyecta) La pregunta de verificacion comprueba que el estudiante hizo lo que dice: «muestreme el archivo.yml del workflow» o «en que linea del Dockerfile esta la imagen base y por que eligieron una variante alpine».</a:t>
             </a:r>
           </a:p>
           <a:p/>
           <a:p>
             <a:r>
-              <a:t>(Sobre la actividad, no se proyecta) El Q&amp;A escrito que pide el taller (tres preguntas duras que el propio estudiante se haria, con su respuesta) no reemplaza nada: es la preparacion del Q&amp;A en vivo, y en la practica el estudiante que lo escribio en serio responde mucho mejor cuando la pregunta llega de verdad.</a:t>
+              <a:t>(No se proyecta) Aqui aparece la segunda pregunta previsible del estudiante: «y si no sabemos la respuesta?».</a:t>
+            </a:r>
+          </a:p>
+          <a:p/>
+          <a:p>
+            <a:r>
+              <a:t>(No se proyecta) La respuesta correcta es que decir «no lo medimos» no penaliza si va acompanado de como se mediria: «no medimos el p95 porque no hay trafico real, pero el plan es simular 50 peticiones por segundo y observar la latencia de la API, que es el cuello de botella que sospechamos por lo que vimos en la Clase 12».</a:t>
+            </a:r>
+          </a:p>
+          <a:p/>
+          <a:p>
+            <a:r>
+              <a:t>(No se proyecta) Y conviene ser explicito sobre el formato de la sesion, porque es lo que decide como se prepara el estudiante: la Clase 15 se dicta en la ultima sesion del semestre (16 de noviembre) como sustentacion EN VIVO, sincrona, con turnos de unos 6 minutos de pitch y 2 a 4 de preguntas.</a:t>
+            </a:r>
+          </a:p>
+          <a:p/>
+          <a:p>
+            <a:r>
+              <a:t>(No se proyecta) El Q&amp;A escrito que pide el taller (tres preguntas duras que el propio estudiante se haria, con su respuesta) no reemplaza nada: es la preparacion del Q&amp;A en vivo, y en la practica el estudiante que lo escribio en serio responde mucho mejor cuando la pregunta llega de verdad.</a:t>
             </a:r>
           </a:p>
         </p:txBody>
@@ -1012,7 +1087,19 @@
           <a:lstStyle/>
           <a:p>
             <a:r>
-              <a:t>Conviene tambien cerrar la duda sobre las herramientas, porque algun estudiante la trae: el curso prohibio la nube de pago por razones pedagogicas y de equidad, no porque draw.io, Killercoda y GitHub Actions sean juguetes.</a:t>
+              <a:t>(No se proyecta) El cierre del curso debe conectar lo hecho con la practica profesional, porque de eso depende que el estudiante conserve el material en vez de borrarlo al terminar el semestre.</a:t>
+            </a:r>
+          </a:p>
+          <a:p/>
+          <a:p>
+            <a:r>
+              <a:t>(No se proyecta) Conviene tambien cerrar la duda sobre las herramientas, porque algun estudiante la trae: el curso prohibio la nube de pago por razones pedagogicas y de equidad, no porque draw.io, Killercoda y GitHub Actions sean juguetes.</a:t>
+            </a:r>
+          </a:p>
+          <a:p/>
+          <a:p>
+            <a:r>
+              <a:t>(No se proyecta) El diagrama de contenedores, el Dockerfile y el pipeline que el estudiante escribio son los mismos artefactos que se producen con una cuenta corporativa; lo que no se aprende en un free tier es justamente lo que si se aprendio aqui, que es razonar el trade-off.</a:t>
             </a:r>
           </a:p>
         </p:txBody>
@@ -4505,7 +4592,7 @@
                 </a:solidFill>
                 <a:latin typeface="Calibri"/>
               </a:rPr>
-              <a:t>El pitch de 5 a 8 minutos: el reparto que funciona (1/2)</a:t>
+              <a:t>El pitch de 5 a 8 minutos: el reparto que funciona (2/2)</a:t>
             </a:r>
           </a:p>
         </p:txBody>
@@ -4544,7 +4631,7 @@
                 </a:solidFill>
                 <a:latin typeface="Calibri"/>
               </a:rPr>
-              <a:t>–   Un pitch tecnico de 5 a 8 minutos no se improvisa ni se llena de diapositivas.</a:t>
+              <a:t>–   45 segundos para el punto debil declarado, lo que no escala o lo que no se midio; y 30 segundos de cierre.</a:t>
             </a:r>
           </a:p>
           <a:p>
@@ -4560,7 +4647,7 @@
                 </a:solidFill>
                 <a:latin typeface="Calibri"/>
               </a:rPr>
-              <a:t>–   El reparto que funciona, y que es convencion de industria y no regla dura, es el siguiente: 45 a 60 segundos para el problema y el dominio, es decir que hace la app y para quien, sin nombrar una sola tecnologia todavia</a:t>
+              <a:t>–   La suma queda entre 6 y 7 minutos, con margen para tropiezos.</a:t>
             </a:r>
           </a:p>
           <a:p>
@@ -4576,7 +4663,7 @@
                 </a:solidFill>
                 <a:latin typeface="Calibri"/>
               </a:rPr>
-              <a:t>–   90 segundos para la arquitectura, apoyandose en el diagrama de contexto y el de contenedores</a:t>
+              <a:t>–   La regla practica de diapositivas es una idea por diapositiva y un maximo de ocho diapositivas para ocho minutos.</a:t>
             </a:r>
           </a:p>
           <a:p>
@@ -4592,7 +4679,23 @@
                 </a:solidFill>
                 <a:latin typeface="Calibri"/>
               </a:rPr>
-              <a:t>–   90 segundos para la decision principal con su trade-off, citando el ADR; 60 a 90 segundos para la evidencia ejecutable, o sea la captura de la sesion del laboratorio con el contenedor corriendo y el workflow de GitHub Actions en verde</a:t>
+              <a:t>–   Un error comun es gastar la mitad del tiempo en el dominio: el problema se cuenta en 1 minuto, y el resto es arquitectura y decisiones.</a:t>
+            </a:r>
+          </a:p>
+          <a:p>
+            <a:pPr>
+              <a:spcAft>
+                <a:spcPts val="800"/>
+              </a:spcAft>
+            </a:pPr>
+            <a:r>
+              <a:rPr sz="2000" b="0" i="0">
+                <a:solidFill>
+                  <a:srgbClr val="333333"/>
+                </a:solidFill>
+                <a:latin typeface="Calibri"/>
+              </a:rPr>
+              <a:t>–   Otro es leer las diapositivas: la diapositiva muestra el diagrama y la persona explica la decision; si el texto proyectado y lo dicho son iguales, sobra uno de los dos.</a:t>
             </a:r>
           </a:p>
         </p:txBody>
@@ -4773,7 +4876,7 @@
                 </a:solidFill>
                 <a:latin typeface="Calibri"/>
               </a:rPr>
-              <a:t>El pitch de 5 a 8 minutos: el reparto que funciona (2/2)</a:t>
+              <a:t>La regla de los 60 segundos, anunciada desde la Clase 11</a:t>
             </a:r>
           </a:p>
         </p:txBody>
@@ -4812,7 +4915,7 @@
                 </a:solidFill>
                 <a:latin typeface="Calibri"/>
               </a:rPr>
-              <a:t>–   45 segundos para el punto debil declarado, lo que no escala o lo que no se midio; y 30 segundos de cierre.</a:t>
+              <a:t>–   En un equipo profesional, cuando el sistema falla a las once de la noche, contesta quien esta disponible, no el autor del diagrama; un sistema que solo una persona entiende es un riesgo operativo con nombre propio.</a:t>
             </a:r>
           </a:p>
           <a:p>
@@ -4828,55 +4931,7 @@
                 </a:solidFill>
                 <a:latin typeface="Calibri"/>
               </a:rPr>
-              <a:t>–   La suma queda entre 6 y 7 minutos, con margen para tropiezos.</a:t>
-            </a:r>
-          </a:p>
-          <a:p>
-            <a:pPr>
-              <a:spcAft>
-                <a:spcPts val="800"/>
-              </a:spcAft>
-            </a:pPr>
-            <a:r>
-              <a:rPr sz="2000" b="0" i="0">
-                <a:solidFill>
-                  <a:srgbClr val="333333"/>
-                </a:solidFill>
-                <a:latin typeface="Calibri"/>
-              </a:rPr>
-              <a:t>–   La regla practica de diapositivas es una idea por diapositiva y un maximo de ocho diapositivas para ocho minutos.</a:t>
-            </a:r>
-          </a:p>
-          <a:p>
-            <a:pPr>
-              <a:spcAft>
-                <a:spcPts val="800"/>
-              </a:spcAft>
-            </a:pPr>
-            <a:r>
-              <a:rPr sz="2000" b="0" i="0">
-                <a:solidFill>
-                  <a:srgbClr val="333333"/>
-                </a:solidFill>
-                <a:latin typeface="Calibri"/>
-              </a:rPr>
-              <a:t>–   Un error comun es gastar la mitad del tiempo en el dominio: el problema se cuenta en 1 minuto, y el resto es arquitectura y decisiones.</a:t>
-            </a:r>
-          </a:p>
-          <a:p>
-            <a:pPr>
-              <a:spcAft>
-                <a:spcPts val="800"/>
-              </a:spcAft>
-            </a:pPr>
-            <a:r>
-              <a:rPr sz="2000" b="0" i="0">
-                <a:solidFill>
-                  <a:srgbClr val="333333"/>
-                </a:solidFill>
-                <a:latin typeface="Calibri"/>
-              </a:rPr>
-              <a:t>–   Otro es leer las diapositivas: la diapositiva muestra el diagrama y la persona explica la decision; si el texto proyectado y lo dicho son iguales, sobra uno de los dos.</a:t>
+              <a:t>–   La practica concreta que se recomienda antes de presentar es un ensayo cruzado con otro estudiante: cada uno explica en 60 segundos una parte del sistema del otro y devuelve los huecos que encontro (en equipo, cada integrante explica una parte que NO le toco preparar).</a:t>
             </a:r>
           </a:p>
         </p:txBody>
@@ -5057,7 +5112,7 @@
                 </a:solidFill>
                 <a:latin typeface="Calibri"/>
               </a:rPr>
-              <a:t>La regla de los 60 segundos, anunciada desde la Clase 11 (1/2)</a:t>
+              <a:t>El Q&amp;A tecnico: tres tipos de pregunta</a:t>
             </a:r>
           </a:p>
         </p:txBody>
@@ -5096,7 +5151,7 @@
                 </a:solidFill>
                 <a:latin typeface="Calibri"/>
               </a:rPr>
-              <a:t>–   El criterio de calidad que se anuncio desde el checkpoint de la Clase 11 es la regla de los 60 segundos: quien sustenta debe poder explicar CUALQUIER parte del sistema en 60 segundos, sin buscar en el informe.</a:t>
+              <a:t>–   La pregunta de profundizacion empuja un nivel mas alla de lo presentado: «por que la base de datos no esta en el mismo contenedor que la API».</a:t>
             </a:r>
           </a:p>
           <a:p>
@@ -5112,7 +5167,7 @@
                 </a:solidFill>
                 <a:latin typeface="Calibri"/>
               </a:rPr>
-              <a:t>–   El trabajo es individual por defecto, asi que en la mayoria de los casos ese "quien" es el propio autor y la regla se comprueba sola</a:t>
+              <a:t>–   La pregunta hipotetica, o what-if, evalua si el diseno se entiende como sistema y no como dibujo: «si el trafico se multiplica por diez el lunes, que pieza de la app se rompe primero y como se darian cuenta».</a:t>
             </a:r>
           </a:p>
           <a:p>
@@ -5128,39 +5183,7 @@
                 </a:solidFill>
                 <a:latin typeface="Calibri"/>
               </a:rPr>
-              <a:t>–   Cuando el docente autorizo un equipo de dos o tres, la regla se vuelve exigente y se lee asi: CUALQUIER integrante debe poder explicar CUALQUIER parte.</a:t>
-            </a:r>
-          </a:p>
-          <a:p>
-            <a:pPr>
-              <a:spcAft>
-                <a:spcPts val="800"/>
-              </a:spcAft>
-            </a:pPr>
-            <a:r>
-              <a:rPr sz="2000" b="0" i="0">
-                <a:solidFill>
-                  <a:srgbClr val="333333"/>
-                </a:solidFill>
-                <a:latin typeface="Calibri"/>
-              </a:rPr>
-              <a:t>–   Esto casi siempre genera la primera pregunta real del estudiante: «podemos repartirnos los temas y que cada uno prepare solo el suyo?».</a:t>
-            </a:r>
-          </a:p>
-          <a:p>
-            <a:pPr>
-              <a:spcAft>
-                <a:spcPts val="800"/>
-              </a:spcAft>
-            </a:pPr>
-            <a:r>
-              <a:rPr sz="2000" b="0" i="0">
-                <a:solidFill>
-                  <a:srgbClr val="333333"/>
-                </a:solidFill>
-                <a:latin typeface="Calibri"/>
-              </a:rPr>
-              <a:t>–   En un equipo profesional, cuando el sistema falla a las once de la noche, contesta quien esta disponible, no el autor del diagrama; un sistema que solo una persona entiende es un riesgo operativo con nombre propio.</a:t>
+              <a:t>–   No es clase autonoma y la defensa no se reemplaza por un video grabado, porque el Q&amp;A dirigido al azar es justamente el instrumento que verifica autoria y no tiene sustituto asincronico.</a:t>
             </a:r>
           </a:p>
         </p:txBody>
@@ -5341,7 +5364,7 @@
                 </a:solidFill>
                 <a:latin typeface="Calibri"/>
               </a:rPr>
-              <a:t>La regla de los 60 segundos, anunciada desde la Clase 11 (2/2)</a:t>
+              <a:t>El cierre del curso: conectar lo hecho con la practica profesional (1/2)</a:t>
             </a:r>
           </a:p>
         </p:txBody>
@@ -5380,7 +5403,7 @@
                 </a:solidFill>
                 <a:latin typeface="Calibri"/>
               </a:rPr>
-              <a:t>–   El segundo motivo es de evaluacion: si el estudiante no puede explicar su propio diagrama de despliegue, el evaluador no tiene forma de saber si el artefacto es suyo o copiado, y ese es exactamente el vacio que la sustentacion existe para cerrar.</a:t>
+              <a:t>–   En la industria, esta sustentacion tiene nombre propio: design review, o architecture review.</a:t>
             </a:r>
           </a:p>
           <a:p>
@@ -5396,7 +5419,39 @@
                 </a:solidFill>
                 <a:latin typeface="Calibri"/>
               </a:rPr>
-              <a:t>–   La practica concreta que se recomienda antes de presentar es un ensayo cruzado con otro estudiante: cada uno explica en 60 segundos una parte del sistema del otro y devuelve los huecos que encontro (en equipo, cada integrante explica una parte que NO le toco preparar).</a:t>
+              <a:t>–   Un equipo presenta una propuesta a pares y a arquitectos mas experimentados cuyo trabajo explicito es buscarle el punto debil antes de que ese punto debil cueste dinero</a:t>
+            </a:r>
+          </a:p>
+          <a:p>
+            <a:pPr>
+              <a:spcAft>
+                <a:spcPts val="800"/>
+              </a:spcAft>
+            </a:pPr>
+            <a:r>
+              <a:rPr sz="2000" b="0" i="0">
+                <a:solidFill>
+                  <a:srgbClr val="333333"/>
+                </a:solidFill>
+                <a:latin typeface="Calibri"/>
+              </a:rPr>
+              <a:t>–   Y lo que se pregunta ahi es exactamente lo mismo que hoy, es decir que decidieron, que descartaron, que aceptaron perder, y como sabran si se equivocaron.</a:t>
+            </a:r>
+          </a:p>
+          <a:p>
+            <a:pPr>
+              <a:spcAft>
+                <a:spcPts val="800"/>
+              </a:spcAft>
+            </a:pPr>
+            <a:r>
+              <a:rPr sz="2000" b="0" i="0">
+                <a:solidFill>
+                  <a:srgbClr val="333333"/>
+                </a:solidFill>
+                <a:latin typeface="Calibri"/>
+              </a:rPr>
+              <a:t>–   El ADR es un formato real, usado en equipos reales, no un invento academico del curso.</a:t>
             </a:r>
           </a:p>
         </p:txBody>
@@ -5577,7 +5632,7 @@
                 </a:solidFill>
                 <a:latin typeface="Calibri"/>
               </a:rPr>
-              <a:t>El Q&amp;A tecnico: tres tipos de pregunta (1/2)</a:t>
+              <a:t>El cierre del curso: conectar lo hecho con la practica profesional (2/2)</a:t>
             </a:r>
           </a:p>
         </p:txBody>
@@ -5616,7 +5671,7 @@
                 </a:solidFill>
                 <a:latin typeface="Calibri"/>
               </a:rPr>
-              <a:t>–   La pregunta de verificacion comprueba que el estudiante hizo lo que dice: «muestreme el archivo.yml del workflow» o «en que linea del Dockerfile esta la imagen base y por que eligieron una variante alpine».</a:t>
+              <a:t>–   La frase de cierre util es que arquitectura no es una lista de logos de proveedores, sino un conjunto de decisiones documentadas con sus consecuencias.</a:t>
             </a:r>
           </a:p>
           <a:p>
@@ -5632,23 +5687,7 @@
                 </a:solidFill>
                 <a:latin typeface="Calibri"/>
               </a:rPr>
-              <a:t>–   La pregunta de profundizacion empuja un nivel mas alla de lo presentado: «por que la base de datos no esta en el mismo contenedor que la API».</a:t>
-            </a:r>
-          </a:p>
-          <a:p>
-            <a:pPr>
-              <a:spcAft>
-                <a:spcPts val="800"/>
-              </a:spcAft>
-            </a:pPr>
-            <a:r>
-              <a:rPr sz="2000" b="0" i="0">
-                <a:solidFill>
-                  <a:srgbClr val="333333"/>
-                </a:solidFill>
-                <a:latin typeface="Calibri"/>
-              </a:rPr>
-              <a:t>–   La pregunta hipotetica, o what-if, evalua si el diseno se entiende como sistema y no como dibujo: «si el trafico se multiplica por diez el lunes, que pieza de la app se rompe primero y como se darian cuenta».</a:t>
+              <a:t>–   Y el pedido final debe ser concreto y verificable: conserven el repositorio con el informe, los diagramas y el workflow como portafolio, porque eso es lo que se muestra en una primera entrevista tecnica cuando piden un ejemplo de trabajo propio.</a:t>
             </a:r>
           </a:p>
         </p:txBody>
@@ -5723,7 +5762,7 @@
         <p:spPr>
           <a:xfrm>
             <a:off x="0" y="0"/>
-            <a:ext cx="12191695" cy="960120"/>
+            <a:ext cx="12191695" cy="1170432"/>
           </a:xfrm>
           <a:prstGeom prst="rect">
             <a:avLst/>
@@ -5765,7 +5804,7 @@
         </p:nvSpPr>
         <p:spPr>
           <a:xfrm>
-            <a:off x="0" y="960120"/>
+            <a:off x="0" y="1170432"/>
             <a:ext cx="12191695" cy="41148"/>
           </a:xfrm>
           <a:prstGeom prst="rect">
@@ -5809,7 +5848,7 @@
         <p:spPr>
           <a:xfrm>
             <a:off x="457200" y="164592"/>
-            <a:ext cx="11277295" cy="502920"/>
+            <a:ext cx="11277295" cy="384048"/>
           </a:xfrm>
           <a:prstGeom prst="rect">
             <a:avLst/>
@@ -5829,7 +5868,7 @@
                 </a:solidFill>
                 <a:latin typeface="Calibri"/>
               </a:rPr>
-              <a:t>El Q&amp;A tecnico: tres tipos de pregunta (2/2)</a:t>
+              <a:t>Del boceto al código Mermaid</a:t>
             </a:r>
           </a:p>
         </p:txBody>
@@ -5842,8 +5881,8 @@
         </p:nvSpPr>
         <p:spPr>
           <a:xfrm>
-            <a:off x="457200" y="1170432"/>
-            <a:ext cx="11277295" cy="5230368"/>
+            <a:off x="457200" y="566928"/>
+            <a:ext cx="11277295" cy="411480"/>
           </a:xfrm>
           <a:prstGeom prst="rect">
             <a:avLst/>
@@ -5856,74 +5895,705 @@
           </a:bodyPr>
           <a:lstStyle/>
           <a:p>
+            <a:r>
+              <a:rPr sz="1400" b="0" i="0">
+                <a:solidFill>
+                  <a:srgbClr val="B8D8EE"/>
+                </a:solidFill>
+                <a:latin typeface="Calibri"/>
+              </a:rPr>
+              <a:t>El diagrama se escribe como código: se versiona, se compara y se corrige</a:t>
+            </a:r>
+          </a:p>
+        </p:txBody>
+      </p:sp>
+      <p:sp>
+        <p:nvSpPr>
+          <p:cNvPr id="6" name="Rounded Rectangle 5"/>
+          <p:cNvSpPr/>
+          <p:nvPr/>
+        </p:nvSpPr>
+        <p:spPr>
+          <a:xfrm>
+            <a:off x="457200" y="1659636"/>
+            <a:ext cx="11277295" cy="1051560"/>
+          </a:xfrm>
+          <a:prstGeom prst="roundRect">
+            <a:avLst>
+              <a:gd name="adj" fmla="val 12000"/>
+            </a:avLst>
+          </a:prstGeom>
+          <a:solidFill>
+            <a:srgbClr val="F2F2F2"/>
+          </a:solidFill>
+          <a:ln>
+            <a:noFill/>
+          </a:ln>
+        </p:spPr>
+        <p:style>
+          <a:lnRef idx="1">
+            <a:schemeClr val="accent1"/>
+          </a:lnRef>
+          <a:fillRef idx="3">
+            <a:schemeClr val="accent1"/>
+          </a:fillRef>
+          <a:effectRef idx="2">
+            <a:schemeClr val="accent1"/>
+          </a:effectRef>
+          <a:fontRef idx="minor">
+            <a:schemeClr val="lt1"/>
+          </a:fontRef>
+        </p:style>
+        <p:txBody>
+          <a:bodyPr rtlCol="0" anchor="ctr"/>
+          <a:lstStyle/>
+          <a:p>
+            <a:pPr algn="ctr"/>
+          </a:p>
+        </p:txBody>
+      </p:sp>
+      <p:sp>
+        <p:nvSpPr>
+          <p:cNvPr id="7" name="Rounded Rectangle 6"/>
+          <p:cNvSpPr/>
+          <p:nvPr/>
+        </p:nvSpPr>
+        <p:spPr>
+          <a:xfrm>
+            <a:off x="594360" y="1965960"/>
+            <a:ext cx="438912" cy="438912"/>
+          </a:xfrm>
+          <a:prstGeom prst="roundRect">
+            <a:avLst>
+              <a:gd name="adj" fmla="val 12000"/>
+            </a:avLst>
+          </a:prstGeom>
+          <a:solidFill>
+            <a:srgbClr val="095292"/>
+          </a:solidFill>
+          <a:ln>
+            <a:noFill/>
+          </a:ln>
+        </p:spPr>
+        <p:style>
+          <a:lnRef idx="1">
+            <a:schemeClr val="accent1"/>
+          </a:lnRef>
+          <a:fillRef idx="3">
+            <a:schemeClr val="accent1"/>
+          </a:fillRef>
+          <a:effectRef idx="2">
+            <a:schemeClr val="accent1"/>
+          </a:effectRef>
+          <a:fontRef idx="minor">
+            <a:schemeClr val="lt1"/>
+          </a:fontRef>
+        </p:style>
+        <p:txBody>
+          <a:bodyPr rtlCol="0" anchor="ctr"/>
+          <a:lstStyle/>
+          <a:p>
+            <a:pPr algn="ctr"/>
+          </a:p>
+        </p:txBody>
+      </p:sp>
+      <p:sp>
+        <p:nvSpPr>
+          <p:cNvPr id="8" name="TextBox 7"/>
+          <p:cNvSpPr txBox="1"/>
+          <p:nvPr/>
+        </p:nvSpPr>
+        <p:spPr>
+          <a:xfrm>
+            <a:off x="594360" y="1965960"/>
+            <a:ext cx="438912" cy="438912"/>
+          </a:xfrm>
+          <a:prstGeom prst="rect">
+            <a:avLst/>
+          </a:prstGeom>
+          <a:noFill/>
+        </p:spPr>
+        <p:txBody>
+          <a:bodyPr wrap="square" anchor="ctr"/>
+          <a:lstStyle/>
+          <a:p>
+            <a:pPr algn="ctr"/>
+            <a:r>
+              <a:rPr sz="1600" b="1" i="0">
+                <a:solidFill>
+                  <a:srgbClr val="FFFFFF"/>
+                </a:solidFill>
+                <a:latin typeface="Calibri"/>
+              </a:rPr>
+              <a:t>1</a:t>
+            </a:r>
+          </a:p>
+        </p:txBody>
+      </p:sp>
+      <p:sp>
+        <p:nvSpPr>
+          <p:cNvPr id="9" name="TextBox 8"/>
+          <p:cNvSpPr txBox="1"/>
+          <p:nvPr/>
+        </p:nvSpPr>
+        <p:spPr>
+          <a:xfrm>
+            <a:off x="1188720" y="1751076"/>
+            <a:ext cx="10271455" cy="886968"/>
+          </a:xfrm>
+          <a:prstGeom prst="rect">
+            <a:avLst/>
+          </a:prstGeom>
+          <a:noFill/>
+        </p:spPr>
+        <p:txBody>
+          <a:bodyPr wrap="square" anchor="ctr"/>
+          <a:lstStyle/>
+          <a:p>
+            <a:r>
+              <a:rPr sz="1500" b="1" i="0">
+                <a:solidFill>
+                  <a:srgbClr val="095292"/>
+                </a:solidFill>
+                <a:latin typeface="Calibri"/>
+              </a:rPr>
+              <a:t>Diseña visual</a:t>
+            </a:r>
+          </a:p>
+          <a:p>
             <a:pPr>
-              <a:spcAft>
-                <a:spcPts val="800"/>
-              </a:spcAft>
+              <a:spcBef>
+                <a:spcPts val="200"/>
+              </a:spcBef>
             </a:pPr>
             <a:r>
-              <a:rPr sz="2000" b="0" i="0">
+              <a:rPr sz="1300" b="0" i="0">
                 <a:solidFill>
                   <a:srgbClr val="333333"/>
                 </a:solidFill>
                 <a:latin typeface="Calibri"/>
               </a:rPr>
-              <a:t>–   Aqui aparece la segunda pregunta previsible del estudiante: «y si no sabemos la respuesta?».</a:t>
+              <a:t>Dibuja el diagrama como quieras en Excalidraw o draw.io: es más rápido arrastrar cajas que escribir código, y ahí es donde se piensa el modelo.</a:t>
+            </a:r>
+          </a:p>
+        </p:txBody>
+      </p:sp>
+      <p:sp>
+        <p:nvSpPr>
+          <p:cNvPr id="10" name="Rounded Rectangle 9"/>
+          <p:cNvSpPr/>
+          <p:nvPr/>
+        </p:nvSpPr>
+        <p:spPr>
+          <a:xfrm>
+            <a:off x="457200" y="2802636"/>
+            <a:ext cx="11277295" cy="1051560"/>
+          </a:xfrm>
+          <a:prstGeom prst="roundRect">
+            <a:avLst>
+              <a:gd name="adj" fmla="val 12000"/>
+            </a:avLst>
+          </a:prstGeom>
+          <a:solidFill>
+            <a:srgbClr val="E8F4FA"/>
+          </a:solidFill>
+          <a:ln>
+            <a:noFill/>
+          </a:ln>
+        </p:spPr>
+        <p:style>
+          <a:lnRef idx="1">
+            <a:schemeClr val="accent1"/>
+          </a:lnRef>
+          <a:fillRef idx="3">
+            <a:schemeClr val="accent1"/>
+          </a:fillRef>
+          <a:effectRef idx="2">
+            <a:schemeClr val="accent1"/>
+          </a:effectRef>
+          <a:fontRef idx="minor">
+            <a:schemeClr val="lt1"/>
+          </a:fontRef>
+        </p:style>
+        <p:txBody>
+          <a:bodyPr rtlCol="0" anchor="ctr"/>
+          <a:lstStyle/>
+          <a:p>
+            <a:pPr algn="ctr"/>
+          </a:p>
+        </p:txBody>
+      </p:sp>
+      <p:sp>
+        <p:nvSpPr>
+          <p:cNvPr id="11" name="Rounded Rectangle 10"/>
+          <p:cNvSpPr/>
+          <p:nvPr/>
+        </p:nvSpPr>
+        <p:spPr>
+          <a:xfrm>
+            <a:off x="594360" y="3108960"/>
+            <a:ext cx="438912" cy="438912"/>
+          </a:xfrm>
+          <a:prstGeom prst="roundRect">
+            <a:avLst>
+              <a:gd name="adj" fmla="val 12000"/>
+            </a:avLst>
+          </a:prstGeom>
+          <a:solidFill>
+            <a:srgbClr val="095292"/>
+          </a:solidFill>
+          <a:ln>
+            <a:noFill/>
+          </a:ln>
+        </p:spPr>
+        <p:style>
+          <a:lnRef idx="1">
+            <a:schemeClr val="accent1"/>
+          </a:lnRef>
+          <a:fillRef idx="3">
+            <a:schemeClr val="accent1"/>
+          </a:fillRef>
+          <a:effectRef idx="2">
+            <a:schemeClr val="accent1"/>
+          </a:effectRef>
+          <a:fontRef idx="minor">
+            <a:schemeClr val="lt1"/>
+          </a:fontRef>
+        </p:style>
+        <p:txBody>
+          <a:bodyPr rtlCol="0" anchor="ctr"/>
+          <a:lstStyle/>
+          <a:p>
+            <a:pPr algn="ctr"/>
+          </a:p>
+        </p:txBody>
+      </p:sp>
+      <p:sp>
+        <p:nvSpPr>
+          <p:cNvPr id="12" name="TextBox 11"/>
+          <p:cNvSpPr txBox="1"/>
+          <p:nvPr/>
+        </p:nvSpPr>
+        <p:spPr>
+          <a:xfrm>
+            <a:off x="594360" y="3108960"/>
+            <a:ext cx="438912" cy="438912"/>
+          </a:xfrm>
+          <a:prstGeom prst="rect">
+            <a:avLst/>
+          </a:prstGeom>
+          <a:noFill/>
+        </p:spPr>
+        <p:txBody>
+          <a:bodyPr wrap="square" anchor="ctr"/>
+          <a:lstStyle/>
+          <a:p>
+            <a:pPr algn="ctr"/>
+            <a:r>
+              <a:rPr sz="1600" b="1" i="0">
+                <a:solidFill>
+                  <a:srgbClr val="FFFFFF"/>
+                </a:solidFill>
+                <a:latin typeface="Calibri"/>
+              </a:rPr>
+              <a:t>2</a:t>
+            </a:r>
+          </a:p>
+        </p:txBody>
+      </p:sp>
+      <p:sp>
+        <p:nvSpPr>
+          <p:cNvPr id="13" name="TextBox 12"/>
+          <p:cNvSpPr txBox="1"/>
+          <p:nvPr/>
+        </p:nvSpPr>
+        <p:spPr>
+          <a:xfrm>
+            <a:off x="1188720" y="2894076"/>
+            <a:ext cx="10271455" cy="886968"/>
+          </a:xfrm>
+          <a:prstGeom prst="rect">
+            <a:avLst/>
+          </a:prstGeom>
+          <a:noFill/>
+        </p:spPr>
+        <p:txBody>
+          <a:bodyPr wrap="square" anchor="ctr"/>
+          <a:lstStyle/>
+          <a:p>
+            <a:r>
+              <a:rPr sz="1500" b="1" i="0">
+                <a:solidFill>
+                  <a:srgbClr val="095292"/>
+                </a:solidFill>
+                <a:latin typeface="Calibri"/>
+              </a:rPr>
+              <a:t>Traduce con IA</a:t>
             </a:r>
           </a:p>
           <a:p>
             <a:pPr>
-              <a:spcAft>
-                <a:spcPts val="800"/>
-              </a:spcAft>
+              <a:spcBef>
+                <a:spcPts val="200"/>
+              </a:spcBef>
             </a:pPr>
             <a:r>
-              <a:rPr sz="2000" b="0" i="0">
+              <a:rPr sz="1300" b="0" i="0">
                 <a:solidFill>
                   <a:srgbClr val="333333"/>
                 </a:solidFill>
                 <a:latin typeface="Calibri"/>
               </a:rPr>
-              <a:t>–   Y conviene ser explicito sobre el formato de la sesion, porque es lo que decide como se prepara el estudiante: la Clase 15 se dicta en la ultima sesion del semestre (16 de noviembre) como sustentacion EN VIVO</a:t>
+              <a:t>Describe tu boceto a una IA y pídele el código Mermaid usando flowchart. Revisa el resultado: la IA acierta la sintaxis, no tu modelo.</a:t>
+            </a:r>
+          </a:p>
+        </p:txBody>
+      </p:sp>
+      <p:sp>
+        <p:nvSpPr>
+          <p:cNvPr id="14" name="Rounded Rectangle 13"/>
+          <p:cNvSpPr/>
+          <p:nvPr/>
+        </p:nvSpPr>
+        <p:spPr>
+          <a:xfrm>
+            <a:off x="457200" y="3945636"/>
+            <a:ext cx="11277295" cy="1051560"/>
+          </a:xfrm>
+          <a:prstGeom prst="roundRect">
+            <a:avLst>
+              <a:gd name="adj" fmla="val 12000"/>
+            </a:avLst>
+          </a:prstGeom>
+          <a:solidFill>
+            <a:srgbClr val="F2F2F2"/>
+          </a:solidFill>
+          <a:ln>
+            <a:noFill/>
+          </a:ln>
+        </p:spPr>
+        <p:style>
+          <a:lnRef idx="1">
+            <a:schemeClr val="accent1"/>
+          </a:lnRef>
+          <a:fillRef idx="3">
+            <a:schemeClr val="accent1"/>
+          </a:fillRef>
+          <a:effectRef idx="2">
+            <a:schemeClr val="accent1"/>
+          </a:effectRef>
+          <a:fontRef idx="minor">
+            <a:schemeClr val="lt1"/>
+          </a:fontRef>
+        </p:style>
+        <p:txBody>
+          <a:bodyPr rtlCol="0" anchor="ctr"/>
+          <a:lstStyle/>
+          <a:p>
+            <a:pPr algn="ctr"/>
+          </a:p>
+        </p:txBody>
+      </p:sp>
+      <p:sp>
+        <p:nvSpPr>
+          <p:cNvPr id="15" name="Rounded Rectangle 14"/>
+          <p:cNvSpPr/>
+          <p:nvPr/>
+        </p:nvSpPr>
+        <p:spPr>
+          <a:xfrm>
+            <a:off x="594360" y="4251960"/>
+            <a:ext cx="438912" cy="438912"/>
+          </a:xfrm>
+          <a:prstGeom prst="roundRect">
+            <a:avLst>
+              <a:gd name="adj" fmla="val 12000"/>
+            </a:avLst>
+          </a:prstGeom>
+          <a:solidFill>
+            <a:srgbClr val="095292"/>
+          </a:solidFill>
+          <a:ln>
+            <a:noFill/>
+          </a:ln>
+        </p:spPr>
+        <p:style>
+          <a:lnRef idx="1">
+            <a:schemeClr val="accent1"/>
+          </a:lnRef>
+          <a:fillRef idx="3">
+            <a:schemeClr val="accent1"/>
+          </a:fillRef>
+          <a:effectRef idx="2">
+            <a:schemeClr val="accent1"/>
+          </a:effectRef>
+          <a:fontRef idx="minor">
+            <a:schemeClr val="lt1"/>
+          </a:fontRef>
+        </p:style>
+        <p:txBody>
+          <a:bodyPr rtlCol="0" anchor="ctr"/>
+          <a:lstStyle/>
+          <a:p>
+            <a:pPr algn="ctr"/>
+          </a:p>
+        </p:txBody>
+      </p:sp>
+      <p:sp>
+        <p:nvSpPr>
+          <p:cNvPr id="16" name="TextBox 15"/>
+          <p:cNvSpPr txBox="1"/>
+          <p:nvPr/>
+        </p:nvSpPr>
+        <p:spPr>
+          <a:xfrm>
+            <a:off x="594360" y="4251960"/>
+            <a:ext cx="438912" cy="438912"/>
+          </a:xfrm>
+          <a:prstGeom prst="rect">
+            <a:avLst/>
+          </a:prstGeom>
+          <a:noFill/>
+        </p:spPr>
+        <p:txBody>
+          <a:bodyPr wrap="square" anchor="ctr"/>
+          <a:lstStyle/>
+          <a:p>
+            <a:pPr algn="ctr"/>
+            <a:r>
+              <a:rPr sz="1600" b="1" i="0">
+                <a:solidFill>
+                  <a:srgbClr val="FFFFFF"/>
+                </a:solidFill>
+                <a:latin typeface="Calibri"/>
+              </a:rPr>
+              <a:t>3</a:t>
+            </a:r>
+          </a:p>
+        </p:txBody>
+      </p:sp>
+      <p:sp>
+        <p:nvSpPr>
+          <p:cNvPr id="17" name="TextBox 16"/>
+          <p:cNvSpPr txBox="1"/>
+          <p:nvPr/>
+        </p:nvSpPr>
+        <p:spPr>
+          <a:xfrm>
+            <a:off x="1188720" y="4037076"/>
+            <a:ext cx="10271455" cy="886968"/>
+          </a:xfrm>
+          <a:prstGeom prst="rect">
+            <a:avLst/>
+          </a:prstGeom>
+          <a:noFill/>
+        </p:spPr>
+        <p:txBody>
+          <a:bodyPr wrap="square" anchor="ctr"/>
+          <a:lstStyle/>
+          <a:p>
+            <a:r>
+              <a:rPr sz="1500" b="1" i="0">
+                <a:solidFill>
+                  <a:srgbClr val="095292"/>
+                </a:solidFill>
+                <a:latin typeface="Calibri"/>
+              </a:rPr>
+              <a:t>Renderiza en un visor</a:t>
             </a:r>
           </a:p>
           <a:p>
             <a:pPr>
-              <a:spcAft>
-                <a:spcPts val="800"/>
-              </a:spcAft>
+              <a:spcBef>
+                <a:spcPts val="200"/>
+              </a:spcBef>
             </a:pPr>
             <a:r>
-              <a:rPr sz="2000" b="0" i="0">
+              <a:rPr sz="1300" b="0" i="0">
                 <a:solidFill>
                   <a:srgbClr val="333333"/>
                 </a:solidFill>
                 <a:latin typeface="Calibri"/>
               </a:rPr>
-              <a:t>–   Sincrona, con turnos de unos 6 minutos de pitch y 2 a 4 de preguntas.</a:t>
+              <a:t>Pega el código en un visor Mermaid (mermaid.live o la vista previa de tu editor) y míralo dibujado. Si no renderiza, corrige ahí: un end faltante o un rótulo sin comillas.</a:t>
+            </a:r>
+          </a:p>
+        </p:txBody>
+      </p:sp>
+      <p:sp>
+        <p:nvSpPr>
+          <p:cNvPr id="18" name="Rounded Rectangle 17"/>
+          <p:cNvSpPr/>
+          <p:nvPr/>
+        </p:nvSpPr>
+        <p:spPr>
+          <a:xfrm>
+            <a:off x="457200" y="5088636"/>
+            <a:ext cx="11277295" cy="1051560"/>
+          </a:xfrm>
+          <a:prstGeom prst="roundRect">
+            <a:avLst>
+              <a:gd name="adj" fmla="val 12000"/>
+            </a:avLst>
+          </a:prstGeom>
+          <a:solidFill>
+            <a:srgbClr val="E8F4FA"/>
+          </a:solidFill>
+          <a:ln>
+            <a:noFill/>
+          </a:ln>
+        </p:spPr>
+        <p:style>
+          <a:lnRef idx="1">
+            <a:schemeClr val="accent1"/>
+          </a:lnRef>
+          <a:fillRef idx="3">
+            <a:schemeClr val="accent1"/>
+          </a:fillRef>
+          <a:effectRef idx="2">
+            <a:schemeClr val="accent1"/>
+          </a:effectRef>
+          <a:fontRef idx="minor">
+            <a:schemeClr val="lt1"/>
+          </a:fontRef>
+        </p:style>
+        <p:txBody>
+          <a:bodyPr rtlCol="0" anchor="ctr"/>
+          <a:lstStyle/>
+          <a:p>
+            <a:pPr algn="ctr"/>
+          </a:p>
+        </p:txBody>
+      </p:sp>
+      <p:sp>
+        <p:nvSpPr>
+          <p:cNvPr id="19" name="Rounded Rectangle 18"/>
+          <p:cNvSpPr/>
+          <p:nvPr/>
+        </p:nvSpPr>
+        <p:spPr>
+          <a:xfrm>
+            <a:off x="594360" y="5394960"/>
+            <a:ext cx="438912" cy="438912"/>
+          </a:xfrm>
+          <a:prstGeom prst="roundRect">
+            <a:avLst>
+              <a:gd name="adj" fmla="val 12000"/>
+            </a:avLst>
+          </a:prstGeom>
+          <a:solidFill>
+            <a:srgbClr val="095292"/>
+          </a:solidFill>
+          <a:ln>
+            <a:noFill/>
+          </a:ln>
+        </p:spPr>
+        <p:style>
+          <a:lnRef idx="1">
+            <a:schemeClr val="accent1"/>
+          </a:lnRef>
+          <a:fillRef idx="3">
+            <a:schemeClr val="accent1"/>
+          </a:fillRef>
+          <a:effectRef idx="2">
+            <a:schemeClr val="accent1"/>
+          </a:effectRef>
+          <a:fontRef idx="minor">
+            <a:schemeClr val="lt1"/>
+          </a:fontRef>
+        </p:style>
+        <p:txBody>
+          <a:bodyPr rtlCol="0" anchor="ctr"/>
+          <a:lstStyle/>
+          <a:p>
+            <a:pPr algn="ctr"/>
+          </a:p>
+        </p:txBody>
+      </p:sp>
+      <p:sp>
+        <p:nvSpPr>
+          <p:cNvPr id="20" name="TextBox 19"/>
+          <p:cNvSpPr txBox="1"/>
+          <p:nvPr/>
+        </p:nvSpPr>
+        <p:spPr>
+          <a:xfrm>
+            <a:off x="594360" y="5394960"/>
+            <a:ext cx="438912" cy="438912"/>
+          </a:xfrm>
+          <a:prstGeom prst="rect">
+            <a:avLst/>
+          </a:prstGeom>
+          <a:noFill/>
+        </p:spPr>
+        <p:txBody>
+          <a:bodyPr wrap="square" anchor="ctr"/>
+          <a:lstStyle/>
+          <a:p>
+            <a:pPr algn="ctr"/>
+            <a:r>
+              <a:rPr sz="1600" b="1" i="0">
+                <a:solidFill>
+                  <a:srgbClr val="FFFFFF"/>
+                </a:solidFill>
+                <a:latin typeface="Calibri"/>
+              </a:rPr>
+              <a:t>4</a:t>
+            </a:r>
+          </a:p>
+        </p:txBody>
+      </p:sp>
+      <p:sp>
+        <p:nvSpPr>
+          <p:cNvPr id="21" name="TextBox 20"/>
+          <p:cNvSpPr txBox="1"/>
+          <p:nvPr/>
+        </p:nvSpPr>
+        <p:spPr>
+          <a:xfrm>
+            <a:off x="1188720" y="5180076"/>
+            <a:ext cx="10271455" cy="886968"/>
+          </a:xfrm>
+          <a:prstGeom prst="rect">
+            <a:avLst/>
+          </a:prstGeom>
+          <a:noFill/>
+        </p:spPr>
+        <p:txBody>
+          <a:bodyPr wrap="square" anchor="ctr"/>
+          <a:lstStyle/>
+          <a:p>
+            <a:r>
+              <a:rPr sz="1500" b="1" i="0">
+                <a:solidFill>
+                  <a:srgbClr val="095292"/>
+                </a:solidFill>
+                <a:latin typeface="Calibri"/>
+              </a:rPr>
+              <a:t>Guarda código e imagen</a:t>
             </a:r>
           </a:p>
           <a:p>
             <a:pPr>
-              <a:spcAft>
-                <a:spcPts val="800"/>
-              </a:spcAft>
+              <a:spcBef>
+                <a:spcPts val="200"/>
+              </a:spcBef>
             </a:pPr>
             <a:r>
-              <a:rPr sz="2000" b="0" i="0">
+              <a:rPr sz="1300" b="0" i="0">
                 <a:solidFill>
                   <a:srgbClr val="333333"/>
                 </a:solidFill>
                 <a:latin typeface="Calibri"/>
               </a:rPr>
-              <a:t>–   No es clase autonoma y la defensa no se reemplaza por un video grabado, porque el Q&amp;A dirigido al azar es justamente el instrumento que verifica autoria y no tiene sustituto asincronico.</a:t>
-            </a:r>
-          </a:p>
-        </p:txBody>
-      </p:sp>
-      <p:sp>
-        <p:nvSpPr>
-          <p:cNvPr id="6" name="TextBox 5"/>
+              <a:t>El código es la fuente del diagrama: guárdalo con tu proyecto junto con el PNG exportado.</a:t>
+            </a:r>
+          </a:p>
+        </p:txBody>
+      </p:sp>
+      <p:sp>
+        <p:nvSpPr>
+          <p:cNvPr id="22" name="TextBox 21"/>
           <p:cNvSpPr txBox="1"/>
           <p:nvPr/>
         </p:nvSpPr>
@@ -5991,1457 +6661,6 @@
         <p:spPr>
           <a:xfrm>
             <a:off x="0" y="0"/>
-            <a:ext cx="12191695" cy="960120"/>
-          </a:xfrm>
-          <a:prstGeom prst="rect">
-            <a:avLst/>
-          </a:prstGeom>
-          <a:solidFill>
-            <a:srgbClr val="095292"/>
-          </a:solidFill>
-          <a:ln>
-            <a:noFill/>
-          </a:ln>
-        </p:spPr>
-        <p:style>
-          <a:lnRef idx="1">
-            <a:schemeClr val="accent1"/>
-          </a:lnRef>
-          <a:fillRef idx="3">
-            <a:schemeClr val="accent1"/>
-          </a:fillRef>
-          <a:effectRef idx="2">
-            <a:schemeClr val="accent1"/>
-          </a:effectRef>
-          <a:fontRef idx="minor">
-            <a:schemeClr val="lt1"/>
-          </a:fontRef>
-        </p:style>
-        <p:txBody>
-          <a:bodyPr rtlCol="0" anchor="ctr"/>
-          <a:lstStyle/>
-          <a:p>
-            <a:pPr algn="ctr"/>
-          </a:p>
-        </p:txBody>
-      </p:sp>
-      <p:sp>
-        <p:nvSpPr>
-          <p:cNvPr id="3" name="Rectangle 2"/>
-          <p:cNvSpPr/>
-          <p:nvPr/>
-        </p:nvSpPr>
-        <p:spPr>
-          <a:xfrm>
-            <a:off x="0" y="960120"/>
-            <a:ext cx="12191695" cy="41148"/>
-          </a:xfrm>
-          <a:prstGeom prst="rect">
-            <a:avLst/>
-          </a:prstGeom>
-          <a:solidFill>
-            <a:srgbClr val="FFD000"/>
-          </a:solidFill>
-          <a:ln>
-            <a:noFill/>
-          </a:ln>
-        </p:spPr>
-        <p:style>
-          <a:lnRef idx="1">
-            <a:schemeClr val="accent1"/>
-          </a:lnRef>
-          <a:fillRef idx="3">
-            <a:schemeClr val="accent1"/>
-          </a:fillRef>
-          <a:effectRef idx="2">
-            <a:schemeClr val="accent1"/>
-          </a:effectRef>
-          <a:fontRef idx="minor">
-            <a:schemeClr val="lt1"/>
-          </a:fontRef>
-        </p:style>
-        <p:txBody>
-          <a:bodyPr rtlCol="0" anchor="ctr"/>
-          <a:lstStyle/>
-          <a:p>
-            <a:pPr algn="ctr"/>
-          </a:p>
-        </p:txBody>
-      </p:sp>
-      <p:sp>
-        <p:nvSpPr>
-          <p:cNvPr id="4" name="TextBox 3"/>
-          <p:cNvSpPr txBox="1"/>
-          <p:nvPr/>
-        </p:nvSpPr>
-        <p:spPr>
-          <a:xfrm>
-            <a:off x="457200" y="164592"/>
-            <a:ext cx="11277295" cy="502920"/>
-          </a:xfrm>
-          <a:prstGeom prst="rect">
-            <a:avLst/>
-          </a:prstGeom>
-          <a:noFill/>
-        </p:spPr>
-        <p:txBody>
-          <a:bodyPr wrap="square">
-            <a:spAutoFit/>
-          </a:bodyPr>
-          <a:lstStyle/>
-          <a:p>
-            <a:r>
-              <a:rPr sz="2600" b="1" i="0">
-                <a:solidFill>
-                  <a:srgbClr val="FFFFFF"/>
-                </a:solidFill>
-                <a:latin typeface="Calibri"/>
-              </a:rPr>
-              <a:t>El cierre del curso: conectar lo hecho con la practica profesional (1/2)</a:t>
-            </a:r>
-          </a:p>
-        </p:txBody>
-      </p:sp>
-      <p:sp>
-        <p:nvSpPr>
-          <p:cNvPr id="5" name="TextBox 4"/>
-          <p:cNvSpPr txBox="1"/>
-          <p:nvPr/>
-        </p:nvSpPr>
-        <p:spPr>
-          <a:xfrm>
-            <a:off x="457200" y="1170432"/>
-            <a:ext cx="11277295" cy="5230368"/>
-          </a:xfrm>
-          <a:prstGeom prst="rect">
-            <a:avLst/>
-          </a:prstGeom>
-          <a:noFill/>
-        </p:spPr>
-        <p:txBody>
-          <a:bodyPr wrap="square">
-            <a:spAutoFit/>
-          </a:bodyPr>
-          <a:lstStyle/>
-          <a:p>
-            <a:pPr>
-              <a:spcAft>
-                <a:spcPts val="800"/>
-              </a:spcAft>
-            </a:pPr>
-            <a:r>
-              <a:rPr sz="2000" b="0" i="0">
-                <a:solidFill>
-                  <a:srgbClr val="333333"/>
-                </a:solidFill>
-                <a:latin typeface="Calibri"/>
-              </a:rPr>
-              <a:t>–   El cierre del curso debe conectar lo hecho con la practica profesional, porque de eso depende que el estudiante conserve el material en vez de borrarlo al terminar el semestre.</a:t>
-            </a:r>
-          </a:p>
-          <a:p>
-            <a:pPr>
-              <a:spcAft>
-                <a:spcPts val="800"/>
-              </a:spcAft>
-            </a:pPr>
-            <a:r>
-              <a:rPr sz="2000" b="0" i="0">
-                <a:solidFill>
-                  <a:srgbClr val="333333"/>
-                </a:solidFill>
-                <a:latin typeface="Calibri"/>
-              </a:rPr>
-              <a:t>–   En la industria, esta sustentacion tiene nombre propio: design review, o architecture review.</a:t>
-            </a:r>
-          </a:p>
-          <a:p>
-            <a:pPr>
-              <a:spcAft>
-                <a:spcPts val="800"/>
-              </a:spcAft>
-            </a:pPr>
-            <a:r>
-              <a:rPr sz="2000" b="0" i="0">
-                <a:solidFill>
-                  <a:srgbClr val="333333"/>
-                </a:solidFill>
-                <a:latin typeface="Calibri"/>
-              </a:rPr>
-              <a:t>–   Un equipo presenta una propuesta a pares y a arquitectos mas experimentados cuyo trabajo explicito es buscarle el punto debil antes de que ese punto debil cueste dinero</a:t>
-            </a:r>
-          </a:p>
-          <a:p>
-            <a:pPr>
-              <a:spcAft>
-                <a:spcPts val="800"/>
-              </a:spcAft>
-            </a:pPr>
-            <a:r>
-              <a:rPr sz="2000" b="0" i="0">
-                <a:solidFill>
-                  <a:srgbClr val="333333"/>
-                </a:solidFill>
-                <a:latin typeface="Calibri"/>
-              </a:rPr>
-              <a:t>–   Y lo que se pregunta ahi es exactamente lo mismo que hoy, es decir que decidieron, que descartaron, que aceptaron perder, y como sabran si se equivocaron.</a:t>
-            </a:r>
-          </a:p>
-          <a:p>
-            <a:pPr>
-              <a:spcAft>
-                <a:spcPts val="800"/>
-              </a:spcAft>
-            </a:pPr>
-            <a:r>
-              <a:rPr sz="2000" b="0" i="0">
-                <a:solidFill>
-                  <a:srgbClr val="333333"/>
-                </a:solidFill>
-                <a:latin typeface="Calibri"/>
-              </a:rPr>
-              <a:t>–   El ADR es un formato real, usado en equipos reales, no un invento academico del curso.</a:t>
-            </a:r>
-          </a:p>
-        </p:txBody>
-      </p:sp>
-      <p:sp>
-        <p:nvSpPr>
-          <p:cNvPr id="6" name="TextBox 5"/>
-          <p:cNvSpPr txBox="1"/>
-          <p:nvPr/>
-        </p:nvSpPr>
-        <p:spPr>
-          <a:xfrm>
-            <a:off x="11185855" y="6473952"/>
-            <a:ext cx="640080" cy="274320"/>
-          </a:xfrm>
-          <a:prstGeom prst="rect">
-            <a:avLst/>
-          </a:prstGeom>
-          <a:noFill/>
-        </p:spPr>
-        <p:txBody>
-          <a:bodyPr wrap="square">
-            <a:spAutoFit/>
-          </a:bodyPr>
-          <a:lstStyle/>
-          <a:p>
-            <a:pPr algn="r"/>
-            <a:r>
-              <a:rPr sz="1100" b="0" i="0">
-                <a:solidFill>
-                  <a:srgbClr val="666666"/>
-                </a:solidFill>
-                <a:latin typeface="Calibri"/>
-              </a:rPr>
-              <a:t>16</a:t>
-            </a:r>
-          </a:p>
-        </p:txBody>
-      </p:sp>
-    </p:spTree>
-  </p:cSld>
-  <p:clrMapOvr>
-    <a:masterClrMapping/>
-  </p:clrMapOvr>
-</p:sld>
-</file>
-
-<file path=ppt/slides/slide17.xml><?xml version="1.0" encoding="utf-8"?>
-<p:sld xmlns:a="http://schemas.openxmlformats.org/drawingml/2006/main" xmlns:p="http://schemas.openxmlformats.org/presentationml/2006/main" xmlns:r="http://schemas.openxmlformats.org/officeDocument/2006/relationships">
-  <p:cSld>
-    <p:bg>
-      <p:bgPr>
-        <a:solidFill>
-          <a:srgbClr val="FFFFFF"/>
-        </a:solidFill>
-        <a:effectLst/>
-      </p:bgPr>
-    </p:bg>
-    <p:spTree>
-      <p:nvGrpSpPr>
-        <p:cNvPr id="1" name=""/>
-        <p:cNvGrpSpPr/>
-        <p:nvPr/>
-      </p:nvGrpSpPr>
-      <p:grpSpPr/>
-      <p:sp>
-        <p:nvSpPr>
-          <p:cNvPr id="2" name="Rectangle 1"/>
-          <p:cNvSpPr/>
-          <p:nvPr/>
-        </p:nvSpPr>
-        <p:spPr>
-          <a:xfrm>
-            <a:off x="0" y="0"/>
-            <a:ext cx="12191695" cy="960120"/>
-          </a:xfrm>
-          <a:prstGeom prst="rect">
-            <a:avLst/>
-          </a:prstGeom>
-          <a:solidFill>
-            <a:srgbClr val="095292"/>
-          </a:solidFill>
-          <a:ln>
-            <a:noFill/>
-          </a:ln>
-        </p:spPr>
-        <p:style>
-          <a:lnRef idx="1">
-            <a:schemeClr val="accent1"/>
-          </a:lnRef>
-          <a:fillRef idx="3">
-            <a:schemeClr val="accent1"/>
-          </a:fillRef>
-          <a:effectRef idx="2">
-            <a:schemeClr val="accent1"/>
-          </a:effectRef>
-          <a:fontRef idx="minor">
-            <a:schemeClr val="lt1"/>
-          </a:fontRef>
-        </p:style>
-        <p:txBody>
-          <a:bodyPr rtlCol="0" anchor="ctr"/>
-          <a:lstStyle/>
-          <a:p>
-            <a:pPr algn="ctr"/>
-          </a:p>
-        </p:txBody>
-      </p:sp>
-      <p:sp>
-        <p:nvSpPr>
-          <p:cNvPr id="3" name="Rectangle 2"/>
-          <p:cNvSpPr/>
-          <p:nvPr/>
-        </p:nvSpPr>
-        <p:spPr>
-          <a:xfrm>
-            <a:off x="0" y="960120"/>
-            <a:ext cx="12191695" cy="41148"/>
-          </a:xfrm>
-          <a:prstGeom prst="rect">
-            <a:avLst/>
-          </a:prstGeom>
-          <a:solidFill>
-            <a:srgbClr val="FFD000"/>
-          </a:solidFill>
-          <a:ln>
-            <a:noFill/>
-          </a:ln>
-        </p:spPr>
-        <p:style>
-          <a:lnRef idx="1">
-            <a:schemeClr val="accent1"/>
-          </a:lnRef>
-          <a:fillRef idx="3">
-            <a:schemeClr val="accent1"/>
-          </a:fillRef>
-          <a:effectRef idx="2">
-            <a:schemeClr val="accent1"/>
-          </a:effectRef>
-          <a:fontRef idx="minor">
-            <a:schemeClr val="lt1"/>
-          </a:fontRef>
-        </p:style>
-        <p:txBody>
-          <a:bodyPr rtlCol="0" anchor="ctr"/>
-          <a:lstStyle/>
-          <a:p>
-            <a:pPr algn="ctr"/>
-          </a:p>
-        </p:txBody>
-      </p:sp>
-      <p:sp>
-        <p:nvSpPr>
-          <p:cNvPr id="4" name="TextBox 3"/>
-          <p:cNvSpPr txBox="1"/>
-          <p:nvPr/>
-        </p:nvSpPr>
-        <p:spPr>
-          <a:xfrm>
-            <a:off x="457200" y="164592"/>
-            <a:ext cx="11277295" cy="502920"/>
-          </a:xfrm>
-          <a:prstGeom prst="rect">
-            <a:avLst/>
-          </a:prstGeom>
-          <a:noFill/>
-        </p:spPr>
-        <p:txBody>
-          <a:bodyPr wrap="square">
-            <a:spAutoFit/>
-          </a:bodyPr>
-          <a:lstStyle/>
-          <a:p>
-            <a:r>
-              <a:rPr sz="2600" b="1" i="0">
-                <a:solidFill>
-                  <a:srgbClr val="FFFFFF"/>
-                </a:solidFill>
-                <a:latin typeface="Calibri"/>
-              </a:rPr>
-              <a:t>El cierre del curso: conectar lo hecho con la practica profesional (2/2)</a:t>
-            </a:r>
-          </a:p>
-        </p:txBody>
-      </p:sp>
-      <p:sp>
-        <p:nvSpPr>
-          <p:cNvPr id="5" name="TextBox 4"/>
-          <p:cNvSpPr txBox="1"/>
-          <p:nvPr/>
-        </p:nvSpPr>
-        <p:spPr>
-          <a:xfrm>
-            <a:off x="457200" y="1170432"/>
-            <a:ext cx="11277295" cy="5230368"/>
-          </a:xfrm>
-          <a:prstGeom prst="rect">
-            <a:avLst/>
-          </a:prstGeom>
-          <a:noFill/>
-        </p:spPr>
-        <p:txBody>
-          <a:bodyPr wrap="square">
-            <a:spAutoFit/>
-          </a:bodyPr>
-          <a:lstStyle/>
-          <a:p>
-            <a:pPr>
-              <a:spcAft>
-                <a:spcPts val="800"/>
-              </a:spcAft>
-            </a:pPr>
-            <a:r>
-              <a:rPr sz="2000" b="0" i="0">
-                <a:solidFill>
-                  <a:srgbClr val="333333"/>
-                </a:solidFill>
-                <a:latin typeface="Calibri"/>
-              </a:rPr>
-              <a:t>–   El diagrama de contenedores, el Dockerfile y el pipeline que el estudiante escribio son los mismos artefactos que se producen con una cuenta corporativa</a:t>
-            </a:r>
-          </a:p>
-          <a:p>
-            <a:pPr>
-              <a:spcAft>
-                <a:spcPts val="800"/>
-              </a:spcAft>
-            </a:pPr>
-            <a:r>
-              <a:rPr sz="2000" b="0" i="0">
-                <a:solidFill>
-                  <a:srgbClr val="333333"/>
-                </a:solidFill>
-                <a:latin typeface="Calibri"/>
-              </a:rPr>
-              <a:t>–   Lo que no se aprende en un free tier es justamente lo que si se aprendio aqui, que es razonar el trade-off.</a:t>
-            </a:r>
-          </a:p>
-          <a:p>
-            <a:pPr>
-              <a:spcAft>
-                <a:spcPts val="800"/>
-              </a:spcAft>
-            </a:pPr>
-            <a:r>
-              <a:rPr sz="2000" b="0" i="0">
-                <a:solidFill>
-                  <a:srgbClr val="333333"/>
-                </a:solidFill>
-                <a:latin typeface="Calibri"/>
-              </a:rPr>
-              <a:t>–   La frase de cierre util es que arquitectura no es una lista de logos de proveedores, sino un conjunto de decisiones documentadas con sus consecuencias.</a:t>
-            </a:r>
-          </a:p>
-          <a:p>
-            <a:pPr>
-              <a:spcAft>
-                <a:spcPts val="800"/>
-              </a:spcAft>
-            </a:pPr>
-            <a:r>
-              <a:rPr sz="2000" b="0" i="0">
-                <a:solidFill>
-                  <a:srgbClr val="333333"/>
-                </a:solidFill>
-                <a:latin typeface="Calibri"/>
-              </a:rPr>
-              <a:t>–   Y el pedido final debe ser concreto y verificable: conserven el repositorio con el informe, los diagramas y el workflow como portafolio, porque eso es lo que se muestra en una primera entrevista tecnica cuando piden un ejemplo de trabajo propio.</a:t>
-            </a:r>
-          </a:p>
-        </p:txBody>
-      </p:sp>
-      <p:sp>
-        <p:nvSpPr>
-          <p:cNvPr id="6" name="TextBox 5"/>
-          <p:cNvSpPr txBox="1"/>
-          <p:nvPr/>
-        </p:nvSpPr>
-        <p:spPr>
-          <a:xfrm>
-            <a:off x="11185855" y="6473952"/>
-            <a:ext cx="640080" cy="274320"/>
-          </a:xfrm>
-          <a:prstGeom prst="rect">
-            <a:avLst/>
-          </a:prstGeom>
-          <a:noFill/>
-        </p:spPr>
-        <p:txBody>
-          <a:bodyPr wrap="square">
-            <a:spAutoFit/>
-          </a:bodyPr>
-          <a:lstStyle/>
-          <a:p>
-            <a:pPr algn="r"/>
-            <a:r>
-              <a:rPr sz="1100" b="0" i="0">
-                <a:solidFill>
-                  <a:srgbClr val="666666"/>
-                </a:solidFill>
-                <a:latin typeface="Calibri"/>
-              </a:rPr>
-              <a:t>17</a:t>
-            </a:r>
-          </a:p>
-        </p:txBody>
-      </p:sp>
-    </p:spTree>
-  </p:cSld>
-  <p:clrMapOvr>
-    <a:masterClrMapping/>
-  </p:clrMapOvr>
-</p:sld>
-</file>
-
-<file path=ppt/slides/slide18.xml><?xml version="1.0" encoding="utf-8"?>
-<p:sld xmlns:a="http://schemas.openxmlformats.org/drawingml/2006/main" xmlns:p="http://schemas.openxmlformats.org/presentationml/2006/main" xmlns:r="http://schemas.openxmlformats.org/officeDocument/2006/relationships">
-  <p:cSld>
-    <p:bg>
-      <p:bgPr>
-        <a:solidFill>
-          <a:srgbClr val="FFFFFF"/>
-        </a:solidFill>
-        <a:effectLst/>
-      </p:bgPr>
-    </p:bg>
-    <p:spTree>
-      <p:nvGrpSpPr>
-        <p:cNvPr id="1" name=""/>
-        <p:cNvGrpSpPr/>
-        <p:nvPr/>
-      </p:nvGrpSpPr>
-      <p:grpSpPr/>
-      <p:sp>
-        <p:nvSpPr>
-          <p:cNvPr id="2" name="Rectangle 1"/>
-          <p:cNvSpPr/>
-          <p:nvPr/>
-        </p:nvSpPr>
-        <p:spPr>
-          <a:xfrm>
-            <a:off x="0" y="0"/>
-            <a:ext cx="12191695" cy="1170432"/>
-          </a:xfrm>
-          <a:prstGeom prst="rect">
-            <a:avLst/>
-          </a:prstGeom>
-          <a:solidFill>
-            <a:srgbClr val="095292"/>
-          </a:solidFill>
-          <a:ln>
-            <a:noFill/>
-          </a:ln>
-        </p:spPr>
-        <p:style>
-          <a:lnRef idx="1">
-            <a:schemeClr val="accent1"/>
-          </a:lnRef>
-          <a:fillRef idx="3">
-            <a:schemeClr val="accent1"/>
-          </a:fillRef>
-          <a:effectRef idx="2">
-            <a:schemeClr val="accent1"/>
-          </a:effectRef>
-          <a:fontRef idx="minor">
-            <a:schemeClr val="lt1"/>
-          </a:fontRef>
-        </p:style>
-        <p:txBody>
-          <a:bodyPr rtlCol="0" anchor="ctr"/>
-          <a:lstStyle/>
-          <a:p>
-            <a:pPr algn="ctr"/>
-          </a:p>
-        </p:txBody>
-      </p:sp>
-      <p:sp>
-        <p:nvSpPr>
-          <p:cNvPr id="3" name="Rectangle 2"/>
-          <p:cNvSpPr/>
-          <p:nvPr/>
-        </p:nvSpPr>
-        <p:spPr>
-          <a:xfrm>
-            <a:off x="0" y="1170432"/>
-            <a:ext cx="12191695" cy="41148"/>
-          </a:xfrm>
-          <a:prstGeom prst="rect">
-            <a:avLst/>
-          </a:prstGeom>
-          <a:solidFill>
-            <a:srgbClr val="FFD000"/>
-          </a:solidFill>
-          <a:ln>
-            <a:noFill/>
-          </a:ln>
-        </p:spPr>
-        <p:style>
-          <a:lnRef idx="1">
-            <a:schemeClr val="accent1"/>
-          </a:lnRef>
-          <a:fillRef idx="3">
-            <a:schemeClr val="accent1"/>
-          </a:fillRef>
-          <a:effectRef idx="2">
-            <a:schemeClr val="accent1"/>
-          </a:effectRef>
-          <a:fontRef idx="minor">
-            <a:schemeClr val="lt1"/>
-          </a:fontRef>
-        </p:style>
-        <p:txBody>
-          <a:bodyPr rtlCol="0" anchor="ctr"/>
-          <a:lstStyle/>
-          <a:p>
-            <a:pPr algn="ctr"/>
-          </a:p>
-        </p:txBody>
-      </p:sp>
-      <p:sp>
-        <p:nvSpPr>
-          <p:cNvPr id="4" name="TextBox 3"/>
-          <p:cNvSpPr txBox="1"/>
-          <p:nvPr/>
-        </p:nvSpPr>
-        <p:spPr>
-          <a:xfrm>
-            <a:off x="457200" y="164592"/>
-            <a:ext cx="11277295" cy="384048"/>
-          </a:xfrm>
-          <a:prstGeom prst="rect">
-            <a:avLst/>
-          </a:prstGeom>
-          <a:noFill/>
-        </p:spPr>
-        <p:txBody>
-          <a:bodyPr wrap="square">
-            <a:spAutoFit/>
-          </a:bodyPr>
-          <a:lstStyle/>
-          <a:p>
-            <a:r>
-              <a:rPr sz="2600" b="1" i="0">
-                <a:solidFill>
-                  <a:srgbClr val="FFFFFF"/>
-                </a:solidFill>
-                <a:latin typeface="Calibri"/>
-              </a:rPr>
-              <a:t>Del boceto al código Mermaid</a:t>
-            </a:r>
-          </a:p>
-        </p:txBody>
-      </p:sp>
-      <p:sp>
-        <p:nvSpPr>
-          <p:cNvPr id="5" name="TextBox 4"/>
-          <p:cNvSpPr txBox="1"/>
-          <p:nvPr/>
-        </p:nvSpPr>
-        <p:spPr>
-          <a:xfrm>
-            <a:off x="457200" y="566928"/>
-            <a:ext cx="11277295" cy="411480"/>
-          </a:xfrm>
-          <a:prstGeom prst="rect">
-            <a:avLst/>
-          </a:prstGeom>
-          <a:noFill/>
-        </p:spPr>
-        <p:txBody>
-          <a:bodyPr wrap="square">
-            <a:spAutoFit/>
-          </a:bodyPr>
-          <a:lstStyle/>
-          <a:p>
-            <a:r>
-              <a:rPr sz="1400" b="0" i="0">
-                <a:solidFill>
-                  <a:srgbClr val="B8D8EE"/>
-                </a:solidFill>
-                <a:latin typeface="Calibri"/>
-              </a:rPr>
-              <a:t>El diagrama se escribe como código: se versiona, se compara y se corrige</a:t>
-            </a:r>
-          </a:p>
-        </p:txBody>
-      </p:sp>
-      <p:sp>
-        <p:nvSpPr>
-          <p:cNvPr id="6" name="Rounded Rectangle 5"/>
-          <p:cNvSpPr/>
-          <p:nvPr/>
-        </p:nvSpPr>
-        <p:spPr>
-          <a:xfrm>
-            <a:off x="457200" y="1659636"/>
-            <a:ext cx="11277295" cy="1051560"/>
-          </a:xfrm>
-          <a:prstGeom prst="roundRect">
-            <a:avLst>
-              <a:gd name="adj" fmla="val 12000"/>
-            </a:avLst>
-          </a:prstGeom>
-          <a:solidFill>
-            <a:srgbClr val="F2F2F2"/>
-          </a:solidFill>
-          <a:ln>
-            <a:noFill/>
-          </a:ln>
-        </p:spPr>
-        <p:style>
-          <a:lnRef idx="1">
-            <a:schemeClr val="accent1"/>
-          </a:lnRef>
-          <a:fillRef idx="3">
-            <a:schemeClr val="accent1"/>
-          </a:fillRef>
-          <a:effectRef idx="2">
-            <a:schemeClr val="accent1"/>
-          </a:effectRef>
-          <a:fontRef idx="minor">
-            <a:schemeClr val="lt1"/>
-          </a:fontRef>
-        </p:style>
-        <p:txBody>
-          <a:bodyPr rtlCol="0" anchor="ctr"/>
-          <a:lstStyle/>
-          <a:p>
-            <a:pPr algn="ctr"/>
-          </a:p>
-        </p:txBody>
-      </p:sp>
-      <p:sp>
-        <p:nvSpPr>
-          <p:cNvPr id="7" name="Rounded Rectangle 6"/>
-          <p:cNvSpPr/>
-          <p:nvPr/>
-        </p:nvSpPr>
-        <p:spPr>
-          <a:xfrm>
-            <a:off x="594360" y="1965960"/>
-            <a:ext cx="438912" cy="438912"/>
-          </a:xfrm>
-          <a:prstGeom prst="roundRect">
-            <a:avLst>
-              <a:gd name="adj" fmla="val 12000"/>
-            </a:avLst>
-          </a:prstGeom>
-          <a:solidFill>
-            <a:srgbClr val="095292"/>
-          </a:solidFill>
-          <a:ln>
-            <a:noFill/>
-          </a:ln>
-        </p:spPr>
-        <p:style>
-          <a:lnRef idx="1">
-            <a:schemeClr val="accent1"/>
-          </a:lnRef>
-          <a:fillRef idx="3">
-            <a:schemeClr val="accent1"/>
-          </a:fillRef>
-          <a:effectRef idx="2">
-            <a:schemeClr val="accent1"/>
-          </a:effectRef>
-          <a:fontRef idx="minor">
-            <a:schemeClr val="lt1"/>
-          </a:fontRef>
-        </p:style>
-        <p:txBody>
-          <a:bodyPr rtlCol="0" anchor="ctr"/>
-          <a:lstStyle/>
-          <a:p>
-            <a:pPr algn="ctr"/>
-          </a:p>
-        </p:txBody>
-      </p:sp>
-      <p:sp>
-        <p:nvSpPr>
-          <p:cNvPr id="8" name="TextBox 7"/>
-          <p:cNvSpPr txBox="1"/>
-          <p:nvPr/>
-        </p:nvSpPr>
-        <p:spPr>
-          <a:xfrm>
-            <a:off x="594360" y="1965960"/>
-            <a:ext cx="438912" cy="438912"/>
-          </a:xfrm>
-          <a:prstGeom prst="rect">
-            <a:avLst/>
-          </a:prstGeom>
-          <a:noFill/>
-        </p:spPr>
-        <p:txBody>
-          <a:bodyPr wrap="square" anchor="ctr"/>
-          <a:lstStyle/>
-          <a:p>
-            <a:pPr algn="ctr"/>
-            <a:r>
-              <a:rPr sz="1600" b="1" i="0">
-                <a:solidFill>
-                  <a:srgbClr val="FFFFFF"/>
-                </a:solidFill>
-                <a:latin typeface="Calibri"/>
-              </a:rPr>
-              <a:t>1</a:t>
-            </a:r>
-          </a:p>
-        </p:txBody>
-      </p:sp>
-      <p:sp>
-        <p:nvSpPr>
-          <p:cNvPr id="9" name="TextBox 8"/>
-          <p:cNvSpPr txBox="1"/>
-          <p:nvPr/>
-        </p:nvSpPr>
-        <p:spPr>
-          <a:xfrm>
-            <a:off x="1188720" y="1751076"/>
-            <a:ext cx="10271455" cy="886968"/>
-          </a:xfrm>
-          <a:prstGeom prst="rect">
-            <a:avLst/>
-          </a:prstGeom>
-          <a:noFill/>
-        </p:spPr>
-        <p:txBody>
-          <a:bodyPr wrap="square" anchor="ctr"/>
-          <a:lstStyle/>
-          <a:p>
-            <a:r>
-              <a:rPr sz="1500" b="1" i="0">
-                <a:solidFill>
-                  <a:srgbClr val="095292"/>
-                </a:solidFill>
-                <a:latin typeface="Calibri"/>
-              </a:rPr>
-              <a:t>Diseña visual</a:t>
-            </a:r>
-          </a:p>
-          <a:p>
-            <a:pPr>
-              <a:spcBef>
-                <a:spcPts val="200"/>
-              </a:spcBef>
-            </a:pPr>
-            <a:r>
-              <a:rPr sz="1300" b="0" i="0">
-                <a:solidFill>
-                  <a:srgbClr val="333333"/>
-                </a:solidFill>
-                <a:latin typeface="Calibri"/>
-              </a:rPr>
-              <a:t>Dibuja el diagrama como quieras en Excalidraw o draw.io: es más rápido arrastrar cajas que escribir código, y ahí es donde se piensa el modelo.</a:t>
-            </a:r>
-          </a:p>
-        </p:txBody>
-      </p:sp>
-      <p:sp>
-        <p:nvSpPr>
-          <p:cNvPr id="10" name="Rounded Rectangle 9"/>
-          <p:cNvSpPr/>
-          <p:nvPr/>
-        </p:nvSpPr>
-        <p:spPr>
-          <a:xfrm>
-            <a:off x="457200" y="2802636"/>
-            <a:ext cx="11277295" cy="1051560"/>
-          </a:xfrm>
-          <a:prstGeom prst="roundRect">
-            <a:avLst>
-              <a:gd name="adj" fmla="val 12000"/>
-            </a:avLst>
-          </a:prstGeom>
-          <a:solidFill>
-            <a:srgbClr val="E8F4FA"/>
-          </a:solidFill>
-          <a:ln>
-            <a:noFill/>
-          </a:ln>
-        </p:spPr>
-        <p:style>
-          <a:lnRef idx="1">
-            <a:schemeClr val="accent1"/>
-          </a:lnRef>
-          <a:fillRef idx="3">
-            <a:schemeClr val="accent1"/>
-          </a:fillRef>
-          <a:effectRef idx="2">
-            <a:schemeClr val="accent1"/>
-          </a:effectRef>
-          <a:fontRef idx="minor">
-            <a:schemeClr val="lt1"/>
-          </a:fontRef>
-        </p:style>
-        <p:txBody>
-          <a:bodyPr rtlCol="0" anchor="ctr"/>
-          <a:lstStyle/>
-          <a:p>
-            <a:pPr algn="ctr"/>
-          </a:p>
-        </p:txBody>
-      </p:sp>
-      <p:sp>
-        <p:nvSpPr>
-          <p:cNvPr id="11" name="Rounded Rectangle 10"/>
-          <p:cNvSpPr/>
-          <p:nvPr/>
-        </p:nvSpPr>
-        <p:spPr>
-          <a:xfrm>
-            <a:off x="594360" y="3108960"/>
-            <a:ext cx="438912" cy="438912"/>
-          </a:xfrm>
-          <a:prstGeom prst="roundRect">
-            <a:avLst>
-              <a:gd name="adj" fmla="val 12000"/>
-            </a:avLst>
-          </a:prstGeom>
-          <a:solidFill>
-            <a:srgbClr val="095292"/>
-          </a:solidFill>
-          <a:ln>
-            <a:noFill/>
-          </a:ln>
-        </p:spPr>
-        <p:style>
-          <a:lnRef idx="1">
-            <a:schemeClr val="accent1"/>
-          </a:lnRef>
-          <a:fillRef idx="3">
-            <a:schemeClr val="accent1"/>
-          </a:fillRef>
-          <a:effectRef idx="2">
-            <a:schemeClr val="accent1"/>
-          </a:effectRef>
-          <a:fontRef idx="minor">
-            <a:schemeClr val="lt1"/>
-          </a:fontRef>
-        </p:style>
-        <p:txBody>
-          <a:bodyPr rtlCol="0" anchor="ctr"/>
-          <a:lstStyle/>
-          <a:p>
-            <a:pPr algn="ctr"/>
-          </a:p>
-        </p:txBody>
-      </p:sp>
-      <p:sp>
-        <p:nvSpPr>
-          <p:cNvPr id="12" name="TextBox 11"/>
-          <p:cNvSpPr txBox="1"/>
-          <p:nvPr/>
-        </p:nvSpPr>
-        <p:spPr>
-          <a:xfrm>
-            <a:off x="594360" y="3108960"/>
-            <a:ext cx="438912" cy="438912"/>
-          </a:xfrm>
-          <a:prstGeom prst="rect">
-            <a:avLst/>
-          </a:prstGeom>
-          <a:noFill/>
-        </p:spPr>
-        <p:txBody>
-          <a:bodyPr wrap="square" anchor="ctr"/>
-          <a:lstStyle/>
-          <a:p>
-            <a:pPr algn="ctr"/>
-            <a:r>
-              <a:rPr sz="1600" b="1" i="0">
-                <a:solidFill>
-                  <a:srgbClr val="FFFFFF"/>
-                </a:solidFill>
-                <a:latin typeface="Calibri"/>
-              </a:rPr>
-              <a:t>2</a:t>
-            </a:r>
-          </a:p>
-        </p:txBody>
-      </p:sp>
-      <p:sp>
-        <p:nvSpPr>
-          <p:cNvPr id="13" name="TextBox 12"/>
-          <p:cNvSpPr txBox="1"/>
-          <p:nvPr/>
-        </p:nvSpPr>
-        <p:spPr>
-          <a:xfrm>
-            <a:off x="1188720" y="2894076"/>
-            <a:ext cx="10271455" cy="886968"/>
-          </a:xfrm>
-          <a:prstGeom prst="rect">
-            <a:avLst/>
-          </a:prstGeom>
-          <a:noFill/>
-        </p:spPr>
-        <p:txBody>
-          <a:bodyPr wrap="square" anchor="ctr"/>
-          <a:lstStyle/>
-          <a:p>
-            <a:r>
-              <a:rPr sz="1500" b="1" i="0">
-                <a:solidFill>
-                  <a:srgbClr val="095292"/>
-                </a:solidFill>
-                <a:latin typeface="Calibri"/>
-              </a:rPr>
-              <a:t>Traduce con IA</a:t>
-            </a:r>
-          </a:p>
-          <a:p>
-            <a:pPr>
-              <a:spcBef>
-                <a:spcPts val="200"/>
-              </a:spcBef>
-            </a:pPr>
-            <a:r>
-              <a:rPr sz="1300" b="0" i="0">
-                <a:solidFill>
-                  <a:srgbClr val="333333"/>
-                </a:solidFill>
-                <a:latin typeface="Calibri"/>
-              </a:rPr>
-              <a:t>Describe tu boceto a una IA y pídele el código Mermaid usando flowchart. Revisa el resultado: la IA acierta la sintaxis, no tu modelo.</a:t>
-            </a:r>
-          </a:p>
-        </p:txBody>
-      </p:sp>
-      <p:sp>
-        <p:nvSpPr>
-          <p:cNvPr id="14" name="Rounded Rectangle 13"/>
-          <p:cNvSpPr/>
-          <p:nvPr/>
-        </p:nvSpPr>
-        <p:spPr>
-          <a:xfrm>
-            <a:off x="457200" y="3945636"/>
-            <a:ext cx="11277295" cy="1051560"/>
-          </a:xfrm>
-          <a:prstGeom prst="roundRect">
-            <a:avLst>
-              <a:gd name="adj" fmla="val 12000"/>
-            </a:avLst>
-          </a:prstGeom>
-          <a:solidFill>
-            <a:srgbClr val="F2F2F2"/>
-          </a:solidFill>
-          <a:ln>
-            <a:noFill/>
-          </a:ln>
-        </p:spPr>
-        <p:style>
-          <a:lnRef idx="1">
-            <a:schemeClr val="accent1"/>
-          </a:lnRef>
-          <a:fillRef idx="3">
-            <a:schemeClr val="accent1"/>
-          </a:fillRef>
-          <a:effectRef idx="2">
-            <a:schemeClr val="accent1"/>
-          </a:effectRef>
-          <a:fontRef idx="minor">
-            <a:schemeClr val="lt1"/>
-          </a:fontRef>
-        </p:style>
-        <p:txBody>
-          <a:bodyPr rtlCol="0" anchor="ctr"/>
-          <a:lstStyle/>
-          <a:p>
-            <a:pPr algn="ctr"/>
-          </a:p>
-        </p:txBody>
-      </p:sp>
-      <p:sp>
-        <p:nvSpPr>
-          <p:cNvPr id="15" name="Rounded Rectangle 14"/>
-          <p:cNvSpPr/>
-          <p:nvPr/>
-        </p:nvSpPr>
-        <p:spPr>
-          <a:xfrm>
-            <a:off x="594360" y="4251960"/>
-            <a:ext cx="438912" cy="438912"/>
-          </a:xfrm>
-          <a:prstGeom prst="roundRect">
-            <a:avLst>
-              <a:gd name="adj" fmla="val 12000"/>
-            </a:avLst>
-          </a:prstGeom>
-          <a:solidFill>
-            <a:srgbClr val="095292"/>
-          </a:solidFill>
-          <a:ln>
-            <a:noFill/>
-          </a:ln>
-        </p:spPr>
-        <p:style>
-          <a:lnRef idx="1">
-            <a:schemeClr val="accent1"/>
-          </a:lnRef>
-          <a:fillRef idx="3">
-            <a:schemeClr val="accent1"/>
-          </a:fillRef>
-          <a:effectRef idx="2">
-            <a:schemeClr val="accent1"/>
-          </a:effectRef>
-          <a:fontRef idx="minor">
-            <a:schemeClr val="lt1"/>
-          </a:fontRef>
-        </p:style>
-        <p:txBody>
-          <a:bodyPr rtlCol="0" anchor="ctr"/>
-          <a:lstStyle/>
-          <a:p>
-            <a:pPr algn="ctr"/>
-          </a:p>
-        </p:txBody>
-      </p:sp>
-      <p:sp>
-        <p:nvSpPr>
-          <p:cNvPr id="16" name="TextBox 15"/>
-          <p:cNvSpPr txBox="1"/>
-          <p:nvPr/>
-        </p:nvSpPr>
-        <p:spPr>
-          <a:xfrm>
-            <a:off x="594360" y="4251960"/>
-            <a:ext cx="438912" cy="438912"/>
-          </a:xfrm>
-          <a:prstGeom prst="rect">
-            <a:avLst/>
-          </a:prstGeom>
-          <a:noFill/>
-        </p:spPr>
-        <p:txBody>
-          <a:bodyPr wrap="square" anchor="ctr"/>
-          <a:lstStyle/>
-          <a:p>
-            <a:pPr algn="ctr"/>
-            <a:r>
-              <a:rPr sz="1600" b="1" i="0">
-                <a:solidFill>
-                  <a:srgbClr val="FFFFFF"/>
-                </a:solidFill>
-                <a:latin typeface="Calibri"/>
-              </a:rPr>
-              <a:t>3</a:t>
-            </a:r>
-          </a:p>
-        </p:txBody>
-      </p:sp>
-      <p:sp>
-        <p:nvSpPr>
-          <p:cNvPr id="17" name="TextBox 16"/>
-          <p:cNvSpPr txBox="1"/>
-          <p:nvPr/>
-        </p:nvSpPr>
-        <p:spPr>
-          <a:xfrm>
-            <a:off x="1188720" y="4037076"/>
-            <a:ext cx="10271455" cy="886968"/>
-          </a:xfrm>
-          <a:prstGeom prst="rect">
-            <a:avLst/>
-          </a:prstGeom>
-          <a:noFill/>
-        </p:spPr>
-        <p:txBody>
-          <a:bodyPr wrap="square" anchor="ctr"/>
-          <a:lstStyle/>
-          <a:p>
-            <a:r>
-              <a:rPr sz="1500" b="1" i="0">
-                <a:solidFill>
-                  <a:srgbClr val="095292"/>
-                </a:solidFill>
-                <a:latin typeface="Calibri"/>
-              </a:rPr>
-              <a:t>Renderiza en un visor</a:t>
-            </a:r>
-          </a:p>
-          <a:p>
-            <a:pPr>
-              <a:spcBef>
-                <a:spcPts val="200"/>
-              </a:spcBef>
-            </a:pPr>
-            <a:r>
-              <a:rPr sz="1300" b="0" i="0">
-                <a:solidFill>
-                  <a:srgbClr val="333333"/>
-                </a:solidFill>
-                <a:latin typeface="Calibri"/>
-              </a:rPr>
-              <a:t>Pega el código en un visor Mermaid (mermaid.live o la vista previa de tu editor) y míralo dibujado. Si no renderiza, corrige ahí: un end faltante o un rótulo sin comillas.</a:t>
-            </a:r>
-          </a:p>
-        </p:txBody>
-      </p:sp>
-      <p:sp>
-        <p:nvSpPr>
-          <p:cNvPr id="18" name="Rounded Rectangle 17"/>
-          <p:cNvSpPr/>
-          <p:nvPr/>
-        </p:nvSpPr>
-        <p:spPr>
-          <a:xfrm>
-            <a:off x="457200" y="5088636"/>
-            <a:ext cx="11277295" cy="1051560"/>
-          </a:xfrm>
-          <a:prstGeom prst="roundRect">
-            <a:avLst>
-              <a:gd name="adj" fmla="val 12000"/>
-            </a:avLst>
-          </a:prstGeom>
-          <a:solidFill>
-            <a:srgbClr val="E8F4FA"/>
-          </a:solidFill>
-          <a:ln>
-            <a:noFill/>
-          </a:ln>
-        </p:spPr>
-        <p:style>
-          <a:lnRef idx="1">
-            <a:schemeClr val="accent1"/>
-          </a:lnRef>
-          <a:fillRef idx="3">
-            <a:schemeClr val="accent1"/>
-          </a:fillRef>
-          <a:effectRef idx="2">
-            <a:schemeClr val="accent1"/>
-          </a:effectRef>
-          <a:fontRef idx="minor">
-            <a:schemeClr val="lt1"/>
-          </a:fontRef>
-        </p:style>
-        <p:txBody>
-          <a:bodyPr rtlCol="0" anchor="ctr"/>
-          <a:lstStyle/>
-          <a:p>
-            <a:pPr algn="ctr"/>
-          </a:p>
-        </p:txBody>
-      </p:sp>
-      <p:sp>
-        <p:nvSpPr>
-          <p:cNvPr id="19" name="Rounded Rectangle 18"/>
-          <p:cNvSpPr/>
-          <p:nvPr/>
-        </p:nvSpPr>
-        <p:spPr>
-          <a:xfrm>
-            <a:off x="594360" y="5394960"/>
-            <a:ext cx="438912" cy="438912"/>
-          </a:xfrm>
-          <a:prstGeom prst="roundRect">
-            <a:avLst>
-              <a:gd name="adj" fmla="val 12000"/>
-            </a:avLst>
-          </a:prstGeom>
-          <a:solidFill>
-            <a:srgbClr val="095292"/>
-          </a:solidFill>
-          <a:ln>
-            <a:noFill/>
-          </a:ln>
-        </p:spPr>
-        <p:style>
-          <a:lnRef idx="1">
-            <a:schemeClr val="accent1"/>
-          </a:lnRef>
-          <a:fillRef idx="3">
-            <a:schemeClr val="accent1"/>
-          </a:fillRef>
-          <a:effectRef idx="2">
-            <a:schemeClr val="accent1"/>
-          </a:effectRef>
-          <a:fontRef idx="minor">
-            <a:schemeClr val="lt1"/>
-          </a:fontRef>
-        </p:style>
-        <p:txBody>
-          <a:bodyPr rtlCol="0" anchor="ctr"/>
-          <a:lstStyle/>
-          <a:p>
-            <a:pPr algn="ctr"/>
-          </a:p>
-        </p:txBody>
-      </p:sp>
-      <p:sp>
-        <p:nvSpPr>
-          <p:cNvPr id="20" name="TextBox 19"/>
-          <p:cNvSpPr txBox="1"/>
-          <p:nvPr/>
-        </p:nvSpPr>
-        <p:spPr>
-          <a:xfrm>
-            <a:off x="594360" y="5394960"/>
-            <a:ext cx="438912" cy="438912"/>
-          </a:xfrm>
-          <a:prstGeom prst="rect">
-            <a:avLst/>
-          </a:prstGeom>
-          <a:noFill/>
-        </p:spPr>
-        <p:txBody>
-          <a:bodyPr wrap="square" anchor="ctr"/>
-          <a:lstStyle/>
-          <a:p>
-            <a:pPr algn="ctr"/>
-            <a:r>
-              <a:rPr sz="1600" b="1" i="0">
-                <a:solidFill>
-                  <a:srgbClr val="FFFFFF"/>
-                </a:solidFill>
-                <a:latin typeface="Calibri"/>
-              </a:rPr>
-              <a:t>4</a:t>
-            </a:r>
-          </a:p>
-        </p:txBody>
-      </p:sp>
-      <p:sp>
-        <p:nvSpPr>
-          <p:cNvPr id="21" name="TextBox 20"/>
-          <p:cNvSpPr txBox="1"/>
-          <p:nvPr/>
-        </p:nvSpPr>
-        <p:spPr>
-          <a:xfrm>
-            <a:off x="1188720" y="5180076"/>
-            <a:ext cx="10271455" cy="886968"/>
-          </a:xfrm>
-          <a:prstGeom prst="rect">
-            <a:avLst/>
-          </a:prstGeom>
-          <a:noFill/>
-        </p:spPr>
-        <p:txBody>
-          <a:bodyPr wrap="square" anchor="ctr"/>
-          <a:lstStyle/>
-          <a:p>
-            <a:r>
-              <a:rPr sz="1500" b="1" i="0">
-                <a:solidFill>
-                  <a:srgbClr val="095292"/>
-                </a:solidFill>
-                <a:latin typeface="Calibri"/>
-              </a:rPr>
-              <a:t>Guarda código e imagen</a:t>
-            </a:r>
-          </a:p>
-          <a:p>
-            <a:pPr>
-              <a:spcBef>
-                <a:spcPts val="200"/>
-              </a:spcBef>
-            </a:pPr>
-            <a:r>
-              <a:rPr sz="1300" b="0" i="0">
-                <a:solidFill>
-                  <a:srgbClr val="333333"/>
-                </a:solidFill>
-                <a:latin typeface="Calibri"/>
-              </a:rPr>
-              <a:t>El código es la fuente del diagrama: guárdalo con tu proyecto junto con el PNG exportado.</a:t>
-            </a:r>
-          </a:p>
-        </p:txBody>
-      </p:sp>
-      <p:sp>
-        <p:nvSpPr>
-          <p:cNvPr id="22" name="TextBox 21"/>
-          <p:cNvSpPr txBox="1"/>
-          <p:nvPr/>
-        </p:nvSpPr>
-        <p:spPr>
-          <a:xfrm>
-            <a:off x="11185855" y="6473952"/>
-            <a:ext cx="640080" cy="274320"/>
-          </a:xfrm>
-          <a:prstGeom prst="rect">
-            <a:avLst/>
-          </a:prstGeom>
-          <a:noFill/>
-        </p:spPr>
-        <p:txBody>
-          <a:bodyPr wrap="square">
-            <a:spAutoFit/>
-          </a:bodyPr>
-          <a:lstStyle/>
-          <a:p>
-            <a:pPr algn="r"/>
-            <a:r>
-              <a:rPr sz="1100" b="0" i="0">
-                <a:solidFill>
-                  <a:srgbClr val="666666"/>
-                </a:solidFill>
-                <a:latin typeface="Calibri"/>
-              </a:rPr>
-              <a:t>18</a:t>
-            </a:r>
-          </a:p>
-        </p:txBody>
-      </p:sp>
-    </p:spTree>
-  </p:cSld>
-  <p:clrMapOvr>
-    <a:masterClrMapping/>
-  </p:clrMapOvr>
-</p:sld>
-</file>
-
-<file path=ppt/slides/slide19.xml><?xml version="1.0" encoding="utf-8"?>
-<p:sld xmlns:a="http://schemas.openxmlformats.org/drawingml/2006/main" xmlns:p="http://schemas.openxmlformats.org/presentationml/2006/main" xmlns:r="http://schemas.openxmlformats.org/officeDocument/2006/relationships">
-  <p:cSld>
-    <p:bg>
-      <p:bgPr>
-        <a:solidFill>
-          <a:srgbClr val="FFFFFF"/>
-        </a:solidFill>
-        <a:effectLst/>
-      </p:bgPr>
-    </p:bg>
-    <p:spTree>
-      <p:nvGrpSpPr>
-        <p:cNvPr id="1" name=""/>
-        <p:cNvGrpSpPr/>
-        <p:nvPr/>
-      </p:nvGrpSpPr>
-      <p:grpSpPr/>
-      <p:sp>
-        <p:nvSpPr>
-          <p:cNvPr id="2" name="Rectangle 1"/>
-          <p:cNvSpPr/>
-          <p:nvPr/>
-        </p:nvSpPr>
-        <p:spPr>
-          <a:xfrm>
-            <a:off x="0" y="0"/>
             <a:ext cx="12191695" cy="164592"/>
           </a:xfrm>
           <a:prstGeom prst="rect">
@@ -8679,7 +7898,7 @@
                 </a:solidFill>
                 <a:latin typeface="Calibri"/>
               </a:rPr>
-              <a:t>–   Sustentar no es describir, y esa distincion es el eje de toda la clase.</a:t>
+              <a:t>–   Describir un artefacto es decir que contiene: «este es el diagrama de despliegue de la app, aqui esta el contenedor de la API, aqui la base de datos».</a:t>
             </a:r>
           </a:p>
           <a:p>
@@ -8695,7 +7914,7 @@
                 </a:solidFill>
                 <a:latin typeface="Calibri"/>
               </a:rPr>
-              <a:t>–   Describir un artefacto es decir que contiene: «este es el diagrama de despliegue de la app, aqui esta el contenedor de la API, aqui la base de datos».</a:t>
+              <a:t>–   Sustentar es responder por que quedo asi y no de otra forma, y que se acepto perder al elegirlo.</a:t>
             </a:r>
           </a:p>
           <a:p>
@@ -8711,7 +7930,7 @@
                 </a:solidFill>
                 <a:latin typeface="Calibri"/>
               </a:rPr>
-              <a:t>–   Sustentar es responder por que quedo asi y no de otra forma, y que se acepto perder al elegirlo.</a:t>
+              <a:t>–   Si una eleccion no cumple esas tres condiciones no es arquitectura sino detalle de implementacion: elegir el nombre de una variable no es arquitectura, elegir si el frontend y la API viven en el mismo contenedor si lo es.</a:t>
             </a:r>
           </a:p>
           <a:p>
@@ -8727,7 +7946,7 @@
                 </a:solidFill>
                 <a:latin typeface="Calibri"/>
               </a:rPr>
-              <a:t>–   Si una eleccion no cumple esas tres condiciones no es arquitectura sino detalle de implementacion: elegir el nombre de una variable no es arquitectura, elegir si el frontend y la API viven en el mismo contenedor si lo es.</a:t>
+              <a:t>–   Un trade-off es lo que se sacrifica al tomar esa decision.</a:t>
             </a:r>
           </a:p>
           <a:p>
@@ -8743,7 +7962,7 @@
                 </a:solidFill>
                 <a:latin typeface="Calibri"/>
               </a:rPr>
-              <a:t>–   Un trade-off es lo que se sacrifica al tomar esa decision.</a:t>
+              <a:t>–   No existe decision de arquitectura sin trade-off, y cuando un estudiante afirma que su opcion es mejor en todo, lo que ocurre en realidad es que todavia no encontro que perdio.</a:t>
             </a:r>
           </a:p>
         </p:txBody>
@@ -8963,7 +8182,7 @@
                 </a:solidFill>
                 <a:latin typeface="Calibri"/>
               </a:rPr>
-              <a:t>–   No existe decision de arquitectura sin trade-off, y cuando un estudiante afirma que su opcion es mejor en todo, lo que ocurre en realidad es que todavia no encontro que perdio.</a:t>
+              <a:t>–   Toda la sustentacion de hoy se apoya en esta distincion, porque lo que vale no es describir bien sino justificar bien.</a:t>
             </a:r>
           </a:p>
           <a:p>
@@ -8979,7 +8198,7 @@
                 </a:solidFill>
                 <a:latin typeface="Calibri"/>
               </a:rPr>
-              <a:t>–   Toda la sustentacion de hoy se apoya en esta distincion, porque lo que vale no es describir bien sino justificar bien.</a:t>
+              <a:t>–   Un ejemplo de las dos formas en la app: describir es «la API corre en un contenedor sobre PaaS»</a:t>
             </a:r>
           </a:p>
           <a:p>
@@ -8995,7 +8214,7 @@
                 </a:solidFill>
                 <a:latin typeface="Calibri"/>
               </a:rPr>
-              <a:t>–   Un ejemplo de las dos formas en la app: describir es «la API corre en un contenedor sobre PaaS»</a:t>
+              <a:t>–   Justificar es «la API corre sobre PaaS porque el equipo es de 1 persona y no puede operar parches del sistema operativo; a cambio aceptamos menos control sobre la red».</a:t>
             </a:r>
           </a:p>
           <a:p>
@@ -9011,7 +8230,7 @@
                 </a:solidFill>
                 <a:latin typeface="Calibri"/>
               </a:rPr>
-              <a:t>–   Justificar es «la API corre sobre PaaS porque el equipo es de 1 persona y no puede operar parches del sistema operativo; a cambio aceptamos menos control sobre la red».</a:t>
+              <a:t>–   Un error comun es responder con la tecnologia en lugar de la razon: «usamos Docker» no justifica nada</a:t>
             </a:r>
           </a:p>
         </p:txBody>
@@ -9192,7 +8411,7 @@
                 </a:solidFill>
                 <a:latin typeface="Calibri"/>
               </a:rPr>
-              <a:t>La prueba de tres capas que se aplica en voz alta</a:t>
+              <a:t>La prueba de tres capas</a:t>
             </a:r>
           </a:p>
         </p:txBody>
@@ -9264,22 +8483,6 @@
                 <a:latin typeface="Calibri"/>
               </a:rPr>
               <a:t>–   Tercera capa, A CAMBIO DE QUE: «a cambio de perder el aislamiento fuerte que da una maquina virtual completa, y de asumir que si el host cae, caen todos los servicios a la vez porque comparten el mismo kernel».</a:t>
-            </a:r>
-          </a:p>
-          <a:p>
-            <a:pPr>
-              <a:spcAft>
-                <a:spcPts val="800"/>
-              </a:spcAft>
-            </a:pPr>
-            <a:r>
-              <a:rPr sz="2000" b="0" i="0">
-                <a:solidFill>
-                  <a:srgbClr val="333333"/>
-                </a:solidFill>
-                <a:latin typeface="Calibri"/>
-              </a:rPr>
-              <a:t>–   La instruccion operativa para el docente es simple: ante cada afirmacion, preguntar «a cambio de que», y no aceptar la respuesta «de nada».</a:t>
             </a:r>
           </a:p>
         </p:txBody>
@@ -9460,7 +8663,7 @@
                 </a:solidFill>
                 <a:latin typeface="Calibri"/>
               </a:rPr>
-              <a:t>El ADR: el artefacto que sostiene la tercera capa (1/2)</a:t>
+              <a:t>El ADR: el artefacto que sostiene la tercera capa</a:t>
             </a:r>
           </a:p>
         </p:txBody>
@@ -9499,7 +8702,7 @@
                 </a:solidFill>
                 <a:latin typeface="Calibri"/>
               </a:rPr>
-              <a:t>–   El artefacto que sostiene esa tercera capa es el ADR, o Architecture Decision Record: un documento corto, de una pagina como maximo</a:t>
+              <a:t>–   Titulo, con el numero consecutivo, que es justamente por lo que se cita.</a:t>
             </a:r>
           </a:p>
           <a:p>
@@ -9515,7 +8718,7 @@
                 </a:solidFill>
                 <a:latin typeface="Calibri"/>
               </a:rPr>
-              <a:t>–   Que registra UNA sola decision con las seis secciones rotuladas que el curso fijo en la Clase 2 y que no han cambiado desde entonces.</a:t>
+              <a:t>–   Contexto, es decir que problema se estaba resolviendo y con que restricciones.</a:t>
             </a:r>
           </a:p>
           <a:p>
@@ -9531,7 +8734,7 @@
                 </a:solidFill>
                 <a:latin typeface="Calibri"/>
               </a:rPr>
-              <a:t>–   Titulo, con el numero consecutivo, que es justamente por lo que se cita.</a:t>
+              <a:t>–   Y consecuencias, donde se escribe lo bueno, lo malo y lo neutro que se acepta.</a:t>
             </a:r>
           </a:p>
           <a:p>
@@ -9547,39 +8750,7 @@
                 </a:solidFill>
                 <a:latin typeface="Calibri"/>
               </a:rPr>
-              <a:t>–   Contexto, es decir que problema se estaba resolviendo y con que restricciones.</a:t>
-            </a:r>
-          </a:p>
-          <a:p>
-            <a:pPr>
-              <a:spcAft>
-                <a:spcPts val="800"/>
-              </a:spcAft>
-            </a:pPr>
-            <a:r>
-              <a:rPr sz="2000" b="0" i="0">
-                <a:solidFill>
-                  <a:srgbClr val="333333"/>
-                </a:solidFill>
-                <a:latin typeface="Calibri"/>
-              </a:rPr>
-              <a:t>–   Y consecuencias, donde se escribe lo bueno, lo malo y lo neutro que se acepta.</a:t>
-            </a:r>
-          </a:p>
-          <a:p>
-            <a:pPr>
-              <a:spcAft>
-                <a:spcPts val="800"/>
-              </a:spcAft>
-            </a:pPr>
-            <a:r>
-              <a:rPr sz="2000" b="0" i="0">
-                <a:solidFill>
-                  <a:srgbClr val="333333"/>
-                </a:solidFill>
-                <a:latin typeface="Calibri"/>
-              </a:rPr>
-              <a:t>–   Los estudiantes ya produjeron el ADR-001 en la Clase 2, cuando decidieron el modelo de servicio dominante entre IaaS, PaaS y SaaS</a:t>
+              <a:t>–   La forma profesional es «esta decision esta registrada en el ADR-002, y el trade-off que aceptamos fue perder portabilidad entre proveedores», con el numero del ADR visible en la diapositiva.</a:t>
             </a:r>
           </a:p>
         </p:txBody>
@@ -9760,7 +8931,7 @@
                 </a:solidFill>
                 <a:latin typeface="Calibri"/>
               </a:rPr>
-              <a:t>El ADR: el artefacto que sostiene la tercera capa (2/2)</a:t>
+              <a:t>El pitch de 5 a 8 minutos: el reparto que funciona (1/2)</a:t>
             </a:r>
           </a:p>
         </p:txBody>
@@ -9799,7 +8970,7 @@
                 </a:solidFill>
                 <a:latin typeface="Calibri"/>
               </a:rPr>
-              <a:t>–   A lo largo del curso debieron acumular tres o cuatro mas: contenedores frente a maquinas virtuales (Clase 3), donde poner la frontera entre servicios (Clase 4), y que se escala y que no (Clase 13).</a:t>
+              <a:t>–   Un pitch tecnico de 5 a 8 minutos no se improvisa ni se llena de diapositivas.</a:t>
             </a:r>
           </a:p>
           <a:p>
@@ -9815,7 +8986,7 @@
                 </a:solidFill>
                 <a:latin typeface="Calibri"/>
               </a:rPr>
-              <a:t>–   En la sustentacion el ADR no se lee en voz alta: se cita.</a:t>
+              <a:t>–   El reparto que funciona, y que es convencion de industria y no regla dura, es el siguiente: 45 a 60 segundos para el problema y el dominio, es decir que hace la app y para quien, sin nombrar una sola tecnologia todavia</a:t>
             </a:r>
           </a:p>
           <a:p>
@@ -9831,7 +9002,23 @@
                 </a:solidFill>
                 <a:latin typeface="Calibri"/>
               </a:rPr>
-              <a:t>–   La forma profesional es «esta decision esta registrada en el ADR-002, y el trade-off que aceptamos fue perder portabilidad entre proveedores», con el numero del ADR visible en la diapositiva.</a:t>
+              <a:t>–   90 segundos para la arquitectura, apoyandose en el diagrama de contexto y el de contenedores</a:t>
+            </a:r>
+          </a:p>
+          <a:p>
+            <a:pPr>
+              <a:spcAft>
+                <a:spcPts val="800"/>
+              </a:spcAft>
+            </a:pPr>
+            <a:r>
+              <a:rPr sz="2000" b="0" i="0">
+                <a:solidFill>
+                  <a:srgbClr val="333333"/>
+                </a:solidFill>
+                <a:latin typeface="Calibri"/>
+              </a:rPr>
+              <a:t>–   90 segundos para la decision principal con su trade-off, citando el ADR; 60 a 90 segundos para la evidencia ejecutable, o sea la captura de la sesion del laboratorio con el contenedor corriendo y el workflow de GitHub Actions en verde</a:t>
             </a:r>
           </a:p>
         </p:txBody>

--- a/Arquitectura de Sistemas Computacionales/Clases/Clase 15 - Presentacion del proyecto y cierre/Presentacion.pptx
+++ b/Arquitectura de Sistemas Computacionales/Clases/Clase 15 - Presentacion del proyecto y cierre/Presentacion.pptx
@@ -9,7 +9,7 @@
     <p:sldId id="257" r:id="rId8"/>
     <p:sldId id="258" r:id="rId9"/>
     <p:sldId id="259" r:id="rId10"/>
-    <p:sldId id="260" r:id="rId11"/>
+    <p:sldId id="260" r:id="rId12"/>
     <p:sldId id="261" r:id="rId13"/>
     <p:sldId id="262" r:id="rId14"/>
     <p:sldId id="263" r:id="rId15"/>
@@ -18,9 +18,6 @@
     <p:sldId id="266" r:id="rId18"/>
     <p:sldId id="267" r:id="rId19"/>
     <p:sldId id="268" r:id="rId20"/>
-    <p:sldId id="269" r:id="rId21"/>
-    <p:sldId id="270" r:id="rId22"/>
-    <p:sldId id="271" r:id="rId23"/>
   </p:sldIdLst>
   <p:sldSz cx="12191695" cy="6858000" type="screen4x3"/>
   <p:notesSz cx="6858000" cy="9144000"/>
@@ -517,6 +514,72 @@
           <a:lstStyle/>
           <a:p>
             <a:r>
+              <a:t>DESARROLLO (para explicarlo, no se proyecta):</a:t>
+            </a:r>
+          </a:p>
+          <a:p/>
+          <a:p>
+            <a:r>
+              <a:t>Describir un artefacto es decir que contiene: «este es el diagrama de despliegue de CloudLite App, aqui esta el contenedor de la API, aqui la base de datos».</a:t>
+            </a:r>
+          </a:p>
+          <a:p/>
+          <a:p>
+            <a:r>
+              <a:t>Sustentar es responder por que quedo asi y no de otra forma, y que se acepto perder al elegirlo.</a:t>
+            </a:r>
+          </a:p>
+          <a:p/>
+          <a:p>
+            <a:r>
+              <a:t>Si una eleccion no cumple esas tres condiciones no es arquitectura sino detalle de implementacion: elegir el nombre de una variable no es arquitectura, elegir si el frontend y la API viven en el mismo contenedor si lo es.</a:t>
+            </a:r>
+          </a:p>
+          <a:p/>
+          <a:p>
+            <a:r>
+              <a:t>Un trade-off es lo que se sacrifica al tomar esa decision.</a:t>
+            </a:r>
+          </a:p>
+          <a:p/>
+          <a:p>
+            <a:r>
+              <a:t>No existe decision de arquitectura sin trade-off, y cuando un estudiante afirma que su opcion es mejor en todo, lo que ocurre en realidad es que todavia no encontro que perdio.</a:t>
+            </a:r>
+          </a:p>
+          <a:p/>
+          <a:p>
+            <a:r>
+              <a:t>Toda la sustentacion de hoy se apoya en esta distincion, porque lo que vale no es describir bien sino justificar bien.</a:t>
+            </a:r>
+          </a:p>
+          <a:p/>
+          <a:p>
+            <a:r>
+              <a:t>Un ejemplo de las dos formas en CloudLite: describir es «la API corre en un contenedor sobre PaaS»</a:t>
+            </a:r>
+          </a:p>
+          <a:p/>
+          <a:p>
+            <a:r>
+              <a:t>Justificar es «la API corre sobre PaaS porque el equipo es de 1 persona y no puede operar parches del sistema operativo; a cambio aceptamos menos control sobre la red».</a:t>
+            </a:r>
+          </a:p>
+          <a:p/>
+          <a:p>
+            <a:r>
+              <a:t>Un error comun es responder con la tecnologia en lugar de la razon: «usamos Docker» no justifica nada</a:t>
+            </a:r>
+          </a:p>
+          <a:p/>
+          <a:p>
+            <a:r>
+              <a:t>NOTAS:</a:t>
+            </a:r>
+          </a:p>
+          <a:p/>
+          <a:p>
+            <a:r>
               <a:t>«usamos Docker porque el mismo artefacto corre igual en el laboratorio y en produccion» si justifica.</a:t>
             </a:r>
           </a:p>
@@ -599,6 +662,36 @@
           <a:lstStyle/>
           <a:p>
             <a:r>
+              <a:t>DESARROLLO (para explicarlo, no se proyecta):</a:t>
+            </a:r>
+          </a:p>
+          <a:p/>
+          <a:p>
+            <a:r>
+              <a:t>Primera capa, el QUE: «CloudLite corre con un contenedor por servicio».</a:t>
+            </a:r>
+          </a:p>
+          <a:p/>
+          <a:p>
+            <a:r>
+              <a:t>Segunda capa, el POR QUE: «porque el proyecto lo sostiene una sola persona sin presupuesto de nube, y un contenedor se levanta igual en el portatil de cualquiera y en Killercoda, sin instalar un hipervisor ni pedir tarjeta de credito».</a:t>
+            </a:r>
+          </a:p>
+          <a:p/>
+          <a:p>
+            <a:r>
+              <a:t>Tercera capa, A CAMBIO DE QUE: «a cambio de perder el aislamiento fuerte que da una maquina virtual completa, y de asumir que si el host cae, caen todos los servicios a la vez porque comparten el mismo kernel».</a:t>
+            </a:r>
+          </a:p>
+          <a:p/>
+          <a:p>
+            <a:r>
+              <a:t>NOTAS:</a:t>
+            </a:r>
+          </a:p>
+          <a:p/>
+          <a:p>
+            <a:r>
               <a:t>Quien llega a la segunda esta justificando.</a:t>
             </a:r>
           </a:p>
@@ -693,6 +786,42 @@
           <a:lstStyle/>
           <a:p>
             <a:r>
+              <a:t>DESARROLLO (para explicarlo, no se proyecta):</a:t>
+            </a:r>
+          </a:p>
+          <a:p/>
+          <a:p>
+            <a:r>
+              <a:t>Titulo, con el numero consecutivo, que es justamente por lo que se cita.</a:t>
+            </a:r>
+          </a:p>
+          <a:p/>
+          <a:p>
+            <a:r>
+              <a:t>Contexto, es decir que problema se estaba resolviendo y con que restricciones.</a:t>
+            </a:r>
+          </a:p>
+          <a:p/>
+          <a:p>
+            <a:r>
+              <a:t>Y consecuencias, donde se escribe lo bueno, lo malo y lo neutro que se acepta.</a:t>
+            </a:r>
+          </a:p>
+          <a:p/>
+          <a:p>
+            <a:r>
+              <a:t>La forma profesional es «esta decision esta registrada en el ADR-002, y el trade-off que aceptamos fue perder portabilidad entre proveedores», con el numero del ADR visible en la diapositiva.</a:t>
+            </a:r>
+          </a:p>
+          <a:p/>
+          <a:p>
+            <a:r>
+              <a:t>NOTAS:</a:t>
+            </a:r>
+          </a:p>
+          <a:p/>
+          <a:p>
+            <a:r>
               <a:t>Estado, «Aceptado» mas la fecha en que se decidio.</a:t>
             </a:r>
           </a:p>
@@ -799,6 +928,66 @@
           <a:lstStyle/>
           <a:p>
             <a:r>
+              <a:t>DESARROLLO (para explicarlo, no se proyecta):</a:t>
+            </a:r>
+          </a:p>
+          <a:p/>
+          <a:p>
+            <a:r>
+              <a:t>Un pitch tecnico de 5 a 8 minutos no se improvisa ni se llena de diapositivas.</a:t>
+            </a:r>
+          </a:p>
+          <a:p/>
+          <a:p>
+            <a:r>
+              <a:t>El reparto que funciona, y que es convencion de industria y no regla dura, es el siguiente: 45 a 60 segundos para el problema y el dominio, es decir que hace CloudLite y para quien, sin nombrar una sola tecnologia todavia</a:t>
+            </a:r>
+          </a:p>
+          <a:p/>
+          <a:p>
+            <a:r>
+              <a:t>90 segundos para la arquitectura, apoyandose en el diagrama de contexto y el de contenedores</a:t>
+            </a:r>
+          </a:p>
+          <a:p/>
+          <a:p>
+            <a:r>
+              <a:t>90 segundos para la decision principal con su trade-off, citando el ADR; 60 a 90 segundos para la evidencia ejecutable, o sea la captura de la sesion del laboratorio con el contenedor corriendo y el workflow de GitHub Actions en verde</a:t>
+            </a:r>
+          </a:p>
+          <a:p/>
+          <a:p>
+            <a:r>
+              <a:t>45 segundos para el punto debil declarado, lo que no escala o lo que no se midio; y 30 segundos de cierre.</a:t>
+            </a:r>
+          </a:p>
+          <a:p/>
+          <a:p>
+            <a:r>
+              <a:t>La suma queda entre 6 y 7 minutos, con margen para tropiezos.</a:t>
+            </a:r>
+          </a:p>
+          <a:p/>
+          <a:p>
+            <a:r>
+              <a:t>La regla practica de diapositivas es una idea por diapositiva y un maximo de ocho diapositivas para ocho minutos.</a:t>
+            </a:r>
+          </a:p>
+          <a:p/>
+          <a:p>
+            <a:r>
+              <a:t>Un error comun es gastar la mitad del tiempo en el dominio: el problema se cuenta en 1 minuto, y el resto es arquitectura y decisiones.</a:t>
+            </a:r>
+          </a:p>
+          <a:p/>
+          <a:p>
+            <a:r>
+              <a:t>Otro es leer las diapositivas: la diapositiva muestra el diagrama y la persona explica la decision; si el texto proyectado y lo dicho son iguales, sobra uno de los dos.</a:t>
+            </a:r>
+          </a:p>
+          <a:p/>
+          <a:p>
+            <a:r>
               <a:t>(No se proyecta) La razon es concreta y el docente debe decirla: si el estudiante trae veinte diapositivas, no termina, corre las ultimas, y las ultimas suelen ser justamente las de seguridad, costos y escalabilidad, donde estan los puntos de la rubrica que menos se defienden solos.</a:t>
             </a:r>
           </a:p>
@@ -869,6 +1058,30 @@
           <a:lstStyle/>
           <a:p>
             <a:r>
+              <a:t>DESARROLLO (para explicarlo, no se proyecta):</a:t>
+            </a:r>
+          </a:p>
+          <a:p/>
+          <a:p>
+            <a:r>
+              <a:t>En un equipo profesional, cuando el sistema falla a las once de la noche, contesta quien esta disponible, no el autor del diagrama; un sistema que solo una persona entiende es un riesgo operativo con nombre propio.</a:t>
+            </a:r>
+          </a:p>
+          <a:p/>
+          <a:p>
+            <a:r>
+              <a:t>La practica concreta que se recomienda antes de presentar es un ensayo cruzado con otro estudiante: cada uno explica en 60 segundos una parte del sistema del otro y devuelve los huecos que encontro (en equipo, cada integrante explica una parte que NO le toco preparar).</a:t>
+            </a:r>
+          </a:p>
+          <a:p/>
+          <a:p>
+            <a:r>
+              <a:t>NOTAS:</a:t>
+            </a:r>
+          </a:p>
+          <a:p/>
+          <a:p>
+            <a:r>
               <a:t>La razon no es castigar.</a:t>
             </a:r>
           </a:p>
@@ -981,6 +1194,36 @@
           <a:lstStyle/>
           <a:p>
             <a:r>
+              <a:t>DESARROLLO (para explicarlo, no se proyecta):</a:t>
+            </a:r>
+          </a:p>
+          <a:p/>
+          <a:p>
+            <a:r>
+              <a:t>La pregunta de profundizacion empuja un nivel mas alla de lo presentado: «por que la base de datos no esta en el mismo contenedor que la API».</a:t>
+            </a:r>
+          </a:p>
+          <a:p/>
+          <a:p>
+            <a:r>
+              <a:t>La pregunta hipotetica, o what-if, evalua si el diseno se entiende como sistema y no como dibujo: «si el trafico se multiplica por diez el lunes, que pieza de CloudLite se rompe primero y como se darian cuenta».</a:t>
+            </a:r>
+          </a:p>
+          <a:p/>
+          <a:p>
+            <a:r>
+              <a:t>No es clase autonoma y la defensa no se reemplaza por un video grabado, porque el Q&amp;A dirigido al azar es justamente el instrumento que verifica autoria y no tiene sustituto asincronico.</a:t>
+            </a:r>
+          </a:p>
+          <a:p/>
+          <a:p>
+            <a:r>
+              <a:t>NOTAS:</a:t>
+            </a:r>
+          </a:p>
+          <a:p/>
+          <a:p>
+            <a:r>
               <a:t>Improvisar un dato falso, en cambio, se detecta con una sola pregunta de seguimiento y cuesta mucho mas que admitir el limite.</a:t>
             </a:r>
           </a:p>
@@ -1087,6 +1330,48 @@
           <a:lstStyle/>
           <a:p>
             <a:r>
+              <a:t>DESARROLLO (para explicarlo, no se proyecta):</a:t>
+            </a:r>
+          </a:p>
+          <a:p/>
+          <a:p>
+            <a:r>
+              <a:t>En la industria, esta sustentacion tiene nombre propio: design review, o architecture review.</a:t>
+            </a:r>
+          </a:p>
+          <a:p/>
+          <a:p>
+            <a:r>
+              <a:t>Un equipo presenta una propuesta a pares y a arquitectos mas experimentados cuyo trabajo explicito es buscarle el punto debil antes de que ese punto debil cueste dinero</a:t>
+            </a:r>
+          </a:p>
+          <a:p/>
+          <a:p>
+            <a:r>
+              <a:t>Y lo que se pregunta ahi es exactamente lo mismo que hoy, es decir que decidieron, que descartaron, que aceptaron perder, y como sabran si se equivocaron.</a:t>
+            </a:r>
+          </a:p>
+          <a:p/>
+          <a:p>
+            <a:r>
+              <a:t>El ADR es un formato real, usado en equipos reales, no un invento academico del curso.</a:t>
+            </a:r>
+          </a:p>
+          <a:p/>
+          <a:p>
+            <a:r>
+              <a:t>La frase de cierre util es que arquitectura no es una lista de logos de proveedores, sino un conjunto de decisiones documentadas con sus consecuencias.</a:t>
+            </a:r>
+          </a:p>
+          <a:p/>
+          <a:p>
+            <a:r>
+              <a:t>Y el pedido final debe ser concreto y verificable: conserven el repositorio con el informe, los diagramas y el workflow como portafolio, porque eso es lo que se muestra en una primera entrevista tecnica cuando piden un ejemplo de trabajo propio.</a:t>
+            </a:r>
+          </a:p>
+          <a:p/>
+          <a:p>
+            <a:r>
               <a:t>(No se proyecta) El cierre del curso debe conectar lo hecho con la practica profesional, porque de eso depende que el estudiante conserve el material en vez de borrarlo al terminar el semestre.</a:t>
             </a:r>
           </a:p>
@@ -1100,6 +1385,106 @@
           <a:p>
             <a:r>
               <a:t>(No se proyecta) El diagrama de contenedores, el Dockerfile y el pipeline que el estudiante escribio son los mismos artefactos que se producen con una cuenta corporativa; lo que no se aprende en un free tier es justamente lo que si se aprendio aqui, que es razonar el trade-off.</a:t>
+            </a:r>
+          </a:p>
+        </p:txBody>
+      </p:sp>
+      <p:sp>
+        <p:nvSpPr>
+          <p:cNvPr id="4" name="Slide Number Placeholder 3"/>
+          <p:cNvSpPr>
+            <a:spLocks noGrp="1"/>
+          </p:cNvSpPr>
+          <p:nvPr>
+            <p:ph type="sldNum" idx="5" sz="quarter"/>
+          </p:nvPr>
+        </p:nvSpPr>
+        <p:spPr/>
+      </p:sp>
+    </p:spTree>
+  </p:cSld>
+  <p:clrMapOvr>
+    <a:masterClrMapping/>
+  </p:clrMapOvr>
+</p:notes>
+</file>
+
+<file path=ppt/notesSlides/notesSlide8.xml><?xml version="1.0" encoding="utf-8"?>
+<p:notes xmlns:a="http://schemas.openxmlformats.org/drawingml/2006/main" xmlns:p="http://schemas.openxmlformats.org/presentationml/2006/main" xmlns:r="http://schemas.openxmlformats.org/officeDocument/2006/relationships">
+  <p:cSld>
+    <p:spTree>
+      <p:nvGrpSpPr>
+        <p:cNvPr id="1" name=""/>
+        <p:cNvGrpSpPr/>
+        <p:nvPr/>
+      </p:nvGrpSpPr>
+      <p:grpSpPr>
+        <a:xfrm>
+          <a:off x="0" y="0"/>
+          <a:ext cx="0" cy="0"/>
+          <a:chOff x="0" y="0"/>
+          <a:chExt cx="0" cy="0"/>
+        </a:xfrm>
+      </p:grpSpPr>
+      <p:sp>
+        <p:nvSpPr>
+          <p:cNvPr id="2" name="Slide Image Placeholder 1"/>
+          <p:cNvSpPr>
+            <a:spLocks noGrp="1"/>
+          </p:cNvSpPr>
+          <p:nvPr>
+            <p:ph type="sldImg" idx="2"/>
+          </p:nvPr>
+        </p:nvSpPr>
+        <p:spPr/>
+      </p:sp>
+      <p:sp>
+        <p:nvSpPr>
+          <p:cNvPr id="3" name="Notes Placeholder 2"/>
+          <p:cNvSpPr>
+            <a:spLocks noGrp="1"/>
+          </p:cNvSpPr>
+          <p:nvPr>
+            <p:ph type="body" idx="3" sz="quarter"/>
+          </p:nvPr>
+        </p:nvSpPr>
+        <p:spPr/>
+        <p:txBody>
+          <a:bodyPr/>
+          <a:lstStyle/>
+          <a:p>
+            <a:r>
+              <a:t>TEXTO COMPLETO DE LA LÁMINA (se proyecta resumido):</a:t>
+            </a:r>
+          </a:p>
+          <a:p/>
+          <a:p>
+            <a:r>
+              <a:t>RAA1–3 aplicados al PI. Conserven el repo como portafolio.</a:t>
+            </a:r>
+          </a:p>
+          <a:p/>
+          <a:p>
+            <a:r>
+              <a:t>Gracias — arquitectura es trade-offs documentados, no logos de proveedores.</a:t>
+            </a:r>
+          </a:p>
+          <a:p/>
+          <a:p>
+            <a:r>
+              <a:t>Recorrido: dominio → modelo de servicio → contenedor → Containers → seguridad → despliegue → CI y monitoreo → costos → rendimiento → escala.</a:t>
+            </a:r>
+          </a:p>
+          <a:p/>
+          <a:p>
+            <a:r>
+              <a:t>Cada paso fue una decisión con su trade-off escrito: eso es lo que se lleva a la práctica profesional.</a:t>
+            </a:r>
+          </a:p>
+          <a:p/>
+          <a:p>
+            <a:r>
+              <a:t>Un ADR por decisión importante permite, años después, saber por qué el sistema es como es.</a:t>
             </a:r>
           </a:p>
         </p:txBody>
@@ -4592,21 +4977,125 @@
                 </a:solidFill>
                 <a:latin typeface="Calibri"/>
               </a:rPr>
-              <a:t>El pitch de 5 a 8 minutos: el reparto que funciona (2/2)</a:t>
-            </a:r>
-          </a:p>
-        </p:txBody>
-      </p:sp>
-      <p:sp>
-        <p:nvSpPr>
-          <p:cNvPr id="5" name="TextBox 4"/>
+              <a:t>El cierre del curso: conectar lo hecho con la practica profesional</a:t>
+            </a:r>
+          </a:p>
+        </p:txBody>
+      </p:sp>
+      <p:sp>
+        <p:nvSpPr>
+          <p:cNvPr id="5" name="Rounded Rectangle 4"/>
+          <p:cNvSpPr/>
+          <p:nvPr/>
+        </p:nvSpPr>
+        <p:spPr>
+          <a:xfrm>
+            <a:off x="5797149" y="1573813"/>
+            <a:ext cx="6010497" cy="4057845"/>
+          </a:xfrm>
+          <a:prstGeom prst="roundRect">
+            <a:avLst>
+              <a:gd name="adj" fmla="val 4000"/>
+            </a:avLst>
+          </a:prstGeom>
+          <a:solidFill>
+            <a:srgbClr val="E8EEF4"/>
+          </a:solidFill>
+          <a:ln>
+            <a:noFill/>
+          </a:ln>
+        </p:spPr>
+        <p:style>
+          <a:lnRef idx="1">
+            <a:schemeClr val="accent1"/>
+          </a:lnRef>
+          <a:fillRef idx="3">
+            <a:schemeClr val="accent1"/>
+          </a:fillRef>
+          <a:effectRef idx="2">
+            <a:schemeClr val="accent1"/>
+          </a:effectRef>
+          <a:fontRef idx="minor">
+            <a:schemeClr val="lt1"/>
+          </a:fontRef>
+        </p:style>
+        <p:txBody>
+          <a:bodyPr rtlCol="0" anchor="ctr"/>
+          <a:lstStyle/>
+          <a:p>
+            <a:pPr algn="ctr"/>
+          </a:p>
+        </p:txBody>
+      </p:sp>
+      <p:pic>
+        <p:nvPicPr>
+          <p:cNvPr id="6" name="Picture 5" descr="team-whiteboard-planning.jpg"/>
+          <p:cNvPicPr>
+            <a:picLocks noChangeAspect="1"/>
+          </p:cNvPicPr>
+          <p:nvPr/>
+        </p:nvPicPr>
+        <p:blipFill>
+          <a:blip r:embed="rId2"/>
+          <a:stretch>
+            <a:fillRect/>
+          </a:stretch>
+        </p:blipFill>
+        <p:spPr>
+          <a:xfrm>
+            <a:off x="5870301" y="1646965"/>
+            <a:ext cx="5864193" cy="3911541"/>
+          </a:xfrm>
+          <a:prstGeom prst="rect">
+            <a:avLst/>
+          </a:prstGeom>
+        </p:spPr>
+      </p:pic>
+      <p:sp>
+        <p:nvSpPr>
+          <p:cNvPr id="7" name="TextBox 6"/>
           <p:cNvSpPr txBox="1"/>
           <p:nvPr/>
         </p:nvSpPr>
         <p:spPr>
           <a:xfrm>
-            <a:off x="457200" y="1170432"/>
-            <a:ext cx="11277295" cy="5230368"/>
+            <a:off x="5870301" y="5961888"/>
+            <a:ext cx="5864193" cy="320040"/>
+          </a:xfrm>
+          <a:prstGeom prst="rect">
+            <a:avLst/>
+          </a:prstGeom>
+          <a:noFill/>
+        </p:spPr>
+        <p:txBody>
+          <a:bodyPr wrap="square">
+            <a:spAutoFit/>
+          </a:bodyPr>
+          <a:lstStyle/>
+          <a:p>
+            <a:pPr algn="ctr"/>
+            <a:r>
+              <a:rPr sz="1100" b="0" i="1">
+                <a:solidFill>
+                  <a:srgbClr val="666666"/>
+                </a:solidFill>
+                <a:latin typeface="Calibri"/>
+              </a:rPr>
+              <a:t>Foto: Yan Krukau · Pexels</a:t>
+            </a:r>
+          </a:p>
+        </p:txBody>
+      </p:sp>
+      <p:sp>
+        <p:nvSpPr>
+          <p:cNvPr id="8" name="TextBox 7"/>
+          <p:cNvSpPr txBox="1"/>
+          <p:nvPr/>
+        </p:nvSpPr>
+        <p:spPr>
+          <a:xfrm>
+            <a:off x="457200" y="1353312"/>
+            <a:ext cx="5093061" cy="5047488"/>
           </a:xfrm>
           <a:prstGeom prst="rect">
             <a:avLst/>
@@ -4631,7 +5120,7 @@
                 </a:solidFill>
                 <a:latin typeface="Calibri"/>
               </a:rPr>
-              <a:t>–   45 segundos para el punto debil declarado, lo que no escala o lo que no se midio; y 30 segundos de cierre.</a:t>
+              <a:t>–   En la industria, esta sustentacion tiene nombre propio: design review, o architecture review.</a:t>
             </a:r>
           </a:p>
           <a:p>
@@ -4647,7 +5136,7 @@
                 </a:solidFill>
                 <a:latin typeface="Calibri"/>
               </a:rPr>
-              <a:t>–   La suma queda entre 6 y 7 minutos, con margen para tropiezos.</a:t>
+              <a:t>–   El ADR es un formato real, usado en equipos reales, no un invento academico del curso.</a:t>
             </a:r>
           </a:p>
           <a:p>
@@ -4663,46 +5152,14 @@
                 </a:solidFill>
                 <a:latin typeface="Calibri"/>
               </a:rPr>
-              <a:t>–   La regla practica de diapositivas es una idea por diapositiva y un maximo de ocho diapositivas para ocho minutos.</a:t>
-            </a:r>
-          </a:p>
-          <a:p>
-            <a:pPr>
-              <a:spcAft>
-                <a:spcPts val="800"/>
-              </a:spcAft>
-            </a:pPr>
-            <a:r>
-              <a:rPr sz="2000" b="0" i="0">
-                <a:solidFill>
-                  <a:srgbClr val="333333"/>
-                </a:solidFill>
-                <a:latin typeface="Calibri"/>
-              </a:rPr>
-              <a:t>–   Un error comun es gastar la mitad del tiempo en el dominio: el problema se cuenta en 1 minuto, y el resto es arquitectura y decisiones.</a:t>
-            </a:r>
-          </a:p>
-          <a:p>
-            <a:pPr>
-              <a:spcAft>
-                <a:spcPts val="800"/>
-              </a:spcAft>
-            </a:pPr>
-            <a:r>
-              <a:rPr sz="2000" b="0" i="0">
-                <a:solidFill>
-                  <a:srgbClr val="333333"/>
-                </a:solidFill>
-                <a:latin typeface="Calibri"/>
-              </a:rPr>
-              <a:t>–   Otro es leer las diapositivas: la diapositiva muestra el diagrama y la persona explica la decision; si el texto proyectado y lo dicho son iguales, sobra uno de los dos.</a:t>
-            </a:r>
-          </a:p>
-        </p:txBody>
-      </p:sp>
-      <p:sp>
-        <p:nvSpPr>
-          <p:cNvPr id="6" name="TextBox 5"/>
+              <a:t>–   La frase de cierre util es que arquitectura no es una lista de logos de proveedores, sino un conjunto de decisiones documentadas con sus…</a:t>
+            </a:r>
+          </a:p>
+        </p:txBody>
+      </p:sp>
+      <p:sp>
+        <p:nvSpPr>
+          <p:cNvPr id="9" name="TextBox 8"/>
           <p:cNvSpPr txBox="1"/>
           <p:nvPr/>
         </p:nvSpPr>
@@ -4876,21 +5333,125 @@
                 </a:solidFill>
                 <a:latin typeface="Calibri"/>
               </a:rPr>
-              <a:t>La regla de los 60 segundos, anunciada desde la Clase 11</a:t>
-            </a:r>
-          </a:p>
-        </p:txBody>
-      </p:sp>
-      <p:sp>
-        <p:nvSpPr>
-          <p:cNvPr id="5" name="TextBox 4"/>
+              <a:t>Cierre del curso</a:t>
+            </a:r>
+          </a:p>
+        </p:txBody>
+      </p:sp>
+      <p:sp>
+        <p:nvSpPr>
+          <p:cNvPr id="5" name="Rounded Rectangle 4"/>
+          <p:cNvSpPr/>
+          <p:nvPr/>
+        </p:nvSpPr>
+        <p:spPr>
+          <a:xfrm>
+            <a:off x="5797149" y="1573813"/>
+            <a:ext cx="6010497" cy="4057845"/>
+          </a:xfrm>
+          <a:prstGeom prst="roundRect">
+            <a:avLst>
+              <a:gd name="adj" fmla="val 4000"/>
+            </a:avLst>
+          </a:prstGeom>
+          <a:solidFill>
+            <a:srgbClr val="E8EEF4"/>
+          </a:solidFill>
+          <a:ln>
+            <a:noFill/>
+          </a:ln>
+        </p:spPr>
+        <p:style>
+          <a:lnRef idx="1">
+            <a:schemeClr val="accent1"/>
+          </a:lnRef>
+          <a:fillRef idx="3">
+            <a:schemeClr val="accent1"/>
+          </a:fillRef>
+          <a:effectRef idx="2">
+            <a:schemeClr val="accent1"/>
+          </a:effectRef>
+          <a:fontRef idx="minor">
+            <a:schemeClr val="lt1"/>
+          </a:fontRef>
+        </p:style>
+        <p:txBody>
+          <a:bodyPr rtlCol="0" anchor="ctr"/>
+          <a:lstStyle/>
+          <a:p>
+            <a:pPr algn="ctr"/>
+          </a:p>
+        </p:txBody>
+      </p:sp>
+      <p:pic>
+        <p:nvPicPr>
+          <p:cNvPr id="6" name="Picture 5" descr="graduation-students-celebration.jpg"/>
+          <p:cNvPicPr>
+            <a:picLocks noChangeAspect="1"/>
+          </p:cNvPicPr>
+          <p:nvPr/>
+        </p:nvPicPr>
+        <p:blipFill>
+          <a:blip r:embed="rId2"/>
+          <a:stretch>
+            <a:fillRect/>
+          </a:stretch>
+        </p:blipFill>
+        <p:spPr>
+          <a:xfrm>
+            <a:off x="5870301" y="1646965"/>
+            <a:ext cx="5864193" cy="3911541"/>
+          </a:xfrm>
+          <a:prstGeom prst="rect">
+            <a:avLst/>
+          </a:prstGeom>
+        </p:spPr>
+      </p:pic>
+      <p:sp>
+        <p:nvSpPr>
+          <p:cNvPr id="7" name="TextBox 6"/>
           <p:cNvSpPr txBox="1"/>
           <p:nvPr/>
         </p:nvSpPr>
         <p:spPr>
           <a:xfrm>
-            <a:off x="457200" y="1170432"/>
-            <a:ext cx="11277295" cy="5230368"/>
+            <a:off x="5870301" y="5961888"/>
+            <a:ext cx="5864193" cy="320040"/>
+          </a:xfrm>
+          <a:prstGeom prst="rect">
+            <a:avLst/>
+          </a:prstGeom>
+          <a:noFill/>
+        </p:spPr>
+        <p:txBody>
+          <a:bodyPr wrap="square">
+            <a:spAutoFit/>
+          </a:bodyPr>
+          <a:lstStyle/>
+          <a:p>
+            <a:pPr algn="ctr"/>
+            <a:r>
+              <a:rPr sz="1100" b="0" i="1">
+                <a:solidFill>
+                  <a:srgbClr val="666666"/>
+                </a:solidFill>
+                <a:latin typeface="Calibri"/>
+              </a:rPr>
+              <a:t>Foto: Sun · Pexels</a:t>
+            </a:r>
+          </a:p>
+        </p:txBody>
+      </p:sp>
+      <p:sp>
+        <p:nvSpPr>
+          <p:cNvPr id="8" name="TextBox 7"/>
+          <p:cNvSpPr txBox="1"/>
+          <p:nvPr/>
+        </p:nvSpPr>
+        <p:spPr>
+          <a:xfrm>
+            <a:off x="457200" y="1353312"/>
+            <a:ext cx="5093061" cy="5047488"/>
           </a:xfrm>
           <a:prstGeom prst="rect">
             <a:avLst/>
@@ -4915,7 +5476,7 @@
                 </a:solidFill>
                 <a:latin typeface="Calibri"/>
               </a:rPr>
-              <a:t>–   En un equipo profesional, cuando el sistema falla a las once de la noche, contesta quien esta disponible, no el autor del diagrama; un sistema que solo una persona entiende es un riesgo operativo con nombre propio.</a:t>
+              <a:t>–   RAA1–3 aplicados. Conserven el repo como portafolio.</a:t>
             </a:r>
           </a:p>
           <a:p>
@@ -4931,14 +5492,46 @@
                 </a:solidFill>
                 <a:latin typeface="Calibri"/>
               </a:rPr>
-              <a:t>–   La practica concreta que se recomienda antes de presentar es un ensayo cruzado con otro estudiante: cada uno explica en 60 segundos una parte del sistema del otro y devuelve los huecos que encontro (en equipo, cada integrante explica una parte que NO le toco preparar).</a:t>
-            </a:r>
-          </a:p>
-        </p:txBody>
-      </p:sp>
-      <p:sp>
-        <p:nvSpPr>
-          <p:cNvPr id="6" name="TextBox 5"/>
+              <a:t>–   Gracias — arquitectura es trade-offs documentados, no logos de proveedores.</a:t>
+            </a:r>
+          </a:p>
+          <a:p>
+            <a:pPr>
+              <a:spcAft>
+                <a:spcPts val="800"/>
+              </a:spcAft>
+            </a:pPr>
+            <a:r>
+              <a:rPr sz="2000" b="0" i="0">
+                <a:solidFill>
+                  <a:srgbClr val="333333"/>
+                </a:solidFill>
+                <a:latin typeface="Calibri"/>
+              </a:rPr>
+              <a:t>–   Recorrido: dominio → modelo de servicio → contenedor → Containers → seguridad → despliegue → CI y monitoreo → costos → rendimiento → escala.</a:t>
+            </a:r>
+          </a:p>
+          <a:p>
+            <a:pPr>
+              <a:spcAft>
+                <a:spcPts val="800"/>
+              </a:spcAft>
+            </a:pPr>
+            <a:r>
+              <a:rPr sz="2000" b="0" i="0">
+                <a:solidFill>
+                  <a:srgbClr val="333333"/>
+                </a:solidFill>
+                <a:latin typeface="Calibri"/>
+              </a:rPr>
+              <a:t>–   Cada paso fue una decisión con su trade-off escrito: eso es lo que se lleva a la práctica profesional.</a:t>
+            </a:r>
+          </a:p>
+        </p:txBody>
+      </p:sp>
+      <p:sp>
+        <p:nvSpPr>
+          <p:cNvPr id="9" name="TextBox 8"/>
           <p:cNvSpPr txBox="1"/>
           <p:nvPr/>
         </p:nvSpPr>
@@ -5006,7 +5599,7 @@
         <p:spPr>
           <a:xfrm>
             <a:off x="0" y="0"/>
-            <a:ext cx="12191695" cy="960120"/>
+            <a:ext cx="12191695" cy="1170432"/>
           </a:xfrm>
           <a:prstGeom prst="rect">
             <a:avLst/>
@@ -5048,7 +5641,7 @@
         </p:nvSpPr>
         <p:spPr>
           <a:xfrm>
-            <a:off x="0" y="960120"/>
+            <a:off x="0" y="1170432"/>
             <a:ext cx="12191695" cy="41148"/>
           </a:xfrm>
           <a:prstGeom prst="rect">
@@ -5092,7 +5685,7 @@
         <p:spPr>
           <a:xfrm>
             <a:off x="457200" y="164592"/>
-            <a:ext cx="11277295" cy="502920"/>
+            <a:ext cx="11277295" cy="384048"/>
           </a:xfrm>
           <a:prstGeom prst="rect">
             <a:avLst/>
@@ -5112,7 +5705,7 @@
                 </a:solidFill>
                 <a:latin typeface="Calibri"/>
               </a:rPr>
-              <a:t>El Q&amp;A tecnico: tres tipos de pregunta</a:t>
+              <a:t>Del boceto al código Mermaid</a:t>
             </a:r>
           </a:p>
         </p:txBody>
@@ -5125,8 +5718,8 @@
         </p:nvSpPr>
         <p:spPr>
           <a:xfrm>
-            <a:off x="457200" y="1170432"/>
-            <a:ext cx="11277295" cy="5230368"/>
+            <a:off x="457200" y="566928"/>
+            <a:ext cx="11277295" cy="411480"/>
           </a:xfrm>
           <a:prstGeom prst="rect">
             <a:avLst/>
@@ -5139,58 +5732,705 @@
           </a:bodyPr>
           <a:lstStyle/>
           <a:p>
-            <a:pPr>
-              <a:spcAft>
-                <a:spcPts val="800"/>
-              </a:spcAft>
-            </a:pPr>
-            <a:r>
-              <a:rPr sz="2000" b="0" i="0">
-                <a:solidFill>
-                  <a:srgbClr val="333333"/>
+            <a:r>
+              <a:rPr sz="1400" b="0" i="0">
+                <a:solidFill>
+                  <a:srgbClr val="B8D8EE"/>
                 </a:solidFill>
                 <a:latin typeface="Calibri"/>
               </a:rPr>
-              <a:t>–   La pregunta de profundizacion empuja un nivel mas alla de lo presentado: «por que la base de datos no esta en el mismo contenedor que la API».</a:t>
-            </a:r>
-          </a:p>
-          <a:p>
-            <a:pPr>
-              <a:spcAft>
-                <a:spcPts val="800"/>
-              </a:spcAft>
-            </a:pPr>
-            <a:r>
-              <a:rPr sz="2000" b="0" i="0">
-                <a:solidFill>
-                  <a:srgbClr val="333333"/>
+              <a:t>El diagrama se escribe como código: se versiona, se compara y se corrige</a:t>
+            </a:r>
+          </a:p>
+        </p:txBody>
+      </p:sp>
+      <p:sp>
+        <p:nvSpPr>
+          <p:cNvPr id="6" name="Rounded Rectangle 5"/>
+          <p:cNvSpPr/>
+          <p:nvPr/>
+        </p:nvSpPr>
+        <p:spPr>
+          <a:xfrm>
+            <a:off x="457200" y="1659636"/>
+            <a:ext cx="11277295" cy="1051560"/>
+          </a:xfrm>
+          <a:prstGeom prst="roundRect">
+            <a:avLst>
+              <a:gd name="adj" fmla="val 12000"/>
+            </a:avLst>
+          </a:prstGeom>
+          <a:solidFill>
+            <a:srgbClr val="F2F2F2"/>
+          </a:solidFill>
+          <a:ln>
+            <a:noFill/>
+          </a:ln>
+        </p:spPr>
+        <p:style>
+          <a:lnRef idx="1">
+            <a:schemeClr val="accent1"/>
+          </a:lnRef>
+          <a:fillRef idx="3">
+            <a:schemeClr val="accent1"/>
+          </a:fillRef>
+          <a:effectRef idx="2">
+            <a:schemeClr val="accent1"/>
+          </a:effectRef>
+          <a:fontRef idx="minor">
+            <a:schemeClr val="lt1"/>
+          </a:fontRef>
+        </p:style>
+        <p:txBody>
+          <a:bodyPr rtlCol="0" anchor="ctr"/>
+          <a:lstStyle/>
+          <a:p>
+            <a:pPr algn="ctr"/>
+          </a:p>
+        </p:txBody>
+      </p:sp>
+      <p:sp>
+        <p:nvSpPr>
+          <p:cNvPr id="7" name="Rounded Rectangle 6"/>
+          <p:cNvSpPr/>
+          <p:nvPr/>
+        </p:nvSpPr>
+        <p:spPr>
+          <a:xfrm>
+            <a:off x="594360" y="1965960"/>
+            <a:ext cx="438912" cy="438912"/>
+          </a:xfrm>
+          <a:prstGeom prst="roundRect">
+            <a:avLst>
+              <a:gd name="adj" fmla="val 12000"/>
+            </a:avLst>
+          </a:prstGeom>
+          <a:solidFill>
+            <a:srgbClr val="095292"/>
+          </a:solidFill>
+          <a:ln>
+            <a:noFill/>
+          </a:ln>
+        </p:spPr>
+        <p:style>
+          <a:lnRef idx="1">
+            <a:schemeClr val="accent1"/>
+          </a:lnRef>
+          <a:fillRef idx="3">
+            <a:schemeClr val="accent1"/>
+          </a:fillRef>
+          <a:effectRef idx="2">
+            <a:schemeClr val="accent1"/>
+          </a:effectRef>
+          <a:fontRef idx="minor">
+            <a:schemeClr val="lt1"/>
+          </a:fontRef>
+        </p:style>
+        <p:txBody>
+          <a:bodyPr rtlCol="0" anchor="ctr"/>
+          <a:lstStyle/>
+          <a:p>
+            <a:pPr algn="ctr"/>
+          </a:p>
+        </p:txBody>
+      </p:sp>
+      <p:sp>
+        <p:nvSpPr>
+          <p:cNvPr id="8" name="TextBox 7"/>
+          <p:cNvSpPr txBox="1"/>
+          <p:nvPr/>
+        </p:nvSpPr>
+        <p:spPr>
+          <a:xfrm>
+            <a:off x="594360" y="1965960"/>
+            <a:ext cx="438912" cy="438912"/>
+          </a:xfrm>
+          <a:prstGeom prst="rect">
+            <a:avLst/>
+          </a:prstGeom>
+          <a:noFill/>
+        </p:spPr>
+        <p:txBody>
+          <a:bodyPr wrap="square" anchor="ctr"/>
+          <a:lstStyle/>
+          <a:p>
+            <a:pPr algn="ctr"/>
+            <a:r>
+              <a:rPr sz="1600" b="1" i="0">
+                <a:solidFill>
+                  <a:srgbClr val="FFFFFF"/>
                 </a:solidFill>
                 <a:latin typeface="Calibri"/>
               </a:rPr>
-              <a:t>–   La pregunta hipotetica, o what-if, evalua si el diseno se entiende como sistema y no como dibujo: «si el trafico se multiplica por diez el lunes, que pieza de la app se rompe primero y como se darian cuenta».</a:t>
-            </a:r>
-          </a:p>
-          <a:p>
-            <a:pPr>
-              <a:spcAft>
-                <a:spcPts val="800"/>
-              </a:spcAft>
-            </a:pPr>
-            <a:r>
-              <a:rPr sz="2000" b="0" i="0">
-                <a:solidFill>
-                  <a:srgbClr val="333333"/>
+              <a:t>1</a:t>
+            </a:r>
+          </a:p>
+        </p:txBody>
+      </p:sp>
+      <p:sp>
+        <p:nvSpPr>
+          <p:cNvPr id="9" name="TextBox 8"/>
+          <p:cNvSpPr txBox="1"/>
+          <p:nvPr/>
+        </p:nvSpPr>
+        <p:spPr>
+          <a:xfrm>
+            <a:off x="1188720" y="1751076"/>
+            <a:ext cx="10271455" cy="886968"/>
+          </a:xfrm>
+          <a:prstGeom prst="rect">
+            <a:avLst/>
+          </a:prstGeom>
+          <a:noFill/>
+        </p:spPr>
+        <p:txBody>
+          <a:bodyPr wrap="square" anchor="ctr"/>
+          <a:lstStyle/>
+          <a:p>
+            <a:r>
+              <a:rPr sz="1500" b="1" i="0">
+                <a:solidFill>
+                  <a:srgbClr val="095292"/>
                 </a:solidFill>
                 <a:latin typeface="Calibri"/>
               </a:rPr>
-              <a:t>–   No es clase autonoma y la defensa no se reemplaza por un video grabado, porque el Q&amp;A dirigido al azar es justamente el instrumento que verifica autoria y no tiene sustituto asincronico.</a:t>
-            </a:r>
-          </a:p>
-        </p:txBody>
-      </p:sp>
-      <p:sp>
-        <p:nvSpPr>
-          <p:cNvPr id="6" name="TextBox 5"/>
+              <a:t>Diseña visual</a:t>
+            </a:r>
+          </a:p>
+          <a:p>
+            <a:pPr>
+              <a:spcBef>
+                <a:spcPts val="200"/>
+              </a:spcBef>
+            </a:pPr>
+            <a:r>
+              <a:rPr sz="1300" b="0" i="0">
+                <a:solidFill>
+                  <a:srgbClr val="333333"/>
+                </a:solidFill>
+                <a:latin typeface="Calibri"/>
+              </a:rPr>
+              <a:t>Dibuja el diagrama como quieras en Excalidraw o draw.io: es más rápido arrastrar cajas que escribir código, y ahí es donde se piensa el modelo.</a:t>
+            </a:r>
+          </a:p>
+        </p:txBody>
+      </p:sp>
+      <p:sp>
+        <p:nvSpPr>
+          <p:cNvPr id="10" name="Rounded Rectangle 9"/>
+          <p:cNvSpPr/>
+          <p:nvPr/>
+        </p:nvSpPr>
+        <p:spPr>
+          <a:xfrm>
+            <a:off x="457200" y="2802636"/>
+            <a:ext cx="11277295" cy="1051560"/>
+          </a:xfrm>
+          <a:prstGeom prst="roundRect">
+            <a:avLst>
+              <a:gd name="adj" fmla="val 12000"/>
+            </a:avLst>
+          </a:prstGeom>
+          <a:solidFill>
+            <a:srgbClr val="E8F4FA"/>
+          </a:solidFill>
+          <a:ln>
+            <a:noFill/>
+          </a:ln>
+        </p:spPr>
+        <p:style>
+          <a:lnRef idx="1">
+            <a:schemeClr val="accent1"/>
+          </a:lnRef>
+          <a:fillRef idx="3">
+            <a:schemeClr val="accent1"/>
+          </a:fillRef>
+          <a:effectRef idx="2">
+            <a:schemeClr val="accent1"/>
+          </a:effectRef>
+          <a:fontRef idx="minor">
+            <a:schemeClr val="lt1"/>
+          </a:fontRef>
+        </p:style>
+        <p:txBody>
+          <a:bodyPr rtlCol="0" anchor="ctr"/>
+          <a:lstStyle/>
+          <a:p>
+            <a:pPr algn="ctr"/>
+          </a:p>
+        </p:txBody>
+      </p:sp>
+      <p:sp>
+        <p:nvSpPr>
+          <p:cNvPr id="11" name="Rounded Rectangle 10"/>
+          <p:cNvSpPr/>
+          <p:nvPr/>
+        </p:nvSpPr>
+        <p:spPr>
+          <a:xfrm>
+            <a:off x="594360" y="3108960"/>
+            <a:ext cx="438912" cy="438912"/>
+          </a:xfrm>
+          <a:prstGeom prst="roundRect">
+            <a:avLst>
+              <a:gd name="adj" fmla="val 12000"/>
+            </a:avLst>
+          </a:prstGeom>
+          <a:solidFill>
+            <a:srgbClr val="095292"/>
+          </a:solidFill>
+          <a:ln>
+            <a:noFill/>
+          </a:ln>
+        </p:spPr>
+        <p:style>
+          <a:lnRef idx="1">
+            <a:schemeClr val="accent1"/>
+          </a:lnRef>
+          <a:fillRef idx="3">
+            <a:schemeClr val="accent1"/>
+          </a:fillRef>
+          <a:effectRef idx="2">
+            <a:schemeClr val="accent1"/>
+          </a:effectRef>
+          <a:fontRef idx="minor">
+            <a:schemeClr val="lt1"/>
+          </a:fontRef>
+        </p:style>
+        <p:txBody>
+          <a:bodyPr rtlCol="0" anchor="ctr"/>
+          <a:lstStyle/>
+          <a:p>
+            <a:pPr algn="ctr"/>
+          </a:p>
+        </p:txBody>
+      </p:sp>
+      <p:sp>
+        <p:nvSpPr>
+          <p:cNvPr id="12" name="TextBox 11"/>
+          <p:cNvSpPr txBox="1"/>
+          <p:nvPr/>
+        </p:nvSpPr>
+        <p:spPr>
+          <a:xfrm>
+            <a:off x="594360" y="3108960"/>
+            <a:ext cx="438912" cy="438912"/>
+          </a:xfrm>
+          <a:prstGeom prst="rect">
+            <a:avLst/>
+          </a:prstGeom>
+          <a:noFill/>
+        </p:spPr>
+        <p:txBody>
+          <a:bodyPr wrap="square" anchor="ctr"/>
+          <a:lstStyle/>
+          <a:p>
+            <a:pPr algn="ctr"/>
+            <a:r>
+              <a:rPr sz="1600" b="1" i="0">
+                <a:solidFill>
+                  <a:srgbClr val="FFFFFF"/>
+                </a:solidFill>
+                <a:latin typeface="Calibri"/>
+              </a:rPr>
+              <a:t>2</a:t>
+            </a:r>
+          </a:p>
+        </p:txBody>
+      </p:sp>
+      <p:sp>
+        <p:nvSpPr>
+          <p:cNvPr id="13" name="TextBox 12"/>
+          <p:cNvSpPr txBox="1"/>
+          <p:nvPr/>
+        </p:nvSpPr>
+        <p:spPr>
+          <a:xfrm>
+            <a:off x="1188720" y="2894076"/>
+            <a:ext cx="10271455" cy="886968"/>
+          </a:xfrm>
+          <a:prstGeom prst="rect">
+            <a:avLst/>
+          </a:prstGeom>
+          <a:noFill/>
+        </p:spPr>
+        <p:txBody>
+          <a:bodyPr wrap="square" anchor="ctr"/>
+          <a:lstStyle/>
+          <a:p>
+            <a:r>
+              <a:rPr sz="1500" b="1" i="0">
+                <a:solidFill>
+                  <a:srgbClr val="095292"/>
+                </a:solidFill>
+                <a:latin typeface="Calibri"/>
+              </a:rPr>
+              <a:t>Traduce con IA</a:t>
+            </a:r>
+          </a:p>
+          <a:p>
+            <a:pPr>
+              <a:spcBef>
+                <a:spcPts val="200"/>
+              </a:spcBef>
+            </a:pPr>
+            <a:r>
+              <a:rPr sz="1300" b="0" i="0">
+                <a:solidFill>
+                  <a:srgbClr val="333333"/>
+                </a:solidFill>
+                <a:latin typeface="Calibri"/>
+              </a:rPr>
+              <a:t>Describe tu boceto a una IA y pídele el código Mermaid usando flowchart. Revisa el resultado: la IA acierta la sintaxis, no tu modelo.</a:t>
+            </a:r>
+          </a:p>
+        </p:txBody>
+      </p:sp>
+      <p:sp>
+        <p:nvSpPr>
+          <p:cNvPr id="14" name="Rounded Rectangle 13"/>
+          <p:cNvSpPr/>
+          <p:nvPr/>
+        </p:nvSpPr>
+        <p:spPr>
+          <a:xfrm>
+            <a:off x="457200" y="3945636"/>
+            <a:ext cx="11277295" cy="1051560"/>
+          </a:xfrm>
+          <a:prstGeom prst="roundRect">
+            <a:avLst>
+              <a:gd name="adj" fmla="val 12000"/>
+            </a:avLst>
+          </a:prstGeom>
+          <a:solidFill>
+            <a:srgbClr val="F2F2F2"/>
+          </a:solidFill>
+          <a:ln>
+            <a:noFill/>
+          </a:ln>
+        </p:spPr>
+        <p:style>
+          <a:lnRef idx="1">
+            <a:schemeClr val="accent1"/>
+          </a:lnRef>
+          <a:fillRef idx="3">
+            <a:schemeClr val="accent1"/>
+          </a:fillRef>
+          <a:effectRef idx="2">
+            <a:schemeClr val="accent1"/>
+          </a:effectRef>
+          <a:fontRef idx="minor">
+            <a:schemeClr val="lt1"/>
+          </a:fontRef>
+        </p:style>
+        <p:txBody>
+          <a:bodyPr rtlCol="0" anchor="ctr"/>
+          <a:lstStyle/>
+          <a:p>
+            <a:pPr algn="ctr"/>
+          </a:p>
+        </p:txBody>
+      </p:sp>
+      <p:sp>
+        <p:nvSpPr>
+          <p:cNvPr id="15" name="Rounded Rectangle 14"/>
+          <p:cNvSpPr/>
+          <p:nvPr/>
+        </p:nvSpPr>
+        <p:spPr>
+          <a:xfrm>
+            <a:off x="594360" y="4251960"/>
+            <a:ext cx="438912" cy="438912"/>
+          </a:xfrm>
+          <a:prstGeom prst="roundRect">
+            <a:avLst>
+              <a:gd name="adj" fmla="val 12000"/>
+            </a:avLst>
+          </a:prstGeom>
+          <a:solidFill>
+            <a:srgbClr val="095292"/>
+          </a:solidFill>
+          <a:ln>
+            <a:noFill/>
+          </a:ln>
+        </p:spPr>
+        <p:style>
+          <a:lnRef idx="1">
+            <a:schemeClr val="accent1"/>
+          </a:lnRef>
+          <a:fillRef idx="3">
+            <a:schemeClr val="accent1"/>
+          </a:fillRef>
+          <a:effectRef idx="2">
+            <a:schemeClr val="accent1"/>
+          </a:effectRef>
+          <a:fontRef idx="minor">
+            <a:schemeClr val="lt1"/>
+          </a:fontRef>
+        </p:style>
+        <p:txBody>
+          <a:bodyPr rtlCol="0" anchor="ctr"/>
+          <a:lstStyle/>
+          <a:p>
+            <a:pPr algn="ctr"/>
+          </a:p>
+        </p:txBody>
+      </p:sp>
+      <p:sp>
+        <p:nvSpPr>
+          <p:cNvPr id="16" name="TextBox 15"/>
+          <p:cNvSpPr txBox="1"/>
+          <p:nvPr/>
+        </p:nvSpPr>
+        <p:spPr>
+          <a:xfrm>
+            <a:off x="594360" y="4251960"/>
+            <a:ext cx="438912" cy="438912"/>
+          </a:xfrm>
+          <a:prstGeom prst="rect">
+            <a:avLst/>
+          </a:prstGeom>
+          <a:noFill/>
+        </p:spPr>
+        <p:txBody>
+          <a:bodyPr wrap="square" anchor="ctr"/>
+          <a:lstStyle/>
+          <a:p>
+            <a:pPr algn="ctr"/>
+            <a:r>
+              <a:rPr sz="1600" b="1" i="0">
+                <a:solidFill>
+                  <a:srgbClr val="FFFFFF"/>
+                </a:solidFill>
+                <a:latin typeface="Calibri"/>
+              </a:rPr>
+              <a:t>3</a:t>
+            </a:r>
+          </a:p>
+        </p:txBody>
+      </p:sp>
+      <p:sp>
+        <p:nvSpPr>
+          <p:cNvPr id="17" name="TextBox 16"/>
+          <p:cNvSpPr txBox="1"/>
+          <p:nvPr/>
+        </p:nvSpPr>
+        <p:spPr>
+          <a:xfrm>
+            <a:off x="1188720" y="4037076"/>
+            <a:ext cx="10271455" cy="886968"/>
+          </a:xfrm>
+          <a:prstGeom prst="rect">
+            <a:avLst/>
+          </a:prstGeom>
+          <a:noFill/>
+        </p:spPr>
+        <p:txBody>
+          <a:bodyPr wrap="square" anchor="ctr"/>
+          <a:lstStyle/>
+          <a:p>
+            <a:r>
+              <a:rPr sz="1500" b="1" i="0">
+                <a:solidFill>
+                  <a:srgbClr val="095292"/>
+                </a:solidFill>
+                <a:latin typeface="Calibri"/>
+              </a:rPr>
+              <a:t>Renderiza en un visor</a:t>
+            </a:r>
+          </a:p>
+          <a:p>
+            <a:pPr>
+              <a:spcBef>
+                <a:spcPts val="200"/>
+              </a:spcBef>
+            </a:pPr>
+            <a:r>
+              <a:rPr sz="1300" b="0" i="0">
+                <a:solidFill>
+                  <a:srgbClr val="333333"/>
+                </a:solidFill>
+                <a:latin typeface="Calibri"/>
+              </a:rPr>
+              <a:t>Pega el código en un visor Mermaid (mermaid.live o la vista previa de tu editor) y míralo dibujado. Si no renderiza, corrige ahí: un end faltante o un rótulo sin comillas.</a:t>
+            </a:r>
+          </a:p>
+        </p:txBody>
+      </p:sp>
+      <p:sp>
+        <p:nvSpPr>
+          <p:cNvPr id="18" name="Rounded Rectangle 17"/>
+          <p:cNvSpPr/>
+          <p:nvPr/>
+        </p:nvSpPr>
+        <p:spPr>
+          <a:xfrm>
+            <a:off x="457200" y="5088636"/>
+            <a:ext cx="11277295" cy="1051560"/>
+          </a:xfrm>
+          <a:prstGeom prst="roundRect">
+            <a:avLst>
+              <a:gd name="adj" fmla="val 12000"/>
+            </a:avLst>
+          </a:prstGeom>
+          <a:solidFill>
+            <a:srgbClr val="E8F4FA"/>
+          </a:solidFill>
+          <a:ln>
+            <a:noFill/>
+          </a:ln>
+        </p:spPr>
+        <p:style>
+          <a:lnRef idx="1">
+            <a:schemeClr val="accent1"/>
+          </a:lnRef>
+          <a:fillRef idx="3">
+            <a:schemeClr val="accent1"/>
+          </a:fillRef>
+          <a:effectRef idx="2">
+            <a:schemeClr val="accent1"/>
+          </a:effectRef>
+          <a:fontRef idx="minor">
+            <a:schemeClr val="lt1"/>
+          </a:fontRef>
+        </p:style>
+        <p:txBody>
+          <a:bodyPr rtlCol="0" anchor="ctr"/>
+          <a:lstStyle/>
+          <a:p>
+            <a:pPr algn="ctr"/>
+          </a:p>
+        </p:txBody>
+      </p:sp>
+      <p:sp>
+        <p:nvSpPr>
+          <p:cNvPr id="19" name="Rounded Rectangle 18"/>
+          <p:cNvSpPr/>
+          <p:nvPr/>
+        </p:nvSpPr>
+        <p:spPr>
+          <a:xfrm>
+            <a:off x="594360" y="5394960"/>
+            <a:ext cx="438912" cy="438912"/>
+          </a:xfrm>
+          <a:prstGeom prst="roundRect">
+            <a:avLst>
+              <a:gd name="adj" fmla="val 12000"/>
+            </a:avLst>
+          </a:prstGeom>
+          <a:solidFill>
+            <a:srgbClr val="095292"/>
+          </a:solidFill>
+          <a:ln>
+            <a:noFill/>
+          </a:ln>
+        </p:spPr>
+        <p:style>
+          <a:lnRef idx="1">
+            <a:schemeClr val="accent1"/>
+          </a:lnRef>
+          <a:fillRef idx="3">
+            <a:schemeClr val="accent1"/>
+          </a:fillRef>
+          <a:effectRef idx="2">
+            <a:schemeClr val="accent1"/>
+          </a:effectRef>
+          <a:fontRef idx="minor">
+            <a:schemeClr val="lt1"/>
+          </a:fontRef>
+        </p:style>
+        <p:txBody>
+          <a:bodyPr rtlCol="0" anchor="ctr"/>
+          <a:lstStyle/>
+          <a:p>
+            <a:pPr algn="ctr"/>
+          </a:p>
+        </p:txBody>
+      </p:sp>
+      <p:sp>
+        <p:nvSpPr>
+          <p:cNvPr id="20" name="TextBox 19"/>
+          <p:cNvSpPr txBox="1"/>
+          <p:nvPr/>
+        </p:nvSpPr>
+        <p:spPr>
+          <a:xfrm>
+            <a:off x="594360" y="5394960"/>
+            <a:ext cx="438912" cy="438912"/>
+          </a:xfrm>
+          <a:prstGeom prst="rect">
+            <a:avLst/>
+          </a:prstGeom>
+          <a:noFill/>
+        </p:spPr>
+        <p:txBody>
+          <a:bodyPr wrap="square" anchor="ctr"/>
+          <a:lstStyle/>
+          <a:p>
+            <a:pPr algn="ctr"/>
+            <a:r>
+              <a:rPr sz="1600" b="1" i="0">
+                <a:solidFill>
+                  <a:srgbClr val="FFFFFF"/>
+                </a:solidFill>
+                <a:latin typeface="Calibri"/>
+              </a:rPr>
+              <a:t>4</a:t>
+            </a:r>
+          </a:p>
+        </p:txBody>
+      </p:sp>
+      <p:sp>
+        <p:nvSpPr>
+          <p:cNvPr id="21" name="TextBox 20"/>
+          <p:cNvSpPr txBox="1"/>
+          <p:nvPr/>
+        </p:nvSpPr>
+        <p:spPr>
+          <a:xfrm>
+            <a:off x="1188720" y="5180076"/>
+            <a:ext cx="10271455" cy="886968"/>
+          </a:xfrm>
+          <a:prstGeom prst="rect">
+            <a:avLst/>
+          </a:prstGeom>
+          <a:noFill/>
+        </p:spPr>
+        <p:txBody>
+          <a:bodyPr wrap="square" anchor="ctr"/>
+          <a:lstStyle/>
+          <a:p>
+            <a:r>
+              <a:rPr sz="1500" b="1" i="0">
+                <a:solidFill>
+                  <a:srgbClr val="095292"/>
+                </a:solidFill>
+                <a:latin typeface="Calibri"/>
+              </a:rPr>
+              <a:t>Guarda código e imagen</a:t>
+            </a:r>
+          </a:p>
+          <a:p>
+            <a:pPr>
+              <a:spcBef>
+                <a:spcPts val="200"/>
+              </a:spcBef>
+            </a:pPr>
+            <a:r>
+              <a:rPr sz="1300" b="0" i="0">
+                <a:solidFill>
+                  <a:srgbClr val="333333"/>
+                </a:solidFill>
+                <a:latin typeface="Calibri"/>
+              </a:rPr>
+              <a:t>El código es la fuente del diagrama: guárdalo con tu proyecto junto con el PNG exportado.</a:t>
+            </a:r>
+          </a:p>
+        </p:txBody>
+      </p:sp>
+      <p:sp>
+        <p:nvSpPr>
+          <p:cNvPr id="22" name="TextBox 21"/>
           <p:cNvSpPr txBox="1"/>
           <p:nvPr/>
         </p:nvSpPr>
@@ -5258,1409 +6498,6 @@
         <p:spPr>
           <a:xfrm>
             <a:off x="0" y="0"/>
-            <a:ext cx="12191695" cy="960120"/>
-          </a:xfrm>
-          <a:prstGeom prst="rect">
-            <a:avLst/>
-          </a:prstGeom>
-          <a:solidFill>
-            <a:srgbClr val="095292"/>
-          </a:solidFill>
-          <a:ln>
-            <a:noFill/>
-          </a:ln>
-        </p:spPr>
-        <p:style>
-          <a:lnRef idx="1">
-            <a:schemeClr val="accent1"/>
-          </a:lnRef>
-          <a:fillRef idx="3">
-            <a:schemeClr val="accent1"/>
-          </a:fillRef>
-          <a:effectRef idx="2">
-            <a:schemeClr val="accent1"/>
-          </a:effectRef>
-          <a:fontRef idx="minor">
-            <a:schemeClr val="lt1"/>
-          </a:fontRef>
-        </p:style>
-        <p:txBody>
-          <a:bodyPr rtlCol="0" anchor="ctr"/>
-          <a:lstStyle/>
-          <a:p>
-            <a:pPr algn="ctr"/>
-          </a:p>
-        </p:txBody>
-      </p:sp>
-      <p:sp>
-        <p:nvSpPr>
-          <p:cNvPr id="3" name="Rectangle 2"/>
-          <p:cNvSpPr/>
-          <p:nvPr/>
-        </p:nvSpPr>
-        <p:spPr>
-          <a:xfrm>
-            <a:off x="0" y="960120"/>
-            <a:ext cx="12191695" cy="41148"/>
-          </a:xfrm>
-          <a:prstGeom prst="rect">
-            <a:avLst/>
-          </a:prstGeom>
-          <a:solidFill>
-            <a:srgbClr val="FFD000"/>
-          </a:solidFill>
-          <a:ln>
-            <a:noFill/>
-          </a:ln>
-        </p:spPr>
-        <p:style>
-          <a:lnRef idx="1">
-            <a:schemeClr val="accent1"/>
-          </a:lnRef>
-          <a:fillRef idx="3">
-            <a:schemeClr val="accent1"/>
-          </a:fillRef>
-          <a:effectRef idx="2">
-            <a:schemeClr val="accent1"/>
-          </a:effectRef>
-          <a:fontRef idx="minor">
-            <a:schemeClr val="lt1"/>
-          </a:fontRef>
-        </p:style>
-        <p:txBody>
-          <a:bodyPr rtlCol="0" anchor="ctr"/>
-          <a:lstStyle/>
-          <a:p>
-            <a:pPr algn="ctr"/>
-          </a:p>
-        </p:txBody>
-      </p:sp>
-      <p:sp>
-        <p:nvSpPr>
-          <p:cNvPr id="4" name="TextBox 3"/>
-          <p:cNvSpPr txBox="1"/>
-          <p:nvPr/>
-        </p:nvSpPr>
-        <p:spPr>
-          <a:xfrm>
-            <a:off x="457200" y="164592"/>
-            <a:ext cx="11277295" cy="502920"/>
-          </a:xfrm>
-          <a:prstGeom prst="rect">
-            <a:avLst/>
-          </a:prstGeom>
-          <a:noFill/>
-        </p:spPr>
-        <p:txBody>
-          <a:bodyPr wrap="square">
-            <a:spAutoFit/>
-          </a:bodyPr>
-          <a:lstStyle/>
-          <a:p>
-            <a:r>
-              <a:rPr sz="2600" b="1" i="0">
-                <a:solidFill>
-                  <a:srgbClr val="FFFFFF"/>
-                </a:solidFill>
-                <a:latin typeface="Calibri"/>
-              </a:rPr>
-              <a:t>El cierre del curso: conectar lo hecho con la practica profesional (1/2)</a:t>
-            </a:r>
-          </a:p>
-        </p:txBody>
-      </p:sp>
-      <p:sp>
-        <p:nvSpPr>
-          <p:cNvPr id="5" name="TextBox 4"/>
-          <p:cNvSpPr txBox="1"/>
-          <p:nvPr/>
-        </p:nvSpPr>
-        <p:spPr>
-          <a:xfrm>
-            <a:off x="457200" y="1170432"/>
-            <a:ext cx="11277295" cy="5230368"/>
-          </a:xfrm>
-          <a:prstGeom prst="rect">
-            <a:avLst/>
-          </a:prstGeom>
-          <a:noFill/>
-        </p:spPr>
-        <p:txBody>
-          <a:bodyPr wrap="square">
-            <a:spAutoFit/>
-          </a:bodyPr>
-          <a:lstStyle/>
-          <a:p>
-            <a:pPr>
-              <a:spcAft>
-                <a:spcPts val="800"/>
-              </a:spcAft>
-            </a:pPr>
-            <a:r>
-              <a:rPr sz="2000" b="0" i="0">
-                <a:solidFill>
-                  <a:srgbClr val="333333"/>
-                </a:solidFill>
-                <a:latin typeface="Calibri"/>
-              </a:rPr>
-              <a:t>–   En la industria, esta sustentacion tiene nombre propio: design review, o architecture review.</a:t>
-            </a:r>
-          </a:p>
-          <a:p>
-            <a:pPr>
-              <a:spcAft>
-                <a:spcPts val="800"/>
-              </a:spcAft>
-            </a:pPr>
-            <a:r>
-              <a:rPr sz="2000" b="0" i="0">
-                <a:solidFill>
-                  <a:srgbClr val="333333"/>
-                </a:solidFill>
-                <a:latin typeface="Calibri"/>
-              </a:rPr>
-              <a:t>–   Un equipo presenta una propuesta a pares y a arquitectos mas experimentados cuyo trabajo explicito es buscarle el punto debil antes de que ese punto debil cueste dinero</a:t>
-            </a:r>
-          </a:p>
-          <a:p>
-            <a:pPr>
-              <a:spcAft>
-                <a:spcPts val="800"/>
-              </a:spcAft>
-            </a:pPr>
-            <a:r>
-              <a:rPr sz="2000" b="0" i="0">
-                <a:solidFill>
-                  <a:srgbClr val="333333"/>
-                </a:solidFill>
-                <a:latin typeface="Calibri"/>
-              </a:rPr>
-              <a:t>–   Y lo que se pregunta ahi es exactamente lo mismo que hoy, es decir que decidieron, que descartaron, que aceptaron perder, y como sabran si se equivocaron.</a:t>
-            </a:r>
-          </a:p>
-          <a:p>
-            <a:pPr>
-              <a:spcAft>
-                <a:spcPts val="800"/>
-              </a:spcAft>
-            </a:pPr>
-            <a:r>
-              <a:rPr sz="2000" b="0" i="0">
-                <a:solidFill>
-                  <a:srgbClr val="333333"/>
-                </a:solidFill>
-                <a:latin typeface="Calibri"/>
-              </a:rPr>
-              <a:t>–   El ADR es un formato real, usado en equipos reales, no un invento academico del curso.</a:t>
-            </a:r>
-          </a:p>
-        </p:txBody>
-      </p:sp>
-      <p:sp>
-        <p:nvSpPr>
-          <p:cNvPr id="6" name="TextBox 5"/>
-          <p:cNvSpPr txBox="1"/>
-          <p:nvPr/>
-        </p:nvSpPr>
-        <p:spPr>
-          <a:xfrm>
-            <a:off x="11185855" y="6473952"/>
-            <a:ext cx="640080" cy="274320"/>
-          </a:xfrm>
-          <a:prstGeom prst="rect">
-            <a:avLst/>
-          </a:prstGeom>
-          <a:noFill/>
-        </p:spPr>
-        <p:txBody>
-          <a:bodyPr wrap="square">
-            <a:spAutoFit/>
-          </a:bodyPr>
-          <a:lstStyle/>
-          <a:p>
-            <a:pPr algn="r"/>
-            <a:r>
-              <a:rPr sz="1100" b="0" i="0">
-                <a:solidFill>
-                  <a:srgbClr val="666666"/>
-                </a:solidFill>
-                <a:latin typeface="Calibri"/>
-              </a:rPr>
-              <a:t>13</a:t>
-            </a:r>
-          </a:p>
-        </p:txBody>
-      </p:sp>
-    </p:spTree>
-  </p:cSld>
-  <p:clrMapOvr>
-    <a:masterClrMapping/>
-  </p:clrMapOvr>
-</p:sld>
-</file>
-
-<file path=ppt/slides/slide14.xml><?xml version="1.0" encoding="utf-8"?>
-<p:sld xmlns:a="http://schemas.openxmlformats.org/drawingml/2006/main" xmlns:p="http://schemas.openxmlformats.org/presentationml/2006/main" xmlns:r="http://schemas.openxmlformats.org/officeDocument/2006/relationships">
-  <p:cSld>
-    <p:bg>
-      <p:bgPr>
-        <a:solidFill>
-          <a:srgbClr val="FFFFFF"/>
-        </a:solidFill>
-        <a:effectLst/>
-      </p:bgPr>
-    </p:bg>
-    <p:spTree>
-      <p:nvGrpSpPr>
-        <p:cNvPr id="1" name=""/>
-        <p:cNvGrpSpPr/>
-        <p:nvPr/>
-      </p:nvGrpSpPr>
-      <p:grpSpPr/>
-      <p:sp>
-        <p:nvSpPr>
-          <p:cNvPr id="2" name="Rectangle 1"/>
-          <p:cNvSpPr/>
-          <p:nvPr/>
-        </p:nvSpPr>
-        <p:spPr>
-          <a:xfrm>
-            <a:off x="0" y="0"/>
-            <a:ext cx="12191695" cy="960120"/>
-          </a:xfrm>
-          <a:prstGeom prst="rect">
-            <a:avLst/>
-          </a:prstGeom>
-          <a:solidFill>
-            <a:srgbClr val="095292"/>
-          </a:solidFill>
-          <a:ln>
-            <a:noFill/>
-          </a:ln>
-        </p:spPr>
-        <p:style>
-          <a:lnRef idx="1">
-            <a:schemeClr val="accent1"/>
-          </a:lnRef>
-          <a:fillRef idx="3">
-            <a:schemeClr val="accent1"/>
-          </a:fillRef>
-          <a:effectRef idx="2">
-            <a:schemeClr val="accent1"/>
-          </a:effectRef>
-          <a:fontRef idx="minor">
-            <a:schemeClr val="lt1"/>
-          </a:fontRef>
-        </p:style>
-        <p:txBody>
-          <a:bodyPr rtlCol="0" anchor="ctr"/>
-          <a:lstStyle/>
-          <a:p>
-            <a:pPr algn="ctr"/>
-          </a:p>
-        </p:txBody>
-      </p:sp>
-      <p:sp>
-        <p:nvSpPr>
-          <p:cNvPr id="3" name="Rectangle 2"/>
-          <p:cNvSpPr/>
-          <p:nvPr/>
-        </p:nvSpPr>
-        <p:spPr>
-          <a:xfrm>
-            <a:off x="0" y="960120"/>
-            <a:ext cx="12191695" cy="41148"/>
-          </a:xfrm>
-          <a:prstGeom prst="rect">
-            <a:avLst/>
-          </a:prstGeom>
-          <a:solidFill>
-            <a:srgbClr val="FFD000"/>
-          </a:solidFill>
-          <a:ln>
-            <a:noFill/>
-          </a:ln>
-        </p:spPr>
-        <p:style>
-          <a:lnRef idx="1">
-            <a:schemeClr val="accent1"/>
-          </a:lnRef>
-          <a:fillRef idx="3">
-            <a:schemeClr val="accent1"/>
-          </a:fillRef>
-          <a:effectRef idx="2">
-            <a:schemeClr val="accent1"/>
-          </a:effectRef>
-          <a:fontRef idx="minor">
-            <a:schemeClr val="lt1"/>
-          </a:fontRef>
-        </p:style>
-        <p:txBody>
-          <a:bodyPr rtlCol="0" anchor="ctr"/>
-          <a:lstStyle/>
-          <a:p>
-            <a:pPr algn="ctr"/>
-          </a:p>
-        </p:txBody>
-      </p:sp>
-      <p:sp>
-        <p:nvSpPr>
-          <p:cNvPr id="4" name="TextBox 3"/>
-          <p:cNvSpPr txBox="1"/>
-          <p:nvPr/>
-        </p:nvSpPr>
-        <p:spPr>
-          <a:xfrm>
-            <a:off x="457200" y="164592"/>
-            <a:ext cx="11277295" cy="502920"/>
-          </a:xfrm>
-          <a:prstGeom prst="rect">
-            <a:avLst/>
-          </a:prstGeom>
-          <a:noFill/>
-        </p:spPr>
-        <p:txBody>
-          <a:bodyPr wrap="square">
-            <a:spAutoFit/>
-          </a:bodyPr>
-          <a:lstStyle/>
-          <a:p>
-            <a:r>
-              <a:rPr sz="2600" b="1" i="0">
-                <a:solidFill>
-                  <a:srgbClr val="FFFFFF"/>
-                </a:solidFill>
-                <a:latin typeface="Calibri"/>
-              </a:rPr>
-              <a:t>El cierre del curso: conectar lo hecho con la practica profesional (2/2)</a:t>
-            </a:r>
-          </a:p>
-        </p:txBody>
-      </p:sp>
-      <p:sp>
-        <p:nvSpPr>
-          <p:cNvPr id="5" name="TextBox 4"/>
-          <p:cNvSpPr txBox="1"/>
-          <p:nvPr/>
-        </p:nvSpPr>
-        <p:spPr>
-          <a:xfrm>
-            <a:off x="457200" y="1170432"/>
-            <a:ext cx="11277295" cy="5230368"/>
-          </a:xfrm>
-          <a:prstGeom prst="rect">
-            <a:avLst/>
-          </a:prstGeom>
-          <a:noFill/>
-        </p:spPr>
-        <p:txBody>
-          <a:bodyPr wrap="square">
-            <a:spAutoFit/>
-          </a:bodyPr>
-          <a:lstStyle/>
-          <a:p>
-            <a:pPr>
-              <a:spcAft>
-                <a:spcPts val="800"/>
-              </a:spcAft>
-            </a:pPr>
-            <a:r>
-              <a:rPr sz="2000" b="0" i="0">
-                <a:solidFill>
-                  <a:srgbClr val="333333"/>
-                </a:solidFill>
-                <a:latin typeface="Calibri"/>
-              </a:rPr>
-              <a:t>–   La frase de cierre util es que arquitectura no es una lista de logos de proveedores, sino un conjunto de decisiones documentadas con sus consecuencias.</a:t>
-            </a:r>
-          </a:p>
-          <a:p>
-            <a:pPr>
-              <a:spcAft>
-                <a:spcPts val="800"/>
-              </a:spcAft>
-            </a:pPr>
-            <a:r>
-              <a:rPr sz="2000" b="0" i="0">
-                <a:solidFill>
-                  <a:srgbClr val="333333"/>
-                </a:solidFill>
-                <a:latin typeface="Calibri"/>
-              </a:rPr>
-              <a:t>–   Y el pedido final debe ser concreto y verificable: conserven el repositorio con el informe, los diagramas y el workflow como portafolio, porque eso es lo que se muestra en una primera entrevista tecnica cuando piden un ejemplo de trabajo propio.</a:t>
-            </a:r>
-          </a:p>
-        </p:txBody>
-      </p:sp>
-      <p:sp>
-        <p:nvSpPr>
-          <p:cNvPr id="6" name="TextBox 5"/>
-          <p:cNvSpPr txBox="1"/>
-          <p:nvPr/>
-        </p:nvSpPr>
-        <p:spPr>
-          <a:xfrm>
-            <a:off x="11185855" y="6473952"/>
-            <a:ext cx="640080" cy="274320"/>
-          </a:xfrm>
-          <a:prstGeom prst="rect">
-            <a:avLst/>
-          </a:prstGeom>
-          <a:noFill/>
-        </p:spPr>
-        <p:txBody>
-          <a:bodyPr wrap="square">
-            <a:spAutoFit/>
-          </a:bodyPr>
-          <a:lstStyle/>
-          <a:p>
-            <a:pPr algn="r"/>
-            <a:r>
-              <a:rPr sz="1100" b="0" i="0">
-                <a:solidFill>
-                  <a:srgbClr val="666666"/>
-                </a:solidFill>
-                <a:latin typeface="Calibri"/>
-              </a:rPr>
-              <a:t>14</a:t>
-            </a:r>
-          </a:p>
-        </p:txBody>
-      </p:sp>
-    </p:spTree>
-  </p:cSld>
-  <p:clrMapOvr>
-    <a:masterClrMapping/>
-  </p:clrMapOvr>
-</p:sld>
-</file>
-
-<file path=ppt/slides/slide15.xml><?xml version="1.0" encoding="utf-8"?>
-<p:sld xmlns:a="http://schemas.openxmlformats.org/drawingml/2006/main" xmlns:p="http://schemas.openxmlformats.org/presentationml/2006/main" xmlns:r="http://schemas.openxmlformats.org/officeDocument/2006/relationships">
-  <p:cSld>
-    <p:bg>
-      <p:bgPr>
-        <a:solidFill>
-          <a:srgbClr val="FFFFFF"/>
-        </a:solidFill>
-        <a:effectLst/>
-      </p:bgPr>
-    </p:bg>
-    <p:spTree>
-      <p:nvGrpSpPr>
-        <p:cNvPr id="1" name=""/>
-        <p:cNvGrpSpPr/>
-        <p:nvPr/>
-      </p:nvGrpSpPr>
-      <p:grpSpPr/>
-      <p:sp>
-        <p:nvSpPr>
-          <p:cNvPr id="2" name="Rectangle 1"/>
-          <p:cNvSpPr/>
-          <p:nvPr/>
-        </p:nvSpPr>
-        <p:spPr>
-          <a:xfrm>
-            <a:off x="0" y="0"/>
-            <a:ext cx="12191695" cy="1170432"/>
-          </a:xfrm>
-          <a:prstGeom prst="rect">
-            <a:avLst/>
-          </a:prstGeom>
-          <a:solidFill>
-            <a:srgbClr val="095292"/>
-          </a:solidFill>
-          <a:ln>
-            <a:noFill/>
-          </a:ln>
-        </p:spPr>
-        <p:style>
-          <a:lnRef idx="1">
-            <a:schemeClr val="accent1"/>
-          </a:lnRef>
-          <a:fillRef idx="3">
-            <a:schemeClr val="accent1"/>
-          </a:fillRef>
-          <a:effectRef idx="2">
-            <a:schemeClr val="accent1"/>
-          </a:effectRef>
-          <a:fontRef idx="minor">
-            <a:schemeClr val="lt1"/>
-          </a:fontRef>
-        </p:style>
-        <p:txBody>
-          <a:bodyPr rtlCol="0" anchor="ctr"/>
-          <a:lstStyle/>
-          <a:p>
-            <a:pPr algn="ctr"/>
-          </a:p>
-        </p:txBody>
-      </p:sp>
-      <p:sp>
-        <p:nvSpPr>
-          <p:cNvPr id="3" name="Rectangle 2"/>
-          <p:cNvSpPr/>
-          <p:nvPr/>
-        </p:nvSpPr>
-        <p:spPr>
-          <a:xfrm>
-            <a:off x="0" y="1170432"/>
-            <a:ext cx="12191695" cy="41148"/>
-          </a:xfrm>
-          <a:prstGeom prst="rect">
-            <a:avLst/>
-          </a:prstGeom>
-          <a:solidFill>
-            <a:srgbClr val="FFD000"/>
-          </a:solidFill>
-          <a:ln>
-            <a:noFill/>
-          </a:ln>
-        </p:spPr>
-        <p:style>
-          <a:lnRef idx="1">
-            <a:schemeClr val="accent1"/>
-          </a:lnRef>
-          <a:fillRef idx="3">
-            <a:schemeClr val="accent1"/>
-          </a:fillRef>
-          <a:effectRef idx="2">
-            <a:schemeClr val="accent1"/>
-          </a:effectRef>
-          <a:fontRef idx="minor">
-            <a:schemeClr val="lt1"/>
-          </a:fontRef>
-        </p:style>
-        <p:txBody>
-          <a:bodyPr rtlCol="0" anchor="ctr"/>
-          <a:lstStyle/>
-          <a:p>
-            <a:pPr algn="ctr"/>
-          </a:p>
-        </p:txBody>
-      </p:sp>
-      <p:sp>
-        <p:nvSpPr>
-          <p:cNvPr id="4" name="TextBox 3"/>
-          <p:cNvSpPr txBox="1"/>
-          <p:nvPr/>
-        </p:nvSpPr>
-        <p:spPr>
-          <a:xfrm>
-            <a:off x="457200" y="164592"/>
-            <a:ext cx="11277295" cy="384048"/>
-          </a:xfrm>
-          <a:prstGeom prst="rect">
-            <a:avLst/>
-          </a:prstGeom>
-          <a:noFill/>
-        </p:spPr>
-        <p:txBody>
-          <a:bodyPr wrap="square">
-            <a:spAutoFit/>
-          </a:bodyPr>
-          <a:lstStyle/>
-          <a:p>
-            <a:r>
-              <a:rPr sz="2600" b="1" i="0">
-                <a:solidFill>
-                  <a:srgbClr val="FFFFFF"/>
-                </a:solidFill>
-                <a:latin typeface="Calibri"/>
-              </a:rPr>
-              <a:t>Del boceto al código Mermaid</a:t>
-            </a:r>
-          </a:p>
-        </p:txBody>
-      </p:sp>
-      <p:sp>
-        <p:nvSpPr>
-          <p:cNvPr id="5" name="TextBox 4"/>
-          <p:cNvSpPr txBox="1"/>
-          <p:nvPr/>
-        </p:nvSpPr>
-        <p:spPr>
-          <a:xfrm>
-            <a:off x="457200" y="566928"/>
-            <a:ext cx="11277295" cy="411480"/>
-          </a:xfrm>
-          <a:prstGeom prst="rect">
-            <a:avLst/>
-          </a:prstGeom>
-          <a:noFill/>
-        </p:spPr>
-        <p:txBody>
-          <a:bodyPr wrap="square">
-            <a:spAutoFit/>
-          </a:bodyPr>
-          <a:lstStyle/>
-          <a:p>
-            <a:r>
-              <a:rPr sz="1400" b="0" i="0">
-                <a:solidFill>
-                  <a:srgbClr val="B8D8EE"/>
-                </a:solidFill>
-                <a:latin typeface="Calibri"/>
-              </a:rPr>
-              <a:t>El diagrama se escribe como código: se versiona, se compara y se corrige</a:t>
-            </a:r>
-          </a:p>
-        </p:txBody>
-      </p:sp>
-      <p:sp>
-        <p:nvSpPr>
-          <p:cNvPr id="6" name="Rounded Rectangle 5"/>
-          <p:cNvSpPr/>
-          <p:nvPr/>
-        </p:nvSpPr>
-        <p:spPr>
-          <a:xfrm>
-            <a:off x="457200" y="1659636"/>
-            <a:ext cx="11277295" cy="1051560"/>
-          </a:xfrm>
-          <a:prstGeom prst="roundRect">
-            <a:avLst>
-              <a:gd name="adj" fmla="val 12000"/>
-            </a:avLst>
-          </a:prstGeom>
-          <a:solidFill>
-            <a:srgbClr val="F2F2F2"/>
-          </a:solidFill>
-          <a:ln>
-            <a:noFill/>
-          </a:ln>
-        </p:spPr>
-        <p:style>
-          <a:lnRef idx="1">
-            <a:schemeClr val="accent1"/>
-          </a:lnRef>
-          <a:fillRef idx="3">
-            <a:schemeClr val="accent1"/>
-          </a:fillRef>
-          <a:effectRef idx="2">
-            <a:schemeClr val="accent1"/>
-          </a:effectRef>
-          <a:fontRef idx="minor">
-            <a:schemeClr val="lt1"/>
-          </a:fontRef>
-        </p:style>
-        <p:txBody>
-          <a:bodyPr rtlCol="0" anchor="ctr"/>
-          <a:lstStyle/>
-          <a:p>
-            <a:pPr algn="ctr"/>
-          </a:p>
-        </p:txBody>
-      </p:sp>
-      <p:sp>
-        <p:nvSpPr>
-          <p:cNvPr id="7" name="Rounded Rectangle 6"/>
-          <p:cNvSpPr/>
-          <p:nvPr/>
-        </p:nvSpPr>
-        <p:spPr>
-          <a:xfrm>
-            <a:off x="594360" y="1965960"/>
-            <a:ext cx="438912" cy="438912"/>
-          </a:xfrm>
-          <a:prstGeom prst="roundRect">
-            <a:avLst>
-              <a:gd name="adj" fmla="val 12000"/>
-            </a:avLst>
-          </a:prstGeom>
-          <a:solidFill>
-            <a:srgbClr val="095292"/>
-          </a:solidFill>
-          <a:ln>
-            <a:noFill/>
-          </a:ln>
-        </p:spPr>
-        <p:style>
-          <a:lnRef idx="1">
-            <a:schemeClr val="accent1"/>
-          </a:lnRef>
-          <a:fillRef idx="3">
-            <a:schemeClr val="accent1"/>
-          </a:fillRef>
-          <a:effectRef idx="2">
-            <a:schemeClr val="accent1"/>
-          </a:effectRef>
-          <a:fontRef idx="minor">
-            <a:schemeClr val="lt1"/>
-          </a:fontRef>
-        </p:style>
-        <p:txBody>
-          <a:bodyPr rtlCol="0" anchor="ctr"/>
-          <a:lstStyle/>
-          <a:p>
-            <a:pPr algn="ctr"/>
-          </a:p>
-        </p:txBody>
-      </p:sp>
-      <p:sp>
-        <p:nvSpPr>
-          <p:cNvPr id="8" name="TextBox 7"/>
-          <p:cNvSpPr txBox="1"/>
-          <p:nvPr/>
-        </p:nvSpPr>
-        <p:spPr>
-          <a:xfrm>
-            <a:off x="594360" y="1965960"/>
-            <a:ext cx="438912" cy="438912"/>
-          </a:xfrm>
-          <a:prstGeom prst="rect">
-            <a:avLst/>
-          </a:prstGeom>
-          <a:noFill/>
-        </p:spPr>
-        <p:txBody>
-          <a:bodyPr wrap="square" anchor="ctr"/>
-          <a:lstStyle/>
-          <a:p>
-            <a:pPr algn="ctr"/>
-            <a:r>
-              <a:rPr sz="1600" b="1" i="0">
-                <a:solidFill>
-                  <a:srgbClr val="FFFFFF"/>
-                </a:solidFill>
-                <a:latin typeface="Calibri"/>
-              </a:rPr>
-              <a:t>1</a:t>
-            </a:r>
-          </a:p>
-        </p:txBody>
-      </p:sp>
-      <p:sp>
-        <p:nvSpPr>
-          <p:cNvPr id="9" name="TextBox 8"/>
-          <p:cNvSpPr txBox="1"/>
-          <p:nvPr/>
-        </p:nvSpPr>
-        <p:spPr>
-          <a:xfrm>
-            <a:off x="1188720" y="1751076"/>
-            <a:ext cx="10271455" cy="886968"/>
-          </a:xfrm>
-          <a:prstGeom prst="rect">
-            <a:avLst/>
-          </a:prstGeom>
-          <a:noFill/>
-        </p:spPr>
-        <p:txBody>
-          <a:bodyPr wrap="square" anchor="ctr"/>
-          <a:lstStyle/>
-          <a:p>
-            <a:r>
-              <a:rPr sz="1500" b="1" i="0">
-                <a:solidFill>
-                  <a:srgbClr val="095292"/>
-                </a:solidFill>
-                <a:latin typeface="Calibri"/>
-              </a:rPr>
-              <a:t>Diseña visual</a:t>
-            </a:r>
-          </a:p>
-          <a:p>
-            <a:pPr>
-              <a:spcBef>
-                <a:spcPts val="200"/>
-              </a:spcBef>
-            </a:pPr>
-            <a:r>
-              <a:rPr sz="1300" b="0" i="0">
-                <a:solidFill>
-                  <a:srgbClr val="333333"/>
-                </a:solidFill>
-                <a:latin typeface="Calibri"/>
-              </a:rPr>
-              <a:t>Dibuja el diagrama como quieras en Excalidraw o draw.io: es más rápido arrastrar cajas que escribir código, y ahí es donde se piensa el modelo.</a:t>
-            </a:r>
-          </a:p>
-        </p:txBody>
-      </p:sp>
-      <p:sp>
-        <p:nvSpPr>
-          <p:cNvPr id="10" name="Rounded Rectangle 9"/>
-          <p:cNvSpPr/>
-          <p:nvPr/>
-        </p:nvSpPr>
-        <p:spPr>
-          <a:xfrm>
-            <a:off x="457200" y="2802636"/>
-            <a:ext cx="11277295" cy="1051560"/>
-          </a:xfrm>
-          <a:prstGeom prst="roundRect">
-            <a:avLst>
-              <a:gd name="adj" fmla="val 12000"/>
-            </a:avLst>
-          </a:prstGeom>
-          <a:solidFill>
-            <a:srgbClr val="E8F4FA"/>
-          </a:solidFill>
-          <a:ln>
-            <a:noFill/>
-          </a:ln>
-        </p:spPr>
-        <p:style>
-          <a:lnRef idx="1">
-            <a:schemeClr val="accent1"/>
-          </a:lnRef>
-          <a:fillRef idx="3">
-            <a:schemeClr val="accent1"/>
-          </a:fillRef>
-          <a:effectRef idx="2">
-            <a:schemeClr val="accent1"/>
-          </a:effectRef>
-          <a:fontRef idx="minor">
-            <a:schemeClr val="lt1"/>
-          </a:fontRef>
-        </p:style>
-        <p:txBody>
-          <a:bodyPr rtlCol="0" anchor="ctr"/>
-          <a:lstStyle/>
-          <a:p>
-            <a:pPr algn="ctr"/>
-          </a:p>
-        </p:txBody>
-      </p:sp>
-      <p:sp>
-        <p:nvSpPr>
-          <p:cNvPr id="11" name="Rounded Rectangle 10"/>
-          <p:cNvSpPr/>
-          <p:nvPr/>
-        </p:nvSpPr>
-        <p:spPr>
-          <a:xfrm>
-            <a:off x="594360" y="3108960"/>
-            <a:ext cx="438912" cy="438912"/>
-          </a:xfrm>
-          <a:prstGeom prst="roundRect">
-            <a:avLst>
-              <a:gd name="adj" fmla="val 12000"/>
-            </a:avLst>
-          </a:prstGeom>
-          <a:solidFill>
-            <a:srgbClr val="095292"/>
-          </a:solidFill>
-          <a:ln>
-            <a:noFill/>
-          </a:ln>
-        </p:spPr>
-        <p:style>
-          <a:lnRef idx="1">
-            <a:schemeClr val="accent1"/>
-          </a:lnRef>
-          <a:fillRef idx="3">
-            <a:schemeClr val="accent1"/>
-          </a:fillRef>
-          <a:effectRef idx="2">
-            <a:schemeClr val="accent1"/>
-          </a:effectRef>
-          <a:fontRef idx="minor">
-            <a:schemeClr val="lt1"/>
-          </a:fontRef>
-        </p:style>
-        <p:txBody>
-          <a:bodyPr rtlCol="0" anchor="ctr"/>
-          <a:lstStyle/>
-          <a:p>
-            <a:pPr algn="ctr"/>
-          </a:p>
-        </p:txBody>
-      </p:sp>
-      <p:sp>
-        <p:nvSpPr>
-          <p:cNvPr id="12" name="TextBox 11"/>
-          <p:cNvSpPr txBox="1"/>
-          <p:nvPr/>
-        </p:nvSpPr>
-        <p:spPr>
-          <a:xfrm>
-            <a:off x="594360" y="3108960"/>
-            <a:ext cx="438912" cy="438912"/>
-          </a:xfrm>
-          <a:prstGeom prst="rect">
-            <a:avLst/>
-          </a:prstGeom>
-          <a:noFill/>
-        </p:spPr>
-        <p:txBody>
-          <a:bodyPr wrap="square" anchor="ctr"/>
-          <a:lstStyle/>
-          <a:p>
-            <a:pPr algn="ctr"/>
-            <a:r>
-              <a:rPr sz="1600" b="1" i="0">
-                <a:solidFill>
-                  <a:srgbClr val="FFFFFF"/>
-                </a:solidFill>
-                <a:latin typeface="Calibri"/>
-              </a:rPr>
-              <a:t>2</a:t>
-            </a:r>
-          </a:p>
-        </p:txBody>
-      </p:sp>
-      <p:sp>
-        <p:nvSpPr>
-          <p:cNvPr id="13" name="TextBox 12"/>
-          <p:cNvSpPr txBox="1"/>
-          <p:nvPr/>
-        </p:nvSpPr>
-        <p:spPr>
-          <a:xfrm>
-            <a:off x="1188720" y="2894076"/>
-            <a:ext cx="10271455" cy="886968"/>
-          </a:xfrm>
-          <a:prstGeom prst="rect">
-            <a:avLst/>
-          </a:prstGeom>
-          <a:noFill/>
-        </p:spPr>
-        <p:txBody>
-          <a:bodyPr wrap="square" anchor="ctr"/>
-          <a:lstStyle/>
-          <a:p>
-            <a:r>
-              <a:rPr sz="1500" b="1" i="0">
-                <a:solidFill>
-                  <a:srgbClr val="095292"/>
-                </a:solidFill>
-                <a:latin typeface="Calibri"/>
-              </a:rPr>
-              <a:t>Traduce con IA</a:t>
-            </a:r>
-          </a:p>
-          <a:p>
-            <a:pPr>
-              <a:spcBef>
-                <a:spcPts val="200"/>
-              </a:spcBef>
-            </a:pPr>
-            <a:r>
-              <a:rPr sz="1300" b="0" i="0">
-                <a:solidFill>
-                  <a:srgbClr val="333333"/>
-                </a:solidFill>
-                <a:latin typeface="Calibri"/>
-              </a:rPr>
-              <a:t>Describe tu boceto a una IA y pídele el código Mermaid usando flowchart. Revisa el resultado: la IA acierta la sintaxis, no tu modelo.</a:t>
-            </a:r>
-          </a:p>
-        </p:txBody>
-      </p:sp>
-      <p:sp>
-        <p:nvSpPr>
-          <p:cNvPr id="14" name="Rounded Rectangle 13"/>
-          <p:cNvSpPr/>
-          <p:nvPr/>
-        </p:nvSpPr>
-        <p:spPr>
-          <a:xfrm>
-            <a:off x="457200" y="3945636"/>
-            <a:ext cx="11277295" cy="1051560"/>
-          </a:xfrm>
-          <a:prstGeom prst="roundRect">
-            <a:avLst>
-              <a:gd name="adj" fmla="val 12000"/>
-            </a:avLst>
-          </a:prstGeom>
-          <a:solidFill>
-            <a:srgbClr val="F2F2F2"/>
-          </a:solidFill>
-          <a:ln>
-            <a:noFill/>
-          </a:ln>
-        </p:spPr>
-        <p:style>
-          <a:lnRef idx="1">
-            <a:schemeClr val="accent1"/>
-          </a:lnRef>
-          <a:fillRef idx="3">
-            <a:schemeClr val="accent1"/>
-          </a:fillRef>
-          <a:effectRef idx="2">
-            <a:schemeClr val="accent1"/>
-          </a:effectRef>
-          <a:fontRef idx="minor">
-            <a:schemeClr val="lt1"/>
-          </a:fontRef>
-        </p:style>
-        <p:txBody>
-          <a:bodyPr rtlCol="0" anchor="ctr"/>
-          <a:lstStyle/>
-          <a:p>
-            <a:pPr algn="ctr"/>
-          </a:p>
-        </p:txBody>
-      </p:sp>
-      <p:sp>
-        <p:nvSpPr>
-          <p:cNvPr id="15" name="Rounded Rectangle 14"/>
-          <p:cNvSpPr/>
-          <p:nvPr/>
-        </p:nvSpPr>
-        <p:spPr>
-          <a:xfrm>
-            <a:off x="594360" y="4251960"/>
-            <a:ext cx="438912" cy="438912"/>
-          </a:xfrm>
-          <a:prstGeom prst="roundRect">
-            <a:avLst>
-              <a:gd name="adj" fmla="val 12000"/>
-            </a:avLst>
-          </a:prstGeom>
-          <a:solidFill>
-            <a:srgbClr val="095292"/>
-          </a:solidFill>
-          <a:ln>
-            <a:noFill/>
-          </a:ln>
-        </p:spPr>
-        <p:style>
-          <a:lnRef idx="1">
-            <a:schemeClr val="accent1"/>
-          </a:lnRef>
-          <a:fillRef idx="3">
-            <a:schemeClr val="accent1"/>
-          </a:fillRef>
-          <a:effectRef idx="2">
-            <a:schemeClr val="accent1"/>
-          </a:effectRef>
-          <a:fontRef idx="minor">
-            <a:schemeClr val="lt1"/>
-          </a:fontRef>
-        </p:style>
-        <p:txBody>
-          <a:bodyPr rtlCol="0" anchor="ctr"/>
-          <a:lstStyle/>
-          <a:p>
-            <a:pPr algn="ctr"/>
-          </a:p>
-        </p:txBody>
-      </p:sp>
-      <p:sp>
-        <p:nvSpPr>
-          <p:cNvPr id="16" name="TextBox 15"/>
-          <p:cNvSpPr txBox="1"/>
-          <p:nvPr/>
-        </p:nvSpPr>
-        <p:spPr>
-          <a:xfrm>
-            <a:off x="594360" y="4251960"/>
-            <a:ext cx="438912" cy="438912"/>
-          </a:xfrm>
-          <a:prstGeom prst="rect">
-            <a:avLst/>
-          </a:prstGeom>
-          <a:noFill/>
-        </p:spPr>
-        <p:txBody>
-          <a:bodyPr wrap="square" anchor="ctr"/>
-          <a:lstStyle/>
-          <a:p>
-            <a:pPr algn="ctr"/>
-            <a:r>
-              <a:rPr sz="1600" b="1" i="0">
-                <a:solidFill>
-                  <a:srgbClr val="FFFFFF"/>
-                </a:solidFill>
-                <a:latin typeface="Calibri"/>
-              </a:rPr>
-              <a:t>3</a:t>
-            </a:r>
-          </a:p>
-        </p:txBody>
-      </p:sp>
-      <p:sp>
-        <p:nvSpPr>
-          <p:cNvPr id="17" name="TextBox 16"/>
-          <p:cNvSpPr txBox="1"/>
-          <p:nvPr/>
-        </p:nvSpPr>
-        <p:spPr>
-          <a:xfrm>
-            <a:off x="1188720" y="4037076"/>
-            <a:ext cx="10271455" cy="886968"/>
-          </a:xfrm>
-          <a:prstGeom prst="rect">
-            <a:avLst/>
-          </a:prstGeom>
-          <a:noFill/>
-        </p:spPr>
-        <p:txBody>
-          <a:bodyPr wrap="square" anchor="ctr"/>
-          <a:lstStyle/>
-          <a:p>
-            <a:r>
-              <a:rPr sz="1500" b="1" i="0">
-                <a:solidFill>
-                  <a:srgbClr val="095292"/>
-                </a:solidFill>
-                <a:latin typeface="Calibri"/>
-              </a:rPr>
-              <a:t>Renderiza en un visor</a:t>
-            </a:r>
-          </a:p>
-          <a:p>
-            <a:pPr>
-              <a:spcBef>
-                <a:spcPts val="200"/>
-              </a:spcBef>
-            </a:pPr>
-            <a:r>
-              <a:rPr sz="1300" b="0" i="0">
-                <a:solidFill>
-                  <a:srgbClr val="333333"/>
-                </a:solidFill>
-                <a:latin typeface="Calibri"/>
-              </a:rPr>
-              <a:t>Pega el código en un visor Mermaid (mermaid.live o la vista previa de tu editor) y míralo dibujado. Si no renderiza, corrige ahí: un end faltante o un rótulo sin comillas.</a:t>
-            </a:r>
-          </a:p>
-        </p:txBody>
-      </p:sp>
-      <p:sp>
-        <p:nvSpPr>
-          <p:cNvPr id="18" name="Rounded Rectangle 17"/>
-          <p:cNvSpPr/>
-          <p:nvPr/>
-        </p:nvSpPr>
-        <p:spPr>
-          <a:xfrm>
-            <a:off x="457200" y="5088636"/>
-            <a:ext cx="11277295" cy="1051560"/>
-          </a:xfrm>
-          <a:prstGeom prst="roundRect">
-            <a:avLst>
-              <a:gd name="adj" fmla="val 12000"/>
-            </a:avLst>
-          </a:prstGeom>
-          <a:solidFill>
-            <a:srgbClr val="E8F4FA"/>
-          </a:solidFill>
-          <a:ln>
-            <a:noFill/>
-          </a:ln>
-        </p:spPr>
-        <p:style>
-          <a:lnRef idx="1">
-            <a:schemeClr val="accent1"/>
-          </a:lnRef>
-          <a:fillRef idx="3">
-            <a:schemeClr val="accent1"/>
-          </a:fillRef>
-          <a:effectRef idx="2">
-            <a:schemeClr val="accent1"/>
-          </a:effectRef>
-          <a:fontRef idx="minor">
-            <a:schemeClr val="lt1"/>
-          </a:fontRef>
-        </p:style>
-        <p:txBody>
-          <a:bodyPr rtlCol="0" anchor="ctr"/>
-          <a:lstStyle/>
-          <a:p>
-            <a:pPr algn="ctr"/>
-          </a:p>
-        </p:txBody>
-      </p:sp>
-      <p:sp>
-        <p:nvSpPr>
-          <p:cNvPr id="19" name="Rounded Rectangle 18"/>
-          <p:cNvSpPr/>
-          <p:nvPr/>
-        </p:nvSpPr>
-        <p:spPr>
-          <a:xfrm>
-            <a:off x="594360" y="5394960"/>
-            <a:ext cx="438912" cy="438912"/>
-          </a:xfrm>
-          <a:prstGeom prst="roundRect">
-            <a:avLst>
-              <a:gd name="adj" fmla="val 12000"/>
-            </a:avLst>
-          </a:prstGeom>
-          <a:solidFill>
-            <a:srgbClr val="095292"/>
-          </a:solidFill>
-          <a:ln>
-            <a:noFill/>
-          </a:ln>
-        </p:spPr>
-        <p:style>
-          <a:lnRef idx="1">
-            <a:schemeClr val="accent1"/>
-          </a:lnRef>
-          <a:fillRef idx="3">
-            <a:schemeClr val="accent1"/>
-          </a:fillRef>
-          <a:effectRef idx="2">
-            <a:schemeClr val="accent1"/>
-          </a:effectRef>
-          <a:fontRef idx="minor">
-            <a:schemeClr val="lt1"/>
-          </a:fontRef>
-        </p:style>
-        <p:txBody>
-          <a:bodyPr rtlCol="0" anchor="ctr"/>
-          <a:lstStyle/>
-          <a:p>
-            <a:pPr algn="ctr"/>
-          </a:p>
-        </p:txBody>
-      </p:sp>
-      <p:sp>
-        <p:nvSpPr>
-          <p:cNvPr id="20" name="TextBox 19"/>
-          <p:cNvSpPr txBox="1"/>
-          <p:nvPr/>
-        </p:nvSpPr>
-        <p:spPr>
-          <a:xfrm>
-            <a:off x="594360" y="5394960"/>
-            <a:ext cx="438912" cy="438912"/>
-          </a:xfrm>
-          <a:prstGeom prst="rect">
-            <a:avLst/>
-          </a:prstGeom>
-          <a:noFill/>
-        </p:spPr>
-        <p:txBody>
-          <a:bodyPr wrap="square" anchor="ctr"/>
-          <a:lstStyle/>
-          <a:p>
-            <a:pPr algn="ctr"/>
-            <a:r>
-              <a:rPr sz="1600" b="1" i="0">
-                <a:solidFill>
-                  <a:srgbClr val="FFFFFF"/>
-                </a:solidFill>
-                <a:latin typeface="Calibri"/>
-              </a:rPr>
-              <a:t>4</a:t>
-            </a:r>
-          </a:p>
-        </p:txBody>
-      </p:sp>
-      <p:sp>
-        <p:nvSpPr>
-          <p:cNvPr id="21" name="TextBox 20"/>
-          <p:cNvSpPr txBox="1"/>
-          <p:nvPr/>
-        </p:nvSpPr>
-        <p:spPr>
-          <a:xfrm>
-            <a:off x="1188720" y="5180076"/>
-            <a:ext cx="10271455" cy="886968"/>
-          </a:xfrm>
-          <a:prstGeom prst="rect">
-            <a:avLst/>
-          </a:prstGeom>
-          <a:noFill/>
-        </p:spPr>
-        <p:txBody>
-          <a:bodyPr wrap="square" anchor="ctr"/>
-          <a:lstStyle/>
-          <a:p>
-            <a:r>
-              <a:rPr sz="1500" b="1" i="0">
-                <a:solidFill>
-                  <a:srgbClr val="095292"/>
-                </a:solidFill>
-                <a:latin typeface="Calibri"/>
-              </a:rPr>
-              <a:t>Guarda código e imagen</a:t>
-            </a:r>
-          </a:p>
-          <a:p>
-            <a:pPr>
-              <a:spcBef>
-                <a:spcPts val="200"/>
-              </a:spcBef>
-            </a:pPr>
-            <a:r>
-              <a:rPr sz="1300" b="0" i="0">
-                <a:solidFill>
-                  <a:srgbClr val="333333"/>
-                </a:solidFill>
-                <a:latin typeface="Calibri"/>
-              </a:rPr>
-              <a:t>El código es la fuente del diagrama: guárdalo con tu proyecto junto con el PNG exportado.</a:t>
-            </a:r>
-          </a:p>
-        </p:txBody>
-      </p:sp>
-      <p:sp>
-        <p:nvSpPr>
-          <p:cNvPr id="22" name="TextBox 21"/>
-          <p:cNvSpPr txBox="1"/>
-          <p:nvPr/>
-        </p:nvSpPr>
-        <p:spPr>
-          <a:xfrm>
-            <a:off x="11185855" y="6473952"/>
-            <a:ext cx="640080" cy="274320"/>
-          </a:xfrm>
-          <a:prstGeom prst="rect">
-            <a:avLst/>
-          </a:prstGeom>
-          <a:noFill/>
-        </p:spPr>
-        <p:txBody>
-          <a:bodyPr wrap="square">
-            <a:spAutoFit/>
-          </a:bodyPr>
-          <a:lstStyle/>
-          <a:p>
-            <a:pPr algn="r"/>
-            <a:r>
-              <a:rPr sz="1100" b="0" i="0">
-                <a:solidFill>
-                  <a:srgbClr val="666666"/>
-                </a:solidFill>
-                <a:latin typeface="Calibri"/>
-              </a:rPr>
-              <a:t>15</a:t>
-            </a:r>
-          </a:p>
-        </p:txBody>
-      </p:sp>
-    </p:spTree>
-  </p:cSld>
-  <p:clrMapOvr>
-    <a:masterClrMapping/>
-  </p:clrMapOvr>
-</p:sld>
-</file>
-
-<file path=ppt/slides/slide16.xml><?xml version="1.0" encoding="utf-8"?>
-<p:sld xmlns:a="http://schemas.openxmlformats.org/drawingml/2006/main" xmlns:p="http://schemas.openxmlformats.org/presentationml/2006/main" xmlns:r="http://schemas.openxmlformats.org/officeDocument/2006/relationships">
-  <p:cSld>
-    <p:bg>
-      <p:bgPr>
-        <a:solidFill>
-          <a:srgbClr val="FFFFFF"/>
-        </a:solidFill>
-        <a:effectLst/>
-      </p:bgPr>
-    </p:bg>
-    <p:spTree>
-      <p:nvGrpSpPr>
-        <p:cNvPr id="1" name=""/>
-        <p:cNvGrpSpPr/>
-        <p:nvPr/>
-      </p:nvGrpSpPr>
-      <p:grpSpPr/>
-      <p:sp>
-        <p:nvSpPr>
-          <p:cNvPr id="2" name="Rectangle 1"/>
-          <p:cNvSpPr/>
-          <p:nvPr/>
-        </p:nvSpPr>
-        <p:spPr>
-          <a:xfrm>
-            <a:off x="0" y="0"/>
             <a:ext cx="12191695" cy="164592"/>
           </a:xfrm>
           <a:prstGeom prst="rect">
@@ -7294,14 +7131,118 @@
       </p:sp>
       <p:sp>
         <p:nvSpPr>
-          <p:cNvPr id="5" name="TextBox 4"/>
+          <p:cNvPr id="5" name="Rounded Rectangle 4"/>
+          <p:cNvSpPr/>
+          <p:nvPr/>
+        </p:nvSpPr>
+        <p:spPr>
+          <a:xfrm>
+            <a:off x="5797149" y="1573813"/>
+            <a:ext cx="6010497" cy="4057845"/>
+          </a:xfrm>
+          <a:prstGeom prst="roundRect">
+            <a:avLst>
+              <a:gd name="adj" fmla="val 4000"/>
+            </a:avLst>
+          </a:prstGeom>
+          <a:solidFill>
+            <a:srgbClr val="E8EEF4"/>
+          </a:solidFill>
+          <a:ln>
+            <a:noFill/>
+          </a:ln>
+        </p:spPr>
+        <p:style>
+          <a:lnRef idx="1">
+            <a:schemeClr val="accent1"/>
+          </a:lnRef>
+          <a:fillRef idx="3">
+            <a:schemeClr val="accent1"/>
+          </a:fillRef>
+          <a:effectRef idx="2">
+            <a:schemeClr val="accent1"/>
+          </a:effectRef>
+          <a:fontRef idx="minor">
+            <a:schemeClr val="lt1"/>
+          </a:fontRef>
+        </p:style>
+        <p:txBody>
+          <a:bodyPr rtlCol="0" anchor="ctr"/>
+          <a:lstStyle/>
+          <a:p>
+            <a:pPr algn="ctr"/>
+          </a:p>
+        </p:txBody>
+      </p:sp>
+      <p:pic>
+        <p:nvPicPr>
+          <p:cNvPr id="6" name="Picture 5" descr="students-learning-laptops-classroom.jpg"/>
+          <p:cNvPicPr>
+            <a:picLocks noChangeAspect="1"/>
+          </p:cNvPicPr>
+          <p:nvPr/>
+        </p:nvPicPr>
+        <p:blipFill>
+          <a:blip r:embed="rId2"/>
+          <a:stretch>
+            <a:fillRect/>
+          </a:stretch>
+        </p:blipFill>
+        <p:spPr>
+          <a:xfrm>
+            <a:off x="5870301" y="1646965"/>
+            <a:ext cx="5864193" cy="3911541"/>
+          </a:xfrm>
+          <a:prstGeom prst="rect">
+            <a:avLst/>
+          </a:prstGeom>
+        </p:spPr>
+      </p:pic>
+      <p:sp>
+        <p:nvSpPr>
+          <p:cNvPr id="7" name="TextBox 6"/>
           <p:cNvSpPr txBox="1"/>
           <p:nvPr/>
         </p:nvSpPr>
         <p:spPr>
           <a:xfrm>
-            <a:off x="457200" y="1170432"/>
-            <a:ext cx="11277295" cy="5230368"/>
+            <a:off x="5870301" y="5961888"/>
+            <a:ext cx="5864193" cy="320040"/>
+          </a:xfrm>
+          <a:prstGeom prst="rect">
+            <a:avLst/>
+          </a:prstGeom>
+          <a:noFill/>
+        </p:spPr>
+        <p:txBody>
+          <a:bodyPr wrap="square">
+            <a:spAutoFit/>
+          </a:bodyPr>
+          <a:lstStyle/>
+          <a:p>
+            <a:pPr algn="ctr"/>
+            <a:r>
+              <a:rPr sz="1100" b="0" i="1">
+                <a:solidFill>
+                  <a:srgbClr val="666666"/>
+                </a:solidFill>
+                <a:latin typeface="Calibri"/>
+              </a:rPr>
+              <a:t>Foto: Mikhail Nilov · Pexels</a:t>
+            </a:r>
+          </a:p>
+        </p:txBody>
+      </p:sp>
+      <p:sp>
+        <p:nvSpPr>
+          <p:cNvPr id="8" name="TextBox 7"/>
+          <p:cNvSpPr txBox="1"/>
+          <p:nvPr/>
+        </p:nvSpPr>
+        <p:spPr>
+          <a:xfrm>
+            <a:off x="457200" y="1353312"/>
+            <a:ext cx="5093061" cy="5047488"/>
           </a:xfrm>
           <a:prstGeom prst="rect">
             <a:avLst/>
@@ -7401,7 +7342,7 @@
       </p:sp>
       <p:sp>
         <p:nvSpPr>
-          <p:cNvPr id="6" name="TextBox 5"/>
+          <p:cNvPr id="9" name="TextBox 8"/>
           <p:cNvSpPr txBox="1"/>
           <p:nvPr/>
         </p:nvSpPr>
@@ -7575,21 +7516,149 @@
                 </a:solidFill>
                 <a:latin typeface="Calibri"/>
               </a:rPr>
-              <a:t>Cierre del curso</a:t>
-            </a:r>
-          </a:p>
-        </p:txBody>
-      </p:sp>
-      <p:sp>
-        <p:nvSpPr>
-          <p:cNvPr id="5" name="TextBox 4"/>
+              <a:t>Sustentar no es describir: el eje de toda la clase</a:t>
+            </a:r>
+          </a:p>
+        </p:txBody>
+      </p:sp>
+      <p:sp>
+        <p:nvSpPr>
+          <p:cNvPr id="5" name="Rounded Rectangle 4"/>
+          <p:cNvSpPr/>
+          <p:nvPr/>
+        </p:nvSpPr>
+        <p:spPr>
+          <a:xfrm>
+            <a:off x="5803166" y="1188719"/>
+            <a:ext cx="5998464" cy="4828032"/>
+          </a:xfrm>
+          <a:prstGeom prst="roundRect">
+            <a:avLst>
+              <a:gd name="adj" fmla="val 4000"/>
+            </a:avLst>
+          </a:prstGeom>
+          <a:solidFill>
+            <a:srgbClr val="E8EEF4"/>
+          </a:solidFill>
+          <a:ln>
+            <a:noFill/>
+          </a:ln>
+        </p:spPr>
+        <p:style>
+          <a:lnRef idx="1">
+            <a:schemeClr val="accent1"/>
+          </a:lnRef>
+          <a:fillRef idx="3">
+            <a:schemeClr val="accent1"/>
+          </a:fillRef>
+          <a:effectRef idx="2">
+            <a:schemeClr val="accent1"/>
+          </a:effectRef>
+          <a:fontRef idx="minor">
+            <a:schemeClr val="lt1"/>
+          </a:fontRef>
+        </p:style>
+        <p:txBody>
+          <a:bodyPr rtlCol="0" anchor="ctr"/>
+          <a:lstStyle/>
+          <a:p>
+            <a:pPr algn="ctr"/>
+          </a:p>
+        </p:txBody>
+      </p:sp>
+      <p:pic>
+        <p:nvPicPr>
+          <p:cNvPr id="6" name="Picture 5" descr="describir-vs-sustentar-paso1.png"/>
+          <p:cNvPicPr>
+            <a:picLocks noChangeAspect="1"/>
+          </p:cNvPicPr>
+          <p:nvPr/>
+        </p:nvPicPr>
+        <p:blipFill>
+          <a:blip r:embed="rId2"/>
+          <a:stretch>
+            <a:fillRect/>
+          </a:stretch>
+        </p:blipFill>
+        <p:spPr>
+          <a:xfrm>
+            <a:off x="5876318" y="1261872"/>
+            <a:ext cx="5852160" cy="4681728"/>
+          </a:xfrm>
+          <a:prstGeom prst="rect">
+            <a:avLst/>
+          </a:prstGeom>
+        </p:spPr>
+      </p:pic>
+      <p:pic>
+        <p:nvPicPr>
+          <p:cNvPr id="7" name="Picture 6" descr="describir-vs-sustentar-paso2.png"/>
+          <p:cNvPicPr>
+            <a:picLocks noChangeAspect="1"/>
+          </p:cNvPicPr>
+          <p:nvPr/>
+        </p:nvPicPr>
+        <p:blipFill>
+          <a:blip r:embed="rId3"/>
+          <a:stretch>
+            <a:fillRect/>
+          </a:stretch>
+        </p:blipFill>
+        <p:spPr>
+          <a:xfrm>
+            <a:off x="5876318" y="1261872"/>
+            <a:ext cx="5852160" cy="4681728"/>
+          </a:xfrm>
+          <a:prstGeom prst="rect">
+            <a:avLst/>
+          </a:prstGeom>
+        </p:spPr>
+      </p:pic>
+      <p:sp>
+        <p:nvSpPr>
+          <p:cNvPr id="8" name="TextBox 7"/>
           <p:cNvSpPr txBox="1"/>
           <p:nvPr/>
         </p:nvSpPr>
         <p:spPr>
           <a:xfrm>
-            <a:off x="457200" y="1170432"/>
-            <a:ext cx="11277295" cy="5230368"/>
+            <a:off x="5870301" y="5961888"/>
+            <a:ext cx="5864193" cy="320040"/>
+          </a:xfrm>
+          <a:prstGeom prst="rect">
+            <a:avLst/>
+          </a:prstGeom>
+          <a:noFill/>
+        </p:spPr>
+        <p:txBody>
+          <a:bodyPr wrap="square">
+            <a:spAutoFit/>
+          </a:bodyPr>
+          <a:lstStyle/>
+          <a:p>
+            <a:pPr algn="ctr"/>
+            <a:r>
+              <a:rPr sz="1100" b="0" i="1">
+                <a:solidFill>
+                  <a:srgbClr val="666666"/>
+                </a:solidFill>
+                <a:latin typeface="Calibri"/>
+              </a:rPr>
+              <a:t>Clic para avanzar la animación</a:t>
+            </a:r>
+          </a:p>
+        </p:txBody>
+      </p:sp>
+      <p:sp>
+        <p:nvSpPr>
+          <p:cNvPr id="9" name="TextBox 8"/>
+          <p:cNvSpPr txBox="1"/>
+          <p:nvPr/>
+        </p:nvSpPr>
+        <p:spPr>
+          <a:xfrm>
+            <a:off x="457200" y="1353312"/>
+            <a:ext cx="5093061" cy="5047488"/>
           </a:xfrm>
           <a:prstGeom prst="rect">
             <a:avLst/>
@@ -7614,7 +7683,7 @@
                 </a:solidFill>
                 <a:latin typeface="Calibri"/>
               </a:rPr>
-              <a:t>–   RAA1–3 aplicados. Conserven el repo como portafolio.</a:t>
+              <a:t>–   Describir es decir qué contiene un artefacto.</a:t>
             </a:r>
           </a:p>
           <a:p>
@@ -7630,7 +7699,7 @@
                 </a:solidFill>
                 <a:latin typeface="Calibri"/>
               </a:rPr>
-              <a:t>–   Gracias — arquitectura es trade-offs documentados, no logos de proveedores.</a:t>
+              <a:t>–   Sustentar es decir por qué quedó así y no de otra forma, y qué se aceptó perder al elegirlo.</a:t>
             </a:r>
           </a:p>
           <a:p>
@@ -7646,7 +7715,7 @@
                 </a:solidFill>
                 <a:latin typeface="Calibri"/>
               </a:rPr>
-              <a:t>–   Recorrido: dominio → modelo de servicio → contenedor → Containers → seguridad → despliegue → CI y monitoreo → costos → rendimiento → escala.</a:t>
+              <a:t>–   Una decisión de arquitectura afecta la estructura, es costosa de revertir y tiene una alternativa descartada.</a:t>
             </a:r>
           </a:p>
           <a:p>
@@ -7662,30 +7731,14 @@
                 </a:solidFill>
                 <a:latin typeface="Calibri"/>
               </a:rPr>
-              <a:t>–   Cada paso fue una decisión con su trade-off escrito: eso es lo que se lleva a la práctica profesional.</a:t>
-            </a:r>
-          </a:p>
-          <a:p>
-            <a:pPr>
-              <a:spcAft>
-                <a:spcPts val="800"/>
-              </a:spcAft>
-            </a:pPr>
-            <a:r>
-              <a:rPr sz="2000" b="0" i="0">
-                <a:solidFill>
-                  <a:srgbClr val="333333"/>
-                </a:solidFill>
-                <a:latin typeface="Calibri"/>
-              </a:rPr>
-              <a:t>–   Un ADR por decisión importante permite, años después, saber por qué el sistema es como es.</a:t>
-            </a:r>
-          </a:p>
-        </p:txBody>
-      </p:sp>
-      <p:sp>
-        <p:nvSpPr>
-          <p:cNvPr id="6" name="TextBox 5"/>
+              <a:t>–   Un trade-off es lo que se sacrifica al decidir: no hay decisión sin trade-off.</a:t>
+            </a:r>
+          </a:p>
+        </p:txBody>
+      </p:sp>
+      <p:sp>
+        <p:nvSpPr>
+          <p:cNvPr id="10" name="TextBox 9"/>
           <p:cNvSpPr txBox="1"/>
           <p:nvPr/>
         </p:nvSpPr>
@@ -7723,6 +7776,89 @@
   <p:clrMapOvr>
     <a:masterClrMapping/>
   </p:clrMapOvr>
+  <p:timing>
+    <p:tnLst>
+      <p:par>
+        <p:cTn id="1" dur="indefinite" restart="never" nodeType="tmRoot">
+          <p:childTnLst>
+            <p:seq concurrent="1" nextAc="seek">
+              <p:cTn id="2" dur="indefinite" nodeType="mainSeq">
+                <p:childTnLst>
+                  <p:par>
+                    <p:cTn id="3" fill="hold">
+                      <p:stCondLst>
+                        <p:cond delay="indefinite"/>
+                      </p:stCondLst>
+                      <p:childTnLst>
+                        <p:par>
+                          <p:cTn id="4" fill="hold">
+                            <p:stCondLst>
+                              <p:cond delay="0"/>
+                            </p:stCondLst>
+                            <p:childTnLst>
+                              <p:par>
+                                <p:cTn id="5" presetID="10" presetClass="entr" presetSubtype="0" fill="hold" nodeType="clickEffect">
+                                  <p:stCondLst>
+                                    <p:cond delay="0"/>
+                                  </p:stCondLst>
+                                  <p:childTnLst>
+                                    <p:set>
+                                      <p:cBhvr>
+                                        <p:cTn id="6" dur="1" fill="hold">
+                                          <p:stCondLst>
+                                            <p:cond delay="0"/>
+                                          </p:stCondLst>
+                                        </p:cTn>
+                                        <p:tgtEl>
+                                          <p:spTgt spid="7"/>
+                                        </p:tgtEl>
+                                        <p:attrNameLst>
+                                          <p:attrName>style.visibility</p:attrName>
+                                        </p:attrNameLst>
+                                      </p:cBhvr>
+                                      <p:to>
+                                        <p:strVal val="visible"/>
+                                      </p:to>
+                                    </p:set>
+                                    <p:animEffect transition="in" filter="fade">
+                                      <p:cBhvr>
+                                        <p:cTn id="7" dur="450"/>
+                                        <p:tgtEl>
+                                          <p:spTgt spid="7"/>
+                                        </p:tgtEl>
+                                      </p:cBhvr>
+                                    </p:animEffect>
+                                  </p:childTnLst>
+                                </p:cTn>
+                              </p:par>
+                            </p:childTnLst>
+                          </p:cTn>
+                        </p:par>
+                      </p:childTnLst>
+                    </p:cTn>
+                  </p:par>
+                </p:childTnLst>
+              </p:cTn>
+              <p:prevCondLst>
+                <p:cond evt="onPrev" delay="0">
+                  <p:tgtEl>
+                    <p:sldTgt/>
+                  </p:tgtEl>
+                </p:cond>
+              </p:prevCondLst>
+              <p:nextCondLst>
+                <p:cond evt="onNext" delay="0">
+                  <p:tgtEl>
+                    <p:sldTgt/>
+                  </p:tgtEl>
+                </p:cond>
+              </p:nextCondLst>
+            </p:seq>
+          </p:childTnLst>
+        </p:cTn>
+      </p:par>
+    </p:tnLst>
+  </p:timing>
 </p:sld>
 </file>
 
@@ -7859,21 +7995,173 @@
                 </a:solidFill>
                 <a:latin typeface="Calibri"/>
               </a:rPr>
-              <a:t>Sustentar no es describir: el eje de toda la clase (1/2)</a:t>
-            </a:r>
-          </a:p>
-        </p:txBody>
-      </p:sp>
-      <p:sp>
-        <p:nvSpPr>
-          <p:cNvPr id="5" name="TextBox 4"/>
+              <a:t>La prueba de tres capas</a:t>
+            </a:r>
+          </a:p>
+        </p:txBody>
+      </p:sp>
+      <p:sp>
+        <p:nvSpPr>
+          <p:cNvPr id="5" name="Rounded Rectangle 4"/>
+          <p:cNvSpPr/>
+          <p:nvPr/>
+        </p:nvSpPr>
+        <p:spPr>
+          <a:xfrm>
+            <a:off x="5803166" y="1188719"/>
+            <a:ext cx="5998464" cy="4828032"/>
+          </a:xfrm>
+          <a:prstGeom prst="roundRect">
+            <a:avLst>
+              <a:gd name="adj" fmla="val 4000"/>
+            </a:avLst>
+          </a:prstGeom>
+          <a:solidFill>
+            <a:srgbClr val="E8EEF4"/>
+          </a:solidFill>
+          <a:ln>
+            <a:noFill/>
+          </a:ln>
+        </p:spPr>
+        <p:style>
+          <a:lnRef idx="1">
+            <a:schemeClr val="accent1"/>
+          </a:lnRef>
+          <a:fillRef idx="3">
+            <a:schemeClr val="accent1"/>
+          </a:fillRef>
+          <a:effectRef idx="2">
+            <a:schemeClr val="accent1"/>
+          </a:effectRef>
+          <a:fontRef idx="minor">
+            <a:schemeClr val="lt1"/>
+          </a:fontRef>
+        </p:style>
+        <p:txBody>
+          <a:bodyPr rtlCol="0" anchor="ctr"/>
+          <a:lstStyle/>
+          <a:p>
+            <a:pPr algn="ctr"/>
+          </a:p>
+        </p:txBody>
+      </p:sp>
+      <p:pic>
+        <p:nvPicPr>
+          <p:cNvPr id="6" name="Picture 5" descr="tres-capas-paso1.png"/>
+          <p:cNvPicPr>
+            <a:picLocks noChangeAspect="1"/>
+          </p:cNvPicPr>
+          <p:nvPr/>
+        </p:nvPicPr>
+        <p:blipFill>
+          <a:blip r:embed="rId2"/>
+          <a:stretch>
+            <a:fillRect/>
+          </a:stretch>
+        </p:blipFill>
+        <p:spPr>
+          <a:xfrm>
+            <a:off x="5876318" y="1261872"/>
+            <a:ext cx="5852160" cy="4681728"/>
+          </a:xfrm>
+          <a:prstGeom prst="rect">
+            <a:avLst/>
+          </a:prstGeom>
+        </p:spPr>
+      </p:pic>
+      <p:pic>
+        <p:nvPicPr>
+          <p:cNvPr id="7" name="Picture 6" descr="tres-capas-paso2.png"/>
+          <p:cNvPicPr>
+            <a:picLocks noChangeAspect="1"/>
+          </p:cNvPicPr>
+          <p:nvPr/>
+        </p:nvPicPr>
+        <p:blipFill>
+          <a:blip r:embed="rId3"/>
+          <a:stretch>
+            <a:fillRect/>
+          </a:stretch>
+        </p:blipFill>
+        <p:spPr>
+          <a:xfrm>
+            <a:off x="5876318" y="1261872"/>
+            <a:ext cx="5852160" cy="4681728"/>
+          </a:xfrm>
+          <a:prstGeom prst="rect">
+            <a:avLst/>
+          </a:prstGeom>
+        </p:spPr>
+      </p:pic>
+      <p:pic>
+        <p:nvPicPr>
+          <p:cNvPr id="8" name="Picture 7" descr="tres-capas-paso3.png"/>
+          <p:cNvPicPr>
+            <a:picLocks noChangeAspect="1"/>
+          </p:cNvPicPr>
+          <p:nvPr/>
+        </p:nvPicPr>
+        <p:blipFill>
+          <a:blip r:embed="rId4"/>
+          <a:stretch>
+            <a:fillRect/>
+          </a:stretch>
+        </p:blipFill>
+        <p:spPr>
+          <a:xfrm>
+            <a:off x="5876318" y="1261872"/>
+            <a:ext cx="5852160" cy="4681728"/>
+          </a:xfrm>
+          <a:prstGeom prst="rect">
+            <a:avLst/>
+          </a:prstGeom>
+        </p:spPr>
+      </p:pic>
+      <p:sp>
+        <p:nvSpPr>
+          <p:cNvPr id="13" name="TextBox 12"/>
           <p:cNvSpPr txBox="1"/>
           <p:nvPr/>
         </p:nvSpPr>
         <p:spPr>
           <a:xfrm>
-            <a:off x="457200" y="1170432"/>
-            <a:ext cx="11277295" cy="5230368"/>
+            <a:off x="5870301" y="5961888"/>
+            <a:ext cx="5864193" cy="320040"/>
+          </a:xfrm>
+          <a:prstGeom prst="rect">
+            <a:avLst/>
+          </a:prstGeom>
+          <a:noFill/>
+        </p:spPr>
+        <p:txBody>
+          <a:bodyPr wrap="square">
+            <a:spAutoFit/>
+          </a:bodyPr>
+          <a:lstStyle/>
+          <a:p>
+            <a:pPr algn="ctr"/>
+            <a:r>
+              <a:rPr sz="1100" b="0" i="1">
+                <a:solidFill>
+                  <a:srgbClr val="666666"/>
+                </a:solidFill>
+                <a:latin typeface="Calibri"/>
+              </a:rPr>
+              <a:t>Clic para avanzar la animación</a:t>
+            </a:r>
+          </a:p>
+        </p:txBody>
+      </p:sp>
+      <p:sp>
+        <p:nvSpPr>
+          <p:cNvPr id="14" name="TextBox 13"/>
+          <p:cNvSpPr txBox="1"/>
+          <p:nvPr/>
+        </p:nvSpPr>
+        <p:spPr>
+          <a:xfrm>
+            <a:off x="457200" y="1353312"/>
+            <a:ext cx="5093061" cy="5047488"/>
           </a:xfrm>
           <a:prstGeom prst="rect">
             <a:avLst/>
@@ -7898,7 +8186,7 @@
                 </a:solidFill>
                 <a:latin typeface="Calibri"/>
               </a:rPr>
-              <a:t>–   Describir un artefacto es decir que contiene: «este es el diagrama de despliegue de la app, aqui esta el contenedor de la API, aqui la base de datos».</a:t>
+              <a:t>–   Primera capa, el QUÉ: «la app corre con un contenedor por servicio».</a:t>
             </a:r>
           </a:p>
           <a:p>
@@ -7914,7 +8202,7 @@
                 </a:solidFill>
                 <a:latin typeface="Calibri"/>
               </a:rPr>
-              <a:t>–   Sustentar es responder por que quedo asi y no de otra forma, y que se acepto perder al elegirlo.</a:t>
+              <a:t>–   Segunda, el POR QUÉ: «porque la sostiene una sola persona sin presupuesto de nube».</a:t>
             </a:r>
           </a:p>
           <a:p>
@@ -7930,7 +8218,7 @@
                 </a:solidFill>
                 <a:latin typeface="Calibri"/>
               </a:rPr>
-              <a:t>–   Si una eleccion no cumple esas tres condiciones no es arquitectura sino detalle de implementacion: elegir el nombre de una variable no es arquitectura, elegir si el frontend y la API viven en el mismo contenedor si lo es.</a:t>
+              <a:t>–   Tercera, A CAMBIO DE QUÉ: «perdemos el aislamiento fuerte de una máquina virtual completa».</a:t>
             </a:r>
           </a:p>
           <a:p>
@@ -7946,30 +8234,14 @@
                 </a:solidFill>
                 <a:latin typeface="Calibri"/>
               </a:rPr>
-              <a:t>–   Un trade-off es lo que se sacrifica al tomar esa decision.</a:t>
-            </a:r>
-          </a:p>
-          <a:p>
-            <a:pPr>
-              <a:spcAft>
-                <a:spcPts val="800"/>
-              </a:spcAft>
-            </a:pPr>
-            <a:r>
-              <a:rPr sz="2000" b="0" i="0">
-                <a:solidFill>
-                  <a:srgbClr val="333333"/>
-                </a:solidFill>
-                <a:latin typeface="Calibri"/>
-              </a:rPr>
-              <a:t>–   No existe decision de arquitectura sin trade-off, y cuando un estudiante afirma que su opcion es mejor en todo, lo que ocurre en realidad es que todavia no encontro que perdio.</a:t>
-            </a:r>
-          </a:p>
-        </p:txBody>
-      </p:sp>
-      <p:sp>
-        <p:nvSpPr>
-          <p:cNvPr id="6" name="TextBox 5"/>
+              <a:t>–   Quien llega a la tercera capa está sustentando.</a:t>
+            </a:r>
+          </a:p>
+        </p:txBody>
+      </p:sp>
+      <p:sp>
+        <p:nvSpPr>
+          <p:cNvPr id="15" name="TextBox 14"/>
           <p:cNvSpPr txBox="1"/>
           <p:nvPr/>
         </p:nvSpPr>
@@ -8007,6 +8279,142 @@
   <p:clrMapOvr>
     <a:masterClrMapping/>
   </p:clrMapOvr>
+  <p:timing>
+    <p:tnLst>
+      <p:par>
+        <p:cTn id="1" dur="indefinite" restart="never" nodeType="tmRoot">
+          <p:childTnLst>
+            <p:seq concurrent="1" nextAc="seek">
+              <p:cTn id="2" dur="indefinite" nodeType="mainSeq">
+                <p:childTnLst>
+                  <p:par>
+                    <p:cTn id="3" fill="hold">
+                      <p:stCondLst>
+                        <p:cond delay="indefinite"/>
+                      </p:stCondLst>
+                      <p:childTnLst>
+                        <p:par>
+                          <p:cTn id="4" fill="hold">
+                            <p:stCondLst>
+                              <p:cond delay="0"/>
+                            </p:stCondLst>
+                            <p:childTnLst>
+                              <p:par>
+                                <p:cTn id="5" presetID="10" presetClass="entr" presetSubtype="0" fill="hold" nodeType="clickEffect">
+                                  <p:stCondLst>
+                                    <p:cond delay="0"/>
+                                  </p:stCondLst>
+                                  <p:childTnLst>
+                                    <p:set>
+                                      <p:cBhvr>
+                                        <p:cTn id="6" dur="1" fill="hold">
+                                          <p:stCondLst>
+                                            <p:cond delay="0"/>
+                                          </p:stCondLst>
+                                        </p:cTn>
+                                        <p:tgtEl>
+                                          <p:spTgt spid="7"/>
+                                        </p:tgtEl>
+                                        <p:attrNameLst>
+                                          <p:attrName>style.visibility</p:attrName>
+                                        </p:attrNameLst>
+                                      </p:cBhvr>
+                                      <p:to>
+                                        <p:strVal val="visible"/>
+                                      </p:to>
+                                    </p:set>
+                                    <p:animEffect transition="in" filter="fade">
+                                      <p:cBhvr>
+                                        <p:cTn id="7" dur="450"/>
+                                        <p:tgtEl>
+                                          <p:spTgt spid="7"/>
+                                        </p:tgtEl>
+                                      </p:cBhvr>
+                                    </p:animEffect>
+                                  </p:childTnLst>
+                                </p:cTn>
+                              </p:par>
+                            </p:childTnLst>
+                          </p:cTn>
+                        </p:par>
+                      </p:childTnLst>
+                    </p:cTn>
+                  </p:par>
+                  <p:par>
+                    <p:cTn id="8" fill="hold">
+                      <p:stCondLst>
+                        <p:cond delay="indefinite"/>
+                      </p:stCondLst>
+                      <p:childTnLst>
+                        <p:par>
+                          <p:cTn id="9" fill="hold">
+                            <p:stCondLst>
+                              <p:cond delay="0"/>
+                            </p:stCondLst>
+                            <p:childTnLst>
+                              <p:par>
+                                <p:cTn id="10" presetID="10" presetClass="entr" presetSubtype="0" fill="hold" nodeType="clickEffect">
+                                  <p:stCondLst>
+                                    <p:cond delay="0"/>
+                                  </p:stCondLst>
+                                  <p:childTnLst>
+                                    <p:set>
+                                      <p:cBhvr>
+                                        <p:cTn id="11" dur="1" fill="hold">
+                                          <p:stCondLst>
+                                            <p:cond delay="0"/>
+                                          </p:stCondLst>
+                                        </p:cTn>
+                                        <p:tgtEl>
+                                          <p:spTgt spid="8"/>
+                                        </p:tgtEl>
+                                        <p:attrNameLst>
+                                          <p:attrName>style.visibility</p:attrName>
+                                        </p:attrNameLst>
+                                      </p:cBhvr>
+                                      <p:to>
+                                        <p:strVal val="visible"/>
+                                      </p:to>
+                                    </p:set>
+                                    <p:animEffect transition="in" filter="fade">
+                                      <p:cBhvr>
+                                        <p:cTn id="12" dur="450"/>
+                                        <p:tgtEl>
+                                          <p:spTgt spid="8"/>
+                                        </p:tgtEl>
+                                      </p:cBhvr>
+                                    </p:animEffect>
+                                  </p:childTnLst>
+                                </p:cTn>
+                              </p:par>
+                            </p:childTnLst>
+                          </p:cTn>
+                        </p:par>
+                      </p:childTnLst>
+                    </p:cTn>
+                  </p:par>
+                </p:childTnLst>
+              </p:cTn>
+              <p:prevCondLst>
+                <p:cond evt="onPrev" delay="0">
+                  <p:tgtEl>
+                    <p:sldTgt/>
+                  </p:tgtEl>
+                </p:cond>
+              </p:prevCondLst>
+              <p:nextCondLst>
+                <p:cond evt="onNext" delay="0">
+                  <p:tgtEl>
+                    <p:sldTgt/>
+                  </p:tgtEl>
+                </p:cond>
+              </p:nextCondLst>
+            </p:seq>
+          </p:childTnLst>
+        </p:cTn>
+      </p:par>
+    </p:tnLst>
+  </p:timing>
 </p:sld>
 </file>
 
@@ -8143,21 +8551,125 @@
                 </a:solidFill>
                 <a:latin typeface="Calibri"/>
               </a:rPr>
-              <a:t>Sustentar no es describir: el eje de toda la clase (2/2)</a:t>
-            </a:r>
-          </a:p>
-        </p:txBody>
-      </p:sp>
-      <p:sp>
-        <p:nvSpPr>
-          <p:cNvPr id="5" name="TextBox 4"/>
+              <a:t>El ADR: el artefacto que sostiene la tercera capa</a:t>
+            </a:r>
+          </a:p>
+        </p:txBody>
+      </p:sp>
+      <p:sp>
+        <p:nvSpPr>
+          <p:cNvPr id="5" name="Rounded Rectangle 4"/>
+          <p:cNvSpPr/>
+          <p:nvPr/>
+        </p:nvSpPr>
+        <p:spPr>
+          <a:xfrm>
+            <a:off x="5797149" y="1573813"/>
+            <a:ext cx="6010497" cy="4057845"/>
+          </a:xfrm>
+          <a:prstGeom prst="roundRect">
+            <a:avLst>
+              <a:gd name="adj" fmla="val 4000"/>
+            </a:avLst>
+          </a:prstGeom>
+          <a:solidFill>
+            <a:srgbClr val="E8EEF4"/>
+          </a:solidFill>
+          <a:ln>
+            <a:noFill/>
+          </a:ln>
+        </p:spPr>
+        <p:style>
+          <a:lnRef idx="1">
+            <a:schemeClr val="accent1"/>
+          </a:lnRef>
+          <a:fillRef idx="3">
+            <a:schemeClr val="accent1"/>
+          </a:fillRef>
+          <a:effectRef idx="2">
+            <a:schemeClr val="accent1"/>
+          </a:effectRef>
+          <a:fontRef idx="minor">
+            <a:schemeClr val="lt1"/>
+          </a:fontRef>
+        </p:style>
+        <p:txBody>
+          <a:bodyPr rtlCol="0" anchor="ctr"/>
+          <a:lstStyle/>
+          <a:p>
+            <a:pPr algn="ctr"/>
+          </a:p>
+        </p:txBody>
+      </p:sp>
+      <p:pic>
+        <p:nvPicPr>
+          <p:cNvPr id="6" name="Picture 5" descr="paper-documents-desk-notes.jpg"/>
+          <p:cNvPicPr>
+            <a:picLocks noChangeAspect="1"/>
+          </p:cNvPicPr>
+          <p:nvPr/>
+        </p:nvPicPr>
+        <p:blipFill>
+          <a:blip r:embed="rId2"/>
+          <a:stretch>
+            <a:fillRect/>
+          </a:stretch>
+        </p:blipFill>
+        <p:spPr>
+          <a:xfrm>
+            <a:off x="5870301" y="1646965"/>
+            <a:ext cx="5864193" cy="3911541"/>
+          </a:xfrm>
+          <a:prstGeom prst="rect">
+            <a:avLst/>
+          </a:prstGeom>
+        </p:spPr>
+      </p:pic>
+      <p:sp>
+        <p:nvSpPr>
+          <p:cNvPr id="7" name="TextBox 6"/>
           <p:cNvSpPr txBox="1"/>
           <p:nvPr/>
         </p:nvSpPr>
         <p:spPr>
           <a:xfrm>
-            <a:off x="457200" y="1170432"/>
-            <a:ext cx="11277295" cy="5230368"/>
+            <a:off x="5870301" y="5961888"/>
+            <a:ext cx="5864193" cy="320040"/>
+          </a:xfrm>
+          <a:prstGeom prst="rect">
+            <a:avLst/>
+          </a:prstGeom>
+          <a:noFill/>
+        </p:spPr>
+        <p:txBody>
+          <a:bodyPr wrap="square">
+            <a:spAutoFit/>
+          </a:bodyPr>
+          <a:lstStyle/>
+          <a:p>
+            <a:pPr algn="ctr"/>
+            <a:r>
+              <a:rPr sz="1100" b="0" i="1">
+                <a:solidFill>
+                  <a:srgbClr val="666666"/>
+                </a:solidFill>
+                <a:latin typeface="Calibri"/>
+              </a:rPr>
+              <a:t>Foto: Maria Tyutina · Pexels</a:t>
+            </a:r>
+          </a:p>
+        </p:txBody>
+      </p:sp>
+      <p:sp>
+        <p:nvSpPr>
+          <p:cNvPr id="8" name="TextBox 7"/>
+          <p:cNvSpPr txBox="1"/>
+          <p:nvPr/>
+        </p:nvSpPr>
+        <p:spPr>
+          <a:xfrm>
+            <a:off x="457200" y="1353312"/>
+            <a:ext cx="5093061" cy="5047488"/>
           </a:xfrm>
           <a:prstGeom prst="rect">
             <a:avLst/>
@@ -8182,7 +8694,7 @@
                 </a:solidFill>
                 <a:latin typeface="Calibri"/>
               </a:rPr>
-              <a:t>–   Toda la sustentacion de hoy se apoya en esta distincion, porque lo que vale no es describir bien sino justificar bien.</a:t>
+              <a:t>–   El ADR registra UNA decisión en seis secciones: título, estado, contexto, decisión, alternativas descartadas y consecuencias.</a:t>
             </a:r>
           </a:p>
           <a:p>
@@ -8198,7 +8710,7 @@
                 </a:solidFill>
                 <a:latin typeface="Calibri"/>
               </a:rPr>
-              <a:t>–   Un ejemplo de las dos formas en la app: describir es «la API corre en un contenedor sobre PaaS»</a:t>
+              <a:t>–   En la sustentación el ADR no se lee: se cita por su número.</a:t>
             </a:r>
           </a:p>
           <a:p>
@@ -8214,30 +8726,14 @@
                 </a:solidFill>
                 <a:latin typeface="Calibri"/>
               </a:rPr>
-              <a:t>–   Justificar es «la API corre sobre PaaS porque el equipo es de 1 persona y no puede operar parches del sistema operativo; a cambio aceptamos menos control sobre la red».</a:t>
-            </a:r>
-          </a:p>
-          <a:p>
-            <a:pPr>
-              <a:spcAft>
-                <a:spcPts val="800"/>
-              </a:spcAft>
-            </a:pPr>
-            <a:r>
-              <a:rPr sz="2000" b="0" i="0">
-                <a:solidFill>
-                  <a:srgbClr val="333333"/>
-                </a:solidFill>
-                <a:latin typeface="Calibri"/>
-              </a:rPr>
-              <a:t>–   Un error comun es responder con la tecnologia en lugar de la razon: «usamos Docker» no justifica nada</a:t>
-            </a:r>
-          </a:p>
-        </p:txBody>
-      </p:sp>
-      <p:sp>
-        <p:nvSpPr>
-          <p:cNvPr id="6" name="TextBox 5"/>
+              <a:t>–   «Esta decisión está en el ADR-002, y el trade-off que aceptamos fue…»</a:t>
+            </a:r>
+          </a:p>
+        </p:txBody>
+      </p:sp>
+      <p:sp>
+        <p:nvSpPr>
+          <p:cNvPr id="9" name="TextBox 8"/>
           <p:cNvSpPr txBox="1"/>
           <p:nvPr/>
         </p:nvSpPr>
@@ -8411,21 +8907,149 @@
                 </a:solidFill>
                 <a:latin typeface="Calibri"/>
               </a:rPr>
-              <a:t>La prueba de tres capas</a:t>
-            </a:r>
-          </a:p>
-        </p:txBody>
-      </p:sp>
-      <p:sp>
-        <p:nvSpPr>
-          <p:cNvPr id="5" name="TextBox 4"/>
+              <a:t>El pitch de 5 a 8 minutos: el reparto que funciona</a:t>
+            </a:r>
+          </a:p>
+        </p:txBody>
+      </p:sp>
+      <p:sp>
+        <p:nvSpPr>
+          <p:cNvPr id="5" name="Rounded Rectangle 4"/>
+          <p:cNvSpPr/>
+          <p:nvPr/>
+        </p:nvSpPr>
+        <p:spPr>
+          <a:xfrm>
+            <a:off x="5803166" y="1188719"/>
+            <a:ext cx="5998464" cy="4828032"/>
+          </a:xfrm>
+          <a:prstGeom prst="roundRect">
+            <a:avLst>
+              <a:gd name="adj" fmla="val 4000"/>
+            </a:avLst>
+          </a:prstGeom>
+          <a:solidFill>
+            <a:srgbClr val="E8EEF4"/>
+          </a:solidFill>
+          <a:ln>
+            <a:noFill/>
+          </a:ln>
+        </p:spPr>
+        <p:style>
+          <a:lnRef idx="1">
+            <a:schemeClr val="accent1"/>
+          </a:lnRef>
+          <a:fillRef idx="3">
+            <a:schemeClr val="accent1"/>
+          </a:fillRef>
+          <a:effectRef idx="2">
+            <a:schemeClr val="accent1"/>
+          </a:effectRef>
+          <a:fontRef idx="minor">
+            <a:schemeClr val="lt1"/>
+          </a:fontRef>
+        </p:style>
+        <p:txBody>
+          <a:bodyPr rtlCol="0" anchor="ctr"/>
+          <a:lstStyle/>
+          <a:p>
+            <a:pPr algn="ctr"/>
+          </a:p>
+        </p:txBody>
+      </p:sp>
+      <p:pic>
+        <p:nvPicPr>
+          <p:cNvPr id="6" name="Picture 5" descr="pitch-reparto-paso1.png"/>
+          <p:cNvPicPr>
+            <a:picLocks noChangeAspect="1"/>
+          </p:cNvPicPr>
+          <p:nvPr/>
+        </p:nvPicPr>
+        <p:blipFill>
+          <a:blip r:embed="rId2"/>
+          <a:stretch>
+            <a:fillRect/>
+          </a:stretch>
+        </p:blipFill>
+        <p:spPr>
+          <a:xfrm>
+            <a:off x="5876318" y="1261872"/>
+            <a:ext cx="5852160" cy="4681728"/>
+          </a:xfrm>
+          <a:prstGeom prst="rect">
+            <a:avLst/>
+          </a:prstGeom>
+        </p:spPr>
+      </p:pic>
+      <p:pic>
+        <p:nvPicPr>
+          <p:cNvPr id="7" name="Picture 6" descr="pitch-reparto-paso2.png"/>
+          <p:cNvPicPr>
+            <a:picLocks noChangeAspect="1"/>
+          </p:cNvPicPr>
+          <p:nvPr/>
+        </p:nvPicPr>
+        <p:blipFill>
+          <a:blip r:embed="rId3"/>
+          <a:stretch>
+            <a:fillRect/>
+          </a:stretch>
+        </p:blipFill>
+        <p:spPr>
+          <a:xfrm>
+            <a:off x="5876318" y="1261872"/>
+            <a:ext cx="5852160" cy="4681728"/>
+          </a:xfrm>
+          <a:prstGeom prst="rect">
+            <a:avLst/>
+          </a:prstGeom>
+        </p:spPr>
+      </p:pic>
+      <p:sp>
+        <p:nvSpPr>
+          <p:cNvPr id="8" name="TextBox 7"/>
           <p:cNvSpPr txBox="1"/>
           <p:nvPr/>
         </p:nvSpPr>
         <p:spPr>
           <a:xfrm>
-            <a:off x="457200" y="1170432"/>
-            <a:ext cx="11277295" cy="5230368"/>
+            <a:off x="5870301" y="5961888"/>
+            <a:ext cx="5864193" cy="320040"/>
+          </a:xfrm>
+          <a:prstGeom prst="rect">
+            <a:avLst/>
+          </a:prstGeom>
+          <a:noFill/>
+        </p:spPr>
+        <p:txBody>
+          <a:bodyPr wrap="square">
+            <a:spAutoFit/>
+          </a:bodyPr>
+          <a:lstStyle/>
+          <a:p>
+            <a:pPr algn="ctr"/>
+            <a:r>
+              <a:rPr sz="1100" b="0" i="1">
+                <a:solidFill>
+                  <a:srgbClr val="666666"/>
+                </a:solidFill>
+                <a:latin typeface="Calibri"/>
+              </a:rPr>
+              <a:t>Clic para avanzar la animación</a:t>
+            </a:r>
+          </a:p>
+        </p:txBody>
+      </p:sp>
+      <p:sp>
+        <p:nvSpPr>
+          <p:cNvPr id="9" name="TextBox 8"/>
+          <p:cNvSpPr txBox="1"/>
+          <p:nvPr/>
+        </p:nvSpPr>
+        <p:spPr>
+          <a:xfrm>
+            <a:off x="457200" y="1353312"/>
+            <a:ext cx="5093061" cy="5047488"/>
           </a:xfrm>
           <a:prstGeom prst="rect">
             <a:avLst/>
@@ -8450,7 +9074,7 @@
                 </a:solidFill>
                 <a:latin typeface="Calibri"/>
               </a:rPr>
-              <a:t>–   Primera capa, el QUE: «la app corre con un contenedor por servicio».</a:t>
+              <a:t>–   Un pitch de 5 a 8 minutos no se improvisa ni se llena de diapositivas.</a:t>
             </a:r>
           </a:p>
           <a:p>
@@ -8466,7 +9090,7 @@
                 </a:solidFill>
                 <a:latin typeface="Calibri"/>
               </a:rPr>
-              <a:t>–   Segunda capa, el POR QUE: «porque el proyecto lo sostiene una sola persona sin presupuesto de nube, y un contenedor se levanta igual en el portatil de cualquiera y en Killercoda, sin instalar un hipervisor ni pedir tarjeta de credito».</a:t>
+              <a:t>–   Reparto: problema, arquitectura, decisión con su trade-off, evidencia ejecutable, punto débil y cierre.</a:t>
             </a:r>
           </a:p>
           <a:p>
@@ -8482,14 +9106,30 @@
                 </a:solidFill>
                 <a:latin typeface="Calibri"/>
               </a:rPr>
-              <a:t>–   Tercera capa, A CAMBIO DE QUE: «a cambio de perder el aislamiento fuerte que da una maquina virtual completa, y de asumir que si el host cae, caen todos los servicios a la vez porque comparten el mismo kernel».</a:t>
-            </a:r>
-          </a:p>
-        </p:txBody>
-      </p:sp>
-      <p:sp>
-        <p:nvSpPr>
-          <p:cNvPr id="6" name="TextBox 5"/>
+              <a:t>–   La suma queda entre 6 y 7 minutos, con margen.</a:t>
+            </a:r>
+          </a:p>
+          <a:p>
+            <a:pPr>
+              <a:spcAft>
+                <a:spcPts val="800"/>
+              </a:spcAft>
+            </a:pPr>
+            <a:r>
+              <a:rPr sz="2000" b="0" i="0">
+                <a:solidFill>
+                  <a:srgbClr val="333333"/>
+                </a:solidFill>
+                <a:latin typeface="Calibri"/>
+              </a:rPr>
+              <a:t>–   Una idea por diapositiva y ocho como máximo.</a:t>
+            </a:r>
+          </a:p>
+        </p:txBody>
+      </p:sp>
+      <p:sp>
+        <p:nvSpPr>
+          <p:cNvPr id="10" name="TextBox 9"/>
           <p:cNvSpPr txBox="1"/>
           <p:nvPr/>
         </p:nvSpPr>
@@ -8527,6 +9167,89 @@
   <p:clrMapOvr>
     <a:masterClrMapping/>
   </p:clrMapOvr>
+  <p:timing>
+    <p:tnLst>
+      <p:par>
+        <p:cTn id="1" dur="indefinite" restart="never" nodeType="tmRoot">
+          <p:childTnLst>
+            <p:seq concurrent="1" nextAc="seek">
+              <p:cTn id="2" dur="indefinite" nodeType="mainSeq">
+                <p:childTnLst>
+                  <p:par>
+                    <p:cTn id="3" fill="hold">
+                      <p:stCondLst>
+                        <p:cond delay="indefinite"/>
+                      </p:stCondLst>
+                      <p:childTnLst>
+                        <p:par>
+                          <p:cTn id="4" fill="hold">
+                            <p:stCondLst>
+                              <p:cond delay="0"/>
+                            </p:stCondLst>
+                            <p:childTnLst>
+                              <p:par>
+                                <p:cTn id="5" presetID="10" presetClass="entr" presetSubtype="0" fill="hold" nodeType="clickEffect">
+                                  <p:stCondLst>
+                                    <p:cond delay="0"/>
+                                  </p:stCondLst>
+                                  <p:childTnLst>
+                                    <p:set>
+                                      <p:cBhvr>
+                                        <p:cTn id="6" dur="1" fill="hold">
+                                          <p:stCondLst>
+                                            <p:cond delay="0"/>
+                                          </p:stCondLst>
+                                        </p:cTn>
+                                        <p:tgtEl>
+                                          <p:spTgt spid="7"/>
+                                        </p:tgtEl>
+                                        <p:attrNameLst>
+                                          <p:attrName>style.visibility</p:attrName>
+                                        </p:attrNameLst>
+                                      </p:cBhvr>
+                                      <p:to>
+                                        <p:strVal val="visible"/>
+                                      </p:to>
+                                    </p:set>
+                                    <p:animEffect transition="in" filter="fade">
+                                      <p:cBhvr>
+                                        <p:cTn id="7" dur="450"/>
+                                        <p:tgtEl>
+                                          <p:spTgt spid="7"/>
+                                        </p:tgtEl>
+                                      </p:cBhvr>
+                                    </p:animEffect>
+                                  </p:childTnLst>
+                                </p:cTn>
+                              </p:par>
+                            </p:childTnLst>
+                          </p:cTn>
+                        </p:par>
+                      </p:childTnLst>
+                    </p:cTn>
+                  </p:par>
+                </p:childTnLst>
+              </p:cTn>
+              <p:prevCondLst>
+                <p:cond evt="onPrev" delay="0">
+                  <p:tgtEl>
+                    <p:sldTgt/>
+                  </p:tgtEl>
+                </p:cond>
+              </p:prevCondLst>
+              <p:nextCondLst>
+                <p:cond evt="onNext" delay="0">
+                  <p:tgtEl>
+                    <p:sldTgt/>
+                  </p:tgtEl>
+                </p:cond>
+              </p:nextCondLst>
+            </p:seq>
+          </p:childTnLst>
+        </p:cTn>
+      </p:par>
+    </p:tnLst>
+  </p:timing>
 </p:sld>
 </file>
 
@@ -8663,21 +9386,125 @@
                 </a:solidFill>
                 <a:latin typeface="Calibri"/>
               </a:rPr>
-              <a:t>El ADR: el artefacto que sostiene la tercera capa</a:t>
-            </a:r>
-          </a:p>
-        </p:txBody>
-      </p:sp>
-      <p:sp>
-        <p:nvSpPr>
-          <p:cNvPr id="5" name="TextBox 4"/>
+              <a:t>La regla de los 60 segundos, anunciada desde la Clase 11</a:t>
+            </a:r>
+          </a:p>
+        </p:txBody>
+      </p:sp>
+      <p:sp>
+        <p:nvSpPr>
+          <p:cNvPr id="5" name="Rounded Rectangle 4"/>
+          <p:cNvSpPr/>
+          <p:nvPr/>
+        </p:nvSpPr>
+        <p:spPr>
+          <a:xfrm>
+            <a:off x="5797149" y="1331356"/>
+            <a:ext cx="6010497" cy="4542758"/>
+          </a:xfrm>
+          <a:prstGeom prst="roundRect">
+            <a:avLst>
+              <a:gd name="adj" fmla="val 4000"/>
+            </a:avLst>
+          </a:prstGeom>
+          <a:solidFill>
+            <a:srgbClr val="E8EEF4"/>
+          </a:solidFill>
+          <a:ln>
+            <a:noFill/>
+          </a:ln>
+        </p:spPr>
+        <p:style>
+          <a:lnRef idx="1">
+            <a:schemeClr val="accent1"/>
+          </a:lnRef>
+          <a:fillRef idx="3">
+            <a:schemeClr val="accent1"/>
+          </a:fillRef>
+          <a:effectRef idx="2">
+            <a:schemeClr val="accent1"/>
+          </a:effectRef>
+          <a:fontRef idx="minor">
+            <a:schemeClr val="lt1"/>
+          </a:fontRef>
+        </p:style>
+        <p:txBody>
+          <a:bodyPr rtlCol="0" anchor="ctr"/>
+          <a:lstStyle/>
+          <a:p>
+            <a:pPr algn="ctr"/>
+          </a:p>
+        </p:txBody>
+      </p:sp>
+      <p:pic>
+        <p:nvPicPr>
+          <p:cNvPr id="6" name="Picture 5" descr="stopwatch.jpg"/>
+          <p:cNvPicPr>
+            <a:picLocks noChangeAspect="1"/>
+          </p:cNvPicPr>
+          <p:nvPr/>
+        </p:nvPicPr>
+        <p:blipFill>
+          <a:blip r:embed="rId2"/>
+          <a:stretch>
+            <a:fillRect/>
+          </a:stretch>
+        </p:blipFill>
+        <p:spPr>
+          <a:xfrm>
+            <a:off x="5870301" y="1404508"/>
+            <a:ext cx="5864193" cy="4396454"/>
+          </a:xfrm>
+          <a:prstGeom prst="rect">
+            <a:avLst/>
+          </a:prstGeom>
+        </p:spPr>
+      </p:pic>
+      <p:sp>
+        <p:nvSpPr>
+          <p:cNvPr id="7" name="TextBox 6"/>
           <p:cNvSpPr txBox="1"/>
           <p:nvPr/>
         </p:nvSpPr>
         <p:spPr>
           <a:xfrm>
-            <a:off x="457200" y="1170432"/>
-            <a:ext cx="11277295" cy="5230368"/>
+            <a:off x="5870301" y="5961888"/>
+            <a:ext cx="5864193" cy="320040"/>
+          </a:xfrm>
+          <a:prstGeom prst="rect">
+            <a:avLst/>
+          </a:prstGeom>
+          <a:noFill/>
+        </p:spPr>
+        <p:txBody>
+          <a:bodyPr wrap="square">
+            <a:spAutoFit/>
+          </a:bodyPr>
+          <a:lstStyle/>
+          <a:p>
+            <a:pPr algn="ctr"/>
+            <a:r>
+              <a:rPr sz="1100" b="0" i="1">
+                <a:solidFill>
+                  <a:srgbClr val="666666"/>
+                </a:solidFill>
+                <a:latin typeface="Calibri"/>
+              </a:rPr>
+              <a:t>Foto: William Warby · Pexels</a:t>
+            </a:r>
+          </a:p>
+        </p:txBody>
+      </p:sp>
+      <p:sp>
+        <p:nvSpPr>
+          <p:cNvPr id="8" name="TextBox 7"/>
+          <p:cNvSpPr txBox="1"/>
+          <p:nvPr/>
+        </p:nvSpPr>
+        <p:spPr>
+          <a:xfrm>
+            <a:off x="457200" y="1353312"/>
+            <a:ext cx="5093061" cy="5047488"/>
           </a:xfrm>
           <a:prstGeom prst="rect">
             <a:avLst/>
@@ -8702,7 +9529,7 @@
                 </a:solidFill>
                 <a:latin typeface="Calibri"/>
               </a:rPr>
-              <a:t>–   Titulo, con el numero consecutivo, que es justamente por lo que se cita.</a:t>
+              <a:t>–   En un equipo profesional, cuando el sistema falla a las once de la noche, contesta quien esta disponible, no el autor del diagrama.</a:t>
             </a:r>
           </a:p>
           <a:p>
@@ -8718,46 +9545,14 @@
                 </a:solidFill>
                 <a:latin typeface="Calibri"/>
               </a:rPr>
-              <a:t>–   Contexto, es decir que problema se estaba resolviendo y con que restricciones.</a:t>
-            </a:r>
-          </a:p>
-          <a:p>
-            <a:pPr>
-              <a:spcAft>
-                <a:spcPts val="800"/>
-              </a:spcAft>
-            </a:pPr>
-            <a:r>
-              <a:rPr sz="2000" b="0" i="0">
-                <a:solidFill>
-                  <a:srgbClr val="333333"/>
-                </a:solidFill>
-                <a:latin typeface="Calibri"/>
-              </a:rPr>
-              <a:t>–   Y consecuencias, donde se escribe lo bueno, lo malo y lo neutro que se acepta.</a:t>
-            </a:r>
-          </a:p>
-          <a:p>
-            <a:pPr>
-              <a:spcAft>
-                <a:spcPts val="800"/>
-              </a:spcAft>
-            </a:pPr>
-            <a:r>
-              <a:rPr sz="2000" b="0" i="0">
-                <a:solidFill>
-                  <a:srgbClr val="333333"/>
-                </a:solidFill>
-                <a:latin typeface="Calibri"/>
-              </a:rPr>
-              <a:t>–   La forma profesional es «esta decision esta registrada en el ADR-002, y el trade-off que aceptamos fue perder portabilidad entre proveedores», con el numero del ADR visible en la diapositiva.</a:t>
-            </a:r>
-          </a:p>
-        </p:txBody>
-      </p:sp>
-      <p:sp>
-        <p:nvSpPr>
-          <p:cNvPr id="6" name="TextBox 5"/>
+              <a:t>–   Un sistema que solo una persona entiende es un riesgo operativo con nombre propio.</a:t>
+            </a:r>
+          </a:p>
+        </p:txBody>
+      </p:sp>
+      <p:sp>
+        <p:nvSpPr>
+          <p:cNvPr id="9" name="TextBox 8"/>
           <p:cNvSpPr txBox="1"/>
           <p:nvPr/>
         </p:nvSpPr>
@@ -8931,21 +9726,173 @@
                 </a:solidFill>
                 <a:latin typeface="Calibri"/>
               </a:rPr>
-              <a:t>El pitch de 5 a 8 minutos: el reparto que funciona (1/2)</a:t>
-            </a:r>
-          </a:p>
-        </p:txBody>
-      </p:sp>
-      <p:sp>
-        <p:nvSpPr>
-          <p:cNvPr id="5" name="TextBox 4"/>
+              <a:t>El Q&amp;A tecnico: tres tipos de pregunta</a:t>
+            </a:r>
+          </a:p>
+        </p:txBody>
+      </p:sp>
+      <p:sp>
+        <p:nvSpPr>
+          <p:cNvPr id="5" name="Rounded Rectangle 4"/>
+          <p:cNvSpPr/>
+          <p:nvPr/>
+        </p:nvSpPr>
+        <p:spPr>
+          <a:xfrm>
+            <a:off x="5803166" y="1188719"/>
+            <a:ext cx="5998464" cy="4828032"/>
+          </a:xfrm>
+          <a:prstGeom prst="roundRect">
+            <a:avLst>
+              <a:gd name="adj" fmla="val 4000"/>
+            </a:avLst>
+          </a:prstGeom>
+          <a:solidFill>
+            <a:srgbClr val="E8EEF4"/>
+          </a:solidFill>
+          <a:ln>
+            <a:noFill/>
+          </a:ln>
+        </p:spPr>
+        <p:style>
+          <a:lnRef idx="1">
+            <a:schemeClr val="accent1"/>
+          </a:lnRef>
+          <a:fillRef idx="3">
+            <a:schemeClr val="accent1"/>
+          </a:fillRef>
+          <a:effectRef idx="2">
+            <a:schemeClr val="accent1"/>
+          </a:effectRef>
+          <a:fontRef idx="minor">
+            <a:schemeClr val="lt1"/>
+          </a:fontRef>
+        </p:style>
+        <p:txBody>
+          <a:bodyPr rtlCol="0" anchor="ctr"/>
+          <a:lstStyle/>
+          <a:p>
+            <a:pPr algn="ctr"/>
+          </a:p>
+        </p:txBody>
+      </p:sp>
+      <p:pic>
+        <p:nvPicPr>
+          <p:cNvPr id="6" name="Picture 5" descr="qa-tres-tipos-paso1.png"/>
+          <p:cNvPicPr>
+            <a:picLocks noChangeAspect="1"/>
+          </p:cNvPicPr>
+          <p:nvPr/>
+        </p:nvPicPr>
+        <p:blipFill>
+          <a:blip r:embed="rId2"/>
+          <a:stretch>
+            <a:fillRect/>
+          </a:stretch>
+        </p:blipFill>
+        <p:spPr>
+          <a:xfrm>
+            <a:off x="5876318" y="1261872"/>
+            <a:ext cx="5852160" cy="4681728"/>
+          </a:xfrm>
+          <a:prstGeom prst="rect">
+            <a:avLst/>
+          </a:prstGeom>
+        </p:spPr>
+      </p:pic>
+      <p:pic>
+        <p:nvPicPr>
+          <p:cNvPr id="7" name="Picture 6" descr="qa-tres-tipos-paso2.png"/>
+          <p:cNvPicPr>
+            <a:picLocks noChangeAspect="1"/>
+          </p:cNvPicPr>
+          <p:nvPr/>
+        </p:nvPicPr>
+        <p:blipFill>
+          <a:blip r:embed="rId3"/>
+          <a:stretch>
+            <a:fillRect/>
+          </a:stretch>
+        </p:blipFill>
+        <p:spPr>
+          <a:xfrm>
+            <a:off x="5876318" y="1261872"/>
+            <a:ext cx="5852160" cy="4681728"/>
+          </a:xfrm>
+          <a:prstGeom prst="rect">
+            <a:avLst/>
+          </a:prstGeom>
+        </p:spPr>
+      </p:pic>
+      <p:pic>
+        <p:nvPicPr>
+          <p:cNvPr id="8" name="Picture 7" descr="qa-tres-tipos-paso3.png"/>
+          <p:cNvPicPr>
+            <a:picLocks noChangeAspect="1"/>
+          </p:cNvPicPr>
+          <p:nvPr/>
+        </p:nvPicPr>
+        <p:blipFill>
+          <a:blip r:embed="rId4"/>
+          <a:stretch>
+            <a:fillRect/>
+          </a:stretch>
+        </p:blipFill>
+        <p:spPr>
+          <a:xfrm>
+            <a:off x="5876318" y="1261872"/>
+            <a:ext cx="5852160" cy="4681728"/>
+          </a:xfrm>
+          <a:prstGeom prst="rect">
+            <a:avLst/>
+          </a:prstGeom>
+        </p:spPr>
+      </p:pic>
+      <p:sp>
+        <p:nvSpPr>
+          <p:cNvPr id="13" name="TextBox 12"/>
           <p:cNvSpPr txBox="1"/>
           <p:nvPr/>
         </p:nvSpPr>
         <p:spPr>
           <a:xfrm>
-            <a:off x="457200" y="1170432"/>
-            <a:ext cx="11277295" cy="5230368"/>
+            <a:off x="5870301" y="5961888"/>
+            <a:ext cx="5864193" cy="320040"/>
+          </a:xfrm>
+          <a:prstGeom prst="rect">
+            <a:avLst/>
+          </a:prstGeom>
+          <a:noFill/>
+        </p:spPr>
+        <p:txBody>
+          <a:bodyPr wrap="square">
+            <a:spAutoFit/>
+          </a:bodyPr>
+          <a:lstStyle/>
+          <a:p>
+            <a:pPr algn="ctr"/>
+            <a:r>
+              <a:rPr sz="1100" b="0" i="1">
+                <a:solidFill>
+                  <a:srgbClr val="666666"/>
+                </a:solidFill>
+                <a:latin typeface="Calibri"/>
+              </a:rPr>
+              <a:t>Clic para avanzar la animación</a:t>
+            </a:r>
+          </a:p>
+        </p:txBody>
+      </p:sp>
+      <p:sp>
+        <p:nvSpPr>
+          <p:cNvPr id="14" name="TextBox 13"/>
+          <p:cNvSpPr txBox="1"/>
+          <p:nvPr/>
+        </p:nvSpPr>
+        <p:spPr>
+          <a:xfrm>
+            <a:off x="457200" y="1353312"/>
+            <a:ext cx="5093061" cy="5047488"/>
           </a:xfrm>
           <a:prstGeom prst="rect">
             <a:avLst/>
@@ -8970,7 +9917,7 @@
                 </a:solidFill>
                 <a:latin typeface="Calibri"/>
               </a:rPr>
-              <a:t>–   Un pitch tecnico de 5 a 8 minutos no se improvisa ni se llena de diapositivas.</a:t>
+              <a:t>–   Verificación: comprueba que se hizo lo que se dice.</a:t>
             </a:r>
           </a:p>
           <a:p>
@@ -8986,7 +9933,7 @@
                 </a:solidFill>
                 <a:latin typeface="Calibri"/>
               </a:rPr>
-              <a:t>–   El reparto que funciona, y que es convencion de industria y no regla dura, es el siguiente: 45 a 60 segundos para el problema y el dominio, es decir que hace la app y para quien, sin nombrar una sola tecnologia todavia</a:t>
+              <a:t>–   Profundización: empuja un nivel más allá de lo presentado.</a:t>
             </a:r>
           </a:p>
           <a:p>
@@ -9002,7 +9949,7 @@
                 </a:solidFill>
                 <a:latin typeface="Calibri"/>
               </a:rPr>
-              <a:t>–   90 segundos para la arquitectura, apoyandose en el diagrama de contexto y el de contenedores</a:t>
+              <a:t>–   Hipotética: «si el tráfico se multiplica por diez, ¿qué se rompe primero?».</a:t>
             </a:r>
           </a:p>
           <a:p>
@@ -9018,14 +9965,14 @@
                 </a:solidFill>
                 <a:latin typeface="Calibri"/>
               </a:rPr>
-              <a:t>–   90 segundos para la decision principal con su trade-off, citando el ADR; 60 a 90 segundos para la evidencia ejecutable, o sea la captura de la sesion del laboratorio con el contenedor corriendo y el workflow de GitHub Actions en verde</a:t>
-            </a:r>
-          </a:p>
-        </p:txBody>
-      </p:sp>
-      <p:sp>
-        <p:nvSpPr>
-          <p:cNvPr id="6" name="TextBox 5"/>
+              <a:t>–   «No lo medimos» más cómo se mediría no penaliza; un dato inventado sí.</a:t>
+            </a:r>
+          </a:p>
+        </p:txBody>
+      </p:sp>
+      <p:sp>
+        <p:nvSpPr>
+          <p:cNvPr id="15" name="TextBox 14"/>
           <p:cNvSpPr txBox="1"/>
           <p:nvPr/>
         </p:nvSpPr>
@@ -9063,6 +10010,142 @@
   <p:clrMapOvr>
     <a:masterClrMapping/>
   </p:clrMapOvr>
+  <p:timing>
+    <p:tnLst>
+      <p:par>
+        <p:cTn id="1" dur="indefinite" restart="never" nodeType="tmRoot">
+          <p:childTnLst>
+            <p:seq concurrent="1" nextAc="seek">
+              <p:cTn id="2" dur="indefinite" nodeType="mainSeq">
+                <p:childTnLst>
+                  <p:par>
+                    <p:cTn id="3" fill="hold">
+                      <p:stCondLst>
+                        <p:cond delay="indefinite"/>
+                      </p:stCondLst>
+                      <p:childTnLst>
+                        <p:par>
+                          <p:cTn id="4" fill="hold">
+                            <p:stCondLst>
+                              <p:cond delay="0"/>
+                            </p:stCondLst>
+                            <p:childTnLst>
+                              <p:par>
+                                <p:cTn id="5" presetID="10" presetClass="entr" presetSubtype="0" fill="hold" nodeType="clickEffect">
+                                  <p:stCondLst>
+                                    <p:cond delay="0"/>
+                                  </p:stCondLst>
+                                  <p:childTnLst>
+                                    <p:set>
+                                      <p:cBhvr>
+                                        <p:cTn id="6" dur="1" fill="hold">
+                                          <p:stCondLst>
+                                            <p:cond delay="0"/>
+                                          </p:stCondLst>
+                                        </p:cTn>
+                                        <p:tgtEl>
+                                          <p:spTgt spid="7"/>
+                                        </p:tgtEl>
+                                        <p:attrNameLst>
+                                          <p:attrName>style.visibility</p:attrName>
+                                        </p:attrNameLst>
+                                      </p:cBhvr>
+                                      <p:to>
+                                        <p:strVal val="visible"/>
+                                      </p:to>
+                                    </p:set>
+                                    <p:animEffect transition="in" filter="fade">
+                                      <p:cBhvr>
+                                        <p:cTn id="7" dur="450"/>
+                                        <p:tgtEl>
+                                          <p:spTgt spid="7"/>
+                                        </p:tgtEl>
+                                      </p:cBhvr>
+                                    </p:animEffect>
+                                  </p:childTnLst>
+                                </p:cTn>
+                              </p:par>
+                            </p:childTnLst>
+                          </p:cTn>
+                        </p:par>
+                      </p:childTnLst>
+                    </p:cTn>
+                  </p:par>
+                  <p:par>
+                    <p:cTn id="8" fill="hold">
+                      <p:stCondLst>
+                        <p:cond delay="indefinite"/>
+                      </p:stCondLst>
+                      <p:childTnLst>
+                        <p:par>
+                          <p:cTn id="9" fill="hold">
+                            <p:stCondLst>
+                              <p:cond delay="0"/>
+                            </p:stCondLst>
+                            <p:childTnLst>
+                              <p:par>
+                                <p:cTn id="10" presetID="10" presetClass="entr" presetSubtype="0" fill="hold" nodeType="clickEffect">
+                                  <p:stCondLst>
+                                    <p:cond delay="0"/>
+                                  </p:stCondLst>
+                                  <p:childTnLst>
+                                    <p:set>
+                                      <p:cBhvr>
+                                        <p:cTn id="11" dur="1" fill="hold">
+                                          <p:stCondLst>
+                                            <p:cond delay="0"/>
+                                          </p:stCondLst>
+                                        </p:cTn>
+                                        <p:tgtEl>
+                                          <p:spTgt spid="8"/>
+                                        </p:tgtEl>
+                                        <p:attrNameLst>
+                                          <p:attrName>style.visibility</p:attrName>
+                                        </p:attrNameLst>
+                                      </p:cBhvr>
+                                      <p:to>
+                                        <p:strVal val="visible"/>
+                                      </p:to>
+                                    </p:set>
+                                    <p:animEffect transition="in" filter="fade">
+                                      <p:cBhvr>
+                                        <p:cTn id="12" dur="450"/>
+                                        <p:tgtEl>
+                                          <p:spTgt spid="8"/>
+                                        </p:tgtEl>
+                                      </p:cBhvr>
+                                    </p:animEffect>
+                                  </p:childTnLst>
+                                </p:cTn>
+                              </p:par>
+                            </p:childTnLst>
+                          </p:cTn>
+                        </p:par>
+                      </p:childTnLst>
+                    </p:cTn>
+                  </p:par>
+                </p:childTnLst>
+              </p:cTn>
+              <p:prevCondLst>
+                <p:cond evt="onPrev" delay="0">
+                  <p:tgtEl>
+                    <p:sldTgt/>
+                  </p:tgtEl>
+                </p:cond>
+              </p:prevCondLst>
+              <p:nextCondLst>
+                <p:cond evt="onNext" delay="0">
+                  <p:tgtEl>
+                    <p:sldTgt/>
+                  </p:tgtEl>
+                </p:cond>
+              </p:nextCondLst>
+            </p:seq>
+          </p:childTnLst>
+        </p:cTn>
+      </p:par>
+    </p:tnLst>
+  </p:timing>
 </p:sld>
 </file>
 

--- a/Arquitectura de Sistemas Computacionales/Clases/Clase 15 - Presentacion del proyecto y cierre/Presentacion.pptx
+++ b/Arquitectura de Sistemas Computacionales/Clases/Clase 15 - Presentacion del proyecto y cierre/Presentacion.pptx
@@ -1385,106 +1385,6 @@
           <a:p>
             <a:r>
               <a:t>(No se proyecta) El diagrama de contenedores, el Dockerfile y el pipeline que el estudiante escribio son los mismos artefactos que se producen con una cuenta corporativa; lo que no se aprende en un free tier es justamente lo que si se aprendio aqui, que es razonar el trade-off.</a:t>
-            </a:r>
-          </a:p>
-        </p:txBody>
-      </p:sp>
-      <p:sp>
-        <p:nvSpPr>
-          <p:cNvPr id="4" name="Slide Number Placeholder 3"/>
-          <p:cNvSpPr>
-            <a:spLocks noGrp="1"/>
-          </p:cNvSpPr>
-          <p:nvPr>
-            <p:ph type="sldNum" idx="5" sz="quarter"/>
-          </p:nvPr>
-        </p:nvSpPr>
-        <p:spPr/>
-      </p:sp>
-    </p:spTree>
-  </p:cSld>
-  <p:clrMapOvr>
-    <a:masterClrMapping/>
-  </p:clrMapOvr>
-</p:notes>
-</file>
-
-<file path=ppt/notesSlides/notesSlide8.xml><?xml version="1.0" encoding="utf-8"?>
-<p:notes xmlns:a="http://schemas.openxmlformats.org/drawingml/2006/main" xmlns:p="http://schemas.openxmlformats.org/presentationml/2006/main" xmlns:r="http://schemas.openxmlformats.org/officeDocument/2006/relationships">
-  <p:cSld>
-    <p:spTree>
-      <p:nvGrpSpPr>
-        <p:cNvPr id="1" name=""/>
-        <p:cNvGrpSpPr/>
-        <p:nvPr/>
-      </p:nvGrpSpPr>
-      <p:grpSpPr>
-        <a:xfrm>
-          <a:off x="0" y="0"/>
-          <a:ext cx="0" cy="0"/>
-          <a:chOff x="0" y="0"/>
-          <a:chExt cx="0" cy="0"/>
-        </a:xfrm>
-      </p:grpSpPr>
-      <p:sp>
-        <p:nvSpPr>
-          <p:cNvPr id="2" name="Slide Image Placeholder 1"/>
-          <p:cNvSpPr>
-            <a:spLocks noGrp="1"/>
-          </p:cNvSpPr>
-          <p:nvPr>
-            <p:ph type="sldImg" idx="2"/>
-          </p:nvPr>
-        </p:nvSpPr>
-        <p:spPr/>
-      </p:sp>
-      <p:sp>
-        <p:nvSpPr>
-          <p:cNvPr id="3" name="Notes Placeholder 2"/>
-          <p:cNvSpPr>
-            <a:spLocks noGrp="1"/>
-          </p:cNvSpPr>
-          <p:nvPr>
-            <p:ph type="body" idx="3" sz="quarter"/>
-          </p:nvPr>
-        </p:nvSpPr>
-        <p:spPr/>
-        <p:txBody>
-          <a:bodyPr/>
-          <a:lstStyle/>
-          <a:p>
-            <a:r>
-              <a:t>TEXTO COMPLETO DE LA LÁMINA (se proyecta resumido):</a:t>
-            </a:r>
-          </a:p>
-          <a:p/>
-          <a:p>
-            <a:r>
-              <a:t>RAA1–3 aplicados al PI. Conserven el repo como portafolio.</a:t>
-            </a:r>
-          </a:p>
-          <a:p/>
-          <a:p>
-            <a:r>
-              <a:t>Gracias — arquitectura es trade-offs documentados, no logos de proveedores.</a:t>
-            </a:r>
-          </a:p>
-          <a:p/>
-          <a:p>
-            <a:r>
-              <a:t>Recorrido: dominio → modelo de servicio → contenedor → Containers → seguridad → despliegue → CI y monitoreo → costos → rendimiento → escala.</a:t>
-            </a:r>
-          </a:p>
-          <a:p/>
-          <a:p>
-            <a:r>
-              <a:t>Cada paso fue una decisión con su trade-off escrito: eso es lo que se lleva a la práctica profesional.</a:t>
-            </a:r>
-          </a:p>
-          <a:p/>
-          <a:p>
-            <a:r>
-              <a:t>Un ADR por decisión importante permite, años después, saber por qué el sistema es como es.</a:t>
             </a:r>
           </a:p>
         </p:txBody>
@@ -4984,118 +4884,14 @@
       </p:sp>
       <p:sp>
         <p:nvSpPr>
-          <p:cNvPr id="5" name="Rounded Rectangle 4"/>
-          <p:cNvSpPr/>
-          <p:nvPr/>
-        </p:nvSpPr>
-        <p:spPr>
-          <a:xfrm>
-            <a:off x="5797149" y="1573813"/>
-            <a:ext cx="6010497" cy="4057845"/>
-          </a:xfrm>
-          <a:prstGeom prst="roundRect">
-            <a:avLst>
-              <a:gd name="adj" fmla="val 4000"/>
-            </a:avLst>
-          </a:prstGeom>
-          <a:solidFill>
-            <a:srgbClr val="E8EEF4"/>
-          </a:solidFill>
-          <a:ln>
-            <a:noFill/>
-          </a:ln>
-        </p:spPr>
-        <p:style>
-          <a:lnRef idx="1">
-            <a:schemeClr val="accent1"/>
-          </a:lnRef>
-          <a:fillRef idx="3">
-            <a:schemeClr val="accent1"/>
-          </a:fillRef>
-          <a:effectRef idx="2">
-            <a:schemeClr val="accent1"/>
-          </a:effectRef>
-          <a:fontRef idx="minor">
-            <a:schemeClr val="lt1"/>
-          </a:fontRef>
-        </p:style>
-        <p:txBody>
-          <a:bodyPr rtlCol="0" anchor="ctr"/>
-          <a:lstStyle/>
-          <a:p>
-            <a:pPr algn="ctr"/>
-          </a:p>
-        </p:txBody>
-      </p:sp>
-      <p:pic>
-        <p:nvPicPr>
-          <p:cNvPr id="6" name="Picture 5" descr="team-whiteboard-planning.jpg"/>
-          <p:cNvPicPr>
-            <a:picLocks noChangeAspect="1"/>
-          </p:cNvPicPr>
-          <p:nvPr/>
-        </p:nvPicPr>
-        <p:blipFill>
-          <a:blip r:embed="rId2"/>
-          <a:stretch>
-            <a:fillRect/>
-          </a:stretch>
-        </p:blipFill>
-        <p:spPr>
-          <a:xfrm>
-            <a:off x="5870301" y="1646965"/>
-            <a:ext cx="5864193" cy="3911541"/>
-          </a:xfrm>
-          <a:prstGeom prst="rect">
-            <a:avLst/>
-          </a:prstGeom>
-        </p:spPr>
-      </p:pic>
-      <p:sp>
-        <p:nvSpPr>
-          <p:cNvPr id="7" name="TextBox 6"/>
+          <p:cNvPr id="5" name="TextBox 4"/>
           <p:cNvSpPr txBox="1"/>
           <p:nvPr/>
         </p:nvSpPr>
         <p:spPr>
           <a:xfrm>
-            <a:off x="5870301" y="5961888"/>
-            <a:ext cx="5864193" cy="320040"/>
-          </a:xfrm>
-          <a:prstGeom prst="rect">
-            <a:avLst/>
-          </a:prstGeom>
-          <a:noFill/>
-        </p:spPr>
-        <p:txBody>
-          <a:bodyPr wrap="square">
-            <a:spAutoFit/>
-          </a:bodyPr>
-          <a:lstStyle/>
-          <a:p>
-            <a:pPr algn="ctr"/>
-            <a:r>
-              <a:rPr sz="1100" b="0" i="1">
-                <a:solidFill>
-                  <a:srgbClr val="666666"/>
-                </a:solidFill>
-                <a:latin typeface="Calibri"/>
-              </a:rPr>
-              <a:t>Foto: Yan Krukau · Pexels</a:t>
-            </a:r>
-          </a:p>
-        </p:txBody>
-      </p:sp>
-      <p:sp>
-        <p:nvSpPr>
-          <p:cNvPr id="8" name="TextBox 7"/>
-          <p:cNvSpPr txBox="1"/>
-          <p:nvPr/>
-        </p:nvSpPr>
-        <p:spPr>
-          <a:xfrm>
-            <a:off x="457200" y="1353312"/>
-            <a:ext cx="5093061" cy="5047488"/>
+            <a:off x="457200" y="1170432"/>
+            <a:ext cx="11277295" cy="5230368"/>
           </a:xfrm>
           <a:prstGeom prst="rect">
             <a:avLst/>
@@ -5152,14 +4948,14 @@
                 </a:solidFill>
                 <a:latin typeface="Calibri"/>
               </a:rPr>
-              <a:t>–   La frase de cierre util es que arquitectura no es una lista de logos de proveedores, sino un conjunto de decisiones documentadas con sus…</a:t>
-            </a:r>
-          </a:p>
-        </p:txBody>
-      </p:sp>
-      <p:sp>
-        <p:nvSpPr>
-          <p:cNvPr id="9" name="TextBox 8"/>
+              <a:t>–   La frase de cierre util es que arquitectura no es una lista de logos de proveedores, sino un conjunto de decisiones documentadas con sus consecuencias.</a:t>
+            </a:r>
+          </a:p>
+        </p:txBody>
+      </p:sp>
+      <p:sp>
+        <p:nvSpPr>
+          <p:cNvPr id="6" name="TextBox 5"/>
           <p:cNvSpPr txBox="1"/>
           <p:nvPr/>
         </p:nvSpPr>
@@ -5340,118 +5136,14 @@
       </p:sp>
       <p:sp>
         <p:nvSpPr>
-          <p:cNvPr id="5" name="Rounded Rectangle 4"/>
-          <p:cNvSpPr/>
-          <p:nvPr/>
-        </p:nvSpPr>
-        <p:spPr>
-          <a:xfrm>
-            <a:off x="5797149" y="1573813"/>
-            <a:ext cx="6010497" cy="4057845"/>
-          </a:xfrm>
-          <a:prstGeom prst="roundRect">
-            <a:avLst>
-              <a:gd name="adj" fmla="val 4000"/>
-            </a:avLst>
-          </a:prstGeom>
-          <a:solidFill>
-            <a:srgbClr val="E8EEF4"/>
-          </a:solidFill>
-          <a:ln>
-            <a:noFill/>
-          </a:ln>
-        </p:spPr>
-        <p:style>
-          <a:lnRef idx="1">
-            <a:schemeClr val="accent1"/>
-          </a:lnRef>
-          <a:fillRef idx="3">
-            <a:schemeClr val="accent1"/>
-          </a:fillRef>
-          <a:effectRef idx="2">
-            <a:schemeClr val="accent1"/>
-          </a:effectRef>
-          <a:fontRef idx="minor">
-            <a:schemeClr val="lt1"/>
-          </a:fontRef>
-        </p:style>
-        <p:txBody>
-          <a:bodyPr rtlCol="0" anchor="ctr"/>
-          <a:lstStyle/>
-          <a:p>
-            <a:pPr algn="ctr"/>
-          </a:p>
-        </p:txBody>
-      </p:sp>
-      <p:pic>
-        <p:nvPicPr>
-          <p:cNvPr id="6" name="Picture 5" descr="graduation-students-celebration.jpg"/>
-          <p:cNvPicPr>
-            <a:picLocks noChangeAspect="1"/>
-          </p:cNvPicPr>
-          <p:nvPr/>
-        </p:nvPicPr>
-        <p:blipFill>
-          <a:blip r:embed="rId2"/>
-          <a:stretch>
-            <a:fillRect/>
-          </a:stretch>
-        </p:blipFill>
-        <p:spPr>
-          <a:xfrm>
-            <a:off x="5870301" y="1646965"/>
-            <a:ext cx="5864193" cy="3911541"/>
-          </a:xfrm>
-          <a:prstGeom prst="rect">
-            <a:avLst/>
-          </a:prstGeom>
-        </p:spPr>
-      </p:pic>
-      <p:sp>
-        <p:nvSpPr>
-          <p:cNvPr id="7" name="TextBox 6"/>
+          <p:cNvPr id="5" name="TextBox 4"/>
           <p:cNvSpPr txBox="1"/>
           <p:nvPr/>
         </p:nvSpPr>
         <p:spPr>
           <a:xfrm>
-            <a:off x="5870301" y="5961888"/>
-            <a:ext cx="5864193" cy="320040"/>
-          </a:xfrm>
-          <a:prstGeom prst="rect">
-            <a:avLst/>
-          </a:prstGeom>
-          <a:noFill/>
-        </p:spPr>
-        <p:txBody>
-          <a:bodyPr wrap="square">
-            <a:spAutoFit/>
-          </a:bodyPr>
-          <a:lstStyle/>
-          <a:p>
-            <a:pPr algn="ctr"/>
-            <a:r>
-              <a:rPr sz="1100" b="0" i="1">
-                <a:solidFill>
-                  <a:srgbClr val="666666"/>
-                </a:solidFill>
-                <a:latin typeface="Calibri"/>
-              </a:rPr>
-              <a:t>Foto: Sun · Pexels</a:t>
-            </a:r>
-          </a:p>
-        </p:txBody>
-      </p:sp>
-      <p:sp>
-        <p:nvSpPr>
-          <p:cNvPr id="8" name="TextBox 7"/>
-          <p:cNvSpPr txBox="1"/>
-          <p:nvPr/>
-        </p:nvSpPr>
-        <p:spPr>
-          <a:xfrm>
-            <a:off x="457200" y="1353312"/>
-            <a:ext cx="5093061" cy="5047488"/>
+            <a:off x="457200" y="1170432"/>
+            <a:ext cx="11277295" cy="5230368"/>
           </a:xfrm>
           <a:prstGeom prst="rect">
             <a:avLst/>
@@ -5527,11 +5219,27 @@
               <a:t>–   Cada paso fue una decisión con su trade-off escrito: eso es lo que se lleva a la práctica profesional.</a:t>
             </a:r>
           </a:p>
-        </p:txBody>
-      </p:sp>
-      <p:sp>
-        <p:nvSpPr>
-          <p:cNvPr id="9" name="TextBox 8"/>
+          <a:p>
+            <a:pPr>
+              <a:spcAft>
+                <a:spcPts val="800"/>
+              </a:spcAft>
+            </a:pPr>
+            <a:r>
+              <a:rPr sz="2000" b="0" i="0">
+                <a:solidFill>
+                  <a:srgbClr val="333333"/>
+                </a:solidFill>
+                <a:latin typeface="Calibri"/>
+              </a:rPr>
+              <a:t>–   Un ADR por decisión importante permite, años después, saber por qué el sistema es como es.</a:t>
+            </a:r>
+          </a:p>
+        </p:txBody>
+      </p:sp>
+      <p:sp>
+        <p:nvSpPr>
+          <p:cNvPr id="6" name="TextBox 5"/>
           <p:cNvSpPr txBox="1"/>
           <p:nvPr/>
         </p:nvSpPr>
@@ -7131,118 +6839,14 @@
       </p:sp>
       <p:sp>
         <p:nvSpPr>
-          <p:cNvPr id="5" name="Rounded Rectangle 4"/>
-          <p:cNvSpPr/>
-          <p:nvPr/>
-        </p:nvSpPr>
-        <p:spPr>
-          <a:xfrm>
-            <a:off x="5797149" y="1573813"/>
-            <a:ext cx="6010497" cy="4057845"/>
-          </a:xfrm>
-          <a:prstGeom prst="roundRect">
-            <a:avLst>
-              <a:gd name="adj" fmla="val 4000"/>
-            </a:avLst>
-          </a:prstGeom>
-          <a:solidFill>
-            <a:srgbClr val="E8EEF4"/>
-          </a:solidFill>
-          <a:ln>
-            <a:noFill/>
-          </a:ln>
-        </p:spPr>
-        <p:style>
-          <a:lnRef idx="1">
-            <a:schemeClr val="accent1"/>
-          </a:lnRef>
-          <a:fillRef idx="3">
-            <a:schemeClr val="accent1"/>
-          </a:fillRef>
-          <a:effectRef idx="2">
-            <a:schemeClr val="accent1"/>
-          </a:effectRef>
-          <a:fontRef idx="minor">
-            <a:schemeClr val="lt1"/>
-          </a:fontRef>
-        </p:style>
-        <p:txBody>
-          <a:bodyPr rtlCol="0" anchor="ctr"/>
-          <a:lstStyle/>
-          <a:p>
-            <a:pPr algn="ctr"/>
-          </a:p>
-        </p:txBody>
-      </p:sp>
-      <p:pic>
-        <p:nvPicPr>
-          <p:cNvPr id="6" name="Picture 5" descr="students-learning-laptops-classroom.jpg"/>
-          <p:cNvPicPr>
-            <a:picLocks noChangeAspect="1"/>
-          </p:cNvPicPr>
-          <p:nvPr/>
-        </p:nvPicPr>
-        <p:blipFill>
-          <a:blip r:embed="rId2"/>
-          <a:stretch>
-            <a:fillRect/>
-          </a:stretch>
-        </p:blipFill>
-        <p:spPr>
-          <a:xfrm>
-            <a:off x="5870301" y="1646965"/>
-            <a:ext cx="5864193" cy="3911541"/>
-          </a:xfrm>
-          <a:prstGeom prst="rect">
-            <a:avLst/>
-          </a:prstGeom>
-        </p:spPr>
-      </p:pic>
-      <p:sp>
-        <p:nvSpPr>
-          <p:cNvPr id="7" name="TextBox 6"/>
+          <p:cNvPr id="5" name="TextBox 4"/>
           <p:cNvSpPr txBox="1"/>
           <p:nvPr/>
         </p:nvSpPr>
         <p:spPr>
           <a:xfrm>
-            <a:off x="5870301" y="5961888"/>
-            <a:ext cx="5864193" cy="320040"/>
-          </a:xfrm>
-          <a:prstGeom prst="rect">
-            <a:avLst/>
-          </a:prstGeom>
-          <a:noFill/>
-        </p:spPr>
-        <p:txBody>
-          <a:bodyPr wrap="square">
-            <a:spAutoFit/>
-          </a:bodyPr>
-          <a:lstStyle/>
-          <a:p>
-            <a:pPr algn="ctr"/>
-            <a:r>
-              <a:rPr sz="1100" b="0" i="1">
-                <a:solidFill>
-                  <a:srgbClr val="666666"/>
-                </a:solidFill>
-                <a:latin typeface="Calibri"/>
-              </a:rPr>
-              <a:t>Foto: Mikhail Nilov · Pexels</a:t>
-            </a:r>
-          </a:p>
-        </p:txBody>
-      </p:sp>
-      <p:sp>
-        <p:nvSpPr>
-          <p:cNvPr id="8" name="TextBox 7"/>
-          <p:cNvSpPr txBox="1"/>
-          <p:nvPr/>
-        </p:nvSpPr>
-        <p:spPr>
-          <a:xfrm>
-            <a:off x="457200" y="1353312"/>
-            <a:ext cx="5093061" cy="5047488"/>
+            <a:off x="457200" y="1170432"/>
+            <a:ext cx="11277295" cy="5230368"/>
           </a:xfrm>
           <a:prstGeom prst="rect">
             <a:avLst/>
@@ -7342,7 +6946,7 @@
       </p:sp>
       <p:sp>
         <p:nvSpPr>
-          <p:cNvPr id="9" name="TextBox 8"/>
+          <p:cNvPr id="6" name="TextBox 5"/>
           <p:cNvSpPr txBox="1"/>
           <p:nvPr/>
         </p:nvSpPr>
@@ -8558,118 +8162,14 @@
       </p:sp>
       <p:sp>
         <p:nvSpPr>
-          <p:cNvPr id="5" name="Rounded Rectangle 4"/>
-          <p:cNvSpPr/>
-          <p:nvPr/>
-        </p:nvSpPr>
-        <p:spPr>
-          <a:xfrm>
-            <a:off x="5797149" y="1573813"/>
-            <a:ext cx="6010497" cy="4057845"/>
-          </a:xfrm>
-          <a:prstGeom prst="roundRect">
-            <a:avLst>
-              <a:gd name="adj" fmla="val 4000"/>
-            </a:avLst>
-          </a:prstGeom>
-          <a:solidFill>
-            <a:srgbClr val="E8EEF4"/>
-          </a:solidFill>
-          <a:ln>
-            <a:noFill/>
-          </a:ln>
-        </p:spPr>
-        <p:style>
-          <a:lnRef idx="1">
-            <a:schemeClr val="accent1"/>
-          </a:lnRef>
-          <a:fillRef idx="3">
-            <a:schemeClr val="accent1"/>
-          </a:fillRef>
-          <a:effectRef idx="2">
-            <a:schemeClr val="accent1"/>
-          </a:effectRef>
-          <a:fontRef idx="minor">
-            <a:schemeClr val="lt1"/>
-          </a:fontRef>
-        </p:style>
-        <p:txBody>
-          <a:bodyPr rtlCol="0" anchor="ctr"/>
-          <a:lstStyle/>
-          <a:p>
-            <a:pPr algn="ctr"/>
-          </a:p>
-        </p:txBody>
-      </p:sp>
-      <p:pic>
-        <p:nvPicPr>
-          <p:cNvPr id="6" name="Picture 5" descr="paper-documents-desk-notes.jpg"/>
-          <p:cNvPicPr>
-            <a:picLocks noChangeAspect="1"/>
-          </p:cNvPicPr>
-          <p:nvPr/>
-        </p:nvPicPr>
-        <p:blipFill>
-          <a:blip r:embed="rId2"/>
-          <a:stretch>
-            <a:fillRect/>
-          </a:stretch>
-        </p:blipFill>
-        <p:spPr>
-          <a:xfrm>
-            <a:off x="5870301" y="1646965"/>
-            <a:ext cx="5864193" cy="3911541"/>
-          </a:xfrm>
-          <a:prstGeom prst="rect">
-            <a:avLst/>
-          </a:prstGeom>
-        </p:spPr>
-      </p:pic>
-      <p:sp>
-        <p:nvSpPr>
-          <p:cNvPr id="7" name="TextBox 6"/>
+          <p:cNvPr id="5" name="TextBox 4"/>
           <p:cNvSpPr txBox="1"/>
           <p:nvPr/>
         </p:nvSpPr>
         <p:spPr>
           <a:xfrm>
-            <a:off x="5870301" y="5961888"/>
-            <a:ext cx="5864193" cy="320040"/>
-          </a:xfrm>
-          <a:prstGeom prst="rect">
-            <a:avLst/>
-          </a:prstGeom>
-          <a:noFill/>
-        </p:spPr>
-        <p:txBody>
-          <a:bodyPr wrap="square">
-            <a:spAutoFit/>
-          </a:bodyPr>
-          <a:lstStyle/>
-          <a:p>
-            <a:pPr algn="ctr"/>
-            <a:r>
-              <a:rPr sz="1100" b="0" i="1">
-                <a:solidFill>
-                  <a:srgbClr val="666666"/>
-                </a:solidFill>
-                <a:latin typeface="Calibri"/>
-              </a:rPr>
-              <a:t>Foto: Maria Tyutina · Pexels</a:t>
-            </a:r>
-          </a:p>
-        </p:txBody>
-      </p:sp>
-      <p:sp>
-        <p:nvSpPr>
-          <p:cNvPr id="8" name="TextBox 7"/>
-          <p:cNvSpPr txBox="1"/>
-          <p:nvPr/>
-        </p:nvSpPr>
-        <p:spPr>
-          <a:xfrm>
-            <a:off x="457200" y="1353312"/>
-            <a:ext cx="5093061" cy="5047488"/>
+            <a:off x="457200" y="1170432"/>
+            <a:ext cx="11277295" cy="5230368"/>
           </a:xfrm>
           <a:prstGeom prst="rect">
             <a:avLst/>
@@ -8733,7 +8233,7 @@
       </p:sp>
       <p:sp>
         <p:nvSpPr>
-          <p:cNvPr id="9" name="TextBox 8"/>
+          <p:cNvPr id="6" name="TextBox 5"/>
           <p:cNvSpPr txBox="1"/>
           <p:nvPr/>
         </p:nvSpPr>
@@ -9393,118 +8893,14 @@
       </p:sp>
       <p:sp>
         <p:nvSpPr>
-          <p:cNvPr id="5" name="Rounded Rectangle 4"/>
-          <p:cNvSpPr/>
-          <p:nvPr/>
-        </p:nvSpPr>
-        <p:spPr>
-          <a:xfrm>
-            <a:off x="5797149" y="1331356"/>
-            <a:ext cx="6010497" cy="4542758"/>
-          </a:xfrm>
-          <a:prstGeom prst="roundRect">
-            <a:avLst>
-              <a:gd name="adj" fmla="val 4000"/>
-            </a:avLst>
-          </a:prstGeom>
-          <a:solidFill>
-            <a:srgbClr val="E8EEF4"/>
-          </a:solidFill>
-          <a:ln>
-            <a:noFill/>
-          </a:ln>
-        </p:spPr>
-        <p:style>
-          <a:lnRef idx="1">
-            <a:schemeClr val="accent1"/>
-          </a:lnRef>
-          <a:fillRef idx="3">
-            <a:schemeClr val="accent1"/>
-          </a:fillRef>
-          <a:effectRef idx="2">
-            <a:schemeClr val="accent1"/>
-          </a:effectRef>
-          <a:fontRef idx="minor">
-            <a:schemeClr val="lt1"/>
-          </a:fontRef>
-        </p:style>
-        <p:txBody>
-          <a:bodyPr rtlCol="0" anchor="ctr"/>
-          <a:lstStyle/>
-          <a:p>
-            <a:pPr algn="ctr"/>
-          </a:p>
-        </p:txBody>
-      </p:sp>
-      <p:pic>
-        <p:nvPicPr>
-          <p:cNvPr id="6" name="Picture 5" descr="stopwatch.jpg"/>
-          <p:cNvPicPr>
-            <a:picLocks noChangeAspect="1"/>
-          </p:cNvPicPr>
-          <p:nvPr/>
-        </p:nvPicPr>
-        <p:blipFill>
-          <a:blip r:embed="rId2"/>
-          <a:stretch>
-            <a:fillRect/>
-          </a:stretch>
-        </p:blipFill>
-        <p:spPr>
-          <a:xfrm>
-            <a:off x="5870301" y="1404508"/>
-            <a:ext cx="5864193" cy="4396454"/>
-          </a:xfrm>
-          <a:prstGeom prst="rect">
-            <a:avLst/>
-          </a:prstGeom>
-        </p:spPr>
-      </p:pic>
-      <p:sp>
-        <p:nvSpPr>
-          <p:cNvPr id="7" name="TextBox 6"/>
+          <p:cNvPr id="5" name="TextBox 4"/>
           <p:cNvSpPr txBox="1"/>
           <p:nvPr/>
         </p:nvSpPr>
         <p:spPr>
           <a:xfrm>
-            <a:off x="5870301" y="5961888"/>
-            <a:ext cx="5864193" cy="320040"/>
-          </a:xfrm>
-          <a:prstGeom prst="rect">
-            <a:avLst/>
-          </a:prstGeom>
-          <a:noFill/>
-        </p:spPr>
-        <p:txBody>
-          <a:bodyPr wrap="square">
-            <a:spAutoFit/>
-          </a:bodyPr>
-          <a:lstStyle/>
-          <a:p>
-            <a:pPr algn="ctr"/>
-            <a:r>
-              <a:rPr sz="1100" b="0" i="1">
-                <a:solidFill>
-                  <a:srgbClr val="666666"/>
-                </a:solidFill>
-                <a:latin typeface="Calibri"/>
-              </a:rPr>
-              <a:t>Foto: William Warby · Pexels</a:t>
-            </a:r>
-          </a:p>
-        </p:txBody>
-      </p:sp>
-      <p:sp>
-        <p:nvSpPr>
-          <p:cNvPr id="8" name="TextBox 7"/>
-          <p:cNvSpPr txBox="1"/>
-          <p:nvPr/>
-        </p:nvSpPr>
-        <p:spPr>
-          <a:xfrm>
-            <a:off x="457200" y="1353312"/>
-            <a:ext cx="5093061" cy="5047488"/>
+            <a:off x="457200" y="1170432"/>
+            <a:ext cx="11277295" cy="5230368"/>
           </a:xfrm>
           <a:prstGeom prst="rect">
             <a:avLst/>
@@ -9552,7 +8948,7 @@
       </p:sp>
       <p:sp>
         <p:nvSpPr>
-          <p:cNvPr id="9" name="TextBox 8"/>
+          <p:cNvPr id="6" name="TextBox 5"/>
           <p:cNvSpPr txBox="1"/>
           <p:nvPr/>
         </p:nvSpPr>

--- a/Arquitectura de Sistemas Computacionales/Clases/Clase 15 - Presentacion del proyecto y cierre/Presentacion.pptx
+++ b/Arquitectura de Sistemas Computacionales/Clases/Clase 15 - Presentacion del proyecto y cierre/Presentacion.pptx
@@ -1328,6 +1328,30 @@
         <p:txBody>
           <a:bodyPr/>
           <a:lstStyle/>
+          <a:p>
+            <a:r>
+              <a:t>TEXTO COMPLETO DE LA LÁMINA (se proyecta resumido):</a:t>
+            </a:r>
+          </a:p>
+          <a:p/>
+          <a:p>
+            <a:r>
+              <a:t>En la industria, esta sustentacion tiene nombre propio: design review, o architecture review.</a:t>
+            </a:r>
+          </a:p>
+          <a:p/>
+          <a:p>
+            <a:r>
+              <a:t>El ADR es un formato real, usado en equipos reales, no un invento academico del curso.</a:t>
+            </a:r>
+          </a:p>
+          <a:p/>
+          <a:p>
+            <a:r>
+              <a:t>La frase de cierre util es que arquitectura no es una lista de logos de proveedores, sino un conjunto de decisiones documentadas con sus consecuencias.</a:t>
+            </a:r>
+          </a:p>
+          <a:p/>
           <a:p>
             <a:r>
               <a:t>DESARROLLO (para explicarlo, no se proyecta):</a:t>
@@ -4884,14 +4908,83 @@
       </p:sp>
       <p:sp>
         <p:nvSpPr>
-          <p:cNvPr id="5" name="TextBox 4"/>
+          <p:cNvPr id="5" name="Rounded Rectangle 4"/>
+          <p:cNvSpPr/>
+          <p:nvPr/>
+        </p:nvSpPr>
+        <p:spPr>
+          <a:xfrm>
+            <a:off x="5797149" y="1343926"/>
+            <a:ext cx="6010497" cy="4837658"/>
+          </a:xfrm>
+          <a:prstGeom prst="roundRect">
+            <a:avLst>
+              <a:gd name="adj" fmla="val 4000"/>
+            </a:avLst>
+          </a:prstGeom>
+          <a:solidFill>
+            <a:srgbClr val="E8EEF4"/>
+          </a:solidFill>
+          <a:ln>
+            <a:noFill/>
+          </a:ln>
+        </p:spPr>
+        <p:style>
+          <a:lnRef idx="1">
+            <a:schemeClr val="accent1"/>
+          </a:lnRef>
+          <a:fillRef idx="3">
+            <a:schemeClr val="accent1"/>
+          </a:fillRef>
+          <a:effectRef idx="2">
+            <a:schemeClr val="accent1"/>
+          </a:effectRef>
+          <a:fontRef idx="minor">
+            <a:schemeClr val="lt1"/>
+          </a:fontRef>
+        </p:style>
+        <p:txBody>
+          <a:bodyPr rtlCol="0" anchor="ctr"/>
+          <a:lstStyle/>
+          <a:p>
+            <a:pPr algn="ctr"/>
+          </a:p>
+        </p:txBody>
+      </p:sp>
+      <p:pic>
+        <p:nvPicPr>
+          <p:cNvPr id="6" name="Picture 5" descr="ilus-practica-profesional-paso1.png"/>
+          <p:cNvPicPr>
+            <a:picLocks noChangeAspect="1"/>
+          </p:cNvPicPr>
+          <p:nvPr/>
+        </p:nvPicPr>
+        <p:blipFill>
+          <a:blip r:embed="rId2"/>
+          <a:stretch>
+            <a:fillRect/>
+          </a:stretch>
+        </p:blipFill>
+        <p:spPr>
+          <a:xfrm>
+            <a:off x="5870301" y="1417078"/>
+            <a:ext cx="5864193" cy="4691354"/>
+          </a:xfrm>
+          <a:prstGeom prst="rect">
+            <a:avLst/>
+          </a:prstGeom>
+        </p:spPr>
+      </p:pic>
+      <p:sp>
+        <p:nvSpPr>
+          <p:cNvPr id="7" name="TextBox 6"/>
           <p:cNvSpPr txBox="1"/>
           <p:nvPr/>
         </p:nvSpPr>
         <p:spPr>
           <a:xfrm>
-            <a:off x="457200" y="1170432"/>
-            <a:ext cx="11277295" cy="5230368"/>
+            <a:off x="457200" y="1353312"/>
+            <a:ext cx="5093061" cy="5047488"/>
           </a:xfrm>
           <a:prstGeom prst="rect">
             <a:avLst/>
@@ -4948,14 +5041,14 @@
                 </a:solidFill>
                 <a:latin typeface="Calibri"/>
               </a:rPr>
-              <a:t>–   La frase de cierre util es que arquitectura no es una lista de logos de proveedores, sino un conjunto de decisiones documentadas con sus consecuencias.</a:t>
-            </a:r>
-          </a:p>
-        </p:txBody>
-      </p:sp>
-      <p:sp>
-        <p:nvSpPr>
-          <p:cNvPr id="6" name="TextBox 5"/>
+              <a:t>–   La frase de cierre util es que arquitectura no es una lista de logos de proveedores, sino un conjunto de decisiones documentadas con sus…</a:t>
+            </a:r>
+          </a:p>
+        </p:txBody>
+      </p:sp>
+      <p:sp>
+        <p:nvSpPr>
+          <p:cNvPr id="8" name="TextBox 7"/>
           <p:cNvSpPr txBox="1"/>
           <p:nvPr/>
         </p:nvSpPr>
@@ -8162,14 +8255,83 @@
       </p:sp>
       <p:sp>
         <p:nvSpPr>
-          <p:cNvPr id="5" name="TextBox 4"/>
+          <p:cNvPr id="5" name="Rounded Rectangle 4"/>
+          <p:cNvSpPr/>
+          <p:nvPr/>
+        </p:nvSpPr>
+        <p:spPr>
+          <a:xfrm>
+            <a:off x="5797149" y="1343926"/>
+            <a:ext cx="6010497" cy="4837658"/>
+          </a:xfrm>
+          <a:prstGeom prst="roundRect">
+            <a:avLst>
+              <a:gd name="adj" fmla="val 4000"/>
+            </a:avLst>
+          </a:prstGeom>
+          <a:solidFill>
+            <a:srgbClr val="E8EEF4"/>
+          </a:solidFill>
+          <a:ln>
+            <a:noFill/>
+          </a:ln>
+        </p:spPr>
+        <p:style>
+          <a:lnRef idx="1">
+            <a:schemeClr val="accent1"/>
+          </a:lnRef>
+          <a:fillRef idx="3">
+            <a:schemeClr val="accent1"/>
+          </a:fillRef>
+          <a:effectRef idx="2">
+            <a:schemeClr val="accent1"/>
+          </a:effectRef>
+          <a:fontRef idx="minor">
+            <a:schemeClr val="lt1"/>
+          </a:fontRef>
+        </p:style>
+        <p:txBody>
+          <a:bodyPr rtlCol="0" anchor="ctr"/>
+          <a:lstStyle/>
+          <a:p>
+            <a:pPr algn="ctr"/>
+          </a:p>
+        </p:txBody>
+      </p:sp>
+      <p:pic>
+        <p:nvPicPr>
+          <p:cNvPr id="6" name="Picture 5" descr="ilus-adr-cita-paso1.png"/>
+          <p:cNvPicPr>
+            <a:picLocks noChangeAspect="1"/>
+          </p:cNvPicPr>
+          <p:nvPr/>
+        </p:nvPicPr>
+        <p:blipFill>
+          <a:blip r:embed="rId2"/>
+          <a:stretch>
+            <a:fillRect/>
+          </a:stretch>
+        </p:blipFill>
+        <p:spPr>
+          <a:xfrm>
+            <a:off x="5870301" y="1417078"/>
+            <a:ext cx="5864193" cy="4691354"/>
+          </a:xfrm>
+          <a:prstGeom prst="rect">
+            <a:avLst/>
+          </a:prstGeom>
+        </p:spPr>
+      </p:pic>
+      <p:sp>
+        <p:nvSpPr>
+          <p:cNvPr id="7" name="TextBox 6"/>
           <p:cNvSpPr txBox="1"/>
           <p:nvPr/>
         </p:nvSpPr>
         <p:spPr>
           <a:xfrm>
-            <a:off x="457200" y="1170432"/>
-            <a:ext cx="11277295" cy="5230368"/>
+            <a:off x="457200" y="1353312"/>
+            <a:ext cx="5093061" cy="5047488"/>
           </a:xfrm>
           <a:prstGeom prst="rect">
             <a:avLst/>
@@ -8233,7 +8395,7 @@
       </p:sp>
       <p:sp>
         <p:nvSpPr>
-          <p:cNvPr id="6" name="TextBox 5"/>
+          <p:cNvPr id="8" name="TextBox 7"/>
           <p:cNvSpPr txBox="1"/>
           <p:nvPr/>
         </p:nvSpPr>
@@ -8893,14 +9055,83 @@
       </p:sp>
       <p:sp>
         <p:nvSpPr>
-          <p:cNvPr id="5" name="TextBox 4"/>
+          <p:cNvPr id="5" name="Rounded Rectangle 4"/>
+          <p:cNvSpPr/>
+          <p:nvPr/>
+        </p:nvSpPr>
+        <p:spPr>
+          <a:xfrm>
+            <a:off x="5797149" y="1343926"/>
+            <a:ext cx="6010497" cy="4837658"/>
+          </a:xfrm>
+          <a:prstGeom prst="roundRect">
+            <a:avLst>
+              <a:gd name="adj" fmla="val 4000"/>
+            </a:avLst>
+          </a:prstGeom>
+          <a:solidFill>
+            <a:srgbClr val="E8EEF4"/>
+          </a:solidFill>
+          <a:ln>
+            <a:noFill/>
+          </a:ln>
+        </p:spPr>
+        <p:style>
+          <a:lnRef idx="1">
+            <a:schemeClr val="accent1"/>
+          </a:lnRef>
+          <a:fillRef idx="3">
+            <a:schemeClr val="accent1"/>
+          </a:fillRef>
+          <a:effectRef idx="2">
+            <a:schemeClr val="accent1"/>
+          </a:effectRef>
+          <a:fontRef idx="minor">
+            <a:schemeClr val="lt1"/>
+          </a:fontRef>
+        </p:style>
+        <p:txBody>
+          <a:bodyPr rtlCol="0" anchor="ctr"/>
+          <a:lstStyle/>
+          <a:p>
+            <a:pPr algn="ctr"/>
+          </a:p>
+        </p:txBody>
+      </p:sp>
+      <p:pic>
+        <p:nvPicPr>
+          <p:cNvPr id="6" name="Picture 5" descr="ilus-regla-60-paso1.png"/>
+          <p:cNvPicPr>
+            <a:picLocks noChangeAspect="1"/>
+          </p:cNvPicPr>
+          <p:nvPr/>
+        </p:nvPicPr>
+        <p:blipFill>
+          <a:blip r:embed="rId2"/>
+          <a:stretch>
+            <a:fillRect/>
+          </a:stretch>
+        </p:blipFill>
+        <p:spPr>
+          <a:xfrm>
+            <a:off x="5870301" y="1417078"/>
+            <a:ext cx="5864193" cy="4691354"/>
+          </a:xfrm>
+          <a:prstGeom prst="rect">
+            <a:avLst/>
+          </a:prstGeom>
+        </p:spPr>
+      </p:pic>
+      <p:sp>
+        <p:nvSpPr>
+          <p:cNvPr id="7" name="TextBox 6"/>
           <p:cNvSpPr txBox="1"/>
           <p:nvPr/>
         </p:nvSpPr>
         <p:spPr>
           <a:xfrm>
-            <a:off x="457200" y="1170432"/>
-            <a:ext cx="11277295" cy="5230368"/>
+            <a:off x="457200" y="1353312"/>
+            <a:ext cx="5093061" cy="5047488"/>
           </a:xfrm>
           <a:prstGeom prst="rect">
             <a:avLst/>
@@ -8948,7 +9179,7 @@
       </p:sp>
       <p:sp>
         <p:nvSpPr>
-          <p:cNvPr id="6" name="TextBox 5"/>
+          <p:cNvPr id="8" name="TextBox 7"/>
           <p:cNvSpPr txBox="1"/>
           <p:nvPr/>
         </p:nvSpPr>

--- a/Arquitectura de Sistemas Computacionales/Clases/Clase 15 - Presentacion del proyecto y cierre/Presentacion.pptx
+++ b/Arquitectura de Sistemas Computacionales/Clases/Clase 15 - Presentacion del proyecto y cierre/Presentacion.pptx
@@ -1230,7 +1230,7 @@
           <a:p/>
           <a:p>
             <a:r>
-              <a:t>(No se proyecta) El Q&amp;A tecnico tiene tres tipos de pregunta y conviene que el docente los reconozca para dosificarlos.</a:t>
+              <a:t>(No se proyecta) El Q&amp;A tecnico tiene tres tipos de pregunta y conviene que el docente los reconozca para repartirlos bien.</a:t>
             </a:r>
           </a:p>
           <a:p/>
